--- a/audio_scenario/一首歌三个操作_场景演示稿.pptx
+++ b/audio_scenario/一首歌三个操作_场景演示稿.pptx
@@ -2,18 +2,20 @@
 <file path=ppt/presentation.xml><?xml version="1.0" encoding="utf-8"?>
 <p:presentation xmlns:p="http://schemas.openxmlformats.org/presentationml/2006/main">
   <p:sldMasterIdLst>
-    <p:sldMasterId xmlns:r="http://schemas.openxmlformats.org/officeDocument/2006/relationships" id="2147483648" r:id="Rc532f201bfe34854"/>
+    <p:sldMasterId xmlns:r="http://schemas.openxmlformats.org/officeDocument/2006/relationships" id="2147483648" r:id="R63624fe74b024d6f"/>
   </p:sldMasterIdLst>
   <p:notesMasterIdLst>
-    <p:notesMasterId xmlns:r="http://schemas.openxmlformats.org/officeDocument/2006/relationships" r:id="Rb0762e907fcf4d81"/>
+    <p:notesMasterId xmlns:r="http://schemas.openxmlformats.org/officeDocument/2006/relationships" r:id="R507af92909e84d43"/>
   </p:notesMasterIdLst>
   <p:sldIdLst>
-    <p:sldId xmlns:r="http://schemas.openxmlformats.org/officeDocument/2006/relationships" id="256" r:id="R5815b470f1f74c7f"/>
-    <p:sldId xmlns:r="http://schemas.openxmlformats.org/officeDocument/2006/relationships" id="257" r:id="R57911dc39a0741a8"/>
-    <p:sldId xmlns:r="http://schemas.openxmlformats.org/officeDocument/2006/relationships" id="258" r:id="Rf654f3c4e2084ace"/>
-    <p:sldId xmlns:r="http://schemas.openxmlformats.org/officeDocument/2006/relationships" id="259" r:id="R3a7eed1339b64042"/>
-    <p:sldId xmlns:r="http://schemas.openxmlformats.org/officeDocument/2006/relationships" id="260" r:id="R3b83a82e3d1645ff"/>
-    <p:sldId xmlns:r="http://schemas.openxmlformats.org/officeDocument/2006/relationships" id="261" r:id="R6bfa2deda9a942b0"/>
+    <p:sldId xmlns:r="http://schemas.openxmlformats.org/officeDocument/2006/relationships" id="256" r:id="Rb87c9a3b0c3843ab"/>
+    <p:sldId xmlns:r="http://schemas.openxmlformats.org/officeDocument/2006/relationships" id="257" r:id="R36bfd2f93a264d5c"/>
+    <p:sldId xmlns:r="http://schemas.openxmlformats.org/officeDocument/2006/relationships" id="258" r:id="R9d512eb4299a47b2"/>
+    <p:sldId xmlns:r="http://schemas.openxmlformats.org/officeDocument/2006/relationships" id="259" r:id="R1a4292aee8f341f2"/>
+    <p:sldId xmlns:r="http://schemas.openxmlformats.org/officeDocument/2006/relationships" id="260" r:id="R43f557087d7f466e"/>
+    <p:sldId xmlns:r="http://schemas.openxmlformats.org/officeDocument/2006/relationships" id="261" r:id="Rfaf6a8218c244492"/>
+    <p:sldId xmlns:r="http://schemas.openxmlformats.org/officeDocument/2006/relationships" id="262" r:id="Rc1dfeda3f6ed4773"/>
+    <p:sldId xmlns:r="http://schemas.openxmlformats.org/officeDocument/2006/relationships" id="263" r:id="Rc2e0ce94e9a443e2"/>
   </p:sldIdLst>
   <p:sldSz cx="12192000" cy="6858000"/>
   <p:notesSz cx="6858000" cy="9144000"/>
@@ -492,7 +494,7 @@
           </a:p>
           <a:p xmlns:a="http://schemas.openxmlformats.org/drawingml/2006/main">
             <a:r>
-              <a:t>真实引擎这三步一步都不敢做。接下来三页，把这三个朴素做法逐个推翻，看引擎实际做了什么。</a:t>
+              <a:t>真实引擎这三步一步都不敢做。接下来，把这三个朴素做法逐个推翻，先看引擎做了什么，再看它把保证写在了哪里。</a:t>
             </a:r>
           </a:p>
           <a:p xmlns:a="http://schemas.openxmlformats.org/drawingml/2006/main">
@@ -527,17 +529,17 @@
           </a:p>
           <a:p xmlns:a="http://schemas.openxmlformats.org/drawingml/2006/main">
             <a:r>
-              <a:t>https://gitcode.com/openharmony/multimedia_audio_framework/blob/3a2688e805df970739e3b0cebf9cc05d8cb24e9b/services/audio_engine/manager/src/hpae_renderer_manager.cpp#L919</a:t>
-            </a:r>
-          </a:p>
-          <a:p xmlns:a="http://schemas.openxmlformats.org/drawingml/2006/main">
-            <a:r>
-              <a:t>https://gitcode.com/openharmony/multimedia_audio_framework/blob/3a2688e805df970739e3b0cebf9cc05d8cb24e9b/services/audio_engine/manager/src/hpae_renderer_manager.cpp#L1110</a:t>
-            </a:r>
-          </a:p>
-          <a:p xmlns:a="http://schemas.openxmlformats.org/drawingml/2006/main">
-            <a:r>
-              <a:t>https://gitcode.com/openharmony/multimedia_audio_framework/blob/3a2688e805df970739e3b0cebf9cc05d8cb24e9b/services/audio_engine/manager/src/hpae_renderer_manager.cpp#L872</a:t>
+              <a:t>https://gitcode.com/openharmony/multimedia_audio_framework/blob/0d073de5a30f33ab6716d9abd481d76eca843741/services/audio_engine/manager/src/hpae_renderer_manager.cpp#L919</a:t>
+            </a:r>
+          </a:p>
+          <a:p xmlns:a="http://schemas.openxmlformats.org/drawingml/2006/main">
+            <a:r>
+              <a:t>https://gitcode.com/openharmony/multimedia_audio_framework/blob/0d073de5a30f33ab6716d9abd481d76eca843741/services/audio_engine/manager/src/hpae_renderer_manager.cpp#L1110</a:t>
+            </a:r>
+          </a:p>
+          <a:p xmlns:a="http://schemas.openxmlformats.org/drawingml/2006/main">
+            <a:r>
+              <a:t>https://gitcode.com/openharmony/multimedia_audio_framework/blob/0d073de5a30f33ab6716d9abd481d76eca843741/services/audio_engine/manager/src/hpae_renderer_manager.cpp#L872</a:t>
             </a:r>
           </a:p>
         </p:txBody>
@@ -687,17 +689,22 @@
           </a:p>
           <a:p xmlns:a="http://schemas.openxmlformats.org/drawingml/2006/main">
             <a:r>
-              <a:t>https://gitcode.com/openharmony/multimedia_audio_framework/blob/3a2688e805df970739e3b0cebf9cc05d8cb24e9b/services/audio_engine/manager/src/hpae_renderer_manager.cpp#L1110</a:t>
-            </a:r>
-          </a:p>
-          <a:p xmlns:a="http://schemas.openxmlformats.org/drawingml/2006/main">
-            <a:r>
-              <a:t>https://gitcode.com/openharmony/multimedia_audio_framework/blob/3a2688e805df970739e3b0cebf9cc05d8cb24e9b/services/audio_engine/manager/src/hpae_renderer_manager.cpp#L1777</a:t>
-            </a:r>
-          </a:p>
-          <a:p xmlns:a="http://schemas.openxmlformats.org/drawingml/2006/main">
-            <a:r>
-              <a:t>https://gitcode.com/openharmony/multimedia_audio_framework/blob/3a2688e805df970739e3b0cebf9cc05d8cb24e9b/services/audio_engine/manager/src/hpae_renderer_manager.cpp#L1868</a:t>
+              <a:t>https://gitcode.com/openharmony/multimedia_audio_framework/blob/0d073de5a30f33ab6716d9abd481d76eca843741/services/audio_engine/manager/src/hpae_renderer_manager.cpp#L1110</a:t>
+            </a:r>
+          </a:p>
+          <a:p xmlns:a="http://schemas.openxmlformats.org/drawingml/2006/main">
+            <a:r>
+              <a:t>https://gitcode.com/openharmony/multimedia_audio_framework/blob/0d073de5a30f33ab6716d9abd481d76eca843741/services/audio_engine/manager/src/hpae_renderer_manager.cpp#L1777</a:t>
+            </a:r>
+          </a:p>
+          <a:p xmlns:a="http://schemas.openxmlformats.org/drawingml/2006/main">
+            <a:r>
+              <a:t>https://gitcode.com/openharmony/multimedia_audio_framework/blob/0d073de5a30f33ab6716d9abd481d76eca843741/services/audio_engine/manager/src/hpae_renderer_manager.cpp#L1868</a:t>
+            </a:r>
+          </a:p>
+          <a:p xmlns:a="http://schemas.openxmlformats.org/drawingml/2006/main">
+            <a:r>
+              <a:t>https://gitcode.com/openharmony/multimedia_audio_framework/blob/0d073de5a30f33ab6716d9abd481d76eca843741/services/audio_engine/node/src/hpae_gain_node.cpp#L253</a:t>
             </a:r>
           </a:p>
         </p:txBody>
@@ -847,12 +854,12 @@
           </a:p>
           <a:p xmlns:a="http://schemas.openxmlformats.org/drawingml/2006/main">
             <a:r>
-              <a:t>https://gitcode.com/openharmony/multimedia_audio_framework/blob/3a2688e805df970739e3b0cebf9cc05d8cb24e9b/services/audio_engine/manager/src/hpae_renderer_manager.cpp#L919</a:t>
-            </a:r>
-          </a:p>
-          <a:p xmlns:a="http://schemas.openxmlformats.org/drawingml/2006/main">
-            <a:r>
-              <a:t>https://gitcode.com/openharmony/multimedia_audio_framework/blob/3a2688e805df970739e3b0cebf9cc05d8cb24e9b/services/audio_engine/manager/src/hpae_renderer_manager.cpp#L1777</a:t>
+              <a:t>https://gitcode.com/openharmony/multimedia_audio_framework/blob/0d073de5a30f33ab6716d9abd481d76eca843741/services/audio_engine/manager/src/hpae_renderer_manager.cpp#L919</a:t>
+            </a:r>
+          </a:p>
+          <a:p xmlns:a="http://schemas.openxmlformats.org/drawingml/2006/main">
+            <a:r>
+              <a:t>https://gitcode.com/openharmony/multimedia_audio_framework/blob/0d073de5a30f33ab6716d9abd481d76eca843741/services/audio_engine/manager/src/hpae_renderer_manager.cpp#L1777</a:t>
             </a:r>
           </a:p>
         </p:txBody>
@@ -1002,7 +1009,12 @@
           </a:p>
           <a:p xmlns:a="http://schemas.openxmlformats.org/drawingml/2006/main">
             <a:r>
-              <a:t>https://gitcode.com/openharmony/multimedia_audio_framework/blob/3a2688e805df970739e3b0cebf9cc05d8cb24e9b/services/audio_engine/manager/src/hpae_renderer_manager.cpp#L919</a:t>
+              <a:t>https://gitcode.com/openharmony/multimedia_audio_framework/blob/0d073de5a30f33ab6716d9abd481d76eca843741/services/audio_engine/manager/src/hpae_renderer_manager.cpp#L919</a:t>
+            </a:r>
+          </a:p>
+          <a:p xmlns:a="http://schemas.openxmlformats.org/drawingml/2006/main">
+            <a:r>
+              <a:t>https://gitcode.com/openharmony/multimedia_audio_framework/blob/0d073de5a30f33ab6716d9abd481d76eca843741/services/audio_engine/node/src/hpae_gain_node.cpp#L284</a:t>
             </a:r>
           </a:p>
         </p:txBody>
@@ -1127,7 +1139,7 @@
           </a:p>
           <a:p xmlns:a="http://schemas.openxmlformats.org/drawingml/2006/main">
             <a:r>
-              <a:t>摘旧连接、调参数、接新链，三个阶段，一个都不能省。</a:t>
+              <a:t>摘旧连接、调参数、接新链，三个阶段，一个都不能省。至于这些动作由谁、在哪条线程上执行——下一页见。</a:t>
             </a:r>
           </a:p>
           <a:p xmlns:a="http://schemas.openxmlformats.org/drawingml/2006/main">
@@ -1162,17 +1174,17 @@
           </a:p>
           <a:p xmlns:a="http://schemas.openxmlformats.org/drawingml/2006/main">
             <a:r>
-              <a:t>https://gitcode.com/openharmony/multimedia_audio_framework/blob/3a2688e805df970739e3b0cebf9cc05d8cb24e9b/services/audio_engine/manager/src/hpae_renderer_manager.cpp#L872</a:t>
-            </a:r>
-          </a:p>
-          <a:p xmlns:a="http://schemas.openxmlformats.org/drawingml/2006/main">
-            <a:r>
-              <a:t>https://gitcode.com/openharmony/multimedia_audio_framework/blob/3a2688e805df970739e3b0cebf9cc05d8cb24e9b/services/audio_engine/manager/src/hpae_renderer_manager.cpp#L114</a:t>
-            </a:r>
-          </a:p>
-          <a:p xmlns:a="http://schemas.openxmlformats.org/drawingml/2006/main">
-            <a:r>
-              <a:t>https://gitcode.com/openharmony/multimedia_audio_framework/blob/3a2688e805df970739e3b0cebf9cc05d8cb24e9b/services/audio_engine/manager/src/hpae_manager.cpp#L1181</a:t>
+              <a:t>https://gitcode.com/openharmony/multimedia_audio_framework/blob/0d073de5a30f33ab6716d9abd481d76eca843741/services/audio_engine/manager/src/hpae_renderer_manager.cpp#L872</a:t>
+            </a:r>
+          </a:p>
+          <a:p xmlns:a="http://schemas.openxmlformats.org/drawingml/2006/main">
+            <a:r>
+              <a:t>https://gitcode.com/openharmony/multimedia_audio_framework/blob/0d073de5a30f33ab6716d9abd481d76eca843741/services/audio_engine/manager/src/hpae_renderer_manager.cpp#L114</a:t>
+            </a:r>
+          </a:p>
+          <a:p xmlns:a="http://schemas.openxmlformats.org/drawingml/2006/main">
+            <a:r>
+              <a:t>https://gitcode.com/openharmony/multimedia_audio_framework/blob/0d073de5a30f33ab6716d9abd481d76eca843741/services/audio_engine/manager/src/hpae_manager.cpp#L1181</a:t>
             </a:r>
           </a:p>
         </p:txBody>
@@ -1242,6 +1254,386 @@
           <a:lstStyle xmlns:a="http://schemas.openxmlformats.org/drawingml/2006/main"/>
           <a:p xmlns:a="http://schemas.openxmlformats.org/drawingml/2006/main">
             <a:r>
+              <a:t>这些请求，谁来执行？</a:t>
+            </a:r>
+          </a:p>
+          <a:p xmlns:a="http://schemas.openxmlformats.org/drawingml/2006/main">
+            <a:r>
+              <a:t>时间：1.6分钟</a:t>
+            </a:r>
+          </a:p>
+          <a:p xmlns:a="http://schemas.openxmlformats.org/drawingml/2006/main">
+            <a:r>
+              <a:t>本页目标：这些请求，谁来执行？</a:t>
+            </a:r>
+          </a:p>
+          <a:p xmlns:a="http://schemas.openxmlformats.org/drawingml/2006/main">
+            <a:r>
+              <a:t>承接：音乐 A 始终表示同一路音乐播放会话</a:t>
+            </a:r>
+          </a:p>
+          <a:p xmlns:a="http://schemas.openxmlformats.org/drawingml/2006/main">
+            <a:r>
+              <a:t/>
+            </a:r>
+          </a:p>
+          <a:p xmlns:a="http://schemas.openxmlformats.org/drawingml/2006/main">
+            <a:r>
+              <a:t>前四页反复出现两个词：“排队”和“等待执行”。现在看它们的物理载体。</a:t>
+            </a:r>
+          </a:p>
+          <a:p xmlns:a="http://schemas.openxmlformats.org/drawingml/2006/main">
+            <a:r>
+              <a:t/>
+            </a:r>
+          </a:p>
+          <a:p xmlns:a="http://schemas.openxmlformats.org/drawingml/2006/main">
+            <a:r>
+              <a:t>每个控制动作——暂停、恢复、切设备，连淡出完成后的收尾——都被打包成一个小任务，丢进同一个队列。执行它们的是一条专用线程：被唤醒后，先把队列排空，把该办的控制动作办完；然后跑一轮音频处理。办完再睡，等下一次唤醒。</a:t>
+            </a:r>
+          </a:p>
+          <a:p xmlns:a="http://schemas.openxmlformats.org/drawingml/2006/main">
+            <a:r>
+              <a:t/>
+            </a:r>
+          </a:p>
+          <a:p xmlns:a="http://schemas.openxmlformats.org/drawingml/2006/main">
+            <a:r>
+              <a:t>这个安排有个直接好处：改处理图的人，就是跑数据的人。同一条线程串行，队列不需要锁，图变更不会跟数据处理撞车。</a:t>
+            </a:r>
+          </a:p>
+          <a:p xmlns:a="http://schemas.openxmlformats.org/drawingml/2006/main">
+            <a:r>
+              <a:t/>
+            </a:r>
+          </a:p>
+          <a:p xmlns:a="http://schemas.openxmlformats.org/drawingml/2006/main">
+            <a:r>
+              <a:t>还有一件事值得看清楚：淡出完成不是靠定时器猜的。处理链在真实数据上一帧帧把增益降下来，降到零的那一刻，就地发回一个“淡出完成”。这个回调本身也是一个请求，排到队尾等执行。前面说“声音没了”和“线拆了”是两个时刻，中间隔的就是这一趟排队。</a:t>
+            </a:r>
+          </a:p>
+          <a:p xmlns:a="http://schemas.openxmlformats.org/drawingml/2006/main">
+            <a:r>
+              <a:t/>
+            </a:r>
+          </a:p>
+          <a:p xmlns:a="http://schemas.openxmlformats.org/drawingml/2006/main">
+            <a:r>
+              <a:t>量级也有数：短淡出按 5 毫秒设计，默认淡出在一轮数据之内完成。都是毫秒级的事，但一步都省不掉。</a:t>
+            </a:r>
+          </a:p>
+          <a:p xmlns:a="http://schemas.openxmlformats.org/drawingml/2006/main">
+            <a:r>
+              <a:t/>
+            </a:r>
+          </a:p>
+          <a:p xmlns:a="http://schemas.openxmlformats.org/drawingml/2006/main">
+            <a:r>
+              <a:t>演示：初始只显示线程循环；第一次点击显示请求队列与流向；第二次点击显示免锁原因、淡出闭环与量级。</a:t>
+            </a:r>
+          </a:p>
+          <a:p xmlns:a="http://schemas.openxmlformats.org/drawingml/2006/main">
+            <a:r>
+              <a:t>讲述安排：先看初始图，再按鼠标逐步揭示。每次点击后沿编号指图解释。</a:t>
+            </a:r>
+          </a:p>
+          <a:p xmlns:a="http://schemas.openxmlformats.org/drawingml/2006/main">
+            <a:r>
+              <a:t>转场：</a:t>
+            </a:r>
+          </a:p>
+          <a:p xmlns:a="http://schemas.openxmlformats.org/drawingml/2006/main">
+            <a:r>
+              <a:t>技术边界：队列与线程按引擎结构示意；线程唤醒后先排空请求再跑一轮处理为源码逻辑，未做时延测量。短淡出常数见增益节点源码。</a:t>
+            </a:r>
+          </a:p>
+          <a:p xmlns:a="http://schemas.openxmlformats.org/drawingml/2006/main">
+            <a:r>
+              <a:t>源码与依据：</a:t>
+            </a:r>
+          </a:p>
+          <a:p xmlns:a="http://schemas.openxmlformats.org/drawingml/2006/main">
+            <a:r>
+              <a:t>https://gitcode.com/openharmony/multimedia_audio_framework/blob/0d073de5a30f33ab6716d9abd481d76eca843741/services/audio_engine/manager/src/hpae_renderer_manager.cpp#L1755</a:t>
+            </a:r>
+          </a:p>
+          <a:p xmlns:a="http://schemas.openxmlformats.org/drawingml/2006/main">
+            <a:r>
+              <a:t>https://gitcode.com/openharmony/multimedia_audio_framework/blob/0d073de5a30f33ab6716d9abd481d76eca843741/services/audio_engine/manager/src/hpae_signal_process_thread.cpp#L83</a:t>
+            </a:r>
+          </a:p>
+          <a:p xmlns:a="http://schemas.openxmlformats.org/drawingml/2006/main">
+            <a:r>
+              <a:t>https://gitcode.com/openharmony/multimedia_audio_framework/blob/0d073de5a30f33ab6716d9abd481d76eca843741/services/audio_engine/node/src/hpae_gain_node.cpp#L42</a:t>
+            </a:r>
+          </a:p>
+        </p:txBody>
+      </p:sp>
+      <p:sp>
+        <p:nvSpPr>
+          <p:cNvPr id="4" name="Slide Number Placeholder 3"/>
+          <p:cNvSpPr>
+            <a:spLocks xmlns:a="http://schemas.openxmlformats.org/drawingml/2006/main" noGrp="1"/>
+          </p:cNvSpPr>
+          <p:nvPr>
+            <p:ph type="sldNum" idx="5"/>
+          </p:nvPr>
+        </p:nvSpPr>
+        <p:spPr/>
+        <p:txBody>
+          <a:bodyPr xmlns:a="http://schemas.openxmlformats.org/drawingml/2006/main"/>
+          <a:lstStyle xmlns:a="http://schemas.openxmlformats.org/drawingml/2006/main"/>
+          <a:p xmlns:a="http://schemas.openxmlformats.org/drawingml/2006/main"/>
+        </p:txBody>
+      </p:sp>
+    </p:spTree>
+  </p:cSld>
+  <p:clrMapOvr>
+    <a:masterClrMapping xmlns:a="http://schemas.openxmlformats.org/drawingml/2006/main"/>
+  </p:clrMapOvr>
+</p:notes>
+</file>
+
+<file path=ppt/notesSlides/notesSlide7.xml><?xml version="1.0" encoding="utf-8"?>
+<p:notes xmlns:p="http://schemas.openxmlformats.org/presentationml/2006/main">
+  <p:cSld>
+    <p:spTree>
+      <p:nvGrpSpPr>
+        <p:cNvPr id="1" name=""/>
+        <p:cNvGrpSpPr/>
+        <p:nvPr/>
+      </p:nvGrpSpPr>
+      <p:grpSpPr>
+        <a:xfrm xmlns:a="http://schemas.openxmlformats.org/drawingml/2006/main"/>
+      </p:grpSpPr>
+      <p:sp>
+        <p:nvSpPr>
+          <p:cNvPr id="2" name="Slide Image Placeholder 1"/>
+          <p:cNvSpPr>
+            <a:spLocks xmlns:a="http://schemas.openxmlformats.org/drawingml/2006/main" noGrp="1"/>
+          </p:cNvSpPr>
+          <p:nvPr>
+            <p:ph type="sldImg" idx="0"/>
+          </p:nvPr>
+        </p:nvSpPr>
+        <p:spPr/>
+      </p:sp>
+      <p:sp>
+        <p:nvSpPr>
+          <p:cNvPr id="3" name="Notes Placeholder 2"/>
+          <p:cNvSpPr>
+            <a:spLocks xmlns:a="http://schemas.openxmlformats.org/drawingml/2006/main" noGrp="1"/>
+          </p:cNvSpPr>
+          <p:nvPr>
+            <p:ph type="body" idx="1"/>
+          </p:nvPr>
+        </p:nvSpPr>
+        <p:spPr/>
+        <p:txBody>
+          <a:bodyPr xmlns:a="http://schemas.openxmlformats.org/drawingml/2006/main"/>
+          <a:lstStyle xmlns:a="http://schemas.openxmlformats.org/drawingml/2006/main"/>
+          <a:p xmlns:a="http://schemas.openxmlformats.org/drawingml/2006/main">
+            <a:r>
+              <a:t>三个保证，落在代码的哪里？</a:t>
+            </a:r>
+          </a:p>
+          <a:p xmlns:a="http://schemas.openxmlformats.org/drawingml/2006/main">
+            <a:r>
+              <a:t>时间：1.8分钟</a:t>
+            </a:r>
+          </a:p>
+          <a:p xmlns:a="http://schemas.openxmlformats.org/drawingml/2006/main">
+            <a:r>
+              <a:t>本页目标：三个保证，落在代码的哪里？</a:t>
+            </a:r>
+          </a:p>
+          <a:p xmlns:a="http://schemas.openxmlformats.org/drawingml/2006/main">
+            <a:r>
+              <a:t>承接：音乐 A 始终表示同一路音乐播放会话</a:t>
+            </a:r>
+          </a:p>
+          <a:p xmlns:a="http://schemas.openxmlformats.org/drawingml/2006/main">
+            <a:r>
+              <a:t/>
+            </a:r>
+          </a:p>
+          <a:p xmlns:a="http://schemas.openxmlformats.org/drawingml/2006/main">
+            <a:r>
+              <a:t>把三个保证落到代码上看，每个都不大。</a:t>
+            </a:r>
+          </a:p>
+          <a:p xmlns:a="http://schemas.openxmlformats.org/drawingml/2006/main">
+            <a:r>
+              <a:t/>
+            </a:r>
+          </a:p>
+          <a:p xmlns:a="http://schemas.openxmlformats.org/drawingml/2006/main">
+            <a:r>
+              <a:t>暂停：渐变不靠外部定时器，挂在增益节点的状态机上，处理链每跑一轮就顺便执行一次，在真实数据上把增益从一降到零。做完，才回调收尾。</a:t>
+            </a:r>
+          </a:p>
+          <a:p xmlns:a="http://schemas.openxmlformats.org/drawingml/2006/main">
+            <a:r>
+              <a:t/>
+            </a:r>
+          </a:p>
+          <a:p xmlns:a="http://schemas.openxmlformats.org/drawingml/2006/main">
+            <a:r>
+              <a:t>恢复：恢复请求执行的第一步，就是把会话状态改成“运行中”，之后才接输入、挂淡入、启动音效。旧收尾执行时的第一行就是检查这个状态：已在运行，直接返回，不碰音效不碰输入。一次险情，一行检查。</a:t>
+            </a:r>
+          </a:p>
+          <a:p xmlns:a="http://schemas.openxmlformats.org/drawingml/2006/main">
+            <a:r>
+              <a:t/>
+            </a:r>
+          </a:p>
+          <a:p xmlns:a="http://schemas.openxmlformats.org/drawingml/2006/main">
+            <a:r>
+              <a:t>淡入时机：接通之后立刻挂淡入，然后才启动会话音效。代码注释写得直白：音效启动要花时间，预缓冲的数据会在“接通到挂淡入”的窗口里按全音量漏出去。先挂淡入，窗口就封住了。</a:t>
+            </a:r>
+          </a:p>
+          <a:p xmlns:a="http://schemas.openxmlformats.org/drawingml/2006/main">
+            <a:r>
+              <a:t/>
+            </a:r>
+          </a:p>
+          <a:p xmlns:a="http://schemas.openxmlformats.org/drawingml/2006/main">
+            <a:r>
+              <a:t>切耳机：输入节点带着自己的状态交接过去；目标侧拿到节点，先把设备信息改成自己，按自己的帧长和采样率调整处理粒度，最后只有“正在运行”的会话才接进新链。</a:t>
+            </a:r>
+          </a:p>
+          <a:p xmlns:a="http://schemas.openxmlformats.org/drawingml/2006/main">
+            <a:r>
+              <a:t/>
+            </a:r>
+          </a:p>
+          <a:p xmlns:a="http://schemas.openxmlformats.org/drawingml/2006/main">
+            <a:r>
+              <a:t>一个状态标志、一行状态检查、一个先后顺序、一次参数调整。复杂性摊开看，就是这些小东西的叠加。</a:t>
+            </a:r>
+          </a:p>
+          <a:p xmlns:a="http://schemas.openxmlformats.org/drawingml/2006/main">
+            <a:r>
+              <a:t/>
+            </a:r>
+          </a:p>
+          <a:p xmlns:a="http://schemas.openxmlformats.org/drawingml/2006/main">
+            <a:r>
+              <a:t>演示：第一次点击显示暂停与恢复的落点；第二次点击显示淡入时机与切耳机的落点。</a:t>
+            </a:r>
+          </a:p>
+          <a:p xmlns:a="http://schemas.openxmlformats.org/drawingml/2006/main">
+            <a:r>
+              <a:t>讲述安排：先看初始图，再按鼠标逐步揭示。每次点击后沿编号指图解释。</a:t>
+            </a:r>
+          </a:p>
+          <a:p xmlns:a="http://schemas.openxmlformats.org/drawingml/2006/main">
+            <a:r>
+              <a:t>转场：</a:t>
+            </a:r>
+          </a:p>
+          <a:p xmlns:a="http://schemas.openxmlformats.org/drawingml/2006/main">
+            <a:r>
+              <a:t>技术边界：行为与代码位置对应源码树当前主干；描述的是这一路径的行为，不构成对其他版本或分支的描述。</a:t>
+            </a:r>
+          </a:p>
+          <a:p xmlns:a="http://schemas.openxmlformats.org/drawingml/2006/main">
+            <a:r>
+              <a:t>源码与依据：</a:t>
+            </a:r>
+          </a:p>
+          <a:p xmlns:a="http://schemas.openxmlformats.org/drawingml/2006/main">
+            <a:r>
+              <a:t>https://gitcode.com/openharmony/multimedia_audio_framework/blob/0d073de5a30f33ab6716d9abd481d76eca843741/services/audio_engine/node/src/hpae_gain_node.cpp#L207</a:t>
+            </a:r>
+          </a:p>
+          <a:p xmlns:a="http://schemas.openxmlformats.org/drawingml/2006/main">
+            <a:r>
+              <a:t>https://gitcode.com/openharmony/multimedia_audio_framework/blob/0d073de5a30f33ab6716d9abd481d76eca843741/services/audio_engine/node/src/hpae_gain_node.cpp#L232</a:t>
+            </a:r>
+          </a:p>
+          <a:p xmlns:a="http://schemas.openxmlformats.org/drawingml/2006/main">
+            <a:r>
+              <a:t>https://gitcode.com/openharmony/multimedia_audio_framework/blob/0d073de5a30f33ab6716d9abd481d76eca843741/services/audio_engine/manager/src/hpae_renderer_manager.cpp#L919</a:t>
+            </a:r>
+          </a:p>
+          <a:p xmlns:a="http://schemas.openxmlformats.org/drawingml/2006/main">
+            <a:r>
+              <a:t>https://gitcode.com/openharmony/multimedia_audio_framework/blob/0d073de5a30f33ab6716d9abd481d76eca843741/services/audio_engine/manager/src/hpae_renderer_manager.cpp#L1777</a:t>
+            </a:r>
+          </a:p>
+          <a:p xmlns:a="http://schemas.openxmlformats.org/drawingml/2006/main">
+            <a:r>
+              <a:t>https://gitcode.com/openharmony/multimedia_audio_framework/blob/0d073de5a30f33ab6716d9abd481d76eca843741/services/audio_engine/manager/src/hpae_renderer_manager.cpp#L114</a:t>
+            </a:r>
+          </a:p>
+        </p:txBody>
+      </p:sp>
+      <p:sp>
+        <p:nvSpPr>
+          <p:cNvPr id="4" name="Slide Number Placeholder 3"/>
+          <p:cNvSpPr>
+            <a:spLocks xmlns:a="http://schemas.openxmlformats.org/drawingml/2006/main" noGrp="1"/>
+          </p:cNvSpPr>
+          <p:nvPr>
+            <p:ph type="sldNum" idx="5"/>
+          </p:nvPr>
+        </p:nvSpPr>
+        <p:spPr/>
+        <p:txBody>
+          <a:bodyPr xmlns:a="http://schemas.openxmlformats.org/drawingml/2006/main"/>
+          <a:lstStyle xmlns:a="http://schemas.openxmlformats.org/drawingml/2006/main"/>
+          <a:p xmlns:a="http://schemas.openxmlformats.org/drawingml/2006/main"/>
+        </p:txBody>
+      </p:sp>
+    </p:spTree>
+  </p:cSld>
+  <p:clrMapOvr>
+    <a:masterClrMapping xmlns:a="http://schemas.openxmlformats.org/drawingml/2006/main"/>
+  </p:clrMapOvr>
+</p:notes>
+</file>
+
+<file path=ppt/notesSlides/notesSlide8.xml><?xml version="1.0" encoding="utf-8"?>
+<p:notes xmlns:p="http://schemas.openxmlformats.org/presentationml/2006/main">
+  <p:cSld>
+    <p:spTree>
+      <p:nvGrpSpPr>
+        <p:cNvPr id="1" name=""/>
+        <p:cNvGrpSpPr/>
+        <p:nvPr/>
+      </p:nvGrpSpPr>
+      <p:grpSpPr>
+        <a:xfrm xmlns:a="http://schemas.openxmlformats.org/drawingml/2006/main"/>
+      </p:grpSpPr>
+      <p:sp>
+        <p:nvSpPr>
+          <p:cNvPr id="2" name="Slide Image Placeholder 1"/>
+          <p:cNvSpPr>
+            <a:spLocks xmlns:a="http://schemas.openxmlformats.org/drawingml/2006/main" noGrp="1"/>
+          </p:cNvSpPr>
+          <p:nvPr>
+            <p:ph type="sldImg" idx="0"/>
+          </p:nvPr>
+        </p:nvSpPr>
+        <p:spPr/>
+      </p:sp>
+      <p:sp>
+        <p:nvSpPr>
+          <p:cNvPr id="3" name="Notes Placeholder 2"/>
+          <p:cNvSpPr>
+            <a:spLocks xmlns:a="http://schemas.openxmlformats.org/drawingml/2006/main" noGrp="1"/>
+          </p:cNvSpPr>
+          <p:nvPr>
+            <p:ph type="body" idx="1"/>
+          </p:nvPr>
+        </p:nvSpPr>
+        <p:spPr/>
+        <p:txBody>
+          <a:bodyPr xmlns:a="http://schemas.openxmlformats.org/drawingml/2006/main"/>
+          <a:lstStyle xmlns:a="http://schemas.openxmlformats.org/drawingml/2006/main"/>
+          <a:p xmlns:a="http://schemas.openxmlformats.org/drawingml/2006/main">
+            <a:r>
               <a:t>再看这三个操作</a:t>
             </a:r>
           </a:p>
@@ -1297,7 +1689,7 @@
           </a:p>
           <a:p xmlns:a="http://schemas.openxmlformats.org/drawingml/2006/main">
             <a:r>
-              <a:t>时间、队列、状态、设备差异，再加耳朵，五样都得交代。三个操作背后那些复杂性，就是这五样换来的代价。</a:t>
+              <a:t>时间、队列、状态、设备差异，再加耳朵，五样都得交代。这一部分看到的，就是 HPAE 交的答卷：一条线程、一个队列，和几个落在具体位置的小保证。</a:t>
             </a:r>
           </a:p>
           <a:p xmlns:a="http://schemas.openxmlformats.org/drawingml/2006/main">
@@ -1307,7 +1699,7 @@
           </a:p>
           <a:p xmlns:a="http://schemas.openxmlformats.org/drawingml/2006/main">
             <a:r>
-              <a:t>五样都交代完，下一个问题自然浮出来：这么多事同时发生，线程、队列、缓冲该怎样组织？这正是下一部分比较 PA 和 HPAE 要回答的。</a:t>
+              <a:t>那么换一个引擎，同样的三个操作会是什么样？PA 是怎么组织这些事情的，跟这套做法差别在哪、各自换来什么？这就是下一部分的内容。</a:t>
             </a:r>
           </a:p>
           <a:p xmlns:a="http://schemas.openxmlformats.org/drawingml/2006/main">
@@ -1342,17 +1734,17 @@
           </a:p>
           <a:p xmlns:a="http://schemas.openxmlformats.org/drawingml/2006/main">
             <a:r>
-              <a:t>https://gitcode.com/openharmony/multimedia_audio_framework/blob/3a2688e805df970739e3b0cebf9cc05d8cb24e9b/services/audio_engine/manager/src/hpae_renderer_manager.cpp#L1110</a:t>
-            </a:r>
-          </a:p>
-          <a:p xmlns:a="http://schemas.openxmlformats.org/drawingml/2006/main">
-            <a:r>
-              <a:t>https://gitcode.com/openharmony/multimedia_audio_framework/blob/3a2688e805df970739e3b0cebf9cc05d8cb24e9b/services/audio_engine/manager/src/hpae_renderer_manager.cpp#L1777</a:t>
-            </a:r>
-          </a:p>
-          <a:p xmlns:a="http://schemas.openxmlformats.org/drawingml/2006/main">
-            <a:r>
-              <a:t>https://gitcode.com/openharmony/multimedia_audio_framework/blob/3a2688e805df970739e3b0cebf9cc05d8cb24e9b/services/audio_engine/manager/src/hpae_renderer_manager.cpp#L872</a:t>
+              <a:t>https://gitcode.com/openharmony/multimedia_audio_framework/blob/0d073de5a30f33ab6716d9abd481d76eca843741/services/audio_engine/manager/src/hpae_renderer_manager.cpp#L1755</a:t>
+            </a:r>
+          </a:p>
+          <a:p xmlns:a="http://schemas.openxmlformats.org/drawingml/2006/main">
+            <a:r>
+              <a:t>https://gitcode.com/openharmony/multimedia_audio_framework/blob/0d073de5a30f33ab6716d9abd481d76eca843741/services/audio_engine/manager/src/hpae_renderer_manager.cpp#L1110</a:t>
+            </a:r>
+          </a:p>
+          <a:p xmlns:a="http://schemas.openxmlformats.org/drawingml/2006/main">
+            <a:r>
+              <a:t>https://gitcode.com/openharmony/multimedia_audio_framework/blob/0d073de5a30f33ab6716d9abd481d76eca843741/services/audio_engine/manager/src/hpae_renderer_manager.cpp#L872</a:t>
             </a:r>
           </a:p>
         </p:txBody>
@@ -1399,7 +1791,7 @@
           <p:cNvPr id="3" name="Title">
             <a:extLst xmlns:a="http://schemas.openxmlformats.org/drawingml/2006/main">
               <a:ext uri="{FF2B5EF4-FFF2-40B4-BE49-F238E27FC236}">
-                <a16:creationId xmlns:a16="http://schemas.microsoft.com/office/drawing/2014/main" id="{9BA26707-8508-4878-9EF4-8764FD487049}"/>
+                <a16:creationId xmlns:a16="http://schemas.microsoft.com/office/drawing/2014/main" id="{1459D1AD-764E-40D6-86FA-750433709FC5}"/>
               </a:ext>
             </a:extLst>
           </p:cNvPr>
@@ -1556,7 +1948,7 @@
           <p:cNvPr id="2" name="Subtitle">
             <a:extLst xmlns:a="http://schemas.openxmlformats.org/drawingml/2006/main">
               <a:ext uri="{FF2B5EF4-FFF2-40B4-BE49-F238E27FC236}">
-                <a16:creationId xmlns:a16="http://schemas.microsoft.com/office/drawing/2014/main" id="{998DE5CD-795C-4813-8546-A46393BAD598}"/>
+                <a16:creationId xmlns:a16="http://schemas.microsoft.com/office/drawing/2014/main" id="{EAED2693-CEF8-4D38-BCC0-D4004086C9FB}"/>
               </a:ext>
             </a:extLst>
           </p:cNvPr>
@@ -1730,7 +2122,7 @@
           <p:cNvPr id="2" name="Section title">
             <a:extLst xmlns:a="http://schemas.openxmlformats.org/drawingml/2006/main">
               <a:ext uri="{FF2B5EF4-FFF2-40B4-BE49-F238E27FC236}">
-                <a16:creationId xmlns:a16="http://schemas.microsoft.com/office/drawing/2014/main" id="{D7EBE473-C35D-4E23-BF8D-B19252585476}"/>
+                <a16:creationId xmlns:a16="http://schemas.microsoft.com/office/drawing/2014/main" id="{12D24072-5438-43B9-BE79-B27911BBEEFA}"/>
               </a:ext>
             </a:extLst>
           </p:cNvPr>
@@ -1904,7 +2296,7 @@
           <p:cNvPr id="3" name="Title">
             <a:extLst xmlns:a="http://schemas.openxmlformats.org/drawingml/2006/main">
               <a:ext uri="{FF2B5EF4-FFF2-40B4-BE49-F238E27FC236}">
-                <a16:creationId xmlns:a16="http://schemas.microsoft.com/office/drawing/2014/main" id="{7F15C446-3491-4A59-A7C9-A0FE1E68904D}"/>
+                <a16:creationId xmlns:a16="http://schemas.microsoft.com/office/drawing/2014/main" id="{09273FBA-2DCF-445C-895E-09B6FAE68A00}"/>
               </a:ext>
             </a:extLst>
           </p:cNvPr>
@@ -2061,7 +2453,7 @@
           <p:cNvPr id="2" name="Body">
             <a:extLst xmlns:a="http://schemas.openxmlformats.org/drawingml/2006/main">
               <a:ext uri="{FF2B5EF4-FFF2-40B4-BE49-F238E27FC236}">
-                <a16:creationId xmlns:a16="http://schemas.microsoft.com/office/drawing/2014/main" id="{05C627A2-A935-48CA-AF54-62A1744A12DC}"/>
+                <a16:creationId xmlns:a16="http://schemas.microsoft.com/office/drawing/2014/main" id="{3DAB1C48-83A4-4626-9ED2-B3F47B702A6D}"/>
               </a:ext>
             </a:extLst>
           </p:cNvPr>
@@ -2235,7 +2627,7 @@
           <p:cNvPr id="4" name="Title">
             <a:extLst xmlns:a="http://schemas.openxmlformats.org/drawingml/2006/main">
               <a:ext uri="{FF2B5EF4-FFF2-40B4-BE49-F238E27FC236}">
-                <a16:creationId xmlns:a16="http://schemas.microsoft.com/office/drawing/2014/main" id="{B2778442-6389-47EF-910C-B7C99A90AA89}"/>
+                <a16:creationId xmlns:a16="http://schemas.microsoft.com/office/drawing/2014/main" id="{ADBD0715-BB01-40F5-AEF9-91C765ABBE80}"/>
               </a:ext>
             </a:extLst>
           </p:cNvPr>
@@ -2392,7 +2784,7 @@
           <p:cNvPr id="2" name="Left column">
             <a:extLst xmlns:a="http://schemas.openxmlformats.org/drawingml/2006/main">
               <a:ext uri="{FF2B5EF4-FFF2-40B4-BE49-F238E27FC236}">
-                <a16:creationId xmlns:a16="http://schemas.microsoft.com/office/drawing/2014/main" id="{6B1D75F4-A799-482D-A4E3-D2F2F5334370}"/>
+                <a16:creationId xmlns:a16="http://schemas.microsoft.com/office/drawing/2014/main" id="{74E3780C-B056-433B-B0DA-D893A5C77E05}"/>
               </a:ext>
             </a:extLst>
           </p:cNvPr>
@@ -2549,7 +2941,7 @@
           <p:cNvPr id="3" name="Right column">
             <a:extLst xmlns:a="http://schemas.openxmlformats.org/drawingml/2006/main">
               <a:ext uri="{FF2B5EF4-FFF2-40B4-BE49-F238E27FC236}">
-                <a16:creationId xmlns:a16="http://schemas.microsoft.com/office/drawing/2014/main" id="{3916A431-3646-4D7D-A21A-3DDDCC2CDA49}"/>
+                <a16:creationId xmlns:a16="http://schemas.microsoft.com/office/drawing/2014/main" id="{4832B806-825C-475A-A6E6-F01F3F6B9172}"/>
               </a:ext>
             </a:extLst>
           </p:cNvPr>
@@ -2723,7 +3115,7 @@
           <p:cNvPr id="3" name="Title">
             <a:extLst xmlns:a="http://schemas.openxmlformats.org/drawingml/2006/main">
               <a:ext uri="{FF2B5EF4-FFF2-40B4-BE49-F238E27FC236}">
-                <a16:creationId xmlns:a16="http://schemas.microsoft.com/office/drawing/2014/main" id="{8C5A122B-FFDC-4343-A320-3E3184B2357C}"/>
+                <a16:creationId xmlns:a16="http://schemas.microsoft.com/office/drawing/2014/main" id="{3739735A-2FCF-41CA-A88D-FC04D700C1B0}"/>
               </a:ext>
             </a:extLst>
           </p:cNvPr>
@@ -2880,7 +3272,7 @@
           <p:cNvPr id="2" name="Left column">
             <a:extLst xmlns:a="http://schemas.openxmlformats.org/drawingml/2006/main">
               <a:ext uri="{FF2B5EF4-FFF2-40B4-BE49-F238E27FC236}">
-                <a16:creationId xmlns:a16="http://schemas.microsoft.com/office/drawing/2014/main" id="{FB7CD8AD-338F-4981-95F9-14AB5B0C49B9}"/>
+                <a16:creationId xmlns:a16="http://schemas.microsoft.com/office/drawing/2014/main" id="{0CF8617A-BB26-4F61-B345-EE37040199FF}"/>
               </a:ext>
             </a:extLst>
           </p:cNvPr>
@@ -3075,12 +3467,12 @@
   </p:cSld>
   <p:clrMap bg1="lt1" tx1="dk1" bg2="lt2" tx2="dk2" accent1="accent1" accent2="accent2" accent3="accent3" accent4="accent4" accent5="accent5" accent6="accent6" hlink="hlink" folHlink="folHlink"/>
   <p:sldLayoutIdLst>
-    <p:sldLayoutId xmlns:r="http://schemas.openxmlformats.org/officeDocument/2006/relationships" id="2147483649" r:id="Ra4ff2ecfd6e04b99"/>
-    <p:sldLayoutId xmlns:r="http://schemas.openxmlformats.org/officeDocument/2006/relationships" id="2147483650" r:id="Re0f2ad985f9b4349"/>
-    <p:sldLayoutId xmlns:r="http://schemas.openxmlformats.org/officeDocument/2006/relationships" id="2147483651" r:id="R022da595af8f4306"/>
-    <p:sldLayoutId xmlns:r="http://schemas.openxmlformats.org/officeDocument/2006/relationships" id="2147483652" r:id="R48525536a6bd41fd"/>
-    <p:sldLayoutId xmlns:r="http://schemas.openxmlformats.org/officeDocument/2006/relationships" id="2147483653" r:id="R715ec4a58868485b"/>
-    <p:sldLayoutId xmlns:r="http://schemas.openxmlformats.org/officeDocument/2006/relationships" id="2147483654" r:id="R39ed94ca9f6c4412"/>
+    <p:sldLayoutId xmlns:r="http://schemas.openxmlformats.org/officeDocument/2006/relationships" id="2147483649" r:id="Rc8cb17f223a146ae"/>
+    <p:sldLayoutId xmlns:r="http://schemas.openxmlformats.org/officeDocument/2006/relationships" id="2147483650" r:id="Rfe17280f026147a2"/>
+    <p:sldLayoutId xmlns:r="http://schemas.openxmlformats.org/officeDocument/2006/relationships" id="2147483651" r:id="R3f4d1cb36074425a"/>
+    <p:sldLayoutId xmlns:r="http://schemas.openxmlformats.org/officeDocument/2006/relationships" id="2147483652" r:id="R16c42e245b704d5a"/>
+    <p:sldLayoutId xmlns:r="http://schemas.openxmlformats.org/officeDocument/2006/relationships" id="2147483653" r:id="R8007dc5891104c2b"/>
+    <p:sldLayoutId xmlns:r="http://schemas.openxmlformats.org/officeDocument/2006/relationships" id="2147483654" r:id="Rd2e228755c95403b"/>
   </p:sldLayoutIdLst>
   <p:txStyles>
     <p:titleStyle>
@@ -3631,7 +4023,7 @@
           <p:cNvPr id="68" name="object-0">
             <a:extLst xmlns:a="http://schemas.openxmlformats.org/drawingml/2006/main">
               <a:ext uri="{FF2B5EF4-FFF2-40B4-BE49-F238E27FC236}">
-                <a16:creationId xmlns:a16="http://schemas.microsoft.com/office/drawing/2014/main" id="{8DE0A0F8-B436-45F8-9FA3-0EDC3451DBB5}"/>
+                <a16:creationId xmlns:a16="http://schemas.microsoft.com/office/drawing/2014/main" id="{1F29B358-E65D-4564-B5B5-72EF81EB7B2C}"/>
               </a:ext>
             </a:extLst>
           </p:cNvPr>
@@ -3698,7 +4090,7 @@
           <p:cNvPr id="2" name="object-1">
             <a:extLst xmlns:a="http://schemas.openxmlformats.org/drawingml/2006/main">
               <a:ext uri="{FF2B5EF4-FFF2-40B4-BE49-F238E27FC236}">
-                <a16:creationId xmlns:a16="http://schemas.microsoft.com/office/drawing/2014/main" id="{404CC986-3FF5-440A-9B02-BB253302097A}"/>
+                <a16:creationId xmlns:a16="http://schemas.microsoft.com/office/drawing/2014/main" id="{BCFD3FEE-F87E-4B6D-9DF0-7A184A4379F6}"/>
               </a:ext>
             </a:extLst>
           </p:cNvPr>
@@ -3765,7 +4157,7 @@
           <p:cNvPr id="3" name="object-2">
             <a:extLst xmlns:a="http://schemas.openxmlformats.org/drawingml/2006/main">
               <a:ext uri="{FF2B5EF4-FFF2-40B4-BE49-F238E27FC236}">
-                <a16:creationId xmlns:a16="http://schemas.microsoft.com/office/drawing/2014/main" id="{3C22BF4D-2121-4FFD-A13E-4964C42639FB}"/>
+                <a16:creationId xmlns:a16="http://schemas.microsoft.com/office/drawing/2014/main" id="{9E8780AA-2287-4499-A5A9-FB6D991D768F}"/>
               </a:ext>
             </a:extLst>
           </p:cNvPr>
@@ -3796,7 +4188,7 @@
           <p:cNvPr id="4" name="object-3">
             <a:extLst xmlns:a="http://schemas.openxmlformats.org/drawingml/2006/main">
               <a:ext uri="{FF2B5EF4-FFF2-40B4-BE49-F238E27FC236}">
-                <a16:creationId xmlns:a16="http://schemas.microsoft.com/office/drawing/2014/main" id="{C1871AF2-7341-4818-B9E1-56EA6098F507}"/>
+                <a16:creationId xmlns:a16="http://schemas.microsoft.com/office/drawing/2014/main" id="{D69644B8-DE85-4ACF-9DDC-60B389F36E31}"/>
               </a:ext>
             </a:extLst>
           </p:cNvPr>
@@ -3863,7 +4255,7 @@
           <p:cNvPr id="5" name="object-4">
             <a:extLst xmlns:a="http://schemas.openxmlformats.org/drawingml/2006/main">
               <a:ext uri="{FF2B5EF4-FFF2-40B4-BE49-F238E27FC236}">
-                <a16:creationId xmlns:a16="http://schemas.microsoft.com/office/drawing/2014/main" id="{A100DC58-F7EC-4442-AE2C-80D06C7D6B94}"/>
+                <a16:creationId xmlns:a16="http://schemas.microsoft.com/office/drawing/2014/main" id="{8BC234B5-2FEB-472A-9B81-12E91731AAEB}"/>
               </a:ext>
             </a:extLst>
           </p:cNvPr>
@@ -3953,7 +4345,7 @@
           <p:cNvPr id="6" name="object-5">
             <a:extLst xmlns:a="http://schemas.openxmlformats.org/drawingml/2006/main">
               <a:ext uri="{FF2B5EF4-FFF2-40B4-BE49-F238E27FC236}">
-                <a16:creationId xmlns:a16="http://schemas.microsoft.com/office/drawing/2014/main" id="{865ECB64-B82D-4F72-B624-7E3A862C5381}"/>
+                <a16:creationId xmlns:a16="http://schemas.microsoft.com/office/drawing/2014/main" id="{79FF1FA4-23F5-45BF-A5AD-2E95CAECA9BC}"/>
               </a:ext>
             </a:extLst>
           </p:cNvPr>
@@ -3984,7 +4376,7 @@
           <p:cNvPr id="7" name="object-6">
             <a:extLst xmlns:a="http://schemas.openxmlformats.org/drawingml/2006/main">
               <a:ext uri="{FF2B5EF4-FFF2-40B4-BE49-F238E27FC236}">
-                <a16:creationId xmlns:a16="http://schemas.microsoft.com/office/drawing/2014/main" id="{D414F051-49A5-45D1-A4E6-DEA204CFB80C}"/>
+                <a16:creationId xmlns:a16="http://schemas.microsoft.com/office/drawing/2014/main" id="{E7DF7A07-EB1C-42E4-A661-402863E5E9A8}"/>
               </a:ext>
             </a:extLst>
           </p:cNvPr>
@@ -4015,7 +4407,7 @@
           <p:cNvPr id="8" name="object-7">
             <a:extLst xmlns:a="http://schemas.openxmlformats.org/drawingml/2006/main">
               <a:ext uri="{FF2B5EF4-FFF2-40B4-BE49-F238E27FC236}">
-                <a16:creationId xmlns:a16="http://schemas.microsoft.com/office/drawing/2014/main" id="{58F8502C-A20F-4A54-9476-BB51BE2D1F88}"/>
+                <a16:creationId xmlns:a16="http://schemas.microsoft.com/office/drawing/2014/main" id="{CFDD2B33-709D-4E92-8976-939C9CBFE262}"/>
               </a:ext>
             </a:extLst>
           </p:cNvPr>
@@ -4046,7 +4438,7 @@
           <p:cNvPr id="9" name="object-8">
             <a:extLst xmlns:a="http://schemas.openxmlformats.org/drawingml/2006/main">
               <a:ext uri="{FF2B5EF4-FFF2-40B4-BE49-F238E27FC236}">
-                <a16:creationId xmlns:a16="http://schemas.microsoft.com/office/drawing/2014/main" id="{09B5E547-207D-4E18-B5E7-CA4B945CBE4D}"/>
+                <a16:creationId xmlns:a16="http://schemas.microsoft.com/office/drawing/2014/main" id="{D943AE4C-31CA-4892-B191-BAADBAEC74E2}"/>
               </a:ext>
             </a:extLst>
           </p:cNvPr>
@@ -4077,7 +4469,7 @@
           <p:cNvPr id="10" name="object-9">
             <a:extLst xmlns:a="http://schemas.openxmlformats.org/drawingml/2006/main">
               <a:ext uri="{FF2B5EF4-FFF2-40B4-BE49-F238E27FC236}">
-                <a16:creationId xmlns:a16="http://schemas.microsoft.com/office/drawing/2014/main" id="{DEBF3BB3-6738-4488-B91B-972703BD7D10}"/>
+                <a16:creationId xmlns:a16="http://schemas.microsoft.com/office/drawing/2014/main" id="{8664D268-8688-4469-BD73-53E2F373B631}"/>
               </a:ext>
             </a:extLst>
           </p:cNvPr>
@@ -4108,7 +4500,7 @@
           <p:cNvPr id="11" name="object-10">
             <a:extLst xmlns:a="http://schemas.openxmlformats.org/drawingml/2006/main">
               <a:ext uri="{FF2B5EF4-FFF2-40B4-BE49-F238E27FC236}">
-                <a16:creationId xmlns:a16="http://schemas.microsoft.com/office/drawing/2014/main" id="{706023EB-AAD5-4403-929B-7C21C7A200E0}"/>
+                <a16:creationId xmlns:a16="http://schemas.microsoft.com/office/drawing/2014/main" id="{83005EA7-11DD-4F43-B909-1D5D26EB4B9A}"/>
               </a:ext>
             </a:extLst>
           </p:cNvPr>
@@ -4175,7 +4567,7 @@
           <p:cNvPr id="12" name="object-11">
             <a:extLst xmlns:a="http://schemas.openxmlformats.org/drawingml/2006/main">
               <a:ext uri="{FF2B5EF4-FFF2-40B4-BE49-F238E27FC236}">
-                <a16:creationId xmlns:a16="http://schemas.microsoft.com/office/drawing/2014/main" id="{04ADCF02-ECC1-4CFC-8BD8-D18D78B02C97}"/>
+                <a16:creationId xmlns:a16="http://schemas.microsoft.com/office/drawing/2014/main" id="{EE533D6F-56A8-4447-A877-DA3518341D9C}"/>
               </a:ext>
             </a:extLst>
           </p:cNvPr>
@@ -4206,7 +4598,7 @@
           <p:cNvPr id="13" name="object-12">
             <a:extLst xmlns:a="http://schemas.openxmlformats.org/drawingml/2006/main">
               <a:ext uri="{FF2B5EF4-FFF2-40B4-BE49-F238E27FC236}">
-                <a16:creationId xmlns:a16="http://schemas.microsoft.com/office/drawing/2014/main" id="{731518A8-E24D-4D80-BFD7-E6DBDDEBA34C}"/>
+                <a16:creationId xmlns:a16="http://schemas.microsoft.com/office/drawing/2014/main" id="{4AD42FB0-FBC7-45DC-B238-3A1BAB442F71}"/>
               </a:ext>
             </a:extLst>
           </p:cNvPr>
@@ -4273,7 +4665,7 @@
           <p:cNvPr id="14" name="object-13">
             <a:extLst xmlns:a="http://schemas.openxmlformats.org/drawingml/2006/main">
               <a:ext uri="{FF2B5EF4-FFF2-40B4-BE49-F238E27FC236}">
-                <a16:creationId xmlns:a16="http://schemas.microsoft.com/office/drawing/2014/main" id="{AE6E9329-2D9E-4F8E-B0EC-FB1D511D3F86}"/>
+                <a16:creationId xmlns:a16="http://schemas.microsoft.com/office/drawing/2014/main" id="{19F46BAC-BCA2-4077-817C-61537221BACE}"/>
               </a:ext>
             </a:extLst>
           </p:cNvPr>
@@ -4304,7 +4696,7 @@
           <p:cNvPr id="15" name="object-14">
             <a:extLst xmlns:a="http://schemas.openxmlformats.org/drawingml/2006/main">
               <a:ext uri="{FF2B5EF4-FFF2-40B4-BE49-F238E27FC236}">
-                <a16:creationId xmlns:a16="http://schemas.microsoft.com/office/drawing/2014/main" id="{3D65F6BC-3578-4236-AF62-9C05279325A4}"/>
+                <a16:creationId xmlns:a16="http://schemas.microsoft.com/office/drawing/2014/main" id="{9431C4EE-45E4-48AD-81CF-753693B0FB02}"/>
               </a:ext>
             </a:extLst>
           </p:cNvPr>
@@ -4371,7 +4763,7 @@
           <p:cNvPr id="16" name="object-15">
             <a:extLst xmlns:a="http://schemas.openxmlformats.org/drawingml/2006/main">
               <a:ext uri="{FF2B5EF4-FFF2-40B4-BE49-F238E27FC236}">
-                <a16:creationId xmlns:a16="http://schemas.microsoft.com/office/drawing/2014/main" id="{7CD87433-8607-4668-BEC2-0EE0AC4F227A}"/>
+                <a16:creationId xmlns:a16="http://schemas.microsoft.com/office/drawing/2014/main" id="{2FFFF8BD-520C-44BF-ACEF-A1B8F2A518B7}"/>
               </a:ext>
             </a:extLst>
           </p:cNvPr>
@@ -4438,7 +4830,7 @@
           <p:cNvPr id="17" name="line-16">
             <a:extLst xmlns:a="http://schemas.openxmlformats.org/drawingml/2006/main">
               <a:ext uri="{FF2B5EF4-FFF2-40B4-BE49-F238E27FC236}">
-                <a16:creationId xmlns:a16="http://schemas.microsoft.com/office/drawing/2014/main" id="{355A5F03-64C2-455A-AD43-86EE5232C9B4}"/>
+                <a16:creationId xmlns:a16="http://schemas.microsoft.com/office/drawing/2014/main" id="{DB88E4B4-3131-48AA-877C-FBE506D54CD3}"/>
               </a:ext>
             </a:extLst>
           </p:cNvPr>
@@ -4478,7 +4870,7 @@
           <p:cNvPr id="18" name="line-17">
             <a:extLst xmlns:a="http://schemas.openxmlformats.org/drawingml/2006/main">
               <a:ext uri="{FF2B5EF4-FFF2-40B4-BE49-F238E27FC236}">
-                <a16:creationId xmlns:a16="http://schemas.microsoft.com/office/drawing/2014/main" id="{61B3E49C-3FAE-4A68-83B7-DEB910735DF8}"/>
+                <a16:creationId xmlns:a16="http://schemas.microsoft.com/office/drawing/2014/main" id="{1BEA68A7-174C-4755-B818-1E9CD8F8A928}"/>
               </a:ext>
             </a:extLst>
           </p:cNvPr>
@@ -4518,7 +4910,7 @@
           <p:cNvPr id="19" name="line-18">
             <a:extLst xmlns:a="http://schemas.openxmlformats.org/drawingml/2006/main">
               <a:ext uri="{FF2B5EF4-FFF2-40B4-BE49-F238E27FC236}">
-                <a16:creationId xmlns:a16="http://schemas.microsoft.com/office/drawing/2014/main" id="{7C3ACB96-E338-4782-BF29-305BF194B20C}"/>
+                <a16:creationId xmlns:a16="http://schemas.microsoft.com/office/drawing/2014/main" id="{7D2A18D0-0FB6-43F5-9391-93135897B3DE}"/>
               </a:ext>
             </a:extLst>
           </p:cNvPr>
@@ -4558,7 +4950,7 @@
           <p:cNvPr id="20" name="line-19">
             <a:extLst xmlns:a="http://schemas.openxmlformats.org/drawingml/2006/main">
               <a:ext uri="{FF2B5EF4-FFF2-40B4-BE49-F238E27FC236}">
-                <a16:creationId xmlns:a16="http://schemas.microsoft.com/office/drawing/2014/main" id="{942BE446-0EE5-4612-B4CB-9D363AFFFD9F}"/>
+                <a16:creationId xmlns:a16="http://schemas.microsoft.com/office/drawing/2014/main" id="{95B80653-4D59-4A55-A426-42CE573E13D2}"/>
               </a:ext>
             </a:extLst>
           </p:cNvPr>
@@ -4598,7 +4990,7 @@
           <p:cNvPr id="21" name="line-20">
             <a:extLst xmlns:a="http://schemas.openxmlformats.org/drawingml/2006/main">
               <a:ext uri="{FF2B5EF4-FFF2-40B4-BE49-F238E27FC236}">
-                <a16:creationId xmlns:a16="http://schemas.microsoft.com/office/drawing/2014/main" id="{A7869CA3-024F-4170-95C7-9EA18E002991}"/>
+                <a16:creationId xmlns:a16="http://schemas.microsoft.com/office/drawing/2014/main" id="{E9F8F316-0FA6-420E-8405-132A96CA398D}"/>
               </a:ext>
             </a:extLst>
           </p:cNvPr>
@@ -4638,7 +5030,7 @@
           <p:cNvPr id="22" name="line-21">
             <a:extLst xmlns:a="http://schemas.openxmlformats.org/drawingml/2006/main">
               <a:ext uri="{FF2B5EF4-FFF2-40B4-BE49-F238E27FC236}">
-                <a16:creationId xmlns:a16="http://schemas.microsoft.com/office/drawing/2014/main" id="{7240A207-928D-43FB-B6C5-1D8B4A2834B9}"/>
+                <a16:creationId xmlns:a16="http://schemas.microsoft.com/office/drawing/2014/main" id="{304970C3-50BB-46DD-AEC8-256B713F692B}"/>
               </a:ext>
             </a:extLst>
           </p:cNvPr>
@@ -4678,7 +5070,7 @@
           <p:cNvPr id="23" name="line-22">
             <a:extLst xmlns:a="http://schemas.openxmlformats.org/drawingml/2006/main">
               <a:ext uri="{FF2B5EF4-FFF2-40B4-BE49-F238E27FC236}">
-                <a16:creationId xmlns:a16="http://schemas.microsoft.com/office/drawing/2014/main" id="{9F935AD1-88A6-4F90-A5F9-B9D339CDCFEA}"/>
+                <a16:creationId xmlns:a16="http://schemas.microsoft.com/office/drawing/2014/main" id="{2D9B0BFD-F103-4FCD-95F1-FA91F09A08C6}"/>
               </a:ext>
             </a:extLst>
           </p:cNvPr>
@@ -4718,7 +5110,7 @@
           <p:cNvPr id="24" name="line-23">
             <a:extLst xmlns:a="http://schemas.openxmlformats.org/drawingml/2006/main">
               <a:ext uri="{FF2B5EF4-FFF2-40B4-BE49-F238E27FC236}">
-                <a16:creationId xmlns:a16="http://schemas.microsoft.com/office/drawing/2014/main" id="{A0EE372F-84F0-4E9F-9431-8B8B913D8C57}"/>
+                <a16:creationId xmlns:a16="http://schemas.microsoft.com/office/drawing/2014/main" id="{1E24495D-3BC7-409C-A36A-1232B9B4F028}"/>
               </a:ext>
             </a:extLst>
           </p:cNvPr>
@@ -4758,7 +5150,7 @@
           <p:cNvPr id="25" name="line-24">
             <a:extLst xmlns:a="http://schemas.openxmlformats.org/drawingml/2006/main">
               <a:ext uri="{FF2B5EF4-FFF2-40B4-BE49-F238E27FC236}">
-                <a16:creationId xmlns:a16="http://schemas.microsoft.com/office/drawing/2014/main" id="{71596E5F-ADA9-4D0A-8C84-EDFE6ECE4182}"/>
+                <a16:creationId xmlns:a16="http://schemas.microsoft.com/office/drawing/2014/main" id="{B750F785-7C39-4671-9DBD-185FCA2EC698}"/>
               </a:ext>
             </a:extLst>
           </p:cNvPr>
@@ -4798,7 +5190,7 @@
           <p:cNvPr id="26" name="line-25">
             <a:extLst xmlns:a="http://schemas.openxmlformats.org/drawingml/2006/main">
               <a:ext uri="{FF2B5EF4-FFF2-40B4-BE49-F238E27FC236}">
-                <a16:creationId xmlns:a16="http://schemas.microsoft.com/office/drawing/2014/main" id="{FD2D4CA2-7DCB-4656-BB70-70C02F4551E6}"/>
+                <a16:creationId xmlns:a16="http://schemas.microsoft.com/office/drawing/2014/main" id="{9B7211DA-FC09-43B3-BB07-79C2B2D307DF}"/>
               </a:ext>
             </a:extLst>
           </p:cNvPr>
@@ -4838,7 +5230,7 @@
           <p:cNvPr id="27" name="line-26">
             <a:extLst xmlns:a="http://schemas.openxmlformats.org/drawingml/2006/main">
               <a:ext uri="{FF2B5EF4-FFF2-40B4-BE49-F238E27FC236}">
-                <a16:creationId xmlns:a16="http://schemas.microsoft.com/office/drawing/2014/main" id="{59A2F185-86F2-4FBE-B362-D5BE83A0B2FE}"/>
+                <a16:creationId xmlns:a16="http://schemas.microsoft.com/office/drawing/2014/main" id="{CE51DC62-D910-464D-B791-C46FDDFF1AFC}"/>
               </a:ext>
             </a:extLst>
           </p:cNvPr>
@@ -4878,7 +5270,7 @@
           <p:cNvPr id="28" name="line-27">
             <a:extLst xmlns:a="http://schemas.openxmlformats.org/drawingml/2006/main">
               <a:ext uri="{FF2B5EF4-FFF2-40B4-BE49-F238E27FC236}">
-                <a16:creationId xmlns:a16="http://schemas.microsoft.com/office/drawing/2014/main" id="{95CB458A-66CA-4C6C-8AE2-E8A5AD13B9DF}"/>
+                <a16:creationId xmlns:a16="http://schemas.microsoft.com/office/drawing/2014/main" id="{151D1865-E7FD-4899-90A5-C508E4D01346}"/>
               </a:ext>
             </a:extLst>
           </p:cNvPr>
@@ -4918,7 +5310,7 @@
           <p:cNvPr id="29" name="reveal1-object-28">
             <a:extLst xmlns:a="http://schemas.openxmlformats.org/drawingml/2006/main">
               <a:ext uri="{FF2B5EF4-FFF2-40B4-BE49-F238E27FC236}">
-                <a16:creationId xmlns:a16="http://schemas.microsoft.com/office/drawing/2014/main" id="{6713CA6D-DC21-4F27-99B7-D4DDD9BF073D}"/>
+                <a16:creationId xmlns:a16="http://schemas.microsoft.com/office/drawing/2014/main" id="{B05B2738-884D-421F-8974-0B824D7EA74D}"/>
               </a:ext>
             </a:extLst>
           </p:cNvPr>
@@ -4985,7 +5377,7 @@
           <p:cNvPr id="30" name="reveal1-line-29">
             <a:extLst xmlns:a="http://schemas.openxmlformats.org/drawingml/2006/main">
               <a:ext uri="{FF2B5EF4-FFF2-40B4-BE49-F238E27FC236}">
-                <a16:creationId xmlns:a16="http://schemas.microsoft.com/office/drawing/2014/main" id="{13BE076D-F665-4457-A084-DCD83F7D01E8}"/>
+                <a16:creationId xmlns:a16="http://schemas.microsoft.com/office/drawing/2014/main" id="{4EACFB8F-AD12-4980-ABCA-0EA37106040B}"/>
               </a:ext>
             </a:extLst>
           </p:cNvPr>
@@ -5025,7 +5417,7 @@
           <p:cNvPr id="31" name="reveal1-line-30">
             <a:extLst xmlns:a="http://schemas.openxmlformats.org/drawingml/2006/main">
               <a:ext uri="{FF2B5EF4-FFF2-40B4-BE49-F238E27FC236}">
-                <a16:creationId xmlns:a16="http://schemas.microsoft.com/office/drawing/2014/main" id="{DEF53B6E-80A3-42E8-9485-720586EE9F99}"/>
+                <a16:creationId xmlns:a16="http://schemas.microsoft.com/office/drawing/2014/main" id="{19A8084B-48D7-4B61-8400-95D52B070A50}"/>
               </a:ext>
             </a:extLst>
           </p:cNvPr>
@@ -5065,7 +5457,7 @@
           <p:cNvPr id="32" name="reveal1-line-31">
             <a:extLst xmlns:a="http://schemas.openxmlformats.org/drawingml/2006/main">
               <a:ext uri="{FF2B5EF4-FFF2-40B4-BE49-F238E27FC236}">
-                <a16:creationId xmlns:a16="http://schemas.microsoft.com/office/drawing/2014/main" id="{07A81AE3-2F28-41C0-ADFC-68A5D7576293}"/>
+                <a16:creationId xmlns:a16="http://schemas.microsoft.com/office/drawing/2014/main" id="{08239771-2979-4B1D-A3DE-958BE692557B}"/>
               </a:ext>
             </a:extLst>
           </p:cNvPr>
@@ -5105,7 +5497,7 @@
           <p:cNvPr id="33" name="reveal1-line-32">
             <a:extLst xmlns:a="http://schemas.openxmlformats.org/drawingml/2006/main">
               <a:ext uri="{FF2B5EF4-FFF2-40B4-BE49-F238E27FC236}">
-                <a16:creationId xmlns:a16="http://schemas.microsoft.com/office/drawing/2014/main" id="{CA917156-270F-4314-BED5-7C6019A4080D}"/>
+                <a16:creationId xmlns:a16="http://schemas.microsoft.com/office/drawing/2014/main" id="{ECFF0C0B-172C-442C-A2DD-5A268B134129}"/>
               </a:ext>
             </a:extLst>
           </p:cNvPr>
@@ -5145,7 +5537,7 @@
           <p:cNvPr id="34" name="reveal1-line-33">
             <a:extLst xmlns:a="http://schemas.openxmlformats.org/drawingml/2006/main">
               <a:ext uri="{FF2B5EF4-FFF2-40B4-BE49-F238E27FC236}">
-                <a16:creationId xmlns:a16="http://schemas.microsoft.com/office/drawing/2014/main" id="{CFAA83F6-621A-4BE1-B549-00A80FAE3FB9}"/>
+                <a16:creationId xmlns:a16="http://schemas.microsoft.com/office/drawing/2014/main" id="{3CDE16C3-247D-4D0F-A1A0-FA174D9A5629}"/>
               </a:ext>
             </a:extLst>
           </p:cNvPr>
@@ -5185,7 +5577,7 @@
           <p:cNvPr id="35" name="reveal1-line-34">
             <a:extLst xmlns:a="http://schemas.openxmlformats.org/drawingml/2006/main">
               <a:ext uri="{FF2B5EF4-FFF2-40B4-BE49-F238E27FC236}">
-                <a16:creationId xmlns:a16="http://schemas.microsoft.com/office/drawing/2014/main" id="{EA43D2F5-B838-4D8B-BE14-9E41A3069AE9}"/>
+                <a16:creationId xmlns:a16="http://schemas.microsoft.com/office/drawing/2014/main" id="{200FF2FB-968D-48E3-8FE5-8897B797C133}"/>
               </a:ext>
             </a:extLst>
           </p:cNvPr>
@@ -5225,7 +5617,7 @@
           <p:cNvPr id="36" name="reveal1-line-35">
             <a:extLst xmlns:a="http://schemas.openxmlformats.org/drawingml/2006/main">
               <a:ext uri="{FF2B5EF4-FFF2-40B4-BE49-F238E27FC236}">
-                <a16:creationId xmlns:a16="http://schemas.microsoft.com/office/drawing/2014/main" id="{22952697-F52D-436F-A6CD-E8C27192B6E2}"/>
+                <a16:creationId xmlns:a16="http://schemas.microsoft.com/office/drawing/2014/main" id="{B78D8596-9F5C-464F-BA05-07AC2B92C989}"/>
               </a:ext>
             </a:extLst>
           </p:cNvPr>
@@ -5265,7 +5657,7 @@
           <p:cNvPr id="37" name="reveal1-line-36">
             <a:extLst xmlns:a="http://schemas.openxmlformats.org/drawingml/2006/main">
               <a:ext uri="{FF2B5EF4-FFF2-40B4-BE49-F238E27FC236}">
-                <a16:creationId xmlns:a16="http://schemas.microsoft.com/office/drawing/2014/main" id="{9870E6EF-1508-46E0-99FB-F33562D8C843}"/>
+                <a16:creationId xmlns:a16="http://schemas.microsoft.com/office/drawing/2014/main" id="{3C874FE9-DCEA-4C1F-ADF4-51784E314BA6}"/>
               </a:ext>
             </a:extLst>
           </p:cNvPr>
@@ -5305,7 +5697,7 @@
           <p:cNvPr id="38" name="reveal1-object-37">
             <a:extLst xmlns:a="http://schemas.openxmlformats.org/drawingml/2006/main">
               <a:ext uri="{FF2B5EF4-FFF2-40B4-BE49-F238E27FC236}">
-                <a16:creationId xmlns:a16="http://schemas.microsoft.com/office/drawing/2014/main" id="{24E5B16C-485E-46D0-BC8F-C659B0464E0A}"/>
+                <a16:creationId xmlns:a16="http://schemas.microsoft.com/office/drawing/2014/main" id="{81FAD9B8-28AD-4894-92E1-EC45C2F993F2}"/>
               </a:ext>
             </a:extLst>
           </p:cNvPr>
@@ -5418,7 +5810,7 @@
           <p:cNvPr id="39" name="reveal2-object-38">
             <a:extLst xmlns:a="http://schemas.openxmlformats.org/drawingml/2006/main">
               <a:ext uri="{FF2B5EF4-FFF2-40B4-BE49-F238E27FC236}">
-                <a16:creationId xmlns:a16="http://schemas.microsoft.com/office/drawing/2014/main" id="{EB0C5BC7-EBC3-41CC-91AE-82DFDEF1A0E1}"/>
+                <a16:creationId xmlns:a16="http://schemas.microsoft.com/office/drawing/2014/main" id="{C1EEFDAB-1007-4B12-B592-BBF623109705}"/>
               </a:ext>
             </a:extLst>
           </p:cNvPr>
@@ -5485,7 +5877,7 @@
           <p:cNvPr id="40" name="reveal2-line-39">
             <a:extLst xmlns:a="http://schemas.openxmlformats.org/drawingml/2006/main">
               <a:ext uri="{FF2B5EF4-FFF2-40B4-BE49-F238E27FC236}">
-                <a16:creationId xmlns:a16="http://schemas.microsoft.com/office/drawing/2014/main" id="{DAF2FC45-2D76-431C-9ACA-73F29BD5E6B1}"/>
+                <a16:creationId xmlns:a16="http://schemas.microsoft.com/office/drawing/2014/main" id="{343100F3-1D7E-428A-986D-9271E78E2CF9}"/>
               </a:ext>
             </a:extLst>
           </p:cNvPr>
@@ -5525,7 +5917,7 @@
           <p:cNvPr id="41" name="reveal2-line-40">
             <a:extLst xmlns:a="http://schemas.openxmlformats.org/drawingml/2006/main">
               <a:ext uri="{FF2B5EF4-FFF2-40B4-BE49-F238E27FC236}">
-                <a16:creationId xmlns:a16="http://schemas.microsoft.com/office/drawing/2014/main" id="{87D949B1-517C-42ED-A84C-C37DFD30C780}"/>
+                <a16:creationId xmlns:a16="http://schemas.microsoft.com/office/drawing/2014/main" id="{0FBB9C5F-01BA-4E2F-8981-1ECFC670E0BF}"/>
               </a:ext>
             </a:extLst>
           </p:cNvPr>
@@ -5565,7 +5957,7 @@
           <p:cNvPr id="42" name="reveal2-line-41">
             <a:extLst xmlns:a="http://schemas.openxmlformats.org/drawingml/2006/main">
               <a:ext uri="{FF2B5EF4-FFF2-40B4-BE49-F238E27FC236}">
-                <a16:creationId xmlns:a16="http://schemas.microsoft.com/office/drawing/2014/main" id="{F405C421-AA6D-4996-9110-E1AE60AF0698}"/>
+                <a16:creationId xmlns:a16="http://schemas.microsoft.com/office/drawing/2014/main" id="{CD9103A6-64E5-4699-ACE8-4FB9C82C2F46}"/>
               </a:ext>
             </a:extLst>
           </p:cNvPr>
@@ -5605,7 +5997,7 @@
           <p:cNvPr id="43" name="reveal2-line-42">
             <a:extLst xmlns:a="http://schemas.openxmlformats.org/drawingml/2006/main">
               <a:ext uri="{FF2B5EF4-FFF2-40B4-BE49-F238E27FC236}">
-                <a16:creationId xmlns:a16="http://schemas.microsoft.com/office/drawing/2014/main" id="{C29255CC-4A14-405A-91E9-9F3ADB246993}"/>
+                <a16:creationId xmlns:a16="http://schemas.microsoft.com/office/drawing/2014/main" id="{887BC80F-88C3-40EF-BA46-BC43888296F9}"/>
               </a:ext>
             </a:extLst>
           </p:cNvPr>
@@ -5645,7 +6037,7 @@
           <p:cNvPr id="44" name="reveal2-line-43">
             <a:extLst xmlns:a="http://schemas.openxmlformats.org/drawingml/2006/main">
               <a:ext uri="{FF2B5EF4-FFF2-40B4-BE49-F238E27FC236}">
-                <a16:creationId xmlns:a16="http://schemas.microsoft.com/office/drawing/2014/main" id="{8F0E8F05-A4D1-4662-A737-5B0ECC958834}"/>
+                <a16:creationId xmlns:a16="http://schemas.microsoft.com/office/drawing/2014/main" id="{FB44DC54-8A7B-4BE8-B60D-BB8B49461BC5}"/>
               </a:ext>
             </a:extLst>
           </p:cNvPr>
@@ -5685,7 +6077,7 @@
           <p:cNvPr id="45" name="reveal2-line-44">
             <a:extLst xmlns:a="http://schemas.openxmlformats.org/drawingml/2006/main">
               <a:ext uri="{FF2B5EF4-FFF2-40B4-BE49-F238E27FC236}">
-                <a16:creationId xmlns:a16="http://schemas.microsoft.com/office/drawing/2014/main" id="{EF376D7F-D985-4DFD-B308-05B2BE97E298}"/>
+                <a16:creationId xmlns:a16="http://schemas.microsoft.com/office/drawing/2014/main" id="{80ECE075-0065-437B-BD95-7FAD33C272A2}"/>
               </a:ext>
             </a:extLst>
           </p:cNvPr>
@@ -5725,7 +6117,7 @@
           <p:cNvPr id="46" name="reveal2-line-45">
             <a:extLst xmlns:a="http://schemas.openxmlformats.org/drawingml/2006/main">
               <a:ext uri="{FF2B5EF4-FFF2-40B4-BE49-F238E27FC236}">
-                <a16:creationId xmlns:a16="http://schemas.microsoft.com/office/drawing/2014/main" id="{6E21B5BB-E7E0-4D56-ADF7-0C4270FACA85}"/>
+                <a16:creationId xmlns:a16="http://schemas.microsoft.com/office/drawing/2014/main" id="{7589D768-C612-4947-B0AB-34D966A1DB65}"/>
               </a:ext>
             </a:extLst>
           </p:cNvPr>
@@ -5765,7 +6157,7 @@
           <p:cNvPr id="47" name="reveal2-line-46">
             <a:extLst xmlns:a="http://schemas.openxmlformats.org/drawingml/2006/main">
               <a:ext uri="{FF2B5EF4-FFF2-40B4-BE49-F238E27FC236}">
-                <a16:creationId xmlns:a16="http://schemas.microsoft.com/office/drawing/2014/main" id="{6C177643-58D5-4A39-B68F-C430AE482C92}"/>
+                <a16:creationId xmlns:a16="http://schemas.microsoft.com/office/drawing/2014/main" id="{F9D6A3E5-859F-499F-9BFF-4837376C757B}"/>
               </a:ext>
             </a:extLst>
           </p:cNvPr>
@@ -5805,7 +6197,7 @@
           <p:cNvPr id="48" name="reveal2-line-47">
             <a:extLst xmlns:a="http://schemas.openxmlformats.org/drawingml/2006/main">
               <a:ext uri="{FF2B5EF4-FFF2-40B4-BE49-F238E27FC236}">
-                <a16:creationId xmlns:a16="http://schemas.microsoft.com/office/drawing/2014/main" id="{448140F9-B226-492D-A8DA-952EDD3A78E5}"/>
+                <a16:creationId xmlns:a16="http://schemas.microsoft.com/office/drawing/2014/main" id="{6D3A0BBC-A3D6-4B8D-BC82-82C8EF2690CF}"/>
               </a:ext>
             </a:extLst>
           </p:cNvPr>
@@ -5845,7 +6237,7 @@
           <p:cNvPr id="49" name="reveal2-line-48">
             <a:extLst xmlns:a="http://schemas.openxmlformats.org/drawingml/2006/main">
               <a:ext uri="{FF2B5EF4-FFF2-40B4-BE49-F238E27FC236}">
-                <a16:creationId xmlns:a16="http://schemas.microsoft.com/office/drawing/2014/main" id="{36723F9E-4EC6-44D8-85A0-9E347D1C0100}"/>
+                <a16:creationId xmlns:a16="http://schemas.microsoft.com/office/drawing/2014/main" id="{2A5BEA6B-672C-4ADD-B3CE-0C418F05A7F5}"/>
               </a:ext>
             </a:extLst>
           </p:cNvPr>
@@ -5885,7 +6277,7 @@
           <p:cNvPr id="50" name="reveal2-line-49">
             <a:extLst xmlns:a="http://schemas.openxmlformats.org/drawingml/2006/main">
               <a:ext uri="{FF2B5EF4-FFF2-40B4-BE49-F238E27FC236}">
-                <a16:creationId xmlns:a16="http://schemas.microsoft.com/office/drawing/2014/main" id="{D1DBAB4A-10E4-415C-91A7-20DD0CEF4FE9}"/>
+                <a16:creationId xmlns:a16="http://schemas.microsoft.com/office/drawing/2014/main" id="{22142142-949F-4184-AE52-9B16A05BAAC0}"/>
               </a:ext>
             </a:extLst>
           </p:cNvPr>
@@ -5925,7 +6317,7 @@
           <p:cNvPr id="51" name="reveal2-line-50">
             <a:extLst xmlns:a="http://schemas.openxmlformats.org/drawingml/2006/main">
               <a:ext uri="{FF2B5EF4-FFF2-40B4-BE49-F238E27FC236}">
-                <a16:creationId xmlns:a16="http://schemas.microsoft.com/office/drawing/2014/main" id="{02BE64CD-895A-421A-AA5A-98FBDD50AFA9}"/>
+                <a16:creationId xmlns:a16="http://schemas.microsoft.com/office/drawing/2014/main" id="{E469BA5A-400A-4323-B1E9-6DED3A8A03A4}"/>
               </a:ext>
             </a:extLst>
           </p:cNvPr>
@@ -5965,7 +6357,7 @@
           <p:cNvPr id="52" name="reveal2-line-51">
             <a:extLst xmlns:a="http://schemas.openxmlformats.org/drawingml/2006/main">
               <a:ext uri="{FF2B5EF4-FFF2-40B4-BE49-F238E27FC236}">
-                <a16:creationId xmlns:a16="http://schemas.microsoft.com/office/drawing/2014/main" id="{17AFB305-2BDB-498E-A90D-84A38569A544}"/>
+                <a16:creationId xmlns:a16="http://schemas.microsoft.com/office/drawing/2014/main" id="{1FAB19B2-A2A6-4454-BE17-AB0FBF65A684}"/>
               </a:ext>
             </a:extLst>
           </p:cNvPr>
@@ -6005,7 +6397,7 @@
           <p:cNvPr id="53" name="reveal2-line-52">
             <a:extLst xmlns:a="http://schemas.openxmlformats.org/drawingml/2006/main">
               <a:ext uri="{FF2B5EF4-FFF2-40B4-BE49-F238E27FC236}">
-                <a16:creationId xmlns:a16="http://schemas.microsoft.com/office/drawing/2014/main" id="{597DA43E-5DDD-4728-8DF8-9306ADE74D95}"/>
+                <a16:creationId xmlns:a16="http://schemas.microsoft.com/office/drawing/2014/main" id="{BED45551-3057-4DC2-8D63-7D4F769BCCE5}"/>
               </a:ext>
             </a:extLst>
           </p:cNvPr>
@@ -6045,7 +6437,7 @@
           <p:cNvPr id="54" name="reveal2-line-53">
             <a:extLst xmlns:a="http://schemas.openxmlformats.org/drawingml/2006/main">
               <a:ext uri="{FF2B5EF4-FFF2-40B4-BE49-F238E27FC236}">
-                <a16:creationId xmlns:a16="http://schemas.microsoft.com/office/drawing/2014/main" id="{17CAD884-412F-4BC1-91DD-D256A5F8CB9E}"/>
+                <a16:creationId xmlns:a16="http://schemas.microsoft.com/office/drawing/2014/main" id="{F419087D-7BFB-43B0-BDFD-33477A9B4DDC}"/>
               </a:ext>
             </a:extLst>
           </p:cNvPr>
@@ -6085,7 +6477,7 @@
           <p:cNvPr id="55" name="reveal2-line-54">
             <a:extLst xmlns:a="http://schemas.openxmlformats.org/drawingml/2006/main">
               <a:ext uri="{FF2B5EF4-FFF2-40B4-BE49-F238E27FC236}">
-                <a16:creationId xmlns:a16="http://schemas.microsoft.com/office/drawing/2014/main" id="{703857FB-C4EE-436D-9DEB-E49AE277D611}"/>
+                <a16:creationId xmlns:a16="http://schemas.microsoft.com/office/drawing/2014/main" id="{ED081AB9-FD05-4EE7-A5B3-C62FFD09D035}"/>
               </a:ext>
             </a:extLst>
           </p:cNvPr>
@@ -6125,7 +6517,7 @@
           <p:cNvPr id="56" name="reveal2-line-55">
             <a:extLst xmlns:a="http://schemas.openxmlformats.org/drawingml/2006/main">
               <a:ext uri="{FF2B5EF4-FFF2-40B4-BE49-F238E27FC236}">
-                <a16:creationId xmlns:a16="http://schemas.microsoft.com/office/drawing/2014/main" id="{B86156F4-92AB-4B57-8EF5-4138E0264667}"/>
+                <a16:creationId xmlns:a16="http://schemas.microsoft.com/office/drawing/2014/main" id="{89F9D3CB-CC7F-42DE-B139-0E75586ED594}"/>
               </a:ext>
             </a:extLst>
           </p:cNvPr>
@@ -6165,7 +6557,7 @@
           <p:cNvPr id="57" name="reveal2-line-56">
             <a:extLst xmlns:a="http://schemas.openxmlformats.org/drawingml/2006/main">
               <a:ext uri="{FF2B5EF4-FFF2-40B4-BE49-F238E27FC236}">
-                <a16:creationId xmlns:a16="http://schemas.microsoft.com/office/drawing/2014/main" id="{69E86590-D054-486F-AF37-EAB50646EAD6}"/>
+                <a16:creationId xmlns:a16="http://schemas.microsoft.com/office/drawing/2014/main" id="{442F3927-016D-46F6-A4F3-B00F7FB29FFD}"/>
               </a:ext>
             </a:extLst>
           </p:cNvPr>
@@ -6205,7 +6597,7 @@
           <p:cNvPr id="58" name="reveal2-line-57">
             <a:extLst xmlns:a="http://schemas.openxmlformats.org/drawingml/2006/main">
               <a:ext uri="{FF2B5EF4-FFF2-40B4-BE49-F238E27FC236}">
-                <a16:creationId xmlns:a16="http://schemas.microsoft.com/office/drawing/2014/main" id="{08E4BB6D-47A9-4E6E-AC1B-415281657392}"/>
+                <a16:creationId xmlns:a16="http://schemas.microsoft.com/office/drawing/2014/main" id="{04F6B755-E24E-41A9-A1F0-2C953641803A}"/>
               </a:ext>
             </a:extLst>
           </p:cNvPr>
@@ -6245,7 +6637,7 @@
           <p:cNvPr id="59" name="reveal2-line-58">
             <a:extLst xmlns:a="http://schemas.openxmlformats.org/drawingml/2006/main">
               <a:ext uri="{FF2B5EF4-FFF2-40B4-BE49-F238E27FC236}">
-                <a16:creationId xmlns:a16="http://schemas.microsoft.com/office/drawing/2014/main" id="{25A44DE4-A526-47E4-8F81-D9A960838D37}"/>
+                <a16:creationId xmlns:a16="http://schemas.microsoft.com/office/drawing/2014/main" id="{E4368500-488C-479F-9A2E-9A12DC6F8DFD}"/>
               </a:ext>
             </a:extLst>
           </p:cNvPr>
@@ -6285,7 +6677,7 @@
           <p:cNvPr id="60" name="reveal2-line-59">
             <a:extLst xmlns:a="http://schemas.openxmlformats.org/drawingml/2006/main">
               <a:ext uri="{FF2B5EF4-FFF2-40B4-BE49-F238E27FC236}">
-                <a16:creationId xmlns:a16="http://schemas.microsoft.com/office/drawing/2014/main" id="{69DDA07B-74CE-411F-B42C-4345D06C692D}"/>
+                <a16:creationId xmlns:a16="http://schemas.microsoft.com/office/drawing/2014/main" id="{6C16C48E-ED84-469C-B75C-B819EF6ECD20}"/>
               </a:ext>
             </a:extLst>
           </p:cNvPr>
@@ -6325,7 +6717,7 @@
           <p:cNvPr id="61" name="reveal2-line-60">
             <a:extLst xmlns:a="http://schemas.openxmlformats.org/drawingml/2006/main">
               <a:ext uri="{FF2B5EF4-FFF2-40B4-BE49-F238E27FC236}">
-                <a16:creationId xmlns:a16="http://schemas.microsoft.com/office/drawing/2014/main" id="{9CDDA6BD-836B-4E4E-8645-BE7C5E6D1924}"/>
+                <a16:creationId xmlns:a16="http://schemas.microsoft.com/office/drawing/2014/main" id="{2A970352-F6B4-40BE-A551-E6B23E23BC94}"/>
               </a:ext>
             </a:extLst>
           </p:cNvPr>
@@ -6365,7 +6757,7 @@
           <p:cNvPr id="62" name="reveal2-line-61">
             <a:extLst xmlns:a="http://schemas.openxmlformats.org/drawingml/2006/main">
               <a:ext uri="{FF2B5EF4-FFF2-40B4-BE49-F238E27FC236}">
-                <a16:creationId xmlns:a16="http://schemas.microsoft.com/office/drawing/2014/main" id="{F66216A8-E341-4E4F-B76F-4E0FB6FB10D7}"/>
+                <a16:creationId xmlns:a16="http://schemas.microsoft.com/office/drawing/2014/main" id="{E5B73E00-F3A7-4BF4-ACD8-94CB1688ABB4}"/>
               </a:ext>
             </a:extLst>
           </p:cNvPr>
@@ -6405,7 +6797,7 @@
           <p:cNvPr id="63" name="reveal2-line-62">
             <a:extLst xmlns:a="http://schemas.openxmlformats.org/drawingml/2006/main">
               <a:ext uri="{FF2B5EF4-FFF2-40B4-BE49-F238E27FC236}">
-                <a16:creationId xmlns:a16="http://schemas.microsoft.com/office/drawing/2014/main" id="{9D4CA976-6645-4AF3-97D2-21E27C9AB440}"/>
+                <a16:creationId xmlns:a16="http://schemas.microsoft.com/office/drawing/2014/main" id="{3D9563D9-FA35-4DEA-B106-02CFB544921D}"/>
               </a:ext>
             </a:extLst>
           </p:cNvPr>
@@ -6445,7 +6837,7 @@
           <p:cNvPr id="64" name="reveal2-object-63">
             <a:extLst xmlns:a="http://schemas.openxmlformats.org/drawingml/2006/main">
               <a:ext uri="{FF2B5EF4-FFF2-40B4-BE49-F238E27FC236}">
-                <a16:creationId xmlns:a16="http://schemas.microsoft.com/office/drawing/2014/main" id="{75C3E1CC-61FF-4DF5-88D6-16BC821B608E}"/>
+                <a16:creationId xmlns:a16="http://schemas.microsoft.com/office/drawing/2014/main" id="{A5981905-6A9F-42CA-8E78-AE9B7350B5EA}"/>
               </a:ext>
             </a:extLst>
           </p:cNvPr>
@@ -6558,7 +6950,7 @@
           <p:cNvPr id="65" name="reveal2-object-64">
             <a:extLst xmlns:a="http://schemas.openxmlformats.org/drawingml/2006/main">
               <a:ext uri="{FF2B5EF4-FFF2-40B4-BE49-F238E27FC236}">
-                <a16:creationId xmlns:a16="http://schemas.microsoft.com/office/drawing/2014/main" id="{952EA7AF-13DC-4426-9166-ED9FBF63E415}"/>
+                <a16:creationId xmlns:a16="http://schemas.microsoft.com/office/drawing/2014/main" id="{55E78DB7-C7F8-475E-99C9-D8366F4A741D}"/>
               </a:ext>
             </a:extLst>
           </p:cNvPr>
@@ -6615,7 +7007,7 @@
                 <a:ea typeface="Microsoft YaHei"/>
                 <a:cs typeface="Microsoft YaHei"/>
               </a:rPr>
-              <a:t>真实引擎这三步一步都不敢做。后面三页，把三个朴素做法逐个推翻。</a:t>
+              <a:t>接下来，把三个朴素做法逐个推翻，再看引擎怎么把它们落实。</a:t>
             </a:r>
           </a:p>
         </p:txBody>
@@ -6625,7 +7017,7 @@
           <p:cNvPr id="66" name="object-65">
             <a:extLst xmlns:a="http://schemas.openxmlformats.org/drawingml/2006/main">
               <a:ext uri="{FF2B5EF4-FFF2-40B4-BE49-F238E27FC236}">
-                <a16:creationId xmlns:a16="http://schemas.microsoft.com/office/drawing/2014/main" id="{281691A0-1526-4112-A691-8ECB0C078C97}"/>
+                <a16:creationId xmlns:a16="http://schemas.microsoft.com/office/drawing/2014/main" id="{87EE875C-8F7F-4BEB-AA2F-919717D869D7}"/>
               </a:ext>
             </a:extLst>
           </p:cNvPr>
@@ -6692,7 +7084,7 @@
           <p:cNvPr id="67" name="object-66">
             <a:extLst xmlns:a="http://schemas.openxmlformats.org/drawingml/2006/main">
               <a:ext uri="{FF2B5EF4-FFF2-40B4-BE49-F238E27FC236}">
-                <a16:creationId xmlns:a16="http://schemas.microsoft.com/office/drawing/2014/main" id="{7F8E310C-EF11-4A03-A403-318B7CFCD27B}"/>
+                <a16:creationId xmlns:a16="http://schemas.microsoft.com/office/drawing/2014/main" id="{CB2D3203-AA5D-4E19-8393-01B483B2BA00}"/>
               </a:ext>
             </a:extLst>
           </p:cNvPr>
@@ -6757,7 +7149,7 @@
     </p:spTree>
     <p:extLst>
       <p:ext uri="{BB962C8B-B14F-4D97-AF65-F5344CB8AC3E}">
-        <p14:creationId xmlns:p14="http://schemas.microsoft.com/office/powerpoint/2010/main" val="1297694305"/>
+        <p14:creationId xmlns:p14="http://schemas.microsoft.com/office/powerpoint/2010/main" val="841515265"/>
       </p:ext>
     </p:extLst>
   </p:cSld>
@@ -7892,7 +8284,7 @@
           <p:cNvPr id="209" name="object-67">
             <a:extLst xmlns:a="http://schemas.openxmlformats.org/drawingml/2006/main">
               <a:ext uri="{FF2B5EF4-FFF2-40B4-BE49-F238E27FC236}">
-                <a16:creationId xmlns:a16="http://schemas.microsoft.com/office/drawing/2014/main" id="{4FB0842B-CC95-437B-946B-C725311BFD08}"/>
+                <a16:creationId xmlns:a16="http://schemas.microsoft.com/office/drawing/2014/main" id="{D7331D27-5B69-4004-8B89-6D2A95B5B495}"/>
               </a:ext>
             </a:extLst>
           </p:cNvPr>
@@ -7959,7 +8351,7 @@
           <p:cNvPr id="2" name="object-68">
             <a:extLst xmlns:a="http://schemas.openxmlformats.org/drawingml/2006/main">
               <a:ext uri="{FF2B5EF4-FFF2-40B4-BE49-F238E27FC236}">
-                <a16:creationId xmlns:a16="http://schemas.microsoft.com/office/drawing/2014/main" id="{39A43B7D-7AAD-40C6-9407-9CFDB53B2AA2}"/>
+                <a16:creationId xmlns:a16="http://schemas.microsoft.com/office/drawing/2014/main" id="{74EB7BD8-D508-42BF-9B63-BCBD606772C4}"/>
               </a:ext>
             </a:extLst>
           </p:cNvPr>
@@ -8026,7 +8418,7 @@
           <p:cNvPr id="3" name="line-69">
             <a:extLst xmlns:a="http://schemas.openxmlformats.org/drawingml/2006/main">
               <a:ext uri="{FF2B5EF4-FFF2-40B4-BE49-F238E27FC236}">
-                <a16:creationId xmlns:a16="http://schemas.microsoft.com/office/drawing/2014/main" id="{A6115DB3-58DA-4C0E-B3C2-91D871055874}"/>
+                <a16:creationId xmlns:a16="http://schemas.microsoft.com/office/drawing/2014/main" id="{77B574D7-7D91-495A-835D-FC97F18A8F56}"/>
               </a:ext>
             </a:extLst>
           </p:cNvPr>
@@ -8066,7 +8458,7 @@
           <p:cNvPr id="4" name="line-70">
             <a:extLst xmlns:a="http://schemas.openxmlformats.org/drawingml/2006/main">
               <a:ext uri="{FF2B5EF4-FFF2-40B4-BE49-F238E27FC236}">
-                <a16:creationId xmlns:a16="http://schemas.microsoft.com/office/drawing/2014/main" id="{C74CDC06-81E8-4DFA-B308-9DCBD1963F28}"/>
+                <a16:creationId xmlns:a16="http://schemas.microsoft.com/office/drawing/2014/main" id="{FA2BF284-D39F-49F1-B803-0BB89DB1B43C}"/>
               </a:ext>
             </a:extLst>
           </p:cNvPr>
@@ -8106,7 +8498,7 @@
           <p:cNvPr id="5" name="line-71">
             <a:extLst xmlns:a="http://schemas.openxmlformats.org/drawingml/2006/main">
               <a:ext uri="{FF2B5EF4-FFF2-40B4-BE49-F238E27FC236}">
-                <a16:creationId xmlns:a16="http://schemas.microsoft.com/office/drawing/2014/main" id="{ABCF4405-6105-42E9-B741-53A11F13C2ED}"/>
+                <a16:creationId xmlns:a16="http://schemas.microsoft.com/office/drawing/2014/main" id="{CB0AD67C-99A9-4477-AF6F-9C9DC3D8291B}"/>
               </a:ext>
             </a:extLst>
           </p:cNvPr>
@@ -8146,7 +8538,7 @@
           <p:cNvPr id="6" name="line-72">
             <a:extLst xmlns:a="http://schemas.openxmlformats.org/drawingml/2006/main">
               <a:ext uri="{FF2B5EF4-FFF2-40B4-BE49-F238E27FC236}">
-                <a16:creationId xmlns:a16="http://schemas.microsoft.com/office/drawing/2014/main" id="{4925ED9F-C3BE-42F5-BEEA-9C8F1A9026B2}"/>
+                <a16:creationId xmlns:a16="http://schemas.microsoft.com/office/drawing/2014/main" id="{A9EAF114-E8B2-45D8-B781-ED16575E0891}"/>
               </a:ext>
             </a:extLst>
           </p:cNvPr>
@@ -8186,7 +8578,7 @@
           <p:cNvPr id="7" name="line-73">
             <a:extLst xmlns:a="http://schemas.openxmlformats.org/drawingml/2006/main">
               <a:ext uri="{FF2B5EF4-FFF2-40B4-BE49-F238E27FC236}">
-                <a16:creationId xmlns:a16="http://schemas.microsoft.com/office/drawing/2014/main" id="{463C67EB-9890-407F-B000-743B02F5908E}"/>
+                <a16:creationId xmlns:a16="http://schemas.microsoft.com/office/drawing/2014/main" id="{FC7FEA7C-4C2B-4B9E-ABEE-C4F04E31EDB8}"/>
               </a:ext>
             </a:extLst>
           </p:cNvPr>
@@ -8226,7 +8618,7 @@
           <p:cNvPr id="8" name="line-74">
             <a:extLst xmlns:a="http://schemas.openxmlformats.org/drawingml/2006/main">
               <a:ext uri="{FF2B5EF4-FFF2-40B4-BE49-F238E27FC236}">
-                <a16:creationId xmlns:a16="http://schemas.microsoft.com/office/drawing/2014/main" id="{DF0C53B8-A851-4692-B061-105881947364}"/>
+                <a16:creationId xmlns:a16="http://schemas.microsoft.com/office/drawing/2014/main" id="{268B4A5B-4AB2-4D71-9E1B-055893754A63}"/>
               </a:ext>
             </a:extLst>
           </p:cNvPr>
@@ -8266,7 +8658,7 @@
           <p:cNvPr id="9" name="line-75">
             <a:extLst xmlns:a="http://schemas.openxmlformats.org/drawingml/2006/main">
               <a:ext uri="{FF2B5EF4-FFF2-40B4-BE49-F238E27FC236}">
-                <a16:creationId xmlns:a16="http://schemas.microsoft.com/office/drawing/2014/main" id="{3B14A0D2-9507-4CD5-9783-3B637699AB45}"/>
+                <a16:creationId xmlns:a16="http://schemas.microsoft.com/office/drawing/2014/main" id="{95AC71A2-AE91-47D0-8863-A79A0C0948E6}"/>
               </a:ext>
             </a:extLst>
           </p:cNvPr>
@@ -8306,7 +8698,7 @@
           <p:cNvPr id="10" name="line-76">
             <a:extLst xmlns:a="http://schemas.openxmlformats.org/drawingml/2006/main">
               <a:ext uri="{FF2B5EF4-FFF2-40B4-BE49-F238E27FC236}">
-                <a16:creationId xmlns:a16="http://schemas.microsoft.com/office/drawing/2014/main" id="{05583715-2196-4EDB-986A-F9C3705C0FBE}"/>
+                <a16:creationId xmlns:a16="http://schemas.microsoft.com/office/drawing/2014/main" id="{46731B15-C3A1-4F14-88B0-6A634DF54E07}"/>
               </a:ext>
             </a:extLst>
           </p:cNvPr>
@@ -8346,7 +8738,7 @@
           <p:cNvPr id="11" name="line-77">
             <a:extLst xmlns:a="http://schemas.openxmlformats.org/drawingml/2006/main">
               <a:ext uri="{FF2B5EF4-FFF2-40B4-BE49-F238E27FC236}">
-                <a16:creationId xmlns:a16="http://schemas.microsoft.com/office/drawing/2014/main" id="{0327BE7F-61E2-496F-A41D-314790B9AD3F}"/>
+                <a16:creationId xmlns:a16="http://schemas.microsoft.com/office/drawing/2014/main" id="{03739086-4963-40E1-B0AA-314735D401ED}"/>
               </a:ext>
             </a:extLst>
           </p:cNvPr>
@@ -8386,7 +8778,7 @@
           <p:cNvPr id="12" name="line-78">
             <a:extLst xmlns:a="http://schemas.openxmlformats.org/drawingml/2006/main">
               <a:ext uri="{FF2B5EF4-FFF2-40B4-BE49-F238E27FC236}">
-                <a16:creationId xmlns:a16="http://schemas.microsoft.com/office/drawing/2014/main" id="{7F998881-3FB3-4379-895E-915D55674CEF}"/>
+                <a16:creationId xmlns:a16="http://schemas.microsoft.com/office/drawing/2014/main" id="{57162678-4AE6-487B-9D65-F3E0A5A6FDEA}"/>
               </a:ext>
             </a:extLst>
           </p:cNvPr>
@@ -8426,7 +8818,7 @@
           <p:cNvPr id="13" name="line-79">
             <a:extLst xmlns:a="http://schemas.openxmlformats.org/drawingml/2006/main">
               <a:ext uri="{FF2B5EF4-FFF2-40B4-BE49-F238E27FC236}">
-                <a16:creationId xmlns:a16="http://schemas.microsoft.com/office/drawing/2014/main" id="{84239F42-F8F1-4C62-9683-2544272C8BB3}"/>
+                <a16:creationId xmlns:a16="http://schemas.microsoft.com/office/drawing/2014/main" id="{584DFBDE-9348-4562-BE00-5848CE5A6A9C}"/>
               </a:ext>
             </a:extLst>
           </p:cNvPr>
@@ -8466,7 +8858,7 @@
           <p:cNvPr id="14" name="line-80">
             <a:extLst xmlns:a="http://schemas.openxmlformats.org/drawingml/2006/main">
               <a:ext uri="{FF2B5EF4-FFF2-40B4-BE49-F238E27FC236}">
-                <a16:creationId xmlns:a16="http://schemas.microsoft.com/office/drawing/2014/main" id="{3C9F9421-3914-455B-A976-C8DBF527BD21}"/>
+                <a16:creationId xmlns:a16="http://schemas.microsoft.com/office/drawing/2014/main" id="{6C9BC35C-5307-4C80-9F15-08628029C4F3}"/>
               </a:ext>
             </a:extLst>
           </p:cNvPr>
@@ -8506,7 +8898,7 @@
           <p:cNvPr id="15" name="line-81">
             <a:extLst xmlns:a="http://schemas.openxmlformats.org/drawingml/2006/main">
               <a:ext uri="{FF2B5EF4-FFF2-40B4-BE49-F238E27FC236}">
-                <a16:creationId xmlns:a16="http://schemas.microsoft.com/office/drawing/2014/main" id="{68112740-5563-4AAF-9107-C94AAD179D8C}"/>
+                <a16:creationId xmlns:a16="http://schemas.microsoft.com/office/drawing/2014/main" id="{0A2E9887-2EE5-45BB-8531-6A296F91FDA7}"/>
               </a:ext>
             </a:extLst>
           </p:cNvPr>
@@ -8546,7 +8938,7 @@
           <p:cNvPr id="16" name="line-82">
             <a:extLst xmlns:a="http://schemas.openxmlformats.org/drawingml/2006/main">
               <a:ext uri="{FF2B5EF4-FFF2-40B4-BE49-F238E27FC236}">
-                <a16:creationId xmlns:a16="http://schemas.microsoft.com/office/drawing/2014/main" id="{00DC44FB-5C18-402F-BB5E-54974DCCFAE1}"/>
+                <a16:creationId xmlns:a16="http://schemas.microsoft.com/office/drawing/2014/main" id="{40FA4C9F-A213-423E-9830-A2F7AF1F28D7}"/>
               </a:ext>
             </a:extLst>
           </p:cNvPr>
@@ -8586,7 +8978,7 @@
           <p:cNvPr id="17" name="line-83">
             <a:extLst xmlns:a="http://schemas.openxmlformats.org/drawingml/2006/main">
               <a:ext uri="{FF2B5EF4-FFF2-40B4-BE49-F238E27FC236}">
-                <a16:creationId xmlns:a16="http://schemas.microsoft.com/office/drawing/2014/main" id="{6360B45A-FB3B-4ACC-B4F2-64BCEA7281D0}"/>
+                <a16:creationId xmlns:a16="http://schemas.microsoft.com/office/drawing/2014/main" id="{7C40B2A4-A9F9-40C6-AAE0-DC14388465B3}"/>
               </a:ext>
             </a:extLst>
           </p:cNvPr>
@@ -8626,7 +9018,7 @@
           <p:cNvPr id="18" name="line-84">
             <a:extLst xmlns:a="http://schemas.openxmlformats.org/drawingml/2006/main">
               <a:ext uri="{FF2B5EF4-FFF2-40B4-BE49-F238E27FC236}">
-                <a16:creationId xmlns:a16="http://schemas.microsoft.com/office/drawing/2014/main" id="{10D47D95-0017-43D1-ADDA-0D78E46C6FEF}"/>
+                <a16:creationId xmlns:a16="http://schemas.microsoft.com/office/drawing/2014/main" id="{187B17A5-F4B6-40CA-940B-0E89D00CF5C3}"/>
               </a:ext>
             </a:extLst>
           </p:cNvPr>
@@ -8666,7 +9058,7 @@
           <p:cNvPr id="19" name="line-85">
             <a:extLst xmlns:a="http://schemas.openxmlformats.org/drawingml/2006/main">
               <a:ext uri="{FF2B5EF4-FFF2-40B4-BE49-F238E27FC236}">
-                <a16:creationId xmlns:a16="http://schemas.microsoft.com/office/drawing/2014/main" id="{32BF79D4-6B8C-47DB-8C40-99F4BA69D133}"/>
+                <a16:creationId xmlns:a16="http://schemas.microsoft.com/office/drawing/2014/main" id="{878BDE8C-092E-4D09-A996-2DE96FE81E53}"/>
               </a:ext>
             </a:extLst>
           </p:cNvPr>
@@ -8706,7 +9098,7 @@
           <p:cNvPr id="20" name="line-86">
             <a:extLst xmlns:a="http://schemas.openxmlformats.org/drawingml/2006/main">
               <a:ext uri="{FF2B5EF4-FFF2-40B4-BE49-F238E27FC236}">
-                <a16:creationId xmlns:a16="http://schemas.microsoft.com/office/drawing/2014/main" id="{E76C24D9-055B-4D4C-8F8D-3B6337E3EC41}"/>
+                <a16:creationId xmlns:a16="http://schemas.microsoft.com/office/drawing/2014/main" id="{0EA0B7A2-D0B9-407A-B67C-426FAA041589}"/>
               </a:ext>
             </a:extLst>
           </p:cNvPr>
@@ -8746,7 +9138,7 @@
           <p:cNvPr id="21" name="line-87">
             <a:extLst xmlns:a="http://schemas.openxmlformats.org/drawingml/2006/main">
               <a:ext uri="{FF2B5EF4-FFF2-40B4-BE49-F238E27FC236}">
-                <a16:creationId xmlns:a16="http://schemas.microsoft.com/office/drawing/2014/main" id="{92C131CF-D076-4602-A918-186CCEA51710}"/>
+                <a16:creationId xmlns:a16="http://schemas.microsoft.com/office/drawing/2014/main" id="{1660C152-F022-44ED-A1D7-ED990267DAE3}"/>
               </a:ext>
             </a:extLst>
           </p:cNvPr>
@@ -8786,7 +9178,7 @@
           <p:cNvPr id="22" name="line-88">
             <a:extLst xmlns:a="http://schemas.openxmlformats.org/drawingml/2006/main">
               <a:ext uri="{FF2B5EF4-FFF2-40B4-BE49-F238E27FC236}">
-                <a16:creationId xmlns:a16="http://schemas.microsoft.com/office/drawing/2014/main" id="{7295964E-8123-4890-AFC5-89C18EF8114E}"/>
+                <a16:creationId xmlns:a16="http://schemas.microsoft.com/office/drawing/2014/main" id="{20931FEA-6C64-45A3-9F79-40FF4A6061EF}"/>
               </a:ext>
             </a:extLst>
           </p:cNvPr>
@@ -8826,7 +9218,7 @@
           <p:cNvPr id="23" name="line-89">
             <a:extLst xmlns:a="http://schemas.openxmlformats.org/drawingml/2006/main">
               <a:ext uri="{FF2B5EF4-FFF2-40B4-BE49-F238E27FC236}">
-                <a16:creationId xmlns:a16="http://schemas.microsoft.com/office/drawing/2014/main" id="{2138CBFC-7556-43E2-896E-6C3869B17EB8}"/>
+                <a16:creationId xmlns:a16="http://schemas.microsoft.com/office/drawing/2014/main" id="{41C48962-034C-4232-B81B-73594F35066C}"/>
               </a:ext>
             </a:extLst>
           </p:cNvPr>
@@ -8866,7 +9258,7 @@
           <p:cNvPr id="24" name="line-90">
             <a:extLst xmlns:a="http://schemas.openxmlformats.org/drawingml/2006/main">
               <a:ext uri="{FF2B5EF4-FFF2-40B4-BE49-F238E27FC236}">
-                <a16:creationId xmlns:a16="http://schemas.microsoft.com/office/drawing/2014/main" id="{231B7049-E42B-4FA7-AE9F-81C1C90EE843}"/>
+                <a16:creationId xmlns:a16="http://schemas.microsoft.com/office/drawing/2014/main" id="{FA68C0DA-4CCD-4824-BA92-9A4195FA6D7B}"/>
               </a:ext>
             </a:extLst>
           </p:cNvPr>
@@ -8906,7 +9298,7 @@
           <p:cNvPr id="25" name="line-91">
             <a:extLst xmlns:a="http://schemas.openxmlformats.org/drawingml/2006/main">
               <a:ext uri="{FF2B5EF4-FFF2-40B4-BE49-F238E27FC236}">
-                <a16:creationId xmlns:a16="http://schemas.microsoft.com/office/drawing/2014/main" id="{30347AA9-BDFF-4DFA-97F6-678687ACAC41}"/>
+                <a16:creationId xmlns:a16="http://schemas.microsoft.com/office/drawing/2014/main" id="{CFAB1761-5742-4300-BDBA-61E5EAF96B9F}"/>
               </a:ext>
             </a:extLst>
           </p:cNvPr>
@@ -8946,7 +9338,7 @@
           <p:cNvPr id="26" name="line-92">
             <a:extLst xmlns:a="http://schemas.openxmlformats.org/drawingml/2006/main">
               <a:ext uri="{FF2B5EF4-FFF2-40B4-BE49-F238E27FC236}">
-                <a16:creationId xmlns:a16="http://schemas.microsoft.com/office/drawing/2014/main" id="{565BE147-C294-49FA-81AC-5000C902971A}"/>
+                <a16:creationId xmlns:a16="http://schemas.microsoft.com/office/drawing/2014/main" id="{BAA5CCD8-C876-48F8-87BE-5309E359A531}"/>
               </a:ext>
             </a:extLst>
           </p:cNvPr>
@@ -8986,7 +9378,7 @@
           <p:cNvPr id="27" name="line-93">
             <a:extLst xmlns:a="http://schemas.openxmlformats.org/drawingml/2006/main">
               <a:ext uri="{FF2B5EF4-FFF2-40B4-BE49-F238E27FC236}">
-                <a16:creationId xmlns:a16="http://schemas.microsoft.com/office/drawing/2014/main" id="{F2B98AB1-1F3B-4743-A217-BB275A93AFE7}"/>
+                <a16:creationId xmlns:a16="http://schemas.microsoft.com/office/drawing/2014/main" id="{53724BD1-2797-450E-8B21-C717A44A439F}"/>
               </a:ext>
             </a:extLst>
           </p:cNvPr>
@@ -9026,7 +9418,7 @@
           <p:cNvPr id="28" name="line-94">
             <a:extLst xmlns:a="http://schemas.openxmlformats.org/drawingml/2006/main">
               <a:ext uri="{FF2B5EF4-FFF2-40B4-BE49-F238E27FC236}">
-                <a16:creationId xmlns:a16="http://schemas.microsoft.com/office/drawing/2014/main" id="{5583D374-5FC6-4000-A6FC-55871EA8A193}"/>
+                <a16:creationId xmlns:a16="http://schemas.microsoft.com/office/drawing/2014/main" id="{40C03331-C5DA-4426-8886-61C3DACE8BB1}"/>
               </a:ext>
             </a:extLst>
           </p:cNvPr>
@@ -9066,7 +9458,7 @@
           <p:cNvPr id="29" name="line-95">
             <a:extLst xmlns:a="http://schemas.openxmlformats.org/drawingml/2006/main">
               <a:ext uri="{FF2B5EF4-FFF2-40B4-BE49-F238E27FC236}">
-                <a16:creationId xmlns:a16="http://schemas.microsoft.com/office/drawing/2014/main" id="{B7E24F5C-8371-4763-98AA-6E97D3CE707A}"/>
+                <a16:creationId xmlns:a16="http://schemas.microsoft.com/office/drawing/2014/main" id="{4C1D2D02-000C-415D-BDE4-2CF76A524E47}"/>
               </a:ext>
             </a:extLst>
           </p:cNvPr>
@@ -9106,7 +9498,7 @@
           <p:cNvPr id="30" name="line-96">
             <a:extLst xmlns:a="http://schemas.openxmlformats.org/drawingml/2006/main">
               <a:ext uri="{FF2B5EF4-FFF2-40B4-BE49-F238E27FC236}">
-                <a16:creationId xmlns:a16="http://schemas.microsoft.com/office/drawing/2014/main" id="{7D0879A5-6A5C-4AE3-B0D7-15870DE6C6F8}"/>
+                <a16:creationId xmlns:a16="http://schemas.microsoft.com/office/drawing/2014/main" id="{D4B5BA2C-FB91-42E8-B19F-4776D5B34870}"/>
               </a:ext>
             </a:extLst>
           </p:cNvPr>
@@ -9146,7 +9538,7 @@
           <p:cNvPr id="31" name="line-97">
             <a:extLst xmlns:a="http://schemas.openxmlformats.org/drawingml/2006/main">
               <a:ext uri="{FF2B5EF4-FFF2-40B4-BE49-F238E27FC236}">
-                <a16:creationId xmlns:a16="http://schemas.microsoft.com/office/drawing/2014/main" id="{E0B86144-C844-43AC-9AA9-A003A2126DE0}"/>
+                <a16:creationId xmlns:a16="http://schemas.microsoft.com/office/drawing/2014/main" id="{A4E36740-6094-40E6-B8DF-74AC017AB975}"/>
               </a:ext>
             </a:extLst>
           </p:cNvPr>
@@ -9186,7 +9578,7 @@
           <p:cNvPr id="32" name="line-98">
             <a:extLst xmlns:a="http://schemas.openxmlformats.org/drawingml/2006/main">
               <a:ext uri="{FF2B5EF4-FFF2-40B4-BE49-F238E27FC236}">
-                <a16:creationId xmlns:a16="http://schemas.microsoft.com/office/drawing/2014/main" id="{34EC7297-E1A9-4EC2-A544-26FEEF5944B4}"/>
+                <a16:creationId xmlns:a16="http://schemas.microsoft.com/office/drawing/2014/main" id="{8DC96517-1BCD-483A-8B57-689B62DABB56}"/>
               </a:ext>
             </a:extLst>
           </p:cNvPr>
@@ -9226,7 +9618,7 @@
           <p:cNvPr id="33" name="line-99">
             <a:extLst xmlns:a="http://schemas.openxmlformats.org/drawingml/2006/main">
               <a:ext uri="{FF2B5EF4-FFF2-40B4-BE49-F238E27FC236}">
-                <a16:creationId xmlns:a16="http://schemas.microsoft.com/office/drawing/2014/main" id="{CDB8A2BD-0D48-455F-99F3-707FB9DE5259}"/>
+                <a16:creationId xmlns:a16="http://schemas.microsoft.com/office/drawing/2014/main" id="{33CEDAB4-F1C6-4482-AE8D-04C43A28B3AE}"/>
               </a:ext>
             </a:extLst>
           </p:cNvPr>
@@ -9266,7 +9658,7 @@
           <p:cNvPr id="34" name="line-100">
             <a:extLst xmlns:a="http://schemas.openxmlformats.org/drawingml/2006/main">
               <a:ext uri="{FF2B5EF4-FFF2-40B4-BE49-F238E27FC236}">
-                <a16:creationId xmlns:a16="http://schemas.microsoft.com/office/drawing/2014/main" id="{B37878E1-1DDC-445E-8FA8-C30767AED9FF}"/>
+                <a16:creationId xmlns:a16="http://schemas.microsoft.com/office/drawing/2014/main" id="{F00BCBA8-19BA-4D95-8651-C0D404A4F8DA}"/>
               </a:ext>
             </a:extLst>
           </p:cNvPr>
@@ -9306,7 +9698,7 @@
           <p:cNvPr id="35" name="line-101">
             <a:extLst xmlns:a="http://schemas.openxmlformats.org/drawingml/2006/main">
               <a:ext uri="{FF2B5EF4-FFF2-40B4-BE49-F238E27FC236}">
-                <a16:creationId xmlns:a16="http://schemas.microsoft.com/office/drawing/2014/main" id="{201E8885-0E35-463E-956F-530F4BABFC99}"/>
+                <a16:creationId xmlns:a16="http://schemas.microsoft.com/office/drawing/2014/main" id="{B70EF529-28D8-467F-9580-98F7A2D2FC55}"/>
               </a:ext>
             </a:extLst>
           </p:cNvPr>
@@ -9346,7 +9738,7 @@
           <p:cNvPr id="36" name="line-102">
             <a:extLst xmlns:a="http://schemas.openxmlformats.org/drawingml/2006/main">
               <a:ext uri="{FF2B5EF4-FFF2-40B4-BE49-F238E27FC236}">
-                <a16:creationId xmlns:a16="http://schemas.microsoft.com/office/drawing/2014/main" id="{8AB1821D-FECC-4EAA-B46B-3E79A1AC7377}"/>
+                <a16:creationId xmlns:a16="http://schemas.microsoft.com/office/drawing/2014/main" id="{3B23EB97-2B0B-48CF-9A31-7BACD256A7AF}"/>
               </a:ext>
             </a:extLst>
           </p:cNvPr>
@@ -9386,7 +9778,7 @@
           <p:cNvPr id="37" name="line-103">
             <a:extLst xmlns:a="http://schemas.openxmlformats.org/drawingml/2006/main">
               <a:ext uri="{FF2B5EF4-FFF2-40B4-BE49-F238E27FC236}">
-                <a16:creationId xmlns:a16="http://schemas.microsoft.com/office/drawing/2014/main" id="{22A4D7DF-5BDA-4BBB-BBFF-3F597A8F7232}"/>
+                <a16:creationId xmlns:a16="http://schemas.microsoft.com/office/drawing/2014/main" id="{365E2C54-F127-4A3C-B81B-0F15214DD132}"/>
               </a:ext>
             </a:extLst>
           </p:cNvPr>
@@ -9426,7 +9818,7 @@
           <p:cNvPr id="38" name="line-104">
             <a:extLst xmlns:a="http://schemas.openxmlformats.org/drawingml/2006/main">
               <a:ext uri="{FF2B5EF4-FFF2-40B4-BE49-F238E27FC236}">
-                <a16:creationId xmlns:a16="http://schemas.microsoft.com/office/drawing/2014/main" id="{12E40ABB-97A7-49F6-9D6E-7AAD59C2A0CA}"/>
+                <a16:creationId xmlns:a16="http://schemas.microsoft.com/office/drawing/2014/main" id="{11DECC97-09D7-419C-8532-6F78A3FAE8E8}"/>
               </a:ext>
             </a:extLst>
           </p:cNvPr>
@@ -9466,7 +9858,7 @@
           <p:cNvPr id="39" name="line-105">
             <a:extLst xmlns:a="http://schemas.openxmlformats.org/drawingml/2006/main">
               <a:ext uri="{FF2B5EF4-FFF2-40B4-BE49-F238E27FC236}">
-                <a16:creationId xmlns:a16="http://schemas.microsoft.com/office/drawing/2014/main" id="{DCEB466B-E123-4D1F-8686-5CD9A69CF609}"/>
+                <a16:creationId xmlns:a16="http://schemas.microsoft.com/office/drawing/2014/main" id="{C72B9FFD-4473-43E2-87CA-DC01F3CD1EBD}"/>
               </a:ext>
             </a:extLst>
           </p:cNvPr>
@@ -9506,7 +9898,7 @@
           <p:cNvPr id="40" name="line-106">
             <a:extLst xmlns:a="http://schemas.openxmlformats.org/drawingml/2006/main">
               <a:ext uri="{FF2B5EF4-FFF2-40B4-BE49-F238E27FC236}">
-                <a16:creationId xmlns:a16="http://schemas.microsoft.com/office/drawing/2014/main" id="{09BAA12B-6CD3-4E72-A0C4-4E4DCBE22428}"/>
+                <a16:creationId xmlns:a16="http://schemas.microsoft.com/office/drawing/2014/main" id="{D5E2EF3B-99BF-4874-9A6D-C3BE97DAF90A}"/>
               </a:ext>
             </a:extLst>
           </p:cNvPr>
@@ -9546,7 +9938,7 @@
           <p:cNvPr id="41" name="line-107">
             <a:extLst xmlns:a="http://schemas.openxmlformats.org/drawingml/2006/main">
               <a:ext uri="{FF2B5EF4-FFF2-40B4-BE49-F238E27FC236}">
-                <a16:creationId xmlns:a16="http://schemas.microsoft.com/office/drawing/2014/main" id="{269BEE03-B7E2-49C1-A331-F68F3EA9DE26}"/>
+                <a16:creationId xmlns:a16="http://schemas.microsoft.com/office/drawing/2014/main" id="{58A39FD6-687E-4646-BC63-FE06E6DE9C0A}"/>
               </a:ext>
             </a:extLst>
           </p:cNvPr>
@@ -9586,7 +9978,7 @@
           <p:cNvPr id="42" name="line-108">
             <a:extLst xmlns:a="http://schemas.openxmlformats.org/drawingml/2006/main">
               <a:ext uri="{FF2B5EF4-FFF2-40B4-BE49-F238E27FC236}">
-                <a16:creationId xmlns:a16="http://schemas.microsoft.com/office/drawing/2014/main" id="{C8B04896-F3A6-4DC8-A71C-E9AC91B92DD6}"/>
+                <a16:creationId xmlns:a16="http://schemas.microsoft.com/office/drawing/2014/main" id="{063780D9-B44C-4FF7-B027-C6AED3302566}"/>
               </a:ext>
             </a:extLst>
           </p:cNvPr>
@@ -9626,7 +10018,7 @@
           <p:cNvPr id="43" name="line-109">
             <a:extLst xmlns:a="http://schemas.openxmlformats.org/drawingml/2006/main">
               <a:ext uri="{FF2B5EF4-FFF2-40B4-BE49-F238E27FC236}">
-                <a16:creationId xmlns:a16="http://schemas.microsoft.com/office/drawing/2014/main" id="{B064222D-45E7-430A-820B-9BEE17A390D2}"/>
+                <a16:creationId xmlns:a16="http://schemas.microsoft.com/office/drawing/2014/main" id="{C607A145-826F-46A5-BCF3-11991EB2B3B0}"/>
               </a:ext>
             </a:extLst>
           </p:cNvPr>
@@ -9666,7 +10058,7 @@
           <p:cNvPr id="44" name="line-110">
             <a:extLst xmlns:a="http://schemas.openxmlformats.org/drawingml/2006/main">
               <a:ext uri="{FF2B5EF4-FFF2-40B4-BE49-F238E27FC236}">
-                <a16:creationId xmlns:a16="http://schemas.microsoft.com/office/drawing/2014/main" id="{736BAD26-3BEC-464D-9FB3-FB3B2777C6E6}"/>
+                <a16:creationId xmlns:a16="http://schemas.microsoft.com/office/drawing/2014/main" id="{8C5283B7-3C08-4F80-8EC1-395C3169D4AD}"/>
               </a:ext>
             </a:extLst>
           </p:cNvPr>
@@ -9706,7 +10098,7 @@
           <p:cNvPr id="45" name="line-111">
             <a:extLst xmlns:a="http://schemas.openxmlformats.org/drawingml/2006/main">
               <a:ext uri="{FF2B5EF4-FFF2-40B4-BE49-F238E27FC236}">
-                <a16:creationId xmlns:a16="http://schemas.microsoft.com/office/drawing/2014/main" id="{8DA2E983-F719-4752-8897-C24AD7A14528}"/>
+                <a16:creationId xmlns:a16="http://schemas.microsoft.com/office/drawing/2014/main" id="{25923D2B-5726-4DD9-82EE-E4E5BD00A59D}"/>
               </a:ext>
             </a:extLst>
           </p:cNvPr>
@@ -9746,7 +10138,7 @@
           <p:cNvPr id="46" name="line-112">
             <a:extLst xmlns:a="http://schemas.openxmlformats.org/drawingml/2006/main">
               <a:ext uri="{FF2B5EF4-FFF2-40B4-BE49-F238E27FC236}">
-                <a16:creationId xmlns:a16="http://schemas.microsoft.com/office/drawing/2014/main" id="{1A21E2E6-B5C3-426B-9806-9A278951730C}"/>
+                <a16:creationId xmlns:a16="http://schemas.microsoft.com/office/drawing/2014/main" id="{46BB216A-D1D8-48A3-AD4D-6C6372B496CA}"/>
               </a:ext>
             </a:extLst>
           </p:cNvPr>
@@ -9786,7 +10178,7 @@
           <p:cNvPr id="47" name="line-113">
             <a:extLst xmlns:a="http://schemas.openxmlformats.org/drawingml/2006/main">
               <a:ext uri="{FF2B5EF4-FFF2-40B4-BE49-F238E27FC236}">
-                <a16:creationId xmlns:a16="http://schemas.microsoft.com/office/drawing/2014/main" id="{5A3320A7-797E-4CD5-ACA1-48F50597725B}"/>
+                <a16:creationId xmlns:a16="http://schemas.microsoft.com/office/drawing/2014/main" id="{41EA37B8-B116-4CE2-ADB9-2BF05630C325}"/>
               </a:ext>
             </a:extLst>
           </p:cNvPr>
@@ -9826,7 +10218,7 @@
           <p:cNvPr id="48" name="line-114">
             <a:extLst xmlns:a="http://schemas.openxmlformats.org/drawingml/2006/main">
               <a:ext uri="{FF2B5EF4-FFF2-40B4-BE49-F238E27FC236}">
-                <a16:creationId xmlns:a16="http://schemas.microsoft.com/office/drawing/2014/main" id="{9EE559B3-7C43-4EA0-9D33-CEAE14E8BD08}"/>
+                <a16:creationId xmlns:a16="http://schemas.microsoft.com/office/drawing/2014/main" id="{F57CD265-EE99-41AD-832F-99EB66A728FE}"/>
               </a:ext>
             </a:extLst>
           </p:cNvPr>
@@ -9866,7 +10258,7 @@
           <p:cNvPr id="49" name="line-115">
             <a:extLst xmlns:a="http://schemas.openxmlformats.org/drawingml/2006/main">
               <a:ext uri="{FF2B5EF4-FFF2-40B4-BE49-F238E27FC236}">
-                <a16:creationId xmlns:a16="http://schemas.microsoft.com/office/drawing/2014/main" id="{976C1EBF-2818-4BC6-9E83-046586A76237}"/>
+                <a16:creationId xmlns:a16="http://schemas.microsoft.com/office/drawing/2014/main" id="{90FDBCCA-A677-4F23-B130-B928BBCD16A9}"/>
               </a:ext>
             </a:extLst>
           </p:cNvPr>
@@ -9906,7 +10298,7 @@
           <p:cNvPr id="50" name="line-116">
             <a:extLst xmlns:a="http://schemas.openxmlformats.org/drawingml/2006/main">
               <a:ext uri="{FF2B5EF4-FFF2-40B4-BE49-F238E27FC236}">
-                <a16:creationId xmlns:a16="http://schemas.microsoft.com/office/drawing/2014/main" id="{1B3B473D-5C55-4E8D-B782-0112BA01D331}"/>
+                <a16:creationId xmlns:a16="http://schemas.microsoft.com/office/drawing/2014/main" id="{5028FDAB-57A1-4348-AE79-10D10B7F5EA5}"/>
               </a:ext>
             </a:extLst>
           </p:cNvPr>
@@ -9946,7 +10338,7 @@
           <p:cNvPr id="51" name="line-117">
             <a:extLst xmlns:a="http://schemas.openxmlformats.org/drawingml/2006/main">
               <a:ext uri="{FF2B5EF4-FFF2-40B4-BE49-F238E27FC236}">
-                <a16:creationId xmlns:a16="http://schemas.microsoft.com/office/drawing/2014/main" id="{BA113E40-50EA-4255-9467-3B7C75581D93}"/>
+                <a16:creationId xmlns:a16="http://schemas.microsoft.com/office/drawing/2014/main" id="{C6418BAD-51FA-401A-AE42-80070B3677BD}"/>
               </a:ext>
             </a:extLst>
           </p:cNvPr>
@@ -9986,7 +10378,7 @@
           <p:cNvPr id="52" name="line-118">
             <a:extLst xmlns:a="http://schemas.openxmlformats.org/drawingml/2006/main">
               <a:ext uri="{FF2B5EF4-FFF2-40B4-BE49-F238E27FC236}">
-                <a16:creationId xmlns:a16="http://schemas.microsoft.com/office/drawing/2014/main" id="{2659EB2D-A8B2-46B0-B868-579DEC2CDF8F}"/>
+                <a16:creationId xmlns:a16="http://schemas.microsoft.com/office/drawing/2014/main" id="{EA5C2E3B-7E9C-42F0-ADA4-DA16B2AC86E2}"/>
               </a:ext>
             </a:extLst>
           </p:cNvPr>
@@ -10026,7 +10418,7 @@
           <p:cNvPr id="53" name="line-119">
             <a:extLst xmlns:a="http://schemas.openxmlformats.org/drawingml/2006/main">
               <a:ext uri="{FF2B5EF4-FFF2-40B4-BE49-F238E27FC236}">
-                <a16:creationId xmlns:a16="http://schemas.microsoft.com/office/drawing/2014/main" id="{802B3B97-E030-44E9-886B-2B009E816DD3}"/>
+                <a16:creationId xmlns:a16="http://schemas.microsoft.com/office/drawing/2014/main" id="{96DA8BD5-6A1A-4338-84DD-A64DAC398C34}"/>
               </a:ext>
             </a:extLst>
           </p:cNvPr>
@@ -10066,7 +10458,7 @@
           <p:cNvPr id="54" name="line-120">
             <a:extLst xmlns:a="http://schemas.openxmlformats.org/drawingml/2006/main">
               <a:ext uri="{FF2B5EF4-FFF2-40B4-BE49-F238E27FC236}">
-                <a16:creationId xmlns:a16="http://schemas.microsoft.com/office/drawing/2014/main" id="{70E5F9F5-EDFB-41A5-9093-A29A388B4468}"/>
+                <a16:creationId xmlns:a16="http://schemas.microsoft.com/office/drawing/2014/main" id="{542DBDAF-2D19-4E6D-84D3-A87D905E2357}"/>
               </a:ext>
             </a:extLst>
           </p:cNvPr>
@@ -10106,7 +10498,7 @@
           <p:cNvPr id="55" name="line-121">
             <a:extLst xmlns:a="http://schemas.openxmlformats.org/drawingml/2006/main">
               <a:ext uri="{FF2B5EF4-FFF2-40B4-BE49-F238E27FC236}">
-                <a16:creationId xmlns:a16="http://schemas.microsoft.com/office/drawing/2014/main" id="{FE9089FB-AD42-45CF-8ABF-E7236796F4A8}"/>
+                <a16:creationId xmlns:a16="http://schemas.microsoft.com/office/drawing/2014/main" id="{534CDDD5-8C4C-4DBE-B6CE-75FE65685C89}"/>
               </a:ext>
             </a:extLst>
           </p:cNvPr>
@@ -10146,7 +10538,7 @@
           <p:cNvPr id="56" name="line-122">
             <a:extLst xmlns:a="http://schemas.openxmlformats.org/drawingml/2006/main">
               <a:ext uri="{FF2B5EF4-FFF2-40B4-BE49-F238E27FC236}">
-                <a16:creationId xmlns:a16="http://schemas.microsoft.com/office/drawing/2014/main" id="{F2B7FAD6-049C-491D-9F42-DAB01562D04E}"/>
+                <a16:creationId xmlns:a16="http://schemas.microsoft.com/office/drawing/2014/main" id="{B506A13E-F818-4435-A19D-437058A4277E}"/>
               </a:ext>
             </a:extLst>
           </p:cNvPr>
@@ -10186,7 +10578,7 @@
           <p:cNvPr id="57" name="line-123">
             <a:extLst xmlns:a="http://schemas.openxmlformats.org/drawingml/2006/main">
               <a:ext uri="{FF2B5EF4-FFF2-40B4-BE49-F238E27FC236}">
-                <a16:creationId xmlns:a16="http://schemas.microsoft.com/office/drawing/2014/main" id="{912E91B2-8EE5-46D6-BD08-B18370266ED9}"/>
+                <a16:creationId xmlns:a16="http://schemas.microsoft.com/office/drawing/2014/main" id="{2E3AE37A-D211-46D8-A569-D08FEC5E4C4D}"/>
               </a:ext>
             </a:extLst>
           </p:cNvPr>
@@ -10226,7 +10618,7 @@
           <p:cNvPr id="58" name="line-124">
             <a:extLst xmlns:a="http://schemas.openxmlformats.org/drawingml/2006/main">
               <a:ext uri="{FF2B5EF4-FFF2-40B4-BE49-F238E27FC236}">
-                <a16:creationId xmlns:a16="http://schemas.microsoft.com/office/drawing/2014/main" id="{1FD3DF73-D42C-4050-8456-604AB1191530}"/>
+                <a16:creationId xmlns:a16="http://schemas.microsoft.com/office/drawing/2014/main" id="{5F3F38CA-41EA-49BE-B6A2-F9F2A05E6AFC}"/>
               </a:ext>
             </a:extLst>
           </p:cNvPr>
@@ -10266,7 +10658,7 @@
           <p:cNvPr id="59" name="line-125">
             <a:extLst xmlns:a="http://schemas.openxmlformats.org/drawingml/2006/main">
               <a:ext uri="{FF2B5EF4-FFF2-40B4-BE49-F238E27FC236}">
-                <a16:creationId xmlns:a16="http://schemas.microsoft.com/office/drawing/2014/main" id="{BAACC906-799F-4C6E-A3AD-E7DEC0260CC0}"/>
+                <a16:creationId xmlns:a16="http://schemas.microsoft.com/office/drawing/2014/main" id="{C0B4DC06-0817-4BD8-822A-CC1D5E4C35F7}"/>
               </a:ext>
             </a:extLst>
           </p:cNvPr>
@@ -10306,7 +10698,7 @@
           <p:cNvPr id="60" name="line-126">
             <a:extLst xmlns:a="http://schemas.openxmlformats.org/drawingml/2006/main">
               <a:ext uri="{FF2B5EF4-FFF2-40B4-BE49-F238E27FC236}">
-                <a16:creationId xmlns:a16="http://schemas.microsoft.com/office/drawing/2014/main" id="{1BA97FFF-B060-4E64-A5BC-D92450699167}"/>
+                <a16:creationId xmlns:a16="http://schemas.microsoft.com/office/drawing/2014/main" id="{9E3F85D0-89D5-48F8-8D71-B25470BB67B3}"/>
               </a:ext>
             </a:extLst>
           </p:cNvPr>
@@ -10346,7 +10738,7 @@
           <p:cNvPr id="61" name="line-127">
             <a:extLst xmlns:a="http://schemas.openxmlformats.org/drawingml/2006/main">
               <a:ext uri="{FF2B5EF4-FFF2-40B4-BE49-F238E27FC236}">
-                <a16:creationId xmlns:a16="http://schemas.microsoft.com/office/drawing/2014/main" id="{AE32ACA6-C846-4CD0-B3A6-80501FB60608}"/>
+                <a16:creationId xmlns:a16="http://schemas.microsoft.com/office/drawing/2014/main" id="{B1E6E948-4091-4AE1-93AF-388FD9454501}"/>
               </a:ext>
             </a:extLst>
           </p:cNvPr>
@@ -10386,7 +10778,7 @@
           <p:cNvPr id="62" name="line-128">
             <a:extLst xmlns:a="http://schemas.openxmlformats.org/drawingml/2006/main">
               <a:ext uri="{FF2B5EF4-FFF2-40B4-BE49-F238E27FC236}">
-                <a16:creationId xmlns:a16="http://schemas.microsoft.com/office/drawing/2014/main" id="{A82DEA61-5D5C-40EA-A911-45B6B51D5452}"/>
+                <a16:creationId xmlns:a16="http://schemas.microsoft.com/office/drawing/2014/main" id="{3815B387-27EE-43A8-86C8-634B94CBB8C0}"/>
               </a:ext>
             </a:extLst>
           </p:cNvPr>
@@ -10426,7 +10818,7 @@
           <p:cNvPr id="63" name="line-129">
             <a:extLst xmlns:a="http://schemas.openxmlformats.org/drawingml/2006/main">
               <a:ext uri="{FF2B5EF4-FFF2-40B4-BE49-F238E27FC236}">
-                <a16:creationId xmlns:a16="http://schemas.microsoft.com/office/drawing/2014/main" id="{AAD34459-99FD-4BDB-8744-4EC7BDF40F38}"/>
+                <a16:creationId xmlns:a16="http://schemas.microsoft.com/office/drawing/2014/main" id="{96A5942B-258C-4D62-8965-7D25581C136C}"/>
               </a:ext>
             </a:extLst>
           </p:cNvPr>
@@ -10466,7 +10858,7 @@
           <p:cNvPr id="64" name="line-130">
             <a:extLst xmlns:a="http://schemas.openxmlformats.org/drawingml/2006/main">
               <a:ext uri="{FF2B5EF4-FFF2-40B4-BE49-F238E27FC236}">
-                <a16:creationId xmlns:a16="http://schemas.microsoft.com/office/drawing/2014/main" id="{9322A536-25E8-4FE3-BF80-F7277820ACD5}"/>
+                <a16:creationId xmlns:a16="http://schemas.microsoft.com/office/drawing/2014/main" id="{A7F9594C-46D9-4995-BBAC-9685FD4D8512}"/>
               </a:ext>
             </a:extLst>
           </p:cNvPr>
@@ -10506,7 +10898,7 @@
           <p:cNvPr id="65" name="line-131">
             <a:extLst xmlns:a="http://schemas.openxmlformats.org/drawingml/2006/main">
               <a:ext uri="{FF2B5EF4-FFF2-40B4-BE49-F238E27FC236}">
-                <a16:creationId xmlns:a16="http://schemas.microsoft.com/office/drawing/2014/main" id="{0B266A14-DB5D-41AB-9CA4-2A05A30D6507}"/>
+                <a16:creationId xmlns:a16="http://schemas.microsoft.com/office/drawing/2014/main" id="{0AF90027-7C00-4617-BE13-E3743B204130}"/>
               </a:ext>
             </a:extLst>
           </p:cNvPr>
@@ -10546,7 +10938,7 @@
           <p:cNvPr id="66" name="line-132">
             <a:extLst xmlns:a="http://schemas.openxmlformats.org/drawingml/2006/main">
               <a:ext uri="{FF2B5EF4-FFF2-40B4-BE49-F238E27FC236}">
-                <a16:creationId xmlns:a16="http://schemas.microsoft.com/office/drawing/2014/main" id="{B72110CC-596C-4E66-AD27-CF028B5D476A}"/>
+                <a16:creationId xmlns:a16="http://schemas.microsoft.com/office/drawing/2014/main" id="{934D59CA-A041-4EEB-9047-6EFA7CCB9BE4}"/>
               </a:ext>
             </a:extLst>
           </p:cNvPr>
@@ -10586,7 +10978,7 @@
           <p:cNvPr id="67" name="line-133">
             <a:extLst xmlns:a="http://schemas.openxmlformats.org/drawingml/2006/main">
               <a:ext uri="{FF2B5EF4-FFF2-40B4-BE49-F238E27FC236}">
-                <a16:creationId xmlns:a16="http://schemas.microsoft.com/office/drawing/2014/main" id="{AD83FE68-B20F-4B24-BDE8-CFCFC9CC2321}"/>
+                <a16:creationId xmlns:a16="http://schemas.microsoft.com/office/drawing/2014/main" id="{D0FBC1AA-0AEC-4BB1-9587-B9CD3D90A77E}"/>
               </a:ext>
             </a:extLst>
           </p:cNvPr>
@@ -10626,7 +11018,7 @@
           <p:cNvPr id="68" name="line-134">
             <a:extLst xmlns:a="http://schemas.openxmlformats.org/drawingml/2006/main">
               <a:ext uri="{FF2B5EF4-FFF2-40B4-BE49-F238E27FC236}">
-                <a16:creationId xmlns:a16="http://schemas.microsoft.com/office/drawing/2014/main" id="{7C1E6B2B-2FA6-4646-B7BA-62C7313F70EA}"/>
+                <a16:creationId xmlns:a16="http://schemas.microsoft.com/office/drawing/2014/main" id="{C389B796-2097-4974-A84E-EB1EB2558FDF}"/>
               </a:ext>
             </a:extLst>
           </p:cNvPr>
@@ -10666,7 +11058,7 @@
           <p:cNvPr id="69" name="line-135">
             <a:extLst xmlns:a="http://schemas.openxmlformats.org/drawingml/2006/main">
               <a:ext uri="{FF2B5EF4-FFF2-40B4-BE49-F238E27FC236}">
-                <a16:creationId xmlns:a16="http://schemas.microsoft.com/office/drawing/2014/main" id="{0E354A58-7F48-4311-A50C-37756D126DB2}"/>
+                <a16:creationId xmlns:a16="http://schemas.microsoft.com/office/drawing/2014/main" id="{0A6F486B-AEB4-4C8A-AC63-B0FED578D742}"/>
               </a:ext>
             </a:extLst>
           </p:cNvPr>
@@ -10706,7 +11098,7 @@
           <p:cNvPr id="70" name="line-136">
             <a:extLst xmlns:a="http://schemas.openxmlformats.org/drawingml/2006/main">
               <a:ext uri="{FF2B5EF4-FFF2-40B4-BE49-F238E27FC236}">
-                <a16:creationId xmlns:a16="http://schemas.microsoft.com/office/drawing/2014/main" id="{DB019C25-746E-47D9-AEAF-AE09997F845A}"/>
+                <a16:creationId xmlns:a16="http://schemas.microsoft.com/office/drawing/2014/main" id="{C766DB9C-47A0-44CC-BB07-C2492D0C9710}"/>
               </a:ext>
             </a:extLst>
           </p:cNvPr>
@@ -10746,7 +11138,7 @@
           <p:cNvPr id="71" name="line-137">
             <a:extLst xmlns:a="http://schemas.openxmlformats.org/drawingml/2006/main">
               <a:ext uri="{FF2B5EF4-FFF2-40B4-BE49-F238E27FC236}">
-                <a16:creationId xmlns:a16="http://schemas.microsoft.com/office/drawing/2014/main" id="{F27593B2-91E7-44FB-BFFD-5305453B3643}"/>
+                <a16:creationId xmlns:a16="http://schemas.microsoft.com/office/drawing/2014/main" id="{16E2CF49-7A96-42F2-ABF1-C5714EED5E48}"/>
               </a:ext>
             </a:extLst>
           </p:cNvPr>
@@ -10786,7 +11178,7 @@
           <p:cNvPr id="72" name="line-138">
             <a:extLst xmlns:a="http://schemas.openxmlformats.org/drawingml/2006/main">
               <a:ext uri="{FF2B5EF4-FFF2-40B4-BE49-F238E27FC236}">
-                <a16:creationId xmlns:a16="http://schemas.microsoft.com/office/drawing/2014/main" id="{63FD1CF9-BF79-441B-A724-A43195817C27}"/>
+                <a16:creationId xmlns:a16="http://schemas.microsoft.com/office/drawing/2014/main" id="{9AF424DD-945B-47E2-8384-A6DEE21B9AC4}"/>
               </a:ext>
             </a:extLst>
           </p:cNvPr>
@@ -10826,7 +11218,7 @@
           <p:cNvPr id="73" name="line-139">
             <a:extLst xmlns:a="http://schemas.openxmlformats.org/drawingml/2006/main">
               <a:ext uri="{FF2B5EF4-FFF2-40B4-BE49-F238E27FC236}">
-                <a16:creationId xmlns:a16="http://schemas.microsoft.com/office/drawing/2014/main" id="{814CFD76-12AA-47A9-8AB9-4A5707A56383}"/>
+                <a16:creationId xmlns:a16="http://schemas.microsoft.com/office/drawing/2014/main" id="{68282401-076A-45EE-81E8-0893A67BD498}"/>
               </a:ext>
             </a:extLst>
           </p:cNvPr>
@@ -10866,7 +11258,7 @@
           <p:cNvPr id="74" name="line-140">
             <a:extLst xmlns:a="http://schemas.openxmlformats.org/drawingml/2006/main">
               <a:ext uri="{FF2B5EF4-FFF2-40B4-BE49-F238E27FC236}">
-                <a16:creationId xmlns:a16="http://schemas.microsoft.com/office/drawing/2014/main" id="{EB133FF5-31F3-4CB0-8517-7AE4B6C0F8B2}"/>
+                <a16:creationId xmlns:a16="http://schemas.microsoft.com/office/drawing/2014/main" id="{34CC4B0E-A5D1-41D0-9A3F-E4B091B64816}"/>
               </a:ext>
             </a:extLst>
           </p:cNvPr>
@@ -10906,7 +11298,7 @@
           <p:cNvPr id="75" name="line-141">
             <a:extLst xmlns:a="http://schemas.openxmlformats.org/drawingml/2006/main">
               <a:ext uri="{FF2B5EF4-FFF2-40B4-BE49-F238E27FC236}">
-                <a16:creationId xmlns:a16="http://schemas.microsoft.com/office/drawing/2014/main" id="{FEA353C7-E5D7-47B6-9F70-0237A5B5E251}"/>
+                <a16:creationId xmlns:a16="http://schemas.microsoft.com/office/drawing/2014/main" id="{AE1246B4-7198-4471-825E-3B757E89971E}"/>
               </a:ext>
             </a:extLst>
           </p:cNvPr>
@@ -10946,7 +11338,7 @@
           <p:cNvPr id="76" name="line-142">
             <a:extLst xmlns:a="http://schemas.openxmlformats.org/drawingml/2006/main">
               <a:ext uri="{FF2B5EF4-FFF2-40B4-BE49-F238E27FC236}">
-                <a16:creationId xmlns:a16="http://schemas.microsoft.com/office/drawing/2014/main" id="{14A42AA1-C1BC-4E1C-A80B-4D90FA98C257}"/>
+                <a16:creationId xmlns:a16="http://schemas.microsoft.com/office/drawing/2014/main" id="{A3A41B82-7918-43BE-B2C2-2DA54A094F28}"/>
               </a:ext>
             </a:extLst>
           </p:cNvPr>
@@ -10986,7 +11378,7 @@
           <p:cNvPr id="77" name="line-143">
             <a:extLst xmlns:a="http://schemas.openxmlformats.org/drawingml/2006/main">
               <a:ext uri="{FF2B5EF4-FFF2-40B4-BE49-F238E27FC236}">
-                <a16:creationId xmlns:a16="http://schemas.microsoft.com/office/drawing/2014/main" id="{650855AF-9EDE-4020-A0EE-EDC64D2A2B9E}"/>
+                <a16:creationId xmlns:a16="http://schemas.microsoft.com/office/drawing/2014/main" id="{FF94A329-91D0-45AA-902F-B69072F8C0C3}"/>
               </a:ext>
             </a:extLst>
           </p:cNvPr>
@@ -11026,7 +11418,7 @@
           <p:cNvPr id="78" name="line-144">
             <a:extLst xmlns:a="http://schemas.openxmlformats.org/drawingml/2006/main">
               <a:ext uri="{FF2B5EF4-FFF2-40B4-BE49-F238E27FC236}">
-                <a16:creationId xmlns:a16="http://schemas.microsoft.com/office/drawing/2014/main" id="{FC3FF5A7-E954-4EFC-B1FA-913E13ABD9F8}"/>
+                <a16:creationId xmlns:a16="http://schemas.microsoft.com/office/drawing/2014/main" id="{0420DBFD-2BD8-4F54-B50E-17F8A831995F}"/>
               </a:ext>
             </a:extLst>
           </p:cNvPr>
@@ -11066,7 +11458,7 @@
           <p:cNvPr id="79" name="line-145">
             <a:extLst xmlns:a="http://schemas.openxmlformats.org/drawingml/2006/main">
               <a:ext uri="{FF2B5EF4-FFF2-40B4-BE49-F238E27FC236}">
-                <a16:creationId xmlns:a16="http://schemas.microsoft.com/office/drawing/2014/main" id="{3FF85FCE-0151-48A4-AD4F-90A260802AD2}"/>
+                <a16:creationId xmlns:a16="http://schemas.microsoft.com/office/drawing/2014/main" id="{80F9A51F-57E1-430F-AD38-2A0B02A6F664}"/>
               </a:ext>
             </a:extLst>
           </p:cNvPr>
@@ -11106,7 +11498,7 @@
           <p:cNvPr id="80" name="line-146">
             <a:extLst xmlns:a="http://schemas.openxmlformats.org/drawingml/2006/main">
               <a:ext uri="{FF2B5EF4-FFF2-40B4-BE49-F238E27FC236}">
-                <a16:creationId xmlns:a16="http://schemas.microsoft.com/office/drawing/2014/main" id="{A90A6A0A-7F0E-45A3-A725-6884FFC421EB}"/>
+                <a16:creationId xmlns:a16="http://schemas.microsoft.com/office/drawing/2014/main" id="{6747956A-76FE-4B17-BE71-DCB52F76D750}"/>
               </a:ext>
             </a:extLst>
           </p:cNvPr>
@@ -11146,7 +11538,7 @@
           <p:cNvPr id="81" name="line-147">
             <a:extLst xmlns:a="http://schemas.openxmlformats.org/drawingml/2006/main">
               <a:ext uri="{FF2B5EF4-FFF2-40B4-BE49-F238E27FC236}">
-                <a16:creationId xmlns:a16="http://schemas.microsoft.com/office/drawing/2014/main" id="{2E19BAB3-24CC-4CD8-9581-62C2C55C5775}"/>
+                <a16:creationId xmlns:a16="http://schemas.microsoft.com/office/drawing/2014/main" id="{A8438335-F928-4E24-8F21-95F999ACDABE}"/>
               </a:ext>
             </a:extLst>
           </p:cNvPr>
@@ -11186,7 +11578,7 @@
           <p:cNvPr id="82" name="line-148">
             <a:extLst xmlns:a="http://schemas.openxmlformats.org/drawingml/2006/main">
               <a:ext uri="{FF2B5EF4-FFF2-40B4-BE49-F238E27FC236}">
-                <a16:creationId xmlns:a16="http://schemas.microsoft.com/office/drawing/2014/main" id="{079BB959-D0EF-4CD5-9647-2ED6B488D3F6}"/>
+                <a16:creationId xmlns:a16="http://schemas.microsoft.com/office/drawing/2014/main" id="{E0F0F02D-D824-4621-9F44-A2FCF0AC6C97}"/>
               </a:ext>
             </a:extLst>
           </p:cNvPr>
@@ -11226,7 +11618,7 @@
           <p:cNvPr id="83" name="object-149">
             <a:extLst xmlns:a="http://schemas.openxmlformats.org/drawingml/2006/main">
               <a:ext uri="{FF2B5EF4-FFF2-40B4-BE49-F238E27FC236}">
-                <a16:creationId xmlns:a16="http://schemas.microsoft.com/office/drawing/2014/main" id="{A594F3EE-4F7F-43A0-9DEC-E5EA5414CD67}"/>
+                <a16:creationId xmlns:a16="http://schemas.microsoft.com/office/drawing/2014/main" id="{67E13572-B599-45A7-BD0A-F8E3DF90A737}"/>
               </a:ext>
             </a:extLst>
           </p:cNvPr>
@@ -11316,7 +11708,7 @@
           <p:cNvPr id="84" name="object-150">
             <a:extLst xmlns:a="http://schemas.openxmlformats.org/drawingml/2006/main">
               <a:ext uri="{FF2B5EF4-FFF2-40B4-BE49-F238E27FC236}">
-                <a16:creationId xmlns:a16="http://schemas.microsoft.com/office/drawing/2014/main" id="{14E77F45-A98D-437D-9559-F0F79697B710}"/>
+                <a16:creationId xmlns:a16="http://schemas.microsoft.com/office/drawing/2014/main" id="{4C004916-550E-4252-ACD6-818092CB7B43}"/>
               </a:ext>
             </a:extLst>
           </p:cNvPr>
@@ -11383,7 +11775,7 @@
           <p:cNvPr id="85" name="line-151">
             <a:extLst xmlns:a="http://schemas.openxmlformats.org/drawingml/2006/main">
               <a:ext uri="{FF2B5EF4-FFF2-40B4-BE49-F238E27FC236}">
-                <a16:creationId xmlns:a16="http://schemas.microsoft.com/office/drawing/2014/main" id="{9A215876-E253-4DA0-9CDE-46FE057ECC34}"/>
+                <a16:creationId xmlns:a16="http://schemas.microsoft.com/office/drawing/2014/main" id="{64C19FF4-17DD-4D5E-96E3-E0746A02A94D}"/>
               </a:ext>
             </a:extLst>
           </p:cNvPr>
@@ -11423,7 +11815,7 @@
           <p:cNvPr id="86" name="line-152">
             <a:extLst xmlns:a="http://schemas.openxmlformats.org/drawingml/2006/main">
               <a:ext uri="{FF2B5EF4-FFF2-40B4-BE49-F238E27FC236}">
-                <a16:creationId xmlns:a16="http://schemas.microsoft.com/office/drawing/2014/main" id="{661802C0-7615-4464-8D5C-63FCFAA23662}"/>
+                <a16:creationId xmlns:a16="http://schemas.microsoft.com/office/drawing/2014/main" id="{E1D110CA-6EDD-4381-8529-6DF83D43B886}"/>
               </a:ext>
             </a:extLst>
           </p:cNvPr>
@@ -11463,7 +11855,7 @@
           <p:cNvPr id="87" name="line-153">
             <a:extLst xmlns:a="http://schemas.openxmlformats.org/drawingml/2006/main">
               <a:ext uri="{FF2B5EF4-FFF2-40B4-BE49-F238E27FC236}">
-                <a16:creationId xmlns:a16="http://schemas.microsoft.com/office/drawing/2014/main" id="{E20D2933-9085-4C96-9569-CDE84B8D2938}"/>
+                <a16:creationId xmlns:a16="http://schemas.microsoft.com/office/drawing/2014/main" id="{9F05A38A-3244-46F8-BBD7-551859D12655}"/>
               </a:ext>
             </a:extLst>
           </p:cNvPr>
@@ -11503,7 +11895,7 @@
           <p:cNvPr id="88" name="line-154">
             <a:extLst xmlns:a="http://schemas.openxmlformats.org/drawingml/2006/main">
               <a:ext uri="{FF2B5EF4-FFF2-40B4-BE49-F238E27FC236}">
-                <a16:creationId xmlns:a16="http://schemas.microsoft.com/office/drawing/2014/main" id="{3C4A6D2C-FB38-4693-972F-C935765CEEC4}"/>
+                <a16:creationId xmlns:a16="http://schemas.microsoft.com/office/drawing/2014/main" id="{3106B061-E637-45F4-9387-9967E5D8226A}"/>
               </a:ext>
             </a:extLst>
           </p:cNvPr>
@@ -11543,7 +11935,7 @@
           <p:cNvPr id="89" name="line-155">
             <a:extLst xmlns:a="http://schemas.openxmlformats.org/drawingml/2006/main">
               <a:ext uri="{FF2B5EF4-FFF2-40B4-BE49-F238E27FC236}">
-                <a16:creationId xmlns:a16="http://schemas.microsoft.com/office/drawing/2014/main" id="{7BE0F281-4B4E-480D-A47F-6ED5490F984B}"/>
+                <a16:creationId xmlns:a16="http://schemas.microsoft.com/office/drawing/2014/main" id="{7A68396A-072D-45EF-A1E8-C74D7C8828F9}"/>
               </a:ext>
             </a:extLst>
           </p:cNvPr>
@@ -11583,7 +11975,7 @@
           <p:cNvPr id="90" name="line-156">
             <a:extLst xmlns:a="http://schemas.openxmlformats.org/drawingml/2006/main">
               <a:ext uri="{FF2B5EF4-FFF2-40B4-BE49-F238E27FC236}">
-                <a16:creationId xmlns:a16="http://schemas.microsoft.com/office/drawing/2014/main" id="{639813C9-CAA6-4C41-823B-FB5CA72AF62C}"/>
+                <a16:creationId xmlns:a16="http://schemas.microsoft.com/office/drawing/2014/main" id="{382B3DFA-0126-4AE1-B42F-1CE5A9230E28}"/>
               </a:ext>
             </a:extLst>
           </p:cNvPr>
@@ -11623,7 +12015,7 @@
           <p:cNvPr id="91" name="line-157">
             <a:extLst xmlns:a="http://schemas.openxmlformats.org/drawingml/2006/main">
               <a:ext uri="{FF2B5EF4-FFF2-40B4-BE49-F238E27FC236}">
-                <a16:creationId xmlns:a16="http://schemas.microsoft.com/office/drawing/2014/main" id="{1A55B843-6868-4D6E-A0E0-EE00B3B37FA4}"/>
+                <a16:creationId xmlns:a16="http://schemas.microsoft.com/office/drawing/2014/main" id="{C71E48AE-9DAB-464C-9FBF-D1058F58DB56}"/>
               </a:ext>
             </a:extLst>
           </p:cNvPr>
@@ -11663,7 +12055,7 @@
           <p:cNvPr id="92" name="line-158">
             <a:extLst xmlns:a="http://schemas.openxmlformats.org/drawingml/2006/main">
               <a:ext uri="{FF2B5EF4-FFF2-40B4-BE49-F238E27FC236}">
-                <a16:creationId xmlns:a16="http://schemas.microsoft.com/office/drawing/2014/main" id="{441D7440-801D-48BC-8388-6C11DEFBA6C4}"/>
+                <a16:creationId xmlns:a16="http://schemas.microsoft.com/office/drawing/2014/main" id="{55E58CBF-A7C4-4C12-8C3F-FD3D5859EE7C}"/>
               </a:ext>
             </a:extLst>
           </p:cNvPr>
@@ -11703,7 +12095,7 @@
           <p:cNvPr id="93" name="line-159">
             <a:extLst xmlns:a="http://schemas.openxmlformats.org/drawingml/2006/main">
               <a:ext uri="{FF2B5EF4-FFF2-40B4-BE49-F238E27FC236}">
-                <a16:creationId xmlns:a16="http://schemas.microsoft.com/office/drawing/2014/main" id="{3297BA0F-F395-4505-BC40-D42DBC7D08B0}"/>
+                <a16:creationId xmlns:a16="http://schemas.microsoft.com/office/drawing/2014/main" id="{9FF69D95-DFFC-4B2D-A2EC-4FBD505C6509}"/>
               </a:ext>
             </a:extLst>
           </p:cNvPr>
@@ -11743,7 +12135,7 @@
           <p:cNvPr id="94" name="line-160">
             <a:extLst xmlns:a="http://schemas.openxmlformats.org/drawingml/2006/main">
               <a:ext uri="{FF2B5EF4-FFF2-40B4-BE49-F238E27FC236}">
-                <a16:creationId xmlns:a16="http://schemas.microsoft.com/office/drawing/2014/main" id="{DCA91AA4-A317-4BEB-BAE1-EE469DE15569}"/>
+                <a16:creationId xmlns:a16="http://schemas.microsoft.com/office/drawing/2014/main" id="{A0ED749F-BE63-43B5-BCA9-DDF23C1364DE}"/>
               </a:ext>
             </a:extLst>
           </p:cNvPr>
@@ -11783,7 +12175,7 @@
           <p:cNvPr id="95" name="line-161">
             <a:extLst xmlns:a="http://schemas.openxmlformats.org/drawingml/2006/main">
               <a:ext uri="{FF2B5EF4-FFF2-40B4-BE49-F238E27FC236}">
-                <a16:creationId xmlns:a16="http://schemas.microsoft.com/office/drawing/2014/main" id="{62A5586F-B1E8-4083-BD0F-4515C79AF9E6}"/>
+                <a16:creationId xmlns:a16="http://schemas.microsoft.com/office/drawing/2014/main" id="{6615367A-766F-4351-8F6B-5791572FB05D}"/>
               </a:ext>
             </a:extLst>
           </p:cNvPr>
@@ -11823,7 +12215,7 @@
           <p:cNvPr id="96" name="line-162">
             <a:extLst xmlns:a="http://schemas.openxmlformats.org/drawingml/2006/main">
               <a:ext uri="{FF2B5EF4-FFF2-40B4-BE49-F238E27FC236}">
-                <a16:creationId xmlns:a16="http://schemas.microsoft.com/office/drawing/2014/main" id="{9D9F666B-662A-475A-A9EA-2730661DA569}"/>
+                <a16:creationId xmlns:a16="http://schemas.microsoft.com/office/drawing/2014/main" id="{79A43F72-8385-4977-8748-2CEDA8EE6804}"/>
               </a:ext>
             </a:extLst>
           </p:cNvPr>
@@ -11863,7 +12255,7 @@
           <p:cNvPr id="97" name="line-163">
             <a:extLst xmlns:a="http://schemas.openxmlformats.org/drawingml/2006/main">
               <a:ext uri="{FF2B5EF4-FFF2-40B4-BE49-F238E27FC236}">
-                <a16:creationId xmlns:a16="http://schemas.microsoft.com/office/drawing/2014/main" id="{B99D4480-1D8E-461E-B103-79A8E2DA687C}"/>
+                <a16:creationId xmlns:a16="http://schemas.microsoft.com/office/drawing/2014/main" id="{82254113-9240-4922-AFCB-4F496B931684}"/>
               </a:ext>
             </a:extLst>
           </p:cNvPr>
@@ -11903,7 +12295,7 @@
           <p:cNvPr id="98" name="line-164">
             <a:extLst xmlns:a="http://schemas.openxmlformats.org/drawingml/2006/main">
               <a:ext uri="{FF2B5EF4-FFF2-40B4-BE49-F238E27FC236}">
-                <a16:creationId xmlns:a16="http://schemas.microsoft.com/office/drawing/2014/main" id="{54D2522F-0F35-4F57-96B6-83D468123408}"/>
+                <a16:creationId xmlns:a16="http://schemas.microsoft.com/office/drawing/2014/main" id="{206F010C-D4E8-4BA2-98A3-E923D8561138}"/>
               </a:ext>
             </a:extLst>
           </p:cNvPr>
@@ -11943,7 +12335,7 @@
           <p:cNvPr id="99" name="line-165">
             <a:extLst xmlns:a="http://schemas.openxmlformats.org/drawingml/2006/main">
               <a:ext uri="{FF2B5EF4-FFF2-40B4-BE49-F238E27FC236}">
-                <a16:creationId xmlns:a16="http://schemas.microsoft.com/office/drawing/2014/main" id="{600F043E-EEAA-46ED-9069-CB02FEF8290D}"/>
+                <a16:creationId xmlns:a16="http://schemas.microsoft.com/office/drawing/2014/main" id="{5670C70C-DA0A-4D00-BF7A-199AA819CB82}"/>
               </a:ext>
             </a:extLst>
           </p:cNvPr>
@@ -11983,7 +12375,7 @@
           <p:cNvPr id="100" name="line-166">
             <a:extLst xmlns:a="http://schemas.openxmlformats.org/drawingml/2006/main">
               <a:ext uri="{FF2B5EF4-FFF2-40B4-BE49-F238E27FC236}">
-                <a16:creationId xmlns:a16="http://schemas.microsoft.com/office/drawing/2014/main" id="{8ECCD7E4-8869-4C37-9BD5-9C5B33D5A5E1}"/>
+                <a16:creationId xmlns:a16="http://schemas.microsoft.com/office/drawing/2014/main" id="{F4643D0C-E5C9-4440-AF1D-ADAB325B5EA0}"/>
               </a:ext>
             </a:extLst>
           </p:cNvPr>
@@ -12023,7 +12415,7 @@
           <p:cNvPr id="101" name="line-167">
             <a:extLst xmlns:a="http://schemas.openxmlformats.org/drawingml/2006/main">
               <a:ext uri="{FF2B5EF4-FFF2-40B4-BE49-F238E27FC236}">
-                <a16:creationId xmlns:a16="http://schemas.microsoft.com/office/drawing/2014/main" id="{4EC8CD27-8E0F-4C15-9EE6-6F38B6654A1A}"/>
+                <a16:creationId xmlns:a16="http://schemas.microsoft.com/office/drawing/2014/main" id="{F5168F0A-1478-464A-98AF-43375160BD85}"/>
               </a:ext>
             </a:extLst>
           </p:cNvPr>
@@ -12063,7 +12455,7 @@
           <p:cNvPr id="102" name="line-168">
             <a:extLst xmlns:a="http://schemas.openxmlformats.org/drawingml/2006/main">
               <a:ext uri="{FF2B5EF4-FFF2-40B4-BE49-F238E27FC236}">
-                <a16:creationId xmlns:a16="http://schemas.microsoft.com/office/drawing/2014/main" id="{32BBC655-F06C-4C9A-833F-E1C186D0570B}"/>
+                <a16:creationId xmlns:a16="http://schemas.microsoft.com/office/drawing/2014/main" id="{1CAACB22-596D-49E2-9F08-34E67AC325A8}"/>
               </a:ext>
             </a:extLst>
           </p:cNvPr>
@@ -12103,7 +12495,7 @@
           <p:cNvPr id="103" name="line-169">
             <a:extLst xmlns:a="http://schemas.openxmlformats.org/drawingml/2006/main">
               <a:ext uri="{FF2B5EF4-FFF2-40B4-BE49-F238E27FC236}">
-                <a16:creationId xmlns:a16="http://schemas.microsoft.com/office/drawing/2014/main" id="{228038A1-A8C6-4248-894A-FF04867C74CE}"/>
+                <a16:creationId xmlns:a16="http://schemas.microsoft.com/office/drawing/2014/main" id="{998249B2-3BFB-4DB8-986F-8701895DAB3C}"/>
               </a:ext>
             </a:extLst>
           </p:cNvPr>
@@ -12143,7 +12535,7 @@
           <p:cNvPr id="104" name="line-170">
             <a:extLst xmlns:a="http://schemas.openxmlformats.org/drawingml/2006/main">
               <a:ext uri="{FF2B5EF4-FFF2-40B4-BE49-F238E27FC236}">
-                <a16:creationId xmlns:a16="http://schemas.microsoft.com/office/drawing/2014/main" id="{9DF530BC-D1DD-446D-8F93-4A2FEE9D8EF7}"/>
+                <a16:creationId xmlns:a16="http://schemas.microsoft.com/office/drawing/2014/main" id="{1086E722-6AED-4B26-B58E-D44C1004856A}"/>
               </a:ext>
             </a:extLst>
           </p:cNvPr>
@@ -12183,7 +12575,7 @@
           <p:cNvPr id="105" name="line-171">
             <a:extLst xmlns:a="http://schemas.openxmlformats.org/drawingml/2006/main">
               <a:ext uri="{FF2B5EF4-FFF2-40B4-BE49-F238E27FC236}">
-                <a16:creationId xmlns:a16="http://schemas.microsoft.com/office/drawing/2014/main" id="{30F907BF-B796-459A-8030-758F23C91041}"/>
+                <a16:creationId xmlns:a16="http://schemas.microsoft.com/office/drawing/2014/main" id="{3C826B7F-4BDF-43BB-B526-DEC35A0FBBBE}"/>
               </a:ext>
             </a:extLst>
           </p:cNvPr>
@@ -12223,7 +12615,7 @@
           <p:cNvPr id="106" name="line-172">
             <a:extLst xmlns:a="http://schemas.openxmlformats.org/drawingml/2006/main">
               <a:ext uri="{FF2B5EF4-FFF2-40B4-BE49-F238E27FC236}">
-                <a16:creationId xmlns:a16="http://schemas.microsoft.com/office/drawing/2014/main" id="{150132B5-7DCD-489A-B99F-00AB0D2BECA0}"/>
+                <a16:creationId xmlns:a16="http://schemas.microsoft.com/office/drawing/2014/main" id="{1E015784-2FAD-4BFF-B156-D3F3B1EE20EA}"/>
               </a:ext>
             </a:extLst>
           </p:cNvPr>
@@ -12263,7 +12655,7 @@
           <p:cNvPr id="107" name="line-173">
             <a:extLst xmlns:a="http://schemas.openxmlformats.org/drawingml/2006/main">
               <a:ext uri="{FF2B5EF4-FFF2-40B4-BE49-F238E27FC236}">
-                <a16:creationId xmlns:a16="http://schemas.microsoft.com/office/drawing/2014/main" id="{5B7FD07A-8C9E-4D58-8640-5A3DC0A0B1C0}"/>
+                <a16:creationId xmlns:a16="http://schemas.microsoft.com/office/drawing/2014/main" id="{355E1903-61F8-40A2-AFB4-6A03DE021DCC}"/>
               </a:ext>
             </a:extLst>
           </p:cNvPr>
@@ -12303,7 +12695,7 @@
           <p:cNvPr id="108" name="line-174">
             <a:extLst xmlns:a="http://schemas.openxmlformats.org/drawingml/2006/main">
               <a:ext uri="{FF2B5EF4-FFF2-40B4-BE49-F238E27FC236}">
-                <a16:creationId xmlns:a16="http://schemas.microsoft.com/office/drawing/2014/main" id="{40B3C00D-FCB6-4120-BAAB-A2699969E61C}"/>
+                <a16:creationId xmlns:a16="http://schemas.microsoft.com/office/drawing/2014/main" id="{5B3CA9FB-D4CF-4295-B24D-539876860B6E}"/>
               </a:ext>
             </a:extLst>
           </p:cNvPr>
@@ -12343,7 +12735,7 @@
           <p:cNvPr id="109" name="line-175">
             <a:extLst xmlns:a="http://schemas.openxmlformats.org/drawingml/2006/main">
               <a:ext uri="{FF2B5EF4-FFF2-40B4-BE49-F238E27FC236}">
-                <a16:creationId xmlns:a16="http://schemas.microsoft.com/office/drawing/2014/main" id="{0F9A64C8-3887-4D8B-B044-45D93447AC2F}"/>
+                <a16:creationId xmlns:a16="http://schemas.microsoft.com/office/drawing/2014/main" id="{6F4853E4-4190-4D7C-BF39-009463180A3C}"/>
               </a:ext>
             </a:extLst>
           </p:cNvPr>
@@ -12383,7 +12775,7 @@
           <p:cNvPr id="110" name="line-176">
             <a:extLst xmlns:a="http://schemas.openxmlformats.org/drawingml/2006/main">
               <a:ext uri="{FF2B5EF4-FFF2-40B4-BE49-F238E27FC236}">
-                <a16:creationId xmlns:a16="http://schemas.microsoft.com/office/drawing/2014/main" id="{4228A18F-69E5-432A-8EC8-D873F6CF6353}"/>
+                <a16:creationId xmlns:a16="http://schemas.microsoft.com/office/drawing/2014/main" id="{61227483-9215-42D4-899D-17A55194CDE5}"/>
               </a:ext>
             </a:extLst>
           </p:cNvPr>
@@ -12423,7 +12815,7 @@
           <p:cNvPr id="111" name="line-177">
             <a:extLst xmlns:a="http://schemas.openxmlformats.org/drawingml/2006/main">
               <a:ext uri="{FF2B5EF4-FFF2-40B4-BE49-F238E27FC236}">
-                <a16:creationId xmlns:a16="http://schemas.microsoft.com/office/drawing/2014/main" id="{0689FE88-3604-4448-A67C-DB5319F7166A}"/>
+                <a16:creationId xmlns:a16="http://schemas.microsoft.com/office/drawing/2014/main" id="{0F8BF70A-5F29-48EB-A3F6-FEF972489712}"/>
               </a:ext>
             </a:extLst>
           </p:cNvPr>
@@ -12463,7 +12855,7 @@
           <p:cNvPr id="112" name="line-178">
             <a:extLst xmlns:a="http://schemas.openxmlformats.org/drawingml/2006/main">
               <a:ext uri="{FF2B5EF4-FFF2-40B4-BE49-F238E27FC236}">
-                <a16:creationId xmlns:a16="http://schemas.microsoft.com/office/drawing/2014/main" id="{A3F90A8D-6629-41E4-A71E-DC312256CD85}"/>
+                <a16:creationId xmlns:a16="http://schemas.microsoft.com/office/drawing/2014/main" id="{48537BD9-6725-48B0-993B-7FFC5F17C88C}"/>
               </a:ext>
             </a:extLst>
           </p:cNvPr>
@@ -12503,7 +12895,7 @@
           <p:cNvPr id="113" name="line-179">
             <a:extLst xmlns:a="http://schemas.openxmlformats.org/drawingml/2006/main">
               <a:ext uri="{FF2B5EF4-FFF2-40B4-BE49-F238E27FC236}">
-                <a16:creationId xmlns:a16="http://schemas.microsoft.com/office/drawing/2014/main" id="{BC06DF28-00C4-416F-9DE6-7EAE9330BAB4}"/>
+                <a16:creationId xmlns:a16="http://schemas.microsoft.com/office/drawing/2014/main" id="{59F365AE-6201-4529-A4B1-214C4F0F6B70}"/>
               </a:ext>
             </a:extLst>
           </p:cNvPr>
@@ -12543,7 +12935,7 @@
           <p:cNvPr id="114" name="line-180">
             <a:extLst xmlns:a="http://schemas.openxmlformats.org/drawingml/2006/main">
               <a:ext uri="{FF2B5EF4-FFF2-40B4-BE49-F238E27FC236}">
-                <a16:creationId xmlns:a16="http://schemas.microsoft.com/office/drawing/2014/main" id="{009DDD08-A7AA-4426-9F0C-BC9F832158E7}"/>
+                <a16:creationId xmlns:a16="http://schemas.microsoft.com/office/drawing/2014/main" id="{DFB34193-8A3A-4EF8-B2D2-AD4E9053E414}"/>
               </a:ext>
             </a:extLst>
           </p:cNvPr>
@@ -12583,7 +12975,7 @@
           <p:cNvPr id="115" name="line-181">
             <a:extLst xmlns:a="http://schemas.openxmlformats.org/drawingml/2006/main">
               <a:ext uri="{FF2B5EF4-FFF2-40B4-BE49-F238E27FC236}">
-                <a16:creationId xmlns:a16="http://schemas.microsoft.com/office/drawing/2014/main" id="{AF7F17AC-91BA-422D-BB0B-E47C81C8C082}"/>
+                <a16:creationId xmlns:a16="http://schemas.microsoft.com/office/drawing/2014/main" id="{F79C4FDF-53E2-45E9-AEBF-975F0548ACD3}"/>
               </a:ext>
             </a:extLst>
           </p:cNvPr>
@@ -12623,7 +13015,7 @@
           <p:cNvPr id="116" name="line-182">
             <a:extLst xmlns:a="http://schemas.openxmlformats.org/drawingml/2006/main">
               <a:ext uri="{FF2B5EF4-FFF2-40B4-BE49-F238E27FC236}">
-                <a16:creationId xmlns:a16="http://schemas.microsoft.com/office/drawing/2014/main" id="{76F3A25A-4765-4586-9E8B-D239EA72E215}"/>
+                <a16:creationId xmlns:a16="http://schemas.microsoft.com/office/drawing/2014/main" id="{08EAD2EA-2182-442E-BB4D-8F5DFDA55026}"/>
               </a:ext>
             </a:extLst>
           </p:cNvPr>
@@ -12663,7 +13055,7 @@
           <p:cNvPr id="117" name="line-183">
             <a:extLst xmlns:a="http://schemas.openxmlformats.org/drawingml/2006/main">
               <a:ext uri="{FF2B5EF4-FFF2-40B4-BE49-F238E27FC236}">
-                <a16:creationId xmlns:a16="http://schemas.microsoft.com/office/drawing/2014/main" id="{0C985075-79B0-4B3B-9CDE-689046BE23CF}"/>
+                <a16:creationId xmlns:a16="http://schemas.microsoft.com/office/drawing/2014/main" id="{D5B1ED2B-6B7C-45E2-8308-9E184624D858}"/>
               </a:ext>
             </a:extLst>
           </p:cNvPr>
@@ -12703,7 +13095,7 @@
           <p:cNvPr id="118" name="line-184">
             <a:extLst xmlns:a="http://schemas.openxmlformats.org/drawingml/2006/main">
               <a:ext uri="{FF2B5EF4-FFF2-40B4-BE49-F238E27FC236}">
-                <a16:creationId xmlns:a16="http://schemas.microsoft.com/office/drawing/2014/main" id="{5EE27FDD-9898-414D-8814-F5DC81D0CFE6}"/>
+                <a16:creationId xmlns:a16="http://schemas.microsoft.com/office/drawing/2014/main" id="{5F74B600-7177-4707-9B82-CFDB7B282CCA}"/>
               </a:ext>
             </a:extLst>
           </p:cNvPr>
@@ -12743,7 +13135,7 @@
           <p:cNvPr id="119" name="line-185">
             <a:extLst xmlns:a="http://schemas.openxmlformats.org/drawingml/2006/main">
               <a:ext uri="{FF2B5EF4-FFF2-40B4-BE49-F238E27FC236}">
-                <a16:creationId xmlns:a16="http://schemas.microsoft.com/office/drawing/2014/main" id="{AB26039E-9FF9-4CD4-8A3D-3CF9B4B65F72}"/>
+                <a16:creationId xmlns:a16="http://schemas.microsoft.com/office/drawing/2014/main" id="{0106BDB8-3521-45E2-8A5F-1AAAC8732667}"/>
               </a:ext>
             </a:extLst>
           </p:cNvPr>
@@ -12783,7 +13175,7 @@
           <p:cNvPr id="120" name="line-186">
             <a:extLst xmlns:a="http://schemas.openxmlformats.org/drawingml/2006/main">
               <a:ext uri="{FF2B5EF4-FFF2-40B4-BE49-F238E27FC236}">
-                <a16:creationId xmlns:a16="http://schemas.microsoft.com/office/drawing/2014/main" id="{E23B5C50-6AFA-4BB0-AE19-ACBF779C4252}"/>
+                <a16:creationId xmlns:a16="http://schemas.microsoft.com/office/drawing/2014/main" id="{5AABC758-6B54-4FCD-8652-23AED015D0D5}"/>
               </a:ext>
             </a:extLst>
           </p:cNvPr>
@@ -12823,7 +13215,7 @@
           <p:cNvPr id="121" name="line-187">
             <a:extLst xmlns:a="http://schemas.openxmlformats.org/drawingml/2006/main">
               <a:ext uri="{FF2B5EF4-FFF2-40B4-BE49-F238E27FC236}">
-                <a16:creationId xmlns:a16="http://schemas.microsoft.com/office/drawing/2014/main" id="{CBDD1AE2-FE8F-4868-BA45-8A4671326A7C}"/>
+                <a16:creationId xmlns:a16="http://schemas.microsoft.com/office/drawing/2014/main" id="{6208A85B-4B97-4187-A805-31453D4883C6}"/>
               </a:ext>
             </a:extLst>
           </p:cNvPr>
@@ -12863,7 +13255,7 @@
           <p:cNvPr id="122" name="line-188">
             <a:extLst xmlns:a="http://schemas.openxmlformats.org/drawingml/2006/main">
               <a:ext uri="{FF2B5EF4-FFF2-40B4-BE49-F238E27FC236}">
-                <a16:creationId xmlns:a16="http://schemas.microsoft.com/office/drawing/2014/main" id="{68201D3E-7DB3-4B28-BA67-B1A9A36C6972}"/>
+                <a16:creationId xmlns:a16="http://schemas.microsoft.com/office/drawing/2014/main" id="{6DC1FFAE-497D-44D7-A66E-942B0F74E9BB}"/>
               </a:ext>
             </a:extLst>
           </p:cNvPr>
@@ -12903,7 +13295,7 @@
           <p:cNvPr id="123" name="line-189">
             <a:extLst xmlns:a="http://schemas.openxmlformats.org/drawingml/2006/main">
               <a:ext uri="{FF2B5EF4-FFF2-40B4-BE49-F238E27FC236}">
-                <a16:creationId xmlns:a16="http://schemas.microsoft.com/office/drawing/2014/main" id="{7F21BD53-73C7-4912-8A05-3E0A1964AC41}"/>
+                <a16:creationId xmlns:a16="http://schemas.microsoft.com/office/drawing/2014/main" id="{2FD03C10-412B-47B5-9DEC-A62D83872F74}"/>
               </a:ext>
             </a:extLst>
           </p:cNvPr>
@@ -12943,7 +13335,7 @@
           <p:cNvPr id="124" name="line-190">
             <a:extLst xmlns:a="http://schemas.openxmlformats.org/drawingml/2006/main">
               <a:ext uri="{FF2B5EF4-FFF2-40B4-BE49-F238E27FC236}">
-                <a16:creationId xmlns:a16="http://schemas.microsoft.com/office/drawing/2014/main" id="{1E129094-6881-4FAE-A9DD-FF96403A7E84}"/>
+                <a16:creationId xmlns:a16="http://schemas.microsoft.com/office/drawing/2014/main" id="{045EEC54-7BC0-4104-9816-3795E2668342}"/>
               </a:ext>
             </a:extLst>
           </p:cNvPr>
@@ -12983,7 +13375,7 @@
           <p:cNvPr id="125" name="line-191">
             <a:extLst xmlns:a="http://schemas.openxmlformats.org/drawingml/2006/main">
               <a:ext uri="{FF2B5EF4-FFF2-40B4-BE49-F238E27FC236}">
-                <a16:creationId xmlns:a16="http://schemas.microsoft.com/office/drawing/2014/main" id="{E85B19B8-75F0-4A98-A161-DA2084874D11}"/>
+                <a16:creationId xmlns:a16="http://schemas.microsoft.com/office/drawing/2014/main" id="{81200888-C94C-4367-911A-DBCADD93E814}"/>
               </a:ext>
             </a:extLst>
           </p:cNvPr>
@@ -13023,7 +13415,7 @@
           <p:cNvPr id="126" name="line-192">
             <a:extLst xmlns:a="http://schemas.openxmlformats.org/drawingml/2006/main">
               <a:ext uri="{FF2B5EF4-FFF2-40B4-BE49-F238E27FC236}">
-                <a16:creationId xmlns:a16="http://schemas.microsoft.com/office/drawing/2014/main" id="{FABAC294-D000-44EC-AA1A-3DC6ED1F830D}"/>
+                <a16:creationId xmlns:a16="http://schemas.microsoft.com/office/drawing/2014/main" id="{59239742-B443-4CA3-98F1-8912D0B36E0E}"/>
               </a:ext>
             </a:extLst>
           </p:cNvPr>
@@ -13063,7 +13455,7 @@
           <p:cNvPr id="127" name="line-193">
             <a:extLst xmlns:a="http://schemas.openxmlformats.org/drawingml/2006/main">
               <a:ext uri="{FF2B5EF4-FFF2-40B4-BE49-F238E27FC236}">
-                <a16:creationId xmlns:a16="http://schemas.microsoft.com/office/drawing/2014/main" id="{CEED8612-8119-4244-9FAD-DB3BF0F9018C}"/>
+                <a16:creationId xmlns:a16="http://schemas.microsoft.com/office/drawing/2014/main" id="{0B79CD5E-49F2-4E30-B14B-E1D2693F788E}"/>
               </a:ext>
             </a:extLst>
           </p:cNvPr>
@@ -13103,7 +13495,7 @@
           <p:cNvPr id="128" name="line-194">
             <a:extLst xmlns:a="http://schemas.openxmlformats.org/drawingml/2006/main">
               <a:ext uri="{FF2B5EF4-FFF2-40B4-BE49-F238E27FC236}">
-                <a16:creationId xmlns:a16="http://schemas.microsoft.com/office/drawing/2014/main" id="{77FA6788-FE16-4A75-B21F-BF910B7B040D}"/>
+                <a16:creationId xmlns:a16="http://schemas.microsoft.com/office/drawing/2014/main" id="{52294299-A3FE-47AE-B789-62A4C804ADDB}"/>
               </a:ext>
             </a:extLst>
           </p:cNvPr>
@@ -13143,7 +13535,7 @@
           <p:cNvPr id="129" name="line-195">
             <a:extLst xmlns:a="http://schemas.openxmlformats.org/drawingml/2006/main">
               <a:ext uri="{FF2B5EF4-FFF2-40B4-BE49-F238E27FC236}">
-                <a16:creationId xmlns:a16="http://schemas.microsoft.com/office/drawing/2014/main" id="{2E7415E1-C926-4D70-9330-F6349C3B055F}"/>
+                <a16:creationId xmlns:a16="http://schemas.microsoft.com/office/drawing/2014/main" id="{06ABDE35-AC2C-4EB6-80E4-2A3CDB1CE9D4}"/>
               </a:ext>
             </a:extLst>
           </p:cNvPr>
@@ -13183,7 +13575,7 @@
           <p:cNvPr id="130" name="line-196">
             <a:extLst xmlns:a="http://schemas.openxmlformats.org/drawingml/2006/main">
               <a:ext uri="{FF2B5EF4-FFF2-40B4-BE49-F238E27FC236}">
-                <a16:creationId xmlns:a16="http://schemas.microsoft.com/office/drawing/2014/main" id="{A3E1BE9F-7447-4561-ADA1-6B25615D5D5E}"/>
+                <a16:creationId xmlns:a16="http://schemas.microsoft.com/office/drawing/2014/main" id="{3BDCA468-DDFA-48BD-96CC-C2ED14915F80}"/>
               </a:ext>
             </a:extLst>
           </p:cNvPr>
@@ -13223,7 +13615,7 @@
           <p:cNvPr id="131" name="line-197">
             <a:extLst xmlns:a="http://schemas.openxmlformats.org/drawingml/2006/main">
               <a:ext uri="{FF2B5EF4-FFF2-40B4-BE49-F238E27FC236}">
-                <a16:creationId xmlns:a16="http://schemas.microsoft.com/office/drawing/2014/main" id="{6CF04D71-7899-4D0D-91BC-BE427AB750C1}"/>
+                <a16:creationId xmlns:a16="http://schemas.microsoft.com/office/drawing/2014/main" id="{C96378BE-EC3E-4963-B224-D22DF548C4A0}"/>
               </a:ext>
             </a:extLst>
           </p:cNvPr>
@@ -13263,7 +13655,7 @@
           <p:cNvPr id="132" name="line-198">
             <a:extLst xmlns:a="http://schemas.openxmlformats.org/drawingml/2006/main">
               <a:ext uri="{FF2B5EF4-FFF2-40B4-BE49-F238E27FC236}">
-                <a16:creationId xmlns:a16="http://schemas.microsoft.com/office/drawing/2014/main" id="{A8FA7525-1A46-4ECB-A9CD-75D09C4BD807}"/>
+                <a16:creationId xmlns:a16="http://schemas.microsoft.com/office/drawing/2014/main" id="{1B1666E3-6F68-44B9-B60A-EBBAD5159047}"/>
               </a:ext>
             </a:extLst>
           </p:cNvPr>
@@ -13303,7 +13695,7 @@
           <p:cNvPr id="133" name="line-199">
             <a:extLst xmlns:a="http://schemas.openxmlformats.org/drawingml/2006/main">
               <a:ext uri="{FF2B5EF4-FFF2-40B4-BE49-F238E27FC236}">
-                <a16:creationId xmlns:a16="http://schemas.microsoft.com/office/drawing/2014/main" id="{4E7BF248-6134-4E22-B880-0C1A81EBBDB1}"/>
+                <a16:creationId xmlns:a16="http://schemas.microsoft.com/office/drawing/2014/main" id="{B9EB6B83-5872-406E-9DA6-73195688D1F6}"/>
               </a:ext>
             </a:extLst>
           </p:cNvPr>
@@ -13343,7 +13735,7 @@
           <p:cNvPr id="134" name="line-200">
             <a:extLst xmlns:a="http://schemas.openxmlformats.org/drawingml/2006/main">
               <a:ext uri="{FF2B5EF4-FFF2-40B4-BE49-F238E27FC236}">
-                <a16:creationId xmlns:a16="http://schemas.microsoft.com/office/drawing/2014/main" id="{5B078848-15A4-4C08-83FC-FC171AA4DAF2}"/>
+                <a16:creationId xmlns:a16="http://schemas.microsoft.com/office/drawing/2014/main" id="{4E45B81A-509A-4DA4-B4C9-684F93CA42DF}"/>
               </a:ext>
             </a:extLst>
           </p:cNvPr>
@@ -13383,7 +13775,7 @@
           <p:cNvPr id="135" name="line-201">
             <a:extLst xmlns:a="http://schemas.openxmlformats.org/drawingml/2006/main">
               <a:ext uri="{FF2B5EF4-FFF2-40B4-BE49-F238E27FC236}">
-                <a16:creationId xmlns:a16="http://schemas.microsoft.com/office/drawing/2014/main" id="{39D47249-D711-4304-B035-75438BDA19C7}"/>
+                <a16:creationId xmlns:a16="http://schemas.microsoft.com/office/drawing/2014/main" id="{1BC706CA-081E-4B71-9586-606DFDAE6241}"/>
               </a:ext>
             </a:extLst>
           </p:cNvPr>
@@ -13423,7 +13815,7 @@
           <p:cNvPr id="136" name="line-202">
             <a:extLst xmlns:a="http://schemas.openxmlformats.org/drawingml/2006/main">
               <a:ext uri="{FF2B5EF4-FFF2-40B4-BE49-F238E27FC236}">
-                <a16:creationId xmlns:a16="http://schemas.microsoft.com/office/drawing/2014/main" id="{6075EF6C-CFE4-452F-BBDE-7D1CFA84A29B}"/>
+                <a16:creationId xmlns:a16="http://schemas.microsoft.com/office/drawing/2014/main" id="{747B4531-E941-4B11-BD4D-056788F36002}"/>
               </a:ext>
             </a:extLst>
           </p:cNvPr>
@@ -13463,7 +13855,7 @@
           <p:cNvPr id="137" name="line-203">
             <a:extLst xmlns:a="http://schemas.openxmlformats.org/drawingml/2006/main">
               <a:ext uri="{FF2B5EF4-FFF2-40B4-BE49-F238E27FC236}">
-                <a16:creationId xmlns:a16="http://schemas.microsoft.com/office/drawing/2014/main" id="{1EF97EC5-80B3-4215-B0E5-95CCA196A69C}"/>
+                <a16:creationId xmlns:a16="http://schemas.microsoft.com/office/drawing/2014/main" id="{C1610E81-7B93-4109-B350-4103B18DFA9C}"/>
               </a:ext>
             </a:extLst>
           </p:cNvPr>
@@ -13503,7 +13895,7 @@
           <p:cNvPr id="138" name="line-204">
             <a:extLst xmlns:a="http://schemas.openxmlformats.org/drawingml/2006/main">
               <a:ext uri="{FF2B5EF4-FFF2-40B4-BE49-F238E27FC236}">
-                <a16:creationId xmlns:a16="http://schemas.microsoft.com/office/drawing/2014/main" id="{10467937-546B-4614-A22B-37E1C4B06B46}"/>
+                <a16:creationId xmlns:a16="http://schemas.microsoft.com/office/drawing/2014/main" id="{4A1BE1D0-BDEF-42FF-A8CA-BD694E02FDC6}"/>
               </a:ext>
             </a:extLst>
           </p:cNvPr>
@@ -13543,7 +13935,7 @@
           <p:cNvPr id="139" name="line-205">
             <a:extLst xmlns:a="http://schemas.openxmlformats.org/drawingml/2006/main">
               <a:ext uri="{FF2B5EF4-FFF2-40B4-BE49-F238E27FC236}">
-                <a16:creationId xmlns:a16="http://schemas.microsoft.com/office/drawing/2014/main" id="{12340F8B-3676-4364-8ED3-B701001EEA8C}"/>
+                <a16:creationId xmlns:a16="http://schemas.microsoft.com/office/drawing/2014/main" id="{CC869B2C-FA07-46FE-A60A-5D3EE967FD53}"/>
               </a:ext>
             </a:extLst>
           </p:cNvPr>
@@ -13583,7 +13975,7 @@
           <p:cNvPr id="140" name="line-206">
             <a:extLst xmlns:a="http://schemas.openxmlformats.org/drawingml/2006/main">
               <a:ext uri="{FF2B5EF4-FFF2-40B4-BE49-F238E27FC236}">
-                <a16:creationId xmlns:a16="http://schemas.microsoft.com/office/drawing/2014/main" id="{973264A0-C195-4775-B8E6-11A1F835C5D3}"/>
+                <a16:creationId xmlns:a16="http://schemas.microsoft.com/office/drawing/2014/main" id="{0B327CC5-F09F-4194-AA95-6ABD777D385A}"/>
               </a:ext>
             </a:extLst>
           </p:cNvPr>
@@ -13623,7 +14015,7 @@
           <p:cNvPr id="141" name="line-207">
             <a:extLst xmlns:a="http://schemas.openxmlformats.org/drawingml/2006/main">
               <a:ext uri="{FF2B5EF4-FFF2-40B4-BE49-F238E27FC236}">
-                <a16:creationId xmlns:a16="http://schemas.microsoft.com/office/drawing/2014/main" id="{8DF490E2-0E77-4FAA-9436-599CC863AE1A}"/>
+                <a16:creationId xmlns:a16="http://schemas.microsoft.com/office/drawing/2014/main" id="{4353A061-6B01-4E58-B1E3-34DA5C1CD891}"/>
               </a:ext>
             </a:extLst>
           </p:cNvPr>
@@ -13663,7 +14055,7 @@
           <p:cNvPr id="142" name="line-208">
             <a:extLst xmlns:a="http://schemas.openxmlformats.org/drawingml/2006/main">
               <a:ext uri="{FF2B5EF4-FFF2-40B4-BE49-F238E27FC236}">
-                <a16:creationId xmlns:a16="http://schemas.microsoft.com/office/drawing/2014/main" id="{772FB5FA-49C6-46DC-8943-492FA25CDCDC}"/>
+                <a16:creationId xmlns:a16="http://schemas.microsoft.com/office/drawing/2014/main" id="{A40E7EC3-A1F2-4E1C-93E3-3CC8C9891C79}"/>
               </a:ext>
             </a:extLst>
           </p:cNvPr>
@@ -13703,7 +14095,7 @@
           <p:cNvPr id="143" name="line-209">
             <a:extLst xmlns:a="http://schemas.openxmlformats.org/drawingml/2006/main">
               <a:ext uri="{FF2B5EF4-FFF2-40B4-BE49-F238E27FC236}">
-                <a16:creationId xmlns:a16="http://schemas.microsoft.com/office/drawing/2014/main" id="{B92299BC-44A4-48E8-8CCE-260468C1DAB5}"/>
+                <a16:creationId xmlns:a16="http://schemas.microsoft.com/office/drawing/2014/main" id="{88950F69-70D4-45C7-9081-BC9305E53C32}"/>
               </a:ext>
             </a:extLst>
           </p:cNvPr>
@@ -13743,7 +14135,7 @@
           <p:cNvPr id="144" name="line-210">
             <a:extLst xmlns:a="http://schemas.openxmlformats.org/drawingml/2006/main">
               <a:ext uri="{FF2B5EF4-FFF2-40B4-BE49-F238E27FC236}">
-                <a16:creationId xmlns:a16="http://schemas.microsoft.com/office/drawing/2014/main" id="{A7A3A881-5A99-4485-BAAE-2B9315B508D1}"/>
+                <a16:creationId xmlns:a16="http://schemas.microsoft.com/office/drawing/2014/main" id="{23D3FA54-4C59-4DB8-AD4C-DDFAFF2C39A2}"/>
               </a:ext>
             </a:extLst>
           </p:cNvPr>
@@ -13783,7 +14175,7 @@
           <p:cNvPr id="145" name="line-211">
             <a:extLst xmlns:a="http://schemas.openxmlformats.org/drawingml/2006/main">
               <a:ext uri="{FF2B5EF4-FFF2-40B4-BE49-F238E27FC236}">
-                <a16:creationId xmlns:a16="http://schemas.microsoft.com/office/drawing/2014/main" id="{3440C819-BB77-48A0-8B45-45175FE5E446}"/>
+                <a16:creationId xmlns:a16="http://schemas.microsoft.com/office/drawing/2014/main" id="{0DBCE1A3-915C-4937-ADD5-1E70503039F5}"/>
               </a:ext>
             </a:extLst>
           </p:cNvPr>
@@ -13823,7 +14215,7 @@
           <p:cNvPr id="146" name="line-212">
             <a:extLst xmlns:a="http://schemas.openxmlformats.org/drawingml/2006/main">
               <a:ext uri="{FF2B5EF4-FFF2-40B4-BE49-F238E27FC236}">
-                <a16:creationId xmlns:a16="http://schemas.microsoft.com/office/drawing/2014/main" id="{E6F410FD-465D-43B8-A599-4E1EA5B05D3A}"/>
+                <a16:creationId xmlns:a16="http://schemas.microsoft.com/office/drawing/2014/main" id="{B68DD1BB-F867-4DB5-B7BC-E083B2A5FB1A}"/>
               </a:ext>
             </a:extLst>
           </p:cNvPr>
@@ -13863,7 +14255,7 @@
           <p:cNvPr id="147" name="line-213">
             <a:extLst xmlns:a="http://schemas.openxmlformats.org/drawingml/2006/main">
               <a:ext uri="{FF2B5EF4-FFF2-40B4-BE49-F238E27FC236}">
-                <a16:creationId xmlns:a16="http://schemas.microsoft.com/office/drawing/2014/main" id="{897B8C2D-24EB-427B-AD1D-29FF34574834}"/>
+                <a16:creationId xmlns:a16="http://schemas.microsoft.com/office/drawing/2014/main" id="{CF84F9CC-D61F-42BD-862E-A4827B8201C0}"/>
               </a:ext>
             </a:extLst>
           </p:cNvPr>
@@ -13903,7 +14295,7 @@
           <p:cNvPr id="148" name="line-214">
             <a:extLst xmlns:a="http://schemas.openxmlformats.org/drawingml/2006/main">
               <a:ext uri="{FF2B5EF4-FFF2-40B4-BE49-F238E27FC236}">
-                <a16:creationId xmlns:a16="http://schemas.microsoft.com/office/drawing/2014/main" id="{767726CC-AB28-4628-A2DF-577F50E0FCDD}"/>
+                <a16:creationId xmlns:a16="http://schemas.microsoft.com/office/drawing/2014/main" id="{4C9B996E-DBAB-4038-99FD-C93C6AF1286C}"/>
               </a:ext>
             </a:extLst>
           </p:cNvPr>
@@ -13943,7 +14335,7 @@
           <p:cNvPr id="149" name="line-215">
             <a:extLst xmlns:a="http://schemas.openxmlformats.org/drawingml/2006/main">
               <a:ext uri="{FF2B5EF4-FFF2-40B4-BE49-F238E27FC236}">
-                <a16:creationId xmlns:a16="http://schemas.microsoft.com/office/drawing/2014/main" id="{AA92A05C-4808-40EC-AB36-4539BFD08101}"/>
+                <a16:creationId xmlns:a16="http://schemas.microsoft.com/office/drawing/2014/main" id="{37C91F7D-F61E-41CC-8960-5BCB4DA4616D}"/>
               </a:ext>
             </a:extLst>
           </p:cNvPr>
@@ -13983,7 +14375,7 @@
           <p:cNvPr id="150" name="line-216">
             <a:extLst xmlns:a="http://schemas.openxmlformats.org/drawingml/2006/main">
               <a:ext uri="{FF2B5EF4-FFF2-40B4-BE49-F238E27FC236}">
-                <a16:creationId xmlns:a16="http://schemas.microsoft.com/office/drawing/2014/main" id="{7FF88B8B-9B67-4140-85EF-A322E97EAE8A}"/>
+                <a16:creationId xmlns:a16="http://schemas.microsoft.com/office/drawing/2014/main" id="{FED642D3-D56E-4158-BBDE-7BEC04207787}"/>
               </a:ext>
             </a:extLst>
           </p:cNvPr>
@@ -14023,7 +14415,7 @@
           <p:cNvPr id="151" name="line-217">
             <a:extLst xmlns:a="http://schemas.openxmlformats.org/drawingml/2006/main">
               <a:ext uri="{FF2B5EF4-FFF2-40B4-BE49-F238E27FC236}">
-                <a16:creationId xmlns:a16="http://schemas.microsoft.com/office/drawing/2014/main" id="{81E43F12-C338-423B-AA5B-0452CC75FAEE}"/>
+                <a16:creationId xmlns:a16="http://schemas.microsoft.com/office/drawing/2014/main" id="{0D7B5C34-69D3-40D8-B34A-2F1CD3A6A651}"/>
               </a:ext>
             </a:extLst>
           </p:cNvPr>
@@ -14063,7 +14455,7 @@
           <p:cNvPr id="152" name="line-218">
             <a:extLst xmlns:a="http://schemas.openxmlformats.org/drawingml/2006/main">
               <a:ext uri="{FF2B5EF4-FFF2-40B4-BE49-F238E27FC236}">
-                <a16:creationId xmlns:a16="http://schemas.microsoft.com/office/drawing/2014/main" id="{D567764A-E5BD-43B3-A306-F62C9EA098E7}"/>
+                <a16:creationId xmlns:a16="http://schemas.microsoft.com/office/drawing/2014/main" id="{17A9A597-DE6C-47BF-A4AC-343BAEFA4F19}"/>
               </a:ext>
             </a:extLst>
           </p:cNvPr>
@@ -14103,7 +14495,7 @@
           <p:cNvPr id="153" name="line-219">
             <a:extLst xmlns:a="http://schemas.openxmlformats.org/drawingml/2006/main">
               <a:ext uri="{FF2B5EF4-FFF2-40B4-BE49-F238E27FC236}">
-                <a16:creationId xmlns:a16="http://schemas.microsoft.com/office/drawing/2014/main" id="{9E203129-0E34-4408-A3F0-FFAB356C84A0}"/>
+                <a16:creationId xmlns:a16="http://schemas.microsoft.com/office/drawing/2014/main" id="{93FEE674-129D-41D1-84E1-342350962B81}"/>
               </a:ext>
             </a:extLst>
           </p:cNvPr>
@@ -14143,7 +14535,7 @@
           <p:cNvPr id="154" name="line-220">
             <a:extLst xmlns:a="http://schemas.openxmlformats.org/drawingml/2006/main">
               <a:ext uri="{FF2B5EF4-FFF2-40B4-BE49-F238E27FC236}">
-                <a16:creationId xmlns:a16="http://schemas.microsoft.com/office/drawing/2014/main" id="{BB601C60-D2FC-4CE4-972B-796DA7699A35}"/>
+                <a16:creationId xmlns:a16="http://schemas.microsoft.com/office/drawing/2014/main" id="{27422C88-36FE-436C-975F-4A0753FE9280}"/>
               </a:ext>
             </a:extLst>
           </p:cNvPr>
@@ -14183,7 +14575,7 @@
           <p:cNvPr id="155" name="line-221">
             <a:extLst xmlns:a="http://schemas.openxmlformats.org/drawingml/2006/main">
               <a:ext uri="{FF2B5EF4-FFF2-40B4-BE49-F238E27FC236}">
-                <a16:creationId xmlns:a16="http://schemas.microsoft.com/office/drawing/2014/main" id="{44E86F71-8D91-4DB3-8C05-EAE8EE152492}"/>
+                <a16:creationId xmlns:a16="http://schemas.microsoft.com/office/drawing/2014/main" id="{B11BF433-D53B-444B-B6E2-B90D8F9C4290}"/>
               </a:ext>
             </a:extLst>
           </p:cNvPr>
@@ -14223,7 +14615,7 @@
           <p:cNvPr id="156" name="line-222">
             <a:extLst xmlns:a="http://schemas.openxmlformats.org/drawingml/2006/main">
               <a:ext uri="{FF2B5EF4-FFF2-40B4-BE49-F238E27FC236}">
-                <a16:creationId xmlns:a16="http://schemas.microsoft.com/office/drawing/2014/main" id="{637ABB5F-3A23-4B0F-B0DD-DF1BD686885A}"/>
+                <a16:creationId xmlns:a16="http://schemas.microsoft.com/office/drawing/2014/main" id="{B2C47EE7-AE19-4948-95E0-EDFEADD1C722}"/>
               </a:ext>
             </a:extLst>
           </p:cNvPr>
@@ -14263,7 +14655,7 @@
           <p:cNvPr id="157" name="line-223">
             <a:extLst xmlns:a="http://schemas.openxmlformats.org/drawingml/2006/main">
               <a:ext uri="{FF2B5EF4-FFF2-40B4-BE49-F238E27FC236}">
-                <a16:creationId xmlns:a16="http://schemas.microsoft.com/office/drawing/2014/main" id="{A0FAA8CC-1454-4E7B-A8A3-B075F64754AD}"/>
+                <a16:creationId xmlns:a16="http://schemas.microsoft.com/office/drawing/2014/main" id="{EE68C5F0-B992-469B-BACD-16AB31911FB4}"/>
               </a:ext>
             </a:extLst>
           </p:cNvPr>
@@ -14303,7 +14695,7 @@
           <p:cNvPr id="158" name="line-224">
             <a:extLst xmlns:a="http://schemas.openxmlformats.org/drawingml/2006/main">
               <a:ext uri="{FF2B5EF4-FFF2-40B4-BE49-F238E27FC236}">
-                <a16:creationId xmlns:a16="http://schemas.microsoft.com/office/drawing/2014/main" id="{FF676B58-797F-44E7-B5F7-16B18226A30B}"/>
+                <a16:creationId xmlns:a16="http://schemas.microsoft.com/office/drawing/2014/main" id="{38B49034-0F65-42B5-B6F3-6598F2ECCB30}"/>
               </a:ext>
             </a:extLst>
           </p:cNvPr>
@@ -14343,7 +14735,7 @@
           <p:cNvPr id="159" name="line-225">
             <a:extLst xmlns:a="http://schemas.openxmlformats.org/drawingml/2006/main">
               <a:ext uri="{FF2B5EF4-FFF2-40B4-BE49-F238E27FC236}">
-                <a16:creationId xmlns:a16="http://schemas.microsoft.com/office/drawing/2014/main" id="{133187B4-DBF7-4E76-B537-D22DE98C02DF}"/>
+                <a16:creationId xmlns:a16="http://schemas.microsoft.com/office/drawing/2014/main" id="{472003B4-EB3B-4C0D-9C68-120FD3ED326C}"/>
               </a:ext>
             </a:extLst>
           </p:cNvPr>
@@ -14383,7 +14775,7 @@
           <p:cNvPr id="160" name="line-226">
             <a:extLst xmlns:a="http://schemas.openxmlformats.org/drawingml/2006/main">
               <a:ext uri="{FF2B5EF4-FFF2-40B4-BE49-F238E27FC236}">
-                <a16:creationId xmlns:a16="http://schemas.microsoft.com/office/drawing/2014/main" id="{C69E532E-3E6B-4904-B53A-D434FDE86628}"/>
+                <a16:creationId xmlns:a16="http://schemas.microsoft.com/office/drawing/2014/main" id="{0DA541FE-9B82-4FF3-9FD2-85B331DCBEB1}"/>
               </a:ext>
             </a:extLst>
           </p:cNvPr>
@@ -14423,7 +14815,7 @@
           <p:cNvPr id="161" name="line-227">
             <a:extLst xmlns:a="http://schemas.openxmlformats.org/drawingml/2006/main">
               <a:ext uri="{FF2B5EF4-FFF2-40B4-BE49-F238E27FC236}">
-                <a16:creationId xmlns:a16="http://schemas.microsoft.com/office/drawing/2014/main" id="{32708756-998F-4159-8E71-470A3A9F0C76}"/>
+                <a16:creationId xmlns:a16="http://schemas.microsoft.com/office/drawing/2014/main" id="{77C694F3-1829-4465-BBD2-B4AF702108FA}"/>
               </a:ext>
             </a:extLst>
           </p:cNvPr>
@@ -14463,7 +14855,7 @@
           <p:cNvPr id="162" name="line-228">
             <a:extLst xmlns:a="http://schemas.openxmlformats.org/drawingml/2006/main">
               <a:ext uri="{FF2B5EF4-FFF2-40B4-BE49-F238E27FC236}">
-                <a16:creationId xmlns:a16="http://schemas.microsoft.com/office/drawing/2014/main" id="{E94B1375-A4AC-4181-A0AE-7164713EBB00}"/>
+                <a16:creationId xmlns:a16="http://schemas.microsoft.com/office/drawing/2014/main" id="{770C313C-53FB-4472-90AF-B951BA5628A7}"/>
               </a:ext>
             </a:extLst>
           </p:cNvPr>
@@ -14503,7 +14895,7 @@
           <p:cNvPr id="163" name="line-229">
             <a:extLst xmlns:a="http://schemas.openxmlformats.org/drawingml/2006/main">
               <a:ext uri="{FF2B5EF4-FFF2-40B4-BE49-F238E27FC236}">
-                <a16:creationId xmlns:a16="http://schemas.microsoft.com/office/drawing/2014/main" id="{21F93D0E-751B-4BB4-931B-ACFDE6BCBD2E}"/>
+                <a16:creationId xmlns:a16="http://schemas.microsoft.com/office/drawing/2014/main" id="{5BBC31C9-A489-4A0A-95EC-1947612367D7}"/>
               </a:ext>
             </a:extLst>
           </p:cNvPr>
@@ -14543,7 +14935,7 @@
           <p:cNvPr id="164" name="line-230">
             <a:extLst xmlns:a="http://schemas.openxmlformats.org/drawingml/2006/main">
               <a:ext uri="{FF2B5EF4-FFF2-40B4-BE49-F238E27FC236}">
-                <a16:creationId xmlns:a16="http://schemas.microsoft.com/office/drawing/2014/main" id="{68A02887-61C9-4D24-8BB6-9B6A9A9B0F3B}"/>
+                <a16:creationId xmlns:a16="http://schemas.microsoft.com/office/drawing/2014/main" id="{3C8B7E03-3A58-4805-9931-27DAD7E630F6}"/>
               </a:ext>
             </a:extLst>
           </p:cNvPr>
@@ -14583,7 +14975,7 @@
           <p:cNvPr id="165" name="line-231">
             <a:extLst xmlns:a="http://schemas.openxmlformats.org/drawingml/2006/main">
               <a:ext uri="{FF2B5EF4-FFF2-40B4-BE49-F238E27FC236}">
-                <a16:creationId xmlns:a16="http://schemas.microsoft.com/office/drawing/2014/main" id="{5F1A747C-55E3-4BFB-86D6-5A552C4FB394}"/>
+                <a16:creationId xmlns:a16="http://schemas.microsoft.com/office/drawing/2014/main" id="{64F085CB-A3B0-4DE3-B326-0892B6832FDD}"/>
               </a:ext>
             </a:extLst>
           </p:cNvPr>
@@ -14623,7 +15015,7 @@
           <p:cNvPr id="166" name="object-232">
             <a:extLst xmlns:a="http://schemas.openxmlformats.org/drawingml/2006/main">
               <a:ext uri="{FF2B5EF4-FFF2-40B4-BE49-F238E27FC236}">
-                <a16:creationId xmlns:a16="http://schemas.microsoft.com/office/drawing/2014/main" id="{02926868-3229-4EBC-BE42-5D61FFCC3859}"/>
+                <a16:creationId xmlns:a16="http://schemas.microsoft.com/office/drawing/2014/main" id="{44B37203-6492-4AA0-AB6D-8C2DDB3216FA}"/>
               </a:ext>
             </a:extLst>
           </p:cNvPr>
@@ -14690,7 +15082,7 @@
           <p:cNvPr id="167" name="line-233">
             <a:extLst xmlns:a="http://schemas.openxmlformats.org/drawingml/2006/main">
               <a:ext uri="{FF2B5EF4-FFF2-40B4-BE49-F238E27FC236}">
-                <a16:creationId xmlns:a16="http://schemas.microsoft.com/office/drawing/2014/main" id="{BC2A8BB0-078E-4962-8EA4-C106A58A2B5F}"/>
+                <a16:creationId xmlns:a16="http://schemas.microsoft.com/office/drawing/2014/main" id="{785F7ED9-7D2A-4871-BC17-09E27B26A9CF}"/>
               </a:ext>
             </a:extLst>
           </p:cNvPr>
@@ -14730,7 +15122,7 @@
           <p:cNvPr id="168" name="object-234">
             <a:extLst xmlns:a="http://schemas.openxmlformats.org/drawingml/2006/main">
               <a:ext uri="{FF2B5EF4-FFF2-40B4-BE49-F238E27FC236}">
-                <a16:creationId xmlns:a16="http://schemas.microsoft.com/office/drawing/2014/main" id="{CA1AEBF3-09BE-463A-B61F-E217B7ACB0BD}"/>
+                <a16:creationId xmlns:a16="http://schemas.microsoft.com/office/drawing/2014/main" id="{988B00BA-A420-4B11-BD93-393E777A110B}"/>
               </a:ext>
             </a:extLst>
           </p:cNvPr>
@@ -14797,7 +15189,7 @@
           <p:cNvPr id="169" name="line-235">
             <a:extLst xmlns:a="http://schemas.openxmlformats.org/drawingml/2006/main">
               <a:ext uri="{FF2B5EF4-FFF2-40B4-BE49-F238E27FC236}">
-                <a16:creationId xmlns:a16="http://schemas.microsoft.com/office/drawing/2014/main" id="{C3C69729-07F6-44DB-BC32-B2A84365AB7A}"/>
+                <a16:creationId xmlns:a16="http://schemas.microsoft.com/office/drawing/2014/main" id="{7E3741F1-191F-4306-9363-0FA2230786E9}"/>
               </a:ext>
             </a:extLst>
           </p:cNvPr>
@@ -14837,7 +15229,7 @@
           <p:cNvPr id="170" name="object-236">
             <a:extLst xmlns:a="http://schemas.openxmlformats.org/drawingml/2006/main">
               <a:ext uri="{FF2B5EF4-FFF2-40B4-BE49-F238E27FC236}">
-                <a16:creationId xmlns:a16="http://schemas.microsoft.com/office/drawing/2014/main" id="{8BE42EB6-2EF7-4FDD-88E2-DB593BE64B7E}"/>
+                <a16:creationId xmlns:a16="http://schemas.microsoft.com/office/drawing/2014/main" id="{8B9D6B0F-153A-43A1-AF9A-A677A9B159B4}"/>
               </a:ext>
             </a:extLst>
           </p:cNvPr>
@@ -14904,7 +15296,7 @@
           <p:cNvPr id="171" name="line-237">
             <a:extLst xmlns:a="http://schemas.openxmlformats.org/drawingml/2006/main">
               <a:ext uri="{FF2B5EF4-FFF2-40B4-BE49-F238E27FC236}">
-                <a16:creationId xmlns:a16="http://schemas.microsoft.com/office/drawing/2014/main" id="{6C6B3BE4-39FC-4A93-A376-1DDF7016B8F7}"/>
+                <a16:creationId xmlns:a16="http://schemas.microsoft.com/office/drawing/2014/main" id="{5AC3CE5E-AEF2-4838-97AC-B3EAF83872DA}"/>
               </a:ext>
             </a:extLst>
           </p:cNvPr>
@@ -14944,7 +15336,7 @@
           <p:cNvPr id="172" name="object-238">
             <a:extLst xmlns:a="http://schemas.openxmlformats.org/drawingml/2006/main">
               <a:ext uri="{FF2B5EF4-FFF2-40B4-BE49-F238E27FC236}">
-                <a16:creationId xmlns:a16="http://schemas.microsoft.com/office/drawing/2014/main" id="{50C39096-3168-46FC-933D-08586306DADE}"/>
+                <a16:creationId xmlns:a16="http://schemas.microsoft.com/office/drawing/2014/main" id="{092AFA7E-9009-4687-9F3B-6EA74E8D1889}"/>
               </a:ext>
             </a:extLst>
           </p:cNvPr>
@@ -15011,7 +15403,7 @@
           <p:cNvPr id="173" name="line-239">
             <a:extLst xmlns:a="http://schemas.openxmlformats.org/drawingml/2006/main">
               <a:ext uri="{FF2B5EF4-FFF2-40B4-BE49-F238E27FC236}">
-                <a16:creationId xmlns:a16="http://schemas.microsoft.com/office/drawing/2014/main" id="{04369044-2B17-4D38-A908-178E0279DE65}"/>
+                <a16:creationId xmlns:a16="http://schemas.microsoft.com/office/drawing/2014/main" id="{5682068A-2937-45A6-A4B1-78CE1750FDFB}"/>
               </a:ext>
             </a:extLst>
           </p:cNvPr>
@@ -15051,7 +15443,7 @@
           <p:cNvPr id="174" name="object-240">
             <a:extLst xmlns:a="http://schemas.openxmlformats.org/drawingml/2006/main">
               <a:ext uri="{FF2B5EF4-FFF2-40B4-BE49-F238E27FC236}">
-                <a16:creationId xmlns:a16="http://schemas.microsoft.com/office/drawing/2014/main" id="{5B11BCC8-63C2-40FD-872D-7FE695F9C79D}"/>
+                <a16:creationId xmlns:a16="http://schemas.microsoft.com/office/drawing/2014/main" id="{F2F345FD-3A08-4410-935E-75F85F8271D7}"/>
               </a:ext>
             </a:extLst>
           </p:cNvPr>
@@ -15118,7 +15510,7 @@
           <p:cNvPr id="175" name="line-241">
             <a:extLst xmlns:a="http://schemas.openxmlformats.org/drawingml/2006/main">
               <a:ext uri="{FF2B5EF4-FFF2-40B4-BE49-F238E27FC236}">
-                <a16:creationId xmlns:a16="http://schemas.microsoft.com/office/drawing/2014/main" id="{3D42DAA4-DB0B-4366-80EB-B9B7DFCA426F}"/>
+                <a16:creationId xmlns:a16="http://schemas.microsoft.com/office/drawing/2014/main" id="{694E05A0-0FD1-4B92-A910-49A3CA95C663}"/>
               </a:ext>
             </a:extLst>
           </p:cNvPr>
@@ -15158,7 +15550,7 @@
           <p:cNvPr id="176" name="line-242">
             <a:extLst xmlns:a="http://schemas.openxmlformats.org/drawingml/2006/main">
               <a:ext uri="{FF2B5EF4-FFF2-40B4-BE49-F238E27FC236}">
-                <a16:creationId xmlns:a16="http://schemas.microsoft.com/office/drawing/2014/main" id="{FED8E148-C6A2-4222-B811-795CE30046C8}"/>
+                <a16:creationId xmlns:a16="http://schemas.microsoft.com/office/drawing/2014/main" id="{D065C5AD-1C7E-4495-82D2-4EEB986854A7}"/>
               </a:ext>
             </a:extLst>
           </p:cNvPr>
@@ -15198,7 +15590,7 @@
           <p:cNvPr id="177" name="line-243">
             <a:extLst xmlns:a="http://schemas.openxmlformats.org/drawingml/2006/main">
               <a:ext uri="{FF2B5EF4-FFF2-40B4-BE49-F238E27FC236}">
-                <a16:creationId xmlns:a16="http://schemas.microsoft.com/office/drawing/2014/main" id="{4333D98B-8822-4999-ADD5-500E9F52EE98}"/>
+                <a16:creationId xmlns:a16="http://schemas.microsoft.com/office/drawing/2014/main" id="{D2675796-2419-4CA6-AE70-55A839CBD02D}"/>
               </a:ext>
             </a:extLst>
           </p:cNvPr>
@@ -15238,7 +15630,7 @@
           <p:cNvPr id="178" name="line-244">
             <a:extLst xmlns:a="http://schemas.openxmlformats.org/drawingml/2006/main">
               <a:ext uri="{FF2B5EF4-FFF2-40B4-BE49-F238E27FC236}">
-                <a16:creationId xmlns:a16="http://schemas.microsoft.com/office/drawing/2014/main" id="{73B78C0A-8D46-4549-8FB0-DB6650E20E35}"/>
+                <a16:creationId xmlns:a16="http://schemas.microsoft.com/office/drawing/2014/main" id="{2699B686-7DE2-4088-96BD-9A3C92DE5A9B}"/>
               </a:ext>
             </a:extLst>
           </p:cNvPr>
@@ -15278,7 +15670,7 @@
           <p:cNvPr id="179" name="line-245">
             <a:extLst xmlns:a="http://schemas.openxmlformats.org/drawingml/2006/main">
               <a:ext uri="{FF2B5EF4-FFF2-40B4-BE49-F238E27FC236}">
-                <a16:creationId xmlns:a16="http://schemas.microsoft.com/office/drawing/2014/main" id="{B8FE3AF9-0CFB-48C9-9D89-6F0BB2B0EB1E}"/>
+                <a16:creationId xmlns:a16="http://schemas.microsoft.com/office/drawing/2014/main" id="{5EA00BDA-3FFC-4919-AE51-9F33DC0DA219}"/>
               </a:ext>
             </a:extLst>
           </p:cNvPr>
@@ -15318,7 +15710,7 @@
           <p:cNvPr id="180" name="line-246">
             <a:extLst xmlns:a="http://schemas.openxmlformats.org/drawingml/2006/main">
               <a:ext uri="{FF2B5EF4-FFF2-40B4-BE49-F238E27FC236}">
-                <a16:creationId xmlns:a16="http://schemas.microsoft.com/office/drawing/2014/main" id="{93A7B161-CBC8-4B3A-A87F-20C976ECAE34}"/>
+                <a16:creationId xmlns:a16="http://schemas.microsoft.com/office/drawing/2014/main" id="{C51CBB31-AD81-4F90-9E40-9FD9EA1BEF57}"/>
               </a:ext>
             </a:extLst>
           </p:cNvPr>
@@ -15358,7 +15750,7 @@
           <p:cNvPr id="181" name="line-247">
             <a:extLst xmlns:a="http://schemas.openxmlformats.org/drawingml/2006/main">
               <a:ext uri="{FF2B5EF4-FFF2-40B4-BE49-F238E27FC236}">
-                <a16:creationId xmlns:a16="http://schemas.microsoft.com/office/drawing/2014/main" id="{FB65E271-832C-41D4-B045-62AB4902F338}"/>
+                <a16:creationId xmlns:a16="http://schemas.microsoft.com/office/drawing/2014/main" id="{16275242-C87F-4586-9B39-C23F65806511}"/>
               </a:ext>
             </a:extLst>
           </p:cNvPr>
@@ -15398,7 +15790,7 @@
           <p:cNvPr id="182" name="line-248">
             <a:extLst xmlns:a="http://schemas.openxmlformats.org/drawingml/2006/main">
               <a:ext uri="{FF2B5EF4-FFF2-40B4-BE49-F238E27FC236}">
-                <a16:creationId xmlns:a16="http://schemas.microsoft.com/office/drawing/2014/main" id="{582D0B0A-FBAA-425B-8BE2-148FED583869}"/>
+                <a16:creationId xmlns:a16="http://schemas.microsoft.com/office/drawing/2014/main" id="{FD9DB96C-C4B8-41C2-88BB-1CD1F50F955D}"/>
               </a:ext>
             </a:extLst>
           </p:cNvPr>
@@ -15438,7 +15830,7 @@
           <p:cNvPr id="183" name="object-249">
             <a:extLst xmlns:a="http://schemas.openxmlformats.org/drawingml/2006/main">
               <a:ext uri="{FF2B5EF4-FFF2-40B4-BE49-F238E27FC236}">
-                <a16:creationId xmlns:a16="http://schemas.microsoft.com/office/drawing/2014/main" id="{2C7BB964-4EF9-4DF9-887B-CD22000166D3}"/>
+                <a16:creationId xmlns:a16="http://schemas.microsoft.com/office/drawing/2014/main" id="{9EB70879-51C6-40E3-85F5-F5F27A0EE532}"/>
               </a:ext>
             </a:extLst>
           </p:cNvPr>
@@ -15505,7 +15897,7 @@
           <p:cNvPr id="184" name="reveal1-line-250">
             <a:extLst xmlns:a="http://schemas.openxmlformats.org/drawingml/2006/main">
               <a:ext uri="{FF2B5EF4-FFF2-40B4-BE49-F238E27FC236}">
-                <a16:creationId xmlns:a16="http://schemas.microsoft.com/office/drawing/2014/main" id="{8CA4150A-6628-44D2-8227-86899B13B3DE}"/>
+                <a16:creationId xmlns:a16="http://schemas.microsoft.com/office/drawing/2014/main" id="{D2C1BA1F-5CD2-4485-AD3A-0B11691E39D2}"/>
               </a:ext>
             </a:extLst>
           </p:cNvPr>
@@ -15545,7 +15937,7 @@
           <p:cNvPr id="185" name="reveal1-line-251">
             <a:extLst xmlns:a="http://schemas.openxmlformats.org/drawingml/2006/main">
               <a:ext uri="{FF2B5EF4-FFF2-40B4-BE49-F238E27FC236}">
-                <a16:creationId xmlns:a16="http://schemas.microsoft.com/office/drawing/2014/main" id="{09282089-FA4E-4B20-AD31-477CEBA33E20}"/>
+                <a16:creationId xmlns:a16="http://schemas.microsoft.com/office/drawing/2014/main" id="{1DD54AC9-73A3-456A-9B16-ED802D167109}"/>
               </a:ext>
             </a:extLst>
           </p:cNvPr>
@@ -15585,7 +15977,7 @@
           <p:cNvPr id="186" name="reveal1-line-252">
             <a:extLst xmlns:a="http://schemas.openxmlformats.org/drawingml/2006/main">
               <a:ext uri="{FF2B5EF4-FFF2-40B4-BE49-F238E27FC236}">
-                <a16:creationId xmlns:a16="http://schemas.microsoft.com/office/drawing/2014/main" id="{AF5B3C4D-FB22-4A0F-9CA6-FCCE6708D9DF}"/>
+                <a16:creationId xmlns:a16="http://schemas.microsoft.com/office/drawing/2014/main" id="{E87F7475-DFE4-4693-8D58-E0DCFB45F01E}"/>
               </a:ext>
             </a:extLst>
           </p:cNvPr>
@@ -15625,7 +16017,7 @@
           <p:cNvPr id="187" name="reveal1-line-253">
             <a:extLst xmlns:a="http://schemas.openxmlformats.org/drawingml/2006/main">
               <a:ext uri="{FF2B5EF4-FFF2-40B4-BE49-F238E27FC236}">
-                <a16:creationId xmlns:a16="http://schemas.microsoft.com/office/drawing/2014/main" id="{987E4BD7-BF9A-4A53-A406-7D9E61074AB1}"/>
+                <a16:creationId xmlns:a16="http://schemas.microsoft.com/office/drawing/2014/main" id="{BC5D6BAB-E14A-47F5-8708-EA470CCD084A}"/>
               </a:ext>
             </a:extLst>
           </p:cNvPr>
@@ -15665,7 +16057,7 @@
           <p:cNvPr id="188" name="reveal1-line-254">
             <a:extLst xmlns:a="http://schemas.openxmlformats.org/drawingml/2006/main">
               <a:ext uri="{FF2B5EF4-FFF2-40B4-BE49-F238E27FC236}">
-                <a16:creationId xmlns:a16="http://schemas.microsoft.com/office/drawing/2014/main" id="{AF06267C-396B-4B7E-87C8-7091B9961B37}"/>
+                <a16:creationId xmlns:a16="http://schemas.microsoft.com/office/drawing/2014/main" id="{B9A2EA89-DC81-4048-8875-9F63BB85BD6B}"/>
               </a:ext>
             </a:extLst>
           </p:cNvPr>
@@ -15705,7 +16097,7 @@
           <p:cNvPr id="189" name="reveal1-line-255">
             <a:extLst xmlns:a="http://schemas.openxmlformats.org/drawingml/2006/main">
               <a:ext uri="{FF2B5EF4-FFF2-40B4-BE49-F238E27FC236}">
-                <a16:creationId xmlns:a16="http://schemas.microsoft.com/office/drawing/2014/main" id="{6113BAC3-2EC4-4399-A56E-DB2F15765636}"/>
+                <a16:creationId xmlns:a16="http://schemas.microsoft.com/office/drawing/2014/main" id="{3FC5290A-4F56-46F9-94DB-D79ECB1198BF}"/>
               </a:ext>
             </a:extLst>
           </p:cNvPr>
@@ -15745,7 +16137,7 @@
           <p:cNvPr id="190" name="reveal1-line-256">
             <a:extLst xmlns:a="http://schemas.openxmlformats.org/drawingml/2006/main">
               <a:ext uri="{FF2B5EF4-FFF2-40B4-BE49-F238E27FC236}">
-                <a16:creationId xmlns:a16="http://schemas.microsoft.com/office/drawing/2014/main" id="{53252028-93EC-4343-BC4D-75FC29C0DE70}"/>
+                <a16:creationId xmlns:a16="http://schemas.microsoft.com/office/drawing/2014/main" id="{BA6DADB4-E784-4852-82F5-A08FFB5401AC}"/>
               </a:ext>
             </a:extLst>
           </p:cNvPr>
@@ -15785,7 +16177,7 @@
           <p:cNvPr id="191" name="reveal1-line-257">
             <a:extLst xmlns:a="http://schemas.openxmlformats.org/drawingml/2006/main">
               <a:ext uri="{FF2B5EF4-FFF2-40B4-BE49-F238E27FC236}">
-                <a16:creationId xmlns:a16="http://schemas.microsoft.com/office/drawing/2014/main" id="{DBB80E1D-40C5-4F5E-9AE2-58C5F7350C5B}"/>
+                <a16:creationId xmlns:a16="http://schemas.microsoft.com/office/drawing/2014/main" id="{2333BCFE-7E3E-4BC2-9118-FF390FC488F0}"/>
               </a:ext>
             </a:extLst>
           </p:cNvPr>
@@ -15825,7 +16217,7 @@
           <p:cNvPr id="192" name="reveal1-object-258">
             <a:extLst xmlns:a="http://schemas.openxmlformats.org/drawingml/2006/main">
               <a:ext uri="{FF2B5EF4-FFF2-40B4-BE49-F238E27FC236}">
-                <a16:creationId xmlns:a16="http://schemas.microsoft.com/office/drawing/2014/main" id="{3686A1F0-A0C5-4BA7-9D60-2790DB7EBE4A}"/>
+                <a16:creationId xmlns:a16="http://schemas.microsoft.com/office/drawing/2014/main" id="{541E42D4-6818-4113-88CA-291B81727977}"/>
               </a:ext>
             </a:extLst>
           </p:cNvPr>
@@ -15892,7 +16284,7 @@
           <p:cNvPr id="193" name="reveal1-object-259">
             <a:extLst xmlns:a="http://schemas.openxmlformats.org/drawingml/2006/main">
               <a:ext uri="{FF2B5EF4-FFF2-40B4-BE49-F238E27FC236}">
-                <a16:creationId xmlns:a16="http://schemas.microsoft.com/office/drawing/2014/main" id="{D6451007-4340-4F66-B74B-26E45650D428}"/>
+                <a16:creationId xmlns:a16="http://schemas.microsoft.com/office/drawing/2014/main" id="{E57995AF-F85A-47F6-8D77-70F348ED6C52}"/>
               </a:ext>
             </a:extLst>
           </p:cNvPr>
@@ -15959,7 +16351,7 @@
           <p:cNvPr id="194" name="reveal1-line-260">
             <a:extLst xmlns:a="http://schemas.openxmlformats.org/drawingml/2006/main">
               <a:ext uri="{FF2B5EF4-FFF2-40B4-BE49-F238E27FC236}">
-                <a16:creationId xmlns:a16="http://schemas.microsoft.com/office/drawing/2014/main" id="{C758E8BE-5A44-4EC2-9A81-A5B585DD2689}"/>
+                <a16:creationId xmlns:a16="http://schemas.microsoft.com/office/drawing/2014/main" id="{1DFF1992-9F73-427B-A34B-2CC2075EA512}"/>
               </a:ext>
             </a:extLst>
           </p:cNvPr>
@@ -15999,7 +16391,7 @@
           <p:cNvPr id="195" name="reveal1-object-261">
             <a:extLst xmlns:a="http://schemas.openxmlformats.org/drawingml/2006/main">
               <a:ext uri="{FF2B5EF4-FFF2-40B4-BE49-F238E27FC236}">
-                <a16:creationId xmlns:a16="http://schemas.microsoft.com/office/drawing/2014/main" id="{47C5D2CD-81FD-4FD3-A1E7-885C176384B2}"/>
+                <a16:creationId xmlns:a16="http://schemas.microsoft.com/office/drawing/2014/main" id="{D044DAB7-9997-4D61-82BD-275416E75A8D}"/>
               </a:ext>
             </a:extLst>
           </p:cNvPr>
@@ -16066,7 +16458,7 @@
           <p:cNvPr id="196" name="reveal1-line-262">
             <a:extLst xmlns:a="http://schemas.openxmlformats.org/drawingml/2006/main">
               <a:ext uri="{FF2B5EF4-FFF2-40B4-BE49-F238E27FC236}">
-                <a16:creationId xmlns:a16="http://schemas.microsoft.com/office/drawing/2014/main" id="{2870DAC7-B3E5-4DA9-B805-252C109D588D}"/>
+                <a16:creationId xmlns:a16="http://schemas.microsoft.com/office/drawing/2014/main" id="{F0BA5B8F-32D8-4E6B-9973-C2C31B386F17}"/>
               </a:ext>
             </a:extLst>
           </p:cNvPr>
@@ -16106,7 +16498,7 @@
           <p:cNvPr id="197" name="reveal1-line-263">
             <a:extLst xmlns:a="http://schemas.openxmlformats.org/drawingml/2006/main">
               <a:ext uri="{FF2B5EF4-FFF2-40B4-BE49-F238E27FC236}">
-                <a16:creationId xmlns:a16="http://schemas.microsoft.com/office/drawing/2014/main" id="{68916B26-75F3-4730-8846-6BA087F0B352}"/>
+                <a16:creationId xmlns:a16="http://schemas.microsoft.com/office/drawing/2014/main" id="{DFBE52C3-8801-4743-8996-9D7684B135B8}"/>
               </a:ext>
             </a:extLst>
           </p:cNvPr>
@@ -16146,7 +16538,7 @@
           <p:cNvPr id="198" name="reveal1-object-264">
             <a:extLst xmlns:a="http://schemas.openxmlformats.org/drawingml/2006/main">
               <a:ext uri="{FF2B5EF4-FFF2-40B4-BE49-F238E27FC236}">
-                <a16:creationId xmlns:a16="http://schemas.microsoft.com/office/drawing/2014/main" id="{267D1D83-4B61-4590-8B95-B1EA7C47C90F}"/>
+                <a16:creationId xmlns:a16="http://schemas.microsoft.com/office/drawing/2014/main" id="{179834BB-5C1A-4EFC-8B47-1043602B7723}"/>
               </a:ext>
             </a:extLst>
           </p:cNvPr>
@@ -16213,7 +16605,7 @@
           <p:cNvPr id="199" name="reveal1-object-265">
             <a:extLst xmlns:a="http://schemas.openxmlformats.org/drawingml/2006/main">
               <a:ext uri="{FF2B5EF4-FFF2-40B4-BE49-F238E27FC236}">
-                <a16:creationId xmlns:a16="http://schemas.microsoft.com/office/drawing/2014/main" id="{918EB07B-A00F-420D-B586-DA05B6F98427}"/>
+                <a16:creationId xmlns:a16="http://schemas.microsoft.com/office/drawing/2014/main" id="{B447715B-5590-4217-A0F3-188FB4DD7305}"/>
               </a:ext>
             </a:extLst>
           </p:cNvPr>
@@ -16280,7 +16672,7 @@
           <p:cNvPr id="200" name="reveal1-line-266">
             <a:extLst xmlns:a="http://schemas.openxmlformats.org/drawingml/2006/main">
               <a:ext uri="{FF2B5EF4-FFF2-40B4-BE49-F238E27FC236}">
-                <a16:creationId xmlns:a16="http://schemas.microsoft.com/office/drawing/2014/main" id="{87C9335A-3D7E-4D09-9DD4-BBC81EFF7323}"/>
+                <a16:creationId xmlns:a16="http://schemas.microsoft.com/office/drawing/2014/main" id="{371AC984-28FA-4EAA-B315-A2BCA3A258FE}"/>
               </a:ext>
             </a:extLst>
           </p:cNvPr>
@@ -16320,7 +16712,7 @@
           <p:cNvPr id="201" name="reveal1-line-267">
             <a:extLst xmlns:a="http://schemas.openxmlformats.org/drawingml/2006/main">
               <a:ext uri="{FF2B5EF4-FFF2-40B4-BE49-F238E27FC236}">
-                <a16:creationId xmlns:a16="http://schemas.microsoft.com/office/drawing/2014/main" id="{B1BE5891-FFF1-4FEE-A82F-6A134E6161A5}"/>
+                <a16:creationId xmlns:a16="http://schemas.microsoft.com/office/drawing/2014/main" id="{B38D07D5-FD94-4196-8F5F-5334AAC5FDCF}"/>
               </a:ext>
             </a:extLst>
           </p:cNvPr>
@@ -16360,7 +16752,7 @@
           <p:cNvPr id="202" name="reveal1-line-268">
             <a:extLst xmlns:a="http://schemas.openxmlformats.org/drawingml/2006/main">
               <a:ext uri="{FF2B5EF4-FFF2-40B4-BE49-F238E27FC236}">
-                <a16:creationId xmlns:a16="http://schemas.microsoft.com/office/drawing/2014/main" id="{1ABB06CC-7630-42C0-867F-1DBA21E6D0EC}"/>
+                <a16:creationId xmlns:a16="http://schemas.microsoft.com/office/drawing/2014/main" id="{1A42BE89-6DFE-414D-A110-5882514B95BC}"/>
               </a:ext>
             </a:extLst>
           </p:cNvPr>
@@ -16400,7 +16792,7 @@
           <p:cNvPr id="203" name="reveal1-object-269">
             <a:extLst xmlns:a="http://schemas.openxmlformats.org/drawingml/2006/main">
               <a:ext uri="{FF2B5EF4-FFF2-40B4-BE49-F238E27FC236}">
-                <a16:creationId xmlns:a16="http://schemas.microsoft.com/office/drawing/2014/main" id="{B75197DB-B67B-44A8-BC5D-5D2FE9967455}"/>
+                <a16:creationId xmlns:a16="http://schemas.microsoft.com/office/drawing/2014/main" id="{60F14757-79F8-45EF-9DB2-7E09170CEFCB}"/>
               </a:ext>
             </a:extLst>
           </p:cNvPr>
@@ -16467,7 +16859,7 @@
           <p:cNvPr id="204" name="reveal1-object-270">
             <a:extLst xmlns:a="http://schemas.openxmlformats.org/drawingml/2006/main">
               <a:ext uri="{FF2B5EF4-FFF2-40B4-BE49-F238E27FC236}">
-                <a16:creationId xmlns:a16="http://schemas.microsoft.com/office/drawing/2014/main" id="{944DB506-1FD8-40C5-A413-B2D83B18F1CF}"/>
+                <a16:creationId xmlns:a16="http://schemas.microsoft.com/office/drawing/2014/main" id="{F1CB7261-7681-4F11-9EBC-70B11D81E50A}"/>
               </a:ext>
             </a:extLst>
           </p:cNvPr>
@@ -16534,7 +16926,7 @@
           <p:cNvPr id="205" name="reveal1-object-271">
             <a:extLst xmlns:a="http://schemas.openxmlformats.org/drawingml/2006/main">
               <a:ext uri="{FF2B5EF4-FFF2-40B4-BE49-F238E27FC236}">
-                <a16:creationId xmlns:a16="http://schemas.microsoft.com/office/drawing/2014/main" id="{DC113361-FA48-446E-8B77-60920C878EBF}"/>
+                <a16:creationId xmlns:a16="http://schemas.microsoft.com/office/drawing/2014/main" id="{69F02126-32AA-4F5F-9ED2-E8F28D3594CA}"/>
               </a:ext>
             </a:extLst>
           </p:cNvPr>
@@ -16601,7 +16993,7 @@
           <p:cNvPr id="206" name="reveal2-object-272">
             <a:extLst xmlns:a="http://schemas.openxmlformats.org/drawingml/2006/main">
               <a:ext uri="{FF2B5EF4-FFF2-40B4-BE49-F238E27FC236}">
-                <a16:creationId xmlns:a16="http://schemas.microsoft.com/office/drawing/2014/main" id="{4413BD79-5862-46F4-9412-2D2C5A4290E4}"/>
+                <a16:creationId xmlns:a16="http://schemas.microsoft.com/office/drawing/2014/main" id="{F5F249B3-BA59-4DC3-8640-B2AF8A3EA64F}"/>
               </a:ext>
             </a:extLst>
           </p:cNvPr>
@@ -16668,7 +17060,7 @@
           <p:cNvPr id="207" name="object-273">
             <a:extLst xmlns:a="http://schemas.openxmlformats.org/drawingml/2006/main">
               <a:ext uri="{FF2B5EF4-FFF2-40B4-BE49-F238E27FC236}">
-                <a16:creationId xmlns:a16="http://schemas.microsoft.com/office/drawing/2014/main" id="{01F2D1F5-3808-42BD-B52C-919711C1CC2C}"/>
+                <a16:creationId xmlns:a16="http://schemas.microsoft.com/office/drawing/2014/main" id="{7E14E8F6-4158-4649-87CD-24658510E377}"/>
               </a:ext>
             </a:extLst>
           </p:cNvPr>
@@ -16735,7 +17127,7 @@
           <p:cNvPr id="208" name="object-274">
             <a:extLst xmlns:a="http://schemas.openxmlformats.org/drawingml/2006/main">
               <a:ext uri="{FF2B5EF4-FFF2-40B4-BE49-F238E27FC236}">
-                <a16:creationId xmlns:a16="http://schemas.microsoft.com/office/drawing/2014/main" id="{464703BA-C0CF-4D81-98E3-16B4B653F758}"/>
+                <a16:creationId xmlns:a16="http://schemas.microsoft.com/office/drawing/2014/main" id="{BC40F956-130B-43AF-BFCA-7BA3BF779AFA}"/>
               </a:ext>
             </a:extLst>
           </p:cNvPr>
@@ -16800,7 +17192,7 @@
     </p:spTree>
     <p:extLst>
       <p:ext uri="{BB962C8B-B14F-4D97-AF65-F5344CB8AC3E}">
-        <p14:creationId xmlns:p14="http://schemas.microsoft.com/office/powerpoint/2010/main" val="414505108"/>
+        <p14:creationId xmlns:p14="http://schemas.microsoft.com/office/powerpoint/2010/main" val="1756006432"/>
       </p:ext>
     </p:extLst>
   </p:cSld>
@@ -17543,7 +17935,7 @@
           <p:cNvPr id="28" name="object-275">
             <a:extLst xmlns:a="http://schemas.openxmlformats.org/drawingml/2006/main">
               <a:ext uri="{FF2B5EF4-FFF2-40B4-BE49-F238E27FC236}">
-                <a16:creationId xmlns:a16="http://schemas.microsoft.com/office/drawing/2014/main" id="{BC38CC17-3B44-4EEF-81EB-6376F2BF971F}"/>
+                <a16:creationId xmlns:a16="http://schemas.microsoft.com/office/drawing/2014/main" id="{AAF3F969-915A-4BB9-AB14-F4B8D0E1D147}"/>
               </a:ext>
             </a:extLst>
           </p:cNvPr>
@@ -17610,7 +18002,7 @@
           <p:cNvPr id="2" name="object-276">
             <a:extLst xmlns:a="http://schemas.openxmlformats.org/drawingml/2006/main">
               <a:ext uri="{FF2B5EF4-FFF2-40B4-BE49-F238E27FC236}">
-                <a16:creationId xmlns:a16="http://schemas.microsoft.com/office/drawing/2014/main" id="{EA302350-8AAC-4FB2-9537-A4834D8D6B21}"/>
+                <a16:creationId xmlns:a16="http://schemas.microsoft.com/office/drawing/2014/main" id="{F8AF059A-7E1F-4D23-AF54-9723E30C663F}"/>
               </a:ext>
             </a:extLst>
           </p:cNvPr>
@@ -17677,7 +18069,7 @@
           <p:cNvPr id="3" name="object-277">
             <a:extLst xmlns:a="http://schemas.openxmlformats.org/drawingml/2006/main">
               <a:ext uri="{FF2B5EF4-FFF2-40B4-BE49-F238E27FC236}">
-                <a16:creationId xmlns:a16="http://schemas.microsoft.com/office/drawing/2014/main" id="{4CE6082D-E895-4DB8-8023-940F1F9F9124}"/>
+                <a16:creationId xmlns:a16="http://schemas.microsoft.com/office/drawing/2014/main" id="{FC9F9D4C-A2C9-4226-A4BF-A3F7C7F1E65B}"/>
               </a:ext>
             </a:extLst>
           </p:cNvPr>
@@ -17744,7 +18136,7 @@
           <p:cNvPr id="4" name="object-278">
             <a:extLst xmlns:a="http://schemas.openxmlformats.org/drawingml/2006/main">
               <a:ext uri="{FF2B5EF4-FFF2-40B4-BE49-F238E27FC236}">
-                <a16:creationId xmlns:a16="http://schemas.microsoft.com/office/drawing/2014/main" id="{10B4007B-5D04-48FD-8DC0-E517B9E884D2}"/>
+                <a16:creationId xmlns:a16="http://schemas.microsoft.com/office/drawing/2014/main" id="{0B3D29A5-34C9-46E1-B310-B94A1BBBBC00}"/>
               </a:ext>
             </a:extLst>
           </p:cNvPr>
@@ -17811,7 +18203,7 @@
           <p:cNvPr id="5" name="object-279">
             <a:extLst xmlns:a="http://schemas.openxmlformats.org/drawingml/2006/main">
               <a:ext uri="{FF2B5EF4-FFF2-40B4-BE49-F238E27FC236}">
-                <a16:creationId xmlns:a16="http://schemas.microsoft.com/office/drawing/2014/main" id="{42639A65-2DBC-40F1-A166-94D15A0DEEE2}"/>
+                <a16:creationId xmlns:a16="http://schemas.microsoft.com/office/drawing/2014/main" id="{3E5E18FB-0C73-4076-B2C2-1630074B8BC1}"/>
               </a:ext>
             </a:extLst>
           </p:cNvPr>
@@ -17842,7 +18234,7 @@
           <p:cNvPr id="6" name="object-280">
             <a:extLst xmlns:a="http://schemas.openxmlformats.org/drawingml/2006/main">
               <a:ext uri="{FF2B5EF4-FFF2-40B4-BE49-F238E27FC236}">
-                <a16:creationId xmlns:a16="http://schemas.microsoft.com/office/drawing/2014/main" id="{7868E4EA-FD49-432F-A335-3F66D90C0C10}"/>
+                <a16:creationId xmlns:a16="http://schemas.microsoft.com/office/drawing/2014/main" id="{920AD6C5-BA8B-4878-BF79-033CA6B8E57E}"/>
               </a:ext>
             </a:extLst>
           </p:cNvPr>
@@ -17909,7 +18301,7 @@
           <p:cNvPr id="7" name="object-281">
             <a:extLst xmlns:a="http://schemas.openxmlformats.org/drawingml/2006/main">
               <a:ext uri="{FF2B5EF4-FFF2-40B4-BE49-F238E27FC236}">
-                <a16:creationId xmlns:a16="http://schemas.microsoft.com/office/drawing/2014/main" id="{80353C83-B6AF-4BB6-92F2-601FBC6F1524}"/>
+                <a16:creationId xmlns:a16="http://schemas.microsoft.com/office/drawing/2014/main" id="{51307625-8D94-49FB-81AF-A030BA24ABB5}"/>
               </a:ext>
             </a:extLst>
           </p:cNvPr>
@@ -17940,7 +18332,7 @@
           <p:cNvPr id="8" name="object-282">
             <a:extLst xmlns:a="http://schemas.openxmlformats.org/drawingml/2006/main">
               <a:ext uri="{FF2B5EF4-FFF2-40B4-BE49-F238E27FC236}">
-                <a16:creationId xmlns:a16="http://schemas.microsoft.com/office/drawing/2014/main" id="{4124B838-E2FA-4084-A235-630A77043581}"/>
+                <a16:creationId xmlns:a16="http://schemas.microsoft.com/office/drawing/2014/main" id="{9C01E8FB-7713-428A-A553-F29704B2E196}"/>
               </a:ext>
             </a:extLst>
           </p:cNvPr>
@@ -18007,7 +18399,7 @@
           <p:cNvPr id="9" name="line-283">
             <a:extLst xmlns:a="http://schemas.openxmlformats.org/drawingml/2006/main">
               <a:ext uri="{FF2B5EF4-FFF2-40B4-BE49-F238E27FC236}">
-                <a16:creationId xmlns:a16="http://schemas.microsoft.com/office/drawing/2014/main" id="{425F6F58-477F-4948-9580-C3809539C637}"/>
+                <a16:creationId xmlns:a16="http://schemas.microsoft.com/office/drawing/2014/main" id="{7E259561-D838-4566-B8BB-55BB123AEF03}"/>
               </a:ext>
             </a:extLst>
           </p:cNvPr>
@@ -18047,7 +18439,7 @@
           <p:cNvPr id="10" name="line-284">
             <a:extLst xmlns:a="http://schemas.openxmlformats.org/drawingml/2006/main">
               <a:ext uri="{FF2B5EF4-FFF2-40B4-BE49-F238E27FC236}">
-                <a16:creationId xmlns:a16="http://schemas.microsoft.com/office/drawing/2014/main" id="{966E237C-55DC-4BB3-AE17-148B61F860A0}"/>
+                <a16:creationId xmlns:a16="http://schemas.microsoft.com/office/drawing/2014/main" id="{27EA6EB9-71B0-449A-8979-1BDBBD208A7F}"/>
               </a:ext>
             </a:extLst>
           </p:cNvPr>
@@ -18087,7 +18479,7 @@
           <p:cNvPr id="11" name="line-285">
             <a:extLst xmlns:a="http://schemas.openxmlformats.org/drawingml/2006/main">
               <a:ext uri="{FF2B5EF4-FFF2-40B4-BE49-F238E27FC236}">
-                <a16:creationId xmlns:a16="http://schemas.microsoft.com/office/drawing/2014/main" id="{1D630B96-CDBA-477D-8B21-60B2FA3D8C7F}"/>
+                <a16:creationId xmlns:a16="http://schemas.microsoft.com/office/drawing/2014/main" id="{95BDFF9C-8BFB-47CF-8CDA-C10A5B68E422}"/>
               </a:ext>
             </a:extLst>
           </p:cNvPr>
@@ -18127,7 +18519,7 @@
           <p:cNvPr id="12" name="object-286">
             <a:extLst xmlns:a="http://schemas.openxmlformats.org/drawingml/2006/main">
               <a:ext uri="{FF2B5EF4-FFF2-40B4-BE49-F238E27FC236}">
-                <a16:creationId xmlns:a16="http://schemas.microsoft.com/office/drawing/2014/main" id="{A037078F-7D61-4B7B-BD58-AE3B644796EA}"/>
+                <a16:creationId xmlns:a16="http://schemas.microsoft.com/office/drawing/2014/main" id="{800D2E2A-D6D9-48BC-AF0C-D076FF3A1D54}"/>
               </a:ext>
             </a:extLst>
           </p:cNvPr>
@@ -18217,7 +18609,7 @@
           <p:cNvPr id="13" name="line-287">
             <a:extLst xmlns:a="http://schemas.openxmlformats.org/drawingml/2006/main">
               <a:ext uri="{FF2B5EF4-FFF2-40B4-BE49-F238E27FC236}">
-                <a16:creationId xmlns:a16="http://schemas.microsoft.com/office/drawing/2014/main" id="{4F5EC84B-15D5-4E08-AF28-F821D9DE0B9E}"/>
+                <a16:creationId xmlns:a16="http://schemas.microsoft.com/office/drawing/2014/main" id="{43A9B5D5-9CA8-46A3-B436-ECCEFBF9E124}"/>
               </a:ext>
             </a:extLst>
           </p:cNvPr>
@@ -18257,7 +18649,7 @@
           <p:cNvPr id="14" name="object-288">
             <a:extLst xmlns:a="http://schemas.openxmlformats.org/drawingml/2006/main">
               <a:ext uri="{FF2B5EF4-FFF2-40B4-BE49-F238E27FC236}">
-                <a16:creationId xmlns:a16="http://schemas.microsoft.com/office/drawing/2014/main" id="{DDB1EA36-D844-43B6-9E1C-2F8FB7EB5280}"/>
+                <a16:creationId xmlns:a16="http://schemas.microsoft.com/office/drawing/2014/main" id="{43A94198-489F-4F9C-9DF0-0471EB89EA0F}"/>
               </a:ext>
             </a:extLst>
           </p:cNvPr>
@@ -18288,7 +18680,7 @@
           <p:cNvPr id="15" name="object-289">
             <a:extLst xmlns:a="http://schemas.openxmlformats.org/drawingml/2006/main">
               <a:ext uri="{FF2B5EF4-FFF2-40B4-BE49-F238E27FC236}">
-                <a16:creationId xmlns:a16="http://schemas.microsoft.com/office/drawing/2014/main" id="{3D30F7D4-D229-4B4C-8FD4-5C4D9E97D435}"/>
+                <a16:creationId xmlns:a16="http://schemas.microsoft.com/office/drawing/2014/main" id="{5FA598EB-CB5F-444E-9E19-DCDB7D32DF67}"/>
               </a:ext>
             </a:extLst>
           </p:cNvPr>
@@ -18355,7 +18747,7 @@
           <p:cNvPr id="16" name="object-290">
             <a:extLst xmlns:a="http://schemas.openxmlformats.org/drawingml/2006/main">
               <a:ext uri="{FF2B5EF4-FFF2-40B4-BE49-F238E27FC236}">
-                <a16:creationId xmlns:a16="http://schemas.microsoft.com/office/drawing/2014/main" id="{7933F1FF-8022-4681-98B4-F76F8F3DC3C4}"/>
+                <a16:creationId xmlns:a16="http://schemas.microsoft.com/office/drawing/2014/main" id="{AC5D4885-0AE1-446A-AAE9-8B7234A57518}"/>
               </a:ext>
             </a:extLst>
           </p:cNvPr>
@@ -18422,7 +18814,7 @@
           <p:cNvPr id="17" name="reveal1-object-291">
             <a:extLst xmlns:a="http://schemas.openxmlformats.org/drawingml/2006/main">
               <a:ext uri="{FF2B5EF4-FFF2-40B4-BE49-F238E27FC236}">
-                <a16:creationId xmlns:a16="http://schemas.microsoft.com/office/drawing/2014/main" id="{93CCBA97-E256-4DA7-95B5-D88CE916CACF}"/>
+                <a16:creationId xmlns:a16="http://schemas.microsoft.com/office/drawing/2014/main" id="{15457C12-8813-4CB0-A7E4-AB1078B8C4BA}"/>
               </a:ext>
             </a:extLst>
           </p:cNvPr>
@@ -18489,7 +18881,7 @@
           <p:cNvPr id="18" name="reveal1-object-292">
             <a:extLst xmlns:a="http://schemas.openxmlformats.org/drawingml/2006/main">
               <a:ext uri="{FF2B5EF4-FFF2-40B4-BE49-F238E27FC236}">
-                <a16:creationId xmlns:a16="http://schemas.microsoft.com/office/drawing/2014/main" id="{93FE0C50-97C8-4F52-B58E-D012F746D9D1}"/>
+                <a16:creationId xmlns:a16="http://schemas.microsoft.com/office/drawing/2014/main" id="{7C51F10F-00B7-47A8-BFF5-99A9BB15A97A}"/>
               </a:ext>
             </a:extLst>
           </p:cNvPr>
@@ -18520,7 +18912,7 @@
           <p:cNvPr id="19" name="reveal1-object-293">
             <a:extLst xmlns:a="http://schemas.openxmlformats.org/drawingml/2006/main">
               <a:ext uri="{FF2B5EF4-FFF2-40B4-BE49-F238E27FC236}">
-                <a16:creationId xmlns:a16="http://schemas.microsoft.com/office/drawing/2014/main" id="{B0BC36A4-1D85-4C10-BF7B-4E76D94615B3}"/>
+                <a16:creationId xmlns:a16="http://schemas.microsoft.com/office/drawing/2014/main" id="{CBC8801C-0DAE-4290-8DA2-72877F1787DB}"/>
               </a:ext>
             </a:extLst>
           </p:cNvPr>
@@ -18587,7 +18979,7 @@
           <p:cNvPr id="20" name="reveal1-object-294">
             <a:extLst xmlns:a="http://schemas.openxmlformats.org/drawingml/2006/main">
               <a:ext uri="{FF2B5EF4-FFF2-40B4-BE49-F238E27FC236}">
-                <a16:creationId xmlns:a16="http://schemas.microsoft.com/office/drawing/2014/main" id="{15B38782-A19F-4259-B940-DBA3718DC05D}"/>
+                <a16:creationId xmlns:a16="http://schemas.microsoft.com/office/drawing/2014/main" id="{AAA702D4-E6E8-4814-B0B4-A90764DC85F5}"/>
               </a:ext>
             </a:extLst>
           </p:cNvPr>
@@ -18677,7 +19069,7 @@
           <p:cNvPr id="21" name="reveal2-object-295">
             <a:extLst xmlns:a="http://schemas.openxmlformats.org/drawingml/2006/main">
               <a:ext uri="{FF2B5EF4-FFF2-40B4-BE49-F238E27FC236}">
-                <a16:creationId xmlns:a16="http://schemas.microsoft.com/office/drawing/2014/main" id="{F91A1793-2E14-41A7-B573-F1EF107951DA}"/>
+                <a16:creationId xmlns:a16="http://schemas.microsoft.com/office/drawing/2014/main" id="{A99416F2-B6A0-43E8-8339-B3E9AC1DA95B}"/>
               </a:ext>
             </a:extLst>
           </p:cNvPr>
@@ -18744,7 +19136,7 @@
           <p:cNvPr id="22" name="reveal2-object-296">
             <a:extLst xmlns:a="http://schemas.openxmlformats.org/drawingml/2006/main">
               <a:ext uri="{FF2B5EF4-FFF2-40B4-BE49-F238E27FC236}">
-                <a16:creationId xmlns:a16="http://schemas.microsoft.com/office/drawing/2014/main" id="{37CA28D2-E9D7-4874-9CE6-0D5157FB1A6F}"/>
+                <a16:creationId xmlns:a16="http://schemas.microsoft.com/office/drawing/2014/main" id="{64EB9796-1155-4EBE-9D9B-D8BEFD89210A}"/>
               </a:ext>
             </a:extLst>
           </p:cNvPr>
@@ -18811,7 +19203,7 @@
           <p:cNvPr id="23" name="reveal2-line-297">
             <a:extLst xmlns:a="http://schemas.openxmlformats.org/drawingml/2006/main">
               <a:ext uri="{FF2B5EF4-FFF2-40B4-BE49-F238E27FC236}">
-                <a16:creationId xmlns:a16="http://schemas.microsoft.com/office/drawing/2014/main" id="{D9052F6E-130B-4340-A408-11063F70F820}"/>
+                <a16:creationId xmlns:a16="http://schemas.microsoft.com/office/drawing/2014/main" id="{B115E67D-0934-44CB-93C5-A27607810F20}"/>
               </a:ext>
             </a:extLst>
           </p:cNvPr>
@@ -18851,7 +19243,7 @@
           <p:cNvPr id="24" name="reveal2-object-298">
             <a:extLst xmlns:a="http://schemas.openxmlformats.org/drawingml/2006/main">
               <a:ext uri="{FF2B5EF4-FFF2-40B4-BE49-F238E27FC236}">
-                <a16:creationId xmlns:a16="http://schemas.microsoft.com/office/drawing/2014/main" id="{265BE58D-00CC-4C4A-8672-B1B2D6C0382F}"/>
+                <a16:creationId xmlns:a16="http://schemas.microsoft.com/office/drawing/2014/main" id="{83764F12-C5F1-480B-9099-D9AE7817B948}"/>
               </a:ext>
             </a:extLst>
           </p:cNvPr>
@@ -18941,7 +19333,7 @@
           <p:cNvPr id="25" name="reveal2-object-299">
             <a:extLst xmlns:a="http://schemas.openxmlformats.org/drawingml/2006/main">
               <a:ext uri="{FF2B5EF4-FFF2-40B4-BE49-F238E27FC236}">
-                <a16:creationId xmlns:a16="http://schemas.microsoft.com/office/drawing/2014/main" id="{93C39345-EBAC-4512-B30D-91F33AEAB7A6}"/>
+                <a16:creationId xmlns:a16="http://schemas.microsoft.com/office/drawing/2014/main" id="{3E8C0B4C-459D-4C3E-B402-376F2DFF0FD1}"/>
               </a:ext>
             </a:extLst>
           </p:cNvPr>
@@ -19008,7 +19400,7 @@
           <p:cNvPr id="26" name="object-300">
             <a:extLst xmlns:a="http://schemas.openxmlformats.org/drawingml/2006/main">
               <a:ext uri="{FF2B5EF4-FFF2-40B4-BE49-F238E27FC236}">
-                <a16:creationId xmlns:a16="http://schemas.microsoft.com/office/drawing/2014/main" id="{51C06A66-4699-42A8-A256-EB9FE7352A94}"/>
+                <a16:creationId xmlns:a16="http://schemas.microsoft.com/office/drawing/2014/main" id="{33D1B727-E796-4A4C-94BD-816AD1CAA746}"/>
               </a:ext>
             </a:extLst>
           </p:cNvPr>
@@ -19075,7 +19467,7 @@
           <p:cNvPr id="27" name="object-301">
             <a:extLst xmlns:a="http://schemas.openxmlformats.org/drawingml/2006/main">
               <a:ext uri="{FF2B5EF4-FFF2-40B4-BE49-F238E27FC236}">
-                <a16:creationId xmlns:a16="http://schemas.microsoft.com/office/drawing/2014/main" id="{3E3965B2-A898-47D0-BEA8-CD2B06E1D64C}"/>
+                <a16:creationId xmlns:a16="http://schemas.microsoft.com/office/drawing/2014/main" id="{7E4D58B2-0544-44AA-8CAE-659543C24FD9}"/>
               </a:ext>
             </a:extLst>
           </p:cNvPr>
@@ -19140,7 +19532,7 @@
     </p:spTree>
     <p:extLst>
       <p:ext uri="{BB962C8B-B14F-4D97-AF65-F5344CB8AC3E}">
-        <p14:creationId xmlns:p14="http://schemas.microsoft.com/office/powerpoint/2010/main" val="40995247"/>
+        <p14:creationId xmlns:p14="http://schemas.microsoft.com/office/powerpoint/2010/main" val="1618669173"/>
       </p:ext>
     </p:extLst>
   </p:cSld>
@@ -19491,7 +19883,7 @@
           <p:cNvPr id="32" name="object-302">
             <a:extLst xmlns:a="http://schemas.openxmlformats.org/drawingml/2006/main">
               <a:ext uri="{FF2B5EF4-FFF2-40B4-BE49-F238E27FC236}">
-                <a16:creationId xmlns:a16="http://schemas.microsoft.com/office/drawing/2014/main" id="{1B205253-2E46-46A3-A76A-32D272994407}"/>
+                <a16:creationId xmlns:a16="http://schemas.microsoft.com/office/drawing/2014/main" id="{FA3EB81A-5B5D-444C-B11F-F1407A694DCD}"/>
               </a:ext>
             </a:extLst>
           </p:cNvPr>
@@ -19558,7 +19950,7 @@
           <p:cNvPr id="2" name="object-303">
             <a:extLst xmlns:a="http://schemas.openxmlformats.org/drawingml/2006/main">
               <a:ext uri="{FF2B5EF4-FFF2-40B4-BE49-F238E27FC236}">
-                <a16:creationId xmlns:a16="http://schemas.microsoft.com/office/drawing/2014/main" id="{A17C14BA-C3EE-4266-991C-9DE8EAD20C40}"/>
+                <a16:creationId xmlns:a16="http://schemas.microsoft.com/office/drawing/2014/main" id="{C91A6D65-8910-442E-A2D7-03D9B8BD5278}"/>
               </a:ext>
             </a:extLst>
           </p:cNvPr>
@@ -19625,7 +20017,7 @@
           <p:cNvPr id="3" name="object-304">
             <a:extLst xmlns:a="http://schemas.openxmlformats.org/drawingml/2006/main">
               <a:ext uri="{FF2B5EF4-FFF2-40B4-BE49-F238E27FC236}">
-                <a16:creationId xmlns:a16="http://schemas.microsoft.com/office/drawing/2014/main" id="{07AF2F4F-2F67-4016-BA93-EB23A25CC188}"/>
+                <a16:creationId xmlns:a16="http://schemas.microsoft.com/office/drawing/2014/main" id="{857DBE63-5E1B-4531-9252-38904E71A577}"/>
               </a:ext>
             </a:extLst>
           </p:cNvPr>
@@ -19692,7 +20084,7 @@
           <p:cNvPr id="4" name="line-305">
             <a:extLst xmlns:a="http://schemas.openxmlformats.org/drawingml/2006/main">
               <a:ext uri="{FF2B5EF4-FFF2-40B4-BE49-F238E27FC236}">
-                <a16:creationId xmlns:a16="http://schemas.microsoft.com/office/drawing/2014/main" id="{4D4963D0-3209-49E5-BCFA-2ABC99499D65}"/>
+                <a16:creationId xmlns:a16="http://schemas.microsoft.com/office/drawing/2014/main" id="{459CCB75-B741-458F-881C-DD06CD6F1687}"/>
               </a:ext>
             </a:extLst>
           </p:cNvPr>
@@ -19732,7 +20124,7 @@
           <p:cNvPr id="5" name="object-306">
             <a:extLst xmlns:a="http://schemas.openxmlformats.org/drawingml/2006/main">
               <a:ext uri="{FF2B5EF4-FFF2-40B4-BE49-F238E27FC236}">
-                <a16:creationId xmlns:a16="http://schemas.microsoft.com/office/drawing/2014/main" id="{F35EF99D-A5A1-4372-B244-4C367574CCE7}"/>
+                <a16:creationId xmlns:a16="http://schemas.microsoft.com/office/drawing/2014/main" id="{C63E2381-A36D-4FBD-873A-B9CB239DFD5C}"/>
               </a:ext>
             </a:extLst>
           </p:cNvPr>
@@ -19799,7 +20191,7 @@
           <p:cNvPr id="6" name="line-307">
             <a:extLst xmlns:a="http://schemas.openxmlformats.org/drawingml/2006/main">
               <a:ext uri="{FF2B5EF4-FFF2-40B4-BE49-F238E27FC236}">
-                <a16:creationId xmlns:a16="http://schemas.microsoft.com/office/drawing/2014/main" id="{F684E8F3-B570-4FDA-9D14-F732C789DA41}"/>
+                <a16:creationId xmlns:a16="http://schemas.microsoft.com/office/drawing/2014/main" id="{D6F6A138-BE30-4B05-A420-24BDB728D48C}"/>
               </a:ext>
             </a:extLst>
           </p:cNvPr>
@@ -19839,7 +20231,7 @@
           <p:cNvPr id="7" name="object-308">
             <a:extLst xmlns:a="http://schemas.openxmlformats.org/drawingml/2006/main">
               <a:ext uri="{FF2B5EF4-FFF2-40B4-BE49-F238E27FC236}">
-                <a16:creationId xmlns:a16="http://schemas.microsoft.com/office/drawing/2014/main" id="{3362D67C-F73D-43B0-8132-C733ECB7135E}"/>
+                <a16:creationId xmlns:a16="http://schemas.microsoft.com/office/drawing/2014/main" id="{3B085789-C271-4F61-90AE-9643FC44FDF1}"/>
               </a:ext>
             </a:extLst>
           </p:cNvPr>
@@ -19906,7 +20298,7 @@
           <p:cNvPr id="8" name="line-309">
             <a:extLst xmlns:a="http://schemas.openxmlformats.org/drawingml/2006/main">
               <a:ext uri="{FF2B5EF4-FFF2-40B4-BE49-F238E27FC236}">
-                <a16:creationId xmlns:a16="http://schemas.microsoft.com/office/drawing/2014/main" id="{143212E5-8527-4CDA-9DA1-C63EF2E2DD8F}"/>
+                <a16:creationId xmlns:a16="http://schemas.microsoft.com/office/drawing/2014/main" id="{9DBC14E5-D9C7-4D51-972F-C38BCA733882}"/>
               </a:ext>
             </a:extLst>
           </p:cNvPr>
@@ -19946,7 +20338,7 @@
           <p:cNvPr id="9" name="object-310">
             <a:extLst xmlns:a="http://schemas.openxmlformats.org/drawingml/2006/main">
               <a:ext uri="{FF2B5EF4-FFF2-40B4-BE49-F238E27FC236}">
-                <a16:creationId xmlns:a16="http://schemas.microsoft.com/office/drawing/2014/main" id="{46A055C2-A14C-4DA3-9A66-2F42D3E9E0EB}"/>
+                <a16:creationId xmlns:a16="http://schemas.microsoft.com/office/drawing/2014/main" id="{8B1D0D20-A511-4E7E-89CF-98B17149D73C}"/>
               </a:ext>
             </a:extLst>
           </p:cNvPr>
@@ -20013,7 +20405,7 @@
           <p:cNvPr id="10" name="object-311">
             <a:extLst xmlns:a="http://schemas.openxmlformats.org/drawingml/2006/main">
               <a:ext uri="{FF2B5EF4-FFF2-40B4-BE49-F238E27FC236}">
-                <a16:creationId xmlns:a16="http://schemas.microsoft.com/office/drawing/2014/main" id="{E66C42AD-620F-4358-BE4D-28BA9B832A8B}"/>
+                <a16:creationId xmlns:a16="http://schemas.microsoft.com/office/drawing/2014/main" id="{B17CD0BF-B1FB-4402-B3A7-9647BDBD32E3}"/>
               </a:ext>
             </a:extLst>
           </p:cNvPr>
@@ -20044,7 +20436,7 @@
           <p:cNvPr id="11" name="object-312">
             <a:extLst xmlns:a="http://schemas.openxmlformats.org/drawingml/2006/main">
               <a:ext uri="{FF2B5EF4-FFF2-40B4-BE49-F238E27FC236}">
-                <a16:creationId xmlns:a16="http://schemas.microsoft.com/office/drawing/2014/main" id="{CE909315-704E-4AF2-8C0E-56767D484833}"/>
+                <a16:creationId xmlns:a16="http://schemas.microsoft.com/office/drawing/2014/main" id="{A303192F-EBB3-497B-86BA-7A641ECDA140}"/>
               </a:ext>
             </a:extLst>
           </p:cNvPr>
@@ -20111,7 +20503,7 @@
           <p:cNvPr id="12" name="line-313">
             <a:extLst xmlns:a="http://schemas.openxmlformats.org/drawingml/2006/main">
               <a:ext uri="{FF2B5EF4-FFF2-40B4-BE49-F238E27FC236}">
-                <a16:creationId xmlns:a16="http://schemas.microsoft.com/office/drawing/2014/main" id="{4AED1E56-AD9E-4A96-9301-950DFCC26619}"/>
+                <a16:creationId xmlns:a16="http://schemas.microsoft.com/office/drawing/2014/main" id="{057B8A86-6650-4720-B4B3-68B04CD8A1D5}"/>
               </a:ext>
             </a:extLst>
           </p:cNvPr>
@@ -20151,7 +20543,7 @@
           <p:cNvPr id="13" name="object-314">
             <a:extLst xmlns:a="http://schemas.openxmlformats.org/drawingml/2006/main">
               <a:ext uri="{FF2B5EF4-FFF2-40B4-BE49-F238E27FC236}">
-                <a16:creationId xmlns:a16="http://schemas.microsoft.com/office/drawing/2014/main" id="{6EABD000-F5E7-499C-81FF-E51877D70473}"/>
+                <a16:creationId xmlns:a16="http://schemas.microsoft.com/office/drawing/2014/main" id="{E0D2A395-6F84-48E1-90EF-86DCA2DCC97E}"/>
               </a:ext>
             </a:extLst>
           </p:cNvPr>
@@ -20218,7 +20610,7 @@
           <p:cNvPr id="14" name="object-315">
             <a:extLst xmlns:a="http://schemas.openxmlformats.org/drawingml/2006/main">
               <a:ext uri="{FF2B5EF4-FFF2-40B4-BE49-F238E27FC236}">
-                <a16:creationId xmlns:a16="http://schemas.microsoft.com/office/drawing/2014/main" id="{DA0A4937-C01C-40FC-A150-547942CB4F37}"/>
+                <a16:creationId xmlns:a16="http://schemas.microsoft.com/office/drawing/2014/main" id="{5AD3249C-523F-41B0-8951-95C8CE5ED659}"/>
               </a:ext>
             </a:extLst>
           </p:cNvPr>
@@ -20308,7 +20700,7 @@
           <p:cNvPr id="15" name="reveal1-line-316">
             <a:extLst xmlns:a="http://schemas.openxmlformats.org/drawingml/2006/main">
               <a:ext uri="{FF2B5EF4-FFF2-40B4-BE49-F238E27FC236}">
-                <a16:creationId xmlns:a16="http://schemas.microsoft.com/office/drawing/2014/main" id="{A357426C-FEBD-446B-BD3E-91EC1CF46CD7}"/>
+                <a16:creationId xmlns:a16="http://schemas.microsoft.com/office/drawing/2014/main" id="{2D85C83C-39D6-4537-9FBC-07CEF0BFA9E7}"/>
               </a:ext>
             </a:extLst>
           </p:cNvPr>
@@ -20348,7 +20740,7 @@
           <p:cNvPr id="16" name="reveal1-object-317">
             <a:extLst xmlns:a="http://schemas.openxmlformats.org/drawingml/2006/main">
               <a:ext uri="{FF2B5EF4-FFF2-40B4-BE49-F238E27FC236}">
-                <a16:creationId xmlns:a16="http://schemas.microsoft.com/office/drawing/2014/main" id="{D1079878-81C2-4F8C-A8BC-3D87234B4744}"/>
+                <a16:creationId xmlns:a16="http://schemas.microsoft.com/office/drawing/2014/main" id="{2D683218-68E1-4034-A3CF-52F287E6CCA6}"/>
               </a:ext>
             </a:extLst>
           </p:cNvPr>
@@ -20415,7 +20807,7 @@
           <p:cNvPr id="17" name="reveal1-object-318">
             <a:extLst xmlns:a="http://schemas.openxmlformats.org/drawingml/2006/main">
               <a:ext uri="{FF2B5EF4-FFF2-40B4-BE49-F238E27FC236}">
-                <a16:creationId xmlns:a16="http://schemas.microsoft.com/office/drawing/2014/main" id="{B4A31493-6BF5-47E7-A31D-157EEFC15F9C}"/>
+                <a16:creationId xmlns:a16="http://schemas.microsoft.com/office/drawing/2014/main" id="{8F671890-8F84-4D01-9D07-90B589605F4E}"/>
               </a:ext>
             </a:extLst>
           </p:cNvPr>
@@ -20446,7 +20838,7 @@
           <p:cNvPr id="18" name="reveal1-object-319">
             <a:extLst xmlns:a="http://schemas.openxmlformats.org/drawingml/2006/main">
               <a:ext uri="{FF2B5EF4-FFF2-40B4-BE49-F238E27FC236}">
-                <a16:creationId xmlns:a16="http://schemas.microsoft.com/office/drawing/2014/main" id="{EC1B4F4A-55DE-4D34-AC3D-6ECC3B8C8E8D}"/>
+                <a16:creationId xmlns:a16="http://schemas.microsoft.com/office/drawing/2014/main" id="{D0DC5CA1-E07B-4CB1-98B7-2BDE7921C6A3}"/>
               </a:ext>
             </a:extLst>
           </p:cNvPr>
@@ -20513,7 +20905,7 @@
           <p:cNvPr id="19" name="reveal1-line-320">
             <a:extLst xmlns:a="http://schemas.openxmlformats.org/drawingml/2006/main">
               <a:ext uri="{FF2B5EF4-FFF2-40B4-BE49-F238E27FC236}">
-                <a16:creationId xmlns:a16="http://schemas.microsoft.com/office/drawing/2014/main" id="{1A4BD0C0-00D5-4ED9-8908-9F361BCECA3D}"/>
+                <a16:creationId xmlns:a16="http://schemas.microsoft.com/office/drawing/2014/main" id="{A828727A-DEDD-4C1F-B941-D6F9B36F08DF}"/>
               </a:ext>
             </a:extLst>
           </p:cNvPr>
@@ -20553,7 +20945,7 @@
           <p:cNvPr id="20" name="reveal1-line-321">
             <a:extLst xmlns:a="http://schemas.openxmlformats.org/drawingml/2006/main">
               <a:ext uri="{FF2B5EF4-FFF2-40B4-BE49-F238E27FC236}">
-                <a16:creationId xmlns:a16="http://schemas.microsoft.com/office/drawing/2014/main" id="{7EC4F325-759B-42AB-9582-880776A4DDA8}"/>
+                <a16:creationId xmlns:a16="http://schemas.microsoft.com/office/drawing/2014/main" id="{F1261CE8-C502-437F-AE4C-278D7594BB57}"/>
               </a:ext>
             </a:extLst>
           </p:cNvPr>
@@ -20593,7 +20985,7 @@
           <p:cNvPr id="21" name="reveal1-line-322">
             <a:extLst xmlns:a="http://schemas.openxmlformats.org/drawingml/2006/main">
               <a:ext uri="{FF2B5EF4-FFF2-40B4-BE49-F238E27FC236}">
-                <a16:creationId xmlns:a16="http://schemas.microsoft.com/office/drawing/2014/main" id="{5D919D90-233B-4905-B71E-0C1ADC8CCAD2}"/>
+                <a16:creationId xmlns:a16="http://schemas.microsoft.com/office/drawing/2014/main" id="{39F2D2B6-2BD8-49C9-9CB8-1E950F9E23B3}"/>
               </a:ext>
             </a:extLst>
           </p:cNvPr>
@@ -20633,7 +21025,7 @@
           <p:cNvPr id="22" name="reveal1-line-323">
             <a:extLst xmlns:a="http://schemas.openxmlformats.org/drawingml/2006/main">
               <a:ext uri="{FF2B5EF4-FFF2-40B4-BE49-F238E27FC236}">
-                <a16:creationId xmlns:a16="http://schemas.microsoft.com/office/drawing/2014/main" id="{286C84A2-AF50-4E80-8948-29BFDAA4E26D}"/>
+                <a16:creationId xmlns:a16="http://schemas.microsoft.com/office/drawing/2014/main" id="{718CB2EE-C9D2-4EB6-8710-F8498D5B4900}"/>
               </a:ext>
             </a:extLst>
           </p:cNvPr>
@@ -20673,7 +21065,7 @@
           <p:cNvPr id="23" name="reveal1-line-324">
             <a:extLst xmlns:a="http://schemas.openxmlformats.org/drawingml/2006/main">
               <a:ext uri="{FF2B5EF4-FFF2-40B4-BE49-F238E27FC236}">
-                <a16:creationId xmlns:a16="http://schemas.microsoft.com/office/drawing/2014/main" id="{02BDBFD7-7105-49D2-ABE7-41914B59CC21}"/>
+                <a16:creationId xmlns:a16="http://schemas.microsoft.com/office/drawing/2014/main" id="{D2D1F434-5216-4FA7-A4DC-8E6179CB9788}"/>
               </a:ext>
             </a:extLst>
           </p:cNvPr>
@@ -20713,7 +21105,7 @@
           <p:cNvPr id="24" name="reveal1-line-325">
             <a:extLst xmlns:a="http://schemas.openxmlformats.org/drawingml/2006/main">
               <a:ext uri="{FF2B5EF4-FFF2-40B4-BE49-F238E27FC236}">
-                <a16:creationId xmlns:a16="http://schemas.microsoft.com/office/drawing/2014/main" id="{0E2A2E11-9EE2-4A0E-8BB4-E3CAA2D8BF66}"/>
+                <a16:creationId xmlns:a16="http://schemas.microsoft.com/office/drawing/2014/main" id="{DB186A29-422B-417E-918A-FCACF6F7ED92}"/>
               </a:ext>
             </a:extLst>
           </p:cNvPr>
@@ -20753,7 +21145,7 @@
           <p:cNvPr id="25" name="reveal1-line-326">
             <a:extLst xmlns:a="http://schemas.openxmlformats.org/drawingml/2006/main">
               <a:ext uri="{FF2B5EF4-FFF2-40B4-BE49-F238E27FC236}">
-                <a16:creationId xmlns:a16="http://schemas.microsoft.com/office/drawing/2014/main" id="{C48A856A-AE5D-4DA2-9D0B-3DD767CEA798}"/>
+                <a16:creationId xmlns:a16="http://schemas.microsoft.com/office/drawing/2014/main" id="{3B37C3EB-88F8-4AF5-8C28-43ED058AFF58}"/>
               </a:ext>
             </a:extLst>
           </p:cNvPr>
@@ -20793,7 +21185,7 @@
           <p:cNvPr id="26" name="reveal1-line-327">
             <a:extLst xmlns:a="http://schemas.openxmlformats.org/drawingml/2006/main">
               <a:ext uri="{FF2B5EF4-FFF2-40B4-BE49-F238E27FC236}">
-                <a16:creationId xmlns:a16="http://schemas.microsoft.com/office/drawing/2014/main" id="{A23A3285-1017-44AB-B5A3-03DD7E5AB8B6}"/>
+                <a16:creationId xmlns:a16="http://schemas.microsoft.com/office/drawing/2014/main" id="{B274C27B-511A-45CB-B149-DE191AB94396}"/>
               </a:ext>
             </a:extLst>
           </p:cNvPr>
@@ -20833,7 +21225,7 @@
           <p:cNvPr id="27" name="reveal1-object-328">
             <a:extLst xmlns:a="http://schemas.openxmlformats.org/drawingml/2006/main">
               <a:ext uri="{FF2B5EF4-FFF2-40B4-BE49-F238E27FC236}">
-                <a16:creationId xmlns:a16="http://schemas.microsoft.com/office/drawing/2014/main" id="{CB49DC7C-F6D5-4DD1-B1D0-52EA78D7DDF2}"/>
+                <a16:creationId xmlns:a16="http://schemas.microsoft.com/office/drawing/2014/main" id="{22730B19-BFD9-4EAC-A653-EBB7849B6580}"/>
               </a:ext>
             </a:extLst>
           </p:cNvPr>
@@ -20900,7 +21292,7 @@
           <p:cNvPr id="28" name="reveal1-line-329">
             <a:extLst xmlns:a="http://schemas.openxmlformats.org/drawingml/2006/main">
               <a:ext uri="{FF2B5EF4-FFF2-40B4-BE49-F238E27FC236}">
-                <a16:creationId xmlns:a16="http://schemas.microsoft.com/office/drawing/2014/main" id="{B70727FC-4CCB-4DB2-8E1C-237DD53491FC}"/>
+                <a16:creationId xmlns:a16="http://schemas.microsoft.com/office/drawing/2014/main" id="{EBF5B6C5-E3BC-4FAA-BEFA-B52EC7188C34}"/>
               </a:ext>
             </a:extLst>
           </p:cNvPr>
@@ -20940,7 +21332,7 @@
           <p:cNvPr id="29" name="reveal1-object-330">
             <a:extLst xmlns:a="http://schemas.openxmlformats.org/drawingml/2006/main">
               <a:ext uri="{FF2B5EF4-FFF2-40B4-BE49-F238E27FC236}">
-                <a16:creationId xmlns:a16="http://schemas.microsoft.com/office/drawing/2014/main" id="{D6071F87-9CE8-4E42-9B19-41F32838159B}"/>
+                <a16:creationId xmlns:a16="http://schemas.microsoft.com/office/drawing/2014/main" id="{F9E3B71F-6C51-417C-A657-9AE32120814A}"/>
               </a:ext>
             </a:extLst>
           </p:cNvPr>
@@ -21007,7 +21399,7 @@
           <p:cNvPr id="30" name="object-331">
             <a:extLst xmlns:a="http://schemas.openxmlformats.org/drawingml/2006/main">
               <a:ext uri="{FF2B5EF4-FFF2-40B4-BE49-F238E27FC236}">
-                <a16:creationId xmlns:a16="http://schemas.microsoft.com/office/drawing/2014/main" id="{DFC4796E-7279-4053-ADE9-47430DB1B646}"/>
+                <a16:creationId xmlns:a16="http://schemas.microsoft.com/office/drawing/2014/main" id="{1C624FCC-7FF0-40CC-BF55-68EA093E4226}"/>
               </a:ext>
             </a:extLst>
           </p:cNvPr>
@@ -21074,7 +21466,7 @@
           <p:cNvPr id="31" name="object-332">
             <a:extLst xmlns:a="http://schemas.openxmlformats.org/drawingml/2006/main">
               <a:ext uri="{FF2B5EF4-FFF2-40B4-BE49-F238E27FC236}">
-                <a16:creationId xmlns:a16="http://schemas.microsoft.com/office/drawing/2014/main" id="{1F831372-545A-4DBC-874C-F5E98FAA034C}"/>
+                <a16:creationId xmlns:a16="http://schemas.microsoft.com/office/drawing/2014/main" id="{69890DE9-940A-4BF5-BEB2-F1D89DE6CC54}"/>
               </a:ext>
             </a:extLst>
           </p:cNvPr>
@@ -21139,7 +21531,7 @@
     </p:spTree>
     <p:extLst>
       <p:ext uri="{BB962C8B-B14F-4D97-AF65-F5344CB8AC3E}">
-        <p14:creationId xmlns:p14="http://schemas.microsoft.com/office/powerpoint/2010/main" val="1997546202"/>
+        <p14:creationId xmlns:p14="http://schemas.microsoft.com/office/powerpoint/2010/main" val="1800288198"/>
       </p:ext>
     </p:extLst>
   </p:cSld>
@@ -21640,7 +22032,7 @@
           <p:cNvPr id="42" name="object-333">
             <a:extLst xmlns:a="http://schemas.openxmlformats.org/drawingml/2006/main">
               <a:ext uri="{FF2B5EF4-FFF2-40B4-BE49-F238E27FC236}">
-                <a16:creationId xmlns:a16="http://schemas.microsoft.com/office/drawing/2014/main" id="{BD55AD64-B7CD-4640-8DDC-47CE18D5AD8A}"/>
+                <a16:creationId xmlns:a16="http://schemas.microsoft.com/office/drawing/2014/main" id="{0F8996BB-E314-4BF7-8208-672F8F552704}"/>
               </a:ext>
             </a:extLst>
           </p:cNvPr>
@@ -21707,7 +22099,7 @@
           <p:cNvPr id="2" name="object-334">
             <a:extLst xmlns:a="http://schemas.openxmlformats.org/drawingml/2006/main">
               <a:ext uri="{FF2B5EF4-FFF2-40B4-BE49-F238E27FC236}">
-                <a16:creationId xmlns:a16="http://schemas.microsoft.com/office/drawing/2014/main" id="{F16F05E9-2134-4862-AE95-069582FA4DC1}"/>
+                <a16:creationId xmlns:a16="http://schemas.microsoft.com/office/drawing/2014/main" id="{E499C8FA-CDC0-4FED-9266-13A1B2C31ED2}"/>
               </a:ext>
             </a:extLst>
           </p:cNvPr>
@@ -21774,7 +22166,7 @@
           <p:cNvPr id="3" name="line-335">
             <a:extLst xmlns:a="http://schemas.openxmlformats.org/drawingml/2006/main">
               <a:ext uri="{FF2B5EF4-FFF2-40B4-BE49-F238E27FC236}">
-                <a16:creationId xmlns:a16="http://schemas.microsoft.com/office/drawing/2014/main" id="{D5802DA7-D19E-4386-A35A-FF0FFF8EB4AB}"/>
+                <a16:creationId xmlns:a16="http://schemas.microsoft.com/office/drawing/2014/main" id="{60D06EDC-1B56-4F23-B529-8D7000F8692E}"/>
               </a:ext>
             </a:extLst>
           </p:cNvPr>
@@ -21814,7 +22206,7 @@
           <p:cNvPr id="4" name="line-336">
             <a:extLst xmlns:a="http://schemas.openxmlformats.org/drawingml/2006/main">
               <a:ext uri="{FF2B5EF4-FFF2-40B4-BE49-F238E27FC236}">
-                <a16:creationId xmlns:a16="http://schemas.microsoft.com/office/drawing/2014/main" id="{BDB18690-2983-4C37-B65E-D0C33763FA4D}"/>
+                <a16:creationId xmlns:a16="http://schemas.microsoft.com/office/drawing/2014/main" id="{E394A2A6-98D9-4736-B3F1-CD6AF6E8FB9F}"/>
               </a:ext>
             </a:extLst>
           </p:cNvPr>
@@ -21854,7 +22246,7 @@
           <p:cNvPr id="5" name="object-337">
             <a:extLst xmlns:a="http://schemas.openxmlformats.org/drawingml/2006/main">
               <a:ext uri="{FF2B5EF4-FFF2-40B4-BE49-F238E27FC236}">
-                <a16:creationId xmlns:a16="http://schemas.microsoft.com/office/drawing/2014/main" id="{34CF516F-E7CC-4239-91EF-5666D929118B}"/>
+                <a16:creationId xmlns:a16="http://schemas.microsoft.com/office/drawing/2014/main" id="{B00BD636-08C0-4B6C-BC49-838A218B8E0C}"/>
               </a:ext>
             </a:extLst>
           </p:cNvPr>
@@ -21921,7 +22313,7 @@
           <p:cNvPr id="6" name="object-338">
             <a:extLst xmlns:a="http://schemas.openxmlformats.org/drawingml/2006/main">
               <a:ext uri="{FF2B5EF4-FFF2-40B4-BE49-F238E27FC236}">
-                <a16:creationId xmlns:a16="http://schemas.microsoft.com/office/drawing/2014/main" id="{158BB52E-6BBF-4855-A029-B16F26C7CA7F}"/>
+                <a16:creationId xmlns:a16="http://schemas.microsoft.com/office/drawing/2014/main" id="{BFE9C51E-0CF7-48C9-A32E-E723085A7144}"/>
               </a:ext>
             </a:extLst>
           </p:cNvPr>
@@ -21952,7 +22344,7 @@
           <p:cNvPr id="7" name="object-339">
             <a:extLst xmlns:a="http://schemas.openxmlformats.org/drawingml/2006/main">
               <a:ext uri="{FF2B5EF4-FFF2-40B4-BE49-F238E27FC236}">
-                <a16:creationId xmlns:a16="http://schemas.microsoft.com/office/drawing/2014/main" id="{A96DEE91-4C50-4FC8-BC2B-C3CF12B7409D}"/>
+                <a16:creationId xmlns:a16="http://schemas.microsoft.com/office/drawing/2014/main" id="{B2195099-0054-4419-8055-487788470338}"/>
               </a:ext>
             </a:extLst>
           </p:cNvPr>
@@ -22019,7 +22411,7 @@
           <p:cNvPr id="8" name="line-340">
             <a:extLst xmlns:a="http://schemas.openxmlformats.org/drawingml/2006/main">
               <a:ext uri="{FF2B5EF4-FFF2-40B4-BE49-F238E27FC236}">
-                <a16:creationId xmlns:a16="http://schemas.microsoft.com/office/drawing/2014/main" id="{CF9C9195-7877-4E90-8265-0F45A2DB83FB}"/>
+                <a16:creationId xmlns:a16="http://schemas.microsoft.com/office/drawing/2014/main" id="{0B802D5C-C66A-4DE5-8D78-38C27419E898}"/>
               </a:ext>
             </a:extLst>
           </p:cNvPr>
@@ -22059,7 +22451,7 @@
           <p:cNvPr id="9" name="line-341">
             <a:extLst xmlns:a="http://schemas.openxmlformats.org/drawingml/2006/main">
               <a:ext uri="{FF2B5EF4-FFF2-40B4-BE49-F238E27FC236}">
-                <a16:creationId xmlns:a16="http://schemas.microsoft.com/office/drawing/2014/main" id="{A4BECCB8-BDC5-428F-AEA0-357023243CE8}"/>
+                <a16:creationId xmlns:a16="http://schemas.microsoft.com/office/drawing/2014/main" id="{9A11E94B-97C3-4EE5-A1C2-BAC5624566E3}"/>
               </a:ext>
             </a:extLst>
           </p:cNvPr>
@@ -22099,7 +22491,7 @@
           <p:cNvPr id="10" name="line-342">
             <a:extLst xmlns:a="http://schemas.openxmlformats.org/drawingml/2006/main">
               <a:ext uri="{FF2B5EF4-FFF2-40B4-BE49-F238E27FC236}">
-                <a16:creationId xmlns:a16="http://schemas.microsoft.com/office/drawing/2014/main" id="{26E41790-855E-4BDD-A2AF-1D35ACE33998}"/>
+                <a16:creationId xmlns:a16="http://schemas.microsoft.com/office/drawing/2014/main" id="{BA0E4945-D1B3-4228-9C9B-232BF4B0F0EF}"/>
               </a:ext>
             </a:extLst>
           </p:cNvPr>
@@ -22139,7 +22531,7 @@
           <p:cNvPr id="11" name="object-343">
             <a:extLst xmlns:a="http://schemas.openxmlformats.org/drawingml/2006/main">
               <a:ext uri="{FF2B5EF4-FFF2-40B4-BE49-F238E27FC236}">
-                <a16:creationId xmlns:a16="http://schemas.microsoft.com/office/drawing/2014/main" id="{639FA901-AA8D-4885-A5DA-F24B838EDE72}"/>
+                <a16:creationId xmlns:a16="http://schemas.microsoft.com/office/drawing/2014/main" id="{A4018A75-25C7-4E9B-9C7A-083FB7C58F5A}"/>
               </a:ext>
             </a:extLst>
           </p:cNvPr>
@@ -22170,7 +22562,7 @@
           <p:cNvPr id="12" name="object-344">
             <a:extLst xmlns:a="http://schemas.openxmlformats.org/drawingml/2006/main">
               <a:ext uri="{FF2B5EF4-FFF2-40B4-BE49-F238E27FC236}">
-                <a16:creationId xmlns:a16="http://schemas.microsoft.com/office/drawing/2014/main" id="{B2D6511C-66E9-4E56-92CD-A8FEC4CFFBE8}"/>
+                <a16:creationId xmlns:a16="http://schemas.microsoft.com/office/drawing/2014/main" id="{20E6BF2C-6FE3-456E-A1CA-A6F60C6BF2DA}"/>
               </a:ext>
             </a:extLst>
           </p:cNvPr>
@@ -22237,7 +22629,7 @@
           <p:cNvPr id="13" name="line-345">
             <a:extLst xmlns:a="http://schemas.openxmlformats.org/drawingml/2006/main">
               <a:ext uri="{FF2B5EF4-FFF2-40B4-BE49-F238E27FC236}">
-                <a16:creationId xmlns:a16="http://schemas.microsoft.com/office/drawing/2014/main" id="{C4A1216A-C535-4E71-B472-44EDD02B1E30}"/>
+                <a16:creationId xmlns:a16="http://schemas.microsoft.com/office/drawing/2014/main" id="{688400F6-2142-4F2F-A092-F4500C5DC46B}"/>
               </a:ext>
             </a:extLst>
           </p:cNvPr>
@@ -22277,7 +22669,7 @@
           <p:cNvPr id="14" name="line-346">
             <a:extLst xmlns:a="http://schemas.openxmlformats.org/drawingml/2006/main">
               <a:ext uri="{FF2B5EF4-FFF2-40B4-BE49-F238E27FC236}">
-                <a16:creationId xmlns:a16="http://schemas.microsoft.com/office/drawing/2014/main" id="{01723415-9504-4136-B806-F0CC051E7DCE}"/>
+                <a16:creationId xmlns:a16="http://schemas.microsoft.com/office/drawing/2014/main" id="{F0487AF9-1F65-41A0-8732-5388F3C44F05}"/>
               </a:ext>
             </a:extLst>
           </p:cNvPr>
@@ -22317,7 +22709,7 @@
           <p:cNvPr id="15" name="line-347">
             <a:extLst xmlns:a="http://schemas.openxmlformats.org/drawingml/2006/main">
               <a:ext uri="{FF2B5EF4-FFF2-40B4-BE49-F238E27FC236}">
-                <a16:creationId xmlns:a16="http://schemas.microsoft.com/office/drawing/2014/main" id="{D8833967-BED7-4AAC-A0B3-4EACF8F20E22}"/>
+                <a16:creationId xmlns:a16="http://schemas.microsoft.com/office/drawing/2014/main" id="{C3583A88-DB12-4141-BDDC-28FC3C06B0E1}"/>
               </a:ext>
             </a:extLst>
           </p:cNvPr>
@@ -22357,7 +22749,7 @@
           <p:cNvPr id="16" name="object-348">
             <a:extLst xmlns:a="http://schemas.openxmlformats.org/drawingml/2006/main">
               <a:ext uri="{FF2B5EF4-FFF2-40B4-BE49-F238E27FC236}">
-                <a16:creationId xmlns:a16="http://schemas.microsoft.com/office/drawing/2014/main" id="{0175E790-F1AA-42F2-9CD1-E5C57636DAB1}"/>
+                <a16:creationId xmlns:a16="http://schemas.microsoft.com/office/drawing/2014/main" id="{003C3CE0-E01B-4555-A623-D98A142F2B75}"/>
               </a:ext>
             </a:extLst>
           </p:cNvPr>
@@ -22424,7 +22816,7 @@
           <p:cNvPr id="17" name="object-349">
             <a:extLst xmlns:a="http://schemas.openxmlformats.org/drawingml/2006/main">
               <a:ext uri="{FF2B5EF4-FFF2-40B4-BE49-F238E27FC236}">
-                <a16:creationId xmlns:a16="http://schemas.microsoft.com/office/drawing/2014/main" id="{F6F5250D-3205-497A-8F93-A7D4E965B2EF}"/>
+                <a16:creationId xmlns:a16="http://schemas.microsoft.com/office/drawing/2014/main" id="{87A346B2-B931-4597-8A27-AC1A374EBDE2}"/>
               </a:ext>
             </a:extLst>
           </p:cNvPr>
@@ -22491,7 +22883,7 @@
           <p:cNvPr id="18" name="reveal1-object-350">
             <a:extLst xmlns:a="http://schemas.openxmlformats.org/drawingml/2006/main">
               <a:ext uri="{FF2B5EF4-FFF2-40B4-BE49-F238E27FC236}">
-                <a16:creationId xmlns:a16="http://schemas.microsoft.com/office/drawing/2014/main" id="{AED27758-833A-44E1-A6CF-53253933CC69}"/>
+                <a16:creationId xmlns:a16="http://schemas.microsoft.com/office/drawing/2014/main" id="{77E11B53-1C3E-4A18-BCD5-45212691908A}"/>
               </a:ext>
             </a:extLst>
           </p:cNvPr>
@@ -22558,7 +22950,7 @@
           <p:cNvPr id="19" name="reveal1-object-351">
             <a:extLst xmlns:a="http://schemas.openxmlformats.org/drawingml/2006/main">
               <a:ext uri="{FF2B5EF4-FFF2-40B4-BE49-F238E27FC236}">
-                <a16:creationId xmlns:a16="http://schemas.microsoft.com/office/drawing/2014/main" id="{1133A364-393B-4185-93D3-2E305ED659E0}"/>
+                <a16:creationId xmlns:a16="http://schemas.microsoft.com/office/drawing/2014/main" id="{3FCDCCF2-7D6C-4F81-B8A2-377724792F07}"/>
               </a:ext>
             </a:extLst>
           </p:cNvPr>
@@ -22589,7 +22981,7 @@
           <p:cNvPr id="20" name="reveal1-object-352">
             <a:extLst xmlns:a="http://schemas.openxmlformats.org/drawingml/2006/main">
               <a:ext uri="{FF2B5EF4-FFF2-40B4-BE49-F238E27FC236}">
-                <a16:creationId xmlns:a16="http://schemas.microsoft.com/office/drawing/2014/main" id="{770E0C36-EC80-488B-9431-D42A39B78674}"/>
+                <a16:creationId xmlns:a16="http://schemas.microsoft.com/office/drawing/2014/main" id="{41F63B8E-FD84-4670-A2EE-D099A393328F}"/>
               </a:ext>
             </a:extLst>
           </p:cNvPr>
@@ -22656,7 +23048,7 @@
           <p:cNvPr id="21" name="reveal1-line-353">
             <a:extLst xmlns:a="http://schemas.openxmlformats.org/drawingml/2006/main">
               <a:ext uri="{FF2B5EF4-FFF2-40B4-BE49-F238E27FC236}">
-                <a16:creationId xmlns:a16="http://schemas.microsoft.com/office/drawing/2014/main" id="{13BE7748-5E17-43A9-83B8-A8CCACA176BA}"/>
+                <a16:creationId xmlns:a16="http://schemas.microsoft.com/office/drawing/2014/main" id="{6C1C45DF-86B5-4A9E-BAEC-D211AE0B5433}"/>
               </a:ext>
             </a:extLst>
           </p:cNvPr>
@@ -22696,7 +23088,7 @@
           <p:cNvPr id="22" name="reveal1-line-354">
             <a:extLst xmlns:a="http://schemas.openxmlformats.org/drawingml/2006/main">
               <a:ext uri="{FF2B5EF4-FFF2-40B4-BE49-F238E27FC236}">
-                <a16:creationId xmlns:a16="http://schemas.microsoft.com/office/drawing/2014/main" id="{DF14C026-8519-4C28-BC05-FDF47CB60985}"/>
+                <a16:creationId xmlns:a16="http://schemas.microsoft.com/office/drawing/2014/main" id="{39AE5DFA-18F1-4485-9033-853EB3AE4EFD}"/>
               </a:ext>
             </a:extLst>
           </p:cNvPr>
@@ -22736,7 +23128,7 @@
           <p:cNvPr id="23" name="reveal1-line-355">
             <a:extLst xmlns:a="http://schemas.openxmlformats.org/drawingml/2006/main">
               <a:ext uri="{FF2B5EF4-FFF2-40B4-BE49-F238E27FC236}">
-                <a16:creationId xmlns:a16="http://schemas.microsoft.com/office/drawing/2014/main" id="{84C90455-8E6A-40A5-AE5C-ACEEAD829731}"/>
+                <a16:creationId xmlns:a16="http://schemas.microsoft.com/office/drawing/2014/main" id="{CF0B10C6-7AD8-4352-9B19-6B2ACFB5A959}"/>
               </a:ext>
             </a:extLst>
           </p:cNvPr>
@@ -22776,7 +23168,7 @@
           <p:cNvPr id="24" name="reveal1-object-356">
             <a:extLst xmlns:a="http://schemas.openxmlformats.org/drawingml/2006/main">
               <a:ext uri="{FF2B5EF4-FFF2-40B4-BE49-F238E27FC236}">
-                <a16:creationId xmlns:a16="http://schemas.microsoft.com/office/drawing/2014/main" id="{F87AC254-F8AD-48DB-80A4-0D6C82AA2E1A}"/>
+                <a16:creationId xmlns:a16="http://schemas.microsoft.com/office/drawing/2014/main" id="{FC3C7C54-1499-4D58-A1F8-6B8C5571C5C4}"/>
               </a:ext>
             </a:extLst>
           </p:cNvPr>
@@ -22843,7 +23235,7 @@
           <p:cNvPr id="25" name="reveal1-object-357">
             <a:extLst xmlns:a="http://schemas.openxmlformats.org/drawingml/2006/main">
               <a:ext uri="{FF2B5EF4-FFF2-40B4-BE49-F238E27FC236}">
-                <a16:creationId xmlns:a16="http://schemas.microsoft.com/office/drawing/2014/main" id="{228A752E-1DF0-44F5-A4E5-CC7CC35CA43C}"/>
+                <a16:creationId xmlns:a16="http://schemas.microsoft.com/office/drawing/2014/main" id="{5B61D107-24FA-4DD2-A86A-3FE71CC9A803}"/>
               </a:ext>
             </a:extLst>
           </p:cNvPr>
@@ -22910,7 +23302,7 @@
           <p:cNvPr id="26" name="reveal1-object-358">
             <a:extLst xmlns:a="http://schemas.openxmlformats.org/drawingml/2006/main">
               <a:ext uri="{FF2B5EF4-FFF2-40B4-BE49-F238E27FC236}">
-                <a16:creationId xmlns:a16="http://schemas.microsoft.com/office/drawing/2014/main" id="{B0FABC55-2BBB-420E-8B71-AF93B86F7B05}"/>
+                <a16:creationId xmlns:a16="http://schemas.microsoft.com/office/drawing/2014/main" id="{E1513E9D-2EF3-40F3-9437-A887237818A8}"/>
               </a:ext>
             </a:extLst>
           </p:cNvPr>
@@ -22977,7 +23369,7 @@
           <p:cNvPr id="27" name="reveal2-object-359">
             <a:extLst xmlns:a="http://schemas.openxmlformats.org/drawingml/2006/main">
               <a:ext uri="{FF2B5EF4-FFF2-40B4-BE49-F238E27FC236}">
-                <a16:creationId xmlns:a16="http://schemas.microsoft.com/office/drawing/2014/main" id="{5E536181-81EB-42E4-A9FB-1D443FFA0805}"/>
+                <a16:creationId xmlns:a16="http://schemas.microsoft.com/office/drawing/2014/main" id="{DA3DF555-9EF4-4BD6-A47F-20F807279C24}"/>
               </a:ext>
             </a:extLst>
           </p:cNvPr>
@@ -23044,7 +23436,7 @@
           <p:cNvPr id="28" name="reveal2-object-360">
             <a:extLst xmlns:a="http://schemas.openxmlformats.org/drawingml/2006/main">
               <a:ext uri="{FF2B5EF4-FFF2-40B4-BE49-F238E27FC236}">
-                <a16:creationId xmlns:a16="http://schemas.microsoft.com/office/drawing/2014/main" id="{771686C8-7448-4EB7-82CF-63FF5D49120F}"/>
+                <a16:creationId xmlns:a16="http://schemas.microsoft.com/office/drawing/2014/main" id="{4970760C-AC52-4221-BB44-B030BDB0B73B}"/>
               </a:ext>
             </a:extLst>
           </p:cNvPr>
@@ -23075,7 +23467,7 @@
           <p:cNvPr id="29" name="reveal2-object-361">
             <a:extLst xmlns:a="http://schemas.openxmlformats.org/drawingml/2006/main">
               <a:ext uri="{FF2B5EF4-FFF2-40B4-BE49-F238E27FC236}">
-                <a16:creationId xmlns:a16="http://schemas.microsoft.com/office/drawing/2014/main" id="{F1B19B1C-20D5-4F35-BC97-AB6AF445C8EE}"/>
+                <a16:creationId xmlns:a16="http://schemas.microsoft.com/office/drawing/2014/main" id="{5971DA55-F769-4638-9BE1-6CB4D44B8A4E}"/>
               </a:ext>
             </a:extLst>
           </p:cNvPr>
@@ -23142,7 +23534,7 @@
           <p:cNvPr id="30" name="reveal2-line-362">
             <a:extLst xmlns:a="http://schemas.openxmlformats.org/drawingml/2006/main">
               <a:ext uri="{FF2B5EF4-FFF2-40B4-BE49-F238E27FC236}">
-                <a16:creationId xmlns:a16="http://schemas.microsoft.com/office/drawing/2014/main" id="{E91BB813-3E4F-424B-9861-6DD4F6D47FC4}"/>
+                <a16:creationId xmlns:a16="http://schemas.microsoft.com/office/drawing/2014/main" id="{A2DD3FD1-CA18-4C09-94C6-299F4C78425C}"/>
               </a:ext>
             </a:extLst>
           </p:cNvPr>
@@ -23182,7 +23574,7 @@
           <p:cNvPr id="31" name="reveal2-line-363">
             <a:extLst xmlns:a="http://schemas.openxmlformats.org/drawingml/2006/main">
               <a:ext uri="{FF2B5EF4-FFF2-40B4-BE49-F238E27FC236}">
-                <a16:creationId xmlns:a16="http://schemas.microsoft.com/office/drawing/2014/main" id="{CCDFA0B9-6B6A-4B07-A98E-B7B71D617699}"/>
+                <a16:creationId xmlns:a16="http://schemas.microsoft.com/office/drawing/2014/main" id="{56EDF9DE-9851-493F-B3CB-363104789DE1}"/>
               </a:ext>
             </a:extLst>
           </p:cNvPr>
@@ -23222,7 +23614,7 @@
           <p:cNvPr id="32" name="reveal2-line-364">
             <a:extLst xmlns:a="http://schemas.openxmlformats.org/drawingml/2006/main">
               <a:ext uri="{FF2B5EF4-FFF2-40B4-BE49-F238E27FC236}">
-                <a16:creationId xmlns:a16="http://schemas.microsoft.com/office/drawing/2014/main" id="{E4F4B542-B85E-4000-9F13-FF505E1D4159}"/>
+                <a16:creationId xmlns:a16="http://schemas.microsoft.com/office/drawing/2014/main" id="{CD9692BE-E7C7-43B4-BF6F-18CBC9BC6BE1}"/>
               </a:ext>
             </a:extLst>
           </p:cNvPr>
@@ -23262,7 +23654,7 @@
           <p:cNvPr id="33" name="reveal2-object-365">
             <a:extLst xmlns:a="http://schemas.openxmlformats.org/drawingml/2006/main">
               <a:ext uri="{FF2B5EF4-FFF2-40B4-BE49-F238E27FC236}">
-                <a16:creationId xmlns:a16="http://schemas.microsoft.com/office/drawing/2014/main" id="{4AF970AB-A0CF-44B1-B5A7-E408E0AEAD2B}"/>
+                <a16:creationId xmlns:a16="http://schemas.microsoft.com/office/drawing/2014/main" id="{496045B7-C7ED-4398-90A7-AC33CB5737B0}"/>
               </a:ext>
             </a:extLst>
           </p:cNvPr>
@@ -23293,7 +23685,7 @@
           <p:cNvPr id="34" name="reveal2-object-366">
             <a:extLst xmlns:a="http://schemas.openxmlformats.org/drawingml/2006/main">
               <a:ext uri="{FF2B5EF4-FFF2-40B4-BE49-F238E27FC236}">
-                <a16:creationId xmlns:a16="http://schemas.microsoft.com/office/drawing/2014/main" id="{EFC48094-FF94-4D7A-B638-6EF981DE4D30}"/>
+                <a16:creationId xmlns:a16="http://schemas.microsoft.com/office/drawing/2014/main" id="{46328049-DABF-4AAF-BBB5-7333B837EB1B}"/>
               </a:ext>
             </a:extLst>
           </p:cNvPr>
@@ -23360,7 +23752,7 @@
           <p:cNvPr id="35" name="reveal2-line-367">
             <a:extLst xmlns:a="http://schemas.openxmlformats.org/drawingml/2006/main">
               <a:ext uri="{FF2B5EF4-FFF2-40B4-BE49-F238E27FC236}">
-                <a16:creationId xmlns:a16="http://schemas.microsoft.com/office/drawing/2014/main" id="{68F74562-2DC1-4422-93FC-953506CBCA05}"/>
+                <a16:creationId xmlns:a16="http://schemas.microsoft.com/office/drawing/2014/main" id="{FC426F7C-A6E5-45EB-9C8F-9D780F68B486}"/>
               </a:ext>
             </a:extLst>
           </p:cNvPr>
@@ -23400,7 +23792,7 @@
           <p:cNvPr id="36" name="reveal2-line-368">
             <a:extLst xmlns:a="http://schemas.openxmlformats.org/drawingml/2006/main">
               <a:ext uri="{FF2B5EF4-FFF2-40B4-BE49-F238E27FC236}">
-                <a16:creationId xmlns:a16="http://schemas.microsoft.com/office/drawing/2014/main" id="{117D10A9-C9E5-40BF-A9EE-8FF296103F6E}"/>
+                <a16:creationId xmlns:a16="http://schemas.microsoft.com/office/drawing/2014/main" id="{E622547A-97BF-4C3F-8B26-FBF13128B4C0}"/>
               </a:ext>
             </a:extLst>
           </p:cNvPr>
@@ -23440,7 +23832,7 @@
           <p:cNvPr id="37" name="reveal2-line-369">
             <a:extLst xmlns:a="http://schemas.openxmlformats.org/drawingml/2006/main">
               <a:ext uri="{FF2B5EF4-FFF2-40B4-BE49-F238E27FC236}">
-                <a16:creationId xmlns:a16="http://schemas.microsoft.com/office/drawing/2014/main" id="{03FC93CE-1989-41AD-93DD-AF50C40463DD}"/>
+                <a16:creationId xmlns:a16="http://schemas.microsoft.com/office/drawing/2014/main" id="{5BEC70D9-B3F2-47BA-96A8-AA1790AA203D}"/>
               </a:ext>
             </a:extLst>
           </p:cNvPr>
@@ -23480,7 +23872,7 @@
           <p:cNvPr id="38" name="reveal2-object-370">
             <a:extLst xmlns:a="http://schemas.openxmlformats.org/drawingml/2006/main">
               <a:ext uri="{FF2B5EF4-FFF2-40B4-BE49-F238E27FC236}">
-                <a16:creationId xmlns:a16="http://schemas.microsoft.com/office/drawing/2014/main" id="{0C27D8ED-6C1B-4271-A2D4-BD0F19420970}"/>
+                <a16:creationId xmlns:a16="http://schemas.microsoft.com/office/drawing/2014/main" id="{B503EC4F-8D4F-4F1B-88ED-0D1BFF081296}"/>
               </a:ext>
             </a:extLst>
           </p:cNvPr>
@@ -23547,7 +23939,7 @@
           <p:cNvPr id="39" name="reveal2-object-371">
             <a:extLst xmlns:a="http://schemas.openxmlformats.org/drawingml/2006/main">
               <a:ext uri="{FF2B5EF4-FFF2-40B4-BE49-F238E27FC236}">
-                <a16:creationId xmlns:a16="http://schemas.microsoft.com/office/drawing/2014/main" id="{93AD95D8-7B86-48A8-A1C3-2F4696D4BCF6}"/>
+                <a16:creationId xmlns:a16="http://schemas.microsoft.com/office/drawing/2014/main" id="{0189F254-1908-47CF-A551-3EF7FA1343B3}"/>
               </a:ext>
             </a:extLst>
           </p:cNvPr>
@@ -23614,7 +24006,7 @@
           <p:cNvPr id="40" name="object-372">
             <a:extLst xmlns:a="http://schemas.openxmlformats.org/drawingml/2006/main">
               <a:ext uri="{FF2B5EF4-FFF2-40B4-BE49-F238E27FC236}">
-                <a16:creationId xmlns:a16="http://schemas.microsoft.com/office/drawing/2014/main" id="{240E78DC-AB8E-443C-AF33-01436233DA26}"/>
+                <a16:creationId xmlns:a16="http://schemas.microsoft.com/office/drawing/2014/main" id="{FE5B9188-98CC-4239-8942-8743CA478660}"/>
               </a:ext>
             </a:extLst>
           </p:cNvPr>
@@ -23681,7 +24073,7 @@
           <p:cNvPr id="41" name="object-373">
             <a:extLst xmlns:a="http://schemas.openxmlformats.org/drawingml/2006/main">
               <a:ext uri="{FF2B5EF4-FFF2-40B4-BE49-F238E27FC236}">
-                <a16:creationId xmlns:a16="http://schemas.microsoft.com/office/drawing/2014/main" id="{E85B3A32-5B33-4B9B-85DD-E07460DDE69A}"/>
+                <a16:creationId xmlns:a16="http://schemas.microsoft.com/office/drawing/2014/main" id="{B80275DA-2299-40B4-872D-F8FA94EA36AC}"/>
               </a:ext>
             </a:extLst>
           </p:cNvPr>
@@ -23746,7 +24138,7 @@
     </p:spTree>
     <p:extLst>
       <p:ext uri="{BB962C8B-B14F-4D97-AF65-F5344CB8AC3E}">
-        <p14:creationId xmlns:p14="http://schemas.microsoft.com/office/powerpoint/2010/main" val="309344461"/>
+        <p14:creationId xmlns:p14="http://schemas.microsoft.com/office/powerpoint/2010/main" val="1466444216"/>
       </p:ext>
     </p:extLst>
   </p:cSld>
@@ -24461,7 +24853,7 @@
           <p:cNvPr id="36" name="object-374">
             <a:extLst xmlns:a="http://schemas.openxmlformats.org/drawingml/2006/main">
               <a:ext uri="{FF2B5EF4-FFF2-40B4-BE49-F238E27FC236}">
-                <a16:creationId xmlns:a16="http://schemas.microsoft.com/office/drawing/2014/main" id="{A8CD985E-998B-4131-90F2-1A4870E79A48}"/>
+                <a16:creationId xmlns:a16="http://schemas.microsoft.com/office/drawing/2014/main" id="{BD1962AB-58D7-4D34-9628-4A008E780D13}"/>
               </a:ext>
             </a:extLst>
           </p:cNvPr>
@@ -24518,7 +24910,7 @@
                 <a:ea typeface="Microsoft YaHei"/>
                 <a:cs typeface="Microsoft YaHei"/>
               </a:rPr>
-              <a:t>再看这三个操作</a:t>
+              <a:t>这些请求，谁来执行？</a:t>
             </a:r>
           </a:p>
         </p:txBody>
@@ -24528,18 +24920,18 @@
           <p:cNvPr id="2" name="object-375">
             <a:extLst xmlns:a="http://schemas.openxmlformats.org/drawingml/2006/main">
               <a:ext uri="{FF2B5EF4-FFF2-40B4-BE49-F238E27FC236}">
-                <a16:creationId xmlns:a16="http://schemas.microsoft.com/office/drawing/2014/main" id="{9C53253A-0528-4BFD-9CDA-CEDBCC5CC61C}"/>
-              </a:ext>
-            </a:extLst>
-          </p:cNvPr>
-          <p:cNvSpPr>
-            <a:spLocks xmlns:a="http://schemas.openxmlformats.org/drawingml/2006/main" noGrp="1"/>
-          </p:cNvSpPr>
-          <p:nvPr/>
-        </p:nvSpPr>
-        <p:spPr>
-          <a:xfrm xmlns:a="http://schemas.openxmlformats.org/drawingml/2006/main">
-            <a:off x="609600" y="1333500"/>
+                <a16:creationId xmlns:a16="http://schemas.microsoft.com/office/drawing/2014/main" id="{1C1DB87B-61EC-451D-BCA1-5987A1196EC6}"/>
+              </a:ext>
+            </a:extLst>
+          </p:cNvPr>
+          <p:cNvSpPr>
+            <a:spLocks xmlns:a="http://schemas.openxmlformats.org/drawingml/2006/main" noGrp="1"/>
+          </p:cNvSpPr>
+          <p:nvPr/>
+        </p:nvSpPr>
+        <p:spPr>
+          <a:xfrm xmlns:a="http://schemas.openxmlformats.org/drawingml/2006/main">
+            <a:off x="609600" y="1323975"/>
             <a:ext cx="10858500" cy="381000"/>
           </a:xfrm>
           <a:prstGeom xmlns:a="http://schemas.openxmlformats.org/drawingml/2006/main" prst="rect">
@@ -24555,7 +24947,7 @@
           <a:bodyPr xmlns:a="http://schemas.openxmlformats.org/drawingml/2006/main" wrap="none" lIns="0" tIns="0" rIns="0" bIns="0" anchor="ctr"/>
           <a:lstStyle xmlns:a="http://schemas.openxmlformats.org/drawingml/2006/main">
             <a:defPPr algn="l">
-              <a:defRPr sz="2100" b="0">
+              <a:defRPr sz="2025" b="0">
                 <a:solidFill>
                   <a:srgbClr val="62768A"/>
                 </a:solidFill>
@@ -24567,7 +24959,7 @@
           </a:lstStyle>
           <a:p xmlns:a="http://schemas.openxmlformats.org/drawingml/2006/main">
             <a:pPr algn="l">
-              <a:defRPr sz="2100" b="0">
+              <a:defRPr sz="2025" b="0">
                 <a:solidFill>
                   <a:srgbClr val="62768A"/>
                 </a:solidFill>
@@ -24577,7 +24969,7 @@
               </a:defRPr>
             </a:pPr>
             <a:r>
-              <a:rPr sz="2100" b="0">
+              <a:rPr sz="2025" b="0">
                 <a:solidFill>
                   <a:srgbClr val="62768A"/>
                 </a:solidFill>
@@ -24585,7 +24977,7 @@
                 <a:ea typeface="Microsoft YaHei"/>
                 <a:cs typeface="Microsoft YaHei"/>
               </a:rPr>
-              <a:t>回到这一路音乐，三个操作分别改变了什么？</a:t>
+              <a:t>前面反复出现的“排队”与“等待执行”，载体是一个队列加一条线程。</a:t>
             </a:r>
           </a:p>
         </p:txBody>
@@ -24595,19 +24987,861 @@
           <p:cNvPr id="3" name="object-376">
             <a:extLst xmlns:a="http://schemas.openxmlformats.org/drawingml/2006/main">
               <a:ext uri="{FF2B5EF4-FFF2-40B4-BE49-F238E27FC236}">
-                <a16:creationId xmlns:a16="http://schemas.microsoft.com/office/drawing/2014/main" id="{01F57FF6-266C-4A61-921D-0D3A98FDB227}"/>
-              </a:ext>
-            </a:extLst>
-          </p:cNvPr>
-          <p:cNvSpPr>
-            <a:spLocks xmlns:a="http://schemas.openxmlformats.org/drawingml/2006/main" noGrp="1"/>
-          </p:cNvSpPr>
-          <p:nvPr/>
-        </p:nvSpPr>
-        <p:spPr>
-          <a:xfrm xmlns:a="http://schemas.openxmlformats.org/drawingml/2006/main">
-            <a:off x="609600" y="3038475"/>
-            <a:ext cx="1333500" cy="428625"/>
+                <a16:creationId xmlns:a16="http://schemas.microsoft.com/office/drawing/2014/main" id="{CEB40F96-68FD-4C32-9423-7BDB8176AB87}"/>
+              </a:ext>
+            </a:extLst>
+          </p:cNvPr>
+          <p:cNvSpPr>
+            <a:spLocks xmlns:a="http://schemas.openxmlformats.org/drawingml/2006/main" noGrp="1"/>
+          </p:cNvSpPr>
+          <p:nvPr/>
+        </p:nvSpPr>
+        <p:spPr>
+          <a:xfrm xmlns:a="http://schemas.openxmlformats.org/drawingml/2006/main">
+            <a:off x="4381500" y="2143125"/>
+            <a:ext cx="3810000" cy="2857500"/>
+          </a:xfrm>
+          <a:prstGeom xmlns:a="http://schemas.openxmlformats.org/drawingml/2006/main" prst="rect">
+            <a:avLst/>
+          </a:prstGeom>
+          <a:noFill xmlns:a="http://schemas.openxmlformats.org/drawingml/2006/main"/>
+          <a:ln xmlns:a="http://schemas.openxmlformats.org/drawingml/2006/main" w="19050">
+            <a:solidFill>
+              <a:srgbClr val="12263B"/>
+            </a:solidFill>
+            <a:prstDash val="solid"/>
+          </a:ln>
+        </p:spPr>
+      </p:sp>
+      <p:sp>
+        <p:nvSpPr>
+          <p:cNvPr id="4" name="object-377">
+            <a:extLst xmlns:a="http://schemas.openxmlformats.org/drawingml/2006/main">
+              <a:ext uri="{FF2B5EF4-FFF2-40B4-BE49-F238E27FC236}">
+                <a16:creationId xmlns:a16="http://schemas.microsoft.com/office/drawing/2014/main" id="{251C35DD-925E-44EF-A689-FFB181E5EB90}"/>
+              </a:ext>
+            </a:extLst>
+          </p:cNvPr>
+          <p:cNvSpPr>
+            <a:spLocks xmlns:a="http://schemas.openxmlformats.org/drawingml/2006/main" noGrp="1"/>
+          </p:cNvSpPr>
+          <p:nvPr/>
+        </p:nvSpPr>
+        <p:spPr>
+          <a:xfrm xmlns:a="http://schemas.openxmlformats.org/drawingml/2006/main">
+            <a:off x="4572000" y="2266950"/>
+            <a:ext cx="3429000" cy="361950"/>
+          </a:xfrm>
+          <a:prstGeom xmlns:a="http://schemas.openxmlformats.org/drawingml/2006/main" prst="rect">
+            <a:avLst/>
+          </a:prstGeom>
+          <a:noFill xmlns:a="http://schemas.openxmlformats.org/drawingml/2006/main"/>
+          <a:ln xmlns:a="http://schemas.openxmlformats.org/drawingml/2006/main" w="0">
+            <a:noFill/>
+            <a:prstDash val="solid"/>
+          </a:ln>
+        </p:spPr>
+        <p:txBody>
+          <a:bodyPr xmlns:a="http://schemas.openxmlformats.org/drawingml/2006/main" wrap="none" lIns="0" tIns="0" rIns="0" bIns="0" anchor="ctr"/>
+          <a:lstStyle xmlns:a="http://schemas.openxmlformats.org/drawingml/2006/main">
+            <a:defPPr algn="ctr">
+              <a:defRPr sz="1950" b="1">
+                <a:solidFill>
+                  <a:srgbClr val="12263B"/>
+                </a:solidFill>
+                <a:latin typeface="Microsoft YaHei"/>
+                <a:ea typeface="Microsoft YaHei"/>
+                <a:cs typeface="Microsoft YaHei"/>
+              </a:defRPr>
+            </a:defPPr>
+          </a:lstStyle>
+          <a:p xmlns:a="http://schemas.openxmlformats.org/drawingml/2006/main">
+            <a:pPr algn="ctr">
+              <a:defRPr sz="1950" b="1">
+                <a:solidFill>
+                  <a:srgbClr val="12263B"/>
+                </a:solidFill>
+                <a:latin typeface="Microsoft YaHei"/>
+                <a:ea typeface="Microsoft YaHei"/>
+                <a:cs typeface="Microsoft YaHei"/>
+              </a:defRPr>
+            </a:pPr>
+            <a:r>
+              <a:rPr sz="1950" b="1">
+                <a:solidFill>
+                  <a:srgbClr val="12263B"/>
+                </a:solidFill>
+                <a:latin typeface="Microsoft YaHei"/>
+                <a:ea typeface="Microsoft YaHei"/>
+                <a:cs typeface="Microsoft YaHei"/>
+              </a:rPr>
+              <a:t>信号处理线程</a:t>
+            </a:r>
+          </a:p>
+        </p:txBody>
+      </p:sp>
+      <p:sp>
+        <p:nvSpPr>
+          <p:cNvPr id="5" name="object-378">
+            <a:extLst xmlns:a="http://schemas.openxmlformats.org/drawingml/2006/main">
+              <a:ext uri="{FF2B5EF4-FFF2-40B4-BE49-F238E27FC236}">
+                <a16:creationId xmlns:a16="http://schemas.microsoft.com/office/drawing/2014/main" id="{19831247-1BC1-4BC1-B793-73CD97E5F89E}"/>
+              </a:ext>
+            </a:extLst>
+          </p:cNvPr>
+          <p:cNvSpPr>
+            <a:spLocks xmlns:a="http://schemas.openxmlformats.org/drawingml/2006/main" noGrp="1"/>
+          </p:cNvSpPr>
+          <p:nvPr/>
+        </p:nvSpPr>
+        <p:spPr>
+          <a:xfrm xmlns:a="http://schemas.openxmlformats.org/drawingml/2006/main">
+            <a:off x="4714875" y="2762250"/>
+            <a:ext cx="3143250" cy="552450"/>
+          </a:xfrm>
+          <a:prstGeom xmlns:a="http://schemas.openxmlformats.org/drawingml/2006/main" prst="rect">
+            <a:avLst/>
+          </a:prstGeom>
+          <a:solidFill xmlns:a="http://schemas.openxmlformats.org/drawingml/2006/main">
+            <a:srgbClr val="12263B"/>
+          </a:solidFill>
+          <a:ln xmlns:a="http://schemas.openxmlformats.org/drawingml/2006/main" w="0">
+            <a:noFill/>
+            <a:prstDash val="solid"/>
+          </a:ln>
+        </p:spPr>
+      </p:sp>
+      <p:sp>
+        <p:nvSpPr>
+          <p:cNvPr id="6" name="object-379">
+            <a:extLst xmlns:a="http://schemas.openxmlformats.org/drawingml/2006/main">
+              <a:ext uri="{FF2B5EF4-FFF2-40B4-BE49-F238E27FC236}">
+                <a16:creationId xmlns:a16="http://schemas.microsoft.com/office/drawing/2014/main" id="{3C7A8422-7DC9-41CF-8C27-3E54D4AEB2C5}"/>
+              </a:ext>
+            </a:extLst>
+          </p:cNvPr>
+          <p:cNvSpPr>
+            <a:spLocks xmlns:a="http://schemas.openxmlformats.org/drawingml/2006/main" noGrp="1"/>
+          </p:cNvSpPr>
+          <p:nvPr/>
+        </p:nvSpPr>
+        <p:spPr>
+          <a:xfrm xmlns:a="http://schemas.openxmlformats.org/drawingml/2006/main">
+            <a:off x="4829175" y="2819400"/>
+            <a:ext cx="2914650" cy="438150"/>
+          </a:xfrm>
+          <a:prstGeom xmlns:a="http://schemas.openxmlformats.org/drawingml/2006/main" prst="rect">
+            <a:avLst/>
+          </a:prstGeom>
+          <a:noFill xmlns:a="http://schemas.openxmlformats.org/drawingml/2006/main"/>
+          <a:ln xmlns:a="http://schemas.openxmlformats.org/drawingml/2006/main" w="0">
+            <a:noFill/>
+            <a:prstDash val="solid"/>
+          </a:ln>
+        </p:spPr>
+        <p:txBody>
+          <a:bodyPr xmlns:a="http://schemas.openxmlformats.org/drawingml/2006/main" wrap="none" lIns="0" tIns="0" rIns="0" bIns="0" anchor="ctr"/>
+          <a:lstStyle xmlns:a="http://schemas.openxmlformats.org/drawingml/2006/main">
+            <a:defPPr algn="ctr">
+              <a:defRPr sz="1650" b="1">
+                <a:solidFill>
+                  <a:srgbClr val="FFFFFF"/>
+                </a:solidFill>
+                <a:latin typeface="Microsoft YaHei"/>
+                <a:ea typeface="Microsoft YaHei"/>
+                <a:cs typeface="Microsoft YaHei"/>
+              </a:defRPr>
+            </a:defPPr>
+          </a:lstStyle>
+          <a:p xmlns:a="http://schemas.openxmlformats.org/drawingml/2006/main">
+            <a:pPr algn="ctr">
+              <a:defRPr sz="1650" b="1">
+                <a:solidFill>
+                  <a:srgbClr val="FFFFFF"/>
+                </a:solidFill>
+                <a:latin typeface="Microsoft YaHei"/>
+                <a:ea typeface="Microsoft YaHei"/>
+                <a:cs typeface="Microsoft YaHei"/>
+              </a:defRPr>
+            </a:pPr>
+            <a:r>
+              <a:rPr sz="1650" b="1">
+                <a:solidFill>
+                  <a:srgbClr val="FFFFFF"/>
+                </a:solidFill>
+                <a:latin typeface="Microsoft YaHei"/>
+                <a:ea typeface="Microsoft YaHei"/>
+                <a:cs typeface="Microsoft YaHei"/>
+              </a:rPr>
+              <a:t>排空队列，执行控制请求</a:t>
+            </a:r>
+          </a:p>
+        </p:txBody>
+      </p:sp>
+      <p:sp>
+        <p:nvSpPr>
+          <p:cNvPr id="7" name="object-380">
+            <a:extLst xmlns:a="http://schemas.openxmlformats.org/drawingml/2006/main">
+              <a:ext uri="{FF2B5EF4-FFF2-40B4-BE49-F238E27FC236}">
+                <a16:creationId xmlns:a16="http://schemas.microsoft.com/office/drawing/2014/main" id="{24526716-4B82-461E-B6AC-E7B5BB34AC98}"/>
+              </a:ext>
+            </a:extLst>
+          </p:cNvPr>
+          <p:cNvSpPr>
+            <a:spLocks xmlns:a="http://schemas.openxmlformats.org/drawingml/2006/main" noGrp="1"/>
+          </p:cNvSpPr>
+          <p:nvPr/>
+        </p:nvSpPr>
+        <p:spPr>
+          <a:xfrm xmlns:a="http://schemas.openxmlformats.org/drawingml/2006/main">
+            <a:off x="4714875" y="3448050"/>
+            <a:ext cx="3143250" cy="552450"/>
+          </a:xfrm>
+          <a:prstGeom xmlns:a="http://schemas.openxmlformats.org/drawingml/2006/main" prst="rect">
+            <a:avLst/>
+          </a:prstGeom>
+          <a:solidFill xmlns:a="http://schemas.openxmlformats.org/drawingml/2006/main">
+            <a:srgbClr val="12263B"/>
+          </a:solidFill>
+          <a:ln xmlns:a="http://schemas.openxmlformats.org/drawingml/2006/main" w="0">
+            <a:noFill/>
+            <a:prstDash val="solid"/>
+          </a:ln>
+        </p:spPr>
+      </p:sp>
+      <p:sp>
+        <p:nvSpPr>
+          <p:cNvPr id="8" name="object-381">
+            <a:extLst xmlns:a="http://schemas.openxmlformats.org/drawingml/2006/main">
+              <a:ext uri="{FF2B5EF4-FFF2-40B4-BE49-F238E27FC236}">
+                <a16:creationId xmlns:a16="http://schemas.microsoft.com/office/drawing/2014/main" id="{70EF157E-2643-4E69-9EEE-8C45487ED2CD}"/>
+              </a:ext>
+            </a:extLst>
+          </p:cNvPr>
+          <p:cNvSpPr>
+            <a:spLocks xmlns:a="http://schemas.openxmlformats.org/drawingml/2006/main" noGrp="1"/>
+          </p:cNvSpPr>
+          <p:nvPr/>
+        </p:nvSpPr>
+        <p:spPr>
+          <a:xfrm xmlns:a="http://schemas.openxmlformats.org/drawingml/2006/main">
+            <a:off x="4829175" y="3505200"/>
+            <a:ext cx="2914650" cy="438150"/>
+          </a:xfrm>
+          <a:prstGeom xmlns:a="http://schemas.openxmlformats.org/drawingml/2006/main" prst="rect">
+            <a:avLst/>
+          </a:prstGeom>
+          <a:noFill xmlns:a="http://schemas.openxmlformats.org/drawingml/2006/main"/>
+          <a:ln xmlns:a="http://schemas.openxmlformats.org/drawingml/2006/main" w="0">
+            <a:noFill/>
+            <a:prstDash val="solid"/>
+          </a:ln>
+        </p:spPr>
+        <p:txBody>
+          <a:bodyPr xmlns:a="http://schemas.openxmlformats.org/drawingml/2006/main" wrap="none" lIns="0" tIns="0" rIns="0" bIns="0" anchor="ctr"/>
+          <a:lstStyle xmlns:a="http://schemas.openxmlformats.org/drawingml/2006/main">
+            <a:defPPr algn="ctr">
+              <a:defRPr sz="1650" b="1">
+                <a:solidFill>
+                  <a:srgbClr val="FFFFFF"/>
+                </a:solidFill>
+                <a:latin typeface="Microsoft YaHei"/>
+                <a:ea typeface="Microsoft YaHei"/>
+                <a:cs typeface="Microsoft YaHei"/>
+              </a:defRPr>
+            </a:defPPr>
+          </a:lstStyle>
+          <a:p xmlns:a="http://schemas.openxmlformats.org/drawingml/2006/main">
+            <a:pPr algn="ctr">
+              <a:defRPr sz="1650" b="1">
+                <a:solidFill>
+                  <a:srgbClr val="FFFFFF"/>
+                </a:solidFill>
+                <a:latin typeface="Microsoft YaHei"/>
+                <a:ea typeface="Microsoft YaHei"/>
+                <a:cs typeface="Microsoft YaHei"/>
+              </a:defRPr>
+            </a:pPr>
+            <a:r>
+              <a:rPr sz="1650" b="1">
+                <a:solidFill>
+                  <a:srgbClr val="FFFFFF"/>
+                </a:solidFill>
+                <a:latin typeface="Microsoft YaHei"/>
+                <a:ea typeface="Microsoft YaHei"/>
+                <a:cs typeface="Microsoft YaHei"/>
+              </a:rPr>
+              <a:t>跑一轮音频处理</a:t>
+            </a:r>
+          </a:p>
+        </p:txBody>
+      </p:sp>
+      <p:sp>
+        <p:nvSpPr>
+          <p:cNvPr id="9" name="line-382">
+            <a:extLst xmlns:a="http://schemas.openxmlformats.org/drawingml/2006/main">
+              <a:ext uri="{FF2B5EF4-FFF2-40B4-BE49-F238E27FC236}">
+                <a16:creationId xmlns:a16="http://schemas.microsoft.com/office/drawing/2014/main" id="{CCB21F4E-F6AC-4F69-9EEF-18B813B7D569}"/>
+              </a:ext>
+            </a:extLst>
+          </p:cNvPr>
+          <p:cNvSpPr>
+            <a:spLocks xmlns:a="http://schemas.openxmlformats.org/drawingml/2006/main" noGrp="1"/>
+          </p:cNvSpPr>
+          <p:nvPr/>
+        </p:nvSpPr>
+        <p:spPr>
+          <a:xfrm xmlns:a="http://schemas.openxmlformats.org/drawingml/2006/main">
+            <a:off x="4524375" y="3038475"/>
+            <a:ext cx="9525" cy="685800"/>
+          </a:xfrm>
+          <a:custGeom xmlns:a="http://schemas.openxmlformats.org/drawingml/2006/main">
+            <a:pathLst>
+              <a:path w="9525" h="685800">
+                <a:moveTo>
+                  <a:pt x="0" y="685800"/>
+                </a:moveTo>
+                <a:lnTo>
+                  <a:pt x="0" y="0"/>
+                </a:lnTo>
+              </a:path>
+            </a:pathLst>
+          </a:custGeom>
+          <a:noFill xmlns:a="http://schemas.openxmlformats.org/drawingml/2006/main"/>
+          <a:ln xmlns:a="http://schemas.openxmlformats.org/drawingml/2006/main" w="28575">
+            <a:solidFill>
+              <a:srgbClr val="62768A"/>
+            </a:solidFill>
+            <a:prstDash val="solid"/>
+          </a:ln>
+        </p:spPr>
+      </p:sp>
+      <p:sp>
+        <p:nvSpPr>
+          <p:cNvPr id="10" name="line-383">
+            <a:extLst xmlns:a="http://schemas.openxmlformats.org/drawingml/2006/main">
+              <a:ext uri="{FF2B5EF4-FFF2-40B4-BE49-F238E27FC236}">
+                <a16:creationId xmlns:a16="http://schemas.microsoft.com/office/drawing/2014/main" id="{3923056E-DAB7-405C-9D72-B368156991B0}"/>
+              </a:ext>
+            </a:extLst>
+          </p:cNvPr>
+          <p:cNvSpPr>
+            <a:spLocks xmlns:a="http://schemas.openxmlformats.org/drawingml/2006/main" noGrp="1"/>
+          </p:cNvSpPr>
+          <p:nvPr/>
+        </p:nvSpPr>
+        <p:spPr>
+          <a:xfrm xmlns:a="http://schemas.openxmlformats.org/drawingml/2006/main">
+            <a:off x="4524375" y="3038475"/>
+            <a:ext cx="41430" cy="85768"/>
+          </a:xfrm>
+          <a:custGeom xmlns:a="http://schemas.openxmlformats.org/drawingml/2006/main">
+            <a:pathLst>
+              <a:path w="41430" h="85768">
+                <a:moveTo>
+                  <a:pt x="41430" y="85768"/>
+                </a:moveTo>
+                <a:lnTo>
+                  <a:pt x="0" y="0"/>
+                </a:lnTo>
+              </a:path>
+            </a:pathLst>
+          </a:custGeom>
+          <a:noFill xmlns:a="http://schemas.openxmlformats.org/drawingml/2006/main"/>
+          <a:ln xmlns:a="http://schemas.openxmlformats.org/drawingml/2006/main" w="28575">
+            <a:solidFill>
+              <a:srgbClr val="62768A"/>
+            </a:solidFill>
+            <a:prstDash val="solid"/>
+          </a:ln>
+        </p:spPr>
+      </p:sp>
+      <p:sp>
+        <p:nvSpPr>
+          <p:cNvPr id="11" name="line-384">
+            <a:extLst xmlns:a="http://schemas.openxmlformats.org/drawingml/2006/main">
+              <a:ext uri="{FF2B5EF4-FFF2-40B4-BE49-F238E27FC236}">
+                <a16:creationId xmlns:a16="http://schemas.microsoft.com/office/drawing/2014/main" id="{BA4E2306-4EE3-4E23-9442-348E5D717A14}"/>
+              </a:ext>
+            </a:extLst>
+          </p:cNvPr>
+          <p:cNvSpPr>
+            <a:spLocks xmlns:a="http://schemas.openxmlformats.org/drawingml/2006/main" noGrp="1"/>
+          </p:cNvSpPr>
+          <p:nvPr/>
+        </p:nvSpPr>
+        <p:spPr>
+          <a:xfrm xmlns:a="http://schemas.openxmlformats.org/drawingml/2006/main">
+            <a:off x="4482945" y="3038475"/>
+            <a:ext cx="41430" cy="85768"/>
+          </a:xfrm>
+          <a:custGeom xmlns:a="http://schemas.openxmlformats.org/drawingml/2006/main">
+            <a:pathLst>
+              <a:path w="41430" h="85768">
+                <a:moveTo>
+                  <a:pt x="0" y="85768"/>
+                </a:moveTo>
+                <a:lnTo>
+                  <a:pt x="41430" y="0"/>
+                </a:lnTo>
+              </a:path>
+            </a:pathLst>
+          </a:custGeom>
+          <a:noFill xmlns:a="http://schemas.openxmlformats.org/drawingml/2006/main"/>
+          <a:ln xmlns:a="http://schemas.openxmlformats.org/drawingml/2006/main" w="28575">
+            <a:solidFill>
+              <a:srgbClr val="62768A"/>
+            </a:solidFill>
+            <a:prstDash val="solid"/>
+          </a:ln>
+        </p:spPr>
+      </p:sp>
+      <p:sp>
+        <p:nvSpPr>
+          <p:cNvPr id="12" name="object-385">
+            <a:extLst xmlns:a="http://schemas.openxmlformats.org/drawingml/2006/main">
+              <a:ext uri="{FF2B5EF4-FFF2-40B4-BE49-F238E27FC236}">
+                <a16:creationId xmlns:a16="http://schemas.microsoft.com/office/drawing/2014/main" id="{5A083A7A-5C36-4A39-A2C8-10842988CC5F}"/>
+              </a:ext>
+            </a:extLst>
+          </p:cNvPr>
+          <p:cNvSpPr>
+            <a:spLocks xmlns:a="http://schemas.openxmlformats.org/drawingml/2006/main" noGrp="1"/>
+          </p:cNvSpPr>
+          <p:nvPr/>
+        </p:nvSpPr>
+        <p:spPr>
+          <a:xfrm xmlns:a="http://schemas.openxmlformats.org/drawingml/2006/main">
+            <a:off x="4714875" y="4114800"/>
+            <a:ext cx="3143250" cy="285750"/>
+          </a:xfrm>
+          <a:prstGeom xmlns:a="http://schemas.openxmlformats.org/drawingml/2006/main" prst="rect">
+            <a:avLst/>
+          </a:prstGeom>
+          <a:noFill xmlns:a="http://schemas.openxmlformats.org/drawingml/2006/main"/>
+          <a:ln xmlns:a="http://schemas.openxmlformats.org/drawingml/2006/main" w="0">
+            <a:noFill/>
+            <a:prstDash val="solid"/>
+          </a:ln>
+        </p:spPr>
+        <p:txBody>
+          <a:bodyPr xmlns:a="http://schemas.openxmlformats.org/drawingml/2006/main" wrap="none" lIns="0" tIns="0" rIns="0" bIns="0" anchor="ctr"/>
+          <a:lstStyle xmlns:a="http://schemas.openxmlformats.org/drawingml/2006/main">
+            <a:defPPr algn="ctr">
+              <a:defRPr sz="1425" b="0">
+                <a:solidFill>
+                  <a:srgbClr val="62768A"/>
+                </a:solidFill>
+                <a:latin typeface="Microsoft YaHei"/>
+                <a:ea typeface="Microsoft YaHei"/>
+                <a:cs typeface="Microsoft YaHei"/>
+              </a:defRPr>
+            </a:defPPr>
+          </a:lstStyle>
+          <a:p xmlns:a="http://schemas.openxmlformats.org/drawingml/2006/main">
+            <a:pPr algn="ctr">
+              <a:defRPr sz="1425" b="0">
+                <a:solidFill>
+                  <a:srgbClr val="62768A"/>
+                </a:solidFill>
+                <a:latin typeface="Microsoft YaHei"/>
+                <a:ea typeface="Microsoft YaHei"/>
+                <a:cs typeface="Microsoft YaHei"/>
+              </a:defRPr>
+            </a:pPr>
+            <a:r>
+              <a:rPr sz="1425" b="0">
+                <a:solidFill>
+                  <a:srgbClr val="62768A"/>
+                </a:solidFill>
+                <a:latin typeface="Microsoft YaHei"/>
+                <a:ea typeface="Microsoft YaHei"/>
+                <a:cs typeface="Microsoft YaHei"/>
+              </a:rPr>
+              <a:t>睡到下次唤醒，再来一遍</a:t>
+            </a:r>
+          </a:p>
+        </p:txBody>
+      </p:sp>
+      <p:sp>
+        <p:nvSpPr>
+          <p:cNvPr id="13" name="reveal1-object-386">
+            <a:extLst xmlns:a="http://schemas.openxmlformats.org/drawingml/2006/main">
+              <a:ext uri="{FF2B5EF4-FFF2-40B4-BE49-F238E27FC236}">
+                <a16:creationId xmlns:a16="http://schemas.microsoft.com/office/drawing/2014/main" id="{72150267-19EE-429B-82D7-13246FAA6799}"/>
+              </a:ext>
+            </a:extLst>
+          </p:cNvPr>
+          <p:cNvSpPr>
+            <a:spLocks xmlns:a="http://schemas.openxmlformats.org/drawingml/2006/main" noGrp="1"/>
+          </p:cNvSpPr>
+          <p:nvPr/>
+        </p:nvSpPr>
+        <p:spPr>
+          <a:xfrm xmlns:a="http://schemas.openxmlformats.org/drawingml/2006/main">
+            <a:off x="609600" y="2038350"/>
+            <a:ext cx="2857500" cy="333375"/>
+          </a:xfrm>
+          <a:prstGeom xmlns:a="http://schemas.openxmlformats.org/drawingml/2006/main" prst="rect">
+            <a:avLst/>
+          </a:prstGeom>
+          <a:noFill xmlns:a="http://schemas.openxmlformats.org/drawingml/2006/main"/>
+          <a:ln xmlns:a="http://schemas.openxmlformats.org/drawingml/2006/main" w="0">
+            <a:noFill/>
+            <a:prstDash val="solid"/>
+          </a:ln>
+        </p:spPr>
+        <p:txBody>
+          <a:bodyPr xmlns:a="http://schemas.openxmlformats.org/drawingml/2006/main" wrap="none" lIns="0" tIns="0" rIns="0" bIns="0" anchor="ctr"/>
+          <a:lstStyle xmlns:a="http://schemas.openxmlformats.org/drawingml/2006/main">
+            <a:defPPr algn="l">
+              <a:defRPr sz="1800" b="1">
+                <a:solidFill>
+                  <a:srgbClr val="3379EB"/>
+                </a:solidFill>
+                <a:latin typeface="Microsoft YaHei"/>
+                <a:ea typeface="Microsoft YaHei"/>
+                <a:cs typeface="Microsoft YaHei"/>
+              </a:defRPr>
+            </a:defPPr>
+          </a:lstStyle>
+          <a:p xmlns:a="http://schemas.openxmlformats.org/drawingml/2006/main">
+            <a:pPr algn="l">
+              <a:defRPr sz="1800" b="1">
+                <a:solidFill>
+                  <a:srgbClr val="3379EB"/>
+                </a:solidFill>
+                <a:latin typeface="Microsoft YaHei"/>
+                <a:ea typeface="Microsoft YaHei"/>
+                <a:cs typeface="Microsoft YaHei"/>
+              </a:defRPr>
+            </a:pPr>
+            <a:r>
+              <a:rPr sz="1800" b="1">
+                <a:solidFill>
+                  <a:srgbClr val="3379EB"/>
+                </a:solidFill>
+                <a:latin typeface="Microsoft YaHei"/>
+                <a:ea typeface="Microsoft YaHei"/>
+                <a:cs typeface="Microsoft YaHei"/>
+              </a:rPr>
+              <a:t>控制请求队列</a:t>
+            </a:r>
+          </a:p>
+        </p:txBody>
+      </p:sp>
+      <p:sp>
+        <p:nvSpPr>
+          <p:cNvPr id="14" name="reveal1-object-387">
+            <a:extLst xmlns:a="http://schemas.openxmlformats.org/drawingml/2006/main">
+              <a:ext uri="{FF2B5EF4-FFF2-40B4-BE49-F238E27FC236}">
+                <a16:creationId xmlns:a16="http://schemas.microsoft.com/office/drawing/2014/main" id="{3810B7E3-B1B8-4096-ACDD-FA1F2ABEC52D}"/>
+              </a:ext>
+            </a:extLst>
+          </p:cNvPr>
+          <p:cNvSpPr>
+            <a:spLocks xmlns:a="http://schemas.openxmlformats.org/drawingml/2006/main" noGrp="1"/>
+          </p:cNvSpPr>
+          <p:nvPr/>
+        </p:nvSpPr>
+        <p:spPr>
+          <a:xfrm xmlns:a="http://schemas.openxmlformats.org/drawingml/2006/main">
+            <a:off x="609600" y="2457450"/>
+            <a:ext cx="2857500" cy="476250"/>
+          </a:xfrm>
+          <a:prstGeom xmlns:a="http://schemas.openxmlformats.org/drawingml/2006/main" prst="rect">
+            <a:avLst/>
+          </a:prstGeom>
+          <a:solidFill xmlns:a="http://schemas.openxmlformats.org/drawingml/2006/main">
+            <a:srgbClr val="3379EB"/>
+          </a:solidFill>
+          <a:ln xmlns:a="http://schemas.openxmlformats.org/drawingml/2006/main" w="0">
+            <a:noFill/>
+            <a:prstDash val="solid"/>
+          </a:ln>
+        </p:spPr>
+      </p:sp>
+      <p:sp>
+        <p:nvSpPr>
+          <p:cNvPr id="15" name="reveal1-object-388">
+            <a:extLst xmlns:a="http://schemas.openxmlformats.org/drawingml/2006/main">
+              <a:ext uri="{FF2B5EF4-FFF2-40B4-BE49-F238E27FC236}">
+                <a16:creationId xmlns:a16="http://schemas.microsoft.com/office/drawing/2014/main" id="{F449B143-F1E5-4B54-86C6-6DF5D08D96ED}"/>
+              </a:ext>
+            </a:extLst>
+          </p:cNvPr>
+          <p:cNvSpPr>
+            <a:spLocks xmlns:a="http://schemas.openxmlformats.org/drawingml/2006/main" noGrp="1"/>
+          </p:cNvSpPr>
+          <p:nvPr/>
+        </p:nvSpPr>
+        <p:spPr>
+          <a:xfrm xmlns:a="http://schemas.openxmlformats.org/drawingml/2006/main">
+            <a:off x="723900" y="2514600"/>
+            <a:ext cx="2628900" cy="361950"/>
+          </a:xfrm>
+          <a:prstGeom xmlns:a="http://schemas.openxmlformats.org/drawingml/2006/main" prst="rect">
+            <a:avLst/>
+          </a:prstGeom>
+          <a:noFill xmlns:a="http://schemas.openxmlformats.org/drawingml/2006/main"/>
+          <a:ln xmlns:a="http://schemas.openxmlformats.org/drawingml/2006/main" w="0">
+            <a:noFill/>
+            <a:prstDash val="solid"/>
+          </a:ln>
+        </p:spPr>
+        <p:txBody>
+          <a:bodyPr xmlns:a="http://schemas.openxmlformats.org/drawingml/2006/main" wrap="none" lIns="0" tIns="0" rIns="0" bIns="0" anchor="ctr"/>
+          <a:lstStyle xmlns:a="http://schemas.openxmlformats.org/drawingml/2006/main">
+            <a:defPPr algn="ctr">
+              <a:defRPr sz="1725" b="1">
+                <a:solidFill>
+                  <a:srgbClr val="FFFFFF"/>
+                </a:solidFill>
+                <a:latin typeface="Microsoft YaHei"/>
+                <a:ea typeface="Microsoft YaHei"/>
+                <a:cs typeface="Microsoft YaHei"/>
+              </a:defRPr>
+            </a:defPPr>
+          </a:lstStyle>
+          <a:p xmlns:a="http://schemas.openxmlformats.org/drawingml/2006/main">
+            <a:pPr algn="ctr">
+              <a:defRPr sz="1725" b="1">
+                <a:solidFill>
+                  <a:srgbClr val="FFFFFF"/>
+                </a:solidFill>
+                <a:latin typeface="Microsoft YaHei"/>
+                <a:ea typeface="Microsoft YaHei"/>
+                <a:cs typeface="Microsoft YaHei"/>
+              </a:defRPr>
+            </a:pPr>
+            <a:r>
+              <a:rPr sz="1725" b="1">
+                <a:solidFill>
+                  <a:srgbClr val="FFFFFF"/>
+                </a:solidFill>
+                <a:latin typeface="Microsoft YaHei"/>
+                <a:ea typeface="Microsoft YaHei"/>
+                <a:cs typeface="Microsoft YaHei"/>
+              </a:rPr>
+              <a:t>① 暂停</a:t>
+            </a:r>
+          </a:p>
+        </p:txBody>
+      </p:sp>
+      <p:sp>
+        <p:nvSpPr>
+          <p:cNvPr id="16" name="reveal1-object-389">
+            <a:extLst xmlns:a="http://schemas.openxmlformats.org/drawingml/2006/main">
+              <a:ext uri="{FF2B5EF4-FFF2-40B4-BE49-F238E27FC236}">
+                <a16:creationId xmlns:a16="http://schemas.microsoft.com/office/drawing/2014/main" id="{707FC659-AF47-40F0-96BD-0478DEC62DD2}"/>
+              </a:ext>
+            </a:extLst>
+          </p:cNvPr>
+          <p:cNvSpPr>
+            <a:spLocks xmlns:a="http://schemas.openxmlformats.org/drawingml/2006/main" noGrp="1"/>
+          </p:cNvSpPr>
+          <p:nvPr/>
+        </p:nvSpPr>
+        <p:spPr>
+          <a:xfrm xmlns:a="http://schemas.openxmlformats.org/drawingml/2006/main">
+            <a:off x="609600" y="3028950"/>
+            <a:ext cx="2857500" cy="476250"/>
+          </a:xfrm>
+          <a:prstGeom xmlns:a="http://schemas.openxmlformats.org/drawingml/2006/main" prst="rect">
+            <a:avLst/>
+          </a:prstGeom>
+          <a:solidFill xmlns:a="http://schemas.openxmlformats.org/drawingml/2006/main">
+            <a:srgbClr val="C97835"/>
+          </a:solidFill>
+          <a:ln xmlns:a="http://schemas.openxmlformats.org/drawingml/2006/main" w="0">
+            <a:noFill/>
+            <a:prstDash val="solid"/>
+          </a:ln>
+        </p:spPr>
+      </p:sp>
+      <p:sp>
+        <p:nvSpPr>
+          <p:cNvPr id="17" name="reveal1-object-390">
+            <a:extLst xmlns:a="http://schemas.openxmlformats.org/drawingml/2006/main">
+              <a:ext uri="{FF2B5EF4-FFF2-40B4-BE49-F238E27FC236}">
+                <a16:creationId xmlns:a16="http://schemas.microsoft.com/office/drawing/2014/main" id="{184F50CC-69F6-4038-AA5B-6014139F7C32}"/>
+              </a:ext>
+            </a:extLst>
+          </p:cNvPr>
+          <p:cNvSpPr>
+            <a:spLocks xmlns:a="http://schemas.openxmlformats.org/drawingml/2006/main" noGrp="1"/>
+          </p:cNvSpPr>
+          <p:nvPr/>
+        </p:nvSpPr>
+        <p:spPr>
+          <a:xfrm xmlns:a="http://schemas.openxmlformats.org/drawingml/2006/main">
+            <a:off x="723900" y="3086100"/>
+            <a:ext cx="2628900" cy="361950"/>
+          </a:xfrm>
+          <a:prstGeom xmlns:a="http://schemas.openxmlformats.org/drawingml/2006/main" prst="rect">
+            <a:avLst/>
+          </a:prstGeom>
+          <a:noFill xmlns:a="http://schemas.openxmlformats.org/drawingml/2006/main"/>
+          <a:ln xmlns:a="http://schemas.openxmlformats.org/drawingml/2006/main" w="0">
+            <a:noFill/>
+            <a:prstDash val="solid"/>
+          </a:ln>
+        </p:spPr>
+        <p:txBody>
+          <a:bodyPr xmlns:a="http://schemas.openxmlformats.org/drawingml/2006/main" wrap="none" lIns="0" tIns="0" rIns="0" bIns="0" anchor="ctr"/>
+          <a:lstStyle xmlns:a="http://schemas.openxmlformats.org/drawingml/2006/main">
+            <a:defPPr algn="ctr">
+              <a:defRPr sz="1650" b="1">
+                <a:solidFill>
+                  <a:srgbClr val="FFFFFF"/>
+                </a:solidFill>
+                <a:latin typeface="Microsoft YaHei"/>
+                <a:ea typeface="Microsoft YaHei"/>
+                <a:cs typeface="Microsoft YaHei"/>
+              </a:defRPr>
+            </a:defPPr>
+          </a:lstStyle>
+          <a:p xmlns:a="http://schemas.openxmlformats.org/drawingml/2006/main">
+            <a:pPr algn="ctr">
+              <a:defRPr sz="1650" b="1">
+                <a:solidFill>
+                  <a:srgbClr val="FFFFFF"/>
+                </a:solidFill>
+                <a:latin typeface="Microsoft YaHei"/>
+                <a:ea typeface="Microsoft YaHei"/>
+                <a:cs typeface="Microsoft YaHei"/>
+              </a:defRPr>
+            </a:pPr>
+            <a:r>
+              <a:rPr sz="1650" b="1">
+                <a:solidFill>
+                  <a:srgbClr val="FFFFFF"/>
+                </a:solidFill>
+                <a:latin typeface="Microsoft YaHei"/>
+                <a:ea typeface="Microsoft YaHei"/>
+                <a:cs typeface="Microsoft YaHei"/>
+              </a:rPr>
+              <a:t>② 淡出完成后的收尾</a:t>
+            </a:r>
+          </a:p>
+        </p:txBody>
+      </p:sp>
+      <p:sp>
+        <p:nvSpPr>
+          <p:cNvPr id="18" name="reveal1-object-391">
+            <a:extLst xmlns:a="http://schemas.openxmlformats.org/drawingml/2006/main">
+              <a:ext uri="{FF2B5EF4-FFF2-40B4-BE49-F238E27FC236}">
+                <a16:creationId xmlns:a16="http://schemas.microsoft.com/office/drawing/2014/main" id="{E73FBAD7-B333-4775-929A-FB345B86F1B3}"/>
+              </a:ext>
+            </a:extLst>
+          </p:cNvPr>
+          <p:cNvSpPr>
+            <a:spLocks xmlns:a="http://schemas.openxmlformats.org/drawingml/2006/main" noGrp="1"/>
+          </p:cNvSpPr>
+          <p:nvPr/>
+        </p:nvSpPr>
+        <p:spPr>
+          <a:xfrm xmlns:a="http://schemas.openxmlformats.org/drawingml/2006/main">
+            <a:off x="609600" y="3600450"/>
+            <a:ext cx="2857500" cy="476250"/>
+          </a:xfrm>
+          <a:prstGeom xmlns:a="http://schemas.openxmlformats.org/drawingml/2006/main" prst="rect">
+            <a:avLst/>
+          </a:prstGeom>
+          <a:solidFill xmlns:a="http://schemas.openxmlformats.org/drawingml/2006/main">
+            <a:srgbClr val="3379EB"/>
+          </a:solidFill>
+          <a:ln xmlns:a="http://schemas.openxmlformats.org/drawingml/2006/main" w="0">
+            <a:noFill/>
+            <a:prstDash val="solid"/>
+          </a:ln>
+        </p:spPr>
+      </p:sp>
+      <p:sp>
+        <p:nvSpPr>
+          <p:cNvPr id="19" name="reveal1-object-392">
+            <a:extLst xmlns:a="http://schemas.openxmlformats.org/drawingml/2006/main">
+              <a:ext uri="{FF2B5EF4-FFF2-40B4-BE49-F238E27FC236}">
+                <a16:creationId xmlns:a16="http://schemas.microsoft.com/office/drawing/2014/main" id="{FD380533-2757-49DC-91A8-DD30B0A5AC4E}"/>
+              </a:ext>
+            </a:extLst>
+          </p:cNvPr>
+          <p:cNvSpPr>
+            <a:spLocks xmlns:a="http://schemas.openxmlformats.org/drawingml/2006/main" noGrp="1"/>
+          </p:cNvSpPr>
+          <p:nvPr/>
+        </p:nvSpPr>
+        <p:spPr>
+          <a:xfrm xmlns:a="http://schemas.openxmlformats.org/drawingml/2006/main">
+            <a:off x="723900" y="3657600"/>
+            <a:ext cx="2628900" cy="361950"/>
+          </a:xfrm>
+          <a:prstGeom xmlns:a="http://schemas.openxmlformats.org/drawingml/2006/main" prst="rect">
+            <a:avLst/>
+          </a:prstGeom>
+          <a:noFill xmlns:a="http://schemas.openxmlformats.org/drawingml/2006/main"/>
+          <a:ln xmlns:a="http://schemas.openxmlformats.org/drawingml/2006/main" w="0">
+            <a:noFill/>
+            <a:prstDash val="solid"/>
+          </a:ln>
+        </p:spPr>
+        <p:txBody>
+          <a:bodyPr xmlns:a="http://schemas.openxmlformats.org/drawingml/2006/main" wrap="none" lIns="0" tIns="0" rIns="0" bIns="0" anchor="ctr"/>
+          <a:lstStyle xmlns:a="http://schemas.openxmlformats.org/drawingml/2006/main">
+            <a:defPPr algn="ctr">
+              <a:defRPr sz="1725" b="1">
+                <a:solidFill>
+                  <a:srgbClr val="FFFFFF"/>
+                </a:solidFill>
+                <a:latin typeface="Microsoft YaHei"/>
+                <a:ea typeface="Microsoft YaHei"/>
+                <a:cs typeface="Microsoft YaHei"/>
+              </a:defRPr>
+            </a:defPPr>
+          </a:lstStyle>
+          <a:p xmlns:a="http://schemas.openxmlformats.org/drawingml/2006/main">
+            <a:pPr algn="ctr">
+              <a:defRPr sz="1725" b="1">
+                <a:solidFill>
+                  <a:srgbClr val="FFFFFF"/>
+                </a:solidFill>
+                <a:latin typeface="Microsoft YaHei"/>
+                <a:ea typeface="Microsoft YaHei"/>
+                <a:cs typeface="Microsoft YaHei"/>
+              </a:defRPr>
+            </a:pPr>
+            <a:r>
+              <a:rPr sz="1725" b="1">
+                <a:solidFill>
+                  <a:srgbClr val="FFFFFF"/>
+                </a:solidFill>
+                <a:latin typeface="Microsoft YaHei"/>
+                <a:ea typeface="Microsoft YaHei"/>
+                <a:cs typeface="Microsoft YaHei"/>
+              </a:rPr>
+              <a:t>③ 恢复播放</a:t>
+            </a:r>
+          </a:p>
+        </p:txBody>
+      </p:sp>
+      <p:sp>
+        <p:nvSpPr>
+          <p:cNvPr id="20" name="reveal1-object-393">
+            <a:extLst xmlns:a="http://schemas.openxmlformats.org/drawingml/2006/main">
+              <a:ext uri="{FF2B5EF4-FFF2-40B4-BE49-F238E27FC236}">
+                <a16:creationId xmlns:a16="http://schemas.microsoft.com/office/drawing/2014/main" id="{59794698-3D1C-43A8-B335-12C1B31CA649}"/>
+              </a:ext>
+            </a:extLst>
+          </p:cNvPr>
+          <p:cNvSpPr>
+            <a:spLocks xmlns:a="http://schemas.openxmlformats.org/drawingml/2006/main" noGrp="1"/>
+          </p:cNvSpPr>
+          <p:nvPr/>
+        </p:nvSpPr>
+        <p:spPr>
+          <a:xfrm xmlns:a="http://schemas.openxmlformats.org/drawingml/2006/main">
+            <a:off x="609600" y="4171950"/>
+            <a:ext cx="2857500" cy="476250"/>
           </a:xfrm>
           <a:prstGeom xmlns:a="http://schemas.openxmlformats.org/drawingml/2006/main" prst="rect">
             <a:avLst/>
@@ -24623,10 +25857,3711 @@
       </p:sp>
       <p:sp>
         <p:nvSpPr>
-          <p:cNvPr id="4" name="object-377">
-            <a:extLst xmlns:a="http://schemas.openxmlformats.org/drawingml/2006/main">
-              <a:ext uri="{FF2B5EF4-FFF2-40B4-BE49-F238E27FC236}">
-                <a16:creationId xmlns:a16="http://schemas.microsoft.com/office/drawing/2014/main" id="{AACA7B20-4D53-4E80-ACB7-7B753EE83020}"/>
+          <p:cNvPr id="21" name="reveal1-object-394">
+            <a:extLst xmlns:a="http://schemas.openxmlformats.org/drawingml/2006/main">
+              <a:ext uri="{FF2B5EF4-FFF2-40B4-BE49-F238E27FC236}">
+                <a16:creationId xmlns:a16="http://schemas.microsoft.com/office/drawing/2014/main" id="{6251BCC8-A659-4148-ABCA-9D7569CDE371}"/>
+              </a:ext>
+            </a:extLst>
+          </p:cNvPr>
+          <p:cNvSpPr>
+            <a:spLocks xmlns:a="http://schemas.openxmlformats.org/drawingml/2006/main" noGrp="1"/>
+          </p:cNvSpPr>
+          <p:nvPr/>
+        </p:nvSpPr>
+        <p:spPr>
+          <a:xfrm xmlns:a="http://schemas.openxmlformats.org/drawingml/2006/main">
+            <a:off x="723900" y="4229100"/>
+            <a:ext cx="2628900" cy="361950"/>
+          </a:xfrm>
+          <a:prstGeom xmlns:a="http://schemas.openxmlformats.org/drawingml/2006/main" prst="rect">
+            <a:avLst/>
+          </a:prstGeom>
+          <a:noFill xmlns:a="http://schemas.openxmlformats.org/drawingml/2006/main"/>
+          <a:ln xmlns:a="http://schemas.openxmlformats.org/drawingml/2006/main" w="0">
+            <a:noFill/>
+            <a:prstDash val="solid"/>
+          </a:ln>
+        </p:spPr>
+        <p:txBody>
+          <a:bodyPr xmlns:a="http://schemas.openxmlformats.org/drawingml/2006/main" wrap="none" lIns="0" tIns="0" rIns="0" bIns="0" anchor="ctr"/>
+          <a:lstStyle xmlns:a="http://schemas.openxmlformats.org/drawingml/2006/main">
+            <a:defPPr algn="ctr">
+              <a:defRPr sz="1725" b="1">
+                <a:solidFill>
+                  <a:srgbClr val="FFFFFF"/>
+                </a:solidFill>
+                <a:latin typeface="Microsoft YaHei"/>
+                <a:ea typeface="Microsoft YaHei"/>
+                <a:cs typeface="Microsoft YaHei"/>
+              </a:defRPr>
+            </a:defPPr>
+          </a:lstStyle>
+          <a:p xmlns:a="http://schemas.openxmlformats.org/drawingml/2006/main">
+            <a:pPr algn="ctr">
+              <a:defRPr sz="1725" b="1">
+                <a:solidFill>
+                  <a:srgbClr val="FFFFFF"/>
+                </a:solidFill>
+                <a:latin typeface="Microsoft YaHei"/>
+                <a:ea typeface="Microsoft YaHei"/>
+                <a:cs typeface="Microsoft YaHei"/>
+              </a:defRPr>
+            </a:pPr>
+            <a:r>
+              <a:rPr sz="1725" b="1">
+                <a:solidFill>
+                  <a:srgbClr val="FFFFFF"/>
+                </a:solidFill>
+                <a:latin typeface="Microsoft YaHei"/>
+                <a:ea typeface="Microsoft YaHei"/>
+                <a:cs typeface="Microsoft YaHei"/>
+              </a:rPr>
+              <a:t>④ 切到耳机</a:t>
+            </a:r>
+          </a:p>
+        </p:txBody>
+      </p:sp>
+      <p:sp>
+        <p:nvSpPr>
+          <p:cNvPr id="22" name="reveal1-object-395">
+            <a:extLst xmlns:a="http://schemas.openxmlformats.org/drawingml/2006/main">
+              <a:ext uri="{FF2B5EF4-FFF2-40B4-BE49-F238E27FC236}">
+                <a16:creationId xmlns:a16="http://schemas.microsoft.com/office/drawing/2014/main" id="{1249AA5E-7E00-4A0E-8681-AB84B373A9BF}"/>
+              </a:ext>
+            </a:extLst>
+          </p:cNvPr>
+          <p:cNvSpPr>
+            <a:spLocks xmlns:a="http://schemas.openxmlformats.org/drawingml/2006/main" noGrp="1"/>
+          </p:cNvSpPr>
+          <p:nvPr/>
+        </p:nvSpPr>
+        <p:spPr>
+          <a:xfrm xmlns:a="http://schemas.openxmlformats.org/drawingml/2006/main">
+            <a:off x="3543300" y="2533650"/>
+            <a:ext cx="1143000" cy="381000"/>
+          </a:xfrm>
+          <a:prstGeom xmlns:a="http://schemas.openxmlformats.org/drawingml/2006/main" prst="rect">
+            <a:avLst/>
+          </a:prstGeom>
+          <a:noFill xmlns:a="http://schemas.openxmlformats.org/drawingml/2006/main"/>
+          <a:ln xmlns:a="http://schemas.openxmlformats.org/drawingml/2006/main" w="0">
+            <a:noFill/>
+            <a:prstDash val="solid"/>
+          </a:ln>
+        </p:spPr>
+        <p:txBody>
+          <a:bodyPr xmlns:a="http://schemas.openxmlformats.org/drawingml/2006/main" wrap="none" lIns="0" tIns="0" rIns="0" bIns="0" anchor="ctr"/>
+          <a:lstStyle xmlns:a="http://schemas.openxmlformats.org/drawingml/2006/main">
+            <a:defPPr algn="l">
+              <a:defRPr sz="1425" b="0">
+                <a:solidFill>
+                  <a:srgbClr val="62768A"/>
+                </a:solidFill>
+                <a:latin typeface="Microsoft YaHei"/>
+                <a:ea typeface="Microsoft YaHei"/>
+                <a:cs typeface="Microsoft YaHei"/>
+              </a:defRPr>
+            </a:defPPr>
+          </a:lstStyle>
+          <a:p xmlns:a="http://schemas.openxmlformats.org/drawingml/2006/main">
+            <a:pPr algn="l">
+              <a:defRPr sz="1425" b="0">
+                <a:solidFill>
+                  <a:srgbClr val="62768A"/>
+                </a:solidFill>
+                <a:latin typeface="Microsoft YaHei"/>
+                <a:ea typeface="Microsoft YaHei"/>
+                <a:cs typeface="Microsoft YaHei"/>
+              </a:defRPr>
+            </a:pPr>
+            <a:r>
+              <a:rPr sz="1425" b="0">
+                <a:solidFill>
+                  <a:srgbClr val="62768A"/>
+                </a:solidFill>
+                <a:latin typeface="Microsoft YaHei"/>
+                <a:ea typeface="Microsoft YaHei"/>
+                <a:cs typeface="Microsoft YaHei"/>
+              </a:rPr>
+              <a:t>下一条</a:t>
+            </a:r>
+          </a:p>
+          <a:p xmlns:a="http://schemas.openxmlformats.org/drawingml/2006/main">
+            <a:pPr algn="l">
+              <a:defRPr sz="1425" b="0">
+                <a:solidFill>
+                  <a:srgbClr val="62768A"/>
+                </a:solidFill>
+                <a:latin typeface="Microsoft YaHei"/>
+                <a:ea typeface="Microsoft YaHei"/>
+                <a:cs typeface="Microsoft YaHei"/>
+              </a:defRPr>
+            </a:pPr>
+            <a:r>
+              <a:rPr sz="1425" b="0">
+                <a:solidFill>
+                  <a:srgbClr val="62768A"/>
+                </a:solidFill>
+                <a:latin typeface="Microsoft YaHei"/>
+                <a:ea typeface="Microsoft YaHei"/>
+                <a:cs typeface="Microsoft YaHei"/>
+              </a:rPr>
+              <a:t>先执行</a:t>
+            </a:r>
+          </a:p>
+        </p:txBody>
+      </p:sp>
+      <p:sp>
+        <p:nvSpPr>
+          <p:cNvPr id="23" name="reveal1-line-396">
+            <a:extLst xmlns:a="http://schemas.openxmlformats.org/drawingml/2006/main">
+              <a:ext uri="{FF2B5EF4-FFF2-40B4-BE49-F238E27FC236}">
+                <a16:creationId xmlns:a16="http://schemas.microsoft.com/office/drawing/2014/main" id="{61199BB5-5153-42F2-8C56-3F7A2932377B}"/>
+              </a:ext>
+            </a:extLst>
+          </p:cNvPr>
+          <p:cNvSpPr>
+            <a:spLocks xmlns:a="http://schemas.openxmlformats.org/drawingml/2006/main" noGrp="1"/>
+          </p:cNvSpPr>
+          <p:nvPr/>
+        </p:nvSpPr>
+        <p:spPr>
+          <a:xfrm xmlns:a="http://schemas.openxmlformats.org/drawingml/2006/main">
+            <a:off x="3467100" y="3238500"/>
+            <a:ext cx="72231" cy="9525"/>
+          </a:xfrm>
+          <a:custGeom xmlns:a="http://schemas.openxmlformats.org/drawingml/2006/main">
+            <a:pathLst>
+              <a:path w="72231" h="9525">
+                <a:moveTo>
+                  <a:pt x="0" y="0"/>
+                </a:moveTo>
+                <a:lnTo>
+                  <a:pt x="72231" y="0"/>
+                </a:lnTo>
+              </a:path>
+            </a:pathLst>
+          </a:custGeom>
+          <a:noFill xmlns:a="http://schemas.openxmlformats.org/drawingml/2006/main"/>
+          <a:ln xmlns:a="http://schemas.openxmlformats.org/drawingml/2006/main" w="19050">
+            <a:solidFill>
+              <a:srgbClr val="3379EB"/>
+            </a:solidFill>
+            <a:prstDash val="solid"/>
+          </a:ln>
+        </p:spPr>
+      </p:sp>
+      <p:sp>
+        <p:nvSpPr>
+          <p:cNvPr id="24" name="reveal1-line-397">
+            <a:extLst xmlns:a="http://schemas.openxmlformats.org/drawingml/2006/main">
+              <a:ext uri="{FF2B5EF4-FFF2-40B4-BE49-F238E27FC236}">
+                <a16:creationId xmlns:a16="http://schemas.microsoft.com/office/drawing/2014/main" id="{F76CB990-1027-43AB-BD2D-A85FA38E607C}"/>
+              </a:ext>
+            </a:extLst>
+          </p:cNvPr>
+          <p:cNvSpPr>
+            <a:spLocks xmlns:a="http://schemas.openxmlformats.org/drawingml/2006/main" noGrp="1"/>
+          </p:cNvSpPr>
+          <p:nvPr/>
+        </p:nvSpPr>
+        <p:spPr>
+          <a:xfrm xmlns:a="http://schemas.openxmlformats.org/drawingml/2006/main">
+            <a:off x="3611563" y="3238500"/>
+            <a:ext cx="72231" cy="9525"/>
+          </a:xfrm>
+          <a:custGeom xmlns:a="http://schemas.openxmlformats.org/drawingml/2006/main">
+            <a:pathLst>
+              <a:path w="72231" h="9525">
+                <a:moveTo>
+                  <a:pt x="0" y="0"/>
+                </a:moveTo>
+                <a:lnTo>
+                  <a:pt x="72231" y="0"/>
+                </a:lnTo>
+              </a:path>
+            </a:pathLst>
+          </a:custGeom>
+          <a:noFill xmlns:a="http://schemas.openxmlformats.org/drawingml/2006/main"/>
+          <a:ln xmlns:a="http://schemas.openxmlformats.org/drawingml/2006/main" w="19050">
+            <a:solidFill>
+              <a:srgbClr val="3379EB"/>
+            </a:solidFill>
+            <a:prstDash val="solid"/>
+          </a:ln>
+        </p:spPr>
+      </p:sp>
+      <p:sp>
+        <p:nvSpPr>
+          <p:cNvPr id="25" name="reveal1-line-398">
+            <a:extLst xmlns:a="http://schemas.openxmlformats.org/drawingml/2006/main">
+              <a:ext uri="{FF2B5EF4-FFF2-40B4-BE49-F238E27FC236}">
+                <a16:creationId xmlns:a16="http://schemas.microsoft.com/office/drawing/2014/main" id="{083E9D24-A01A-468F-AB0E-1CDE0DA31399}"/>
+              </a:ext>
+            </a:extLst>
+          </p:cNvPr>
+          <p:cNvSpPr>
+            <a:spLocks xmlns:a="http://schemas.openxmlformats.org/drawingml/2006/main" noGrp="1"/>
+          </p:cNvSpPr>
+          <p:nvPr/>
+        </p:nvSpPr>
+        <p:spPr>
+          <a:xfrm xmlns:a="http://schemas.openxmlformats.org/drawingml/2006/main">
+            <a:off x="3756025" y="3238500"/>
+            <a:ext cx="72231" cy="9525"/>
+          </a:xfrm>
+          <a:custGeom xmlns:a="http://schemas.openxmlformats.org/drawingml/2006/main">
+            <a:pathLst>
+              <a:path w="72231" h="9525">
+                <a:moveTo>
+                  <a:pt x="0" y="0"/>
+                </a:moveTo>
+                <a:lnTo>
+                  <a:pt x="72231" y="0"/>
+                </a:lnTo>
+              </a:path>
+            </a:pathLst>
+          </a:custGeom>
+          <a:noFill xmlns:a="http://schemas.openxmlformats.org/drawingml/2006/main"/>
+          <a:ln xmlns:a="http://schemas.openxmlformats.org/drawingml/2006/main" w="19050">
+            <a:solidFill>
+              <a:srgbClr val="3379EB"/>
+            </a:solidFill>
+            <a:prstDash val="solid"/>
+          </a:ln>
+        </p:spPr>
+      </p:sp>
+      <p:sp>
+        <p:nvSpPr>
+          <p:cNvPr id="26" name="reveal1-line-399">
+            <a:extLst xmlns:a="http://schemas.openxmlformats.org/drawingml/2006/main">
+              <a:ext uri="{FF2B5EF4-FFF2-40B4-BE49-F238E27FC236}">
+                <a16:creationId xmlns:a16="http://schemas.microsoft.com/office/drawing/2014/main" id="{580BE150-BE91-4537-BB2D-4C0788A1B45A}"/>
+              </a:ext>
+            </a:extLst>
+          </p:cNvPr>
+          <p:cNvSpPr>
+            <a:spLocks xmlns:a="http://schemas.openxmlformats.org/drawingml/2006/main" noGrp="1"/>
+          </p:cNvSpPr>
+          <p:nvPr/>
+        </p:nvSpPr>
+        <p:spPr>
+          <a:xfrm xmlns:a="http://schemas.openxmlformats.org/drawingml/2006/main">
+            <a:off x="3900488" y="3238500"/>
+            <a:ext cx="72231" cy="9525"/>
+          </a:xfrm>
+          <a:custGeom xmlns:a="http://schemas.openxmlformats.org/drawingml/2006/main">
+            <a:pathLst>
+              <a:path w="72231" h="9525">
+                <a:moveTo>
+                  <a:pt x="0" y="0"/>
+                </a:moveTo>
+                <a:lnTo>
+                  <a:pt x="72231" y="0"/>
+                </a:lnTo>
+              </a:path>
+            </a:pathLst>
+          </a:custGeom>
+          <a:noFill xmlns:a="http://schemas.openxmlformats.org/drawingml/2006/main"/>
+          <a:ln xmlns:a="http://schemas.openxmlformats.org/drawingml/2006/main" w="19050">
+            <a:solidFill>
+              <a:srgbClr val="3379EB"/>
+            </a:solidFill>
+            <a:prstDash val="solid"/>
+          </a:ln>
+        </p:spPr>
+      </p:sp>
+      <p:sp>
+        <p:nvSpPr>
+          <p:cNvPr id="27" name="reveal1-line-400">
+            <a:extLst xmlns:a="http://schemas.openxmlformats.org/drawingml/2006/main">
+              <a:ext uri="{FF2B5EF4-FFF2-40B4-BE49-F238E27FC236}">
+                <a16:creationId xmlns:a16="http://schemas.microsoft.com/office/drawing/2014/main" id="{04A0EF67-1A7D-4EA9-B2AD-269ABE304117}"/>
+              </a:ext>
+            </a:extLst>
+          </p:cNvPr>
+          <p:cNvSpPr>
+            <a:spLocks xmlns:a="http://schemas.openxmlformats.org/drawingml/2006/main" noGrp="1"/>
+          </p:cNvSpPr>
+          <p:nvPr/>
+        </p:nvSpPr>
+        <p:spPr>
+          <a:xfrm xmlns:a="http://schemas.openxmlformats.org/drawingml/2006/main">
+            <a:off x="4044950" y="3238500"/>
+            <a:ext cx="72231" cy="9525"/>
+          </a:xfrm>
+          <a:custGeom xmlns:a="http://schemas.openxmlformats.org/drawingml/2006/main">
+            <a:pathLst>
+              <a:path w="72231" h="9525">
+                <a:moveTo>
+                  <a:pt x="0" y="0"/>
+                </a:moveTo>
+                <a:lnTo>
+                  <a:pt x="72231" y="0"/>
+                </a:lnTo>
+              </a:path>
+            </a:pathLst>
+          </a:custGeom>
+          <a:noFill xmlns:a="http://schemas.openxmlformats.org/drawingml/2006/main"/>
+          <a:ln xmlns:a="http://schemas.openxmlformats.org/drawingml/2006/main" w="19050">
+            <a:solidFill>
+              <a:srgbClr val="3379EB"/>
+            </a:solidFill>
+            <a:prstDash val="solid"/>
+          </a:ln>
+        </p:spPr>
+      </p:sp>
+      <p:sp>
+        <p:nvSpPr>
+          <p:cNvPr id="28" name="reveal1-line-401">
+            <a:extLst xmlns:a="http://schemas.openxmlformats.org/drawingml/2006/main">
+              <a:ext uri="{FF2B5EF4-FFF2-40B4-BE49-F238E27FC236}">
+                <a16:creationId xmlns:a16="http://schemas.microsoft.com/office/drawing/2014/main" id="{4D79160E-E269-4566-A92F-0386E28A3EEB}"/>
+              </a:ext>
+            </a:extLst>
+          </p:cNvPr>
+          <p:cNvSpPr>
+            <a:spLocks xmlns:a="http://schemas.openxmlformats.org/drawingml/2006/main" noGrp="1"/>
+          </p:cNvSpPr>
+          <p:nvPr/>
+        </p:nvSpPr>
+        <p:spPr>
+          <a:xfrm xmlns:a="http://schemas.openxmlformats.org/drawingml/2006/main">
+            <a:off x="4189413" y="3238500"/>
+            <a:ext cx="72231" cy="9525"/>
+          </a:xfrm>
+          <a:custGeom xmlns:a="http://schemas.openxmlformats.org/drawingml/2006/main">
+            <a:pathLst>
+              <a:path w="72231" h="9525">
+                <a:moveTo>
+                  <a:pt x="0" y="0"/>
+                </a:moveTo>
+                <a:lnTo>
+                  <a:pt x="72231" y="0"/>
+                </a:lnTo>
+              </a:path>
+            </a:pathLst>
+          </a:custGeom>
+          <a:noFill xmlns:a="http://schemas.openxmlformats.org/drawingml/2006/main"/>
+          <a:ln xmlns:a="http://schemas.openxmlformats.org/drawingml/2006/main" w="19050">
+            <a:solidFill>
+              <a:srgbClr val="3379EB"/>
+            </a:solidFill>
+            <a:prstDash val="solid"/>
+          </a:ln>
+        </p:spPr>
+      </p:sp>
+      <p:sp>
+        <p:nvSpPr>
+          <p:cNvPr id="29" name="reveal1-line-402">
+            <a:extLst xmlns:a="http://schemas.openxmlformats.org/drawingml/2006/main">
+              <a:ext uri="{FF2B5EF4-FFF2-40B4-BE49-F238E27FC236}">
+                <a16:creationId xmlns:a16="http://schemas.microsoft.com/office/drawing/2014/main" id="{F2B7806A-8754-48FD-85E0-7531DC69DFFF}"/>
+              </a:ext>
+            </a:extLst>
+          </p:cNvPr>
+          <p:cNvSpPr>
+            <a:spLocks xmlns:a="http://schemas.openxmlformats.org/drawingml/2006/main" noGrp="1"/>
+          </p:cNvSpPr>
+          <p:nvPr/>
+        </p:nvSpPr>
+        <p:spPr>
+          <a:xfrm xmlns:a="http://schemas.openxmlformats.org/drawingml/2006/main">
+            <a:off x="4248107" y="3238500"/>
+            <a:ext cx="85768" cy="41430"/>
+          </a:xfrm>
+          <a:custGeom xmlns:a="http://schemas.openxmlformats.org/drawingml/2006/main">
+            <a:pathLst>
+              <a:path w="85768" h="41430">
+                <a:moveTo>
+                  <a:pt x="0" y="41430"/>
+                </a:moveTo>
+                <a:lnTo>
+                  <a:pt x="85768" y="0"/>
+                </a:lnTo>
+              </a:path>
+            </a:pathLst>
+          </a:custGeom>
+          <a:noFill xmlns:a="http://schemas.openxmlformats.org/drawingml/2006/main"/>
+          <a:ln xmlns:a="http://schemas.openxmlformats.org/drawingml/2006/main" w="28575">
+            <a:solidFill>
+              <a:srgbClr val="3379EB"/>
+            </a:solidFill>
+            <a:prstDash val="solid"/>
+          </a:ln>
+        </p:spPr>
+      </p:sp>
+      <p:sp>
+        <p:nvSpPr>
+          <p:cNvPr id="30" name="reveal1-line-403">
+            <a:extLst xmlns:a="http://schemas.openxmlformats.org/drawingml/2006/main">
+              <a:ext uri="{FF2B5EF4-FFF2-40B4-BE49-F238E27FC236}">
+                <a16:creationId xmlns:a16="http://schemas.microsoft.com/office/drawing/2014/main" id="{8C351A0F-0A3C-4CE7-A22D-1B1CBFCFA269}"/>
+              </a:ext>
+            </a:extLst>
+          </p:cNvPr>
+          <p:cNvSpPr>
+            <a:spLocks xmlns:a="http://schemas.openxmlformats.org/drawingml/2006/main" noGrp="1"/>
+          </p:cNvSpPr>
+          <p:nvPr/>
+        </p:nvSpPr>
+        <p:spPr>
+          <a:xfrm xmlns:a="http://schemas.openxmlformats.org/drawingml/2006/main">
+            <a:off x="4248107" y="3197070"/>
+            <a:ext cx="85768" cy="41430"/>
+          </a:xfrm>
+          <a:custGeom xmlns:a="http://schemas.openxmlformats.org/drawingml/2006/main">
+            <a:pathLst>
+              <a:path w="85768" h="41430">
+                <a:moveTo>
+                  <a:pt x="0" y="0"/>
+                </a:moveTo>
+                <a:lnTo>
+                  <a:pt x="85768" y="41430"/>
+                </a:lnTo>
+              </a:path>
+            </a:pathLst>
+          </a:custGeom>
+          <a:noFill xmlns:a="http://schemas.openxmlformats.org/drawingml/2006/main"/>
+          <a:ln xmlns:a="http://schemas.openxmlformats.org/drawingml/2006/main" w="28575">
+            <a:solidFill>
+              <a:srgbClr val="3379EB"/>
+            </a:solidFill>
+            <a:prstDash val="solid"/>
+          </a:ln>
+        </p:spPr>
+      </p:sp>
+      <p:sp>
+        <p:nvSpPr>
+          <p:cNvPr id="31" name="reveal2-object-404">
+            <a:extLst xmlns:a="http://schemas.openxmlformats.org/drawingml/2006/main">
+              <a:ext uri="{FF2B5EF4-FFF2-40B4-BE49-F238E27FC236}">
+                <a16:creationId xmlns:a16="http://schemas.microsoft.com/office/drawing/2014/main" id="{F282654F-F381-49AE-B271-05FF71806596}"/>
+              </a:ext>
+            </a:extLst>
+          </p:cNvPr>
+          <p:cNvSpPr>
+            <a:spLocks xmlns:a="http://schemas.openxmlformats.org/drawingml/2006/main" noGrp="1"/>
+          </p:cNvSpPr>
+          <p:nvPr/>
+        </p:nvSpPr>
+        <p:spPr>
+          <a:xfrm xmlns:a="http://schemas.openxmlformats.org/drawingml/2006/main">
+            <a:off x="8572500" y="2286000"/>
+            <a:ext cx="3143250" cy="1428750"/>
+          </a:xfrm>
+          <a:prstGeom xmlns:a="http://schemas.openxmlformats.org/drawingml/2006/main" prst="rect">
+            <a:avLst/>
+          </a:prstGeom>
+          <a:noFill xmlns:a="http://schemas.openxmlformats.org/drawingml/2006/main"/>
+          <a:ln xmlns:a="http://schemas.openxmlformats.org/drawingml/2006/main" w="0">
+            <a:noFill/>
+            <a:prstDash val="solid"/>
+          </a:ln>
+        </p:spPr>
+        <p:txBody>
+          <a:bodyPr xmlns:a="http://schemas.openxmlformats.org/drawingml/2006/main" wrap="none" lIns="0" tIns="0" rIns="0" bIns="0" anchor="ctr"/>
+          <a:lstStyle xmlns:a="http://schemas.openxmlformats.org/drawingml/2006/main">
+            <a:defPPr algn="l">
+              <a:defRPr sz="1725" b="0">
+                <a:solidFill>
+                  <a:srgbClr val="12263B"/>
+                </a:solidFill>
+                <a:latin typeface="Microsoft YaHei"/>
+                <a:ea typeface="Microsoft YaHei"/>
+                <a:cs typeface="Microsoft YaHei"/>
+              </a:defRPr>
+            </a:defPPr>
+          </a:lstStyle>
+          <a:p xmlns:a="http://schemas.openxmlformats.org/drawingml/2006/main">
+            <a:pPr algn="l">
+              <a:defRPr sz="1725" b="0">
+                <a:solidFill>
+                  <a:srgbClr val="12263B"/>
+                </a:solidFill>
+                <a:latin typeface="Microsoft YaHei"/>
+                <a:ea typeface="Microsoft YaHei"/>
+                <a:cs typeface="Microsoft YaHei"/>
+              </a:defRPr>
+            </a:pPr>
+            <a:r>
+              <a:rPr sz="1725" b="0">
+                <a:solidFill>
+                  <a:srgbClr val="12263B"/>
+                </a:solidFill>
+                <a:latin typeface="Microsoft YaHei"/>
+                <a:ea typeface="Microsoft YaHei"/>
+                <a:cs typeface="Microsoft YaHei"/>
+              </a:rPr>
+              <a:t>改图的人就是跑数据的人：</a:t>
+            </a:r>
+          </a:p>
+          <a:p xmlns:a="http://schemas.openxmlformats.org/drawingml/2006/main">
+            <a:pPr algn="l">
+              <a:defRPr sz="1725" b="0">
+                <a:solidFill>
+                  <a:srgbClr val="12263B"/>
+                </a:solidFill>
+                <a:latin typeface="Microsoft YaHei"/>
+                <a:ea typeface="Microsoft YaHei"/>
+                <a:cs typeface="Microsoft YaHei"/>
+              </a:defRPr>
+            </a:pPr>
+            <a:r>
+              <a:rPr sz="1725" b="0">
+                <a:solidFill>
+                  <a:srgbClr val="12263B"/>
+                </a:solidFill>
+                <a:latin typeface="Microsoft YaHei"/>
+                <a:ea typeface="Microsoft YaHei"/>
+                <a:cs typeface="Microsoft YaHei"/>
+              </a:rPr>
+              <a:t>同一条线程串行，</a:t>
+            </a:r>
+          </a:p>
+          <a:p xmlns:a="http://schemas.openxmlformats.org/drawingml/2006/main">
+            <a:pPr algn="l">
+              <a:defRPr sz="1725" b="0">
+                <a:solidFill>
+                  <a:srgbClr val="12263B"/>
+                </a:solidFill>
+                <a:latin typeface="Microsoft YaHei"/>
+                <a:ea typeface="Microsoft YaHei"/>
+                <a:cs typeface="Microsoft YaHei"/>
+              </a:defRPr>
+            </a:pPr>
+            <a:r>
+              <a:rPr sz="1725" b="0">
+                <a:solidFill>
+                  <a:srgbClr val="12263B"/>
+                </a:solidFill>
+                <a:latin typeface="Microsoft YaHei"/>
+                <a:ea typeface="Microsoft YaHei"/>
+                <a:cs typeface="Microsoft YaHei"/>
+              </a:rPr>
+              <a:t>这个队列不需要锁。</a:t>
+            </a:r>
+          </a:p>
+        </p:txBody>
+      </p:sp>
+      <p:sp>
+        <p:nvSpPr>
+          <p:cNvPr id="32" name="reveal2-object-405">
+            <a:extLst xmlns:a="http://schemas.openxmlformats.org/drawingml/2006/main">
+              <a:ext uri="{FF2B5EF4-FFF2-40B4-BE49-F238E27FC236}">
+                <a16:creationId xmlns:a16="http://schemas.microsoft.com/office/drawing/2014/main" id="{075EBBFF-4B55-4C24-AA9F-52508E3406E6}"/>
+              </a:ext>
+            </a:extLst>
+          </p:cNvPr>
+          <p:cNvSpPr>
+            <a:spLocks xmlns:a="http://schemas.openxmlformats.org/drawingml/2006/main" noGrp="1"/>
+          </p:cNvSpPr>
+          <p:nvPr/>
+        </p:nvSpPr>
+        <p:spPr>
+          <a:xfrm xmlns:a="http://schemas.openxmlformats.org/drawingml/2006/main">
+            <a:off x="609600" y="5286375"/>
+            <a:ext cx="10858500" cy="571500"/>
+          </a:xfrm>
+          <a:prstGeom xmlns:a="http://schemas.openxmlformats.org/drawingml/2006/main" prst="rect">
+            <a:avLst/>
+          </a:prstGeom>
+          <a:noFill xmlns:a="http://schemas.openxmlformats.org/drawingml/2006/main"/>
+          <a:ln xmlns:a="http://schemas.openxmlformats.org/drawingml/2006/main" w="0">
+            <a:noFill/>
+            <a:prstDash val="solid"/>
+          </a:ln>
+        </p:spPr>
+        <p:txBody>
+          <a:bodyPr xmlns:a="http://schemas.openxmlformats.org/drawingml/2006/main" wrap="none" lIns="0" tIns="0" rIns="0" bIns="0" anchor="ctr"/>
+          <a:lstStyle xmlns:a="http://schemas.openxmlformats.org/drawingml/2006/main">
+            <a:defPPr algn="l">
+              <a:defRPr sz="1800" b="1">
+                <a:solidFill>
+                  <a:srgbClr val="12263B"/>
+                </a:solidFill>
+                <a:latin typeface="Microsoft YaHei"/>
+                <a:ea typeface="Microsoft YaHei"/>
+                <a:cs typeface="Microsoft YaHei"/>
+              </a:defRPr>
+            </a:defPPr>
+          </a:lstStyle>
+          <a:p xmlns:a="http://schemas.openxmlformats.org/drawingml/2006/main">
+            <a:pPr algn="l">
+              <a:defRPr sz="1800" b="1">
+                <a:solidFill>
+                  <a:srgbClr val="12263B"/>
+                </a:solidFill>
+                <a:latin typeface="Microsoft YaHei"/>
+                <a:ea typeface="Microsoft YaHei"/>
+                <a:cs typeface="Microsoft YaHei"/>
+              </a:defRPr>
+            </a:pPr>
+            <a:r>
+              <a:rPr sz="1800" b="1">
+                <a:solidFill>
+                  <a:srgbClr val="12263B"/>
+                </a:solidFill>
+                <a:latin typeface="Microsoft YaHei"/>
+                <a:ea typeface="Microsoft YaHei"/>
+                <a:cs typeface="Microsoft YaHei"/>
+              </a:rPr>
+              <a:t>淡出完成不是定时器猜的：处理链在真实数据上跑完渐变，就地发回“淡出完成”，排到队尾。</a:t>
+            </a:r>
+          </a:p>
+        </p:txBody>
+      </p:sp>
+      <p:sp>
+        <p:nvSpPr>
+          <p:cNvPr id="33" name="reveal2-object-406">
+            <a:extLst xmlns:a="http://schemas.openxmlformats.org/drawingml/2006/main">
+              <a:ext uri="{FF2B5EF4-FFF2-40B4-BE49-F238E27FC236}">
+                <a16:creationId xmlns:a16="http://schemas.microsoft.com/office/drawing/2014/main" id="{8E5FA4CB-D1FE-442C-9777-B9CA583FD92F}"/>
+              </a:ext>
+            </a:extLst>
+          </p:cNvPr>
+          <p:cNvSpPr>
+            <a:spLocks xmlns:a="http://schemas.openxmlformats.org/drawingml/2006/main" noGrp="1"/>
+          </p:cNvSpPr>
+          <p:nvPr/>
+        </p:nvSpPr>
+        <p:spPr>
+          <a:xfrm xmlns:a="http://schemas.openxmlformats.org/drawingml/2006/main">
+            <a:off x="609600" y="5886450"/>
+            <a:ext cx="10858500" cy="342900"/>
+          </a:xfrm>
+          <a:prstGeom xmlns:a="http://schemas.openxmlformats.org/drawingml/2006/main" prst="rect">
+            <a:avLst/>
+          </a:prstGeom>
+          <a:noFill xmlns:a="http://schemas.openxmlformats.org/drawingml/2006/main"/>
+          <a:ln xmlns:a="http://schemas.openxmlformats.org/drawingml/2006/main" w="0">
+            <a:noFill/>
+            <a:prstDash val="solid"/>
+          </a:ln>
+        </p:spPr>
+        <p:txBody>
+          <a:bodyPr xmlns:a="http://schemas.openxmlformats.org/drawingml/2006/main" wrap="none" lIns="0" tIns="0" rIns="0" bIns="0" anchor="ctr"/>
+          <a:lstStyle xmlns:a="http://schemas.openxmlformats.org/drawingml/2006/main">
+            <a:defPPr algn="l">
+              <a:defRPr sz="1875" b="1">
+                <a:solidFill>
+                  <a:srgbClr val="12263B"/>
+                </a:solidFill>
+                <a:latin typeface="Microsoft YaHei"/>
+                <a:ea typeface="Microsoft YaHei"/>
+                <a:cs typeface="Microsoft YaHei"/>
+              </a:defRPr>
+            </a:defPPr>
+          </a:lstStyle>
+          <a:p xmlns:a="http://schemas.openxmlformats.org/drawingml/2006/main">
+            <a:pPr algn="l">
+              <a:defRPr sz="1875" b="1">
+                <a:solidFill>
+                  <a:srgbClr val="12263B"/>
+                </a:solidFill>
+                <a:latin typeface="Microsoft YaHei"/>
+                <a:ea typeface="Microsoft YaHei"/>
+                <a:cs typeface="Microsoft YaHei"/>
+              </a:defRPr>
+            </a:pPr>
+            <a:r>
+              <a:rPr sz="1875" b="1">
+                <a:solidFill>
+                  <a:srgbClr val="12263B"/>
+                </a:solidFill>
+                <a:latin typeface="Microsoft YaHei"/>
+                <a:ea typeface="Microsoft YaHei"/>
+                <a:cs typeface="Microsoft YaHei"/>
+              </a:rPr>
+              <a:t>短淡出 5 毫秒，默认淡出一轮数据内完成；改图永远不跟数据处理抢线程。</a:t>
+            </a:r>
+          </a:p>
+        </p:txBody>
+      </p:sp>
+      <p:sp>
+        <p:nvSpPr>
+          <p:cNvPr id="34" name="object-407">
+            <a:extLst xmlns:a="http://schemas.openxmlformats.org/drawingml/2006/main">
+              <a:ext uri="{FF2B5EF4-FFF2-40B4-BE49-F238E27FC236}">
+                <a16:creationId xmlns:a16="http://schemas.microsoft.com/office/drawing/2014/main" id="{F5F47A77-95CB-497B-AF97-89D47C592B00}"/>
+              </a:ext>
+            </a:extLst>
+          </p:cNvPr>
+          <p:cNvSpPr>
+            <a:spLocks xmlns:a="http://schemas.openxmlformats.org/drawingml/2006/main" noGrp="1"/>
+          </p:cNvSpPr>
+          <p:nvPr/>
+        </p:nvSpPr>
+        <p:spPr>
+          <a:xfrm xmlns:a="http://schemas.openxmlformats.org/drawingml/2006/main">
+            <a:off x="609600" y="6334125"/>
+            <a:ext cx="10191750" cy="285750"/>
+          </a:xfrm>
+          <a:prstGeom xmlns:a="http://schemas.openxmlformats.org/drawingml/2006/main" prst="rect">
+            <a:avLst/>
+          </a:prstGeom>
+          <a:noFill xmlns:a="http://schemas.openxmlformats.org/drawingml/2006/main"/>
+          <a:ln xmlns:a="http://schemas.openxmlformats.org/drawingml/2006/main" w="0">
+            <a:noFill/>
+            <a:prstDash val="solid"/>
+          </a:ln>
+        </p:spPr>
+        <p:txBody>
+          <a:bodyPr xmlns:a="http://schemas.openxmlformats.org/drawingml/2006/main" wrap="none" lIns="0" tIns="0" rIns="0" bIns="0" anchor="ctr"/>
+          <a:lstStyle xmlns:a="http://schemas.openxmlformats.org/drawingml/2006/main">
+            <a:defPPr algn="l">
+              <a:defRPr sz="1275" b="0">
+                <a:solidFill>
+                  <a:srgbClr val="62768A"/>
+                </a:solidFill>
+                <a:latin typeface="Microsoft YaHei"/>
+                <a:ea typeface="Microsoft YaHei"/>
+                <a:cs typeface="Microsoft YaHei"/>
+              </a:defRPr>
+            </a:defPPr>
+          </a:lstStyle>
+          <a:p xmlns:a="http://schemas.openxmlformats.org/drawingml/2006/main">
+            <a:pPr algn="l">
+              <a:defRPr sz="1275" b="0">
+                <a:solidFill>
+                  <a:srgbClr val="62768A"/>
+                </a:solidFill>
+                <a:latin typeface="Microsoft YaHei"/>
+                <a:ea typeface="Microsoft YaHei"/>
+                <a:cs typeface="Microsoft YaHei"/>
+              </a:defRPr>
+            </a:pPr>
+            <a:r>
+              <a:rPr sz="1275" b="0">
+                <a:solidFill>
+                  <a:srgbClr val="62768A"/>
+                </a:solidFill>
+                <a:latin typeface="Microsoft YaHei"/>
+                <a:ea typeface="Microsoft YaHei"/>
+                <a:cs typeface="Microsoft YaHei"/>
+              </a:rPr>
+              <a:t>队列与线程为结构示意。</a:t>
+            </a:r>
+          </a:p>
+        </p:txBody>
+      </p:sp>
+      <p:sp>
+        <p:nvSpPr>
+          <p:cNvPr id="35" name="object-408">
+            <a:extLst xmlns:a="http://schemas.openxmlformats.org/drawingml/2006/main">
+              <a:ext uri="{FF2B5EF4-FFF2-40B4-BE49-F238E27FC236}">
+                <a16:creationId xmlns:a16="http://schemas.microsoft.com/office/drawing/2014/main" id="{BD5FF144-65AD-4707-80FA-97F2D2B79889}"/>
+              </a:ext>
+            </a:extLst>
+          </p:cNvPr>
+          <p:cNvSpPr>
+            <a:spLocks xmlns:a="http://schemas.openxmlformats.org/drawingml/2006/main" noGrp="1"/>
+          </p:cNvSpPr>
+          <p:nvPr/>
+        </p:nvSpPr>
+        <p:spPr>
+          <a:xfrm xmlns:a="http://schemas.openxmlformats.org/drawingml/2006/main">
+            <a:off x="11020425" y="6334125"/>
+            <a:ext cx="542925" cy="285750"/>
+          </a:xfrm>
+          <a:prstGeom xmlns:a="http://schemas.openxmlformats.org/drawingml/2006/main" prst="rect">
+            <a:avLst/>
+          </a:prstGeom>
+          <a:noFill xmlns:a="http://schemas.openxmlformats.org/drawingml/2006/main"/>
+          <a:ln xmlns:a="http://schemas.openxmlformats.org/drawingml/2006/main" w="0">
+            <a:noFill/>
+            <a:prstDash val="solid"/>
+          </a:ln>
+        </p:spPr>
+        <p:txBody>
+          <a:bodyPr xmlns:a="http://schemas.openxmlformats.org/drawingml/2006/main" wrap="none" lIns="0" tIns="0" rIns="0" bIns="0" anchor="ctr"/>
+          <a:lstStyle xmlns:a="http://schemas.openxmlformats.org/drawingml/2006/main">
+            <a:defPPr algn="r">
+              <a:defRPr sz="1425" b="0">
+                <a:solidFill>
+                  <a:srgbClr val="62768A"/>
+                </a:solidFill>
+                <a:latin typeface="Microsoft YaHei"/>
+                <a:ea typeface="Microsoft YaHei"/>
+                <a:cs typeface="Microsoft YaHei"/>
+              </a:defRPr>
+            </a:defPPr>
+          </a:lstStyle>
+          <a:p xmlns:a="http://schemas.openxmlformats.org/drawingml/2006/main">
+            <a:pPr algn="r">
+              <a:defRPr sz="1425" b="0">
+                <a:solidFill>
+                  <a:srgbClr val="62768A"/>
+                </a:solidFill>
+                <a:latin typeface="Microsoft YaHei"/>
+                <a:ea typeface="Microsoft YaHei"/>
+                <a:cs typeface="Microsoft YaHei"/>
+              </a:defRPr>
+            </a:pPr>
+            <a:r>
+              <a:rPr sz="1425" b="0">
+                <a:solidFill>
+                  <a:srgbClr val="62768A"/>
+                </a:solidFill>
+                <a:latin typeface="Microsoft YaHei"/>
+                <a:ea typeface="Microsoft YaHei"/>
+                <a:cs typeface="Microsoft YaHei"/>
+              </a:rPr>
+              <a:t>06</a:t>
+            </a:r>
+          </a:p>
+        </p:txBody>
+      </p:sp>
+    </p:spTree>
+    <p:extLst>
+      <p:ext uri="{BB962C8B-B14F-4D97-AF65-F5344CB8AC3E}">
+        <p14:creationId xmlns:p14="http://schemas.microsoft.com/office/powerpoint/2010/main" val="76323697"/>
+      </p:ext>
+    </p:extLst>
+  </p:cSld>
+  <p:timing>
+    <p:tnLst>
+      <p:par>
+        <p:cTn id="1" dur="indefinite" restart="never" nodeType="tmRoot">
+          <p:childTnLst>
+            <p:seq concurrent="1" nextAc="seek">
+              <p:cTn id="2" dur="indefinite" nodeType="mainSeq">
+                <p:childTnLst>
+                  <p:par>
+                    <p:cTn id="3" fill="hold">
+                      <p:stCondLst>
+                        <p:cond delay="indefinite"/>
+                      </p:stCondLst>
+                      <p:childTnLst>
+                        <p:par>
+                          <p:cTn id="4" fill="hold">
+                            <p:stCondLst>
+                              <p:cond delay="0"/>
+                            </p:stCondLst>
+                            <p:childTnLst>
+                              <p:par>
+                                <p:cTn id="5" presetID="1" presetClass="entr" presetSubtype="0" fill="hold" grpId="1" nodeType="clickEffect">
+                                  <p:stCondLst>
+                                    <p:cond delay="0"/>
+                                  </p:stCondLst>
+                                  <p:childTnLst>
+                                    <p:set>
+                                      <p:cBhvr>
+                                        <p:cTn id="6" dur="1" fill="hold">
+                                          <p:stCondLst>
+                                            <p:cond delay="0"/>
+                                          </p:stCondLst>
+                                        </p:cTn>
+                                        <p:tgtEl>
+                                          <p:spTgt spid="13"/>
+                                        </p:tgtEl>
+                                        <p:attrNameLst>
+                                          <p:attrName>style.visibility</p:attrName>
+                                        </p:attrNameLst>
+                                      </p:cBhvr>
+                                      <p:to>
+                                        <p:strVal val="visible"/>
+                                      </p:to>
+                                    </p:set>
+                                  </p:childTnLst>
+                                </p:cTn>
+                              </p:par>
+                              <p:par>
+                                <p:cTn id="7" presetID="1" presetClass="entr" presetSubtype="0" fill="hold" grpId="1" nodeType="withEffect">
+                                  <p:stCondLst>
+                                    <p:cond delay="0"/>
+                                  </p:stCondLst>
+                                  <p:childTnLst>
+                                    <p:set>
+                                      <p:cBhvr>
+                                        <p:cTn id="8" dur="1" fill="hold">
+                                          <p:stCondLst>
+                                            <p:cond delay="0"/>
+                                          </p:stCondLst>
+                                        </p:cTn>
+                                        <p:tgtEl>
+                                          <p:spTgt spid="14"/>
+                                        </p:tgtEl>
+                                        <p:attrNameLst>
+                                          <p:attrName>style.visibility</p:attrName>
+                                        </p:attrNameLst>
+                                      </p:cBhvr>
+                                      <p:to>
+                                        <p:strVal val="visible"/>
+                                      </p:to>
+                                    </p:set>
+                                  </p:childTnLst>
+                                </p:cTn>
+                              </p:par>
+                              <p:par>
+                                <p:cTn id="9" presetID="1" presetClass="entr" presetSubtype="0" fill="hold" grpId="1" nodeType="withEffect">
+                                  <p:stCondLst>
+                                    <p:cond delay="0"/>
+                                  </p:stCondLst>
+                                  <p:childTnLst>
+                                    <p:set>
+                                      <p:cBhvr>
+                                        <p:cTn id="10" dur="1" fill="hold">
+                                          <p:stCondLst>
+                                            <p:cond delay="0"/>
+                                          </p:stCondLst>
+                                        </p:cTn>
+                                        <p:tgtEl>
+                                          <p:spTgt spid="15"/>
+                                        </p:tgtEl>
+                                        <p:attrNameLst>
+                                          <p:attrName>style.visibility</p:attrName>
+                                        </p:attrNameLst>
+                                      </p:cBhvr>
+                                      <p:to>
+                                        <p:strVal val="visible"/>
+                                      </p:to>
+                                    </p:set>
+                                  </p:childTnLst>
+                                </p:cTn>
+                              </p:par>
+                              <p:par>
+                                <p:cTn id="11" presetID="1" presetClass="entr" presetSubtype="0" fill="hold" grpId="1" nodeType="withEffect">
+                                  <p:stCondLst>
+                                    <p:cond delay="0"/>
+                                  </p:stCondLst>
+                                  <p:childTnLst>
+                                    <p:set>
+                                      <p:cBhvr>
+                                        <p:cTn id="12" dur="1" fill="hold">
+                                          <p:stCondLst>
+                                            <p:cond delay="0"/>
+                                          </p:stCondLst>
+                                        </p:cTn>
+                                        <p:tgtEl>
+                                          <p:spTgt spid="16"/>
+                                        </p:tgtEl>
+                                        <p:attrNameLst>
+                                          <p:attrName>style.visibility</p:attrName>
+                                        </p:attrNameLst>
+                                      </p:cBhvr>
+                                      <p:to>
+                                        <p:strVal val="visible"/>
+                                      </p:to>
+                                    </p:set>
+                                  </p:childTnLst>
+                                </p:cTn>
+                              </p:par>
+                              <p:par>
+                                <p:cTn id="13" presetID="1" presetClass="entr" presetSubtype="0" fill="hold" grpId="1" nodeType="withEffect">
+                                  <p:stCondLst>
+                                    <p:cond delay="0"/>
+                                  </p:stCondLst>
+                                  <p:childTnLst>
+                                    <p:set>
+                                      <p:cBhvr>
+                                        <p:cTn id="14" dur="1" fill="hold">
+                                          <p:stCondLst>
+                                            <p:cond delay="0"/>
+                                          </p:stCondLst>
+                                        </p:cTn>
+                                        <p:tgtEl>
+                                          <p:spTgt spid="17"/>
+                                        </p:tgtEl>
+                                        <p:attrNameLst>
+                                          <p:attrName>style.visibility</p:attrName>
+                                        </p:attrNameLst>
+                                      </p:cBhvr>
+                                      <p:to>
+                                        <p:strVal val="visible"/>
+                                      </p:to>
+                                    </p:set>
+                                  </p:childTnLst>
+                                </p:cTn>
+                              </p:par>
+                              <p:par>
+                                <p:cTn id="15" presetID="1" presetClass="entr" presetSubtype="0" fill="hold" grpId="1" nodeType="withEffect">
+                                  <p:stCondLst>
+                                    <p:cond delay="0"/>
+                                  </p:stCondLst>
+                                  <p:childTnLst>
+                                    <p:set>
+                                      <p:cBhvr>
+                                        <p:cTn id="16" dur="1" fill="hold">
+                                          <p:stCondLst>
+                                            <p:cond delay="0"/>
+                                          </p:stCondLst>
+                                        </p:cTn>
+                                        <p:tgtEl>
+                                          <p:spTgt spid="18"/>
+                                        </p:tgtEl>
+                                        <p:attrNameLst>
+                                          <p:attrName>style.visibility</p:attrName>
+                                        </p:attrNameLst>
+                                      </p:cBhvr>
+                                      <p:to>
+                                        <p:strVal val="visible"/>
+                                      </p:to>
+                                    </p:set>
+                                  </p:childTnLst>
+                                </p:cTn>
+                              </p:par>
+                              <p:par>
+                                <p:cTn id="17" presetID="1" presetClass="entr" presetSubtype="0" fill="hold" grpId="1" nodeType="withEffect">
+                                  <p:stCondLst>
+                                    <p:cond delay="0"/>
+                                  </p:stCondLst>
+                                  <p:childTnLst>
+                                    <p:set>
+                                      <p:cBhvr>
+                                        <p:cTn id="18" dur="1" fill="hold">
+                                          <p:stCondLst>
+                                            <p:cond delay="0"/>
+                                          </p:stCondLst>
+                                        </p:cTn>
+                                        <p:tgtEl>
+                                          <p:spTgt spid="19"/>
+                                        </p:tgtEl>
+                                        <p:attrNameLst>
+                                          <p:attrName>style.visibility</p:attrName>
+                                        </p:attrNameLst>
+                                      </p:cBhvr>
+                                      <p:to>
+                                        <p:strVal val="visible"/>
+                                      </p:to>
+                                    </p:set>
+                                  </p:childTnLst>
+                                </p:cTn>
+                              </p:par>
+                              <p:par>
+                                <p:cTn id="19" presetID="1" presetClass="entr" presetSubtype="0" fill="hold" grpId="1" nodeType="withEffect">
+                                  <p:stCondLst>
+                                    <p:cond delay="0"/>
+                                  </p:stCondLst>
+                                  <p:childTnLst>
+                                    <p:set>
+                                      <p:cBhvr>
+                                        <p:cTn id="20" dur="1" fill="hold">
+                                          <p:stCondLst>
+                                            <p:cond delay="0"/>
+                                          </p:stCondLst>
+                                        </p:cTn>
+                                        <p:tgtEl>
+                                          <p:spTgt spid="20"/>
+                                        </p:tgtEl>
+                                        <p:attrNameLst>
+                                          <p:attrName>style.visibility</p:attrName>
+                                        </p:attrNameLst>
+                                      </p:cBhvr>
+                                      <p:to>
+                                        <p:strVal val="visible"/>
+                                      </p:to>
+                                    </p:set>
+                                  </p:childTnLst>
+                                </p:cTn>
+                              </p:par>
+                              <p:par>
+                                <p:cTn id="21" presetID="1" presetClass="entr" presetSubtype="0" fill="hold" grpId="1" nodeType="withEffect">
+                                  <p:stCondLst>
+                                    <p:cond delay="0"/>
+                                  </p:stCondLst>
+                                  <p:childTnLst>
+                                    <p:set>
+                                      <p:cBhvr>
+                                        <p:cTn id="22" dur="1" fill="hold">
+                                          <p:stCondLst>
+                                            <p:cond delay="0"/>
+                                          </p:stCondLst>
+                                        </p:cTn>
+                                        <p:tgtEl>
+                                          <p:spTgt spid="21"/>
+                                        </p:tgtEl>
+                                        <p:attrNameLst>
+                                          <p:attrName>style.visibility</p:attrName>
+                                        </p:attrNameLst>
+                                      </p:cBhvr>
+                                      <p:to>
+                                        <p:strVal val="visible"/>
+                                      </p:to>
+                                    </p:set>
+                                  </p:childTnLst>
+                                </p:cTn>
+                              </p:par>
+                              <p:par>
+                                <p:cTn id="23" presetID="1" presetClass="entr" presetSubtype="0" fill="hold" grpId="1" nodeType="withEffect">
+                                  <p:stCondLst>
+                                    <p:cond delay="0"/>
+                                  </p:stCondLst>
+                                  <p:childTnLst>
+                                    <p:set>
+                                      <p:cBhvr>
+                                        <p:cTn id="24" dur="1" fill="hold">
+                                          <p:stCondLst>
+                                            <p:cond delay="0"/>
+                                          </p:stCondLst>
+                                        </p:cTn>
+                                        <p:tgtEl>
+                                          <p:spTgt spid="22"/>
+                                        </p:tgtEl>
+                                        <p:attrNameLst>
+                                          <p:attrName>style.visibility</p:attrName>
+                                        </p:attrNameLst>
+                                      </p:cBhvr>
+                                      <p:to>
+                                        <p:strVal val="visible"/>
+                                      </p:to>
+                                    </p:set>
+                                  </p:childTnLst>
+                                </p:cTn>
+                              </p:par>
+                              <p:par>
+                                <p:cTn id="25" presetID="1" presetClass="entr" presetSubtype="0" fill="hold" grpId="1" nodeType="withEffect">
+                                  <p:stCondLst>
+                                    <p:cond delay="0"/>
+                                  </p:stCondLst>
+                                  <p:childTnLst>
+                                    <p:set>
+                                      <p:cBhvr>
+                                        <p:cTn id="26" dur="1" fill="hold">
+                                          <p:stCondLst>
+                                            <p:cond delay="0"/>
+                                          </p:stCondLst>
+                                        </p:cTn>
+                                        <p:tgtEl>
+                                          <p:spTgt spid="23"/>
+                                        </p:tgtEl>
+                                        <p:attrNameLst>
+                                          <p:attrName>style.visibility</p:attrName>
+                                        </p:attrNameLst>
+                                      </p:cBhvr>
+                                      <p:to>
+                                        <p:strVal val="visible"/>
+                                      </p:to>
+                                    </p:set>
+                                  </p:childTnLst>
+                                </p:cTn>
+                              </p:par>
+                              <p:par>
+                                <p:cTn id="27" presetID="1" presetClass="entr" presetSubtype="0" fill="hold" grpId="1" nodeType="withEffect">
+                                  <p:stCondLst>
+                                    <p:cond delay="0"/>
+                                  </p:stCondLst>
+                                  <p:childTnLst>
+                                    <p:set>
+                                      <p:cBhvr>
+                                        <p:cTn id="28" dur="1" fill="hold">
+                                          <p:stCondLst>
+                                            <p:cond delay="0"/>
+                                          </p:stCondLst>
+                                        </p:cTn>
+                                        <p:tgtEl>
+                                          <p:spTgt spid="24"/>
+                                        </p:tgtEl>
+                                        <p:attrNameLst>
+                                          <p:attrName>style.visibility</p:attrName>
+                                        </p:attrNameLst>
+                                      </p:cBhvr>
+                                      <p:to>
+                                        <p:strVal val="visible"/>
+                                      </p:to>
+                                    </p:set>
+                                  </p:childTnLst>
+                                </p:cTn>
+                              </p:par>
+                              <p:par>
+                                <p:cTn id="29" presetID="1" presetClass="entr" presetSubtype="0" fill="hold" grpId="1" nodeType="withEffect">
+                                  <p:stCondLst>
+                                    <p:cond delay="0"/>
+                                  </p:stCondLst>
+                                  <p:childTnLst>
+                                    <p:set>
+                                      <p:cBhvr>
+                                        <p:cTn id="30" dur="1" fill="hold">
+                                          <p:stCondLst>
+                                            <p:cond delay="0"/>
+                                          </p:stCondLst>
+                                        </p:cTn>
+                                        <p:tgtEl>
+                                          <p:spTgt spid="25"/>
+                                        </p:tgtEl>
+                                        <p:attrNameLst>
+                                          <p:attrName>style.visibility</p:attrName>
+                                        </p:attrNameLst>
+                                      </p:cBhvr>
+                                      <p:to>
+                                        <p:strVal val="visible"/>
+                                      </p:to>
+                                    </p:set>
+                                  </p:childTnLst>
+                                </p:cTn>
+                              </p:par>
+                              <p:par>
+                                <p:cTn id="31" presetID="1" presetClass="entr" presetSubtype="0" fill="hold" grpId="1" nodeType="withEffect">
+                                  <p:stCondLst>
+                                    <p:cond delay="0"/>
+                                  </p:stCondLst>
+                                  <p:childTnLst>
+                                    <p:set>
+                                      <p:cBhvr>
+                                        <p:cTn id="32" dur="1" fill="hold">
+                                          <p:stCondLst>
+                                            <p:cond delay="0"/>
+                                          </p:stCondLst>
+                                        </p:cTn>
+                                        <p:tgtEl>
+                                          <p:spTgt spid="26"/>
+                                        </p:tgtEl>
+                                        <p:attrNameLst>
+                                          <p:attrName>style.visibility</p:attrName>
+                                        </p:attrNameLst>
+                                      </p:cBhvr>
+                                      <p:to>
+                                        <p:strVal val="visible"/>
+                                      </p:to>
+                                    </p:set>
+                                  </p:childTnLst>
+                                </p:cTn>
+                              </p:par>
+                              <p:par>
+                                <p:cTn id="33" presetID="1" presetClass="entr" presetSubtype="0" fill="hold" grpId="1" nodeType="withEffect">
+                                  <p:stCondLst>
+                                    <p:cond delay="0"/>
+                                  </p:stCondLst>
+                                  <p:childTnLst>
+                                    <p:set>
+                                      <p:cBhvr>
+                                        <p:cTn id="34" dur="1" fill="hold">
+                                          <p:stCondLst>
+                                            <p:cond delay="0"/>
+                                          </p:stCondLst>
+                                        </p:cTn>
+                                        <p:tgtEl>
+                                          <p:spTgt spid="27"/>
+                                        </p:tgtEl>
+                                        <p:attrNameLst>
+                                          <p:attrName>style.visibility</p:attrName>
+                                        </p:attrNameLst>
+                                      </p:cBhvr>
+                                      <p:to>
+                                        <p:strVal val="visible"/>
+                                      </p:to>
+                                    </p:set>
+                                  </p:childTnLst>
+                                </p:cTn>
+                              </p:par>
+                              <p:par>
+                                <p:cTn id="35" presetID="1" presetClass="entr" presetSubtype="0" fill="hold" grpId="1" nodeType="withEffect">
+                                  <p:stCondLst>
+                                    <p:cond delay="0"/>
+                                  </p:stCondLst>
+                                  <p:childTnLst>
+                                    <p:set>
+                                      <p:cBhvr>
+                                        <p:cTn id="36" dur="1" fill="hold">
+                                          <p:stCondLst>
+                                            <p:cond delay="0"/>
+                                          </p:stCondLst>
+                                        </p:cTn>
+                                        <p:tgtEl>
+                                          <p:spTgt spid="28"/>
+                                        </p:tgtEl>
+                                        <p:attrNameLst>
+                                          <p:attrName>style.visibility</p:attrName>
+                                        </p:attrNameLst>
+                                      </p:cBhvr>
+                                      <p:to>
+                                        <p:strVal val="visible"/>
+                                      </p:to>
+                                    </p:set>
+                                  </p:childTnLst>
+                                </p:cTn>
+                              </p:par>
+                              <p:par>
+                                <p:cTn id="37" presetID="1" presetClass="entr" presetSubtype="0" fill="hold" grpId="1" nodeType="withEffect">
+                                  <p:stCondLst>
+                                    <p:cond delay="0"/>
+                                  </p:stCondLst>
+                                  <p:childTnLst>
+                                    <p:set>
+                                      <p:cBhvr>
+                                        <p:cTn id="38" dur="1" fill="hold">
+                                          <p:stCondLst>
+                                            <p:cond delay="0"/>
+                                          </p:stCondLst>
+                                        </p:cTn>
+                                        <p:tgtEl>
+                                          <p:spTgt spid="29"/>
+                                        </p:tgtEl>
+                                        <p:attrNameLst>
+                                          <p:attrName>style.visibility</p:attrName>
+                                        </p:attrNameLst>
+                                      </p:cBhvr>
+                                      <p:to>
+                                        <p:strVal val="visible"/>
+                                      </p:to>
+                                    </p:set>
+                                  </p:childTnLst>
+                                </p:cTn>
+                              </p:par>
+                              <p:par>
+                                <p:cTn id="39" presetID="1" presetClass="entr" presetSubtype="0" fill="hold" grpId="1" nodeType="withEffect">
+                                  <p:stCondLst>
+                                    <p:cond delay="0"/>
+                                  </p:stCondLst>
+                                  <p:childTnLst>
+                                    <p:set>
+                                      <p:cBhvr>
+                                        <p:cTn id="40" dur="1" fill="hold">
+                                          <p:stCondLst>
+                                            <p:cond delay="0"/>
+                                          </p:stCondLst>
+                                        </p:cTn>
+                                        <p:tgtEl>
+                                          <p:spTgt spid="30"/>
+                                        </p:tgtEl>
+                                        <p:attrNameLst>
+                                          <p:attrName>style.visibility</p:attrName>
+                                        </p:attrNameLst>
+                                      </p:cBhvr>
+                                      <p:to>
+                                        <p:strVal val="visible"/>
+                                      </p:to>
+                                    </p:set>
+                                  </p:childTnLst>
+                                </p:cTn>
+                              </p:par>
+                            </p:childTnLst>
+                          </p:cTn>
+                        </p:par>
+                      </p:childTnLst>
+                    </p:cTn>
+                  </p:par>
+                  <p:par>
+                    <p:cTn id="41" fill="hold">
+                      <p:stCondLst>
+                        <p:cond delay="indefinite"/>
+                      </p:stCondLst>
+                      <p:childTnLst>
+                        <p:par>
+                          <p:cTn id="42" fill="hold">
+                            <p:stCondLst>
+                              <p:cond delay="0"/>
+                            </p:stCondLst>
+                            <p:childTnLst>
+                              <p:par>
+                                <p:cTn id="43" presetID="1" presetClass="entr" presetSubtype="0" fill="hold" grpId="2" nodeType="clickEffect">
+                                  <p:stCondLst>
+                                    <p:cond delay="0"/>
+                                  </p:stCondLst>
+                                  <p:childTnLst>
+                                    <p:set>
+                                      <p:cBhvr>
+                                        <p:cTn id="44" dur="1" fill="hold">
+                                          <p:stCondLst>
+                                            <p:cond delay="0"/>
+                                          </p:stCondLst>
+                                        </p:cTn>
+                                        <p:tgtEl>
+                                          <p:spTgt spid="31"/>
+                                        </p:tgtEl>
+                                        <p:attrNameLst>
+                                          <p:attrName>style.visibility</p:attrName>
+                                        </p:attrNameLst>
+                                      </p:cBhvr>
+                                      <p:to>
+                                        <p:strVal val="visible"/>
+                                      </p:to>
+                                    </p:set>
+                                  </p:childTnLst>
+                                </p:cTn>
+                              </p:par>
+                              <p:par>
+                                <p:cTn id="45" presetID="1" presetClass="entr" presetSubtype="0" fill="hold" grpId="2" nodeType="withEffect">
+                                  <p:stCondLst>
+                                    <p:cond delay="0"/>
+                                  </p:stCondLst>
+                                  <p:childTnLst>
+                                    <p:set>
+                                      <p:cBhvr>
+                                        <p:cTn id="46" dur="1" fill="hold">
+                                          <p:stCondLst>
+                                            <p:cond delay="0"/>
+                                          </p:stCondLst>
+                                        </p:cTn>
+                                        <p:tgtEl>
+                                          <p:spTgt spid="32"/>
+                                        </p:tgtEl>
+                                        <p:attrNameLst>
+                                          <p:attrName>style.visibility</p:attrName>
+                                        </p:attrNameLst>
+                                      </p:cBhvr>
+                                      <p:to>
+                                        <p:strVal val="visible"/>
+                                      </p:to>
+                                    </p:set>
+                                  </p:childTnLst>
+                                </p:cTn>
+                              </p:par>
+                              <p:par>
+                                <p:cTn id="47" presetID="1" presetClass="entr" presetSubtype="0" fill="hold" grpId="2" nodeType="withEffect">
+                                  <p:stCondLst>
+                                    <p:cond delay="0"/>
+                                  </p:stCondLst>
+                                  <p:childTnLst>
+                                    <p:set>
+                                      <p:cBhvr>
+                                        <p:cTn id="48" dur="1" fill="hold">
+                                          <p:stCondLst>
+                                            <p:cond delay="0"/>
+                                          </p:stCondLst>
+                                        </p:cTn>
+                                        <p:tgtEl>
+                                          <p:spTgt spid="33"/>
+                                        </p:tgtEl>
+                                        <p:attrNameLst>
+                                          <p:attrName>style.visibility</p:attrName>
+                                        </p:attrNameLst>
+                                      </p:cBhvr>
+                                      <p:to>
+                                        <p:strVal val="visible"/>
+                                      </p:to>
+                                    </p:set>
+                                  </p:childTnLst>
+                                </p:cTn>
+                              </p:par>
+                            </p:childTnLst>
+                          </p:cTn>
+                        </p:par>
+                      </p:childTnLst>
+                    </p:cTn>
+                  </p:par>
+                </p:childTnLst>
+              </p:cTn>
+              <p:prevCondLst>
+                <p:cond evt="onPrev" delay="0">
+                  <p:tgtEl>
+                    <p:sldTgt/>
+                  </p:tgtEl>
+                </p:cond>
+              </p:prevCondLst>
+              <p:nextCondLst>
+                <p:cond evt="onNext" delay="0">
+                  <p:tgtEl>
+                    <p:sldTgt/>
+                  </p:tgtEl>
+                </p:cond>
+              </p:nextCondLst>
+            </p:seq>
+          </p:childTnLst>
+        </p:cTn>
+      </p:par>
+    </p:tnLst>
+    <p:bldLst>
+      <p:bldP spid="13" grpId="1"/>
+      <p:bldP spid="14" grpId="1"/>
+      <p:bldP spid="15" grpId="1"/>
+      <p:bldP spid="16" grpId="1"/>
+      <p:bldP spid="17" grpId="1"/>
+      <p:bldP spid="18" grpId="1"/>
+      <p:bldP spid="19" grpId="1"/>
+      <p:bldP spid="20" grpId="1"/>
+      <p:bldP spid="21" grpId="1"/>
+      <p:bldP spid="22" grpId="1"/>
+      <p:bldP spid="23" grpId="1"/>
+      <p:bldP spid="24" grpId="1"/>
+      <p:bldP spid="25" grpId="1"/>
+      <p:bldP spid="26" grpId="1"/>
+      <p:bldP spid="27" grpId="1"/>
+      <p:bldP spid="28" grpId="1"/>
+      <p:bldP spid="29" grpId="1"/>
+      <p:bldP spid="30" grpId="1"/>
+      <p:bldP spid="31" grpId="2"/>
+      <p:bldP spid="32" grpId="2"/>
+      <p:bldP spid="33" grpId="2"/>
+    </p:bldLst>
+  </p:timing>
+</p:sld>
+</file>
+
+<file path=ppt/slides/slide7.xml><?xml version="1.0" encoding="utf-8"?>
+<p:sld xmlns:p="http://schemas.openxmlformats.org/presentationml/2006/main">
+  <p:cSld>
+    <p:bg>
+      <p:bgPr>
+        <a:solidFill xmlns:a="http://schemas.openxmlformats.org/drawingml/2006/main">
+          <a:srgbClr val="F7F9FC"/>
+        </a:solidFill>
+      </p:bgPr>
+    </p:bg>
+    <p:spTree>
+      <p:nvGrpSpPr>
+        <p:cNvPr id="1" name=""/>
+        <p:cNvGrpSpPr/>
+        <p:nvPr/>
+      </p:nvGrpSpPr>
+      <p:grpSpPr>
+        <a:xfrm xmlns:a="http://schemas.openxmlformats.org/drawingml/2006/main"/>
+      </p:grpSpPr>
+      <p:sp>
+        <p:nvSpPr>
+          <p:cNvPr id="24" name="object-409">
+            <a:extLst xmlns:a="http://schemas.openxmlformats.org/drawingml/2006/main">
+              <a:ext uri="{FF2B5EF4-FFF2-40B4-BE49-F238E27FC236}">
+                <a16:creationId xmlns:a16="http://schemas.microsoft.com/office/drawing/2014/main" id="{74B1C9D1-5E4E-41F3-978D-2AAF77B38562}"/>
+              </a:ext>
+            </a:extLst>
+          </p:cNvPr>
+          <p:cNvSpPr>
+            <a:spLocks xmlns:a="http://schemas.openxmlformats.org/drawingml/2006/main" noGrp="1"/>
+          </p:cNvSpPr>
+          <p:nvPr/>
+        </p:nvSpPr>
+        <p:spPr>
+          <a:xfrm xmlns:a="http://schemas.openxmlformats.org/drawingml/2006/main">
+            <a:off x="609600" y="457200"/>
+            <a:ext cx="10953750" cy="666750"/>
+          </a:xfrm>
+          <a:prstGeom xmlns:a="http://schemas.openxmlformats.org/drawingml/2006/main" prst="rect">
+            <a:avLst/>
+          </a:prstGeom>
+          <a:noFill xmlns:a="http://schemas.openxmlformats.org/drawingml/2006/main"/>
+          <a:ln xmlns:a="http://schemas.openxmlformats.org/drawingml/2006/main" w="0">
+            <a:noFill/>
+            <a:prstDash val="solid"/>
+          </a:ln>
+        </p:spPr>
+        <p:txBody>
+          <a:bodyPr xmlns:a="http://schemas.openxmlformats.org/drawingml/2006/main" wrap="none" lIns="0" tIns="0" rIns="0" bIns="0" anchor="ctr"/>
+          <a:lstStyle xmlns:a="http://schemas.openxmlformats.org/drawingml/2006/main">
+            <a:defPPr algn="l">
+              <a:defRPr sz="3150" b="1">
+                <a:solidFill>
+                  <a:srgbClr val="12263B"/>
+                </a:solidFill>
+                <a:latin typeface="Microsoft YaHei"/>
+                <a:ea typeface="Microsoft YaHei"/>
+                <a:cs typeface="Microsoft YaHei"/>
+              </a:defRPr>
+            </a:defPPr>
+          </a:lstStyle>
+          <a:p xmlns:a="http://schemas.openxmlformats.org/drawingml/2006/main">
+            <a:pPr algn="l">
+              <a:defRPr sz="3150" b="1">
+                <a:solidFill>
+                  <a:srgbClr val="12263B"/>
+                </a:solidFill>
+                <a:latin typeface="Microsoft YaHei"/>
+                <a:ea typeface="Microsoft YaHei"/>
+                <a:cs typeface="Microsoft YaHei"/>
+              </a:defRPr>
+            </a:pPr>
+            <a:r>
+              <a:rPr sz="3150" b="1">
+                <a:solidFill>
+                  <a:srgbClr val="12263B"/>
+                </a:solidFill>
+                <a:latin typeface="Microsoft YaHei"/>
+                <a:ea typeface="Microsoft YaHei"/>
+                <a:cs typeface="Microsoft YaHei"/>
+              </a:rPr>
+              <a:t>三个保证，落在代码的哪里？</a:t>
+            </a:r>
+          </a:p>
+        </p:txBody>
+      </p:sp>
+      <p:sp>
+        <p:nvSpPr>
+          <p:cNvPr id="2" name="object-410">
+            <a:extLst xmlns:a="http://schemas.openxmlformats.org/drawingml/2006/main">
+              <a:ext uri="{FF2B5EF4-FFF2-40B4-BE49-F238E27FC236}">
+                <a16:creationId xmlns:a16="http://schemas.microsoft.com/office/drawing/2014/main" id="{998B7F93-4F94-4B36-961A-9264AF9106B4}"/>
+              </a:ext>
+            </a:extLst>
+          </p:cNvPr>
+          <p:cNvSpPr>
+            <a:spLocks xmlns:a="http://schemas.openxmlformats.org/drawingml/2006/main" noGrp="1"/>
+          </p:cNvSpPr>
+          <p:nvPr/>
+        </p:nvSpPr>
+        <p:spPr>
+          <a:xfrm xmlns:a="http://schemas.openxmlformats.org/drawingml/2006/main">
+            <a:off x="609600" y="1295400"/>
+            <a:ext cx="10858500" cy="400050"/>
+          </a:xfrm>
+          <a:prstGeom xmlns:a="http://schemas.openxmlformats.org/drawingml/2006/main" prst="rect">
+            <a:avLst/>
+          </a:prstGeom>
+          <a:noFill xmlns:a="http://schemas.openxmlformats.org/drawingml/2006/main"/>
+          <a:ln xmlns:a="http://schemas.openxmlformats.org/drawingml/2006/main" w="0">
+            <a:noFill/>
+            <a:prstDash val="solid"/>
+          </a:ln>
+        </p:spPr>
+        <p:txBody>
+          <a:bodyPr xmlns:a="http://schemas.openxmlformats.org/drawingml/2006/main" wrap="none" lIns="0" tIns="0" rIns="0" bIns="0" anchor="ctr"/>
+          <a:lstStyle xmlns:a="http://schemas.openxmlformats.org/drawingml/2006/main">
+            <a:defPPr algn="l">
+              <a:defRPr sz="2025" b="0">
+                <a:solidFill>
+                  <a:srgbClr val="62768A"/>
+                </a:solidFill>
+                <a:latin typeface="Microsoft YaHei"/>
+                <a:ea typeface="Microsoft YaHei"/>
+                <a:cs typeface="Microsoft YaHei"/>
+              </a:defRPr>
+            </a:defPPr>
+          </a:lstStyle>
+          <a:p xmlns:a="http://schemas.openxmlformats.org/drawingml/2006/main">
+            <a:pPr algn="l">
+              <a:defRPr sz="2025" b="0">
+                <a:solidFill>
+                  <a:srgbClr val="62768A"/>
+                </a:solidFill>
+                <a:latin typeface="Microsoft YaHei"/>
+                <a:ea typeface="Microsoft YaHei"/>
+                <a:cs typeface="Microsoft YaHei"/>
+              </a:defRPr>
+            </a:pPr>
+            <a:r>
+              <a:rPr sz="2025" b="0">
+                <a:solidFill>
+                  <a:srgbClr val="62768A"/>
+                </a:solidFill>
+                <a:latin typeface="Microsoft YaHei"/>
+                <a:ea typeface="Microsoft YaHei"/>
+                <a:cs typeface="Microsoft YaHei"/>
+              </a:rPr>
+              <a:t>三个保证不是设计愿望，各有具体落点。</a:t>
+            </a:r>
+          </a:p>
+        </p:txBody>
+      </p:sp>
+      <p:sp>
+        <p:nvSpPr>
+          <p:cNvPr id="3" name="object-411">
+            <a:extLst xmlns:a="http://schemas.openxmlformats.org/drawingml/2006/main">
+              <a:ext uri="{FF2B5EF4-FFF2-40B4-BE49-F238E27FC236}">
+                <a16:creationId xmlns:a16="http://schemas.microsoft.com/office/drawing/2014/main" id="{73B6D7C9-FE5D-4A71-A84E-983D10C014DE}"/>
+              </a:ext>
+            </a:extLst>
+          </p:cNvPr>
+          <p:cNvSpPr>
+            <a:spLocks xmlns:a="http://schemas.openxmlformats.org/drawingml/2006/main" noGrp="1"/>
+          </p:cNvSpPr>
+          <p:nvPr/>
+        </p:nvSpPr>
+        <p:spPr>
+          <a:xfrm xmlns:a="http://schemas.openxmlformats.org/drawingml/2006/main">
+            <a:off x="2133600" y="1866900"/>
+            <a:ext cx="4572000" cy="304800"/>
+          </a:xfrm>
+          <a:prstGeom xmlns:a="http://schemas.openxmlformats.org/drawingml/2006/main" prst="rect">
+            <a:avLst/>
+          </a:prstGeom>
+          <a:noFill xmlns:a="http://schemas.openxmlformats.org/drawingml/2006/main"/>
+          <a:ln xmlns:a="http://schemas.openxmlformats.org/drawingml/2006/main" w="0">
+            <a:noFill/>
+            <a:prstDash val="solid"/>
+          </a:ln>
+        </p:spPr>
+        <p:txBody>
+          <a:bodyPr xmlns:a="http://schemas.openxmlformats.org/drawingml/2006/main" wrap="none" lIns="0" tIns="0" rIns="0" bIns="0" anchor="ctr"/>
+          <a:lstStyle xmlns:a="http://schemas.openxmlformats.org/drawingml/2006/main">
+            <a:defPPr algn="l">
+              <a:defRPr sz="1650" b="1">
+                <a:solidFill>
+                  <a:srgbClr val="62768A"/>
+                </a:solidFill>
+                <a:latin typeface="Microsoft YaHei"/>
+                <a:ea typeface="Microsoft YaHei"/>
+                <a:cs typeface="Microsoft YaHei"/>
+              </a:defRPr>
+            </a:defPPr>
+          </a:lstStyle>
+          <a:p xmlns:a="http://schemas.openxmlformats.org/drawingml/2006/main">
+            <a:pPr algn="l">
+              <a:defRPr sz="1650" b="1">
+                <a:solidFill>
+                  <a:srgbClr val="62768A"/>
+                </a:solidFill>
+                <a:latin typeface="Microsoft YaHei"/>
+                <a:ea typeface="Microsoft YaHei"/>
+                <a:cs typeface="Microsoft YaHei"/>
+              </a:defRPr>
+            </a:pPr>
+            <a:r>
+              <a:rPr sz="1650" b="1">
+                <a:solidFill>
+                  <a:srgbClr val="62768A"/>
+                </a:solidFill>
+                <a:latin typeface="Microsoft YaHei"/>
+                <a:ea typeface="Microsoft YaHei"/>
+                <a:cs typeface="Microsoft YaHei"/>
+              </a:rPr>
+              <a:t>引擎的保证</a:t>
+            </a:r>
+          </a:p>
+        </p:txBody>
+      </p:sp>
+      <p:sp>
+        <p:nvSpPr>
+          <p:cNvPr id="4" name="object-412">
+            <a:extLst xmlns:a="http://schemas.openxmlformats.org/drawingml/2006/main">
+              <a:ext uri="{FF2B5EF4-FFF2-40B4-BE49-F238E27FC236}">
+                <a16:creationId xmlns:a16="http://schemas.microsoft.com/office/drawing/2014/main" id="{42000E5C-4B36-4FDE-A3C6-B6AACC74DA3D}"/>
+              </a:ext>
+            </a:extLst>
+          </p:cNvPr>
+          <p:cNvSpPr>
+            <a:spLocks xmlns:a="http://schemas.openxmlformats.org/drawingml/2006/main" noGrp="1"/>
+          </p:cNvSpPr>
+          <p:nvPr/>
+        </p:nvSpPr>
+        <p:spPr>
+          <a:xfrm xmlns:a="http://schemas.openxmlformats.org/drawingml/2006/main">
+            <a:off x="6896100" y="1866900"/>
+            <a:ext cx="4762500" cy="304800"/>
+          </a:xfrm>
+          <a:prstGeom xmlns:a="http://schemas.openxmlformats.org/drawingml/2006/main" prst="rect">
+            <a:avLst/>
+          </a:prstGeom>
+          <a:noFill xmlns:a="http://schemas.openxmlformats.org/drawingml/2006/main"/>
+          <a:ln xmlns:a="http://schemas.openxmlformats.org/drawingml/2006/main" w="0">
+            <a:noFill/>
+            <a:prstDash val="solid"/>
+          </a:ln>
+        </p:spPr>
+        <p:txBody>
+          <a:bodyPr xmlns:a="http://schemas.openxmlformats.org/drawingml/2006/main" wrap="none" lIns="0" tIns="0" rIns="0" bIns="0" anchor="ctr"/>
+          <a:lstStyle xmlns:a="http://schemas.openxmlformats.org/drawingml/2006/main">
+            <a:defPPr algn="l">
+              <a:defRPr sz="1650" b="1">
+                <a:solidFill>
+                  <a:srgbClr val="62768A"/>
+                </a:solidFill>
+                <a:latin typeface="Microsoft YaHei"/>
+                <a:ea typeface="Microsoft YaHei"/>
+                <a:cs typeface="Microsoft YaHei"/>
+              </a:defRPr>
+            </a:defPPr>
+          </a:lstStyle>
+          <a:p xmlns:a="http://schemas.openxmlformats.org/drawingml/2006/main">
+            <a:pPr algn="l">
+              <a:defRPr sz="1650" b="1">
+                <a:solidFill>
+                  <a:srgbClr val="62768A"/>
+                </a:solidFill>
+                <a:latin typeface="Microsoft YaHei"/>
+                <a:ea typeface="Microsoft YaHei"/>
+                <a:cs typeface="Microsoft YaHei"/>
+              </a:defRPr>
+            </a:pPr>
+            <a:r>
+              <a:rPr sz="1650" b="1">
+                <a:solidFill>
+                  <a:srgbClr val="62768A"/>
+                </a:solidFill>
+                <a:latin typeface="Microsoft YaHei"/>
+                <a:ea typeface="Microsoft YaHei"/>
+                <a:cs typeface="Microsoft YaHei"/>
+              </a:rPr>
+              <a:t>代码里的落点</a:t>
+            </a:r>
+          </a:p>
+        </p:txBody>
+      </p:sp>
+      <p:sp>
+        <p:nvSpPr>
+          <p:cNvPr id="5" name="reveal1-object-413">
+            <a:extLst xmlns:a="http://schemas.openxmlformats.org/drawingml/2006/main">
+              <a:ext uri="{FF2B5EF4-FFF2-40B4-BE49-F238E27FC236}">
+                <a16:creationId xmlns:a16="http://schemas.microsoft.com/office/drawing/2014/main" id="{308625D7-B0E4-4058-AE9F-7F7AFB9D9A9F}"/>
+              </a:ext>
+            </a:extLst>
+          </p:cNvPr>
+          <p:cNvSpPr>
+            <a:spLocks xmlns:a="http://schemas.openxmlformats.org/drawingml/2006/main" noGrp="1"/>
+          </p:cNvSpPr>
+          <p:nvPr/>
+        </p:nvSpPr>
+        <p:spPr>
+          <a:xfrm xmlns:a="http://schemas.openxmlformats.org/drawingml/2006/main">
+            <a:off x="609600" y="2209800"/>
+            <a:ext cx="1333500" cy="381000"/>
+          </a:xfrm>
+          <a:prstGeom xmlns:a="http://schemas.openxmlformats.org/drawingml/2006/main" prst="rect">
+            <a:avLst/>
+          </a:prstGeom>
+          <a:noFill xmlns:a="http://schemas.openxmlformats.org/drawingml/2006/main"/>
+          <a:ln xmlns:a="http://schemas.openxmlformats.org/drawingml/2006/main" w="0">
+            <a:noFill/>
+            <a:prstDash val="solid"/>
+          </a:ln>
+        </p:spPr>
+        <p:txBody>
+          <a:bodyPr xmlns:a="http://schemas.openxmlformats.org/drawingml/2006/main" wrap="none" lIns="0" tIns="0" rIns="0" bIns="0" anchor="ctr"/>
+          <a:lstStyle xmlns:a="http://schemas.openxmlformats.org/drawingml/2006/main">
+            <a:defPPr algn="l">
+              <a:defRPr sz="2025" b="1">
+                <a:solidFill>
+                  <a:srgbClr val="C97835"/>
+                </a:solidFill>
+                <a:latin typeface="Microsoft YaHei"/>
+                <a:ea typeface="Microsoft YaHei"/>
+                <a:cs typeface="Microsoft YaHei"/>
+              </a:defRPr>
+            </a:defPPr>
+          </a:lstStyle>
+          <a:p xmlns:a="http://schemas.openxmlformats.org/drawingml/2006/main">
+            <a:pPr algn="l">
+              <a:defRPr sz="2025" b="1">
+                <a:solidFill>
+                  <a:srgbClr val="C97835"/>
+                </a:solidFill>
+                <a:latin typeface="Microsoft YaHei"/>
+                <a:ea typeface="Microsoft YaHei"/>
+                <a:cs typeface="Microsoft YaHei"/>
+              </a:defRPr>
+            </a:pPr>
+            <a:r>
+              <a:rPr sz="2025" b="1">
+                <a:solidFill>
+                  <a:srgbClr val="C97835"/>
+                </a:solidFill>
+                <a:latin typeface="Microsoft YaHei"/>
+                <a:ea typeface="Microsoft YaHei"/>
+                <a:cs typeface="Microsoft YaHei"/>
+              </a:rPr>
+              <a:t>暂停</a:t>
+            </a:r>
+          </a:p>
+        </p:txBody>
+      </p:sp>
+      <p:sp>
+        <p:nvSpPr>
+          <p:cNvPr id="6" name="reveal1-object-414">
+            <a:extLst xmlns:a="http://schemas.openxmlformats.org/drawingml/2006/main">
+              <a:ext uri="{FF2B5EF4-FFF2-40B4-BE49-F238E27FC236}">
+                <a16:creationId xmlns:a16="http://schemas.microsoft.com/office/drawing/2014/main" id="{9352D194-853B-463A-974A-BF35341A7AEB}"/>
+              </a:ext>
+            </a:extLst>
+          </p:cNvPr>
+          <p:cNvSpPr>
+            <a:spLocks xmlns:a="http://schemas.openxmlformats.org/drawingml/2006/main" noGrp="1"/>
+          </p:cNvSpPr>
+          <p:nvPr/>
+        </p:nvSpPr>
+        <p:spPr>
+          <a:xfrm xmlns:a="http://schemas.openxmlformats.org/drawingml/2006/main">
+            <a:off x="2133600" y="2171700"/>
+            <a:ext cx="4572000" cy="457200"/>
+          </a:xfrm>
+          <a:prstGeom xmlns:a="http://schemas.openxmlformats.org/drawingml/2006/main" prst="rect">
+            <a:avLst/>
+          </a:prstGeom>
+          <a:solidFill xmlns:a="http://schemas.openxmlformats.org/drawingml/2006/main">
+            <a:srgbClr val="12263B"/>
+          </a:solidFill>
+          <a:ln xmlns:a="http://schemas.openxmlformats.org/drawingml/2006/main" w="0">
+            <a:noFill/>
+            <a:prstDash val="solid"/>
+          </a:ln>
+        </p:spPr>
+      </p:sp>
+      <p:sp>
+        <p:nvSpPr>
+          <p:cNvPr id="7" name="reveal1-object-415">
+            <a:extLst xmlns:a="http://schemas.openxmlformats.org/drawingml/2006/main">
+              <a:ext uri="{FF2B5EF4-FFF2-40B4-BE49-F238E27FC236}">
+                <a16:creationId xmlns:a16="http://schemas.microsoft.com/office/drawing/2014/main" id="{BB36B07C-0CAD-4590-A5B9-075D1B7F8F77}"/>
+              </a:ext>
+            </a:extLst>
+          </p:cNvPr>
+          <p:cNvSpPr>
+            <a:spLocks xmlns:a="http://schemas.openxmlformats.org/drawingml/2006/main" noGrp="1"/>
+          </p:cNvSpPr>
+          <p:nvPr/>
+        </p:nvSpPr>
+        <p:spPr>
+          <a:xfrm xmlns:a="http://schemas.openxmlformats.org/drawingml/2006/main">
+            <a:off x="2247900" y="2228850"/>
+            <a:ext cx="4343400" cy="342900"/>
+          </a:xfrm>
+          <a:prstGeom xmlns:a="http://schemas.openxmlformats.org/drawingml/2006/main" prst="rect">
+            <a:avLst/>
+          </a:prstGeom>
+          <a:noFill xmlns:a="http://schemas.openxmlformats.org/drawingml/2006/main"/>
+          <a:ln xmlns:a="http://schemas.openxmlformats.org/drawingml/2006/main" w="0">
+            <a:noFill/>
+            <a:prstDash val="solid"/>
+          </a:ln>
+        </p:spPr>
+        <p:txBody>
+          <a:bodyPr xmlns:a="http://schemas.openxmlformats.org/drawingml/2006/main" wrap="none" lIns="0" tIns="0" rIns="0" bIns="0" anchor="ctr"/>
+          <a:lstStyle xmlns:a="http://schemas.openxmlformats.org/drawingml/2006/main">
+            <a:defPPr algn="ctr">
+              <a:defRPr sz="1650" b="1">
+                <a:solidFill>
+                  <a:srgbClr val="FFFFFF"/>
+                </a:solidFill>
+                <a:latin typeface="Microsoft YaHei"/>
+                <a:ea typeface="Microsoft YaHei"/>
+                <a:cs typeface="Microsoft YaHei"/>
+              </a:defRPr>
+            </a:defPPr>
+          </a:lstStyle>
+          <a:p xmlns:a="http://schemas.openxmlformats.org/drawingml/2006/main">
+            <a:pPr algn="ctr">
+              <a:defRPr sz="1650" b="1">
+                <a:solidFill>
+                  <a:srgbClr val="FFFFFF"/>
+                </a:solidFill>
+                <a:latin typeface="Microsoft YaHei"/>
+                <a:ea typeface="Microsoft YaHei"/>
+                <a:cs typeface="Microsoft YaHei"/>
+              </a:defRPr>
+            </a:pPr>
+            <a:r>
+              <a:rPr sz="1650" b="1">
+                <a:solidFill>
+                  <a:srgbClr val="FFFFFF"/>
+                </a:solidFill>
+                <a:latin typeface="Microsoft YaHei"/>
+                <a:ea typeface="Microsoft YaHei"/>
+                <a:cs typeface="Microsoft YaHei"/>
+              </a:rPr>
+              <a:t>渐变挂在增益节点上，逐帧执行</a:t>
+            </a:r>
+          </a:p>
+        </p:txBody>
+      </p:sp>
+      <p:sp>
+        <p:nvSpPr>
+          <p:cNvPr id="8" name="reveal1-object-416">
+            <a:extLst xmlns:a="http://schemas.openxmlformats.org/drawingml/2006/main">
+              <a:ext uri="{FF2B5EF4-FFF2-40B4-BE49-F238E27FC236}">
+                <a16:creationId xmlns:a16="http://schemas.microsoft.com/office/drawing/2014/main" id="{71936D66-B6EF-45D5-AE38-294066446E0F}"/>
+              </a:ext>
+            </a:extLst>
+          </p:cNvPr>
+          <p:cNvSpPr>
+            <a:spLocks xmlns:a="http://schemas.openxmlformats.org/drawingml/2006/main" noGrp="1"/>
+          </p:cNvSpPr>
+          <p:nvPr/>
+        </p:nvSpPr>
+        <p:spPr>
+          <a:xfrm xmlns:a="http://schemas.openxmlformats.org/drawingml/2006/main">
+            <a:off x="6896100" y="2209800"/>
+            <a:ext cx="4762500" cy="381000"/>
+          </a:xfrm>
+          <a:prstGeom xmlns:a="http://schemas.openxmlformats.org/drawingml/2006/main" prst="rect">
+            <a:avLst/>
+          </a:prstGeom>
+          <a:noFill xmlns:a="http://schemas.openxmlformats.org/drawingml/2006/main"/>
+          <a:ln xmlns:a="http://schemas.openxmlformats.org/drawingml/2006/main" w="0">
+            <a:noFill/>
+            <a:prstDash val="solid"/>
+          </a:ln>
+        </p:spPr>
+        <p:txBody>
+          <a:bodyPr xmlns:a="http://schemas.openxmlformats.org/drawingml/2006/main" wrap="none" lIns="0" tIns="0" rIns="0" bIns="0" anchor="ctr"/>
+          <a:lstStyle xmlns:a="http://schemas.openxmlformats.org/drawingml/2006/main">
+            <a:defPPr algn="l">
+              <a:defRPr sz="1650" b="0">
+                <a:solidFill>
+                  <a:srgbClr val="62768A"/>
+                </a:solidFill>
+                <a:latin typeface="Microsoft YaHei"/>
+                <a:ea typeface="Microsoft YaHei"/>
+                <a:cs typeface="Microsoft YaHei"/>
+              </a:defRPr>
+            </a:defPPr>
+          </a:lstStyle>
+          <a:p xmlns:a="http://schemas.openxmlformats.org/drawingml/2006/main">
+            <a:pPr algn="l">
+              <a:defRPr sz="1650" b="0">
+                <a:solidFill>
+                  <a:srgbClr val="62768A"/>
+                </a:solidFill>
+                <a:latin typeface="Microsoft YaHei"/>
+                <a:ea typeface="Microsoft YaHei"/>
+                <a:cs typeface="Microsoft YaHei"/>
+              </a:defRPr>
+            </a:pPr>
+            <a:r>
+              <a:rPr sz="1650" b="0">
+                <a:solidFill>
+                  <a:srgbClr val="62768A"/>
+                </a:solidFill>
+                <a:latin typeface="Microsoft YaHei"/>
+                <a:ea typeface="Microsoft YaHei"/>
+                <a:cs typeface="Microsoft YaHei"/>
+              </a:rPr>
+              <a:t>做完才回调收尾，收尾再排队</a:t>
+            </a:r>
+          </a:p>
+        </p:txBody>
+      </p:sp>
+      <p:sp>
+        <p:nvSpPr>
+          <p:cNvPr id="9" name="reveal1-object-417">
+            <a:extLst xmlns:a="http://schemas.openxmlformats.org/drawingml/2006/main">
+              <a:ext uri="{FF2B5EF4-FFF2-40B4-BE49-F238E27FC236}">
+                <a16:creationId xmlns:a16="http://schemas.microsoft.com/office/drawing/2014/main" id="{D28B8C4C-B33E-4244-AE31-27714AF78878}"/>
+              </a:ext>
+            </a:extLst>
+          </p:cNvPr>
+          <p:cNvSpPr>
+            <a:spLocks xmlns:a="http://schemas.openxmlformats.org/drawingml/2006/main" noGrp="1"/>
+          </p:cNvSpPr>
+          <p:nvPr/>
+        </p:nvSpPr>
+        <p:spPr>
+          <a:xfrm xmlns:a="http://schemas.openxmlformats.org/drawingml/2006/main">
+            <a:off x="609600" y="2952750"/>
+            <a:ext cx="1333500" cy="381000"/>
+          </a:xfrm>
+          <a:prstGeom xmlns:a="http://schemas.openxmlformats.org/drawingml/2006/main" prst="rect">
+            <a:avLst/>
+          </a:prstGeom>
+          <a:noFill xmlns:a="http://schemas.openxmlformats.org/drawingml/2006/main"/>
+          <a:ln xmlns:a="http://schemas.openxmlformats.org/drawingml/2006/main" w="0">
+            <a:noFill/>
+            <a:prstDash val="solid"/>
+          </a:ln>
+        </p:spPr>
+        <p:txBody>
+          <a:bodyPr xmlns:a="http://schemas.openxmlformats.org/drawingml/2006/main" wrap="none" lIns="0" tIns="0" rIns="0" bIns="0" anchor="ctr"/>
+          <a:lstStyle xmlns:a="http://schemas.openxmlformats.org/drawingml/2006/main">
+            <a:defPPr algn="l">
+              <a:defRPr sz="2025" b="1">
+                <a:solidFill>
+                  <a:srgbClr val="3379EB"/>
+                </a:solidFill>
+                <a:latin typeface="Microsoft YaHei"/>
+                <a:ea typeface="Microsoft YaHei"/>
+                <a:cs typeface="Microsoft YaHei"/>
+              </a:defRPr>
+            </a:defPPr>
+          </a:lstStyle>
+          <a:p xmlns:a="http://schemas.openxmlformats.org/drawingml/2006/main">
+            <a:pPr algn="l">
+              <a:defRPr sz="2025" b="1">
+                <a:solidFill>
+                  <a:srgbClr val="3379EB"/>
+                </a:solidFill>
+                <a:latin typeface="Microsoft YaHei"/>
+                <a:ea typeface="Microsoft YaHei"/>
+                <a:cs typeface="Microsoft YaHei"/>
+              </a:defRPr>
+            </a:pPr>
+            <a:r>
+              <a:rPr sz="2025" b="1">
+                <a:solidFill>
+                  <a:srgbClr val="3379EB"/>
+                </a:solidFill>
+                <a:latin typeface="Microsoft YaHei"/>
+                <a:ea typeface="Microsoft YaHei"/>
+                <a:cs typeface="Microsoft YaHei"/>
+              </a:rPr>
+              <a:t>恢复</a:t>
+            </a:r>
+          </a:p>
+        </p:txBody>
+      </p:sp>
+      <p:sp>
+        <p:nvSpPr>
+          <p:cNvPr id="10" name="reveal1-object-418">
+            <a:extLst xmlns:a="http://schemas.openxmlformats.org/drawingml/2006/main">
+              <a:ext uri="{FF2B5EF4-FFF2-40B4-BE49-F238E27FC236}">
+                <a16:creationId xmlns:a16="http://schemas.microsoft.com/office/drawing/2014/main" id="{60ABF37B-3601-4E47-8D84-C95AFAC9E816}"/>
+              </a:ext>
+            </a:extLst>
+          </p:cNvPr>
+          <p:cNvSpPr>
+            <a:spLocks xmlns:a="http://schemas.openxmlformats.org/drawingml/2006/main" noGrp="1"/>
+          </p:cNvSpPr>
+          <p:nvPr/>
+        </p:nvSpPr>
+        <p:spPr>
+          <a:xfrm xmlns:a="http://schemas.openxmlformats.org/drawingml/2006/main">
+            <a:off x="2133600" y="2914650"/>
+            <a:ext cx="4572000" cy="457200"/>
+          </a:xfrm>
+          <a:prstGeom xmlns:a="http://schemas.openxmlformats.org/drawingml/2006/main" prst="rect">
+            <a:avLst/>
+          </a:prstGeom>
+          <a:solidFill xmlns:a="http://schemas.openxmlformats.org/drawingml/2006/main">
+            <a:srgbClr val="12263B"/>
+          </a:solidFill>
+          <a:ln xmlns:a="http://schemas.openxmlformats.org/drawingml/2006/main" w="0">
+            <a:noFill/>
+            <a:prstDash val="solid"/>
+          </a:ln>
+        </p:spPr>
+      </p:sp>
+      <p:sp>
+        <p:nvSpPr>
+          <p:cNvPr id="11" name="reveal1-object-419">
+            <a:extLst xmlns:a="http://schemas.openxmlformats.org/drawingml/2006/main">
+              <a:ext uri="{FF2B5EF4-FFF2-40B4-BE49-F238E27FC236}">
+                <a16:creationId xmlns:a16="http://schemas.microsoft.com/office/drawing/2014/main" id="{D8956A7E-3FD6-4BAA-A3EE-FF15E21A7D61}"/>
+              </a:ext>
+            </a:extLst>
+          </p:cNvPr>
+          <p:cNvSpPr>
+            <a:spLocks xmlns:a="http://schemas.openxmlformats.org/drawingml/2006/main" noGrp="1"/>
+          </p:cNvSpPr>
+          <p:nvPr/>
+        </p:nvSpPr>
+        <p:spPr>
+          <a:xfrm xmlns:a="http://schemas.openxmlformats.org/drawingml/2006/main">
+            <a:off x="2247900" y="2971800"/>
+            <a:ext cx="4343400" cy="342900"/>
+          </a:xfrm>
+          <a:prstGeom xmlns:a="http://schemas.openxmlformats.org/drawingml/2006/main" prst="rect">
+            <a:avLst/>
+          </a:prstGeom>
+          <a:noFill xmlns:a="http://schemas.openxmlformats.org/drawingml/2006/main"/>
+          <a:ln xmlns:a="http://schemas.openxmlformats.org/drawingml/2006/main" w="0">
+            <a:noFill/>
+            <a:prstDash val="solid"/>
+          </a:ln>
+        </p:spPr>
+        <p:txBody>
+          <a:bodyPr xmlns:a="http://schemas.openxmlformats.org/drawingml/2006/main" wrap="none" lIns="0" tIns="0" rIns="0" bIns="0" anchor="ctr"/>
+          <a:lstStyle xmlns:a="http://schemas.openxmlformats.org/drawingml/2006/main">
+            <a:defPPr algn="ctr">
+              <a:defRPr sz="1650" b="1">
+                <a:solidFill>
+                  <a:srgbClr val="FFFFFF"/>
+                </a:solidFill>
+                <a:latin typeface="Microsoft YaHei"/>
+                <a:ea typeface="Microsoft YaHei"/>
+                <a:cs typeface="Microsoft YaHei"/>
+              </a:defRPr>
+            </a:defPPr>
+          </a:lstStyle>
+          <a:p xmlns:a="http://schemas.openxmlformats.org/drawingml/2006/main">
+            <a:pPr algn="ctr">
+              <a:defRPr sz="1650" b="1">
+                <a:solidFill>
+                  <a:srgbClr val="FFFFFF"/>
+                </a:solidFill>
+                <a:latin typeface="Microsoft YaHei"/>
+                <a:ea typeface="Microsoft YaHei"/>
+                <a:cs typeface="Microsoft YaHei"/>
+              </a:defRPr>
+            </a:pPr>
+            <a:r>
+              <a:rPr sz="1650" b="1">
+                <a:solidFill>
+                  <a:srgbClr val="FFFFFF"/>
+                </a:solidFill>
+                <a:latin typeface="Microsoft YaHei"/>
+                <a:ea typeface="Microsoft YaHei"/>
+                <a:cs typeface="Microsoft YaHei"/>
+              </a:rPr>
+              <a:t>第一步就把状态改成“运行中”</a:t>
+            </a:r>
+          </a:p>
+        </p:txBody>
+      </p:sp>
+      <p:sp>
+        <p:nvSpPr>
+          <p:cNvPr id="12" name="reveal1-object-420">
+            <a:extLst xmlns:a="http://schemas.openxmlformats.org/drawingml/2006/main">
+              <a:ext uri="{FF2B5EF4-FFF2-40B4-BE49-F238E27FC236}">
+                <a16:creationId xmlns:a16="http://schemas.microsoft.com/office/drawing/2014/main" id="{D2461A0B-1FC3-4995-95AD-F01589208709}"/>
+              </a:ext>
+            </a:extLst>
+          </p:cNvPr>
+          <p:cNvSpPr>
+            <a:spLocks xmlns:a="http://schemas.openxmlformats.org/drawingml/2006/main" noGrp="1"/>
+          </p:cNvSpPr>
+          <p:nvPr/>
+        </p:nvSpPr>
+        <p:spPr>
+          <a:xfrm xmlns:a="http://schemas.openxmlformats.org/drawingml/2006/main">
+            <a:off x="6896100" y="2952750"/>
+            <a:ext cx="4762500" cy="381000"/>
+          </a:xfrm>
+          <a:prstGeom xmlns:a="http://schemas.openxmlformats.org/drawingml/2006/main" prst="rect">
+            <a:avLst/>
+          </a:prstGeom>
+          <a:noFill xmlns:a="http://schemas.openxmlformats.org/drawingml/2006/main"/>
+          <a:ln xmlns:a="http://schemas.openxmlformats.org/drawingml/2006/main" w="0">
+            <a:noFill/>
+            <a:prstDash val="solid"/>
+          </a:ln>
+        </p:spPr>
+        <p:txBody>
+          <a:bodyPr xmlns:a="http://schemas.openxmlformats.org/drawingml/2006/main" wrap="none" lIns="0" tIns="0" rIns="0" bIns="0" anchor="ctr"/>
+          <a:lstStyle xmlns:a="http://schemas.openxmlformats.org/drawingml/2006/main">
+            <a:defPPr algn="l">
+              <a:defRPr sz="1650" b="0">
+                <a:solidFill>
+                  <a:srgbClr val="62768A"/>
+                </a:solidFill>
+                <a:latin typeface="Microsoft YaHei"/>
+                <a:ea typeface="Microsoft YaHei"/>
+                <a:cs typeface="Microsoft YaHei"/>
+              </a:defRPr>
+            </a:defPPr>
+          </a:lstStyle>
+          <a:p xmlns:a="http://schemas.openxmlformats.org/drawingml/2006/main">
+            <a:pPr algn="l">
+              <a:defRPr sz="1650" b="0">
+                <a:solidFill>
+                  <a:srgbClr val="62768A"/>
+                </a:solidFill>
+                <a:latin typeface="Microsoft YaHei"/>
+                <a:ea typeface="Microsoft YaHei"/>
+                <a:cs typeface="Microsoft YaHei"/>
+              </a:defRPr>
+            </a:pPr>
+            <a:r>
+              <a:rPr sz="1650" b="0">
+                <a:solidFill>
+                  <a:srgbClr val="62768A"/>
+                </a:solidFill>
+                <a:latin typeface="Microsoft YaHei"/>
+                <a:ea typeface="Microsoft YaHei"/>
+                <a:cs typeface="Microsoft YaHei"/>
+              </a:rPr>
+              <a:t>旧收尾首行检查它，已运行即返回</a:t>
+            </a:r>
+          </a:p>
+        </p:txBody>
+      </p:sp>
+      <p:sp>
+        <p:nvSpPr>
+          <p:cNvPr id="13" name="reveal2-object-421">
+            <a:extLst xmlns:a="http://schemas.openxmlformats.org/drawingml/2006/main">
+              <a:ext uri="{FF2B5EF4-FFF2-40B4-BE49-F238E27FC236}">
+                <a16:creationId xmlns:a16="http://schemas.microsoft.com/office/drawing/2014/main" id="{5B9EB327-12C9-4973-9C11-BB0370923591}"/>
+              </a:ext>
+            </a:extLst>
+          </p:cNvPr>
+          <p:cNvSpPr>
+            <a:spLocks xmlns:a="http://schemas.openxmlformats.org/drawingml/2006/main" noGrp="1"/>
+          </p:cNvSpPr>
+          <p:nvPr/>
+        </p:nvSpPr>
+        <p:spPr>
+          <a:xfrm xmlns:a="http://schemas.openxmlformats.org/drawingml/2006/main">
+            <a:off x="609600" y="3695700"/>
+            <a:ext cx="1333500" cy="381000"/>
+          </a:xfrm>
+          <a:prstGeom xmlns:a="http://schemas.openxmlformats.org/drawingml/2006/main" prst="rect">
+            <a:avLst/>
+          </a:prstGeom>
+          <a:noFill xmlns:a="http://schemas.openxmlformats.org/drawingml/2006/main"/>
+          <a:ln xmlns:a="http://schemas.openxmlformats.org/drawingml/2006/main" w="0">
+            <a:noFill/>
+            <a:prstDash val="solid"/>
+          </a:ln>
+        </p:spPr>
+        <p:txBody>
+          <a:bodyPr xmlns:a="http://schemas.openxmlformats.org/drawingml/2006/main" wrap="none" lIns="0" tIns="0" rIns="0" bIns="0" anchor="ctr"/>
+          <a:lstStyle xmlns:a="http://schemas.openxmlformats.org/drawingml/2006/main">
+            <a:defPPr algn="l">
+              <a:defRPr sz="2025" b="1">
+                <a:solidFill>
+                  <a:srgbClr val="887798"/>
+                </a:solidFill>
+                <a:latin typeface="Microsoft YaHei"/>
+                <a:ea typeface="Microsoft YaHei"/>
+                <a:cs typeface="Microsoft YaHei"/>
+              </a:defRPr>
+            </a:defPPr>
+          </a:lstStyle>
+          <a:p xmlns:a="http://schemas.openxmlformats.org/drawingml/2006/main">
+            <a:pPr algn="l">
+              <a:defRPr sz="2025" b="1">
+                <a:solidFill>
+                  <a:srgbClr val="887798"/>
+                </a:solidFill>
+                <a:latin typeface="Microsoft YaHei"/>
+                <a:ea typeface="Microsoft YaHei"/>
+                <a:cs typeface="Microsoft YaHei"/>
+              </a:defRPr>
+            </a:pPr>
+            <a:r>
+              <a:rPr sz="2025" b="1">
+                <a:solidFill>
+                  <a:srgbClr val="887798"/>
+                </a:solidFill>
+                <a:latin typeface="Microsoft YaHei"/>
+                <a:ea typeface="Microsoft YaHei"/>
+                <a:cs typeface="Microsoft YaHei"/>
+              </a:rPr>
+              <a:t>淡入时机</a:t>
+            </a:r>
+          </a:p>
+        </p:txBody>
+      </p:sp>
+      <p:sp>
+        <p:nvSpPr>
+          <p:cNvPr id="14" name="reveal2-object-422">
+            <a:extLst xmlns:a="http://schemas.openxmlformats.org/drawingml/2006/main">
+              <a:ext uri="{FF2B5EF4-FFF2-40B4-BE49-F238E27FC236}">
+                <a16:creationId xmlns:a16="http://schemas.microsoft.com/office/drawing/2014/main" id="{525A49FD-4870-429A-AF1A-D28430202611}"/>
+              </a:ext>
+            </a:extLst>
+          </p:cNvPr>
+          <p:cNvSpPr>
+            <a:spLocks xmlns:a="http://schemas.openxmlformats.org/drawingml/2006/main" noGrp="1"/>
+          </p:cNvSpPr>
+          <p:nvPr/>
+        </p:nvSpPr>
+        <p:spPr>
+          <a:xfrm xmlns:a="http://schemas.openxmlformats.org/drawingml/2006/main">
+            <a:off x="2133600" y="3657600"/>
+            <a:ext cx="4572000" cy="457200"/>
+          </a:xfrm>
+          <a:prstGeom xmlns:a="http://schemas.openxmlformats.org/drawingml/2006/main" prst="rect">
+            <a:avLst/>
+          </a:prstGeom>
+          <a:solidFill xmlns:a="http://schemas.openxmlformats.org/drawingml/2006/main">
+            <a:srgbClr val="12263B"/>
+          </a:solidFill>
+          <a:ln xmlns:a="http://schemas.openxmlformats.org/drawingml/2006/main" w="0">
+            <a:noFill/>
+            <a:prstDash val="solid"/>
+          </a:ln>
+        </p:spPr>
+      </p:sp>
+      <p:sp>
+        <p:nvSpPr>
+          <p:cNvPr id="15" name="reveal2-object-423">
+            <a:extLst xmlns:a="http://schemas.openxmlformats.org/drawingml/2006/main">
+              <a:ext uri="{FF2B5EF4-FFF2-40B4-BE49-F238E27FC236}">
+                <a16:creationId xmlns:a16="http://schemas.microsoft.com/office/drawing/2014/main" id="{4EE9ADCA-0777-49AC-B26F-CECC85C39510}"/>
+              </a:ext>
+            </a:extLst>
+          </p:cNvPr>
+          <p:cNvSpPr>
+            <a:spLocks xmlns:a="http://schemas.openxmlformats.org/drawingml/2006/main" noGrp="1"/>
+          </p:cNvSpPr>
+          <p:nvPr/>
+        </p:nvSpPr>
+        <p:spPr>
+          <a:xfrm xmlns:a="http://schemas.openxmlformats.org/drawingml/2006/main">
+            <a:off x="2247900" y="3714750"/>
+            <a:ext cx="4343400" cy="342900"/>
+          </a:xfrm>
+          <a:prstGeom xmlns:a="http://schemas.openxmlformats.org/drawingml/2006/main" prst="rect">
+            <a:avLst/>
+          </a:prstGeom>
+          <a:noFill xmlns:a="http://schemas.openxmlformats.org/drawingml/2006/main"/>
+          <a:ln xmlns:a="http://schemas.openxmlformats.org/drawingml/2006/main" w="0">
+            <a:noFill/>
+            <a:prstDash val="solid"/>
+          </a:ln>
+        </p:spPr>
+        <p:txBody>
+          <a:bodyPr xmlns:a="http://schemas.openxmlformats.org/drawingml/2006/main" wrap="none" lIns="0" tIns="0" rIns="0" bIns="0" anchor="ctr"/>
+          <a:lstStyle xmlns:a="http://schemas.openxmlformats.org/drawingml/2006/main">
+            <a:defPPr algn="ctr">
+              <a:defRPr sz="1650" b="1">
+                <a:solidFill>
+                  <a:srgbClr val="FFFFFF"/>
+                </a:solidFill>
+                <a:latin typeface="Microsoft YaHei"/>
+                <a:ea typeface="Microsoft YaHei"/>
+                <a:cs typeface="Microsoft YaHei"/>
+              </a:defRPr>
+            </a:defPPr>
+          </a:lstStyle>
+          <a:p xmlns:a="http://schemas.openxmlformats.org/drawingml/2006/main">
+            <a:pPr algn="ctr">
+              <a:defRPr sz="1650" b="1">
+                <a:solidFill>
+                  <a:srgbClr val="FFFFFF"/>
+                </a:solidFill>
+                <a:latin typeface="Microsoft YaHei"/>
+                <a:ea typeface="Microsoft YaHei"/>
+                <a:cs typeface="Microsoft YaHei"/>
+              </a:defRPr>
+            </a:pPr>
+            <a:r>
+              <a:rPr sz="1650" b="1">
+                <a:solidFill>
+                  <a:srgbClr val="FFFFFF"/>
+                </a:solidFill>
+                <a:latin typeface="Microsoft YaHei"/>
+                <a:ea typeface="Microsoft YaHei"/>
+                <a:cs typeface="Microsoft YaHei"/>
+              </a:rPr>
+              <a:t>接通后立刻挂淡入，再启动音效</a:t>
+            </a:r>
+          </a:p>
+        </p:txBody>
+      </p:sp>
+      <p:sp>
+        <p:nvSpPr>
+          <p:cNvPr id="16" name="reveal2-object-424">
+            <a:extLst xmlns:a="http://schemas.openxmlformats.org/drawingml/2006/main">
+              <a:ext uri="{FF2B5EF4-FFF2-40B4-BE49-F238E27FC236}">
+                <a16:creationId xmlns:a16="http://schemas.microsoft.com/office/drawing/2014/main" id="{6C11429F-96F1-4122-A062-6AC455E2F635}"/>
+              </a:ext>
+            </a:extLst>
+          </p:cNvPr>
+          <p:cNvSpPr>
+            <a:spLocks xmlns:a="http://schemas.openxmlformats.org/drawingml/2006/main" noGrp="1"/>
+          </p:cNvSpPr>
+          <p:nvPr/>
+        </p:nvSpPr>
+        <p:spPr>
+          <a:xfrm xmlns:a="http://schemas.openxmlformats.org/drawingml/2006/main">
+            <a:off x="6896100" y="3695700"/>
+            <a:ext cx="4762500" cy="381000"/>
+          </a:xfrm>
+          <a:prstGeom xmlns:a="http://schemas.openxmlformats.org/drawingml/2006/main" prst="rect">
+            <a:avLst/>
+          </a:prstGeom>
+          <a:noFill xmlns:a="http://schemas.openxmlformats.org/drawingml/2006/main"/>
+          <a:ln xmlns:a="http://schemas.openxmlformats.org/drawingml/2006/main" w="0">
+            <a:noFill/>
+            <a:prstDash val="solid"/>
+          </a:ln>
+        </p:spPr>
+        <p:txBody>
+          <a:bodyPr xmlns:a="http://schemas.openxmlformats.org/drawingml/2006/main" wrap="none" lIns="0" tIns="0" rIns="0" bIns="0" anchor="ctr"/>
+          <a:lstStyle xmlns:a="http://schemas.openxmlformats.org/drawingml/2006/main">
+            <a:defPPr algn="l">
+              <a:defRPr sz="1650" b="0">
+                <a:solidFill>
+                  <a:srgbClr val="62768A"/>
+                </a:solidFill>
+                <a:latin typeface="Microsoft YaHei"/>
+                <a:ea typeface="Microsoft YaHei"/>
+                <a:cs typeface="Microsoft YaHei"/>
+              </a:defRPr>
+            </a:defPPr>
+          </a:lstStyle>
+          <a:p xmlns:a="http://schemas.openxmlformats.org/drawingml/2006/main">
+            <a:pPr algn="l">
+              <a:defRPr sz="1650" b="0">
+                <a:solidFill>
+                  <a:srgbClr val="62768A"/>
+                </a:solidFill>
+                <a:latin typeface="Microsoft YaHei"/>
+                <a:ea typeface="Microsoft YaHei"/>
+                <a:cs typeface="Microsoft YaHei"/>
+              </a:defRPr>
+            </a:pPr>
+            <a:r>
+              <a:rPr sz="1650" b="0">
+                <a:solidFill>
+                  <a:srgbClr val="62768A"/>
+                </a:solidFill>
+                <a:latin typeface="Microsoft YaHei"/>
+                <a:ea typeface="Microsoft YaHei"/>
+                <a:cs typeface="Microsoft YaHei"/>
+              </a:rPr>
+              <a:t>注释写明：晚了会漏全音量数据帧</a:t>
+            </a:r>
+          </a:p>
+        </p:txBody>
+      </p:sp>
+      <p:sp>
+        <p:nvSpPr>
+          <p:cNvPr id="17" name="reveal2-object-425">
+            <a:extLst xmlns:a="http://schemas.openxmlformats.org/drawingml/2006/main">
+              <a:ext uri="{FF2B5EF4-FFF2-40B4-BE49-F238E27FC236}">
+                <a16:creationId xmlns:a16="http://schemas.microsoft.com/office/drawing/2014/main" id="{343FABDE-D0C5-4264-B031-9BFA8C057ACD}"/>
+              </a:ext>
+            </a:extLst>
+          </p:cNvPr>
+          <p:cNvSpPr>
+            <a:spLocks xmlns:a="http://schemas.openxmlformats.org/drawingml/2006/main" noGrp="1"/>
+          </p:cNvSpPr>
+          <p:nvPr/>
+        </p:nvSpPr>
+        <p:spPr>
+          <a:xfrm xmlns:a="http://schemas.openxmlformats.org/drawingml/2006/main">
+            <a:off x="609600" y="4438650"/>
+            <a:ext cx="1333500" cy="381000"/>
+          </a:xfrm>
+          <a:prstGeom xmlns:a="http://schemas.openxmlformats.org/drawingml/2006/main" prst="rect">
+            <a:avLst/>
+          </a:prstGeom>
+          <a:noFill xmlns:a="http://schemas.openxmlformats.org/drawingml/2006/main"/>
+          <a:ln xmlns:a="http://schemas.openxmlformats.org/drawingml/2006/main" w="0">
+            <a:noFill/>
+            <a:prstDash val="solid"/>
+          </a:ln>
+        </p:spPr>
+        <p:txBody>
+          <a:bodyPr xmlns:a="http://schemas.openxmlformats.org/drawingml/2006/main" wrap="none" lIns="0" tIns="0" rIns="0" bIns="0" anchor="ctr"/>
+          <a:lstStyle xmlns:a="http://schemas.openxmlformats.org/drawingml/2006/main">
+            <a:defPPr algn="l">
+              <a:defRPr sz="2025" b="1">
+                <a:solidFill>
+                  <a:srgbClr val="119A92"/>
+                </a:solidFill>
+                <a:latin typeface="Microsoft YaHei"/>
+                <a:ea typeface="Microsoft YaHei"/>
+                <a:cs typeface="Microsoft YaHei"/>
+              </a:defRPr>
+            </a:defPPr>
+          </a:lstStyle>
+          <a:p xmlns:a="http://schemas.openxmlformats.org/drawingml/2006/main">
+            <a:pPr algn="l">
+              <a:defRPr sz="2025" b="1">
+                <a:solidFill>
+                  <a:srgbClr val="119A92"/>
+                </a:solidFill>
+                <a:latin typeface="Microsoft YaHei"/>
+                <a:ea typeface="Microsoft YaHei"/>
+                <a:cs typeface="Microsoft YaHei"/>
+              </a:defRPr>
+            </a:pPr>
+            <a:r>
+              <a:rPr sz="2025" b="1">
+                <a:solidFill>
+                  <a:srgbClr val="119A92"/>
+                </a:solidFill>
+                <a:latin typeface="Microsoft YaHei"/>
+                <a:ea typeface="Microsoft YaHei"/>
+                <a:cs typeface="Microsoft YaHei"/>
+              </a:rPr>
+              <a:t>切耳机</a:t>
+            </a:r>
+          </a:p>
+        </p:txBody>
+      </p:sp>
+      <p:sp>
+        <p:nvSpPr>
+          <p:cNvPr id="18" name="reveal2-object-426">
+            <a:extLst xmlns:a="http://schemas.openxmlformats.org/drawingml/2006/main">
+              <a:ext uri="{FF2B5EF4-FFF2-40B4-BE49-F238E27FC236}">
+                <a16:creationId xmlns:a16="http://schemas.microsoft.com/office/drawing/2014/main" id="{CC05FD76-F403-4BD5-8E95-87B1E4525BDE}"/>
+              </a:ext>
+            </a:extLst>
+          </p:cNvPr>
+          <p:cNvSpPr>
+            <a:spLocks xmlns:a="http://schemas.openxmlformats.org/drawingml/2006/main" noGrp="1"/>
+          </p:cNvSpPr>
+          <p:nvPr/>
+        </p:nvSpPr>
+        <p:spPr>
+          <a:xfrm xmlns:a="http://schemas.openxmlformats.org/drawingml/2006/main">
+            <a:off x="2133600" y="4400550"/>
+            <a:ext cx="4572000" cy="457200"/>
+          </a:xfrm>
+          <a:prstGeom xmlns:a="http://schemas.openxmlformats.org/drawingml/2006/main" prst="rect">
+            <a:avLst/>
+          </a:prstGeom>
+          <a:solidFill xmlns:a="http://schemas.openxmlformats.org/drawingml/2006/main">
+            <a:srgbClr val="12263B"/>
+          </a:solidFill>
+          <a:ln xmlns:a="http://schemas.openxmlformats.org/drawingml/2006/main" w="0">
+            <a:noFill/>
+            <a:prstDash val="solid"/>
+          </a:ln>
+        </p:spPr>
+      </p:sp>
+      <p:sp>
+        <p:nvSpPr>
+          <p:cNvPr id="19" name="reveal2-object-427">
+            <a:extLst xmlns:a="http://schemas.openxmlformats.org/drawingml/2006/main">
+              <a:ext uri="{FF2B5EF4-FFF2-40B4-BE49-F238E27FC236}">
+                <a16:creationId xmlns:a16="http://schemas.microsoft.com/office/drawing/2014/main" id="{BADF1D86-B7B9-4CD2-BA96-DFDBFFD7C1B3}"/>
+              </a:ext>
+            </a:extLst>
+          </p:cNvPr>
+          <p:cNvSpPr>
+            <a:spLocks xmlns:a="http://schemas.openxmlformats.org/drawingml/2006/main" noGrp="1"/>
+          </p:cNvSpPr>
+          <p:nvPr/>
+        </p:nvSpPr>
+        <p:spPr>
+          <a:xfrm xmlns:a="http://schemas.openxmlformats.org/drawingml/2006/main">
+            <a:off x="2247900" y="4457700"/>
+            <a:ext cx="4343400" cy="342900"/>
+          </a:xfrm>
+          <a:prstGeom xmlns:a="http://schemas.openxmlformats.org/drawingml/2006/main" prst="rect">
+            <a:avLst/>
+          </a:prstGeom>
+          <a:noFill xmlns:a="http://schemas.openxmlformats.org/drawingml/2006/main"/>
+          <a:ln xmlns:a="http://schemas.openxmlformats.org/drawingml/2006/main" w="0">
+            <a:noFill/>
+            <a:prstDash val="solid"/>
+          </a:ln>
+        </p:spPr>
+        <p:txBody>
+          <a:bodyPr xmlns:a="http://schemas.openxmlformats.org/drawingml/2006/main" wrap="none" lIns="0" tIns="0" rIns="0" bIns="0" anchor="ctr"/>
+          <a:lstStyle xmlns:a="http://schemas.openxmlformats.org/drawingml/2006/main">
+            <a:defPPr algn="ctr">
+              <a:defRPr sz="1650" b="1">
+                <a:solidFill>
+                  <a:srgbClr val="FFFFFF"/>
+                </a:solidFill>
+                <a:latin typeface="Microsoft YaHei"/>
+                <a:ea typeface="Microsoft YaHei"/>
+                <a:cs typeface="Microsoft YaHei"/>
+              </a:defRPr>
+            </a:defPPr>
+          </a:lstStyle>
+          <a:p xmlns:a="http://schemas.openxmlformats.org/drawingml/2006/main">
+            <a:pPr algn="ctr">
+              <a:defRPr sz="1650" b="1">
+                <a:solidFill>
+                  <a:srgbClr val="FFFFFF"/>
+                </a:solidFill>
+                <a:latin typeface="Microsoft YaHei"/>
+                <a:ea typeface="Microsoft YaHei"/>
+                <a:cs typeface="Microsoft YaHei"/>
+              </a:defRPr>
+            </a:pPr>
+            <a:r>
+              <a:rPr sz="1650" b="1">
+                <a:solidFill>
+                  <a:srgbClr val="FFFFFF"/>
+                </a:solidFill>
+                <a:latin typeface="Microsoft YaHei"/>
+                <a:ea typeface="Microsoft YaHei"/>
+                <a:cs typeface="Microsoft YaHei"/>
+              </a:rPr>
+              <a:t>节点带状态交接，目标侧调帧长</a:t>
+            </a:r>
+          </a:p>
+        </p:txBody>
+      </p:sp>
+      <p:sp>
+        <p:nvSpPr>
+          <p:cNvPr id="20" name="reveal2-object-428">
+            <a:extLst xmlns:a="http://schemas.openxmlformats.org/drawingml/2006/main">
+              <a:ext uri="{FF2B5EF4-FFF2-40B4-BE49-F238E27FC236}">
+                <a16:creationId xmlns:a16="http://schemas.microsoft.com/office/drawing/2014/main" id="{E802953E-9053-4CAF-9B2B-00F41526A98A}"/>
+              </a:ext>
+            </a:extLst>
+          </p:cNvPr>
+          <p:cNvSpPr>
+            <a:spLocks xmlns:a="http://schemas.openxmlformats.org/drawingml/2006/main" noGrp="1"/>
+          </p:cNvSpPr>
+          <p:nvPr/>
+        </p:nvSpPr>
+        <p:spPr>
+          <a:xfrm xmlns:a="http://schemas.openxmlformats.org/drawingml/2006/main">
+            <a:off x="6896100" y="4438650"/>
+            <a:ext cx="4762500" cy="381000"/>
+          </a:xfrm>
+          <a:prstGeom xmlns:a="http://schemas.openxmlformats.org/drawingml/2006/main" prst="rect">
+            <a:avLst/>
+          </a:prstGeom>
+          <a:noFill xmlns:a="http://schemas.openxmlformats.org/drawingml/2006/main"/>
+          <a:ln xmlns:a="http://schemas.openxmlformats.org/drawingml/2006/main" w="0">
+            <a:noFill/>
+            <a:prstDash val="solid"/>
+          </a:ln>
+        </p:spPr>
+        <p:txBody>
+          <a:bodyPr xmlns:a="http://schemas.openxmlformats.org/drawingml/2006/main" wrap="none" lIns="0" tIns="0" rIns="0" bIns="0" anchor="ctr"/>
+          <a:lstStyle xmlns:a="http://schemas.openxmlformats.org/drawingml/2006/main">
+            <a:defPPr algn="l">
+              <a:defRPr sz="1650" b="0">
+                <a:solidFill>
+                  <a:srgbClr val="62768A"/>
+                </a:solidFill>
+                <a:latin typeface="Microsoft YaHei"/>
+                <a:ea typeface="Microsoft YaHei"/>
+                <a:cs typeface="Microsoft YaHei"/>
+              </a:defRPr>
+            </a:defPPr>
+          </a:lstStyle>
+          <a:p xmlns:a="http://schemas.openxmlformats.org/drawingml/2006/main">
+            <a:pPr algn="l">
+              <a:defRPr sz="1650" b="0">
+                <a:solidFill>
+                  <a:srgbClr val="62768A"/>
+                </a:solidFill>
+                <a:latin typeface="Microsoft YaHei"/>
+                <a:ea typeface="Microsoft YaHei"/>
+                <a:cs typeface="Microsoft YaHei"/>
+              </a:defRPr>
+            </a:pPr>
+            <a:r>
+              <a:rPr sz="1650" b="0">
+                <a:solidFill>
+                  <a:srgbClr val="62768A"/>
+                </a:solidFill>
+                <a:latin typeface="Microsoft YaHei"/>
+                <a:ea typeface="Microsoft YaHei"/>
+                <a:cs typeface="Microsoft YaHei"/>
+              </a:rPr>
+              <a:t>只有运行中的会话才接入新链</a:t>
+            </a:r>
+          </a:p>
+        </p:txBody>
+      </p:sp>
+      <p:sp>
+        <p:nvSpPr>
+          <p:cNvPr id="21" name="reveal2-object-429">
+            <a:extLst xmlns:a="http://schemas.openxmlformats.org/drawingml/2006/main">
+              <a:ext uri="{FF2B5EF4-FFF2-40B4-BE49-F238E27FC236}">
+                <a16:creationId xmlns:a16="http://schemas.microsoft.com/office/drawing/2014/main" id="{65AACDC9-FB93-4BBC-99B9-B697C1ABB8D6}"/>
+              </a:ext>
+            </a:extLst>
+          </p:cNvPr>
+          <p:cNvSpPr>
+            <a:spLocks xmlns:a="http://schemas.openxmlformats.org/drawingml/2006/main" noGrp="1"/>
+          </p:cNvSpPr>
+          <p:nvPr/>
+        </p:nvSpPr>
+        <p:spPr>
+          <a:xfrm xmlns:a="http://schemas.openxmlformats.org/drawingml/2006/main">
+            <a:off x="609600" y="5334000"/>
+            <a:ext cx="10858500" cy="762000"/>
+          </a:xfrm>
+          <a:prstGeom xmlns:a="http://schemas.openxmlformats.org/drawingml/2006/main" prst="rect">
+            <a:avLst/>
+          </a:prstGeom>
+          <a:noFill xmlns:a="http://schemas.openxmlformats.org/drawingml/2006/main"/>
+          <a:ln xmlns:a="http://schemas.openxmlformats.org/drawingml/2006/main" w="0">
+            <a:noFill/>
+            <a:prstDash val="solid"/>
+          </a:ln>
+        </p:spPr>
+        <p:txBody>
+          <a:bodyPr xmlns:a="http://schemas.openxmlformats.org/drawingml/2006/main" wrap="none" lIns="0" tIns="0" rIns="0" bIns="0" anchor="ctr"/>
+          <a:lstStyle xmlns:a="http://schemas.openxmlformats.org/drawingml/2006/main">
+            <a:defPPr algn="l">
+              <a:defRPr sz="1950" b="1">
+                <a:solidFill>
+                  <a:srgbClr val="12263B"/>
+                </a:solidFill>
+                <a:latin typeface="Microsoft YaHei"/>
+                <a:ea typeface="Microsoft YaHei"/>
+                <a:cs typeface="Microsoft YaHei"/>
+              </a:defRPr>
+            </a:defPPr>
+          </a:lstStyle>
+          <a:p xmlns:a="http://schemas.openxmlformats.org/drawingml/2006/main">
+            <a:pPr algn="l">
+              <a:defRPr sz="1950" b="1">
+                <a:solidFill>
+                  <a:srgbClr val="12263B"/>
+                </a:solidFill>
+                <a:latin typeface="Microsoft YaHei"/>
+                <a:ea typeface="Microsoft YaHei"/>
+                <a:cs typeface="Microsoft YaHei"/>
+              </a:defRPr>
+            </a:pPr>
+            <a:r>
+              <a:rPr sz="1950" b="1">
+                <a:solidFill>
+                  <a:srgbClr val="12263B"/>
+                </a:solidFill>
+                <a:latin typeface="Microsoft YaHei"/>
+                <a:ea typeface="Microsoft YaHei"/>
+                <a:cs typeface="Microsoft YaHei"/>
+              </a:rPr>
+              <a:t>一个状态标志、一行状态检查、一个先后顺序、一次参数调整，</a:t>
+            </a:r>
+          </a:p>
+          <a:p xmlns:a="http://schemas.openxmlformats.org/drawingml/2006/main">
+            <a:pPr algn="l">
+              <a:defRPr sz="1950" b="1">
+                <a:solidFill>
+                  <a:srgbClr val="12263B"/>
+                </a:solidFill>
+                <a:latin typeface="Microsoft YaHei"/>
+                <a:ea typeface="Microsoft YaHei"/>
+                <a:cs typeface="Microsoft YaHei"/>
+              </a:defRPr>
+            </a:pPr>
+            <a:r>
+              <a:rPr sz="1950" b="1">
+                <a:solidFill>
+                  <a:srgbClr val="12263B"/>
+                </a:solidFill>
+                <a:latin typeface="Microsoft YaHei"/>
+                <a:ea typeface="Microsoft YaHei"/>
+                <a:cs typeface="Microsoft YaHei"/>
+              </a:rPr>
+              <a:t>复杂性摊开看，是这些小保证的叠加。</a:t>
+            </a:r>
+          </a:p>
+        </p:txBody>
+      </p:sp>
+      <p:sp>
+        <p:nvSpPr>
+          <p:cNvPr id="22" name="object-430">
+            <a:extLst xmlns:a="http://schemas.openxmlformats.org/drawingml/2006/main">
+              <a:ext uri="{FF2B5EF4-FFF2-40B4-BE49-F238E27FC236}">
+                <a16:creationId xmlns:a16="http://schemas.microsoft.com/office/drawing/2014/main" id="{F179CCAC-B96F-4B6D-B10C-2EC1AFE55481}"/>
+              </a:ext>
+            </a:extLst>
+          </p:cNvPr>
+          <p:cNvSpPr>
+            <a:spLocks xmlns:a="http://schemas.openxmlformats.org/drawingml/2006/main" noGrp="1"/>
+          </p:cNvSpPr>
+          <p:nvPr/>
+        </p:nvSpPr>
+        <p:spPr>
+          <a:xfrm xmlns:a="http://schemas.openxmlformats.org/drawingml/2006/main">
+            <a:off x="609600" y="6334125"/>
+            <a:ext cx="10191750" cy="285750"/>
+          </a:xfrm>
+          <a:prstGeom xmlns:a="http://schemas.openxmlformats.org/drawingml/2006/main" prst="rect">
+            <a:avLst/>
+          </a:prstGeom>
+          <a:noFill xmlns:a="http://schemas.openxmlformats.org/drawingml/2006/main"/>
+          <a:ln xmlns:a="http://schemas.openxmlformats.org/drawingml/2006/main" w="0">
+            <a:noFill/>
+            <a:prstDash val="solid"/>
+          </a:ln>
+        </p:spPr>
+        <p:txBody>
+          <a:bodyPr xmlns:a="http://schemas.openxmlformats.org/drawingml/2006/main" wrap="none" lIns="0" tIns="0" rIns="0" bIns="0" anchor="ctr"/>
+          <a:lstStyle xmlns:a="http://schemas.openxmlformats.org/drawingml/2006/main">
+            <a:defPPr algn="l">
+              <a:defRPr sz="1275" b="0">
+                <a:solidFill>
+                  <a:srgbClr val="62768A"/>
+                </a:solidFill>
+                <a:latin typeface="Microsoft YaHei"/>
+                <a:ea typeface="Microsoft YaHei"/>
+                <a:cs typeface="Microsoft YaHei"/>
+              </a:defRPr>
+            </a:defPPr>
+          </a:lstStyle>
+          <a:p xmlns:a="http://schemas.openxmlformats.org/drawingml/2006/main">
+            <a:pPr algn="l">
+              <a:defRPr sz="1275" b="0">
+                <a:solidFill>
+                  <a:srgbClr val="62768A"/>
+                </a:solidFill>
+                <a:latin typeface="Microsoft YaHei"/>
+                <a:ea typeface="Microsoft YaHei"/>
+                <a:cs typeface="Microsoft YaHei"/>
+              </a:defRPr>
+            </a:pPr>
+            <a:r>
+              <a:rPr sz="1275" b="0">
+                <a:solidFill>
+                  <a:srgbClr val="62768A"/>
+                </a:solidFill>
+                <a:latin typeface="Microsoft YaHei"/>
+                <a:ea typeface="Microsoft YaHei"/>
+                <a:cs typeface="Microsoft YaHei"/>
+              </a:rPr>
+              <a:t>左列为引擎行为，右列为代码落点；行号见讲稿附录。</a:t>
+            </a:r>
+          </a:p>
+        </p:txBody>
+      </p:sp>
+      <p:sp>
+        <p:nvSpPr>
+          <p:cNvPr id="23" name="object-431">
+            <a:extLst xmlns:a="http://schemas.openxmlformats.org/drawingml/2006/main">
+              <a:ext uri="{FF2B5EF4-FFF2-40B4-BE49-F238E27FC236}">
+                <a16:creationId xmlns:a16="http://schemas.microsoft.com/office/drawing/2014/main" id="{A05D7203-015E-48E1-892F-5131469C1B40}"/>
+              </a:ext>
+            </a:extLst>
+          </p:cNvPr>
+          <p:cNvSpPr>
+            <a:spLocks xmlns:a="http://schemas.openxmlformats.org/drawingml/2006/main" noGrp="1"/>
+          </p:cNvSpPr>
+          <p:nvPr/>
+        </p:nvSpPr>
+        <p:spPr>
+          <a:xfrm xmlns:a="http://schemas.openxmlformats.org/drawingml/2006/main">
+            <a:off x="11020425" y="6334125"/>
+            <a:ext cx="542925" cy="285750"/>
+          </a:xfrm>
+          <a:prstGeom xmlns:a="http://schemas.openxmlformats.org/drawingml/2006/main" prst="rect">
+            <a:avLst/>
+          </a:prstGeom>
+          <a:noFill xmlns:a="http://schemas.openxmlformats.org/drawingml/2006/main"/>
+          <a:ln xmlns:a="http://schemas.openxmlformats.org/drawingml/2006/main" w="0">
+            <a:noFill/>
+            <a:prstDash val="solid"/>
+          </a:ln>
+        </p:spPr>
+        <p:txBody>
+          <a:bodyPr xmlns:a="http://schemas.openxmlformats.org/drawingml/2006/main" wrap="none" lIns="0" tIns="0" rIns="0" bIns="0" anchor="ctr"/>
+          <a:lstStyle xmlns:a="http://schemas.openxmlformats.org/drawingml/2006/main">
+            <a:defPPr algn="r">
+              <a:defRPr sz="1425" b="0">
+                <a:solidFill>
+                  <a:srgbClr val="62768A"/>
+                </a:solidFill>
+                <a:latin typeface="Microsoft YaHei"/>
+                <a:ea typeface="Microsoft YaHei"/>
+                <a:cs typeface="Microsoft YaHei"/>
+              </a:defRPr>
+            </a:defPPr>
+          </a:lstStyle>
+          <a:p xmlns:a="http://schemas.openxmlformats.org/drawingml/2006/main">
+            <a:pPr algn="r">
+              <a:defRPr sz="1425" b="0">
+                <a:solidFill>
+                  <a:srgbClr val="62768A"/>
+                </a:solidFill>
+                <a:latin typeface="Microsoft YaHei"/>
+                <a:ea typeface="Microsoft YaHei"/>
+                <a:cs typeface="Microsoft YaHei"/>
+              </a:defRPr>
+            </a:pPr>
+            <a:r>
+              <a:rPr sz="1425" b="0">
+                <a:solidFill>
+                  <a:srgbClr val="62768A"/>
+                </a:solidFill>
+                <a:latin typeface="Microsoft YaHei"/>
+                <a:ea typeface="Microsoft YaHei"/>
+                <a:cs typeface="Microsoft YaHei"/>
+              </a:rPr>
+              <a:t>07</a:t>
+            </a:r>
+          </a:p>
+        </p:txBody>
+      </p:sp>
+    </p:spTree>
+    <p:extLst>
+      <p:ext uri="{BB962C8B-B14F-4D97-AF65-F5344CB8AC3E}">
+        <p14:creationId xmlns:p14="http://schemas.microsoft.com/office/powerpoint/2010/main" val="1755162742"/>
+      </p:ext>
+    </p:extLst>
+  </p:cSld>
+  <p:timing>
+    <p:tnLst>
+      <p:par>
+        <p:cTn id="1" dur="indefinite" restart="never" nodeType="tmRoot">
+          <p:childTnLst>
+            <p:seq concurrent="1" nextAc="seek">
+              <p:cTn id="2" dur="indefinite" nodeType="mainSeq">
+                <p:childTnLst>
+                  <p:par>
+                    <p:cTn id="3" fill="hold">
+                      <p:stCondLst>
+                        <p:cond delay="indefinite"/>
+                      </p:stCondLst>
+                      <p:childTnLst>
+                        <p:par>
+                          <p:cTn id="4" fill="hold">
+                            <p:stCondLst>
+                              <p:cond delay="0"/>
+                            </p:stCondLst>
+                            <p:childTnLst>
+                              <p:par>
+                                <p:cTn id="5" presetID="1" presetClass="entr" presetSubtype="0" fill="hold" grpId="1" nodeType="clickEffect">
+                                  <p:stCondLst>
+                                    <p:cond delay="0"/>
+                                  </p:stCondLst>
+                                  <p:childTnLst>
+                                    <p:set>
+                                      <p:cBhvr>
+                                        <p:cTn id="6" dur="1" fill="hold">
+                                          <p:stCondLst>
+                                            <p:cond delay="0"/>
+                                          </p:stCondLst>
+                                        </p:cTn>
+                                        <p:tgtEl>
+                                          <p:spTgt spid="5"/>
+                                        </p:tgtEl>
+                                        <p:attrNameLst>
+                                          <p:attrName>style.visibility</p:attrName>
+                                        </p:attrNameLst>
+                                      </p:cBhvr>
+                                      <p:to>
+                                        <p:strVal val="visible"/>
+                                      </p:to>
+                                    </p:set>
+                                  </p:childTnLst>
+                                </p:cTn>
+                              </p:par>
+                              <p:par>
+                                <p:cTn id="7" presetID="1" presetClass="entr" presetSubtype="0" fill="hold" grpId="1" nodeType="withEffect">
+                                  <p:stCondLst>
+                                    <p:cond delay="0"/>
+                                  </p:stCondLst>
+                                  <p:childTnLst>
+                                    <p:set>
+                                      <p:cBhvr>
+                                        <p:cTn id="8" dur="1" fill="hold">
+                                          <p:stCondLst>
+                                            <p:cond delay="0"/>
+                                          </p:stCondLst>
+                                        </p:cTn>
+                                        <p:tgtEl>
+                                          <p:spTgt spid="6"/>
+                                        </p:tgtEl>
+                                        <p:attrNameLst>
+                                          <p:attrName>style.visibility</p:attrName>
+                                        </p:attrNameLst>
+                                      </p:cBhvr>
+                                      <p:to>
+                                        <p:strVal val="visible"/>
+                                      </p:to>
+                                    </p:set>
+                                  </p:childTnLst>
+                                </p:cTn>
+                              </p:par>
+                              <p:par>
+                                <p:cTn id="9" presetID="1" presetClass="entr" presetSubtype="0" fill="hold" grpId="1" nodeType="withEffect">
+                                  <p:stCondLst>
+                                    <p:cond delay="0"/>
+                                  </p:stCondLst>
+                                  <p:childTnLst>
+                                    <p:set>
+                                      <p:cBhvr>
+                                        <p:cTn id="10" dur="1" fill="hold">
+                                          <p:stCondLst>
+                                            <p:cond delay="0"/>
+                                          </p:stCondLst>
+                                        </p:cTn>
+                                        <p:tgtEl>
+                                          <p:spTgt spid="7"/>
+                                        </p:tgtEl>
+                                        <p:attrNameLst>
+                                          <p:attrName>style.visibility</p:attrName>
+                                        </p:attrNameLst>
+                                      </p:cBhvr>
+                                      <p:to>
+                                        <p:strVal val="visible"/>
+                                      </p:to>
+                                    </p:set>
+                                  </p:childTnLst>
+                                </p:cTn>
+                              </p:par>
+                              <p:par>
+                                <p:cTn id="11" presetID="1" presetClass="entr" presetSubtype="0" fill="hold" grpId="1" nodeType="withEffect">
+                                  <p:stCondLst>
+                                    <p:cond delay="0"/>
+                                  </p:stCondLst>
+                                  <p:childTnLst>
+                                    <p:set>
+                                      <p:cBhvr>
+                                        <p:cTn id="12" dur="1" fill="hold">
+                                          <p:stCondLst>
+                                            <p:cond delay="0"/>
+                                          </p:stCondLst>
+                                        </p:cTn>
+                                        <p:tgtEl>
+                                          <p:spTgt spid="8"/>
+                                        </p:tgtEl>
+                                        <p:attrNameLst>
+                                          <p:attrName>style.visibility</p:attrName>
+                                        </p:attrNameLst>
+                                      </p:cBhvr>
+                                      <p:to>
+                                        <p:strVal val="visible"/>
+                                      </p:to>
+                                    </p:set>
+                                  </p:childTnLst>
+                                </p:cTn>
+                              </p:par>
+                              <p:par>
+                                <p:cTn id="13" presetID="1" presetClass="entr" presetSubtype="0" fill="hold" grpId="1" nodeType="withEffect">
+                                  <p:stCondLst>
+                                    <p:cond delay="0"/>
+                                  </p:stCondLst>
+                                  <p:childTnLst>
+                                    <p:set>
+                                      <p:cBhvr>
+                                        <p:cTn id="14" dur="1" fill="hold">
+                                          <p:stCondLst>
+                                            <p:cond delay="0"/>
+                                          </p:stCondLst>
+                                        </p:cTn>
+                                        <p:tgtEl>
+                                          <p:spTgt spid="9"/>
+                                        </p:tgtEl>
+                                        <p:attrNameLst>
+                                          <p:attrName>style.visibility</p:attrName>
+                                        </p:attrNameLst>
+                                      </p:cBhvr>
+                                      <p:to>
+                                        <p:strVal val="visible"/>
+                                      </p:to>
+                                    </p:set>
+                                  </p:childTnLst>
+                                </p:cTn>
+                              </p:par>
+                              <p:par>
+                                <p:cTn id="15" presetID="1" presetClass="entr" presetSubtype="0" fill="hold" grpId="1" nodeType="withEffect">
+                                  <p:stCondLst>
+                                    <p:cond delay="0"/>
+                                  </p:stCondLst>
+                                  <p:childTnLst>
+                                    <p:set>
+                                      <p:cBhvr>
+                                        <p:cTn id="16" dur="1" fill="hold">
+                                          <p:stCondLst>
+                                            <p:cond delay="0"/>
+                                          </p:stCondLst>
+                                        </p:cTn>
+                                        <p:tgtEl>
+                                          <p:spTgt spid="10"/>
+                                        </p:tgtEl>
+                                        <p:attrNameLst>
+                                          <p:attrName>style.visibility</p:attrName>
+                                        </p:attrNameLst>
+                                      </p:cBhvr>
+                                      <p:to>
+                                        <p:strVal val="visible"/>
+                                      </p:to>
+                                    </p:set>
+                                  </p:childTnLst>
+                                </p:cTn>
+                              </p:par>
+                              <p:par>
+                                <p:cTn id="17" presetID="1" presetClass="entr" presetSubtype="0" fill="hold" grpId="1" nodeType="withEffect">
+                                  <p:stCondLst>
+                                    <p:cond delay="0"/>
+                                  </p:stCondLst>
+                                  <p:childTnLst>
+                                    <p:set>
+                                      <p:cBhvr>
+                                        <p:cTn id="18" dur="1" fill="hold">
+                                          <p:stCondLst>
+                                            <p:cond delay="0"/>
+                                          </p:stCondLst>
+                                        </p:cTn>
+                                        <p:tgtEl>
+                                          <p:spTgt spid="11"/>
+                                        </p:tgtEl>
+                                        <p:attrNameLst>
+                                          <p:attrName>style.visibility</p:attrName>
+                                        </p:attrNameLst>
+                                      </p:cBhvr>
+                                      <p:to>
+                                        <p:strVal val="visible"/>
+                                      </p:to>
+                                    </p:set>
+                                  </p:childTnLst>
+                                </p:cTn>
+                              </p:par>
+                              <p:par>
+                                <p:cTn id="19" presetID="1" presetClass="entr" presetSubtype="0" fill="hold" grpId="1" nodeType="withEffect">
+                                  <p:stCondLst>
+                                    <p:cond delay="0"/>
+                                  </p:stCondLst>
+                                  <p:childTnLst>
+                                    <p:set>
+                                      <p:cBhvr>
+                                        <p:cTn id="20" dur="1" fill="hold">
+                                          <p:stCondLst>
+                                            <p:cond delay="0"/>
+                                          </p:stCondLst>
+                                        </p:cTn>
+                                        <p:tgtEl>
+                                          <p:spTgt spid="12"/>
+                                        </p:tgtEl>
+                                        <p:attrNameLst>
+                                          <p:attrName>style.visibility</p:attrName>
+                                        </p:attrNameLst>
+                                      </p:cBhvr>
+                                      <p:to>
+                                        <p:strVal val="visible"/>
+                                      </p:to>
+                                    </p:set>
+                                  </p:childTnLst>
+                                </p:cTn>
+                              </p:par>
+                            </p:childTnLst>
+                          </p:cTn>
+                        </p:par>
+                      </p:childTnLst>
+                    </p:cTn>
+                  </p:par>
+                  <p:par>
+                    <p:cTn id="21" fill="hold">
+                      <p:stCondLst>
+                        <p:cond delay="indefinite"/>
+                      </p:stCondLst>
+                      <p:childTnLst>
+                        <p:par>
+                          <p:cTn id="22" fill="hold">
+                            <p:stCondLst>
+                              <p:cond delay="0"/>
+                            </p:stCondLst>
+                            <p:childTnLst>
+                              <p:par>
+                                <p:cTn id="23" presetID="1" presetClass="entr" presetSubtype="0" fill="hold" grpId="2" nodeType="clickEffect">
+                                  <p:stCondLst>
+                                    <p:cond delay="0"/>
+                                  </p:stCondLst>
+                                  <p:childTnLst>
+                                    <p:set>
+                                      <p:cBhvr>
+                                        <p:cTn id="24" dur="1" fill="hold">
+                                          <p:stCondLst>
+                                            <p:cond delay="0"/>
+                                          </p:stCondLst>
+                                        </p:cTn>
+                                        <p:tgtEl>
+                                          <p:spTgt spid="13"/>
+                                        </p:tgtEl>
+                                        <p:attrNameLst>
+                                          <p:attrName>style.visibility</p:attrName>
+                                        </p:attrNameLst>
+                                      </p:cBhvr>
+                                      <p:to>
+                                        <p:strVal val="visible"/>
+                                      </p:to>
+                                    </p:set>
+                                  </p:childTnLst>
+                                </p:cTn>
+                              </p:par>
+                              <p:par>
+                                <p:cTn id="25" presetID="1" presetClass="entr" presetSubtype="0" fill="hold" grpId="2" nodeType="withEffect">
+                                  <p:stCondLst>
+                                    <p:cond delay="0"/>
+                                  </p:stCondLst>
+                                  <p:childTnLst>
+                                    <p:set>
+                                      <p:cBhvr>
+                                        <p:cTn id="26" dur="1" fill="hold">
+                                          <p:stCondLst>
+                                            <p:cond delay="0"/>
+                                          </p:stCondLst>
+                                        </p:cTn>
+                                        <p:tgtEl>
+                                          <p:spTgt spid="14"/>
+                                        </p:tgtEl>
+                                        <p:attrNameLst>
+                                          <p:attrName>style.visibility</p:attrName>
+                                        </p:attrNameLst>
+                                      </p:cBhvr>
+                                      <p:to>
+                                        <p:strVal val="visible"/>
+                                      </p:to>
+                                    </p:set>
+                                  </p:childTnLst>
+                                </p:cTn>
+                              </p:par>
+                              <p:par>
+                                <p:cTn id="27" presetID="1" presetClass="entr" presetSubtype="0" fill="hold" grpId="2" nodeType="withEffect">
+                                  <p:stCondLst>
+                                    <p:cond delay="0"/>
+                                  </p:stCondLst>
+                                  <p:childTnLst>
+                                    <p:set>
+                                      <p:cBhvr>
+                                        <p:cTn id="28" dur="1" fill="hold">
+                                          <p:stCondLst>
+                                            <p:cond delay="0"/>
+                                          </p:stCondLst>
+                                        </p:cTn>
+                                        <p:tgtEl>
+                                          <p:spTgt spid="15"/>
+                                        </p:tgtEl>
+                                        <p:attrNameLst>
+                                          <p:attrName>style.visibility</p:attrName>
+                                        </p:attrNameLst>
+                                      </p:cBhvr>
+                                      <p:to>
+                                        <p:strVal val="visible"/>
+                                      </p:to>
+                                    </p:set>
+                                  </p:childTnLst>
+                                </p:cTn>
+                              </p:par>
+                              <p:par>
+                                <p:cTn id="29" presetID="1" presetClass="entr" presetSubtype="0" fill="hold" grpId="2" nodeType="withEffect">
+                                  <p:stCondLst>
+                                    <p:cond delay="0"/>
+                                  </p:stCondLst>
+                                  <p:childTnLst>
+                                    <p:set>
+                                      <p:cBhvr>
+                                        <p:cTn id="30" dur="1" fill="hold">
+                                          <p:stCondLst>
+                                            <p:cond delay="0"/>
+                                          </p:stCondLst>
+                                        </p:cTn>
+                                        <p:tgtEl>
+                                          <p:spTgt spid="16"/>
+                                        </p:tgtEl>
+                                        <p:attrNameLst>
+                                          <p:attrName>style.visibility</p:attrName>
+                                        </p:attrNameLst>
+                                      </p:cBhvr>
+                                      <p:to>
+                                        <p:strVal val="visible"/>
+                                      </p:to>
+                                    </p:set>
+                                  </p:childTnLst>
+                                </p:cTn>
+                              </p:par>
+                              <p:par>
+                                <p:cTn id="31" presetID="1" presetClass="entr" presetSubtype="0" fill="hold" grpId="2" nodeType="withEffect">
+                                  <p:stCondLst>
+                                    <p:cond delay="0"/>
+                                  </p:stCondLst>
+                                  <p:childTnLst>
+                                    <p:set>
+                                      <p:cBhvr>
+                                        <p:cTn id="32" dur="1" fill="hold">
+                                          <p:stCondLst>
+                                            <p:cond delay="0"/>
+                                          </p:stCondLst>
+                                        </p:cTn>
+                                        <p:tgtEl>
+                                          <p:spTgt spid="17"/>
+                                        </p:tgtEl>
+                                        <p:attrNameLst>
+                                          <p:attrName>style.visibility</p:attrName>
+                                        </p:attrNameLst>
+                                      </p:cBhvr>
+                                      <p:to>
+                                        <p:strVal val="visible"/>
+                                      </p:to>
+                                    </p:set>
+                                  </p:childTnLst>
+                                </p:cTn>
+                              </p:par>
+                              <p:par>
+                                <p:cTn id="33" presetID="1" presetClass="entr" presetSubtype="0" fill="hold" grpId="2" nodeType="withEffect">
+                                  <p:stCondLst>
+                                    <p:cond delay="0"/>
+                                  </p:stCondLst>
+                                  <p:childTnLst>
+                                    <p:set>
+                                      <p:cBhvr>
+                                        <p:cTn id="34" dur="1" fill="hold">
+                                          <p:stCondLst>
+                                            <p:cond delay="0"/>
+                                          </p:stCondLst>
+                                        </p:cTn>
+                                        <p:tgtEl>
+                                          <p:spTgt spid="18"/>
+                                        </p:tgtEl>
+                                        <p:attrNameLst>
+                                          <p:attrName>style.visibility</p:attrName>
+                                        </p:attrNameLst>
+                                      </p:cBhvr>
+                                      <p:to>
+                                        <p:strVal val="visible"/>
+                                      </p:to>
+                                    </p:set>
+                                  </p:childTnLst>
+                                </p:cTn>
+                              </p:par>
+                              <p:par>
+                                <p:cTn id="35" presetID="1" presetClass="entr" presetSubtype="0" fill="hold" grpId="2" nodeType="withEffect">
+                                  <p:stCondLst>
+                                    <p:cond delay="0"/>
+                                  </p:stCondLst>
+                                  <p:childTnLst>
+                                    <p:set>
+                                      <p:cBhvr>
+                                        <p:cTn id="36" dur="1" fill="hold">
+                                          <p:stCondLst>
+                                            <p:cond delay="0"/>
+                                          </p:stCondLst>
+                                        </p:cTn>
+                                        <p:tgtEl>
+                                          <p:spTgt spid="19"/>
+                                        </p:tgtEl>
+                                        <p:attrNameLst>
+                                          <p:attrName>style.visibility</p:attrName>
+                                        </p:attrNameLst>
+                                      </p:cBhvr>
+                                      <p:to>
+                                        <p:strVal val="visible"/>
+                                      </p:to>
+                                    </p:set>
+                                  </p:childTnLst>
+                                </p:cTn>
+                              </p:par>
+                              <p:par>
+                                <p:cTn id="37" presetID="1" presetClass="entr" presetSubtype="0" fill="hold" grpId="2" nodeType="withEffect">
+                                  <p:stCondLst>
+                                    <p:cond delay="0"/>
+                                  </p:stCondLst>
+                                  <p:childTnLst>
+                                    <p:set>
+                                      <p:cBhvr>
+                                        <p:cTn id="38" dur="1" fill="hold">
+                                          <p:stCondLst>
+                                            <p:cond delay="0"/>
+                                          </p:stCondLst>
+                                        </p:cTn>
+                                        <p:tgtEl>
+                                          <p:spTgt spid="20"/>
+                                        </p:tgtEl>
+                                        <p:attrNameLst>
+                                          <p:attrName>style.visibility</p:attrName>
+                                        </p:attrNameLst>
+                                      </p:cBhvr>
+                                      <p:to>
+                                        <p:strVal val="visible"/>
+                                      </p:to>
+                                    </p:set>
+                                  </p:childTnLst>
+                                </p:cTn>
+                              </p:par>
+                              <p:par>
+                                <p:cTn id="39" presetID="1" presetClass="entr" presetSubtype="0" fill="hold" grpId="2" nodeType="withEffect">
+                                  <p:stCondLst>
+                                    <p:cond delay="0"/>
+                                  </p:stCondLst>
+                                  <p:childTnLst>
+                                    <p:set>
+                                      <p:cBhvr>
+                                        <p:cTn id="40" dur="1" fill="hold">
+                                          <p:stCondLst>
+                                            <p:cond delay="0"/>
+                                          </p:stCondLst>
+                                        </p:cTn>
+                                        <p:tgtEl>
+                                          <p:spTgt spid="21"/>
+                                        </p:tgtEl>
+                                        <p:attrNameLst>
+                                          <p:attrName>style.visibility</p:attrName>
+                                        </p:attrNameLst>
+                                      </p:cBhvr>
+                                      <p:to>
+                                        <p:strVal val="visible"/>
+                                      </p:to>
+                                    </p:set>
+                                  </p:childTnLst>
+                                </p:cTn>
+                              </p:par>
+                            </p:childTnLst>
+                          </p:cTn>
+                        </p:par>
+                      </p:childTnLst>
+                    </p:cTn>
+                  </p:par>
+                </p:childTnLst>
+              </p:cTn>
+              <p:prevCondLst>
+                <p:cond evt="onPrev" delay="0">
+                  <p:tgtEl>
+                    <p:sldTgt/>
+                  </p:tgtEl>
+                </p:cond>
+              </p:prevCondLst>
+              <p:nextCondLst>
+                <p:cond evt="onNext" delay="0">
+                  <p:tgtEl>
+                    <p:sldTgt/>
+                  </p:tgtEl>
+                </p:cond>
+              </p:nextCondLst>
+            </p:seq>
+          </p:childTnLst>
+        </p:cTn>
+      </p:par>
+    </p:tnLst>
+    <p:bldLst>
+      <p:bldP spid="5" grpId="1"/>
+      <p:bldP spid="6" grpId="1"/>
+      <p:bldP spid="7" grpId="1"/>
+      <p:bldP spid="8" grpId="1"/>
+      <p:bldP spid="9" grpId="1"/>
+      <p:bldP spid="10" grpId="1"/>
+      <p:bldP spid="11" grpId="1"/>
+      <p:bldP spid="12" grpId="1"/>
+      <p:bldP spid="13" grpId="2"/>
+      <p:bldP spid="14" grpId="2"/>
+      <p:bldP spid="15" grpId="2"/>
+      <p:bldP spid="16" grpId="2"/>
+      <p:bldP spid="17" grpId="2"/>
+      <p:bldP spid="18" grpId="2"/>
+      <p:bldP spid="19" grpId="2"/>
+      <p:bldP spid="20" grpId="2"/>
+      <p:bldP spid="21" grpId="2"/>
+    </p:bldLst>
+  </p:timing>
+</p:sld>
+</file>
+
+<file path=ppt/slides/slide8.xml><?xml version="1.0" encoding="utf-8"?>
+<p:sld xmlns:p="http://schemas.openxmlformats.org/presentationml/2006/main">
+  <p:cSld>
+    <p:bg>
+      <p:bgPr>
+        <a:solidFill xmlns:a="http://schemas.openxmlformats.org/drawingml/2006/main">
+          <a:srgbClr val="F7F9FC"/>
+        </a:solidFill>
+      </p:bgPr>
+    </p:bg>
+    <p:spTree>
+      <p:nvGrpSpPr>
+        <p:cNvPr id="1" name=""/>
+        <p:cNvGrpSpPr/>
+        <p:nvPr/>
+      </p:nvGrpSpPr>
+      <p:grpSpPr>
+        <a:xfrm xmlns:a="http://schemas.openxmlformats.org/drawingml/2006/main"/>
+      </p:grpSpPr>
+      <p:sp>
+        <p:nvSpPr>
+          <p:cNvPr id="36" name="object-432">
+            <a:extLst xmlns:a="http://schemas.openxmlformats.org/drawingml/2006/main">
+              <a:ext uri="{FF2B5EF4-FFF2-40B4-BE49-F238E27FC236}">
+                <a16:creationId xmlns:a16="http://schemas.microsoft.com/office/drawing/2014/main" id="{AEF904F2-8FAB-4EF9-AF8C-B73CB35FA1CF}"/>
+              </a:ext>
+            </a:extLst>
+          </p:cNvPr>
+          <p:cNvSpPr>
+            <a:spLocks xmlns:a="http://schemas.openxmlformats.org/drawingml/2006/main" noGrp="1"/>
+          </p:cNvSpPr>
+          <p:nvPr/>
+        </p:nvSpPr>
+        <p:spPr>
+          <a:xfrm xmlns:a="http://schemas.openxmlformats.org/drawingml/2006/main">
+            <a:off x="609600" y="457200"/>
+            <a:ext cx="10953750" cy="666750"/>
+          </a:xfrm>
+          <a:prstGeom xmlns:a="http://schemas.openxmlformats.org/drawingml/2006/main" prst="rect">
+            <a:avLst/>
+          </a:prstGeom>
+          <a:noFill xmlns:a="http://schemas.openxmlformats.org/drawingml/2006/main"/>
+          <a:ln xmlns:a="http://schemas.openxmlformats.org/drawingml/2006/main" w="0">
+            <a:noFill/>
+            <a:prstDash val="solid"/>
+          </a:ln>
+        </p:spPr>
+        <p:txBody>
+          <a:bodyPr xmlns:a="http://schemas.openxmlformats.org/drawingml/2006/main" wrap="none" lIns="0" tIns="0" rIns="0" bIns="0" anchor="ctr"/>
+          <a:lstStyle xmlns:a="http://schemas.openxmlformats.org/drawingml/2006/main">
+            <a:defPPr algn="l">
+              <a:defRPr sz="3150" b="1">
+                <a:solidFill>
+                  <a:srgbClr val="12263B"/>
+                </a:solidFill>
+                <a:latin typeface="Microsoft YaHei"/>
+                <a:ea typeface="Microsoft YaHei"/>
+                <a:cs typeface="Microsoft YaHei"/>
+              </a:defRPr>
+            </a:defPPr>
+          </a:lstStyle>
+          <a:p xmlns:a="http://schemas.openxmlformats.org/drawingml/2006/main">
+            <a:pPr algn="l">
+              <a:defRPr sz="3150" b="1">
+                <a:solidFill>
+                  <a:srgbClr val="12263B"/>
+                </a:solidFill>
+                <a:latin typeface="Microsoft YaHei"/>
+                <a:ea typeface="Microsoft YaHei"/>
+                <a:cs typeface="Microsoft YaHei"/>
+              </a:defRPr>
+            </a:pPr>
+            <a:r>
+              <a:rPr sz="3150" b="1">
+                <a:solidFill>
+                  <a:srgbClr val="12263B"/>
+                </a:solidFill>
+                <a:latin typeface="Microsoft YaHei"/>
+                <a:ea typeface="Microsoft YaHei"/>
+                <a:cs typeface="Microsoft YaHei"/>
+              </a:rPr>
+              <a:t>再看这三个操作</a:t>
+            </a:r>
+          </a:p>
+        </p:txBody>
+      </p:sp>
+      <p:sp>
+        <p:nvSpPr>
+          <p:cNvPr id="2" name="object-433">
+            <a:extLst xmlns:a="http://schemas.openxmlformats.org/drawingml/2006/main">
+              <a:ext uri="{FF2B5EF4-FFF2-40B4-BE49-F238E27FC236}">
+                <a16:creationId xmlns:a16="http://schemas.microsoft.com/office/drawing/2014/main" id="{6FBF5070-57D2-43DA-BA84-DC4FF58F584F}"/>
+              </a:ext>
+            </a:extLst>
+          </p:cNvPr>
+          <p:cNvSpPr>
+            <a:spLocks xmlns:a="http://schemas.openxmlformats.org/drawingml/2006/main" noGrp="1"/>
+          </p:cNvSpPr>
+          <p:nvPr/>
+        </p:nvSpPr>
+        <p:spPr>
+          <a:xfrm xmlns:a="http://schemas.openxmlformats.org/drawingml/2006/main">
+            <a:off x="609600" y="1333500"/>
+            <a:ext cx="10858500" cy="381000"/>
+          </a:xfrm>
+          <a:prstGeom xmlns:a="http://schemas.openxmlformats.org/drawingml/2006/main" prst="rect">
+            <a:avLst/>
+          </a:prstGeom>
+          <a:noFill xmlns:a="http://schemas.openxmlformats.org/drawingml/2006/main"/>
+          <a:ln xmlns:a="http://schemas.openxmlformats.org/drawingml/2006/main" w="0">
+            <a:noFill/>
+            <a:prstDash val="solid"/>
+          </a:ln>
+        </p:spPr>
+        <p:txBody>
+          <a:bodyPr xmlns:a="http://schemas.openxmlformats.org/drawingml/2006/main" wrap="none" lIns="0" tIns="0" rIns="0" bIns="0" anchor="ctr"/>
+          <a:lstStyle xmlns:a="http://schemas.openxmlformats.org/drawingml/2006/main">
+            <a:defPPr algn="l">
+              <a:defRPr sz="2100" b="0">
+                <a:solidFill>
+                  <a:srgbClr val="62768A"/>
+                </a:solidFill>
+                <a:latin typeface="Microsoft YaHei"/>
+                <a:ea typeface="Microsoft YaHei"/>
+                <a:cs typeface="Microsoft YaHei"/>
+              </a:defRPr>
+            </a:defPPr>
+          </a:lstStyle>
+          <a:p xmlns:a="http://schemas.openxmlformats.org/drawingml/2006/main">
+            <a:pPr algn="l">
+              <a:defRPr sz="2100" b="0">
+                <a:solidFill>
+                  <a:srgbClr val="62768A"/>
+                </a:solidFill>
+                <a:latin typeface="Microsoft YaHei"/>
+                <a:ea typeface="Microsoft YaHei"/>
+                <a:cs typeface="Microsoft YaHei"/>
+              </a:defRPr>
+            </a:pPr>
+            <a:r>
+              <a:rPr sz="2100" b="0">
+                <a:solidFill>
+                  <a:srgbClr val="62768A"/>
+                </a:solidFill>
+                <a:latin typeface="Microsoft YaHei"/>
+                <a:ea typeface="Microsoft YaHei"/>
+                <a:cs typeface="Microsoft YaHei"/>
+              </a:rPr>
+              <a:t>回到这一路音乐，三个操作分别改变了什么？</a:t>
+            </a:r>
+          </a:p>
+        </p:txBody>
+      </p:sp>
+      <p:sp>
+        <p:nvSpPr>
+          <p:cNvPr id="3" name="object-434">
+            <a:extLst xmlns:a="http://schemas.openxmlformats.org/drawingml/2006/main">
+              <a:ext uri="{FF2B5EF4-FFF2-40B4-BE49-F238E27FC236}">
+                <a16:creationId xmlns:a16="http://schemas.microsoft.com/office/drawing/2014/main" id="{8E70C5ED-D0F4-4894-9A79-AD6B67886DC7}"/>
+              </a:ext>
+            </a:extLst>
+          </p:cNvPr>
+          <p:cNvSpPr>
+            <a:spLocks xmlns:a="http://schemas.openxmlformats.org/drawingml/2006/main" noGrp="1"/>
+          </p:cNvSpPr>
+          <p:nvPr/>
+        </p:nvSpPr>
+        <p:spPr>
+          <a:xfrm xmlns:a="http://schemas.openxmlformats.org/drawingml/2006/main">
+            <a:off x="609600" y="3038475"/>
+            <a:ext cx="1333500" cy="428625"/>
+          </a:xfrm>
+          <a:prstGeom xmlns:a="http://schemas.openxmlformats.org/drawingml/2006/main" prst="rect">
+            <a:avLst/>
+          </a:prstGeom>
+          <a:solidFill xmlns:a="http://schemas.openxmlformats.org/drawingml/2006/main">
+            <a:srgbClr val="119A92"/>
+          </a:solidFill>
+          <a:ln xmlns:a="http://schemas.openxmlformats.org/drawingml/2006/main" w="0">
+            <a:noFill/>
+            <a:prstDash val="solid"/>
+          </a:ln>
+        </p:spPr>
+      </p:sp>
+      <p:sp>
+        <p:nvSpPr>
+          <p:cNvPr id="4" name="object-435">
+            <a:extLst xmlns:a="http://schemas.openxmlformats.org/drawingml/2006/main">
+              <a:ext uri="{FF2B5EF4-FFF2-40B4-BE49-F238E27FC236}">
+                <a16:creationId xmlns:a16="http://schemas.microsoft.com/office/drawing/2014/main" id="{4647225B-40CE-4F20-83A5-F3C78EF27008}"/>
               </a:ext>
             </a:extLst>
           </p:cNvPr>
@@ -24690,10 +29625,10 @@
       </p:sp>
       <p:sp>
         <p:nvSpPr>
-          <p:cNvPr id="5" name="line-378">
-            <a:extLst xmlns:a="http://schemas.openxmlformats.org/drawingml/2006/main">
-              <a:ext uri="{FF2B5EF4-FFF2-40B4-BE49-F238E27FC236}">
-                <a16:creationId xmlns:a16="http://schemas.microsoft.com/office/drawing/2014/main" id="{28B9AE19-4BB5-4898-AB9A-0E5D9645D680}"/>
+          <p:cNvPr id="5" name="line-436">
+            <a:extLst xmlns:a="http://schemas.openxmlformats.org/drawingml/2006/main">
+              <a:ext uri="{FF2B5EF4-FFF2-40B4-BE49-F238E27FC236}">
+                <a16:creationId xmlns:a16="http://schemas.microsoft.com/office/drawing/2014/main" id="{16BCDD93-BF9E-47BD-8F76-04CF6FA9EEF8}"/>
               </a:ext>
             </a:extLst>
           </p:cNvPr>
@@ -24730,10 +29665,10 @@
       </p:sp>
       <p:sp>
         <p:nvSpPr>
-          <p:cNvPr id="6" name="line-379">
-            <a:extLst xmlns:a="http://schemas.openxmlformats.org/drawingml/2006/main">
-              <a:ext uri="{FF2B5EF4-FFF2-40B4-BE49-F238E27FC236}">
-                <a16:creationId xmlns:a16="http://schemas.microsoft.com/office/drawing/2014/main" id="{EAE5D773-3456-48DD-9787-518236FEAA9C}"/>
+          <p:cNvPr id="6" name="line-437">
+            <a:extLst xmlns:a="http://schemas.openxmlformats.org/drawingml/2006/main">
+              <a:ext uri="{FF2B5EF4-FFF2-40B4-BE49-F238E27FC236}">
+                <a16:creationId xmlns:a16="http://schemas.microsoft.com/office/drawing/2014/main" id="{114BAC99-8BE4-4DDD-9AE6-719EE25C1C57}"/>
               </a:ext>
             </a:extLst>
           </p:cNvPr>
@@ -24770,10 +29705,10 @@
       </p:sp>
       <p:sp>
         <p:nvSpPr>
-          <p:cNvPr id="7" name="line-380">
-            <a:extLst xmlns:a="http://schemas.openxmlformats.org/drawingml/2006/main">
-              <a:ext uri="{FF2B5EF4-FFF2-40B4-BE49-F238E27FC236}">
-                <a16:creationId xmlns:a16="http://schemas.microsoft.com/office/drawing/2014/main" id="{957D354F-59A1-44DF-A13F-676A129901E1}"/>
+          <p:cNvPr id="7" name="line-438">
+            <a:extLst xmlns:a="http://schemas.openxmlformats.org/drawingml/2006/main">
+              <a:ext uri="{FF2B5EF4-FFF2-40B4-BE49-F238E27FC236}">
+                <a16:creationId xmlns:a16="http://schemas.microsoft.com/office/drawing/2014/main" id="{D4F8327C-BD57-46B8-A678-5C4BBF76EC0E}"/>
               </a:ext>
             </a:extLst>
           </p:cNvPr>
@@ -24810,10 +29745,10 @@
       </p:sp>
       <p:sp>
         <p:nvSpPr>
-          <p:cNvPr id="8" name="object-381">
-            <a:extLst xmlns:a="http://schemas.openxmlformats.org/drawingml/2006/main">
-              <a:ext uri="{FF2B5EF4-FFF2-40B4-BE49-F238E27FC236}">
-                <a16:creationId xmlns:a16="http://schemas.microsoft.com/office/drawing/2014/main" id="{8D010DB5-9C7F-45F6-97F9-FDE4A051DAC9}"/>
+          <p:cNvPr id="8" name="object-439">
+            <a:extLst xmlns:a="http://schemas.openxmlformats.org/drawingml/2006/main">
+              <a:ext uri="{FF2B5EF4-FFF2-40B4-BE49-F238E27FC236}">
+                <a16:creationId xmlns:a16="http://schemas.microsoft.com/office/drawing/2014/main" id="{5EAEAB62-F01F-49CE-8C82-0B647D09D03B}"/>
               </a:ext>
             </a:extLst>
           </p:cNvPr>
@@ -24841,10 +29776,10 @@
       </p:sp>
       <p:sp>
         <p:nvSpPr>
-          <p:cNvPr id="9" name="object-382">
-            <a:extLst xmlns:a="http://schemas.openxmlformats.org/drawingml/2006/main">
-              <a:ext uri="{FF2B5EF4-FFF2-40B4-BE49-F238E27FC236}">
-                <a16:creationId xmlns:a16="http://schemas.microsoft.com/office/drawing/2014/main" id="{2B06FF96-5101-4C39-94EE-59E2375EF99C}"/>
+          <p:cNvPr id="9" name="object-440">
+            <a:extLst xmlns:a="http://schemas.openxmlformats.org/drawingml/2006/main">
+              <a:ext uri="{FF2B5EF4-FFF2-40B4-BE49-F238E27FC236}">
+                <a16:creationId xmlns:a16="http://schemas.microsoft.com/office/drawing/2014/main" id="{00763F2C-C7E6-4DC7-9B01-574B4E959A97}"/>
               </a:ext>
             </a:extLst>
           </p:cNvPr>
@@ -24872,10 +29807,10 @@
       </p:sp>
       <p:sp>
         <p:nvSpPr>
-          <p:cNvPr id="10" name="object-383">
-            <a:extLst xmlns:a="http://schemas.openxmlformats.org/drawingml/2006/main">
-              <a:ext uri="{FF2B5EF4-FFF2-40B4-BE49-F238E27FC236}">
-                <a16:creationId xmlns:a16="http://schemas.microsoft.com/office/drawing/2014/main" id="{052E5BE0-A4EF-4604-9D9E-DE1A6DCC3A81}"/>
+          <p:cNvPr id="10" name="object-441">
+            <a:extLst xmlns:a="http://schemas.openxmlformats.org/drawingml/2006/main">
+              <a:ext uri="{FF2B5EF4-FFF2-40B4-BE49-F238E27FC236}">
+                <a16:creationId xmlns:a16="http://schemas.microsoft.com/office/drawing/2014/main" id="{79B09BD3-65BB-4620-8D4C-F2CA483AE022}"/>
               </a:ext>
             </a:extLst>
           </p:cNvPr>
@@ -24903,10 +29838,10 @@
       </p:sp>
       <p:sp>
         <p:nvSpPr>
-          <p:cNvPr id="11" name="object-384">
-            <a:extLst xmlns:a="http://schemas.openxmlformats.org/drawingml/2006/main">
-              <a:ext uri="{FF2B5EF4-FFF2-40B4-BE49-F238E27FC236}">
-                <a16:creationId xmlns:a16="http://schemas.microsoft.com/office/drawing/2014/main" id="{F2D75B8A-6BFA-4D4A-BD08-26E491C30659}"/>
+          <p:cNvPr id="11" name="object-442">
+            <a:extLst xmlns:a="http://schemas.openxmlformats.org/drawingml/2006/main">
+              <a:ext uri="{FF2B5EF4-FFF2-40B4-BE49-F238E27FC236}">
+                <a16:creationId xmlns:a16="http://schemas.microsoft.com/office/drawing/2014/main" id="{5825BA92-8682-409C-B1BA-55E9E69C5B47}"/>
               </a:ext>
             </a:extLst>
           </p:cNvPr>
@@ -24934,10 +29869,10 @@
       </p:sp>
       <p:sp>
         <p:nvSpPr>
-          <p:cNvPr id="12" name="object-385">
-            <a:extLst xmlns:a="http://schemas.openxmlformats.org/drawingml/2006/main">
-              <a:ext uri="{FF2B5EF4-FFF2-40B4-BE49-F238E27FC236}">
-                <a16:creationId xmlns:a16="http://schemas.microsoft.com/office/drawing/2014/main" id="{8530F4FF-952B-4792-B308-A0DADAB27AB2}"/>
+          <p:cNvPr id="12" name="object-443">
+            <a:extLst xmlns:a="http://schemas.openxmlformats.org/drawingml/2006/main">
+              <a:ext uri="{FF2B5EF4-FFF2-40B4-BE49-F238E27FC236}">
+                <a16:creationId xmlns:a16="http://schemas.microsoft.com/office/drawing/2014/main" id="{14E91A19-311D-4CCA-955A-CE7297D9C2F4}"/>
               </a:ext>
             </a:extLst>
           </p:cNvPr>
@@ -24965,10 +29900,10 @@
       </p:sp>
       <p:sp>
         <p:nvSpPr>
-          <p:cNvPr id="13" name="object-386">
-            <a:extLst xmlns:a="http://schemas.openxmlformats.org/drawingml/2006/main">
-              <a:ext uri="{FF2B5EF4-FFF2-40B4-BE49-F238E27FC236}">
-                <a16:creationId xmlns:a16="http://schemas.microsoft.com/office/drawing/2014/main" id="{88E2B40F-8201-4FA8-B849-B738F6945907}"/>
+          <p:cNvPr id="13" name="object-444">
+            <a:extLst xmlns:a="http://schemas.openxmlformats.org/drawingml/2006/main">
+              <a:ext uri="{FF2B5EF4-FFF2-40B4-BE49-F238E27FC236}">
+                <a16:creationId xmlns:a16="http://schemas.microsoft.com/office/drawing/2014/main" id="{DFBF7DCC-2756-4B03-8776-C08B15355EE1}"/>
               </a:ext>
             </a:extLst>
           </p:cNvPr>
@@ -24996,10 +29931,10 @@
       </p:sp>
       <p:sp>
         <p:nvSpPr>
-          <p:cNvPr id="14" name="object-387">
-            <a:extLst xmlns:a="http://schemas.openxmlformats.org/drawingml/2006/main">
-              <a:ext uri="{FF2B5EF4-FFF2-40B4-BE49-F238E27FC236}">
-                <a16:creationId xmlns:a16="http://schemas.microsoft.com/office/drawing/2014/main" id="{0EEDE721-02AF-4CAC-B463-44156D3C6057}"/>
+          <p:cNvPr id="14" name="object-445">
+            <a:extLst xmlns:a="http://schemas.openxmlformats.org/drawingml/2006/main">
+              <a:ext uri="{FF2B5EF4-FFF2-40B4-BE49-F238E27FC236}">
+                <a16:creationId xmlns:a16="http://schemas.microsoft.com/office/drawing/2014/main" id="{6A5DBA4C-F375-47AE-8415-1695A30C0782}"/>
               </a:ext>
             </a:extLst>
           </p:cNvPr>
@@ -25063,10 +29998,10 @@
       </p:sp>
       <p:sp>
         <p:nvSpPr>
-          <p:cNvPr id="15" name="object-388">
-            <a:extLst xmlns:a="http://schemas.openxmlformats.org/drawingml/2006/main">
-              <a:ext uri="{FF2B5EF4-FFF2-40B4-BE49-F238E27FC236}">
-                <a16:creationId xmlns:a16="http://schemas.microsoft.com/office/drawing/2014/main" id="{F9BEAC37-436B-4154-8F45-8912FFB69703}"/>
+          <p:cNvPr id="15" name="object-446">
+            <a:extLst xmlns:a="http://schemas.openxmlformats.org/drawingml/2006/main">
+              <a:ext uri="{FF2B5EF4-FFF2-40B4-BE49-F238E27FC236}">
+                <a16:creationId xmlns:a16="http://schemas.microsoft.com/office/drawing/2014/main" id="{107B949A-2609-45EB-9BA6-B941AF9B6819}"/>
               </a:ext>
             </a:extLst>
           </p:cNvPr>
@@ -25094,10 +30029,10 @@
       </p:sp>
       <p:sp>
         <p:nvSpPr>
-          <p:cNvPr id="16" name="object-389">
-            <a:extLst xmlns:a="http://schemas.openxmlformats.org/drawingml/2006/main">
-              <a:ext uri="{FF2B5EF4-FFF2-40B4-BE49-F238E27FC236}">
-                <a16:creationId xmlns:a16="http://schemas.microsoft.com/office/drawing/2014/main" id="{7615FB22-CA34-4399-87E3-F0766A88A70B}"/>
+          <p:cNvPr id="16" name="object-447">
+            <a:extLst xmlns:a="http://schemas.openxmlformats.org/drawingml/2006/main">
+              <a:ext uri="{FF2B5EF4-FFF2-40B4-BE49-F238E27FC236}">
+                <a16:creationId xmlns:a16="http://schemas.microsoft.com/office/drawing/2014/main" id="{BB039053-2BBE-4AB3-8931-2B6313CFF797}"/>
               </a:ext>
             </a:extLst>
           </p:cNvPr>
@@ -25161,10 +30096,10 @@
       </p:sp>
       <p:sp>
         <p:nvSpPr>
-          <p:cNvPr id="17" name="line-390">
-            <a:extLst xmlns:a="http://schemas.openxmlformats.org/drawingml/2006/main">
-              <a:ext uri="{FF2B5EF4-FFF2-40B4-BE49-F238E27FC236}">
-                <a16:creationId xmlns:a16="http://schemas.microsoft.com/office/drawing/2014/main" id="{0C145247-838B-4AF5-B7CE-111F3074421C}"/>
+          <p:cNvPr id="17" name="line-448">
+            <a:extLst xmlns:a="http://schemas.openxmlformats.org/drawingml/2006/main">
+              <a:ext uri="{FF2B5EF4-FFF2-40B4-BE49-F238E27FC236}">
+                <a16:creationId xmlns:a16="http://schemas.microsoft.com/office/drawing/2014/main" id="{3EB45A64-BFAB-4F4E-99BE-CFF6BD133E6F}"/>
               </a:ext>
             </a:extLst>
           </p:cNvPr>
@@ -25201,10 +30136,10 @@
       </p:sp>
       <p:sp>
         <p:nvSpPr>
-          <p:cNvPr id="18" name="line-391">
-            <a:extLst xmlns:a="http://schemas.openxmlformats.org/drawingml/2006/main">
-              <a:ext uri="{FF2B5EF4-FFF2-40B4-BE49-F238E27FC236}">
-                <a16:creationId xmlns:a16="http://schemas.microsoft.com/office/drawing/2014/main" id="{64E66F2C-C08D-4A81-929D-2FA064441AFC}"/>
+          <p:cNvPr id="18" name="line-449">
+            <a:extLst xmlns:a="http://schemas.openxmlformats.org/drawingml/2006/main">
+              <a:ext uri="{FF2B5EF4-FFF2-40B4-BE49-F238E27FC236}">
+                <a16:creationId xmlns:a16="http://schemas.microsoft.com/office/drawing/2014/main" id="{93BF6759-7F45-4583-9EE4-EA4520243445}"/>
               </a:ext>
             </a:extLst>
           </p:cNvPr>
@@ -25241,10 +30176,10 @@
       </p:sp>
       <p:sp>
         <p:nvSpPr>
-          <p:cNvPr id="19" name="line-392">
-            <a:extLst xmlns:a="http://schemas.openxmlformats.org/drawingml/2006/main">
-              <a:ext uri="{FF2B5EF4-FFF2-40B4-BE49-F238E27FC236}">
-                <a16:creationId xmlns:a16="http://schemas.microsoft.com/office/drawing/2014/main" id="{5F4ABEF6-6090-4DFD-B3CB-61BBBBC6A4F7}"/>
+          <p:cNvPr id="19" name="line-450">
+            <a:extLst xmlns:a="http://schemas.openxmlformats.org/drawingml/2006/main">
+              <a:ext uri="{FF2B5EF4-FFF2-40B4-BE49-F238E27FC236}">
+                <a16:creationId xmlns:a16="http://schemas.microsoft.com/office/drawing/2014/main" id="{8CB5AC1D-D87B-4535-8414-533E30B54A0D}"/>
               </a:ext>
             </a:extLst>
           </p:cNvPr>
@@ -25281,10 +30216,10 @@
       </p:sp>
       <p:sp>
         <p:nvSpPr>
-          <p:cNvPr id="20" name="line-393">
-            <a:extLst xmlns:a="http://schemas.openxmlformats.org/drawingml/2006/main">
-              <a:ext uri="{FF2B5EF4-FFF2-40B4-BE49-F238E27FC236}">
-                <a16:creationId xmlns:a16="http://schemas.microsoft.com/office/drawing/2014/main" id="{917B10A6-D1AA-4409-8839-23AF87F1488C}"/>
+          <p:cNvPr id="20" name="line-451">
+            <a:extLst xmlns:a="http://schemas.openxmlformats.org/drawingml/2006/main">
+              <a:ext uri="{FF2B5EF4-FFF2-40B4-BE49-F238E27FC236}">
+                <a16:creationId xmlns:a16="http://schemas.microsoft.com/office/drawing/2014/main" id="{E8E8D047-93C3-480F-A302-97D60E0E8CC1}"/>
               </a:ext>
             </a:extLst>
           </p:cNvPr>
@@ -25321,10 +30256,10 @@
       </p:sp>
       <p:sp>
         <p:nvSpPr>
-          <p:cNvPr id="21" name="line-394">
-            <a:extLst xmlns:a="http://schemas.openxmlformats.org/drawingml/2006/main">
-              <a:ext uri="{FF2B5EF4-FFF2-40B4-BE49-F238E27FC236}">
-                <a16:creationId xmlns:a16="http://schemas.microsoft.com/office/drawing/2014/main" id="{AADCE8FE-4CDE-41A6-A595-B1BFE46C1904}"/>
+          <p:cNvPr id="21" name="line-452">
+            <a:extLst xmlns:a="http://schemas.openxmlformats.org/drawingml/2006/main">
+              <a:ext uri="{FF2B5EF4-FFF2-40B4-BE49-F238E27FC236}">
+                <a16:creationId xmlns:a16="http://schemas.microsoft.com/office/drawing/2014/main" id="{D358C790-EF74-4826-B135-A405D79E9C45}"/>
               </a:ext>
             </a:extLst>
           </p:cNvPr>
@@ -25361,10 +30296,10 @@
       </p:sp>
       <p:sp>
         <p:nvSpPr>
-          <p:cNvPr id="22" name="line-395">
-            <a:extLst xmlns:a="http://schemas.openxmlformats.org/drawingml/2006/main">
-              <a:ext uri="{FF2B5EF4-FFF2-40B4-BE49-F238E27FC236}">
-                <a16:creationId xmlns:a16="http://schemas.microsoft.com/office/drawing/2014/main" id="{7440015C-5920-464D-9ED4-D1B8BFE262DA}"/>
+          <p:cNvPr id="22" name="line-453">
+            <a:extLst xmlns:a="http://schemas.openxmlformats.org/drawingml/2006/main">
+              <a:ext uri="{FF2B5EF4-FFF2-40B4-BE49-F238E27FC236}">
+                <a16:creationId xmlns:a16="http://schemas.microsoft.com/office/drawing/2014/main" id="{DBEE2EF2-2DD7-4286-B125-3972BD0682C1}"/>
               </a:ext>
             </a:extLst>
           </p:cNvPr>
@@ -25401,10 +30336,10 @@
       </p:sp>
       <p:sp>
         <p:nvSpPr>
-          <p:cNvPr id="23" name="line-396">
-            <a:extLst xmlns:a="http://schemas.openxmlformats.org/drawingml/2006/main">
-              <a:ext uri="{FF2B5EF4-FFF2-40B4-BE49-F238E27FC236}">
-                <a16:creationId xmlns:a16="http://schemas.microsoft.com/office/drawing/2014/main" id="{0530EF85-9DC6-496D-A3C9-B18F618A3FBA}"/>
+          <p:cNvPr id="23" name="line-454">
+            <a:extLst xmlns:a="http://schemas.openxmlformats.org/drawingml/2006/main">
+              <a:ext uri="{FF2B5EF4-FFF2-40B4-BE49-F238E27FC236}">
+                <a16:creationId xmlns:a16="http://schemas.microsoft.com/office/drawing/2014/main" id="{0CEDB08E-2F6E-4D71-AD5E-C8F7ACBB9B2A}"/>
               </a:ext>
             </a:extLst>
           </p:cNvPr>
@@ -25441,10 +30376,10 @@
       </p:sp>
       <p:sp>
         <p:nvSpPr>
-          <p:cNvPr id="24" name="line-397">
-            <a:extLst xmlns:a="http://schemas.openxmlformats.org/drawingml/2006/main">
-              <a:ext uri="{FF2B5EF4-FFF2-40B4-BE49-F238E27FC236}">
-                <a16:creationId xmlns:a16="http://schemas.microsoft.com/office/drawing/2014/main" id="{095FFFBD-2FBC-4F2D-83A9-E01689E8FCCE}"/>
+          <p:cNvPr id="24" name="line-455">
+            <a:extLst xmlns:a="http://schemas.openxmlformats.org/drawingml/2006/main">
+              <a:ext uri="{FF2B5EF4-FFF2-40B4-BE49-F238E27FC236}">
+                <a16:creationId xmlns:a16="http://schemas.microsoft.com/office/drawing/2014/main" id="{34CEB85B-6AC0-4A8D-88F1-A741A68E1946}"/>
               </a:ext>
             </a:extLst>
           </p:cNvPr>
@@ -25481,10 +30416,10 @@
       </p:sp>
       <p:sp>
         <p:nvSpPr>
-          <p:cNvPr id="25" name="line-398">
-            <a:extLst xmlns:a="http://schemas.openxmlformats.org/drawingml/2006/main">
-              <a:ext uri="{FF2B5EF4-FFF2-40B4-BE49-F238E27FC236}">
-                <a16:creationId xmlns:a16="http://schemas.microsoft.com/office/drawing/2014/main" id="{118EA7FD-C2BD-4E88-8FA0-0FB40B360C70}"/>
+          <p:cNvPr id="25" name="line-456">
+            <a:extLst xmlns:a="http://schemas.openxmlformats.org/drawingml/2006/main">
+              <a:ext uri="{FF2B5EF4-FFF2-40B4-BE49-F238E27FC236}">
+                <a16:creationId xmlns:a16="http://schemas.microsoft.com/office/drawing/2014/main" id="{7743A6FA-F06F-40FA-836F-475A90C99E8D}"/>
               </a:ext>
             </a:extLst>
           </p:cNvPr>
@@ -25521,10 +30456,10 @@
       </p:sp>
       <p:sp>
         <p:nvSpPr>
-          <p:cNvPr id="26" name="reveal1-object-399">
-            <a:extLst xmlns:a="http://schemas.openxmlformats.org/drawingml/2006/main">
-              <a:ext uri="{FF2B5EF4-FFF2-40B4-BE49-F238E27FC236}">
-                <a16:creationId xmlns:a16="http://schemas.microsoft.com/office/drawing/2014/main" id="{56EE05DB-EA01-4AFD-AD4A-23A319F6F80F}"/>
+          <p:cNvPr id="26" name="reveal1-object-457">
+            <a:extLst xmlns:a="http://schemas.openxmlformats.org/drawingml/2006/main">
+              <a:ext uri="{FF2B5EF4-FFF2-40B4-BE49-F238E27FC236}">
+                <a16:creationId xmlns:a16="http://schemas.microsoft.com/office/drawing/2014/main" id="{2834F7C6-77A5-4D15-B3D2-7DC11E92E680}"/>
               </a:ext>
             </a:extLst>
           </p:cNvPr>
@@ -25588,10 +30523,10 @@
       </p:sp>
       <p:sp>
         <p:nvSpPr>
-          <p:cNvPr id="27" name="reveal1-object-400">
-            <a:extLst xmlns:a="http://schemas.openxmlformats.org/drawingml/2006/main">
-              <a:ext uri="{FF2B5EF4-FFF2-40B4-BE49-F238E27FC236}">
-                <a16:creationId xmlns:a16="http://schemas.microsoft.com/office/drawing/2014/main" id="{06760D12-495D-4832-80C0-8DBD7D718A5B}"/>
+          <p:cNvPr id="27" name="reveal1-object-458">
+            <a:extLst xmlns:a="http://schemas.openxmlformats.org/drawingml/2006/main">
+              <a:ext uri="{FF2B5EF4-FFF2-40B4-BE49-F238E27FC236}">
+                <a16:creationId xmlns:a16="http://schemas.microsoft.com/office/drawing/2014/main" id="{E2CFFB36-4E45-42ED-A3E0-D8FE144B28C3}"/>
               </a:ext>
             </a:extLst>
           </p:cNvPr>
@@ -25678,10 +30613,10 @@
       </p:sp>
       <p:sp>
         <p:nvSpPr>
-          <p:cNvPr id="28" name="reveal1-object-401">
-            <a:extLst xmlns:a="http://schemas.openxmlformats.org/drawingml/2006/main">
-              <a:ext uri="{FF2B5EF4-FFF2-40B4-BE49-F238E27FC236}">
-                <a16:creationId xmlns:a16="http://schemas.microsoft.com/office/drawing/2014/main" id="{23D395D0-9D1F-4A12-B4D4-C7B78F3A6EAB}"/>
+          <p:cNvPr id="28" name="reveal1-object-459">
+            <a:extLst xmlns:a="http://schemas.openxmlformats.org/drawingml/2006/main">
+              <a:ext uri="{FF2B5EF4-FFF2-40B4-BE49-F238E27FC236}">
+                <a16:creationId xmlns:a16="http://schemas.microsoft.com/office/drawing/2014/main" id="{BEA9F1FC-A7F4-4F89-AA76-7D26B44580F4}"/>
               </a:ext>
             </a:extLst>
           </p:cNvPr>
@@ -25745,10 +30680,10 @@
       </p:sp>
       <p:sp>
         <p:nvSpPr>
-          <p:cNvPr id="29" name="reveal1-object-402">
-            <a:extLst xmlns:a="http://schemas.openxmlformats.org/drawingml/2006/main">
-              <a:ext uri="{FF2B5EF4-FFF2-40B4-BE49-F238E27FC236}">
-                <a16:creationId xmlns:a16="http://schemas.microsoft.com/office/drawing/2014/main" id="{71070EF8-A163-4E8B-AA6F-8716C38F7312}"/>
+          <p:cNvPr id="29" name="reveal1-object-460">
+            <a:extLst xmlns:a="http://schemas.openxmlformats.org/drawingml/2006/main">
+              <a:ext uri="{FF2B5EF4-FFF2-40B4-BE49-F238E27FC236}">
+                <a16:creationId xmlns:a16="http://schemas.microsoft.com/office/drawing/2014/main" id="{0B9F8CD9-1717-415C-8D8E-DB99BF87ED35}"/>
               </a:ext>
             </a:extLst>
           </p:cNvPr>
@@ -25835,10 +30770,10 @@
       </p:sp>
       <p:sp>
         <p:nvSpPr>
-          <p:cNvPr id="30" name="reveal1-object-403">
-            <a:extLst xmlns:a="http://schemas.openxmlformats.org/drawingml/2006/main">
-              <a:ext uri="{FF2B5EF4-FFF2-40B4-BE49-F238E27FC236}">
-                <a16:creationId xmlns:a16="http://schemas.microsoft.com/office/drawing/2014/main" id="{4BCA8AC0-117D-4A9D-9A0B-AC4D198BFFC1}"/>
+          <p:cNvPr id="30" name="reveal1-object-461">
+            <a:extLst xmlns:a="http://schemas.openxmlformats.org/drawingml/2006/main">
+              <a:ext uri="{FF2B5EF4-FFF2-40B4-BE49-F238E27FC236}">
+                <a16:creationId xmlns:a16="http://schemas.microsoft.com/office/drawing/2014/main" id="{F917DCE2-ABB3-44FF-ACB9-5B85253332F8}"/>
               </a:ext>
             </a:extLst>
           </p:cNvPr>
@@ -25902,10 +30837,10 @@
       </p:sp>
       <p:sp>
         <p:nvSpPr>
-          <p:cNvPr id="31" name="reveal1-object-404">
-            <a:extLst xmlns:a="http://schemas.openxmlformats.org/drawingml/2006/main">
-              <a:ext uri="{FF2B5EF4-FFF2-40B4-BE49-F238E27FC236}">
-                <a16:creationId xmlns:a16="http://schemas.microsoft.com/office/drawing/2014/main" id="{F48E974C-6E2C-490E-A942-1A123A3C6B7C}"/>
+          <p:cNvPr id="31" name="reveal1-object-462">
+            <a:extLst xmlns:a="http://schemas.openxmlformats.org/drawingml/2006/main">
+              <a:ext uri="{FF2B5EF4-FFF2-40B4-BE49-F238E27FC236}">
+                <a16:creationId xmlns:a16="http://schemas.microsoft.com/office/drawing/2014/main" id="{EF904718-1D99-428F-A5E8-E5F8F7FFBB64}"/>
               </a:ext>
             </a:extLst>
           </p:cNvPr>
@@ -25992,10 +30927,10 @@
       </p:sp>
       <p:sp>
         <p:nvSpPr>
-          <p:cNvPr id="32" name="reveal2-line-405">
-            <a:extLst xmlns:a="http://schemas.openxmlformats.org/drawingml/2006/main">
-              <a:ext uri="{FF2B5EF4-FFF2-40B4-BE49-F238E27FC236}">
-                <a16:creationId xmlns:a16="http://schemas.microsoft.com/office/drawing/2014/main" id="{25EED835-25C8-4745-8DBE-A804FCE9443B}"/>
+          <p:cNvPr id="32" name="reveal2-line-463">
+            <a:extLst xmlns:a="http://schemas.openxmlformats.org/drawingml/2006/main">
+              <a:ext uri="{FF2B5EF4-FFF2-40B4-BE49-F238E27FC236}">
+                <a16:creationId xmlns:a16="http://schemas.microsoft.com/office/drawing/2014/main" id="{A50C42F1-A3FC-4B60-8CBF-ACB1DAB0ED0A}"/>
               </a:ext>
             </a:extLst>
           </p:cNvPr>
@@ -26032,10 +30967,10 @@
       </p:sp>
       <p:sp>
         <p:nvSpPr>
-          <p:cNvPr id="33" name="reveal2-object-406">
-            <a:extLst xmlns:a="http://schemas.openxmlformats.org/drawingml/2006/main">
-              <a:ext uri="{FF2B5EF4-FFF2-40B4-BE49-F238E27FC236}">
-                <a16:creationId xmlns:a16="http://schemas.microsoft.com/office/drawing/2014/main" id="{9773DE7D-E60E-4D49-BF62-72108F107F99}"/>
+          <p:cNvPr id="33" name="reveal2-object-464">
+            <a:extLst xmlns:a="http://schemas.openxmlformats.org/drawingml/2006/main">
+              <a:ext uri="{FF2B5EF4-FFF2-40B4-BE49-F238E27FC236}">
+                <a16:creationId xmlns:a16="http://schemas.microsoft.com/office/drawing/2014/main" id="{9E66A88B-CB14-41A0-8269-16DF904FB4AE}"/>
               </a:ext>
             </a:extLst>
           </p:cNvPr>
@@ -26099,10 +31034,10 @@
       </p:sp>
       <p:sp>
         <p:nvSpPr>
-          <p:cNvPr id="34" name="object-407">
-            <a:extLst xmlns:a="http://schemas.openxmlformats.org/drawingml/2006/main">
-              <a:ext uri="{FF2B5EF4-FFF2-40B4-BE49-F238E27FC236}">
-                <a16:creationId xmlns:a16="http://schemas.microsoft.com/office/drawing/2014/main" id="{C5ED7A45-B822-451A-9F2F-0DB46841E531}"/>
+          <p:cNvPr id="34" name="object-465">
+            <a:extLst xmlns:a="http://schemas.openxmlformats.org/drawingml/2006/main">
+              <a:ext uri="{FF2B5EF4-FFF2-40B4-BE49-F238E27FC236}">
+                <a16:creationId xmlns:a16="http://schemas.microsoft.com/office/drawing/2014/main" id="{2CD3C338-FF01-46E2-8C16-49602CA12E6B}"/>
               </a:ext>
             </a:extLst>
           </p:cNvPr>
@@ -26166,10 +31101,10 @@
       </p:sp>
       <p:sp>
         <p:nvSpPr>
-          <p:cNvPr id="35" name="object-408">
-            <a:extLst xmlns:a="http://schemas.openxmlformats.org/drawingml/2006/main">
-              <a:ext uri="{FF2B5EF4-FFF2-40B4-BE49-F238E27FC236}">
-                <a16:creationId xmlns:a16="http://schemas.microsoft.com/office/drawing/2014/main" id="{530FA55B-3487-4224-A16A-5861B576FC8D}"/>
+          <p:cNvPr id="35" name="object-466">
+            <a:extLst xmlns:a="http://schemas.openxmlformats.org/drawingml/2006/main">
+              <a:ext uri="{FF2B5EF4-FFF2-40B4-BE49-F238E27FC236}">
+                <a16:creationId xmlns:a16="http://schemas.microsoft.com/office/drawing/2014/main" id="{CA679CD7-261D-486A-826E-90FE54C081D1}"/>
               </a:ext>
             </a:extLst>
           </p:cNvPr>
@@ -26226,7 +31161,7 @@
                 <a:ea typeface="Microsoft YaHei"/>
                 <a:cs typeface="Microsoft YaHei"/>
               </a:rPr>
-              <a:t>06</a:t>
+              <a:t>08</a:t>
             </a:r>
           </a:p>
         </p:txBody>
@@ -26234,7 +31169,7 @@
     </p:spTree>
     <p:extLst>
       <p:ext uri="{BB962C8B-B14F-4D97-AF65-F5344CB8AC3E}">
-        <p14:creationId xmlns:p14="http://schemas.microsoft.com/office/powerpoint/2010/main" val="1395822699"/>
+        <p14:creationId xmlns:p14="http://schemas.microsoft.com/office/powerpoint/2010/main" val="1670667550"/>
       </p:ext>
     </p:extLst>
   </p:cSld>

--- a/audio_scenario/一首歌三个操作_场景演示稿.pptx
+++ b/audio_scenario/一首歌三个操作_场景演示稿.pptx
@@ -2,23 +2,23 @@
 <file path=ppt/presentation.xml><?xml version="1.0" encoding="utf-8"?>
 <p:presentation xmlns:p="http://schemas.openxmlformats.org/presentationml/2006/main">
   <p:sldMasterIdLst>
-    <p:sldMasterId xmlns:r="http://schemas.openxmlformats.org/officeDocument/2006/relationships" id="2147483648" r:id="R0c38a7c0ce2c4dd5"/>
+    <p:sldMasterId xmlns:r="http://schemas.openxmlformats.org/officeDocument/2006/relationships" id="2147483648" r:id="R0581b19632954293"/>
   </p:sldMasterIdLst>
   <p:notesMasterIdLst>
-    <p:notesMasterId xmlns:r="http://schemas.openxmlformats.org/officeDocument/2006/relationships" r:id="R3558a25df5494ffd"/>
+    <p:notesMasterId xmlns:r="http://schemas.openxmlformats.org/officeDocument/2006/relationships" r:id="R87481e44b21e4d8b"/>
   </p:notesMasterIdLst>
   <p:sldIdLst>
-    <p:sldId xmlns:r="http://schemas.openxmlformats.org/officeDocument/2006/relationships" id="256" r:id="R260a4043eab54864"/>
-    <p:sldId xmlns:r="http://schemas.openxmlformats.org/officeDocument/2006/relationships" id="257" r:id="Ra9b9aeaac743435d"/>
-    <p:sldId xmlns:r="http://schemas.openxmlformats.org/officeDocument/2006/relationships" id="258" r:id="R421751fad9b0497d"/>
-    <p:sldId xmlns:r="http://schemas.openxmlformats.org/officeDocument/2006/relationships" id="259" r:id="Rb74aa9b7d4394116"/>
-    <p:sldId xmlns:r="http://schemas.openxmlformats.org/officeDocument/2006/relationships" id="260" r:id="Rbe8df580c582493a"/>
-    <p:sldId xmlns:r="http://schemas.openxmlformats.org/officeDocument/2006/relationships" id="261" r:id="R92ed6914526849f1"/>
-    <p:sldId xmlns:r="http://schemas.openxmlformats.org/officeDocument/2006/relationships" id="262" r:id="R9ba17bbd97334d1a"/>
-    <p:sldId xmlns:r="http://schemas.openxmlformats.org/officeDocument/2006/relationships" id="263" r:id="R1d309d550e624469"/>
-    <p:sldId xmlns:r="http://schemas.openxmlformats.org/officeDocument/2006/relationships" id="264" r:id="Ra4acd68d15ca41cf"/>
-    <p:sldId xmlns:r="http://schemas.openxmlformats.org/officeDocument/2006/relationships" id="265" r:id="Rb215c01f72ce477e"/>
-    <p:sldId xmlns:r="http://schemas.openxmlformats.org/officeDocument/2006/relationships" id="266" r:id="Rdb1db853c0bd4ea5"/>
+    <p:sldId xmlns:r="http://schemas.openxmlformats.org/officeDocument/2006/relationships" id="256" r:id="Re00f6f1bed184789"/>
+    <p:sldId xmlns:r="http://schemas.openxmlformats.org/officeDocument/2006/relationships" id="257" r:id="Rf60e785d8f5b4bf0"/>
+    <p:sldId xmlns:r="http://schemas.openxmlformats.org/officeDocument/2006/relationships" id="258" r:id="Rc9bf0449471048e5"/>
+    <p:sldId xmlns:r="http://schemas.openxmlformats.org/officeDocument/2006/relationships" id="259" r:id="R17d51e82688d4016"/>
+    <p:sldId xmlns:r="http://schemas.openxmlformats.org/officeDocument/2006/relationships" id="260" r:id="R90ed09472fde454a"/>
+    <p:sldId xmlns:r="http://schemas.openxmlformats.org/officeDocument/2006/relationships" id="261" r:id="R25b93712f0be434b"/>
+    <p:sldId xmlns:r="http://schemas.openxmlformats.org/officeDocument/2006/relationships" id="262" r:id="R640849542c7e46d5"/>
+    <p:sldId xmlns:r="http://schemas.openxmlformats.org/officeDocument/2006/relationships" id="263" r:id="Re919c33336454cbc"/>
+    <p:sldId xmlns:r="http://schemas.openxmlformats.org/officeDocument/2006/relationships" id="264" r:id="R6a5745995a764fff"/>
+    <p:sldId xmlns:r="http://schemas.openxmlformats.org/officeDocument/2006/relationships" id="265" r:id="R21b523c5e0624acf"/>
+    <p:sldId xmlns:r="http://schemas.openxmlformats.org/officeDocument/2006/relationships" id="266" r:id="R672f668728b540e1"/>
   </p:sldIdLst>
   <p:sldSz cx="12192000" cy="6858000"/>
   <p:notesSz cx="6858000" cy="9144000"/>
@@ -2334,7 +2334,7 @@
           <p:cNvPr id="3" name="Title">
             <a:extLst xmlns:a="http://schemas.openxmlformats.org/drawingml/2006/main">
               <a:ext uri="{FF2B5EF4-FFF2-40B4-BE49-F238E27FC236}">
-                <a16:creationId xmlns:a16="http://schemas.microsoft.com/office/drawing/2014/main" id="{F9ECDADF-E977-49E6-8151-644B3094B3A4}"/>
+                <a16:creationId xmlns:a16="http://schemas.microsoft.com/office/drawing/2014/main" id="{9F361456-1F79-4B32-A712-9F6B9A2A4D87}"/>
               </a:ext>
             </a:extLst>
           </p:cNvPr>
@@ -2491,7 +2491,7 @@
           <p:cNvPr id="2" name="Subtitle">
             <a:extLst xmlns:a="http://schemas.openxmlformats.org/drawingml/2006/main">
               <a:ext uri="{FF2B5EF4-FFF2-40B4-BE49-F238E27FC236}">
-                <a16:creationId xmlns:a16="http://schemas.microsoft.com/office/drawing/2014/main" id="{D99491AC-1677-4C3A-89B5-0180D4A962D0}"/>
+                <a16:creationId xmlns:a16="http://schemas.microsoft.com/office/drawing/2014/main" id="{8ACB872C-C74F-4D4D-A197-FF5C4170DE19}"/>
               </a:ext>
             </a:extLst>
           </p:cNvPr>
@@ -2665,7 +2665,7 @@
           <p:cNvPr id="2" name="Section title">
             <a:extLst xmlns:a="http://schemas.openxmlformats.org/drawingml/2006/main">
               <a:ext uri="{FF2B5EF4-FFF2-40B4-BE49-F238E27FC236}">
-                <a16:creationId xmlns:a16="http://schemas.microsoft.com/office/drawing/2014/main" id="{74C1ACA5-F774-4440-BE30-DC5F48BF0B18}"/>
+                <a16:creationId xmlns:a16="http://schemas.microsoft.com/office/drawing/2014/main" id="{59A2BDAD-1B1F-4CE0-8DB2-DDF643FFB1A8}"/>
               </a:ext>
             </a:extLst>
           </p:cNvPr>
@@ -2839,7 +2839,7 @@
           <p:cNvPr id="3" name="Title">
             <a:extLst xmlns:a="http://schemas.openxmlformats.org/drawingml/2006/main">
               <a:ext uri="{FF2B5EF4-FFF2-40B4-BE49-F238E27FC236}">
-                <a16:creationId xmlns:a16="http://schemas.microsoft.com/office/drawing/2014/main" id="{27980D75-CAA5-45DA-A23B-097984DD5C5B}"/>
+                <a16:creationId xmlns:a16="http://schemas.microsoft.com/office/drawing/2014/main" id="{C1F02080-0823-4616-9111-20DFD31B364B}"/>
               </a:ext>
             </a:extLst>
           </p:cNvPr>
@@ -2996,7 +2996,7 @@
           <p:cNvPr id="2" name="Body">
             <a:extLst xmlns:a="http://schemas.openxmlformats.org/drawingml/2006/main">
               <a:ext uri="{FF2B5EF4-FFF2-40B4-BE49-F238E27FC236}">
-                <a16:creationId xmlns:a16="http://schemas.microsoft.com/office/drawing/2014/main" id="{2A9D447D-F56F-43B5-ABB4-A36485229FEB}"/>
+                <a16:creationId xmlns:a16="http://schemas.microsoft.com/office/drawing/2014/main" id="{B1157A31-A4F1-42AF-9C4F-F99A1EF72C19}"/>
               </a:ext>
             </a:extLst>
           </p:cNvPr>
@@ -3170,7 +3170,7 @@
           <p:cNvPr id="4" name="Title">
             <a:extLst xmlns:a="http://schemas.openxmlformats.org/drawingml/2006/main">
               <a:ext uri="{FF2B5EF4-FFF2-40B4-BE49-F238E27FC236}">
-                <a16:creationId xmlns:a16="http://schemas.microsoft.com/office/drawing/2014/main" id="{BE387FA3-43A1-48A7-AC5B-74B3280FAA86}"/>
+                <a16:creationId xmlns:a16="http://schemas.microsoft.com/office/drawing/2014/main" id="{C8BCE4A8-F90F-46AA-98F4-9FE1AA0DBBC7}"/>
               </a:ext>
             </a:extLst>
           </p:cNvPr>
@@ -3327,7 +3327,7 @@
           <p:cNvPr id="2" name="Left column">
             <a:extLst xmlns:a="http://schemas.openxmlformats.org/drawingml/2006/main">
               <a:ext uri="{FF2B5EF4-FFF2-40B4-BE49-F238E27FC236}">
-                <a16:creationId xmlns:a16="http://schemas.microsoft.com/office/drawing/2014/main" id="{3A83A3DD-C2D8-4E6A-9D35-48D3DFB7928A}"/>
+                <a16:creationId xmlns:a16="http://schemas.microsoft.com/office/drawing/2014/main" id="{D451867C-14BD-42B6-BE57-759B77FE09C5}"/>
               </a:ext>
             </a:extLst>
           </p:cNvPr>
@@ -3484,7 +3484,7 @@
           <p:cNvPr id="3" name="Right column">
             <a:extLst xmlns:a="http://schemas.openxmlformats.org/drawingml/2006/main">
               <a:ext uri="{FF2B5EF4-FFF2-40B4-BE49-F238E27FC236}">
-                <a16:creationId xmlns:a16="http://schemas.microsoft.com/office/drawing/2014/main" id="{C45AF30F-7D3C-47E9-B7FE-90867FBD135F}"/>
+                <a16:creationId xmlns:a16="http://schemas.microsoft.com/office/drawing/2014/main" id="{A53B2665-EC63-4A43-9502-CD34BB3FA7CD}"/>
               </a:ext>
             </a:extLst>
           </p:cNvPr>
@@ -3658,7 +3658,7 @@
           <p:cNvPr id="3" name="Title">
             <a:extLst xmlns:a="http://schemas.openxmlformats.org/drawingml/2006/main">
               <a:ext uri="{FF2B5EF4-FFF2-40B4-BE49-F238E27FC236}">
-                <a16:creationId xmlns:a16="http://schemas.microsoft.com/office/drawing/2014/main" id="{DBD20659-3D6E-472E-B3B4-E1D8A694C090}"/>
+                <a16:creationId xmlns:a16="http://schemas.microsoft.com/office/drawing/2014/main" id="{C7427362-F80D-45CF-AEBB-8FE14A92FE91}"/>
               </a:ext>
             </a:extLst>
           </p:cNvPr>
@@ -3815,7 +3815,7 @@
           <p:cNvPr id="2" name="Left column">
             <a:extLst xmlns:a="http://schemas.openxmlformats.org/drawingml/2006/main">
               <a:ext uri="{FF2B5EF4-FFF2-40B4-BE49-F238E27FC236}">
-                <a16:creationId xmlns:a16="http://schemas.microsoft.com/office/drawing/2014/main" id="{0C00C70C-1A2A-41F8-880E-5F9C1458669F}"/>
+                <a16:creationId xmlns:a16="http://schemas.microsoft.com/office/drawing/2014/main" id="{C7E5BC23-62D9-4105-A87E-52B5C8DE5F8F}"/>
               </a:ext>
             </a:extLst>
           </p:cNvPr>
@@ -4010,12 +4010,12 @@
   </p:cSld>
   <p:clrMap bg1="lt1" tx1="dk1" bg2="lt2" tx2="dk2" accent1="accent1" accent2="accent2" accent3="accent3" accent4="accent4" accent5="accent5" accent6="accent6" hlink="hlink" folHlink="folHlink"/>
   <p:sldLayoutIdLst>
-    <p:sldLayoutId xmlns:r="http://schemas.openxmlformats.org/officeDocument/2006/relationships" id="2147483649" r:id="R6052fd2fb1284516"/>
-    <p:sldLayoutId xmlns:r="http://schemas.openxmlformats.org/officeDocument/2006/relationships" id="2147483650" r:id="R3c5c989beeb447ed"/>
-    <p:sldLayoutId xmlns:r="http://schemas.openxmlformats.org/officeDocument/2006/relationships" id="2147483651" r:id="R2ae85be3f46f4456"/>
-    <p:sldLayoutId xmlns:r="http://schemas.openxmlformats.org/officeDocument/2006/relationships" id="2147483652" r:id="R40fd6245ee1c472f"/>
-    <p:sldLayoutId xmlns:r="http://schemas.openxmlformats.org/officeDocument/2006/relationships" id="2147483653" r:id="Ra7d6dde4cafe43b1"/>
-    <p:sldLayoutId xmlns:r="http://schemas.openxmlformats.org/officeDocument/2006/relationships" id="2147483654" r:id="R534029a862c34e4b"/>
+    <p:sldLayoutId xmlns:r="http://schemas.openxmlformats.org/officeDocument/2006/relationships" id="2147483649" r:id="R70405c7265e346b7"/>
+    <p:sldLayoutId xmlns:r="http://schemas.openxmlformats.org/officeDocument/2006/relationships" id="2147483650" r:id="Rd342b403d3a74c56"/>
+    <p:sldLayoutId xmlns:r="http://schemas.openxmlformats.org/officeDocument/2006/relationships" id="2147483651" r:id="R3ed5ddc4c5c1484a"/>
+    <p:sldLayoutId xmlns:r="http://schemas.openxmlformats.org/officeDocument/2006/relationships" id="2147483652" r:id="R83e0377ddb7f46f7"/>
+    <p:sldLayoutId xmlns:r="http://schemas.openxmlformats.org/officeDocument/2006/relationships" id="2147483653" r:id="R51427c94c20a4bbe"/>
+    <p:sldLayoutId xmlns:r="http://schemas.openxmlformats.org/officeDocument/2006/relationships" id="2147483654" r:id="R870b9ec9504e42af"/>
   </p:sldLayoutIdLst>
   <p:txStyles>
     <p:titleStyle>
@@ -4566,7 +4566,7 @@
           <p:cNvPr id="68" name="object-0">
             <a:extLst xmlns:a="http://schemas.openxmlformats.org/drawingml/2006/main">
               <a:ext uri="{FF2B5EF4-FFF2-40B4-BE49-F238E27FC236}">
-                <a16:creationId xmlns:a16="http://schemas.microsoft.com/office/drawing/2014/main" id="{D48E3A6E-62E5-4030-B342-1D15A05C32F3}"/>
+                <a16:creationId xmlns:a16="http://schemas.microsoft.com/office/drawing/2014/main" id="{263FC33F-C5EB-48A3-B768-76C462FE719A}"/>
               </a:ext>
             </a:extLst>
           </p:cNvPr>
@@ -4633,7 +4633,7 @@
           <p:cNvPr id="2" name="object-1">
             <a:extLst xmlns:a="http://schemas.openxmlformats.org/drawingml/2006/main">
               <a:ext uri="{FF2B5EF4-FFF2-40B4-BE49-F238E27FC236}">
-                <a16:creationId xmlns:a16="http://schemas.microsoft.com/office/drawing/2014/main" id="{AB390124-2269-46BB-BBCD-DC8B6C7CAA23}"/>
+                <a16:creationId xmlns:a16="http://schemas.microsoft.com/office/drawing/2014/main" id="{C8C4645C-2C43-4469-B412-4B1C532E0878}"/>
               </a:ext>
             </a:extLst>
           </p:cNvPr>
@@ -4700,7 +4700,7 @@
           <p:cNvPr id="3" name="object-2">
             <a:extLst xmlns:a="http://schemas.openxmlformats.org/drawingml/2006/main">
               <a:ext uri="{FF2B5EF4-FFF2-40B4-BE49-F238E27FC236}">
-                <a16:creationId xmlns:a16="http://schemas.microsoft.com/office/drawing/2014/main" id="{43A6E730-89CB-4F21-B2E0-83E7CFF82392}"/>
+                <a16:creationId xmlns:a16="http://schemas.microsoft.com/office/drawing/2014/main" id="{CB2F661D-68AF-4BB8-9A0D-AA5F269337F4}"/>
               </a:ext>
             </a:extLst>
           </p:cNvPr>
@@ -4731,7 +4731,7 @@
           <p:cNvPr id="4" name="object-3">
             <a:extLst xmlns:a="http://schemas.openxmlformats.org/drawingml/2006/main">
               <a:ext uri="{FF2B5EF4-FFF2-40B4-BE49-F238E27FC236}">
-                <a16:creationId xmlns:a16="http://schemas.microsoft.com/office/drawing/2014/main" id="{2EDAADAD-B2BD-40DC-BB78-CC8833967CE7}"/>
+                <a16:creationId xmlns:a16="http://schemas.microsoft.com/office/drawing/2014/main" id="{4982392F-4870-4532-8F38-8FB5191A87CC}"/>
               </a:ext>
             </a:extLst>
           </p:cNvPr>
@@ -4798,7 +4798,7 @@
           <p:cNvPr id="5" name="object-4">
             <a:extLst xmlns:a="http://schemas.openxmlformats.org/drawingml/2006/main">
               <a:ext uri="{FF2B5EF4-FFF2-40B4-BE49-F238E27FC236}">
-                <a16:creationId xmlns:a16="http://schemas.microsoft.com/office/drawing/2014/main" id="{F0B6F9A8-C7FE-4186-BFED-4172D256F5D5}"/>
+                <a16:creationId xmlns:a16="http://schemas.microsoft.com/office/drawing/2014/main" id="{4292A231-DE0A-4706-A996-66E17AD3BFFF}"/>
               </a:ext>
             </a:extLst>
           </p:cNvPr>
@@ -4888,7 +4888,7 @@
           <p:cNvPr id="6" name="object-5">
             <a:extLst xmlns:a="http://schemas.openxmlformats.org/drawingml/2006/main">
               <a:ext uri="{FF2B5EF4-FFF2-40B4-BE49-F238E27FC236}">
-                <a16:creationId xmlns:a16="http://schemas.microsoft.com/office/drawing/2014/main" id="{B405A552-DD5C-42AE-872D-6D10018ADE32}"/>
+                <a16:creationId xmlns:a16="http://schemas.microsoft.com/office/drawing/2014/main" id="{8061BC73-E21B-4F44-872A-284DCD4A72CA}"/>
               </a:ext>
             </a:extLst>
           </p:cNvPr>
@@ -4919,7 +4919,7 @@
           <p:cNvPr id="7" name="object-6">
             <a:extLst xmlns:a="http://schemas.openxmlformats.org/drawingml/2006/main">
               <a:ext uri="{FF2B5EF4-FFF2-40B4-BE49-F238E27FC236}">
-                <a16:creationId xmlns:a16="http://schemas.microsoft.com/office/drawing/2014/main" id="{E09E733D-FE41-4453-B2FD-74FD86C0CA38}"/>
+                <a16:creationId xmlns:a16="http://schemas.microsoft.com/office/drawing/2014/main" id="{1B066719-8183-4673-9FCF-03A9510DD4A6}"/>
               </a:ext>
             </a:extLst>
           </p:cNvPr>
@@ -4950,7 +4950,7 @@
           <p:cNvPr id="8" name="object-7">
             <a:extLst xmlns:a="http://schemas.openxmlformats.org/drawingml/2006/main">
               <a:ext uri="{FF2B5EF4-FFF2-40B4-BE49-F238E27FC236}">
-                <a16:creationId xmlns:a16="http://schemas.microsoft.com/office/drawing/2014/main" id="{7002F7C5-CA19-4CF4-915D-2FFA3C8C024B}"/>
+                <a16:creationId xmlns:a16="http://schemas.microsoft.com/office/drawing/2014/main" id="{951B7B81-A217-4714-8CAB-4BE79DB41F42}"/>
               </a:ext>
             </a:extLst>
           </p:cNvPr>
@@ -4981,7 +4981,7 @@
           <p:cNvPr id="9" name="object-8">
             <a:extLst xmlns:a="http://schemas.openxmlformats.org/drawingml/2006/main">
               <a:ext uri="{FF2B5EF4-FFF2-40B4-BE49-F238E27FC236}">
-                <a16:creationId xmlns:a16="http://schemas.microsoft.com/office/drawing/2014/main" id="{9725FAF1-66C1-47FA-90AD-22AAA547CF84}"/>
+                <a16:creationId xmlns:a16="http://schemas.microsoft.com/office/drawing/2014/main" id="{CB4F12D5-E8C5-480F-BFE7-8AA91A54E532}"/>
               </a:ext>
             </a:extLst>
           </p:cNvPr>
@@ -5012,7 +5012,7 @@
           <p:cNvPr id="10" name="object-9">
             <a:extLst xmlns:a="http://schemas.openxmlformats.org/drawingml/2006/main">
               <a:ext uri="{FF2B5EF4-FFF2-40B4-BE49-F238E27FC236}">
-                <a16:creationId xmlns:a16="http://schemas.microsoft.com/office/drawing/2014/main" id="{E746DDAC-CED1-4350-BEDF-6F22A93156A9}"/>
+                <a16:creationId xmlns:a16="http://schemas.microsoft.com/office/drawing/2014/main" id="{C80BC3B2-1BA1-426E-BDFA-035A7A98D23E}"/>
               </a:ext>
             </a:extLst>
           </p:cNvPr>
@@ -5043,7 +5043,7 @@
           <p:cNvPr id="11" name="object-10">
             <a:extLst xmlns:a="http://schemas.openxmlformats.org/drawingml/2006/main">
               <a:ext uri="{FF2B5EF4-FFF2-40B4-BE49-F238E27FC236}">
-                <a16:creationId xmlns:a16="http://schemas.microsoft.com/office/drawing/2014/main" id="{ED056829-D6FA-49C7-9C5C-9C50A6FFFA0B}"/>
+                <a16:creationId xmlns:a16="http://schemas.microsoft.com/office/drawing/2014/main" id="{7AE7FF7C-B29F-4A7B-9DED-EE1B548964AE}"/>
               </a:ext>
             </a:extLst>
           </p:cNvPr>
@@ -5110,7 +5110,7 @@
           <p:cNvPr id="12" name="object-11">
             <a:extLst xmlns:a="http://schemas.openxmlformats.org/drawingml/2006/main">
               <a:ext uri="{FF2B5EF4-FFF2-40B4-BE49-F238E27FC236}">
-                <a16:creationId xmlns:a16="http://schemas.microsoft.com/office/drawing/2014/main" id="{02946808-AC14-4F06-9A83-19F03F7939EB}"/>
+                <a16:creationId xmlns:a16="http://schemas.microsoft.com/office/drawing/2014/main" id="{94EBB166-9942-4097-B61F-84AD027A304B}"/>
               </a:ext>
             </a:extLst>
           </p:cNvPr>
@@ -5141,7 +5141,7 @@
           <p:cNvPr id="13" name="object-12">
             <a:extLst xmlns:a="http://schemas.openxmlformats.org/drawingml/2006/main">
               <a:ext uri="{FF2B5EF4-FFF2-40B4-BE49-F238E27FC236}">
-                <a16:creationId xmlns:a16="http://schemas.microsoft.com/office/drawing/2014/main" id="{B874C9A5-7335-429B-8A61-62E8E5E1AB91}"/>
+                <a16:creationId xmlns:a16="http://schemas.microsoft.com/office/drawing/2014/main" id="{EF1F5DCE-6744-427E-B4CB-6B6244EA4DEE}"/>
               </a:ext>
             </a:extLst>
           </p:cNvPr>
@@ -5208,7 +5208,7 @@
           <p:cNvPr id="14" name="object-13">
             <a:extLst xmlns:a="http://schemas.openxmlformats.org/drawingml/2006/main">
               <a:ext uri="{FF2B5EF4-FFF2-40B4-BE49-F238E27FC236}">
-                <a16:creationId xmlns:a16="http://schemas.microsoft.com/office/drawing/2014/main" id="{049A3EBF-E720-421B-B811-20E86967B3FB}"/>
+                <a16:creationId xmlns:a16="http://schemas.microsoft.com/office/drawing/2014/main" id="{0AD56B02-8FC2-421A-BF97-B6260C677936}"/>
               </a:ext>
             </a:extLst>
           </p:cNvPr>
@@ -5239,7 +5239,7 @@
           <p:cNvPr id="15" name="object-14">
             <a:extLst xmlns:a="http://schemas.openxmlformats.org/drawingml/2006/main">
               <a:ext uri="{FF2B5EF4-FFF2-40B4-BE49-F238E27FC236}">
-                <a16:creationId xmlns:a16="http://schemas.microsoft.com/office/drawing/2014/main" id="{848D16D2-2E59-4793-9BA7-FD90F6EA67D8}"/>
+                <a16:creationId xmlns:a16="http://schemas.microsoft.com/office/drawing/2014/main" id="{64DE5AF4-60A1-41F6-B90C-F8F104908EDB}"/>
               </a:ext>
             </a:extLst>
           </p:cNvPr>
@@ -5306,7 +5306,7 @@
           <p:cNvPr id="16" name="object-15">
             <a:extLst xmlns:a="http://schemas.openxmlformats.org/drawingml/2006/main">
               <a:ext uri="{FF2B5EF4-FFF2-40B4-BE49-F238E27FC236}">
-                <a16:creationId xmlns:a16="http://schemas.microsoft.com/office/drawing/2014/main" id="{9EA0DAB3-96AD-44EE-BBE9-D8301129B734}"/>
+                <a16:creationId xmlns:a16="http://schemas.microsoft.com/office/drawing/2014/main" id="{EA658940-8DA6-47EB-A612-B5A16649EC0F}"/>
               </a:ext>
             </a:extLst>
           </p:cNvPr>
@@ -5373,7 +5373,7 @@
           <p:cNvPr id="17" name="line-16">
             <a:extLst xmlns:a="http://schemas.openxmlformats.org/drawingml/2006/main">
               <a:ext uri="{FF2B5EF4-FFF2-40B4-BE49-F238E27FC236}">
-                <a16:creationId xmlns:a16="http://schemas.microsoft.com/office/drawing/2014/main" id="{365A5C10-519E-49DA-B81E-870A2E9C9AD6}"/>
+                <a16:creationId xmlns:a16="http://schemas.microsoft.com/office/drawing/2014/main" id="{83226428-3AB0-41CF-81A3-954BD765FACC}"/>
               </a:ext>
             </a:extLst>
           </p:cNvPr>
@@ -5413,7 +5413,7 @@
           <p:cNvPr id="18" name="line-17">
             <a:extLst xmlns:a="http://schemas.openxmlformats.org/drawingml/2006/main">
               <a:ext uri="{FF2B5EF4-FFF2-40B4-BE49-F238E27FC236}">
-                <a16:creationId xmlns:a16="http://schemas.microsoft.com/office/drawing/2014/main" id="{A1F1E04A-38B9-4D7C-94C0-9E9D4EBAC408}"/>
+                <a16:creationId xmlns:a16="http://schemas.microsoft.com/office/drawing/2014/main" id="{5DE54278-D32C-4831-9D2A-B38A1C53BC8F}"/>
               </a:ext>
             </a:extLst>
           </p:cNvPr>
@@ -5453,7 +5453,7 @@
           <p:cNvPr id="19" name="line-18">
             <a:extLst xmlns:a="http://schemas.openxmlformats.org/drawingml/2006/main">
               <a:ext uri="{FF2B5EF4-FFF2-40B4-BE49-F238E27FC236}">
-                <a16:creationId xmlns:a16="http://schemas.microsoft.com/office/drawing/2014/main" id="{2F71AD20-E7E1-48D6-837C-CA4498147E14}"/>
+                <a16:creationId xmlns:a16="http://schemas.microsoft.com/office/drawing/2014/main" id="{98B8F242-E93C-4AE5-AB14-B38042D157F9}"/>
               </a:ext>
             </a:extLst>
           </p:cNvPr>
@@ -5493,7 +5493,7 @@
           <p:cNvPr id="20" name="line-19">
             <a:extLst xmlns:a="http://schemas.openxmlformats.org/drawingml/2006/main">
               <a:ext uri="{FF2B5EF4-FFF2-40B4-BE49-F238E27FC236}">
-                <a16:creationId xmlns:a16="http://schemas.microsoft.com/office/drawing/2014/main" id="{31345595-E811-4296-B586-2865C6D2F460}"/>
+                <a16:creationId xmlns:a16="http://schemas.microsoft.com/office/drawing/2014/main" id="{59074822-6793-4863-B7D5-563DB7DA6106}"/>
               </a:ext>
             </a:extLst>
           </p:cNvPr>
@@ -5533,7 +5533,7 @@
           <p:cNvPr id="21" name="line-20">
             <a:extLst xmlns:a="http://schemas.openxmlformats.org/drawingml/2006/main">
               <a:ext uri="{FF2B5EF4-FFF2-40B4-BE49-F238E27FC236}">
-                <a16:creationId xmlns:a16="http://schemas.microsoft.com/office/drawing/2014/main" id="{DB7611E1-F5AA-4A55-A36C-920BD18E99BF}"/>
+                <a16:creationId xmlns:a16="http://schemas.microsoft.com/office/drawing/2014/main" id="{7BBB0C31-D0DE-4041-996D-11000EEE7869}"/>
               </a:ext>
             </a:extLst>
           </p:cNvPr>
@@ -5573,7 +5573,7 @@
           <p:cNvPr id="22" name="line-21">
             <a:extLst xmlns:a="http://schemas.openxmlformats.org/drawingml/2006/main">
               <a:ext uri="{FF2B5EF4-FFF2-40B4-BE49-F238E27FC236}">
-                <a16:creationId xmlns:a16="http://schemas.microsoft.com/office/drawing/2014/main" id="{20ED7928-0D36-4CD9-903C-01ED4C5D2FE7}"/>
+                <a16:creationId xmlns:a16="http://schemas.microsoft.com/office/drawing/2014/main" id="{1A40A4E5-2CC8-4354-B960-80D230464FE9}"/>
               </a:ext>
             </a:extLst>
           </p:cNvPr>
@@ -5613,7 +5613,7 @@
           <p:cNvPr id="23" name="line-22">
             <a:extLst xmlns:a="http://schemas.openxmlformats.org/drawingml/2006/main">
               <a:ext uri="{FF2B5EF4-FFF2-40B4-BE49-F238E27FC236}">
-                <a16:creationId xmlns:a16="http://schemas.microsoft.com/office/drawing/2014/main" id="{DE6EC1FC-8B2D-4D6A-964C-51C91706E40F}"/>
+                <a16:creationId xmlns:a16="http://schemas.microsoft.com/office/drawing/2014/main" id="{344EE089-7C5A-43AC-9D48-B2EE2D9A30A1}"/>
               </a:ext>
             </a:extLst>
           </p:cNvPr>
@@ -5653,7 +5653,7 @@
           <p:cNvPr id="24" name="line-23">
             <a:extLst xmlns:a="http://schemas.openxmlformats.org/drawingml/2006/main">
               <a:ext uri="{FF2B5EF4-FFF2-40B4-BE49-F238E27FC236}">
-                <a16:creationId xmlns:a16="http://schemas.microsoft.com/office/drawing/2014/main" id="{7C65F3A1-B33A-41B3-846F-65CD665C98C1}"/>
+                <a16:creationId xmlns:a16="http://schemas.microsoft.com/office/drawing/2014/main" id="{55586899-14AA-4F1A-A2DA-7E743DD5FB36}"/>
               </a:ext>
             </a:extLst>
           </p:cNvPr>
@@ -5693,7 +5693,7 @@
           <p:cNvPr id="25" name="line-24">
             <a:extLst xmlns:a="http://schemas.openxmlformats.org/drawingml/2006/main">
               <a:ext uri="{FF2B5EF4-FFF2-40B4-BE49-F238E27FC236}">
-                <a16:creationId xmlns:a16="http://schemas.microsoft.com/office/drawing/2014/main" id="{59DBE843-BE94-41BC-8E48-5BA0B0657952}"/>
+                <a16:creationId xmlns:a16="http://schemas.microsoft.com/office/drawing/2014/main" id="{BEF63D2C-66C7-4886-BCE9-C9D6D51BE50C}"/>
               </a:ext>
             </a:extLst>
           </p:cNvPr>
@@ -5733,7 +5733,7 @@
           <p:cNvPr id="26" name="line-25">
             <a:extLst xmlns:a="http://schemas.openxmlformats.org/drawingml/2006/main">
               <a:ext uri="{FF2B5EF4-FFF2-40B4-BE49-F238E27FC236}">
-                <a16:creationId xmlns:a16="http://schemas.microsoft.com/office/drawing/2014/main" id="{05E7892F-45EF-45BA-9C9B-98AD7CB41452}"/>
+                <a16:creationId xmlns:a16="http://schemas.microsoft.com/office/drawing/2014/main" id="{399421C7-F0DB-4189-8210-5B6C666FF351}"/>
               </a:ext>
             </a:extLst>
           </p:cNvPr>
@@ -5773,7 +5773,7 @@
           <p:cNvPr id="27" name="line-26">
             <a:extLst xmlns:a="http://schemas.openxmlformats.org/drawingml/2006/main">
               <a:ext uri="{FF2B5EF4-FFF2-40B4-BE49-F238E27FC236}">
-                <a16:creationId xmlns:a16="http://schemas.microsoft.com/office/drawing/2014/main" id="{170BC836-8490-41E2-A6E8-60442D9F4733}"/>
+                <a16:creationId xmlns:a16="http://schemas.microsoft.com/office/drawing/2014/main" id="{4DA696EE-1486-40D0-A58F-F26EE935FA3B}"/>
               </a:ext>
             </a:extLst>
           </p:cNvPr>
@@ -5813,7 +5813,7 @@
           <p:cNvPr id="28" name="line-27">
             <a:extLst xmlns:a="http://schemas.openxmlformats.org/drawingml/2006/main">
               <a:ext uri="{FF2B5EF4-FFF2-40B4-BE49-F238E27FC236}">
-                <a16:creationId xmlns:a16="http://schemas.microsoft.com/office/drawing/2014/main" id="{65E2E8D0-614A-454B-ACFE-6D706FCA7914}"/>
+                <a16:creationId xmlns:a16="http://schemas.microsoft.com/office/drawing/2014/main" id="{1044EDE4-FFD3-46D6-86AC-B540CB96F70D}"/>
               </a:ext>
             </a:extLst>
           </p:cNvPr>
@@ -5853,7 +5853,7 @@
           <p:cNvPr id="29" name="reveal1-object-28">
             <a:extLst xmlns:a="http://schemas.openxmlformats.org/drawingml/2006/main">
               <a:ext uri="{FF2B5EF4-FFF2-40B4-BE49-F238E27FC236}">
-                <a16:creationId xmlns:a16="http://schemas.microsoft.com/office/drawing/2014/main" id="{28FA923B-A134-4745-ABF1-C8E09F30F138}"/>
+                <a16:creationId xmlns:a16="http://schemas.microsoft.com/office/drawing/2014/main" id="{A74E681A-AABF-4C0E-BC12-672FA456124D}"/>
               </a:ext>
             </a:extLst>
           </p:cNvPr>
@@ -5920,7 +5920,7 @@
           <p:cNvPr id="30" name="reveal1-line-29">
             <a:extLst xmlns:a="http://schemas.openxmlformats.org/drawingml/2006/main">
               <a:ext uri="{FF2B5EF4-FFF2-40B4-BE49-F238E27FC236}">
-                <a16:creationId xmlns:a16="http://schemas.microsoft.com/office/drawing/2014/main" id="{10C64CF2-DB02-4A2A-9E81-38439B3E7DDE}"/>
+                <a16:creationId xmlns:a16="http://schemas.microsoft.com/office/drawing/2014/main" id="{75499EBF-34CC-456B-A81F-6E37FF5D7890}"/>
               </a:ext>
             </a:extLst>
           </p:cNvPr>
@@ -5960,7 +5960,7 @@
           <p:cNvPr id="31" name="reveal1-line-30">
             <a:extLst xmlns:a="http://schemas.openxmlformats.org/drawingml/2006/main">
               <a:ext uri="{FF2B5EF4-FFF2-40B4-BE49-F238E27FC236}">
-                <a16:creationId xmlns:a16="http://schemas.microsoft.com/office/drawing/2014/main" id="{7BDD7415-A865-43CB-8389-4A1C34A711AE}"/>
+                <a16:creationId xmlns:a16="http://schemas.microsoft.com/office/drawing/2014/main" id="{4E6ED5FF-52A6-46C0-8A0F-2369DE8FEA5D}"/>
               </a:ext>
             </a:extLst>
           </p:cNvPr>
@@ -6000,7 +6000,7 @@
           <p:cNvPr id="32" name="reveal1-line-31">
             <a:extLst xmlns:a="http://schemas.openxmlformats.org/drawingml/2006/main">
               <a:ext uri="{FF2B5EF4-FFF2-40B4-BE49-F238E27FC236}">
-                <a16:creationId xmlns:a16="http://schemas.microsoft.com/office/drawing/2014/main" id="{24DF3B6E-C722-4044-954C-116728002E07}"/>
+                <a16:creationId xmlns:a16="http://schemas.microsoft.com/office/drawing/2014/main" id="{C079C758-386F-439B-9BC9-80895A76FDEA}"/>
               </a:ext>
             </a:extLst>
           </p:cNvPr>
@@ -6040,7 +6040,7 @@
           <p:cNvPr id="33" name="reveal1-line-32">
             <a:extLst xmlns:a="http://schemas.openxmlformats.org/drawingml/2006/main">
               <a:ext uri="{FF2B5EF4-FFF2-40B4-BE49-F238E27FC236}">
-                <a16:creationId xmlns:a16="http://schemas.microsoft.com/office/drawing/2014/main" id="{8A29523F-9612-47C0-A365-30394B50FEE4}"/>
+                <a16:creationId xmlns:a16="http://schemas.microsoft.com/office/drawing/2014/main" id="{7F1BC8C9-2883-4395-AEDC-BE2F18C5E9F6}"/>
               </a:ext>
             </a:extLst>
           </p:cNvPr>
@@ -6080,7 +6080,7 @@
           <p:cNvPr id="34" name="reveal1-line-33">
             <a:extLst xmlns:a="http://schemas.openxmlformats.org/drawingml/2006/main">
               <a:ext uri="{FF2B5EF4-FFF2-40B4-BE49-F238E27FC236}">
-                <a16:creationId xmlns:a16="http://schemas.microsoft.com/office/drawing/2014/main" id="{3CA7863E-DDA6-4F80-8548-4BC5C128084A}"/>
+                <a16:creationId xmlns:a16="http://schemas.microsoft.com/office/drawing/2014/main" id="{4EB5CC41-5756-48B5-8438-8DB56CFECEA2}"/>
               </a:ext>
             </a:extLst>
           </p:cNvPr>
@@ -6120,7 +6120,7 @@
           <p:cNvPr id="35" name="reveal1-line-34">
             <a:extLst xmlns:a="http://schemas.openxmlformats.org/drawingml/2006/main">
               <a:ext uri="{FF2B5EF4-FFF2-40B4-BE49-F238E27FC236}">
-                <a16:creationId xmlns:a16="http://schemas.microsoft.com/office/drawing/2014/main" id="{7025D2C8-408C-4364-B1FC-6D72F1A3549F}"/>
+                <a16:creationId xmlns:a16="http://schemas.microsoft.com/office/drawing/2014/main" id="{1CFCBC22-07A3-48B4-A200-9885C1A240A8}"/>
               </a:ext>
             </a:extLst>
           </p:cNvPr>
@@ -6160,7 +6160,7 @@
           <p:cNvPr id="36" name="reveal1-line-35">
             <a:extLst xmlns:a="http://schemas.openxmlformats.org/drawingml/2006/main">
               <a:ext uri="{FF2B5EF4-FFF2-40B4-BE49-F238E27FC236}">
-                <a16:creationId xmlns:a16="http://schemas.microsoft.com/office/drawing/2014/main" id="{0AA681FC-160F-4C7B-85B2-9F483384FEAE}"/>
+                <a16:creationId xmlns:a16="http://schemas.microsoft.com/office/drawing/2014/main" id="{0A53A036-7DD0-4AC5-8248-9E0A74964A40}"/>
               </a:ext>
             </a:extLst>
           </p:cNvPr>
@@ -6200,7 +6200,7 @@
           <p:cNvPr id="37" name="reveal1-line-36">
             <a:extLst xmlns:a="http://schemas.openxmlformats.org/drawingml/2006/main">
               <a:ext uri="{FF2B5EF4-FFF2-40B4-BE49-F238E27FC236}">
-                <a16:creationId xmlns:a16="http://schemas.microsoft.com/office/drawing/2014/main" id="{1AA0E8E2-3E20-4B1C-BCC4-DCE635ECB504}"/>
+                <a16:creationId xmlns:a16="http://schemas.microsoft.com/office/drawing/2014/main" id="{2CB88DD2-A4E9-4E24-94F8-B30A81C19116}"/>
               </a:ext>
             </a:extLst>
           </p:cNvPr>
@@ -6240,7 +6240,7 @@
           <p:cNvPr id="38" name="reveal1-object-37">
             <a:extLst xmlns:a="http://schemas.openxmlformats.org/drawingml/2006/main">
               <a:ext uri="{FF2B5EF4-FFF2-40B4-BE49-F238E27FC236}">
-                <a16:creationId xmlns:a16="http://schemas.microsoft.com/office/drawing/2014/main" id="{8F910D67-FD04-4D67-9F98-D475E9F4F0D3}"/>
+                <a16:creationId xmlns:a16="http://schemas.microsoft.com/office/drawing/2014/main" id="{FE56BAF0-F965-415B-83D0-B00A424DEF14}"/>
               </a:ext>
             </a:extLst>
           </p:cNvPr>
@@ -6353,7 +6353,7 @@
           <p:cNvPr id="39" name="reveal2-object-38">
             <a:extLst xmlns:a="http://schemas.openxmlformats.org/drawingml/2006/main">
               <a:ext uri="{FF2B5EF4-FFF2-40B4-BE49-F238E27FC236}">
-                <a16:creationId xmlns:a16="http://schemas.microsoft.com/office/drawing/2014/main" id="{F5C6829E-7BB7-43A6-9EEF-568BB7C63F7C}"/>
+                <a16:creationId xmlns:a16="http://schemas.microsoft.com/office/drawing/2014/main" id="{8294A2E3-9DD6-457A-A1CD-1FE7AA255A66}"/>
               </a:ext>
             </a:extLst>
           </p:cNvPr>
@@ -6420,7 +6420,7 @@
           <p:cNvPr id="40" name="reveal2-line-39">
             <a:extLst xmlns:a="http://schemas.openxmlformats.org/drawingml/2006/main">
               <a:ext uri="{FF2B5EF4-FFF2-40B4-BE49-F238E27FC236}">
-                <a16:creationId xmlns:a16="http://schemas.microsoft.com/office/drawing/2014/main" id="{1BBFC137-5522-4126-B4BC-E353B88EA349}"/>
+                <a16:creationId xmlns:a16="http://schemas.microsoft.com/office/drawing/2014/main" id="{44F24522-D519-45D7-80BD-9E34A6B83916}"/>
               </a:ext>
             </a:extLst>
           </p:cNvPr>
@@ -6460,7 +6460,7 @@
           <p:cNvPr id="41" name="reveal2-line-40">
             <a:extLst xmlns:a="http://schemas.openxmlformats.org/drawingml/2006/main">
               <a:ext uri="{FF2B5EF4-FFF2-40B4-BE49-F238E27FC236}">
-                <a16:creationId xmlns:a16="http://schemas.microsoft.com/office/drawing/2014/main" id="{184D0EA1-A98B-4196-8DB5-982AD3523DA1}"/>
+                <a16:creationId xmlns:a16="http://schemas.microsoft.com/office/drawing/2014/main" id="{F0F9110A-36CF-43FF-97EC-BC7C656E6E22}"/>
               </a:ext>
             </a:extLst>
           </p:cNvPr>
@@ -6500,7 +6500,7 @@
           <p:cNvPr id="42" name="reveal2-line-41">
             <a:extLst xmlns:a="http://schemas.openxmlformats.org/drawingml/2006/main">
               <a:ext uri="{FF2B5EF4-FFF2-40B4-BE49-F238E27FC236}">
-                <a16:creationId xmlns:a16="http://schemas.microsoft.com/office/drawing/2014/main" id="{3647CEBD-BE4C-4F95-BEA6-78E9B11E6729}"/>
+                <a16:creationId xmlns:a16="http://schemas.microsoft.com/office/drawing/2014/main" id="{AE7E313B-62FD-45B1-9040-428050F3A452}"/>
               </a:ext>
             </a:extLst>
           </p:cNvPr>
@@ -6540,7 +6540,7 @@
           <p:cNvPr id="43" name="reveal2-line-42">
             <a:extLst xmlns:a="http://schemas.openxmlformats.org/drawingml/2006/main">
               <a:ext uri="{FF2B5EF4-FFF2-40B4-BE49-F238E27FC236}">
-                <a16:creationId xmlns:a16="http://schemas.microsoft.com/office/drawing/2014/main" id="{B087A839-C656-49E1-B5E0-6245046E5489}"/>
+                <a16:creationId xmlns:a16="http://schemas.microsoft.com/office/drawing/2014/main" id="{C083656B-DDCF-4587-913D-010AC50294CE}"/>
               </a:ext>
             </a:extLst>
           </p:cNvPr>
@@ -6580,7 +6580,7 @@
           <p:cNvPr id="44" name="reveal2-line-43">
             <a:extLst xmlns:a="http://schemas.openxmlformats.org/drawingml/2006/main">
               <a:ext uri="{FF2B5EF4-FFF2-40B4-BE49-F238E27FC236}">
-                <a16:creationId xmlns:a16="http://schemas.microsoft.com/office/drawing/2014/main" id="{165D4A2D-346F-4F45-93BA-B7196DAA3F79}"/>
+                <a16:creationId xmlns:a16="http://schemas.microsoft.com/office/drawing/2014/main" id="{DC32BB70-6DF0-4AB7-BF41-C0946A4DD8F7}"/>
               </a:ext>
             </a:extLst>
           </p:cNvPr>
@@ -6620,7 +6620,7 @@
           <p:cNvPr id="45" name="reveal2-line-44">
             <a:extLst xmlns:a="http://schemas.openxmlformats.org/drawingml/2006/main">
               <a:ext uri="{FF2B5EF4-FFF2-40B4-BE49-F238E27FC236}">
-                <a16:creationId xmlns:a16="http://schemas.microsoft.com/office/drawing/2014/main" id="{DE768A1A-4BA4-4208-893F-C3C8096B1908}"/>
+                <a16:creationId xmlns:a16="http://schemas.microsoft.com/office/drawing/2014/main" id="{FA2EDAD3-41E5-41F2-BEBE-4A0534D5BF6A}"/>
               </a:ext>
             </a:extLst>
           </p:cNvPr>
@@ -6660,7 +6660,7 @@
           <p:cNvPr id="46" name="reveal2-line-45">
             <a:extLst xmlns:a="http://schemas.openxmlformats.org/drawingml/2006/main">
               <a:ext uri="{FF2B5EF4-FFF2-40B4-BE49-F238E27FC236}">
-                <a16:creationId xmlns:a16="http://schemas.microsoft.com/office/drawing/2014/main" id="{54AD6E8C-2EEE-406B-86E2-8B41B0365BB7}"/>
+                <a16:creationId xmlns:a16="http://schemas.microsoft.com/office/drawing/2014/main" id="{D0C38A57-A790-4B89-A75E-14259E089564}"/>
               </a:ext>
             </a:extLst>
           </p:cNvPr>
@@ -6700,7 +6700,7 @@
           <p:cNvPr id="47" name="reveal2-line-46">
             <a:extLst xmlns:a="http://schemas.openxmlformats.org/drawingml/2006/main">
               <a:ext uri="{FF2B5EF4-FFF2-40B4-BE49-F238E27FC236}">
-                <a16:creationId xmlns:a16="http://schemas.microsoft.com/office/drawing/2014/main" id="{D273D409-9C5D-42ED-8F09-9EEDB6049BAC}"/>
+                <a16:creationId xmlns:a16="http://schemas.microsoft.com/office/drawing/2014/main" id="{8C484EA4-8794-4823-B5DA-76C5FEAE8069}"/>
               </a:ext>
             </a:extLst>
           </p:cNvPr>
@@ -6740,7 +6740,7 @@
           <p:cNvPr id="48" name="reveal2-line-47">
             <a:extLst xmlns:a="http://schemas.openxmlformats.org/drawingml/2006/main">
               <a:ext uri="{FF2B5EF4-FFF2-40B4-BE49-F238E27FC236}">
-                <a16:creationId xmlns:a16="http://schemas.microsoft.com/office/drawing/2014/main" id="{BDBEFF0A-03B0-49F7-85B4-F1C30DAC7756}"/>
+                <a16:creationId xmlns:a16="http://schemas.microsoft.com/office/drawing/2014/main" id="{B2892B94-5A38-479B-869D-1CB9342BB4BF}"/>
               </a:ext>
             </a:extLst>
           </p:cNvPr>
@@ -6780,7 +6780,7 @@
           <p:cNvPr id="49" name="reveal2-line-48">
             <a:extLst xmlns:a="http://schemas.openxmlformats.org/drawingml/2006/main">
               <a:ext uri="{FF2B5EF4-FFF2-40B4-BE49-F238E27FC236}">
-                <a16:creationId xmlns:a16="http://schemas.microsoft.com/office/drawing/2014/main" id="{912D6D78-6FAA-4A14-A75B-50852FA1B906}"/>
+                <a16:creationId xmlns:a16="http://schemas.microsoft.com/office/drawing/2014/main" id="{126E9390-F9C3-4493-84A8-34E46B7FBF76}"/>
               </a:ext>
             </a:extLst>
           </p:cNvPr>
@@ -6820,7 +6820,7 @@
           <p:cNvPr id="50" name="reveal2-line-49">
             <a:extLst xmlns:a="http://schemas.openxmlformats.org/drawingml/2006/main">
               <a:ext uri="{FF2B5EF4-FFF2-40B4-BE49-F238E27FC236}">
-                <a16:creationId xmlns:a16="http://schemas.microsoft.com/office/drawing/2014/main" id="{0B7D32BC-203F-4C39-81D4-5F8623F3CF40}"/>
+                <a16:creationId xmlns:a16="http://schemas.microsoft.com/office/drawing/2014/main" id="{A1E85AEF-C1C3-4ECC-9B7C-FE6C46CB11F0}"/>
               </a:ext>
             </a:extLst>
           </p:cNvPr>
@@ -6860,7 +6860,7 @@
           <p:cNvPr id="51" name="reveal2-line-50">
             <a:extLst xmlns:a="http://schemas.openxmlformats.org/drawingml/2006/main">
               <a:ext uri="{FF2B5EF4-FFF2-40B4-BE49-F238E27FC236}">
-                <a16:creationId xmlns:a16="http://schemas.microsoft.com/office/drawing/2014/main" id="{415B8C0E-5608-4B8F-B4A2-321DE937FC96}"/>
+                <a16:creationId xmlns:a16="http://schemas.microsoft.com/office/drawing/2014/main" id="{455C5642-B684-4AE3-ABE6-06D7C4917562}"/>
               </a:ext>
             </a:extLst>
           </p:cNvPr>
@@ -6900,7 +6900,7 @@
           <p:cNvPr id="52" name="reveal2-line-51">
             <a:extLst xmlns:a="http://schemas.openxmlformats.org/drawingml/2006/main">
               <a:ext uri="{FF2B5EF4-FFF2-40B4-BE49-F238E27FC236}">
-                <a16:creationId xmlns:a16="http://schemas.microsoft.com/office/drawing/2014/main" id="{0E2673DC-A65A-44D6-93B3-35F886033C29}"/>
+                <a16:creationId xmlns:a16="http://schemas.microsoft.com/office/drawing/2014/main" id="{4C2253EF-36FE-460D-84A2-258D14C2FB0D}"/>
               </a:ext>
             </a:extLst>
           </p:cNvPr>
@@ -6940,7 +6940,7 @@
           <p:cNvPr id="53" name="reveal2-line-52">
             <a:extLst xmlns:a="http://schemas.openxmlformats.org/drawingml/2006/main">
               <a:ext uri="{FF2B5EF4-FFF2-40B4-BE49-F238E27FC236}">
-                <a16:creationId xmlns:a16="http://schemas.microsoft.com/office/drawing/2014/main" id="{BA389680-6BCF-47C0-AC8B-F54FCDA4B24E}"/>
+                <a16:creationId xmlns:a16="http://schemas.microsoft.com/office/drawing/2014/main" id="{0006A327-1C0A-41BA-9D0C-2DA56FC728CD}"/>
               </a:ext>
             </a:extLst>
           </p:cNvPr>
@@ -6980,7 +6980,7 @@
           <p:cNvPr id="54" name="reveal2-line-53">
             <a:extLst xmlns:a="http://schemas.openxmlformats.org/drawingml/2006/main">
               <a:ext uri="{FF2B5EF4-FFF2-40B4-BE49-F238E27FC236}">
-                <a16:creationId xmlns:a16="http://schemas.microsoft.com/office/drawing/2014/main" id="{234F487A-4442-4C13-BF3D-3FC8B1CEE306}"/>
+                <a16:creationId xmlns:a16="http://schemas.microsoft.com/office/drawing/2014/main" id="{3EC84793-3408-459A-A370-DE9DF4229F9E}"/>
               </a:ext>
             </a:extLst>
           </p:cNvPr>
@@ -7020,7 +7020,7 @@
           <p:cNvPr id="55" name="reveal2-line-54">
             <a:extLst xmlns:a="http://schemas.openxmlformats.org/drawingml/2006/main">
               <a:ext uri="{FF2B5EF4-FFF2-40B4-BE49-F238E27FC236}">
-                <a16:creationId xmlns:a16="http://schemas.microsoft.com/office/drawing/2014/main" id="{EB42BCC2-67F0-4BA3-8B65-C992D20519E4}"/>
+                <a16:creationId xmlns:a16="http://schemas.microsoft.com/office/drawing/2014/main" id="{F1178B98-F951-4A56-9DEB-6E2EB4200237}"/>
               </a:ext>
             </a:extLst>
           </p:cNvPr>
@@ -7060,7 +7060,7 @@
           <p:cNvPr id="56" name="reveal2-line-55">
             <a:extLst xmlns:a="http://schemas.openxmlformats.org/drawingml/2006/main">
               <a:ext uri="{FF2B5EF4-FFF2-40B4-BE49-F238E27FC236}">
-                <a16:creationId xmlns:a16="http://schemas.microsoft.com/office/drawing/2014/main" id="{A3A45827-970C-4899-8AFF-8AEC18D872A2}"/>
+                <a16:creationId xmlns:a16="http://schemas.microsoft.com/office/drawing/2014/main" id="{D78B3652-133B-480C-82FB-2C9454DAEDFB}"/>
               </a:ext>
             </a:extLst>
           </p:cNvPr>
@@ -7100,7 +7100,7 @@
           <p:cNvPr id="57" name="reveal2-line-56">
             <a:extLst xmlns:a="http://schemas.openxmlformats.org/drawingml/2006/main">
               <a:ext uri="{FF2B5EF4-FFF2-40B4-BE49-F238E27FC236}">
-                <a16:creationId xmlns:a16="http://schemas.microsoft.com/office/drawing/2014/main" id="{18586661-FA3C-49F5-9B7A-ADC455A16419}"/>
+                <a16:creationId xmlns:a16="http://schemas.microsoft.com/office/drawing/2014/main" id="{9C134D6D-2F25-4882-A348-B7800D1EA265}"/>
               </a:ext>
             </a:extLst>
           </p:cNvPr>
@@ -7140,7 +7140,7 @@
           <p:cNvPr id="58" name="reveal2-line-57">
             <a:extLst xmlns:a="http://schemas.openxmlformats.org/drawingml/2006/main">
               <a:ext uri="{FF2B5EF4-FFF2-40B4-BE49-F238E27FC236}">
-                <a16:creationId xmlns:a16="http://schemas.microsoft.com/office/drawing/2014/main" id="{BF49802D-8D77-44D5-AACE-463F6B316692}"/>
+                <a16:creationId xmlns:a16="http://schemas.microsoft.com/office/drawing/2014/main" id="{FA39F0DA-B324-4B25-B075-9C752718D856}"/>
               </a:ext>
             </a:extLst>
           </p:cNvPr>
@@ -7180,7 +7180,7 @@
           <p:cNvPr id="59" name="reveal2-line-58">
             <a:extLst xmlns:a="http://schemas.openxmlformats.org/drawingml/2006/main">
               <a:ext uri="{FF2B5EF4-FFF2-40B4-BE49-F238E27FC236}">
-                <a16:creationId xmlns:a16="http://schemas.microsoft.com/office/drawing/2014/main" id="{90F31CCB-ABC8-4953-8FE7-5EA1B6DD39FB}"/>
+                <a16:creationId xmlns:a16="http://schemas.microsoft.com/office/drawing/2014/main" id="{E9AA4507-FE7B-4EBA-8FE8-A1690048E7CC}"/>
               </a:ext>
             </a:extLst>
           </p:cNvPr>
@@ -7220,7 +7220,7 @@
           <p:cNvPr id="60" name="reveal2-line-59">
             <a:extLst xmlns:a="http://schemas.openxmlformats.org/drawingml/2006/main">
               <a:ext uri="{FF2B5EF4-FFF2-40B4-BE49-F238E27FC236}">
-                <a16:creationId xmlns:a16="http://schemas.microsoft.com/office/drawing/2014/main" id="{F6A3DD0B-EFA2-477C-905D-3780E9E6BB66}"/>
+                <a16:creationId xmlns:a16="http://schemas.microsoft.com/office/drawing/2014/main" id="{E1C1B31B-9AD2-452E-825E-E7F8E51815D6}"/>
               </a:ext>
             </a:extLst>
           </p:cNvPr>
@@ -7260,7 +7260,7 @@
           <p:cNvPr id="61" name="reveal2-line-60">
             <a:extLst xmlns:a="http://schemas.openxmlformats.org/drawingml/2006/main">
               <a:ext uri="{FF2B5EF4-FFF2-40B4-BE49-F238E27FC236}">
-                <a16:creationId xmlns:a16="http://schemas.microsoft.com/office/drawing/2014/main" id="{E423E579-8264-4A13-9EC3-812FE025BCE6}"/>
+                <a16:creationId xmlns:a16="http://schemas.microsoft.com/office/drawing/2014/main" id="{C41E6A23-E626-4179-ADF1-A7CA7E691740}"/>
               </a:ext>
             </a:extLst>
           </p:cNvPr>
@@ -7300,7 +7300,7 @@
           <p:cNvPr id="62" name="reveal2-line-61">
             <a:extLst xmlns:a="http://schemas.openxmlformats.org/drawingml/2006/main">
               <a:ext uri="{FF2B5EF4-FFF2-40B4-BE49-F238E27FC236}">
-                <a16:creationId xmlns:a16="http://schemas.microsoft.com/office/drawing/2014/main" id="{C32B64E8-F079-45C0-B56A-0386B2D2E3AB}"/>
+                <a16:creationId xmlns:a16="http://schemas.microsoft.com/office/drawing/2014/main" id="{ECA71A26-8769-4846-A9A3-870E4FF61A20}"/>
               </a:ext>
             </a:extLst>
           </p:cNvPr>
@@ -7340,7 +7340,7 @@
           <p:cNvPr id="63" name="reveal2-line-62">
             <a:extLst xmlns:a="http://schemas.openxmlformats.org/drawingml/2006/main">
               <a:ext uri="{FF2B5EF4-FFF2-40B4-BE49-F238E27FC236}">
-                <a16:creationId xmlns:a16="http://schemas.microsoft.com/office/drawing/2014/main" id="{30639C96-26A8-458B-932D-4644EB035FCC}"/>
+                <a16:creationId xmlns:a16="http://schemas.microsoft.com/office/drawing/2014/main" id="{4D8D2697-E0BD-4EB4-981E-6F275485749A}"/>
               </a:ext>
             </a:extLst>
           </p:cNvPr>
@@ -7380,7 +7380,7 @@
           <p:cNvPr id="64" name="reveal2-object-63">
             <a:extLst xmlns:a="http://schemas.openxmlformats.org/drawingml/2006/main">
               <a:ext uri="{FF2B5EF4-FFF2-40B4-BE49-F238E27FC236}">
-                <a16:creationId xmlns:a16="http://schemas.microsoft.com/office/drawing/2014/main" id="{32C3B7A8-BF7B-4ACD-9A41-D0880BBFC0D1}"/>
+                <a16:creationId xmlns:a16="http://schemas.microsoft.com/office/drawing/2014/main" id="{E65A7EAC-5215-4931-9985-206CD26D80EC}"/>
               </a:ext>
             </a:extLst>
           </p:cNvPr>
@@ -7493,7 +7493,7 @@
           <p:cNvPr id="65" name="reveal2-object-64">
             <a:extLst xmlns:a="http://schemas.openxmlformats.org/drawingml/2006/main">
               <a:ext uri="{FF2B5EF4-FFF2-40B4-BE49-F238E27FC236}">
-                <a16:creationId xmlns:a16="http://schemas.microsoft.com/office/drawing/2014/main" id="{8BA04BB1-C1D3-4BE8-AF1B-5D9616C73983}"/>
+                <a16:creationId xmlns:a16="http://schemas.microsoft.com/office/drawing/2014/main" id="{8A513EF1-EAA6-4C82-B856-61D9CAFBCA89}"/>
               </a:ext>
             </a:extLst>
           </p:cNvPr>
@@ -7560,7 +7560,7 @@
           <p:cNvPr id="66" name="object-65">
             <a:extLst xmlns:a="http://schemas.openxmlformats.org/drawingml/2006/main">
               <a:ext uri="{FF2B5EF4-FFF2-40B4-BE49-F238E27FC236}">
-                <a16:creationId xmlns:a16="http://schemas.microsoft.com/office/drawing/2014/main" id="{2F9302D9-1A0C-4A62-8240-A3358574835C}"/>
+                <a16:creationId xmlns:a16="http://schemas.microsoft.com/office/drawing/2014/main" id="{C6D7ADB9-1701-471D-A8CE-C548479D331B}"/>
               </a:ext>
             </a:extLst>
           </p:cNvPr>
@@ -7627,7 +7627,7 @@
           <p:cNvPr id="67" name="object-66">
             <a:extLst xmlns:a="http://schemas.openxmlformats.org/drawingml/2006/main">
               <a:ext uri="{FF2B5EF4-FFF2-40B4-BE49-F238E27FC236}">
-                <a16:creationId xmlns:a16="http://schemas.microsoft.com/office/drawing/2014/main" id="{60A56EEC-6119-4BD3-AFB3-E87E778AC6A6}"/>
+                <a16:creationId xmlns:a16="http://schemas.microsoft.com/office/drawing/2014/main" id="{BD0E988C-387C-47B5-A597-53CC3AF60951}"/>
               </a:ext>
             </a:extLst>
           </p:cNvPr>
@@ -7692,7 +7692,7 @@
     </p:spTree>
     <p:extLst>
       <p:ext uri="{BB962C8B-B14F-4D97-AF65-F5344CB8AC3E}">
-        <p14:creationId xmlns:p14="http://schemas.microsoft.com/office/powerpoint/2010/main" val="1623325342"/>
+        <p14:creationId xmlns:p14="http://schemas.microsoft.com/office/powerpoint/2010/main" val="471724089"/>
       </p:ext>
     </p:extLst>
   </p:cSld>
@@ -8827,7 +8827,7 @@
           <p:cNvPr id="24" name="object-530">
             <a:extLst xmlns:a="http://schemas.openxmlformats.org/drawingml/2006/main">
               <a:ext uri="{FF2B5EF4-FFF2-40B4-BE49-F238E27FC236}">
-                <a16:creationId xmlns:a16="http://schemas.microsoft.com/office/drawing/2014/main" id="{979382A9-542B-4DA1-AB71-EF81F6A12A4B}"/>
+                <a16:creationId xmlns:a16="http://schemas.microsoft.com/office/drawing/2014/main" id="{C715B688-E12F-4B6E-A01F-C5927620D838}"/>
               </a:ext>
             </a:extLst>
           </p:cNvPr>
@@ -8894,7 +8894,7 @@
           <p:cNvPr id="2" name="object-531">
             <a:extLst xmlns:a="http://schemas.openxmlformats.org/drawingml/2006/main">
               <a:ext uri="{FF2B5EF4-FFF2-40B4-BE49-F238E27FC236}">
-                <a16:creationId xmlns:a16="http://schemas.microsoft.com/office/drawing/2014/main" id="{E533D1FB-C532-4F4F-8A0B-BB605B9C07C7}"/>
+                <a16:creationId xmlns:a16="http://schemas.microsoft.com/office/drawing/2014/main" id="{9C0FAE95-F3CF-4192-A423-F34B3958B196}"/>
               </a:ext>
             </a:extLst>
           </p:cNvPr>
@@ -8961,7 +8961,7 @@
           <p:cNvPr id="3" name="object-532">
             <a:extLst xmlns:a="http://schemas.openxmlformats.org/drawingml/2006/main">
               <a:ext uri="{FF2B5EF4-FFF2-40B4-BE49-F238E27FC236}">
-                <a16:creationId xmlns:a16="http://schemas.microsoft.com/office/drawing/2014/main" id="{001D9D1F-14EE-4D0C-97B5-FB195274C6E7}"/>
+                <a16:creationId xmlns:a16="http://schemas.microsoft.com/office/drawing/2014/main" id="{1E30E874-F2A8-44B4-901E-3F2C35727802}"/>
               </a:ext>
             </a:extLst>
           </p:cNvPr>
@@ -9028,7 +9028,7 @@
           <p:cNvPr id="4" name="object-533">
             <a:extLst xmlns:a="http://schemas.openxmlformats.org/drawingml/2006/main">
               <a:ext uri="{FF2B5EF4-FFF2-40B4-BE49-F238E27FC236}">
-                <a16:creationId xmlns:a16="http://schemas.microsoft.com/office/drawing/2014/main" id="{9AE0A03D-403D-4874-A45D-FD443AFC5490}"/>
+                <a16:creationId xmlns:a16="http://schemas.microsoft.com/office/drawing/2014/main" id="{D3DDA458-6A0F-4569-A71E-A0EAD73CC088}"/>
               </a:ext>
             </a:extLst>
           </p:cNvPr>
@@ -9095,7 +9095,7 @@
           <p:cNvPr id="5" name="reveal1-object-534">
             <a:extLst xmlns:a="http://schemas.openxmlformats.org/drawingml/2006/main">
               <a:ext uri="{FF2B5EF4-FFF2-40B4-BE49-F238E27FC236}">
-                <a16:creationId xmlns:a16="http://schemas.microsoft.com/office/drawing/2014/main" id="{1BDC68EE-7335-4E71-8680-D3C870DFE54C}"/>
+                <a16:creationId xmlns:a16="http://schemas.microsoft.com/office/drawing/2014/main" id="{057CDDCC-1746-4B29-9E99-6ED1F187B045}"/>
               </a:ext>
             </a:extLst>
           </p:cNvPr>
@@ -9162,7 +9162,7 @@
           <p:cNvPr id="6" name="reveal1-object-535">
             <a:extLst xmlns:a="http://schemas.openxmlformats.org/drawingml/2006/main">
               <a:ext uri="{FF2B5EF4-FFF2-40B4-BE49-F238E27FC236}">
-                <a16:creationId xmlns:a16="http://schemas.microsoft.com/office/drawing/2014/main" id="{5E698DDB-3337-4B3A-A492-8C5FF791B1A1}"/>
+                <a16:creationId xmlns:a16="http://schemas.microsoft.com/office/drawing/2014/main" id="{B7765242-820E-4FAE-9DEC-E58CC401F044}"/>
               </a:ext>
             </a:extLst>
           </p:cNvPr>
@@ -9193,7 +9193,7 @@
           <p:cNvPr id="7" name="reveal1-object-536">
             <a:extLst xmlns:a="http://schemas.openxmlformats.org/drawingml/2006/main">
               <a:ext uri="{FF2B5EF4-FFF2-40B4-BE49-F238E27FC236}">
-                <a16:creationId xmlns:a16="http://schemas.microsoft.com/office/drawing/2014/main" id="{1862AD4B-D142-4DF5-A552-517586D2B90F}"/>
+                <a16:creationId xmlns:a16="http://schemas.microsoft.com/office/drawing/2014/main" id="{0FE944E0-DA4C-4319-9D26-8B79798093E6}"/>
               </a:ext>
             </a:extLst>
           </p:cNvPr>
@@ -9260,7 +9260,7 @@
           <p:cNvPr id="8" name="reveal1-object-537">
             <a:extLst xmlns:a="http://schemas.openxmlformats.org/drawingml/2006/main">
               <a:ext uri="{FF2B5EF4-FFF2-40B4-BE49-F238E27FC236}">
-                <a16:creationId xmlns:a16="http://schemas.microsoft.com/office/drawing/2014/main" id="{0DB4657A-CCD3-43AF-9438-97F40BD91E2A}"/>
+                <a16:creationId xmlns:a16="http://schemas.microsoft.com/office/drawing/2014/main" id="{C74843FB-154D-4CF5-9DEC-DD5E48130BB4}"/>
               </a:ext>
             </a:extLst>
           </p:cNvPr>
@@ -9327,7 +9327,7 @@
           <p:cNvPr id="9" name="reveal1-object-538">
             <a:extLst xmlns:a="http://schemas.openxmlformats.org/drawingml/2006/main">
               <a:ext uri="{FF2B5EF4-FFF2-40B4-BE49-F238E27FC236}">
-                <a16:creationId xmlns:a16="http://schemas.microsoft.com/office/drawing/2014/main" id="{0EE3C54B-F483-4024-BEA8-71BEA6FBE281}"/>
+                <a16:creationId xmlns:a16="http://schemas.microsoft.com/office/drawing/2014/main" id="{71DB8D39-84F9-4C38-BD52-E6DEB82B6DD4}"/>
               </a:ext>
             </a:extLst>
           </p:cNvPr>
@@ -9394,7 +9394,7 @@
           <p:cNvPr id="10" name="reveal1-object-539">
             <a:extLst xmlns:a="http://schemas.openxmlformats.org/drawingml/2006/main">
               <a:ext uri="{FF2B5EF4-FFF2-40B4-BE49-F238E27FC236}">
-                <a16:creationId xmlns:a16="http://schemas.microsoft.com/office/drawing/2014/main" id="{FA5C7AE9-5A35-4F9C-B757-B243C5A51253}"/>
+                <a16:creationId xmlns:a16="http://schemas.microsoft.com/office/drawing/2014/main" id="{29E5910C-CFD8-40AE-8AC5-9F051FF3CE24}"/>
               </a:ext>
             </a:extLst>
           </p:cNvPr>
@@ -9425,7 +9425,7 @@
           <p:cNvPr id="11" name="reveal1-object-540">
             <a:extLst xmlns:a="http://schemas.openxmlformats.org/drawingml/2006/main">
               <a:ext uri="{FF2B5EF4-FFF2-40B4-BE49-F238E27FC236}">
-                <a16:creationId xmlns:a16="http://schemas.microsoft.com/office/drawing/2014/main" id="{BFBFD8EF-3B37-458B-99C5-E4DDC1E6FD73}"/>
+                <a16:creationId xmlns:a16="http://schemas.microsoft.com/office/drawing/2014/main" id="{B8900992-A2E8-4FBB-8DEB-E45618A0F80A}"/>
               </a:ext>
             </a:extLst>
           </p:cNvPr>
@@ -9492,7 +9492,7 @@
           <p:cNvPr id="12" name="reveal1-object-541">
             <a:extLst xmlns:a="http://schemas.openxmlformats.org/drawingml/2006/main">
               <a:ext uri="{FF2B5EF4-FFF2-40B4-BE49-F238E27FC236}">
-                <a16:creationId xmlns:a16="http://schemas.microsoft.com/office/drawing/2014/main" id="{C142B235-4E14-409D-8747-7C690D34168C}"/>
+                <a16:creationId xmlns:a16="http://schemas.microsoft.com/office/drawing/2014/main" id="{A3E003E6-6936-466D-A8D6-B3291EACC1F4}"/>
               </a:ext>
             </a:extLst>
           </p:cNvPr>
@@ -9559,7 +9559,7 @@
           <p:cNvPr id="13" name="reveal2-object-542">
             <a:extLst xmlns:a="http://schemas.openxmlformats.org/drawingml/2006/main">
               <a:ext uri="{FF2B5EF4-FFF2-40B4-BE49-F238E27FC236}">
-                <a16:creationId xmlns:a16="http://schemas.microsoft.com/office/drawing/2014/main" id="{FAD299C4-6C83-458C-BE52-AB6C2BBCD7F4}"/>
+                <a16:creationId xmlns:a16="http://schemas.microsoft.com/office/drawing/2014/main" id="{71A01552-67DC-4FB2-AFAF-C1687F222D9C}"/>
               </a:ext>
             </a:extLst>
           </p:cNvPr>
@@ -9626,7 +9626,7 @@
           <p:cNvPr id="14" name="reveal2-object-543">
             <a:extLst xmlns:a="http://schemas.openxmlformats.org/drawingml/2006/main">
               <a:ext uri="{FF2B5EF4-FFF2-40B4-BE49-F238E27FC236}">
-                <a16:creationId xmlns:a16="http://schemas.microsoft.com/office/drawing/2014/main" id="{6A13407B-6CDD-4A9A-97C1-082BC60E250C}"/>
+                <a16:creationId xmlns:a16="http://schemas.microsoft.com/office/drawing/2014/main" id="{2B47C64F-BFEA-4230-8AA1-E32FF7469B27}"/>
               </a:ext>
             </a:extLst>
           </p:cNvPr>
@@ -9657,7 +9657,7 @@
           <p:cNvPr id="15" name="reveal2-object-544">
             <a:extLst xmlns:a="http://schemas.openxmlformats.org/drawingml/2006/main">
               <a:ext uri="{FF2B5EF4-FFF2-40B4-BE49-F238E27FC236}">
-                <a16:creationId xmlns:a16="http://schemas.microsoft.com/office/drawing/2014/main" id="{C4CE54D7-9C4E-460C-9BCF-AE6172EC9973}"/>
+                <a16:creationId xmlns:a16="http://schemas.microsoft.com/office/drawing/2014/main" id="{84B398A7-BFEB-4717-924B-D5856B1FBCBB}"/>
               </a:ext>
             </a:extLst>
           </p:cNvPr>
@@ -9724,7 +9724,7 @@
           <p:cNvPr id="16" name="reveal2-object-545">
             <a:extLst xmlns:a="http://schemas.openxmlformats.org/drawingml/2006/main">
               <a:ext uri="{FF2B5EF4-FFF2-40B4-BE49-F238E27FC236}">
-                <a16:creationId xmlns:a16="http://schemas.microsoft.com/office/drawing/2014/main" id="{741C82BB-D85F-4A2C-B49B-43F85FBD2B45}"/>
+                <a16:creationId xmlns:a16="http://schemas.microsoft.com/office/drawing/2014/main" id="{C89FCC5A-AFD8-43E6-9C25-C73802029184}"/>
               </a:ext>
             </a:extLst>
           </p:cNvPr>
@@ -9791,7 +9791,7 @@
           <p:cNvPr id="17" name="reveal2-object-546">
             <a:extLst xmlns:a="http://schemas.openxmlformats.org/drawingml/2006/main">
               <a:ext uri="{FF2B5EF4-FFF2-40B4-BE49-F238E27FC236}">
-                <a16:creationId xmlns:a16="http://schemas.microsoft.com/office/drawing/2014/main" id="{9E31A38B-3541-405F-9230-28D33D14874B}"/>
+                <a16:creationId xmlns:a16="http://schemas.microsoft.com/office/drawing/2014/main" id="{C41C1F90-FAB4-42DD-8DBD-44BD2ACAF56A}"/>
               </a:ext>
             </a:extLst>
           </p:cNvPr>
@@ -9858,7 +9858,7 @@
           <p:cNvPr id="18" name="reveal2-object-547">
             <a:extLst xmlns:a="http://schemas.openxmlformats.org/drawingml/2006/main">
               <a:ext uri="{FF2B5EF4-FFF2-40B4-BE49-F238E27FC236}">
-                <a16:creationId xmlns:a16="http://schemas.microsoft.com/office/drawing/2014/main" id="{AF26DC30-DFF8-4594-8304-4DA076EADFDF}"/>
+                <a16:creationId xmlns:a16="http://schemas.microsoft.com/office/drawing/2014/main" id="{16BBAA73-B020-4E40-8AC9-9714092A7110}"/>
               </a:ext>
             </a:extLst>
           </p:cNvPr>
@@ -9889,7 +9889,7 @@
           <p:cNvPr id="19" name="reveal2-object-548">
             <a:extLst xmlns:a="http://schemas.openxmlformats.org/drawingml/2006/main">
               <a:ext uri="{FF2B5EF4-FFF2-40B4-BE49-F238E27FC236}">
-                <a16:creationId xmlns:a16="http://schemas.microsoft.com/office/drawing/2014/main" id="{DEF00D1F-37C0-4374-93DC-84E7DFF3D7A9}"/>
+                <a16:creationId xmlns:a16="http://schemas.microsoft.com/office/drawing/2014/main" id="{E915F5DE-173B-48FB-AE82-6E5604AE9F1B}"/>
               </a:ext>
             </a:extLst>
           </p:cNvPr>
@@ -9956,7 +9956,7 @@
           <p:cNvPr id="20" name="reveal2-object-549">
             <a:extLst xmlns:a="http://schemas.openxmlformats.org/drawingml/2006/main">
               <a:ext uri="{FF2B5EF4-FFF2-40B4-BE49-F238E27FC236}">
-                <a16:creationId xmlns:a16="http://schemas.microsoft.com/office/drawing/2014/main" id="{F3303B37-4B92-459F-B149-424D6B72D584}"/>
+                <a16:creationId xmlns:a16="http://schemas.microsoft.com/office/drawing/2014/main" id="{9E9912EF-F57A-4AE2-861F-32A04C78352C}"/>
               </a:ext>
             </a:extLst>
           </p:cNvPr>
@@ -10023,7 +10023,7 @@
           <p:cNvPr id="21" name="reveal2-object-550">
             <a:extLst xmlns:a="http://schemas.openxmlformats.org/drawingml/2006/main">
               <a:ext uri="{FF2B5EF4-FFF2-40B4-BE49-F238E27FC236}">
-                <a16:creationId xmlns:a16="http://schemas.microsoft.com/office/drawing/2014/main" id="{CA9E18F0-4E06-4E51-8109-DBDF6ED1986F}"/>
+                <a16:creationId xmlns:a16="http://schemas.microsoft.com/office/drawing/2014/main" id="{B4444AFF-DD8E-4053-B69E-B8134E83174A}"/>
               </a:ext>
             </a:extLst>
           </p:cNvPr>
@@ -10113,7 +10113,7 @@
           <p:cNvPr id="22" name="object-551">
             <a:extLst xmlns:a="http://schemas.openxmlformats.org/drawingml/2006/main">
               <a:ext uri="{FF2B5EF4-FFF2-40B4-BE49-F238E27FC236}">
-                <a16:creationId xmlns:a16="http://schemas.microsoft.com/office/drawing/2014/main" id="{B9AFBA92-6CDA-4769-8765-960A697263A6}"/>
+                <a16:creationId xmlns:a16="http://schemas.microsoft.com/office/drawing/2014/main" id="{22582CA9-CE6E-426F-9B8C-CBF1493D0455}"/>
               </a:ext>
             </a:extLst>
           </p:cNvPr>
@@ -10180,7 +10180,7 @@
           <p:cNvPr id="23" name="object-552">
             <a:extLst xmlns:a="http://schemas.openxmlformats.org/drawingml/2006/main">
               <a:ext uri="{FF2B5EF4-FFF2-40B4-BE49-F238E27FC236}">
-                <a16:creationId xmlns:a16="http://schemas.microsoft.com/office/drawing/2014/main" id="{33457C3D-2439-4653-816C-AFC9E9472083}"/>
+                <a16:creationId xmlns:a16="http://schemas.microsoft.com/office/drawing/2014/main" id="{96197783-FD2F-4ECB-8D89-EB346B551BC9}"/>
               </a:ext>
             </a:extLst>
           </p:cNvPr>
@@ -10245,7 +10245,7 @@
     </p:spTree>
     <p:extLst>
       <p:ext uri="{BB962C8B-B14F-4D97-AF65-F5344CB8AC3E}">
-        <p14:creationId xmlns:p14="http://schemas.microsoft.com/office/powerpoint/2010/main" val="1391361132"/>
+        <p14:creationId xmlns:p14="http://schemas.microsoft.com/office/powerpoint/2010/main" val="1304970014"/>
       </p:ext>
     </p:extLst>
   </p:cSld>
@@ -10820,7 +10820,7 @@
           <p:cNvPr id="36" name="object-553">
             <a:extLst xmlns:a="http://schemas.openxmlformats.org/drawingml/2006/main">
               <a:ext uri="{FF2B5EF4-FFF2-40B4-BE49-F238E27FC236}">
-                <a16:creationId xmlns:a16="http://schemas.microsoft.com/office/drawing/2014/main" id="{D33AFDC5-AD69-4341-8447-7D113660ACBA}"/>
+                <a16:creationId xmlns:a16="http://schemas.microsoft.com/office/drawing/2014/main" id="{6833F8A6-1D1B-4E4D-8B2E-ADDFA9EC2E54}"/>
               </a:ext>
             </a:extLst>
           </p:cNvPr>
@@ -10887,7 +10887,7 @@
           <p:cNvPr id="2" name="object-554">
             <a:extLst xmlns:a="http://schemas.openxmlformats.org/drawingml/2006/main">
               <a:ext uri="{FF2B5EF4-FFF2-40B4-BE49-F238E27FC236}">
-                <a16:creationId xmlns:a16="http://schemas.microsoft.com/office/drawing/2014/main" id="{7F9618E6-F469-4BAD-8F1B-9BA7E4F6883B}"/>
+                <a16:creationId xmlns:a16="http://schemas.microsoft.com/office/drawing/2014/main" id="{EF60606E-CFF7-413E-A234-5D12CD2548D6}"/>
               </a:ext>
             </a:extLst>
           </p:cNvPr>
@@ -10954,7 +10954,7 @@
           <p:cNvPr id="3" name="object-555">
             <a:extLst xmlns:a="http://schemas.openxmlformats.org/drawingml/2006/main">
               <a:ext uri="{FF2B5EF4-FFF2-40B4-BE49-F238E27FC236}">
-                <a16:creationId xmlns:a16="http://schemas.microsoft.com/office/drawing/2014/main" id="{98CB1F1F-0C5A-4492-8FDB-72AE8CF79532}"/>
+                <a16:creationId xmlns:a16="http://schemas.microsoft.com/office/drawing/2014/main" id="{DD252C1B-5D02-45DB-ACCA-BC903F75DA31}"/>
               </a:ext>
             </a:extLst>
           </p:cNvPr>
@@ -10985,7 +10985,7 @@
           <p:cNvPr id="4" name="object-556">
             <a:extLst xmlns:a="http://schemas.openxmlformats.org/drawingml/2006/main">
               <a:ext uri="{FF2B5EF4-FFF2-40B4-BE49-F238E27FC236}">
-                <a16:creationId xmlns:a16="http://schemas.microsoft.com/office/drawing/2014/main" id="{1D317EAA-AD25-4C07-B9AC-92E260B0C838}"/>
+                <a16:creationId xmlns:a16="http://schemas.microsoft.com/office/drawing/2014/main" id="{43235C01-41ED-4EE7-907E-913A7405073A}"/>
               </a:ext>
             </a:extLst>
           </p:cNvPr>
@@ -11052,7 +11052,7 @@
           <p:cNvPr id="5" name="line-557">
             <a:extLst xmlns:a="http://schemas.openxmlformats.org/drawingml/2006/main">
               <a:ext uri="{FF2B5EF4-FFF2-40B4-BE49-F238E27FC236}">
-                <a16:creationId xmlns:a16="http://schemas.microsoft.com/office/drawing/2014/main" id="{33D9FDBE-98EC-4536-B168-6C2E6C339F9A}"/>
+                <a16:creationId xmlns:a16="http://schemas.microsoft.com/office/drawing/2014/main" id="{A12762B2-682A-43DB-B036-C3E1B8B090EF}"/>
               </a:ext>
             </a:extLst>
           </p:cNvPr>
@@ -11092,7 +11092,7 @@
           <p:cNvPr id="6" name="line-558">
             <a:extLst xmlns:a="http://schemas.openxmlformats.org/drawingml/2006/main">
               <a:ext uri="{FF2B5EF4-FFF2-40B4-BE49-F238E27FC236}">
-                <a16:creationId xmlns:a16="http://schemas.microsoft.com/office/drawing/2014/main" id="{AAF6B858-5A09-4337-AD0C-CC611A10BCF7}"/>
+                <a16:creationId xmlns:a16="http://schemas.microsoft.com/office/drawing/2014/main" id="{4B3A0454-6033-4121-97FA-9B6698F3B292}"/>
               </a:ext>
             </a:extLst>
           </p:cNvPr>
@@ -11132,7 +11132,7 @@
           <p:cNvPr id="7" name="line-559">
             <a:extLst xmlns:a="http://schemas.openxmlformats.org/drawingml/2006/main">
               <a:ext uri="{FF2B5EF4-FFF2-40B4-BE49-F238E27FC236}">
-                <a16:creationId xmlns:a16="http://schemas.microsoft.com/office/drawing/2014/main" id="{5F460443-63B7-40F2-84CC-140C0025FC23}"/>
+                <a16:creationId xmlns:a16="http://schemas.microsoft.com/office/drawing/2014/main" id="{9EA28E52-8E58-482A-A14B-F59417D90B88}"/>
               </a:ext>
             </a:extLst>
           </p:cNvPr>
@@ -11172,7 +11172,7 @@
           <p:cNvPr id="8" name="object-560">
             <a:extLst xmlns:a="http://schemas.openxmlformats.org/drawingml/2006/main">
               <a:ext uri="{FF2B5EF4-FFF2-40B4-BE49-F238E27FC236}">
-                <a16:creationId xmlns:a16="http://schemas.microsoft.com/office/drawing/2014/main" id="{91F55F2F-F4F5-4617-A4F0-C7A3E5729BFC}"/>
+                <a16:creationId xmlns:a16="http://schemas.microsoft.com/office/drawing/2014/main" id="{27C34E61-727F-4E54-A6EB-3FD893D71C85}"/>
               </a:ext>
             </a:extLst>
           </p:cNvPr>
@@ -11203,7 +11203,7 @@
           <p:cNvPr id="9" name="object-561">
             <a:extLst xmlns:a="http://schemas.openxmlformats.org/drawingml/2006/main">
               <a:ext uri="{FF2B5EF4-FFF2-40B4-BE49-F238E27FC236}">
-                <a16:creationId xmlns:a16="http://schemas.microsoft.com/office/drawing/2014/main" id="{A4CA55F1-75C2-436E-82BA-378B874E4C71}"/>
+                <a16:creationId xmlns:a16="http://schemas.microsoft.com/office/drawing/2014/main" id="{E10D7CC7-3DC7-4AB1-8060-26B3C1FF9270}"/>
               </a:ext>
             </a:extLst>
           </p:cNvPr>
@@ -11234,7 +11234,7 @@
           <p:cNvPr id="10" name="object-562">
             <a:extLst xmlns:a="http://schemas.openxmlformats.org/drawingml/2006/main">
               <a:ext uri="{FF2B5EF4-FFF2-40B4-BE49-F238E27FC236}">
-                <a16:creationId xmlns:a16="http://schemas.microsoft.com/office/drawing/2014/main" id="{191876DB-6A65-4B31-B9B8-50BB2D47B7CA}"/>
+                <a16:creationId xmlns:a16="http://schemas.microsoft.com/office/drawing/2014/main" id="{F3DF11A1-A6D3-4EFD-A1A8-AA4D35CCCC65}"/>
               </a:ext>
             </a:extLst>
           </p:cNvPr>
@@ -11265,7 +11265,7 @@
           <p:cNvPr id="11" name="object-563">
             <a:extLst xmlns:a="http://schemas.openxmlformats.org/drawingml/2006/main">
               <a:ext uri="{FF2B5EF4-FFF2-40B4-BE49-F238E27FC236}">
-                <a16:creationId xmlns:a16="http://schemas.microsoft.com/office/drawing/2014/main" id="{AEB8B14B-3995-4867-8E79-5EEE9A7827B1}"/>
+                <a16:creationId xmlns:a16="http://schemas.microsoft.com/office/drawing/2014/main" id="{74DDA2E1-04C6-4AA1-9EE4-A7C11936FABE}"/>
               </a:ext>
             </a:extLst>
           </p:cNvPr>
@@ -11296,7 +11296,7 @@
           <p:cNvPr id="12" name="object-564">
             <a:extLst xmlns:a="http://schemas.openxmlformats.org/drawingml/2006/main">
               <a:ext uri="{FF2B5EF4-FFF2-40B4-BE49-F238E27FC236}">
-                <a16:creationId xmlns:a16="http://schemas.microsoft.com/office/drawing/2014/main" id="{B474C8CE-5B8D-4549-B62A-9EAFFBE38C7F}"/>
+                <a16:creationId xmlns:a16="http://schemas.microsoft.com/office/drawing/2014/main" id="{02FE34D6-9CAD-4746-95A0-64E2020B9575}"/>
               </a:ext>
             </a:extLst>
           </p:cNvPr>
@@ -11327,7 +11327,7 @@
           <p:cNvPr id="13" name="object-565">
             <a:extLst xmlns:a="http://schemas.openxmlformats.org/drawingml/2006/main">
               <a:ext uri="{FF2B5EF4-FFF2-40B4-BE49-F238E27FC236}">
-                <a16:creationId xmlns:a16="http://schemas.microsoft.com/office/drawing/2014/main" id="{4A35F3D0-E63E-45F8-AFE2-68D3A7A205C5}"/>
+                <a16:creationId xmlns:a16="http://schemas.microsoft.com/office/drawing/2014/main" id="{484EB25A-E3E4-45B0-89AD-E21AE5C96165}"/>
               </a:ext>
             </a:extLst>
           </p:cNvPr>
@@ -11358,7 +11358,7 @@
           <p:cNvPr id="14" name="object-566">
             <a:extLst xmlns:a="http://schemas.openxmlformats.org/drawingml/2006/main">
               <a:ext uri="{FF2B5EF4-FFF2-40B4-BE49-F238E27FC236}">
-                <a16:creationId xmlns:a16="http://schemas.microsoft.com/office/drawing/2014/main" id="{9BA1C80C-4EC3-437E-B70A-28EA350836C2}"/>
+                <a16:creationId xmlns:a16="http://schemas.microsoft.com/office/drawing/2014/main" id="{44D25B1D-04AC-41B5-8E8E-B3C1BF076FF0}"/>
               </a:ext>
             </a:extLst>
           </p:cNvPr>
@@ -11425,7 +11425,7 @@
           <p:cNvPr id="15" name="object-567">
             <a:extLst xmlns:a="http://schemas.openxmlformats.org/drawingml/2006/main">
               <a:ext uri="{FF2B5EF4-FFF2-40B4-BE49-F238E27FC236}">
-                <a16:creationId xmlns:a16="http://schemas.microsoft.com/office/drawing/2014/main" id="{7F436649-CDC5-4DD8-A5B1-5A7A074AC682}"/>
+                <a16:creationId xmlns:a16="http://schemas.microsoft.com/office/drawing/2014/main" id="{7DB8F87F-D28B-49E7-8EF2-56FA0BC48C08}"/>
               </a:ext>
             </a:extLst>
           </p:cNvPr>
@@ -11456,7 +11456,7 @@
           <p:cNvPr id="16" name="object-568">
             <a:extLst xmlns:a="http://schemas.openxmlformats.org/drawingml/2006/main">
               <a:ext uri="{FF2B5EF4-FFF2-40B4-BE49-F238E27FC236}">
-                <a16:creationId xmlns:a16="http://schemas.microsoft.com/office/drawing/2014/main" id="{8FA72BD3-43AC-45BF-9072-D9F88BBCDBED}"/>
+                <a16:creationId xmlns:a16="http://schemas.microsoft.com/office/drawing/2014/main" id="{6D13536D-9AB1-453C-9F1E-31C00FCC5600}"/>
               </a:ext>
             </a:extLst>
           </p:cNvPr>
@@ -11523,7 +11523,7 @@
           <p:cNvPr id="17" name="line-569">
             <a:extLst xmlns:a="http://schemas.openxmlformats.org/drawingml/2006/main">
               <a:ext uri="{FF2B5EF4-FFF2-40B4-BE49-F238E27FC236}">
-                <a16:creationId xmlns:a16="http://schemas.microsoft.com/office/drawing/2014/main" id="{576DBEE7-4DC0-4286-8B11-3D1516E90032}"/>
+                <a16:creationId xmlns:a16="http://schemas.microsoft.com/office/drawing/2014/main" id="{2EB23981-7713-4A3C-BC0E-F02E4F58B6A0}"/>
               </a:ext>
             </a:extLst>
           </p:cNvPr>
@@ -11563,7 +11563,7 @@
           <p:cNvPr id="18" name="line-570">
             <a:extLst xmlns:a="http://schemas.openxmlformats.org/drawingml/2006/main">
               <a:ext uri="{FF2B5EF4-FFF2-40B4-BE49-F238E27FC236}">
-                <a16:creationId xmlns:a16="http://schemas.microsoft.com/office/drawing/2014/main" id="{4E953D8D-B919-4FE5-8962-CCBFE808258E}"/>
+                <a16:creationId xmlns:a16="http://schemas.microsoft.com/office/drawing/2014/main" id="{AF851DD1-A754-4C51-AC7C-16A8BC12FAFA}"/>
               </a:ext>
             </a:extLst>
           </p:cNvPr>
@@ -11603,7 +11603,7 @@
           <p:cNvPr id="19" name="line-571">
             <a:extLst xmlns:a="http://schemas.openxmlformats.org/drawingml/2006/main">
               <a:ext uri="{FF2B5EF4-FFF2-40B4-BE49-F238E27FC236}">
-                <a16:creationId xmlns:a16="http://schemas.microsoft.com/office/drawing/2014/main" id="{9B93382A-492F-4F00-A01D-95388A948FE7}"/>
+                <a16:creationId xmlns:a16="http://schemas.microsoft.com/office/drawing/2014/main" id="{D5051D62-71DF-442B-AEA4-5A847210A960}"/>
               </a:ext>
             </a:extLst>
           </p:cNvPr>
@@ -11643,7 +11643,7 @@
           <p:cNvPr id="20" name="line-572">
             <a:extLst xmlns:a="http://schemas.openxmlformats.org/drawingml/2006/main">
               <a:ext uri="{FF2B5EF4-FFF2-40B4-BE49-F238E27FC236}">
-                <a16:creationId xmlns:a16="http://schemas.microsoft.com/office/drawing/2014/main" id="{0370B2AB-F634-4164-8FAF-77B5564A806F}"/>
+                <a16:creationId xmlns:a16="http://schemas.microsoft.com/office/drawing/2014/main" id="{1A5F4A54-9877-4742-92BE-1B579A7595FF}"/>
               </a:ext>
             </a:extLst>
           </p:cNvPr>
@@ -11683,7 +11683,7 @@
           <p:cNvPr id="21" name="line-573">
             <a:extLst xmlns:a="http://schemas.openxmlformats.org/drawingml/2006/main">
               <a:ext uri="{FF2B5EF4-FFF2-40B4-BE49-F238E27FC236}">
-                <a16:creationId xmlns:a16="http://schemas.microsoft.com/office/drawing/2014/main" id="{E82247D0-DABE-4C4E-B28A-9C27138E97AD}"/>
+                <a16:creationId xmlns:a16="http://schemas.microsoft.com/office/drawing/2014/main" id="{5D61CCA7-B139-4467-8EB8-CE9DADFE305B}"/>
               </a:ext>
             </a:extLst>
           </p:cNvPr>
@@ -11723,7 +11723,7 @@
           <p:cNvPr id="22" name="line-574">
             <a:extLst xmlns:a="http://schemas.openxmlformats.org/drawingml/2006/main">
               <a:ext uri="{FF2B5EF4-FFF2-40B4-BE49-F238E27FC236}">
-                <a16:creationId xmlns:a16="http://schemas.microsoft.com/office/drawing/2014/main" id="{314BF263-C15E-462A-B49E-8353F3FB6996}"/>
+                <a16:creationId xmlns:a16="http://schemas.microsoft.com/office/drawing/2014/main" id="{C17C6EC9-7781-4FC8-A8A5-8018CA09A2D3}"/>
               </a:ext>
             </a:extLst>
           </p:cNvPr>
@@ -11763,7 +11763,7 @@
           <p:cNvPr id="23" name="line-575">
             <a:extLst xmlns:a="http://schemas.openxmlformats.org/drawingml/2006/main">
               <a:ext uri="{FF2B5EF4-FFF2-40B4-BE49-F238E27FC236}">
-                <a16:creationId xmlns:a16="http://schemas.microsoft.com/office/drawing/2014/main" id="{528616A2-0576-471A-944F-B915683CAC90}"/>
+                <a16:creationId xmlns:a16="http://schemas.microsoft.com/office/drawing/2014/main" id="{425F755C-549B-4B40-B7CC-6D3DDE7F7DAB}"/>
               </a:ext>
             </a:extLst>
           </p:cNvPr>
@@ -11803,7 +11803,7 @@
           <p:cNvPr id="24" name="line-576">
             <a:extLst xmlns:a="http://schemas.openxmlformats.org/drawingml/2006/main">
               <a:ext uri="{FF2B5EF4-FFF2-40B4-BE49-F238E27FC236}">
-                <a16:creationId xmlns:a16="http://schemas.microsoft.com/office/drawing/2014/main" id="{EC7B70F3-C01E-41BE-AD24-6F1A10E8BBC0}"/>
+                <a16:creationId xmlns:a16="http://schemas.microsoft.com/office/drawing/2014/main" id="{860B9AA6-0B6E-44F1-8943-947819D3C9E4}"/>
               </a:ext>
             </a:extLst>
           </p:cNvPr>
@@ -11843,7 +11843,7 @@
           <p:cNvPr id="25" name="line-577">
             <a:extLst xmlns:a="http://schemas.openxmlformats.org/drawingml/2006/main">
               <a:ext uri="{FF2B5EF4-FFF2-40B4-BE49-F238E27FC236}">
-                <a16:creationId xmlns:a16="http://schemas.microsoft.com/office/drawing/2014/main" id="{3625117B-988B-4984-A976-22B3DD8A5EBE}"/>
+                <a16:creationId xmlns:a16="http://schemas.microsoft.com/office/drawing/2014/main" id="{4F22B007-A59D-4496-B453-5C5AAECD8298}"/>
               </a:ext>
             </a:extLst>
           </p:cNvPr>
@@ -11883,7 +11883,7 @@
           <p:cNvPr id="26" name="reveal1-object-578">
             <a:extLst xmlns:a="http://schemas.openxmlformats.org/drawingml/2006/main">
               <a:ext uri="{FF2B5EF4-FFF2-40B4-BE49-F238E27FC236}">
-                <a16:creationId xmlns:a16="http://schemas.microsoft.com/office/drawing/2014/main" id="{85F166A7-E158-4FCA-94F3-2AADEB3A56C7}"/>
+                <a16:creationId xmlns:a16="http://schemas.microsoft.com/office/drawing/2014/main" id="{E5A33F4B-C11D-4AF8-8C7E-971382FF6218}"/>
               </a:ext>
             </a:extLst>
           </p:cNvPr>
@@ -11950,7 +11950,7 @@
           <p:cNvPr id="27" name="reveal1-object-579">
             <a:extLst xmlns:a="http://schemas.openxmlformats.org/drawingml/2006/main">
               <a:ext uri="{FF2B5EF4-FFF2-40B4-BE49-F238E27FC236}">
-                <a16:creationId xmlns:a16="http://schemas.microsoft.com/office/drawing/2014/main" id="{1E3D2F21-BC61-400D-B690-4C7ED050AB7B}"/>
+                <a16:creationId xmlns:a16="http://schemas.microsoft.com/office/drawing/2014/main" id="{918A3DA2-1862-407C-9BA3-5BFC6A65364C}"/>
               </a:ext>
             </a:extLst>
           </p:cNvPr>
@@ -12040,7 +12040,7 @@
           <p:cNvPr id="28" name="reveal1-object-580">
             <a:extLst xmlns:a="http://schemas.openxmlformats.org/drawingml/2006/main">
               <a:ext uri="{FF2B5EF4-FFF2-40B4-BE49-F238E27FC236}">
-                <a16:creationId xmlns:a16="http://schemas.microsoft.com/office/drawing/2014/main" id="{1EEED75A-0FE5-45D2-AEE6-E6F784DCB0F5}"/>
+                <a16:creationId xmlns:a16="http://schemas.microsoft.com/office/drawing/2014/main" id="{ADBDC31B-E884-47E7-A8E9-50BB7E2F175F}"/>
               </a:ext>
             </a:extLst>
           </p:cNvPr>
@@ -12107,7 +12107,7 @@
           <p:cNvPr id="29" name="reveal1-object-581">
             <a:extLst xmlns:a="http://schemas.openxmlformats.org/drawingml/2006/main">
               <a:ext uri="{FF2B5EF4-FFF2-40B4-BE49-F238E27FC236}">
-                <a16:creationId xmlns:a16="http://schemas.microsoft.com/office/drawing/2014/main" id="{A42D879E-BCE6-431C-B62B-36020A836660}"/>
+                <a16:creationId xmlns:a16="http://schemas.microsoft.com/office/drawing/2014/main" id="{34DE63F9-E3F3-4169-B806-27FF2C00967E}"/>
               </a:ext>
             </a:extLst>
           </p:cNvPr>
@@ -12197,7 +12197,7 @@
           <p:cNvPr id="30" name="reveal1-object-582">
             <a:extLst xmlns:a="http://schemas.openxmlformats.org/drawingml/2006/main">
               <a:ext uri="{FF2B5EF4-FFF2-40B4-BE49-F238E27FC236}">
-                <a16:creationId xmlns:a16="http://schemas.microsoft.com/office/drawing/2014/main" id="{E900784A-9688-4DF4-9B04-D34E647328CD}"/>
+                <a16:creationId xmlns:a16="http://schemas.microsoft.com/office/drawing/2014/main" id="{49962914-6256-404D-9611-C20621F888C4}"/>
               </a:ext>
             </a:extLst>
           </p:cNvPr>
@@ -12264,7 +12264,7 @@
           <p:cNvPr id="31" name="reveal1-object-583">
             <a:extLst xmlns:a="http://schemas.openxmlformats.org/drawingml/2006/main">
               <a:ext uri="{FF2B5EF4-FFF2-40B4-BE49-F238E27FC236}">
-                <a16:creationId xmlns:a16="http://schemas.microsoft.com/office/drawing/2014/main" id="{E14F0BBB-6B8F-4BD6-8417-D54599B68522}"/>
+                <a16:creationId xmlns:a16="http://schemas.microsoft.com/office/drawing/2014/main" id="{552599EA-2FC6-450C-9554-7D0396D652CB}"/>
               </a:ext>
             </a:extLst>
           </p:cNvPr>
@@ -12354,7 +12354,7 @@
           <p:cNvPr id="32" name="reveal2-line-584">
             <a:extLst xmlns:a="http://schemas.openxmlformats.org/drawingml/2006/main">
               <a:ext uri="{FF2B5EF4-FFF2-40B4-BE49-F238E27FC236}">
-                <a16:creationId xmlns:a16="http://schemas.microsoft.com/office/drawing/2014/main" id="{2F704E9C-A0DF-4F17-95A8-4811AA6F503A}"/>
+                <a16:creationId xmlns:a16="http://schemas.microsoft.com/office/drawing/2014/main" id="{EE220262-95D4-47EF-9839-D2C726F134D2}"/>
               </a:ext>
             </a:extLst>
           </p:cNvPr>
@@ -12394,7 +12394,7 @@
           <p:cNvPr id="33" name="reveal2-object-585">
             <a:extLst xmlns:a="http://schemas.openxmlformats.org/drawingml/2006/main">
               <a:ext uri="{FF2B5EF4-FFF2-40B4-BE49-F238E27FC236}">
-                <a16:creationId xmlns:a16="http://schemas.microsoft.com/office/drawing/2014/main" id="{A18C1EAB-5C8F-4788-A29E-0FA3E5840439}"/>
+                <a16:creationId xmlns:a16="http://schemas.microsoft.com/office/drawing/2014/main" id="{DC211782-6E59-4E38-8814-C25DA198EB81}"/>
               </a:ext>
             </a:extLst>
           </p:cNvPr>
@@ -12461,7 +12461,7 @@
           <p:cNvPr id="34" name="object-586">
             <a:extLst xmlns:a="http://schemas.openxmlformats.org/drawingml/2006/main">
               <a:ext uri="{FF2B5EF4-FFF2-40B4-BE49-F238E27FC236}">
-                <a16:creationId xmlns:a16="http://schemas.microsoft.com/office/drawing/2014/main" id="{B0557CC8-3A70-4233-BDB4-5FA038E0DB15}"/>
+                <a16:creationId xmlns:a16="http://schemas.microsoft.com/office/drawing/2014/main" id="{032A00A9-B155-430B-986C-8E2D95542B30}"/>
               </a:ext>
             </a:extLst>
           </p:cNvPr>
@@ -12528,7 +12528,7 @@
           <p:cNvPr id="35" name="object-587">
             <a:extLst xmlns:a="http://schemas.openxmlformats.org/drawingml/2006/main">
               <a:ext uri="{FF2B5EF4-FFF2-40B4-BE49-F238E27FC236}">
-                <a16:creationId xmlns:a16="http://schemas.microsoft.com/office/drawing/2014/main" id="{09624139-3D91-4759-9A50-9C9FBA57B72C}"/>
+                <a16:creationId xmlns:a16="http://schemas.microsoft.com/office/drawing/2014/main" id="{46DFDDC8-D811-4CE9-AA99-B62CB0F3006E}"/>
               </a:ext>
             </a:extLst>
           </p:cNvPr>
@@ -12593,7 +12593,7 @@
     </p:spTree>
     <p:extLst>
       <p:ext uri="{BB962C8B-B14F-4D97-AF65-F5344CB8AC3E}">
-        <p14:creationId xmlns:p14="http://schemas.microsoft.com/office/powerpoint/2010/main" val="1102682379"/>
+        <p14:creationId xmlns:p14="http://schemas.microsoft.com/office/powerpoint/2010/main" val="1235510068"/>
       </p:ext>
     </p:extLst>
   </p:cSld>
@@ -12916,7 +12916,7 @@
           <p:cNvPr id="209" name="object-67">
             <a:extLst xmlns:a="http://schemas.openxmlformats.org/drawingml/2006/main">
               <a:ext uri="{FF2B5EF4-FFF2-40B4-BE49-F238E27FC236}">
-                <a16:creationId xmlns:a16="http://schemas.microsoft.com/office/drawing/2014/main" id="{48A1073E-0DDA-4CEB-9685-C1B76F94EA61}"/>
+                <a16:creationId xmlns:a16="http://schemas.microsoft.com/office/drawing/2014/main" id="{26EA6C75-E450-40C0-B831-F468D2EE0801}"/>
               </a:ext>
             </a:extLst>
           </p:cNvPr>
@@ -12983,7 +12983,7 @@
           <p:cNvPr id="2" name="object-68">
             <a:extLst xmlns:a="http://schemas.openxmlformats.org/drawingml/2006/main">
               <a:ext uri="{FF2B5EF4-FFF2-40B4-BE49-F238E27FC236}">
-                <a16:creationId xmlns:a16="http://schemas.microsoft.com/office/drawing/2014/main" id="{0F25D214-84B4-484B-9030-BF425BEA3922}"/>
+                <a16:creationId xmlns:a16="http://schemas.microsoft.com/office/drawing/2014/main" id="{968F3123-CC38-4FB8-A50F-7FEC1325CF48}"/>
               </a:ext>
             </a:extLst>
           </p:cNvPr>
@@ -13050,7 +13050,7 @@
           <p:cNvPr id="3" name="line-69">
             <a:extLst xmlns:a="http://schemas.openxmlformats.org/drawingml/2006/main">
               <a:ext uri="{FF2B5EF4-FFF2-40B4-BE49-F238E27FC236}">
-                <a16:creationId xmlns:a16="http://schemas.microsoft.com/office/drawing/2014/main" id="{A433329B-D5DF-49E3-A689-DCB8D1CE72A1}"/>
+                <a16:creationId xmlns:a16="http://schemas.microsoft.com/office/drawing/2014/main" id="{4558165F-EB58-4265-BCCE-9F6B3C73DD96}"/>
               </a:ext>
             </a:extLst>
           </p:cNvPr>
@@ -13090,7 +13090,7 @@
           <p:cNvPr id="4" name="line-70">
             <a:extLst xmlns:a="http://schemas.openxmlformats.org/drawingml/2006/main">
               <a:ext uri="{FF2B5EF4-FFF2-40B4-BE49-F238E27FC236}">
-                <a16:creationId xmlns:a16="http://schemas.microsoft.com/office/drawing/2014/main" id="{F36369EC-7C5B-40F1-AB29-858E84E66EC6}"/>
+                <a16:creationId xmlns:a16="http://schemas.microsoft.com/office/drawing/2014/main" id="{0DED8E82-9586-49CF-8650-E2E9AC1C5F3F}"/>
               </a:ext>
             </a:extLst>
           </p:cNvPr>
@@ -13130,7 +13130,7 @@
           <p:cNvPr id="5" name="line-71">
             <a:extLst xmlns:a="http://schemas.openxmlformats.org/drawingml/2006/main">
               <a:ext uri="{FF2B5EF4-FFF2-40B4-BE49-F238E27FC236}">
-                <a16:creationId xmlns:a16="http://schemas.microsoft.com/office/drawing/2014/main" id="{B7DBBC04-DFC2-42C7-86F9-6E4382E73B13}"/>
+                <a16:creationId xmlns:a16="http://schemas.microsoft.com/office/drawing/2014/main" id="{C311C60F-8E4D-4DFF-9752-37F3DC500999}"/>
               </a:ext>
             </a:extLst>
           </p:cNvPr>
@@ -13170,7 +13170,7 @@
           <p:cNvPr id="6" name="line-72">
             <a:extLst xmlns:a="http://schemas.openxmlformats.org/drawingml/2006/main">
               <a:ext uri="{FF2B5EF4-FFF2-40B4-BE49-F238E27FC236}">
-                <a16:creationId xmlns:a16="http://schemas.microsoft.com/office/drawing/2014/main" id="{21FBC6D1-2150-4139-998D-BFB76CFB2CC9}"/>
+                <a16:creationId xmlns:a16="http://schemas.microsoft.com/office/drawing/2014/main" id="{87AD4AD3-B440-4624-8619-F96CF4A440E1}"/>
               </a:ext>
             </a:extLst>
           </p:cNvPr>
@@ -13210,7 +13210,7 @@
           <p:cNvPr id="7" name="line-73">
             <a:extLst xmlns:a="http://schemas.openxmlformats.org/drawingml/2006/main">
               <a:ext uri="{FF2B5EF4-FFF2-40B4-BE49-F238E27FC236}">
-                <a16:creationId xmlns:a16="http://schemas.microsoft.com/office/drawing/2014/main" id="{EAF03033-B3EB-4835-B519-3236B15E1EB5}"/>
+                <a16:creationId xmlns:a16="http://schemas.microsoft.com/office/drawing/2014/main" id="{322A9E8A-04A6-44B7-AE85-D2BB60932B81}"/>
               </a:ext>
             </a:extLst>
           </p:cNvPr>
@@ -13250,7 +13250,7 @@
           <p:cNvPr id="8" name="line-74">
             <a:extLst xmlns:a="http://schemas.openxmlformats.org/drawingml/2006/main">
               <a:ext uri="{FF2B5EF4-FFF2-40B4-BE49-F238E27FC236}">
-                <a16:creationId xmlns:a16="http://schemas.microsoft.com/office/drawing/2014/main" id="{FDB2B3C8-80E9-4D16-A9B0-1EFA261FFE5A}"/>
+                <a16:creationId xmlns:a16="http://schemas.microsoft.com/office/drawing/2014/main" id="{E3D0447B-2385-401F-B6C1-84497A5BB9F5}"/>
               </a:ext>
             </a:extLst>
           </p:cNvPr>
@@ -13290,7 +13290,7 @@
           <p:cNvPr id="9" name="line-75">
             <a:extLst xmlns:a="http://schemas.openxmlformats.org/drawingml/2006/main">
               <a:ext uri="{FF2B5EF4-FFF2-40B4-BE49-F238E27FC236}">
-                <a16:creationId xmlns:a16="http://schemas.microsoft.com/office/drawing/2014/main" id="{D4EF3EAF-D83F-4610-ABDD-031257E56BD4}"/>
+                <a16:creationId xmlns:a16="http://schemas.microsoft.com/office/drawing/2014/main" id="{018CB476-813A-414C-9827-515AD7E30CCD}"/>
               </a:ext>
             </a:extLst>
           </p:cNvPr>
@@ -13330,7 +13330,7 @@
           <p:cNvPr id="10" name="line-76">
             <a:extLst xmlns:a="http://schemas.openxmlformats.org/drawingml/2006/main">
               <a:ext uri="{FF2B5EF4-FFF2-40B4-BE49-F238E27FC236}">
-                <a16:creationId xmlns:a16="http://schemas.microsoft.com/office/drawing/2014/main" id="{2BA2D2BF-CD39-4BFA-B42D-6FDF3A0811F2}"/>
+                <a16:creationId xmlns:a16="http://schemas.microsoft.com/office/drawing/2014/main" id="{4F9C0F97-192A-4BA3-A03D-9202D0BBA021}"/>
               </a:ext>
             </a:extLst>
           </p:cNvPr>
@@ -13370,7 +13370,7 @@
           <p:cNvPr id="11" name="line-77">
             <a:extLst xmlns:a="http://schemas.openxmlformats.org/drawingml/2006/main">
               <a:ext uri="{FF2B5EF4-FFF2-40B4-BE49-F238E27FC236}">
-                <a16:creationId xmlns:a16="http://schemas.microsoft.com/office/drawing/2014/main" id="{10A41477-79E5-454D-A667-D94AA3ACE829}"/>
+                <a16:creationId xmlns:a16="http://schemas.microsoft.com/office/drawing/2014/main" id="{77BD97E8-2638-4BD3-A665-FB3AB397D53A}"/>
               </a:ext>
             </a:extLst>
           </p:cNvPr>
@@ -13410,7 +13410,7 @@
           <p:cNvPr id="12" name="line-78">
             <a:extLst xmlns:a="http://schemas.openxmlformats.org/drawingml/2006/main">
               <a:ext uri="{FF2B5EF4-FFF2-40B4-BE49-F238E27FC236}">
-                <a16:creationId xmlns:a16="http://schemas.microsoft.com/office/drawing/2014/main" id="{F646B7EC-C018-4ADE-A2CD-D5A71B56364D}"/>
+                <a16:creationId xmlns:a16="http://schemas.microsoft.com/office/drawing/2014/main" id="{11DF2210-530C-40D4-A25E-AD55955E9976}"/>
               </a:ext>
             </a:extLst>
           </p:cNvPr>
@@ -13450,7 +13450,7 @@
           <p:cNvPr id="13" name="line-79">
             <a:extLst xmlns:a="http://schemas.openxmlformats.org/drawingml/2006/main">
               <a:ext uri="{FF2B5EF4-FFF2-40B4-BE49-F238E27FC236}">
-                <a16:creationId xmlns:a16="http://schemas.microsoft.com/office/drawing/2014/main" id="{07CDAFF6-34F1-4105-B16A-894B64A6E023}"/>
+                <a16:creationId xmlns:a16="http://schemas.microsoft.com/office/drawing/2014/main" id="{79ECFC7B-400D-449D-BDB7-F5E5BD8181D9}"/>
               </a:ext>
             </a:extLst>
           </p:cNvPr>
@@ -13490,7 +13490,7 @@
           <p:cNvPr id="14" name="line-80">
             <a:extLst xmlns:a="http://schemas.openxmlformats.org/drawingml/2006/main">
               <a:ext uri="{FF2B5EF4-FFF2-40B4-BE49-F238E27FC236}">
-                <a16:creationId xmlns:a16="http://schemas.microsoft.com/office/drawing/2014/main" id="{C651E46A-3CCF-4940-B6B0-71F5D66601F1}"/>
+                <a16:creationId xmlns:a16="http://schemas.microsoft.com/office/drawing/2014/main" id="{8DFA2D6E-208B-44D7-A672-F131B5BA145C}"/>
               </a:ext>
             </a:extLst>
           </p:cNvPr>
@@ -13530,7 +13530,7 @@
           <p:cNvPr id="15" name="line-81">
             <a:extLst xmlns:a="http://schemas.openxmlformats.org/drawingml/2006/main">
               <a:ext uri="{FF2B5EF4-FFF2-40B4-BE49-F238E27FC236}">
-                <a16:creationId xmlns:a16="http://schemas.microsoft.com/office/drawing/2014/main" id="{A14DD5A9-D694-40C9-AA06-99EE894E5524}"/>
+                <a16:creationId xmlns:a16="http://schemas.microsoft.com/office/drawing/2014/main" id="{CD775E92-23F4-4361-A31E-BB814589DDCF}"/>
               </a:ext>
             </a:extLst>
           </p:cNvPr>
@@ -13570,7 +13570,7 @@
           <p:cNvPr id="16" name="line-82">
             <a:extLst xmlns:a="http://schemas.openxmlformats.org/drawingml/2006/main">
               <a:ext uri="{FF2B5EF4-FFF2-40B4-BE49-F238E27FC236}">
-                <a16:creationId xmlns:a16="http://schemas.microsoft.com/office/drawing/2014/main" id="{07FA9BF0-3EE6-4102-A925-C500F1F653A2}"/>
+                <a16:creationId xmlns:a16="http://schemas.microsoft.com/office/drawing/2014/main" id="{0C0C6760-6D93-41CF-8436-B11F0E24273B}"/>
               </a:ext>
             </a:extLst>
           </p:cNvPr>
@@ -13610,7 +13610,7 @@
           <p:cNvPr id="17" name="line-83">
             <a:extLst xmlns:a="http://schemas.openxmlformats.org/drawingml/2006/main">
               <a:ext uri="{FF2B5EF4-FFF2-40B4-BE49-F238E27FC236}">
-                <a16:creationId xmlns:a16="http://schemas.microsoft.com/office/drawing/2014/main" id="{889FDF70-48D8-4A28-80CC-1B282956B259}"/>
+                <a16:creationId xmlns:a16="http://schemas.microsoft.com/office/drawing/2014/main" id="{BDB41895-F2F9-43B7-A2EB-7FC4D2B25CA5}"/>
               </a:ext>
             </a:extLst>
           </p:cNvPr>
@@ -13650,7 +13650,7 @@
           <p:cNvPr id="18" name="line-84">
             <a:extLst xmlns:a="http://schemas.openxmlformats.org/drawingml/2006/main">
               <a:ext uri="{FF2B5EF4-FFF2-40B4-BE49-F238E27FC236}">
-                <a16:creationId xmlns:a16="http://schemas.microsoft.com/office/drawing/2014/main" id="{8FF5D492-633A-4F79-8FEC-E432700DE6A2}"/>
+                <a16:creationId xmlns:a16="http://schemas.microsoft.com/office/drawing/2014/main" id="{CE103BDA-AC8F-4D15-A46F-93EECAE17200}"/>
               </a:ext>
             </a:extLst>
           </p:cNvPr>
@@ -13690,7 +13690,7 @@
           <p:cNvPr id="19" name="line-85">
             <a:extLst xmlns:a="http://schemas.openxmlformats.org/drawingml/2006/main">
               <a:ext uri="{FF2B5EF4-FFF2-40B4-BE49-F238E27FC236}">
-                <a16:creationId xmlns:a16="http://schemas.microsoft.com/office/drawing/2014/main" id="{93DCDB17-07F1-47A1-A26E-CF52671EE5E9}"/>
+                <a16:creationId xmlns:a16="http://schemas.microsoft.com/office/drawing/2014/main" id="{05BCB344-8064-4F62-BA69-D1EE51DBA77B}"/>
               </a:ext>
             </a:extLst>
           </p:cNvPr>
@@ -13730,7 +13730,7 @@
           <p:cNvPr id="20" name="line-86">
             <a:extLst xmlns:a="http://schemas.openxmlformats.org/drawingml/2006/main">
               <a:ext uri="{FF2B5EF4-FFF2-40B4-BE49-F238E27FC236}">
-                <a16:creationId xmlns:a16="http://schemas.microsoft.com/office/drawing/2014/main" id="{B026F0A5-CA9E-4394-A669-1696D662878D}"/>
+                <a16:creationId xmlns:a16="http://schemas.microsoft.com/office/drawing/2014/main" id="{21BE6B4B-BBA5-4413-A24D-436FF2453388}"/>
               </a:ext>
             </a:extLst>
           </p:cNvPr>
@@ -13770,7 +13770,7 @@
           <p:cNvPr id="21" name="line-87">
             <a:extLst xmlns:a="http://schemas.openxmlformats.org/drawingml/2006/main">
               <a:ext uri="{FF2B5EF4-FFF2-40B4-BE49-F238E27FC236}">
-                <a16:creationId xmlns:a16="http://schemas.microsoft.com/office/drawing/2014/main" id="{02FB044D-B252-404F-8934-25F62B213AE8}"/>
+                <a16:creationId xmlns:a16="http://schemas.microsoft.com/office/drawing/2014/main" id="{77BB877D-DCB6-4335-A7EA-4B977E87F545}"/>
               </a:ext>
             </a:extLst>
           </p:cNvPr>
@@ -13810,7 +13810,7 @@
           <p:cNvPr id="22" name="line-88">
             <a:extLst xmlns:a="http://schemas.openxmlformats.org/drawingml/2006/main">
               <a:ext uri="{FF2B5EF4-FFF2-40B4-BE49-F238E27FC236}">
-                <a16:creationId xmlns:a16="http://schemas.microsoft.com/office/drawing/2014/main" id="{090BDDDF-63ED-4799-925B-75D0E1D3D823}"/>
+                <a16:creationId xmlns:a16="http://schemas.microsoft.com/office/drawing/2014/main" id="{B0330C21-F3B8-4EA5-AA4F-27F4437B15E9}"/>
               </a:ext>
             </a:extLst>
           </p:cNvPr>
@@ -13850,7 +13850,7 @@
           <p:cNvPr id="23" name="line-89">
             <a:extLst xmlns:a="http://schemas.openxmlformats.org/drawingml/2006/main">
               <a:ext uri="{FF2B5EF4-FFF2-40B4-BE49-F238E27FC236}">
-                <a16:creationId xmlns:a16="http://schemas.microsoft.com/office/drawing/2014/main" id="{DB922415-4CA0-4AED-8956-68E7D83D1BC5}"/>
+                <a16:creationId xmlns:a16="http://schemas.microsoft.com/office/drawing/2014/main" id="{59C8C7EC-8BF6-4352-B59B-0E3F88047E7E}"/>
               </a:ext>
             </a:extLst>
           </p:cNvPr>
@@ -13890,7 +13890,7 @@
           <p:cNvPr id="24" name="line-90">
             <a:extLst xmlns:a="http://schemas.openxmlformats.org/drawingml/2006/main">
               <a:ext uri="{FF2B5EF4-FFF2-40B4-BE49-F238E27FC236}">
-                <a16:creationId xmlns:a16="http://schemas.microsoft.com/office/drawing/2014/main" id="{D9954CA9-EA98-4A2D-B6EE-A175B8414066}"/>
+                <a16:creationId xmlns:a16="http://schemas.microsoft.com/office/drawing/2014/main" id="{38C9AC57-2050-48D2-85E8-C81C4B8E5B9E}"/>
               </a:ext>
             </a:extLst>
           </p:cNvPr>
@@ -13930,7 +13930,7 @@
           <p:cNvPr id="25" name="line-91">
             <a:extLst xmlns:a="http://schemas.openxmlformats.org/drawingml/2006/main">
               <a:ext uri="{FF2B5EF4-FFF2-40B4-BE49-F238E27FC236}">
-                <a16:creationId xmlns:a16="http://schemas.microsoft.com/office/drawing/2014/main" id="{27407D8F-09C6-4178-B244-98E4BF696CC9}"/>
+                <a16:creationId xmlns:a16="http://schemas.microsoft.com/office/drawing/2014/main" id="{DAD1D3AE-8E82-424F-B56F-F76365F1DB28}"/>
               </a:ext>
             </a:extLst>
           </p:cNvPr>
@@ -13970,7 +13970,7 @@
           <p:cNvPr id="26" name="line-92">
             <a:extLst xmlns:a="http://schemas.openxmlformats.org/drawingml/2006/main">
               <a:ext uri="{FF2B5EF4-FFF2-40B4-BE49-F238E27FC236}">
-                <a16:creationId xmlns:a16="http://schemas.microsoft.com/office/drawing/2014/main" id="{9FA11058-8AA0-4589-AEC8-84B6D0C6E51D}"/>
+                <a16:creationId xmlns:a16="http://schemas.microsoft.com/office/drawing/2014/main" id="{3BD6D484-2611-4C5E-B249-EBC4C01A1566}"/>
               </a:ext>
             </a:extLst>
           </p:cNvPr>
@@ -14010,7 +14010,7 @@
           <p:cNvPr id="27" name="line-93">
             <a:extLst xmlns:a="http://schemas.openxmlformats.org/drawingml/2006/main">
               <a:ext uri="{FF2B5EF4-FFF2-40B4-BE49-F238E27FC236}">
-                <a16:creationId xmlns:a16="http://schemas.microsoft.com/office/drawing/2014/main" id="{BA31412F-3978-4596-870A-52C8013E95D7}"/>
+                <a16:creationId xmlns:a16="http://schemas.microsoft.com/office/drawing/2014/main" id="{A1A06567-93F8-428B-AC16-58C7B4A4B3CD}"/>
               </a:ext>
             </a:extLst>
           </p:cNvPr>
@@ -14050,7 +14050,7 @@
           <p:cNvPr id="28" name="line-94">
             <a:extLst xmlns:a="http://schemas.openxmlformats.org/drawingml/2006/main">
               <a:ext uri="{FF2B5EF4-FFF2-40B4-BE49-F238E27FC236}">
-                <a16:creationId xmlns:a16="http://schemas.microsoft.com/office/drawing/2014/main" id="{9FA50D12-D9C1-4BF5-8C39-9BC6137F2CC7}"/>
+                <a16:creationId xmlns:a16="http://schemas.microsoft.com/office/drawing/2014/main" id="{6C5AA236-4C84-4169-8495-7DA0EBAC3848}"/>
               </a:ext>
             </a:extLst>
           </p:cNvPr>
@@ -14090,7 +14090,7 @@
           <p:cNvPr id="29" name="line-95">
             <a:extLst xmlns:a="http://schemas.openxmlformats.org/drawingml/2006/main">
               <a:ext uri="{FF2B5EF4-FFF2-40B4-BE49-F238E27FC236}">
-                <a16:creationId xmlns:a16="http://schemas.microsoft.com/office/drawing/2014/main" id="{AA6CE51F-FD98-4658-818F-0675C1994A29}"/>
+                <a16:creationId xmlns:a16="http://schemas.microsoft.com/office/drawing/2014/main" id="{0041E683-6684-4CD8-B36D-B53A41D79642}"/>
               </a:ext>
             </a:extLst>
           </p:cNvPr>
@@ -14130,7 +14130,7 @@
           <p:cNvPr id="30" name="line-96">
             <a:extLst xmlns:a="http://schemas.openxmlformats.org/drawingml/2006/main">
               <a:ext uri="{FF2B5EF4-FFF2-40B4-BE49-F238E27FC236}">
-                <a16:creationId xmlns:a16="http://schemas.microsoft.com/office/drawing/2014/main" id="{183D9BDC-552B-42C5-BD87-7385D861972F}"/>
+                <a16:creationId xmlns:a16="http://schemas.microsoft.com/office/drawing/2014/main" id="{C8251FE0-3502-4F97-B926-FF5BF0CE34F1}"/>
               </a:ext>
             </a:extLst>
           </p:cNvPr>
@@ -14170,7 +14170,7 @@
           <p:cNvPr id="31" name="line-97">
             <a:extLst xmlns:a="http://schemas.openxmlformats.org/drawingml/2006/main">
               <a:ext uri="{FF2B5EF4-FFF2-40B4-BE49-F238E27FC236}">
-                <a16:creationId xmlns:a16="http://schemas.microsoft.com/office/drawing/2014/main" id="{8AEAA9D2-720D-40E9-A69D-E5BD1789F636}"/>
+                <a16:creationId xmlns:a16="http://schemas.microsoft.com/office/drawing/2014/main" id="{AF22FDF7-31A5-47EF-B1E2-B5A83CA2BDDC}"/>
               </a:ext>
             </a:extLst>
           </p:cNvPr>
@@ -14210,7 +14210,7 @@
           <p:cNvPr id="32" name="line-98">
             <a:extLst xmlns:a="http://schemas.openxmlformats.org/drawingml/2006/main">
               <a:ext uri="{FF2B5EF4-FFF2-40B4-BE49-F238E27FC236}">
-                <a16:creationId xmlns:a16="http://schemas.microsoft.com/office/drawing/2014/main" id="{804ABD66-464B-48BD-86DF-CBA858B13931}"/>
+                <a16:creationId xmlns:a16="http://schemas.microsoft.com/office/drawing/2014/main" id="{972E0983-FBA5-4377-9A1C-A3B2BBF2D29E}"/>
               </a:ext>
             </a:extLst>
           </p:cNvPr>
@@ -14250,7 +14250,7 @@
           <p:cNvPr id="33" name="line-99">
             <a:extLst xmlns:a="http://schemas.openxmlformats.org/drawingml/2006/main">
               <a:ext uri="{FF2B5EF4-FFF2-40B4-BE49-F238E27FC236}">
-                <a16:creationId xmlns:a16="http://schemas.microsoft.com/office/drawing/2014/main" id="{06B796C6-B1DE-4AAB-A1C1-EA8A081C6170}"/>
+                <a16:creationId xmlns:a16="http://schemas.microsoft.com/office/drawing/2014/main" id="{63817AF0-9870-44AB-9600-0215AA067D5B}"/>
               </a:ext>
             </a:extLst>
           </p:cNvPr>
@@ -14290,7 +14290,7 @@
           <p:cNvPr id="34" name="line-100">
             <a:extLst xmlns:a="http://schemas.openxmlformats.org/drawingml/2006/main">
               <a:ext uri="{FF2B5EF4-FFF2-40B4-BE49-F238E27FC236}">
-                <a16:creationId xmlns:a16="http://schemas.microsoft.com/office/drawing/2014/main" id="{C5E54048-AAB6-471C-A6CA-E2B90428C525}"/>
+                <a16:creationId xmlns:a16="http://schemas.microsoft.com/office/drawing/2014/main" id="{1CAAD828-2F26-4753-A2C9-122691D6A56C}"/>
               </a:ext>
             </a:extLst>
           </p:cNvPr>
@@ -14330,7 +14330,7 @@
           <p:cNvPr id="35" name="line-101">
             <a:extLst xmlns:a="http://schemas.openxmlformats.org/drawingml/2006/main">
               <a:ext uri="{FF2B5EF4-FFF2-40B4-BE49-F238E27FC236}">
-                <a16:creationId xmlns:a16="http://schemas.microsoft.com/office/drawing/2014/main" id="{F240F23C-BF52-4E47-9549-DA038010A640}"/>
+                <a16:creationId xmlns:a16="http://schemas.microsoft.com/office/drawing/2014/main" id="{E6FDF1A3-1284-46C7-9B9A-C22D88E3C9F9}"/>
               </a:ext>
             </a:extLst>
           </p:cNvPr>
@@ -14370,7 +14370,7 @@
           <p:cNvPr id="36" name="line-102">
             <a:extLst xmlns:a="http://schemas.openxmlformats.org/drawingml/2006/main">
               <a:ext uri="{FF2B5EF4-FFF2-40B4-BE49-F238E27FC236}">
-                <a16:creationId xmlns:a16="http://schemas.microsoft.com/office/drawing/2014/main" id="{BA4064BC-7878-4ABE-8085-416860B787F6}"/>
+                <a16:creationId xmlns:a16="http://schemas.microsoft.com/office/drawing/2014/main" id="{641738E8-D6B5-4B62-8CB5-EE8B20E1C283}"/>
               </a:ext>
             </a:extLst>
           </p:cNvPr>
@@ -14410,7 +14410,7 @@
           <p:cNvPr id="37" name="line-103">
             <a:extLst xmlns:a="http://schemas.openxmlformats.org/drawingml/2006/main">
               <a:ext uri="{FF2B5EF4-FFF2-40B4-BE49-F238E27FC236}">
-                <a16:creationId xmlns:a16="http://schemas.microsoft.com/office/drawing/2014/main" id="{7F1A02CC-4739-4E4D-9241-D1B1161E5A2C}"/>
+                <a16:creationId xmlns:a16="http://schemas.microsoft.com/office/drawing/2014/main" id="{E529B99F-9568-4D71-85FD-B85C5BAADAD4}"/>
               </a:ext>
             </a:extLst>
           </p:cNvPr>
@@ -14450,7 +14450,7 @@
           <p:cNvPr id="38" name="line-104">
             <a:extLst xmlns:a="http://schemas.openxmlformats.org/drawingml/2006/main">
               <a:ext uri="{FF2B5EF4-FFF2-40B4-BE49-F238E27FC236}">
-                <a16:creationId xmlns:a16="http://schemas.microsoft.com/office/drawing/2014/main" id="{6E80AFE3-93CB-45CB-A9F3-6A166529DAE7}"/>
+                <a16:creationId xmlns:a16="http://schemas.microsoft.com/office/drawing/2014/main" id="{05E197C4-C3F3-4380-ACE3-27EEBF697668}"/>
               </a:ext>
             </a:extLst>
           </p:cNvPr>
@@ -14490,7 +14490,7 @@
           <p:cNvPr id="39" name="line-105">
             <a:extLst xmlns:a="http://schemas.openxmlformats.org/drawingml/2006/main">
               <a:ext uri="{FF2B5EF4-FFF2-40B4-BE49-F238E27FC236}">
-                <a16:creationId xmlns:a16="http://schemas.microsoft.com/office/drawing/2014/main" id="{905FF4EE-C948-477A-A39E-74EE25200DE0}"/>
+                <a16:creationId xmlns:a16="http://schemas.microsoft.com/office/drawing/2014/main" id="{AEFC76B8-1F9F-4803-A616-7E6E4FF9278D}"/>
               </a:ext>
             </a:extLst>
           </p:cNvPr>
@@ -14530,7 +14530,7 @@
           <p:cNvPr id="40" name="line-106">
             <a:extLst xmlns:a="http://schemas.openxmlformats.org/drawingml/2006/main">
               <a:ext uri="{FF2B5EF4-FFF2-40B4-BE49-F238E27FC236}">
-                <a16:creationId xmlns:a16="http://schemas.microsoft.com/office/drawing/2014/main" id="{505F30EF-DCE1-4EB5-B6F8-EF8B46D74567}"/>
+                <a16:creationId xmlns:a16="http://schemas.microsoft.com/office/drawing/2014/main" id="{E60CB215-2277-4838-8680-E84605981FF5}"/>
               </a:ext>
             </a:extLst>
           </p:cNvPr>
@@ -14570,7 +14570,7 @@
           <p:cNvPr id="41" name="line-107">
             <a:extLst xmlns:a="http://schemas.openxmlformats.org/drawingml/2006/main">
               <a:ext uri="{FF2B5EF4-FFF2-40B4-BE49-F238E27FC236}">
-                <a16:creationId xmlns:a16="http://schemas.microsoft.com/office/drawing/2014/main" id="{302895AB-F3B3-4619-B7F6-A9D9A842EE45}"/>
+                <a16:creationId xmlns:a16="http://schemas.microsoft.com/office/drawing/2014/main" id="{6E1B38FF-F785-4761-A9FB-22C91647AE6E}"/>
               </a:ext>
             </a:extLst>
           </p:cNvPr>
@@ -14610,7 +14610,7 @@
           <p:cNvPr id="42" name="line-108">
             <a:extLst xmlns:a="http://schemas.openxmlformats.org/drawingml/2006/main">
               <a:ext uri="{FF2B5EF4-FFF2-40B4-BE49-F238E27FC236}">
-                <a16:creationId xmlns:a16="http://schemas.microsoft.com/office/drawing/2014/main" id="{F2D011AC-5CE9-420C-8403-2220E544C0E0}"/>
+                <a16:creationId xmlns:a16="http://schemas.microsoft.com/office/drawing/2014/main" id="{28441230-7CA1-4E6C-90CA-9F1C716A2CA2}"/>
               </a:ext>
             </a:extLst>
           </p:cNvPr>
@@ -14650,7 +14650,7 @@
           <p:cNvPr id="43" name="line-109">
             <a:extLst xmlns:a="http://schemas.openxmlformats.org/drawingml/2006/main">
               <a:ext uri="{FF2B5EF4-FFF2-40B4-BE49-F238E27FC236}">
-                <a16:creationId xmlns:a16="http://schemas.microsoft.com/office/drawing/2014/main" id="{803DDCB1-9853-4FD2-8866-390564AF3385}"/>
+                <a16:creationId xmlns:a16="http://schemas.microsoft.com/office/drawing/2014/main" id="{901DD2A4-F428-4758-AF1C-07BE1E67F3FF}"/>
               </a:ext>
             </a:extLst>
           </p:cNvPr>
@@ -14690,7 +14690,7 @@
           <p:cNvPr id="44" name="line-110">
             <a:extLst xmlns:a="http://schemas.openxmlformats.org/drawingml/2006/main">
               <a:ext uri="{FF2B5EF4-FFF2-40B4-BE49-F238E27FC236}">
-                <a16:creationId xmlns:a16="http://schemas.microsoft.com/office/drawing/2014/main" id="{C958C052-0B02-4932-991C-5C56B5611D19}"/>
+                <a16:creationId xmlns:a16="http://schemas.microsoft.com/office/drawing/2014/main" id="{8150D52E-4FF8-4C8A-B44D-C0F7028831FC}"/>
               </a:ext>
             </a:extLst>
           </p:cNvPr>
@@ -14730,7 +14730,7 @@
           <p:cNvPr id="45" name="line-111">
             <a:extLst xmlns:a="http://schemas.openxmlformats.org/drawingml/2006/main">
               <a:ext uri="{FF2B5EF4-FFF2-40B4-BE49-F238E27FC236}">
-                <a16:creationId xmlns:a16="http://schemas.microsoft.com/office/drawing/2014/main" id="{975C7CBF-BEBD-4CD9-92BD-5B489EEA53E4}"/>
+                <a16:creationId xmlns:a16="http://schemas.microsoft.com/office/drawing/2014/main" id="{4A7854AC-8367-4C49-9285-E5F10EA36AF4}"/>
               </a:ext>
             </a:extLst>
           </p:cNvPr>
@@ -14770,7 +14770,7 @@
           <p:cNvPr id="46" name="line-112">
             <a:extLst xmlns:a="http://schemas.openxmlformats.org/drawingml/2006/main">
               <a:ext uri="{FF2B5EF4-FFF2-40B4-BE49-F238E27FC236}">
-                <a16:creationId xmlns:a16="http://schemas.microsoft.com/office/drawing/2014/main" id="{BE74524A-6DDD-4516-892D-36C9287197B4}"/>
+                <a16:creationId xmlns:a16="http://schemas.microsoft.com/office/drawing/2014/main" id="{28712B46-82BF-4708-84A4-1B2458118EF4}"/>
               </a:ext>
             </a:extLst>
           </p:cNvPr>
@@ -14810,7 +14810,7 @@
           <p:cNvPr id="47" name="line-113">
             <a:extLst xmlns:a="http://schemas.openxmlformats.org/drawingml/2006/main">
               <a:ext uri="{FF2B5EF4-FFF2-40B4-BE49-F238E27FC236}">
-                <a16:creationId xmlns:a16="http://schemas.microsoft.com/office/drawing/2014/main" id="{31A4FA7B-A5C3-444B-8D56-EACEE4244818}"/>
+                <a16:creationId xmlns:a16="http://schemas.microsoft.com/office/drawing/2014/main" id="{B9C2C369-3192-49E9-953E-3FF82D3B57A0}"/>
               </a:ext>
             </a:extLst>
           </p:cNvPr>
@@ -14850,7 +14850,7 @@
           <p:cNvPr id="48" name="line-114">
             <a:extLst xmlns:a="http://schemas.openxmlformats.org/drawingml/2006/main">
               <a:ext uri="{FF2B5EF4-FFF2-40B4-BE49-F238E27FC236}">
-                <a16:creationId xmlns:a16="http://schemas.microsoft.com/office/drawing/2014/main" id="{2E2C4370-0F8B-4BD4-97F3-3735691BA5AE}"/>
+                <a16:creationId xmlns:a16="http://schemas.microsoft.com/office/drawing/2014/main" id="{37BCE117-214C-40B3-BB56-28ED57E0D5B6}"/>
               </a:ext>
             </a:extLst>
           </p:cNvPr>
@@ -14890,7 +14890,7 @@
           <p:cNvPr id="49" name="line-115">
             <a:extLst xmlns:a="http://schemas.openxmlformats.org/drawingml/2006/main">
               <a:ext uri="{FF2B5EF4-FFF2-40B4-BE49-F238E27FC236}">
-                <a16:creationId xmlns:a16="http://schemas.microsoft.com/office/drawing/2014/main" id="{EBE5A93C-9D0C-4D3E-B8E3-784B947F174E}"/>
+                <a16:creationId xmlns:a16="http://schemas.microsoft.com/office/drawing/2014/main" id="{8078ABC0-EEAC-4957-8AFB-6F4C7EA23F00}"/>
               </a:ext>
             </a:extLst>
           </p:cNvPr>
@@ -14930,7 +14930,7 @@
           <p:cNvPr id="50" name="line-116">
             <a:extLst xmlns:a="http://schemas.openxmlformats.org/drawingml/2006/main">
               <a:ext uri="{FF2B5EF4-FFF2-40B4-BE49-F238E27FC236}">
-                <a16:creationId xmlns:a16="http://schemas.microsoft.com/office/drawing/2014/main" id="{66977A43-C255-472F-8BA6-32CBFD12FA5A}"/>
+                <a16:creationId xmlns:a16="http://schemas.microsoft.com/office/drawing/2014/main" id="{3E32B1A9-C09D-47DB-8A4F-DA75E384469A}"/>
               </a:ext>
             </a:extLst>
           </p:cNvPr>
@@ -14970,7 +14970,7 @@
           <p:cNvPr id="51" name="line-117">
             <a:extLst xmlns:a="http://schemas.openxmlformats.org/drawingml/2006/main">
               <a:ext uri="{FF2B5EF4-FFF2-40B4-BE49-F238E27FC236}">
-                <a16:creationId xmlns:a16="http://schemas.microsoft.com/office/drawing/2014/main" id="{F9776E95-9888-452C-9D16-BED77097164F}"/>
+                <a16:creationId xmlns:a16="http://schemas.microsoft.com/office/drawing/2014/main" id="{27D5A39D-A0BE-470E-A63F-AAF371636051}"/>
               </a:ext>
             </a:extLst>
           </p:cNvPr>
@@ -15010,7 +15010,7 @@
           <p:cNvPr id="52" name="line-118">
             <a:extLst xmlns:a="http://schemas.openxmlformats.org/drawingml/2006/main">
               <a:ext uri="{FF2B5EF4-FFF2-40B4-BE49-F238E27FC236}">
-                <a16:creationId xmlns:a16="http://schemas.microsoft.com/office/drawing/2014/main" id="{D803082D-0268-47A3-9467-FE5DF70AD212}"/>
+                <a16:creationId xmlns:a16="http://schemas.microsoft.com/office/drawing/2014/main" id="{E7C27642-5E47-45F7-B723-FEBC65D1DD7D}"/>
               </a:ext>
             </a:extLst>
           </p:cNvPr>
@@ -15050,7 +15050,7 @@
           <p:cNvPr id="53" name="line-119">
             <a:extLst xmlns:a="http://schemas.openxmlformats.org/drawingml/2006/main">
               <a:ext uri="{FF2B5EF4-FFF2-40B4-BE49-F238E27FC236}">
-                <a16:creationId xmlns:a16="http://schemas.microsoft.com/office/drawing/2014/main" id="{1DD8EB2F-2DBD-42BF-98DF-0AFF38A064CC}"/>
+                <a16:creationId xmlns:a16="http://schemas.microsoft.com/office/drawing/2014/main" id="{BBA6F798-0819-4192-A4B6-B0B0A62CE9F6}"/>
               </a:ext>
             </a:extLst>
           </p:cNvPr>
@@ -15090,7 +15090,7 @@
           <p:cNvPr id="54" name="line-120">
             <a:extLst xmlns:a="http://schemas.openxmlformats.org/drawingml/2006/main">
               <a:ext uri="{FF2B5EF4-FFF2-40B4-BE49-F238E27FC236}">
-                <a16:creationId xmlns:a16="http://schemas.microsoft.com/office/drawing/2014/main" id="{45E477E9-D26B-48C3-92B8-E09CBA28C004}"/>
+                <a16:creationId xmlns:a16="http://schemas.microsoft.com/office/drawing/2014/main" id="{573048F1-40FF-4B1F-994C-E4BD6D63BB2C}"/>
               </a:ext>
             </a:extLst>
           </p:cNvPr>
@@ -15130,7 +15130,7 @@
           <p:cNvPr id="55" name="line-121">
             <a:extLst xmlns:a="http://schemas.openxmlformats.org/drawingml/2006/main">
               <a:ext uri="{FF2B5EF4-FFF2-40B4-BE49-F238E27FC236}">
-                <a16:creationId xmlns:a16="http://schemas.microsoft.com/office/drawing/2014/main" id="{4AE971D6-2A9E-4873-B74F-5B87F79D2F48}"/>
+                <a16:creationId xmlns:a16="http://schemas.microsoft.com/office/drawing/2014/main" id="{0A1ED479-0405-4F49-9A1D-CBD9BFBB1B02}"/>
               </a:ext>
             </a:extLst>
           </p:cNvPr>
@@ -15170,7 +15170,7 @@
           <p:cNvPr id="56" name="line-122">
             <a:extLst xmlns:a="http://schemas.openxmlformats.org/drawingml/2006/main">
               <a:ext uri="{FF2B5EF4-FFF2-40B4-BE49-F238E27FC236}">
-                <a16:creationId xmlns:a16="http://schemas.microsoft.com/office/drawing/2014/main" id="{E6AB8012-E7EB-4E15-AC78-2D3050181786}"/>
+                <a16:creationId xmlns:a16="http://schemas.microsoft.com/office/drawing/2014/main" id="{8E2A37EA-66D3-4516-8779-73C4A5B0E109}"/>
               </a:ext>
             </a:extLst>
           </p:cNvPr>
@@ -15210,7 +15210,7 @@
           <p:cNvPr id="57" name="line-123">
             <a:extLst xmlns:a="http://schemas.openxmlformats.org/drawingml/2006/main">
               <a:ext uri="{FF2B5EF4-FFF2-40B4-BE49-F238E27FC236}">
-                <a16:creationId xmlns:a16="http://schemas.microsoft.com/office/drawing/2014/main" id="{9BD4BD32-4675-4D2B-BD8F-6BB69390CD91}"/>
+                <a16:creationId xmlns:a16="http://schemas.microsoft.com/office/drawing/2014/main" id="{CAE58D11-0C23-4BA6-9836-6A168DFB0E7B}"/>
               </a:ext>
             </a:extLst>
           </p:cNvPr>
@@ -15250,7 +15250,7 @@
           <p:cNvPr id="58" name="line-124">
             <a:extLst xmlns:a="http://schemas.openxmlformats.org/drawingml/2006/main">
               <a:ext uri="{FF2B5EF4-FFF2-40B4-BE49-F238E27FC236}">
-                <a16:creationId xmlns:a16="http://schemas.microsoft.com/office/drawing/2014/main" id="{0AE6FD52-A5D9-4EF0-9E1C-689B0013CE47}"/>
+                <a16:creationId xmlns:a16="http://schemas.microsoft.com/office/drawing/2014/main" id="{68AF2C3A-69B4-419E-B488-6B770365394D}"/>
               </a:ext>
             </a:extLst>
           </p:cNvPr>
@@ -15290,7 +15290,7 @@
           <p:cNvPr id="59" name="line-125">
             <a:extLst xmlns:a="http://schemas.openxmlformats.org/drawingml/2006/main">
               <a:ext uri="{FF2B5EF4-FFF2-40B4-BE49-F238E27FC236}">
-                <a16:creationId xmlns:a16="http://schemas.microsoft.com/office/drawing/2014/main" id="{9B6112DD-2CB9-4ACB-87DA-3B3E32F09446}"/>
+                <a16:creationId xmlns:a16="http://schemas.microsoft.com/office/drawing/2014/main" id="{E04A937D-4E0A-4B4F-B92C-41E0B52C6898}"/>
               </a:ext>
             </a:extLst>
           </p:cNvPr>
@@ -15330,7 +15330,7 @@
           <p:cNvPr id="60" name="line-126">
             <a:extLst xmlns:a="http://schemas.openxmlformats.org/drawingml/2006/main">
               <a:ext uri="{FF2B5EF4-FFF2-40B4-BE49-F238E27FC236}">
-                <a16:creationId xmlns:a16="http://schemas.microsoft.com/office/drawing/2014/main" id="{BAC262B3-E55E-4B8C-B294-CC432E5C28F6}"/>
+                <a16:creationId xmlns:a16="http://schemas.microsoft.com/office/drawing/2014/main" id="{B30ABE5C-3C5E-4D3D-A5C8-E61E4ECA9EC6}"/>
               </a:ext>
             </a:extLst>
           </p:cNvPr>
@@ -15370,7 +15370,7 @@
           <p:cNvPr id="61" name="line-127">
             <a:extLst xmlns:a="http://schemas.openxmlformats.org/drawingml/2006/main">
               <a:ext uri="{FF2B5EF4-FFF2-40B4-BE49-F238E27FC236}">
-                <a16:creationId xmlns:a16="http://schemas.microsoft.com/office/drawing/2014/main" id="{BFA8DC48-2B8F-474F-9BD5-60F46F8B093D}"/>
+                <a16:creationId xmlns:a16="http://schemas.microsoft.com/office/drawing/2014/main" id="{92373056-2866-4589-B688-DA2E56091424}"/>
               </a:ext>
             </a:extLst>
           </p:cNvPr>
@@ -15410,7 +15410,7 @@
           <p:cNvPr id="62" name="line-128">
             <a:extLst xmlns:a="http://schemas.openxmlformats.org/drawingml/2006/main">
               <a:ext uri="{FF2B5EF4-FFF2-40B4-BE49-F238E27FC236}">
-                <a16:creationId xmlns:a16="http://schemas.microsoft.com/office/drawing/2014/main" id="{0E3B1694-B702-4175-A7A8-563C21A37F5F}"/>
+                <a16:creationId xmlns:a16="http://schemas.microsoft.com/office/drawing/2014/main" id="{FBE24391-91B6-4C2A-8650-380278584162}"/>
               </a:ext>
             </a:extLst>
           </p:cNvPr>
@@ -15450,7 +15450,7 @@
           <p:cNvPr id="63" name="line-129">
             <a:extLst xmlns:a="http://schemas.openxmlformats.org/drawingml/2006/main">
               <a:ext uri="{FF2B5EF4-FFF2-40B4-BE49-F238E27FC236}">
-                <a16:creationId xmlns:a16="http://schemas.microsoft.com/office/drawing/2014/main" id="{83BBE8DE-BFC9-450F-96AD-C73F7D9671F1}"/>
+                <a16:creationId xmlns:a16="http://schemas.microsoft.com/office/drawing/2014/main" id="{E4ED0654-19EC-43C1-9AD7-91178B0D9EB9}"/>
               </a:ext>
             </a:extLst>
           </p:cNvPr>
@@ -15490,7 +15490,7 @@
           <p:cNvPr id="64" name="line-130">
             <a:extLst xmlns:a="http://schemas.openxmlformats.org/drawingml/2006/main">
               <a:ext uri="{FF2B5EF4-FFF2-40B4-BE49-F238E27FC236}">
-                <a16:creationId xmlns:a16="http://schemas.microsoft.com/office/drawing/2014/main" id="{AD82C22B-5E50-4C42-9E0F-F11119EEBFEA}"/>
+                <a16:creationId xmlns:a16="http://schemas.microsoft.com/office/drawing/2014/main" id="{83CC0E5C-4597-419D-B1EF-D67807E1BC64}"/>
               </a:ext>
             </a:extLst>
           </p:cNvPr>
@@ -15530,7 +15530,7 @@
           <p:cNvPr id="65" name="line-131">
             <a:extLst xmlns:a="http://schemas.openxmlformats.org/drawingml/2006/main">
               <a:ext uri="{FF2B5EF4-FFF2-40B4-BE49-F238E27FC236}">
-                <a16:creationId xmlns:a16="http://schemas.microsoft.com/office/drawing/2014/main" id="{2FFAC4C7-37B5-4638-B08E-6F1D96F09C51}"/>
+                <a16:creationId xmlns:a16="http://schemas.microsoft.com/office/drawing/2014/main" id="{217D45E1-D3BA-4EB0-8537-056DF1F1905B}"/>
               </a:ext>
             </a:extLst>
           </p:cNvPr>
@@ -15570,7 +15570,7 @@
           <p:cNvPr id="66" name="line-132">
             <a:extLst xmlns:a="http://schemas.openxmlformats.org/drawingml/2006/main">
               <a:ext uri="{FF2B5EF4-FFF2-40B4-BE49-F238E27FC236}">
-                <a16:creationId xmlns:a16="http://schemas.microsoft.com/office/drawing/2014/main" id="{BA5B5A68-388B-435B-B135-392BBE411C80}"/>
+                <a16:creationId xmlns:a16="http://schemas.microsoft.com/office/drawing/2014/main" id="{27CA7425-9B78-4127-8A1B-44CA35ACE946}"/>
               </a:ext>
             </a:extLst>
           </p:cNvPr>
@@ -15610,7 +15610,7 @@
           <p:cNvPr id="67" name="line-133">
             <a:extLst xmlns:a="http://schemas.openxmlformats.org/drawingml/2006/main">
               <a:ext uri="{FF2B5EF4-FFF2-40B4-BE49-F238E27FC236}">
-                <a16:creationId xmlns:a16="http://schemas.microsoft.com/office/drawing/2014/main" id="{16020754-9DC6-452F-980C-B28D0C7243DB}"/>
+                <a16:creationId xmlns:a16="http://schemas.microsoft.com/office/drawing/2014/main" id="{96B04AB3-3A8D-459C-B2FC-257B8E581181}"/>
               </a:ext>
             </a:extLst>
           </p:cNvPr>
@@ -15650,7 +15650,7 @@
           <p:cNvPr id="68" name="line-134">
             <a:extLst xmlns:a="http://schemas.openxmlformats.org/drawingml/2006/main">
               <a:ext uri="{FF2B5EF4-FFF2-40B4-BE49-F238E27FC236}">
-                <a16:creationId xmlns:a16="http://schemas.microsoft.com/office/drawing/2014/main" id="{751E090C-10DC-4DD5-8706-796E2E88081D}"/>
+                <a16:creationId xmlns:a16="http://schemas.microsoft.com/office/drawing/2014/main" id="{F6A52775-6738-4AB9-A670-6D791901914C}"/>
               </a:ext>
             </a:extLst>
           </p:cNvPr>
@@ -15690,7 +15690,7 @@
           <p:cNvPr id="69" name="line-135">
             <a:extLst xmlns:a="http://schemas.openxmlformats.org/drawingml/2006/main">
               <a:ext uri="{FF2B5EF4-FFF2-40B4-BE49-F238E27FC236}">
-                <a16:creationId xmlns:a16="http://schemas.microsoft.com/office/drawing/2014/main" id="{C9C403ED-FF8C-4217-BFAF-8755122E12BA}"/>
+                <a16:creationId xmlns:a16="http://schemas.microsoft.com/office/drawing/2014/main" id="{E60D1F2F-BCD6-4ED9-8A36-0EDF7A516905}"/>
               </a:ext>
             </a:extLst>
           </p:cNvPr>
@@ -15730,7 +15730,7 @@
           <p:cNvPr id="70" name="line-136">
             <a:extLst xmlns:a="http://schemas.openxmlformats.org/drawingml/2006/main">
               <a:ext uri="{FF2B5EF4-FFF2-40B4-BE49-F238E27FC236}">
-                <a16:creationId xmlns:a16="http://schemas.microsoft.com/office/drawing/2014/main" id="{1ED456FD-3618-479B-AB67-D8C8BB3983F3}"/>
+                <a16:creationId xmlns:a16="http://schemas.microsoft.com/office/drawing/2014/main" id="{BA90C9C6-3361-4F0B-B64D-9E8E28E14A43}"/>
               </a:ext>
             </a:extLst>
           </p:cNvPr>
@@ -15770,7 +15770,7 @@
           <p:cNvPr id="71" name="line-137">
             <a:extLst xmlns:a="http://schemas.openxmlformats.org/drawingml/2006/main">
               <a:ext uri="{FF2B5EF4-FFF2-40B4-BE49-F238E27FC236}">
-                <a16:creationId xmlns:a16="http://schemas.microsoft.com/office/drawing/2014/main" id="{A3AC07E5-D202-4003-9E64-B2A96CC1B299}"/>
+                <a16:creationId xmlns:a16="http://schemas.microsoft.com/office/drawing/2014/main" id="{030948C7-4FE8-499D-B7D0-5DA6AB2B60F9}"/>
               </a:ext>
             </a:extLst>
           </p:cNvPr>
@@ -15810,7 +15810,7 @@
           <p:cNvPr id="72" name="line-138">
             <a:extLst xmlns:a="http://schemas.openxmlformats.org/drawingml/2006/main">
               <a:ext uri="{FF2B5EF4-FFF2-40B4-BE49-F238E27FC236}">
-                <a16:creationId xmlns:a16="http://schemas.microsoft.com/office/drawing/2014/main" id="{0C945222-C0C1-4672-A44B-F1BBE604497D}"/>
+                <a16:creationId xmlns:a16="http://schemas.microsoft.com/office/drawing/2014/main" id="{FB7551F9-E487-47DF-8816-CF2B712872E4}"/>
               </a:ext>
             </a:extLst>
           </p:cNvPr>
@@ -15850,7 +15850,7 @@
           <p:cNvPr id="73" name="line-139">
             <a:extLst xmlns:a="http://schemas.openxmlformats.org/drawingml/2006/main">
               <a:ext uri="{FF2B5EF4-FFF2-40B4-BE49-F238E27FC236}">
-                <a16:creationId xmlns:a16="http://schemas.microsoft.com/office/drawing/2014/main" id="{CAECBE46-AC97-435C-85AA-2F0555D579CC}"/>
+                <a16:creationId xmlns:a16="http://schemas.microsoft.com/office/drawing/2014/main" id="{90690757-AA0A-4DDB-95CF-24EADA26D7D6}"/>
               </a:ext>
             </a:extLst>
           </p:cNvPr>
@@ -15890,7 +15890,7 @@
           <p:cNvPr id="74" name="line-140">
             <a:extLst xmlns:a="http://schemas.openxmlformats.org/drawingml/2006/main">
               <a:ext uri="{FF2B5EF4-FFF2-40B4-BE49-F238E27FC236}">
-                <a16:creationId xmlns:a16="http://schemas.microsoft.com/office/drawing/2014/main" id="{5900868A-20C2-4E02-9095-287BA8E4AECB}"/>
+                <a16:creationId xmlns:a16="http://schemas.microsoft.com/office/drawing/2014/main" id="{EEE12A61-6538-44F3-9616-71B7B5B4ADF3}"/>
               </a:ext>
             </a:extLst>
           </p:cNvPr>
@@ -15930,7 +15930,7 @@
           <p:cNvPr id="75" name="line-141">
             <a:extLst xmlns:a="http://schemas.openxmlformats.org/drawingml/2006/main">
               <a:ext uri="{FF2B5EF4-FFF2-40B4-BE49-F238E27FC236}">
-                <a16:creationId xmlns:a16="http://schemas.microsoft.com/office/drawing/2014/main" id="{458EB496-014E-42B7-9C84-E5806FE025FA}"/>
+                <a16:creationId xmlns:a16="http://schemas.microsoft.com/office/drawing/2014/main" id="{62D9554D-B051-42CC-B924-737DCB546B6D}"/>
               </a:ext>
             </a:extLst>
           </p:cNvPr>
@@ -15970,7 +15970,7 @@
           <p:cNvPr id="76" name="line-142">
             <a:extLst xmlns:a="http://schemas.openxmlformats.org/drawingml/2006/main">
               <a:ext uri="{FF2B5EF4-FFF2-40B4-BE49-F238E27FC236}">
-                <a16:creationId xmlns:a16="http://schemas.microsoft.com/office/drawing/2014/main" id="{0B744131-26B0-4E36-85A6-59EC52B765EC}"/>
+                <a16:creationId xmlns:a16="http://schemas.microsoft.com/office/drawing/2014/main" id="{9357B689-8F6C-4082-AC50-B25C4E9FBEB5}"/>
               </a:ext>
             </a:extLst>
           </p:cNvPr>
@@ -16010,7 +16010,7 @@
           <p:cNvPr id="77" name="line-143">
             <a:extLst xmlns:a="http://schemas.openxmlformats.org/drawingml/2006/main">
               <a:ext uri="{FF2B5EF4-FFF2-40B4-BE49-F238E27FC236}">
-                <a16:creationId xmlns:a16="http://schemas.microsoft.com/office/drawing/2014/main" id="{DF51F416-B9C5-4996-96AD-64CEC7B3AF0A}"/>
+                <a16:creationId xmlns:a16="http://schemas.microsoft.com/office/drawing/2014/main" id="{B10B1B08-51A1-42D3-8BEA-A987B963E24A}"/>
               </a:ext>
             </a:extLst>
           </p:cNvPr>
@@ -16050,7 +16050,7 @@
           <p:cNvPr id="78" name="line-144">
             <a:extLst xmlns:a="http://schemas.openxmlformats.org/drawingml/2006/main">
               <a:ext uri="{FF2B5EF4-FFF2-40B4-BE49-F238E27FC236}">
-                <a16:creationId xmlns:a16="http://schemas.microsoft.com/office/drawing/2014/main" id="{6E69B6DF-758D-43A2-A140-26C07D7071A3}"/>
+                <a16:creationId xmlns:a16="http://schemas.microsoft.com/office/drawing/2014/main" id="{4058F37A-2D30-402C-9403-0CEADB01D4B4}"/>
               </a:ext>
             </a:extLst>
           </p:cNvPr>
@@ -16090,7 +16090,7 @@
           <p:cNvPr id="79" name="line-145">
             <a:extLst xmlns:a="http://schemas.openxmlformats.org/drawingml/2006/main">
               <a:ext uri="{FF2B5EF4-FFF2-40B4-BE49-F238E27FC236}">
-                <a16:creationId xmlns:a16="http://schemas.microsoft.com/office/drawing/2014/main" id="{8141197B-FC92-4C99-8C0F-164F28C0BE03}"/>
+                <a16:creationId xmlns:a16="http://schemas.microsoft.com/office/drawing/2014/main" id="{99CECBAE-348D-495B-B01E-1E27A27BA079}"/>
               </a:ext>
             </a:extLst>
           </p:cNvPr>
@@ -16130,7 +16130,7 @@
           <p:cNvPr id="80" name="line-146">
             <a:extLst xmlns:a="http://schemas.openxmlformats.org/drawingml/2006/main">
               <a:ext uri="{FF2B5EF4-FFF2-40B4-BE49-F238E27FC236}">
-                <a16:creationId xmlns:a16="http://schemas.microsoft.com/office/drawing/2014/main" id="{B187D304-144D-43BD-8D47-20EFD5BF8B32}"/>
+                <a16:creationId xmlns:a16="http://schemas.microsoft.com/office/drawing/2014/main" id="{2B08319D-97D0-4B42-AC74-493812A1E1BF}"/>
               </a:ext>
             </a:extLst>
           </p:cNvPr>
@@ -16170,7 +16170,7 @@
           <p:cNvPr id="81" name="line-147">
             <a:extLst xmlns:a="http://schemas.openxmlformats.org/drawingml/2006/main">
               <a:ext uri="{FF2B5EF4-FFF2-40B4-BE49-F238E27FC236}">
-                <a16:creationId xmlns:a16="http://schemas.microsoft.com/office/drawing/2014/main" id="{7B6A84C3-D254-4015-9CE2-9FE5FCD8AFCE}"/>
+                <a16:creationId xmlns:a16="http://schemas.microsoft.com/office/drawing/2014/main" id="{59D5C410-0410-4E90-8B45-5EEF007C2F1D}"/>
               </a:ext>
             </a:extLst>
           </p:cNvPr>
@@ -16210,7 +16210,7 @@
           <p:cNvPr id="82" name="line-148">
             <a:extLst xmlns:a="http://schemas.openxmlformats.org/drawingml/2006/main">
               <a:ext uri="{FF2B5EF4-FFF2-40B4-BE49-F238E27FC236}">
-                <a16:creationId xmlns:a16="http://schemas.microsoft.com/office/drawing/2014/main" id="{528DC2E6-AFB6-4016-A01E-0D8798638CEA}"/>
+                <a16:creationId xmlns:a16="http://schemas.microsoft.com/office/drawing/2014/main" id="{FB93AFE8-11C8-4DF1-83A5-2C6B15982639}"/>
               </a:ext>
             </a:extLst>
           </p:cNvPr>
@@ -16250,7 +16250,7 @@
           <p:cNvPr id="83" name="object-149">
             <a:extLst xmlns:a="http://schemas.openxmlformats.org/drawingml/2006/main">
               <a:ext uri="{FF2B5EF4-FFF2-40B4-BE49-F238E27FC236}">
-                <a16:creationId xmlns:a16="http://schemas.microsoft.com/office/drawing/2014/main" id="{E9EA8C69-0DDF-4339-B07E-DC0F9207D061}"/>
+                <a16:creationId xmlns:a16="http://schemas.microsoft.com/office/drawing/2014/main" id="{BEEBE046-4261-4935-AF58-B0D260AEAB25}"/>
               </a:ext>
             </a:extLst>
           </p:cNvPr>
@@ -16340,7 +16340,7 @@
           <p:cNvPr id="84" name="object-150">
             <a:extLst xmlns:a="http://schemas.openxmlformats.org/drawingml/2006/main">
               <a:ext uri="{FF2B5EF4-FFF2-40B4-BE49-F238E27FC236}">
-                <a16:creationId xmlns:a16="http://schemas.microsoft.com/office/drawing/2014/main" id="{179DD23C-90D6-4417-9533-6744D1892AA3}"/>
+                <a16:creationId xmlns:a16="http://schemas.microsoft.com/office/drawing/2014/main" id="{BE8685C4-3888-4256-BC8D-9FBE861967B1}"/>
               </a:ext>
             </a:extLst>
           </p:cNvPr>
@@ -16407,7 +16407,7 @@
           <p:cNvPr id="85" name="line-151">
             <a:extLst xmlns:a="http://schemas.openxmlformats.org/drawingml/2006/main">
               <a:ext uri="{FF2B5EF4-FFF2-40B4-BE49-F238E27FC236}">
-                <a16:creationId xmlns:a16="http://schemas.microsoft.com/office/drawing/2014/main" id="{DF9184A9-DD65-4D21-B35A-06F3D64F1B55}"/>
+                <a16:creationId xmlns:a16="http://schemas.microsoft.com/office/drawing/2014/main" id="{E5103F00-8532-42CE-9280-12AB320E6FC0}"/>
               </a:ext>
             </a:extLst>
           </p:cNvPr>
@@ -16447,7 +16447,7 @@
           <p:cNvPr id="86" name="line-152">
             <a:extLst xmlns:a="http://schemas.openxmlformats.org/drawingml/2006/main">
               <a:ext uri="{FF2B5EF4-FFF2-40B4-BE49-F238E27FC236}">
-                <a16:creationId xmlns:a16="http://schemas.microsoft.com/office/drawing/2014/main" id="{0B86B390-9B96-4D14-B4FE-1BC06D385449}"/>
+                <a16:creationId xmlns:a16="http://schemas.microsoft.com/office/drawing/2014/main" id="{7D4FFB45-4CC6-4B3D-9912-4218026483C7}"/>
               </a:ext>
             </a:extLst>
           </p:cNvPr>
@@ -16487,7 +16487,7 @@
           <p:cNvPr id="87" name="line-153">
             <a:extLst xmlns:a="http://schemas.openxmlformats.org/drawingml/2006/main">
               <a:ext uri="{FF2B5EF4-FFF2-40B4-BE49-F238E27FC236}">
-                <a16:creationId xmlns:a16="http://schemas.microsoft.com/office/drawing/2014/main" id="{DACB13C2-A84F-4266-B7F8-ED509B6824FC}"/>
+                <a16:creationId xmlns:a16="http://schemas.microsoft.com/office/drawing/2014/main" id="{7D551462-D59C-47AF-85C6-D8AF72ECA895}"/>
               </a:ext>
             </a:extLst>
           </p:cNvPr>
@@ -16527,7 +16527,7 @@
           <p:cNvPr id="88" name="line-154">
             <a:extLst xmlns:a="http://schemas.openxmlformats.org/drawingml/2006/main">
               <a:ext uri="{FF2B5EF4-FFF2-40B4-BE49-F238E27FC236}">
-                <a16:creationId xmlns:a16="http://schemas.microsoft.com/office/drawing/2014/main" id="{97C006ED-66CB-4FAB-80E2-8B956ECD450F}"/>
+                <a16:creationId xmlns:a16="http://schemas.microsoft.com/office/drawing/2014/main" id="{C980F819-5FD5-490B-92A5-D0BCBA6BD1DE}"/>
               </a:ext>
             </a:extLst>
           </p:cNvPr>
@@ -16567,7 +16567,7 @@
           <p:cNvPr id="89" name="line-155">
             <a:extLst xmlns:a="http://schemas.openxmlformats.org/drawingml/2006/main">
               <a:ext uri="{FF2B5EF4-FFF2-40B4-BE49-F238E27FC236}">
-                <a16:creationId xmlns:a16="http://schemas.microsoft.com/office/drawing/2014/main" id="{B02DFA7F-825A-492F-A535-1088761D3181}"/>
+                <a16:creationId xmlns:a16="http://schemas.microsoft.com/office/drawing/2014/main" id="{6915CB84-B11D-45A7-8C18-1115354C18BE}"/>
               </a:ext>
             </a:extLst>
           </p:cNvPr>
@@ -16607,7 +16607,7 @@
           <p:cNvPr id="90" name="line-156">
             <a:extLst xmlns:a="http://schemas.openxmlformats.org/drawingml/2006/main">
               <a:ext uri="{FF2B5EF4-FFF2-40B4-BE49-F238E27FC236}">
-                <a16:creationId xmlns:a16="http://schemas.microsoft.com/office/drawing/2014/main" id="{F0441B54-EC4C-48BD-8613-07437B989133}"/>
+                <a16:creationId xmlns:a16="http://schemas.microsoft.com/office/drawing/2014/main" id="{78AB5DD6-625E-4EB6-B16E-A038A74966D6}"/>
               </a:ext>
             </a:extLst>
           </p:cNvPr>
@@ -16647,7 +16647,7 @@
           <p:cNvPr id="91" name="line-157">
             <a:extLst xmlns:a="http://schemas.openxmlformats.org/drawingml/2006/main">
               <a:ext uri="{FF2B5EF4-FFF2-40B4-BE49-F238E27FC236}">
-                <a16:creationId xmlns:a16="http://schemas.microsoft.com/office/drawing/2014/main" id="{C69A5C9A-C98F-4D6D-8CD1-0B7928F92A51}"/>
+                <a16:creationId xmlns:a16="http://schemas.microsoft.com/office/drawing/2014/main" id="{456F6846-106C-4C8E-B3BC-A94BBB83918E}"/>
               </a:ext>
             </a:extLst>
           </p:cNvPr>
@@ -16687,7 +16687,7 @@
           <p:cNvPr id="92" name="line-158">
             <a:extLst xmlns:a="http://schemas.openxmlformats.org/drawingml/2006/main">
               <a:ext uri="{FF2B5EF4-FFF2-40B4-BE49-F238E27FC236}">
-                <a16:creationId xmlns:a16="http://schemas.microsoft.com/office/drawing/2014/main" id="{7F5F9721-A802-4D94-848E-E48844CF85E2}"/>
+                <a16:creationId xmlns:a16="http://schemas.microsoft.com/office/drawing/2014/main" id="{2010A5DC-D5AF-44DE-BC15-95A5DE0BC704}"/>
               </a:ext>
             </a:extLst>
           </p:cNvPr>
@@ -16727,7 +16727,7 @@
           <p:cNvPr id="93" name="line-159">
             <a:extLst xmlns:a="http://schemas.openxmlformats.org/drawingml/2006/main">
               <a:ext uri="{FF2B5EF4-FFF2-40B4-BE49-F238E27FC236}">
-                <a16:creationId xmlns:a16="http://schemas.microsoft.com/office/drawing/2014/main" id="{739DCE06-B008-4E06-8CAC-05BA706E040C}"/>
+                <a16:creationId xmlns:a16="http://schemas.microsoft.com/office/drawing/2014/main" id="{065D6C4F-AD82-4AD9-917F-0AC18C3EE38C}"/>
               </a:ext>
             </a:extLst>
           </p:cNvPr>
@@ -16767,7 +16767,7 @@
           <p:cNvPr id="94" name="line-160">
             <a:extLst xmlns:a="http://schemas.openxmlformats.org/drawingml/2006/main">
               <a:ext uri="{FF2B5EF4-FFF2-40B4-BE49-F238E27FC236}">
-                <a16:creationId xmlns:a16="http://schemas.microsoft.com/office/drawing/2014/main" id="{E2270F5A-BF05-4C99-A144-02B0B92F0C56}"/>
+                <a16:creationId xmlns:a16="http://schemas.microsoft.com/office/drawing/2014/main" id="{1F0FD30A-9712-4517-B13F-F9482B6ACA84}"/>
               </a:ext>
             </a:extLst>
           </p:cNvPr>
@@ -16807,7 +16807,7 @@
           <p:cNvPr id="95" name="line-161">
             <a:extLst xmlns:a="http://schemas.openxmlformats.org/drawingml/2006/main">
               <a:ext uri="{FF2B5EF4-FFF2-40B4-BE49-F238E27FC236}">
-                <a16:creationId xmlns:a16="http://schemas.microsoft.com/office/drawing/2014/main" id="{CFC0D2E3-D1E9-4765-9BD6-ACBE49CF43EF}"/>
+                <a16:creationId xmlns:a16="http://schemas.microsoft.com/office/drawing/2014/main" id="{C9EF12A3-FECF-4AD6-B7C2-C6166254C68D}"/>
               </a:ext>
             </a:extLst>
           </p:cNvPr>
@@ -16847,7 +16847,7 @@
           <p:cNvPr id="96" name="line-162">
             <a:extLst xmlns:a="http://schemas.openxmlformats.org/drawingml/2006/main">
               <a:ext uri="{FF2B5EF4-FFF2-40B4-BE49-F238E27FC236}">
-                <a16:creationId xmlns:a16="http://schemas.microsoft.com/office/drawing/2014/main" id="{720D33AE-7288-49BE-A8B0-83E59693325B}"/>
+                <a16:creationId xmlns:a16="http://schemas.microsoft.com/office/drawing/2014/main" id="{36B5D814-7915-4D01-9FD1-CC713B2BE2A0}"/>
               </a:ext>
             </a:extLst>
           </p:cNvPr>
@@ -16887,7 +16887,7 @@
           <p:cNvPr id="97" name="line-163">
             <a:extLst xmlns:a="http://schemas.openxmlformats.org/drawingml/2006/main">
               <a:ext uri="{FF2B5EF4-FFF2-40B4-BE49-F238E27FC236}">
-                <a16:creationId xmlns:a16="http://schemas.microsoft.com/office/drawing/2014/main" id="{39AFF9A0-B987-4DB3-8879-DD477DD3A498}"/>
+                <a16:creationId xmlns:a16="http://schemas.microsoft.com/office/drawing/2014/main" id="{3080C974-9D96-40D6-88E2-1119104BD5DD}"/>
               </a:ext>
             </a:extLst>
           </p:cNvPr>
@@ -16927,7 +16927,7 @@
           <p:cNvPr id="98" name="line-164">
             <a:extLst xmlns:a="http://schemas.openxmlformats.org/drawingml/2006/main">
               <a:ext uri="{FF2B5EF4-FFF2-40B4-BE49-F238E27FC236}">
-                <a16:creationId xmlns:a16="http://schemas.microsoft.com/office/drawing/2014/main" id="{6C6C3AA9-C3AB-4957-8684-A4E3F2CA0FEE}"/>
+                <a16:creationId xmlns:a16="http://schemas.microsoft.com/office/drawing/2014/main" id="{3842B02C-423D-44ED-8782-19C6A8850D68}"/>
               </a:ext>
             </a:extLst>
           </p:cNvPr>
@@ -16967,7 +16967,7 @@
           <p:cNvPr id="99" name="line-165">
             <a:extLst xmlns:a="http://schemas.openxmlformats.org/drawingml/2006/main">
               <a:ext uri="{FF2B5EF4-FFF2-40B4-BE49-F238E27FC236}">
-                <a16:creationId xmlns:a16="http://schemas.microsoft.com/office/drawing/2014/main" id="{37B8557C-48C3-46D1-B853-4D71C7B998DF}"/>
+                <a16:creationId xmlns:a16="http://schemas.microsoft.com/office/drawing/2014/main" id="{40351D21-B32B-4974-BF89-509D3A2F1189}"/>
               </a:ext>
             </a:extLst>
           </p:cNvPr>
@@ -17007,7 +17007,7 @@
           <p:cNvPr id="100" name="line-166">
             <a:extLst xmlns:a="http://schemas.openxmlformats.org/drawingml/2006/main">
               <a:ext uri="{FF2B5EF4-FFF2-40B4-BE49-F238E27FC236}">
-                <a16:creationId xmlns:a16="http://schemas.microsoft.com/office/drawing/2014/main" id="{C24EF0F4-81C7-47C3-B598-2D1F02A3C336}"/>
+                <a16:creationId xmlns:a16="http://schemas.microsoft.com/office/drawing/2014/main" id="{65A62CC6-97E6-4A9F-AECD-D0247F5C2815}"/>
               </a:ext>
             </a:extLst>
           </p:cNvPr>
@@ -17047,7 +17047,7 @@
           <p:cNvPr id="101" name="line-167">
             <a:extLst xmlns:a="http://schemas.openxmlformats.org/drawingml/2006/main">
               <a:ext uri="{FF2B5EF4-FFF2-40B4-BE49-F238E27FC236}">
-                <a16:creationId xmlns:a16="http://schemas.microsoft.com/office/drawing/2014/main" id="{E09F7E96-0D5C-4CED-9585-AE135FABB412}"/>
+                <a16:creationId xmlns:a16="http://schemas.microsoft.com/office/drawing/2014/main" id="{CF795318-9DA7-44B2-8546-A74C58BA1E4F}"/>
               </a:ext>
             </a:extLst>
           </p:cNvPr>
@@ -17087,7 +17087,7 @@
           <p:cNvPr id="102" name="line-168">
             <a:extLst xmlns:a="http://schemas.openxmlformats.org/drawingml/2006/main">
               <a:ext uri="{FF2B5EF4-FFF2-40B4-BE49-F238E27FC236}">
-                <a16:creationId xmlns:a16="http://schemas.microsoft.com/office/drawing/2014/main" id="{30050646-427C-46C4-A950-513000D8AEE7}"/>
+                <a16:creationId xmlns:a16="http://schemas.microsoft.com/office/drawing/2014/main" id="{8A7293D7-C7C0-4485-A86E-1B72CC980194}"/>
               </a:ext>
             </a:extLst>
           </p:cNvPr>
@@ -17127,7 +17127,7 @@
           <p:cNvPr id="103" name="line-169">
             <a:extLst xmlns:a="http://schemas.openxmlformats.org/drawingml/2006/main">
               <a:ext uri="{FF2B5EF4-FFF2-40B4-BE49-F238E27FC236}">
-                <a16:creationId xmlns:a16="http://schemas.microsoft.com/office/drawing/2014/main" id="{A7022BF7-0B7C-4EB8-99EB-C99E77D4DFFA}"/>
+                <a16:creationId xmlns:a16="http://schemas.microsoft.com/office/drawing/2014/main" id="{8813F93E-9A3C-4A4B-A5FE-B7E846DD2DE5}"/>
               </a:ext>
             </a:extLst>
           </p:cNvPr>
@@ -17167,7 +17167,7 @@
           <p:cNvPr id="104" name="line-170">
             <a:extLst xmlns:a="http://schemas.openxmlformats.org/drawingml/2006/main">
               <a:ext uri="{FF2B5EF4-FFF2-40B4-BE49-F238E27FC236}">
-                <a16:creationId xmlns:a16="http://schemas.microsoft.com/office/drawing/2014/main" id="{03BB724D-A9E0-4BE0-856F-3A55754F5BBF}"/>
+                <a16:creationId xmlns:a16="http://schemas.microsoft.com/office/drawing/2014/main" id="{C479DD38-303B-48B9-AAA3-099DC5465595}"/>
               </a:ext>
             </a:extLst>
           </p:cNvPr>
@@ -17207,7 +17207,7 @@
           <p:cNvPr id="105" name="line-171">
             <a:extLst xmlns:a="http://schemas.openxmlformats.org/drawingml/2006/main">
               <a:ext uri="{FF2B5EF4-FFF2-40B4-BE49-F238E27FC236}">
-                <a16:creationId xmlns:a16="http://schemas.microsoft.com/office/drawing/2014/main" id="{DCD521B0-D79F-4D15-BCD9-D51345DBD4EB}"/>
+                <a16:creationId xmlns:a16="http://schemas.microsoft.com/office/drawing/2014/main" id="{0748E355-5DB2-41E3-B2D4-AD7CC9DE5E7F}"/>
               </a:ext>
             </a:extLst>
           </p:cNvPr>
@@ -17247,7 +17247,7 @@
           <p:cNvPr id="106" name="line-172">
             <a:extLst xmlns:a="http://schemas.openxmlformats.org/drawingml/2006/main">
               <a:ext uri="{FF2B5EF4-FFF2-40B4-BE49-F238E27FC236}">
-                <a16:creationId xmlns:a16="http://schemas.microsoft.com/office/drawing/2014/main" id="{960F5EDA-944D-4715-9123-575D9EE827C2}"/>
+                <a16:creationId xmlns:a16="http://schemas.microsoft.com/office/drawing/2014/main" id="{80495368-5C3A-45B7-8AF3-7494FE164538}"/>
               </a:ext>
             </a:extLst>
           </p:cNvPr>
@@ -17287,7 +17287,7 @@
           <p:cNvPr id="107" name="line-173">
             <a:extLst xmlns:a="http://schemas.openxmlformats.org/drawingml/2006/main">
               <a:ext uri="{FF2B5EF4-FFF2-40B4-BE49-F238E27FC236}">
-                <a16:creationId xmlns:a16="http://schemas.microsoft.com/office/drawing/2014/main" id="{11888F27-3501-415A-8BEB-43E7E5FEFF29}"/>
+                <a16:creationId xmlns:a16="http://schemas.microsoft.com/office/drawing/2014/main" id="{F29FA461-AB11-4470-BA9B-A52CF442B0A4}"/>
               </a:ext>
             </a:extLst>
           </p:cNvPr>
@@ -17327,7 +17327,7 @@
           <p:cNvPr id="108" name="line-174">
             <a:extLst xmlns:a="http://schemas.openxmlformats.org/drawingml/2006/main">
               <a:ext uri="{FF2B5EF4-FFF2-40B4-BE49-F238E27FC236}">
-                <a16:creationId xmlns:a16="http://schemas.microsoft.com/office/drawing/2014/main" id="{4B009DC2-723E-4DAD-952E-FA087BAE6B94}"/>
+                <a16:creationId xmlns:a16="http://schemas.microsoft.com/office/drawing/2014/main" id="{6C812D37-4EE0-4235-A6EF-8FA0B0088816}"/>
               </a:ext>
             </a:extLst>
           </p:cNvPr>
@@ -17367,7 +17367,7 @@
           <p:cNvPr id="109" name="line-175">
             <a:extLst xmlns:a="http://schemas.openxmlformats.org/drawingml/2006/main">
               <a:ext uri="{FF2B5EF4-FFF2-40B4-BE49-F238E27FC236}">
-                <a16:creationId xmlns:a16="http://schemas.microsoft.com/office/drawing/2014/main" id="{3F0B8FF5-6BB5-4934-B021-A55C6D84CB26}"/>
+                <a16:creationId xmlns:a16="http://schemas.microsoft.com/office/drawing/2014/main" id="{22E338A4-D239-4F97-9D0F-5AF476537A10}"/>
               </a:ext>
             </a:extLst>
           </p:cNvPr>
@@ -17407,7 +17407,7 @@
           <p:cNvPr id="110" name="line-176">
             <a:extLst xmlns:a="http://schemas.openxmlformats.org/drawingml/2006/main">
               <a:ext uri="{FF2B5EF4-FFF2-40B4-BE49-F238E27FC236}">
-                <a16:creationId xmlns:a16="http://schemas.microsoft.com/office/drawing/2014/main" id="{81490CD8-FABF-45D6-A0D9-C6D31C7AF80B}"/>
+                <a16:creationId xmlns:a16="http://schemas.microsoft.com/office/drawing/2014/main" id="{66FD98D5-41E7-4517-B51D-0083E01CE9CF}"/>
               </a:ext>
             </a:extLst>
           </p:cNvPr>
@@ -17447,7 +17447,7 @@
           <p:cNvPr id="111" name="line-177">
             <a:extLst xmlns:a="http://schemas.openxmlformats.org/drawingml/2006/main">
               <a:ext uri="{FF2B5EF4-FFF2-40B4-BE49-F238E27FC236}">
-                <a16:creationId xmlns:a16="http://schemas.microsoft.com/office/drawing/2014/main" id="{588357B1-792B-41EA-9521-877817F0605A}"/>
+                <a16:creationId xmlns:a16="http://schemas.microsoft.com/office/drawing/2014/main" id="{DB0E6820-69BE-495F-940F-6C33D8382DD6}"/>
               </a:ext>
             </a:extLst>
           </p:cNvPr>
@@ -17487,7 +17487,7 @@
           <p:cNvPr id="112" name="line-178">
             <a:extLst xmlns:a="http://schemas.openxmlformats.org/drawingml/2006/main">
               <a:ext uri="{FF2B5EF4-FFF2-40B4-BE49-F238E27FC236}">
-                <a16:creationId xmlns:a16="http://schemas.microsoft.com/office/drawing/2014/main" id="{34AEB76F-9DEF-4BF1-9D89-AEA442511214}"/>
+                <a16:creationId xmlns:a16="http://schemas.microsoft.com/office/drawing/2014/main" id="{67D60343-BC33-4055-B79B-CF164E636796}"/>
               </a:ext>
             </a:extLst>
           </p:cNvPr>
@@ -17527,7 +17527,7 @@
           <p:cNvPr id="113" name="line-179">
             <a:extLst xmlns:a="http://schemas.openxmlformats.org/drawingml/2006/main">
               <a:ext uri="{FF2B5EF4-FFF2-40B4-BE49-F238E27FC236}">
-                <a16:creationId xmlns:a16="http://schemas.microsoft.com/office/drawing/2014/main" id="{C46D6489-6854-442D-B21A-D32E3CB3D000}"/>
+                <a16:creationId xmlns:a16="http://schemas.microsoft.com/office/drawing/2014/main" id="{1948172D-E2D6-4A6F-8F27-0078873F9BEA}"/>
               </a:ext>
             </a:extLst>
           </p:cNvPr>
@@ -17567,7 +17567,7 @@
           <p:cNvPr id="114" name="line-180">
             <a:extLst xmlns:a="http://schemas.openxmlformats.org/drawingml/2006/main">
               <a:ext uri="{FF2B5EF4-FFF2-40B4-BE49-F238E27FC236}">
-                <a16:creationId xmlns:a16="http://schemas.microsoft.com/office/drawing/2014/main" id="{FFD9AEDF-4A91-40D4-AB7B-64D14CFBE27D}"/>
+                <a16:creationId xmlns:a16="http://schemas.microsoft.com/office/drawing/2014/main" id="{5E83F362-A33D-41D8-B473-CA1F661A5CAA}"/>
               </a:ext>
             </a:extLst>
           </p:cNvPr>
@@ -17607,7 +17607,7 @@
           <p:cNvPr id="115" name="line-181">
             <a:extLst xmlns:a="http://schemas.openxmlformats.org/drawingml/2006/main">
               <a:ext uri="{FF2B5EF4-FFF2-40B4-BE49-F238E27FC236}">
-                <a16:creationId xmlns:a16="http://schemas.microsoft.com/office/drawing/2014/main" id="{8B8E6840-6330-487E-AE66-A2981B2C3A82}"/>
+                <a16:creationId xmlns:a16="http://schemas.microsoft.com/office/drawing/2014/main" id="{8E920719-A1B4-45F5-A4A0-8F3327ADCF5E}"/>
               </a:ext>
             </a:extLst>
           </p:cNvPr>
@@ -17647,7 +17647,7 @@
           <p:cNvPr id="116" name="line-182">
             <a:extLst xmlns:a="http://schemas.openxmlformats.org/drawingml/2006/main">
               <a:ext uri="{FF2B5EF4-FFF2-40B4-BE49-F238E27FC236}">
-                <a16:creationId xmlns:a16="http://schemas.microsoft.com/office/drawing/2014/main" id="{C4D9A987-85BD-48E2-ACFE-90467F369AB2}"/>
+                <a16:creationId xmlns:a16="http://schemas.microsoft.com/office/drawing/2014/main" id="{5944E2A4-3022-41F3-9C57-87BE1E32CB08}"/>
               </a:ext>
             </a:extLst>
           </p:cNvPr>
@@ -17687,7 +17687,7 @@
           <p:cNvPr id="117" name="line-183">
             <a:extLst xmlns:a="http://schemas.openxmlformats.org/drawingml/2006/main">
               <a:ext uri="{FF2B5EF4-FFF2-40B4-BE49-F238E27FC236}">
-                <a16:creationId xmlns:a16="http://schemas.microsoft.com/office/drawing/2014/main" id="{F974D4B8-42C1-474F-B217-31B8438CBAED}"/>
+                <a16:creationId xmlns:a16="http://schemas.microsoft.com/office/drawing/2014/main" id="{AD7E13F6-2F65-4A6D-B2FA-F3CECD02142F}"/>
               </a:ext>
             </a:extLst>
           </p:cNvPr>
@@ -17727,7 +17727,7 @@
           <p:cNvPr id="118" name="line-184">
             <a:extLst xmlns:a="http://schemas.openxmlformats.org/drawingml/2006/main">
               <a:ext uri="{FF2B5EF4-FFF2-40B4-BE49-F238E27FC236}">
-                <a16:creationId xmlns:a16="http://schemas.microsoft.com/office/drawing/2014/main" id="{D4CB42C0-2436-4C55-BE50-10AA2CCE63AD}"/>
+                <a16:creationId xmlns:a16="http://schemas.microsoft.com/office/drawing/2014/main" id="{D522B024-0883-4BFF-A46C-EC33E8BFBD62}"/>
               </a:ext>
             </a:extLst>
           </p:cNvPr>
@@ -17767,7 +17767,7 @@
           <p:cNvPr id="119" name="line-185">
             <a:extLst xmlns:a="http://schemas.openxmlformats.org/drawingml/2006/main">
               <a:ext uri="{FF2B5EF4-FFF2-40B4-BE49-F238E27FC236}">
-                <a16:creationId xmlns:a16="http://schemas.microsoft.com/office/drawing/2014/main" id="{DA3B4CF3-73FD-4704-8A23-F0562CD5D172}"/>
+                <a16:creationId xmlns:a16="http://schemas.microsoft.com/office/drawing/2014/main" id="{006E33AF-0E1A-482B-932F-31ABCA1A8DBB}"/>
               </a:ext>
             </a:extLst>
           </p:cNvPr>
@@ -17807,7 +17807,7 @@
           <p:cNvPr id="120" name="line-186">
             <a:extLst xmlns:a="http://schemas.openxmlformats.org/drawingml/2006/main">
               <a:ext uri="{FF2B5EF4-FFF2-40B4-BE49-F238E27FC236}">
-                <a16:creationId xmlns:a16="http://schemas.microsoft.com/office/drawing/2014/main" id="{29BF09C4-1355-4AEE-8E87-FBA382AAE7AB}"/>
+                <a16:creationId xmlns:a16="http://schemas.microsoft.com/office/drawing/2014/main" id="{82CD27B9-8B1E-495C-927C-46C65C9EEB84}"/>
               </a:ext>
             </a:extLst>
           </p:cNvPr>
@@ -17847,7 +17847,7 @@
           <p:cNvPr id="121" name="line-187">
             <a:extLst xmlns:a="http://schemas.openxmlformats.org/drawingml/2006/main">
               <a:ext uri="{FF2B5EF4-FFF2-40B4-BE49-F238E27FC236}">
-                <a16:creationId xmlns:a16="http://schemas.microsoft.com/office/drawing/2014/main" id="{CF1C9E1E-0852-48ED-9784-660B1A0063FE}"/>
+                <a16:creationId xmlns:a16="http://schemas.microsoft.com/office/drawing/2014/main" id="{C9763051-50DD-49C5-A30B-E2604C7F349A}"/>
               </a:ext>
             </a:extLst>
           </p:cNvPr>
@@ -17887,7 +17887,7 @@
           <p:cNvPr id="122" name="line-188">
             <a:extLst xmlns:a="http://schemas.openxmlformats.org/drawingml/2006/main">
               <a:ext uri="{FF2B5EF4-FFF2-40B4-BE49-F238E27FC236}">
-                <a16:creationId xmlns:a16="http://schemas.microsoft.com/office/drawing/2014/main" id="{36F4D3F9-FA14-4ABE-8CA9-8A6A4B612F89}"/>
+                <a16:creationId xmlns:a16="http://schemas.microsoft.com/office/drawing/2014/main" id="{00C0015B-46E0-479E-9517-CC21D52368AF}"/>
               </a:ext>
             </a:extLst>
           </p:cNvPr>
@@ -17927,7 +17927,7 @@
           <p:cNvPr id="123" name="line-189">
             <a:extLst xmlns:a="http://schemas.openxmlformats.org/drawingml/2006/main">
               <a:ext uri="{FF2B5EF4-FFF2-40B4-BE49-F238E27FC236}">
-                <a16:creationId xmlns:a16="http://schemas.microsoft.com/office/drawing/2014/main" id="{2FB37BDF-512C-4606-AA97-E0AC9DA1ACB0}"/>
+                <a16:creationId xmlns:a16="http://schemas.microsoft.com/office/drawing/2014/main" id="{9223B5D8-611D-4105-867A-B81FB88F3D48}"/>
               </a:ext>
             </a:extLst>
           </p:cNvPr>
@@ -17967,7 +17967,7 @@
           <p:cNvPr id="124" name="line-190">
             <a:extLst xmlns:a="http://schemas.openxmlformats.org/drawingml/2006/main">
               <a:ext uri="{FF2B5EF4-FFF2-40B4-BE49-F238E27FC236}">
-                <a16:creationId xmlns:a16="http://schemas.microsoft.com/office/drawing/2014/main" id="{4AE73D6E-B700-4E54-BCFA-AA3F017935A8}"/>
+                <a16:creationId xmlns:a16="http://schemas.microsoft.com/office/drawing/2014/main" id="{66634685-6270-4DAD-A05A-20CB8830FB08}"/>
               </a:ext>
             </a:extLst>
           </p:cNvPr>
@@ -18007,7 +18007,7 @@
           <p:cNvPr id="125" name="line-191">
             <a:extLst xmlns:a="http://schemas.openxmlformats.org/drawingml/2006/main">
               <a:ext uri="{FF2B5EF4-FFF2-40B4-BE49-F238E27FC236}">
-                <a16:creationId xmlns:a16="http://schemas.microsoft.com/office/drawing/2014/main" id="{C1F2CAC8-F0F6-4EC3-A201-40EEE269D23A}"/>
+                <a16:creationId xmlns:a16="http://schemas.microsoft.com/office/drawing/2014/main" id="{62A0FB25-5405-4ADF-B321-1346273791C1}"/>
               </a:ext>
             </a:extLst>
           </p:cNvPr>
@@ -18047,7 +18047,7 @@
           <p:cNvPr id="126" name="line-192">
             <a:extLst xmlns:a="http://schemas.openxmlformats.org/drawingml/2006/main">
               <a:ext uri="{FF2B5EF4-FFF2-40B4-BE49-F238E27FC236}">
-                <a16:creationId xmlns:a16="http://schemas.microsoft.com/office/drawing/2014/main" id="{C056FDBA-4AEF-4C34-A552-870A847561C3}"/>
+                <a16:creationId xmlns:a16="http://schemas.microsoft.com/office/drawing/2014/main" id="{C2DF4B99-824B-4795-B660-967B80A1ED89}"/>
               </a:ext>
             </a:extLst>
           </p:cNvPr>
@@ -18087,7 +18087,7 @@
           <p:cNvPr id="127" name="line-193">
             <a:extLst xmlns:a="http://schemas.openxmlformats.org/drawingml/2006/main">
               <a:ext uri="{FF2B5EF4-FFF2-40B4-BE49-F238E27FC236}">
-                <a16:creationId xmlns:a16="http://schemas.microsoft.com/office/drawing/2014/main" id="{EBDCEC61-45B5-43A8-95B5-5744ABD3D36D}"/>
+                <a16:creationId xmlns:a16="http://schemas.microsoft.com/office/drawing/2014/main" id="{A6FA3E8F-689B-47E6-BF3E-6B98FF1D6C68}"/>
               </a:ext>
             </a:extLst>
           </p:cNvPr>
@@ -18127,7 +18127,7 @@
           <p:cNvPr id="128" name="line-194">
             <a:extLst xmlns:a="http://schemas.openxmlformats.org/drawingml/2006/main">
               <a:ext uri="{FF2B5EF4-FFF2-40B4-BE49-F238E27FC236}">
-                <a16:creationId xmlns:a16="http://schemas.microsoft.com/office/drawing/2014/main" id="{8F84392B-9885-4A65-A57B-D9274B46D74E}"/>
+                <a16:creationId xmlns:a16="http://schemas.microsoft.com/office/drawing/2014/main" id="{B69B3B5E-3186-4087-9EC4-D92B8BBFE852}"/>
               </a:ext>
             </a:extLst>
           </p:cNvPr>
@@ -18167,7 +18167,7 @@
           <p:cNvPr id="129" name="line-195">
             <a:extLst xmlns:a="http://schemas.openxmlformats.org/drawingml/2006/main">
               <a:ext uri="{FF2B5EF4-FFF2-40B4-BE49-F238E27FC236}">
-                <a16:creationId xmlns:a16="http://schemas.microsoft.com/office/drawing/2014/main" id="{D01579E7-20A7-4C0B-9C2C-973F254AAEED}"/>
+                <a16:creationId xmlns:a16="http://schemas.microsoft.com/office/drawing/2014/main" id="{362C71B2-031D-41F1-AA38-A0791DE5779B}"/>
               </a:ext>
             </a:extLst>
           </p:cNvPr>
@@ -18207,7 +18207,7 @@
           <p:cNvPr id="130" name="line-196">
             <a:extLst xmlns:a="http://schemas.openxmlformats.org/drawingml/2006/main">
               <a:ext uri="{FF2B5EF4-FFF2-40B4-BE49-F238E27FC236}">
-                <a16:creationId xmlns:a16="http://schemas.microsoft.com/office/drawing/2014/main" id="{5A1A5AE2-AB5C-4FD3-8DBE-7BF29D411231}"/>
+                <a16:creationId xmlns:a16="http://schemas.microsoft.com/office/drawing/2014/main" id="{00BE30C1-86F6-4040-89ED-0C458B1958FA}"/>
               </a:ext>
             </a:extLst>
           </p:cNvPr>
@@ -18247,7 +18247,7 @@
           <p:cNvPr id="131" name="line-197">
             <a:extLst xmlns:a="http://schemas.openxmlformats.org/drawingml/2006/main">
               <a:ext uri="{FF2B5EF4-FFF2-40B4-BE49-F238E27FC236}">
-                <a16:creationId xmlns:a16="http://schemas.microsoft.com/office/drawing/2014/main" id="{861D9482-775C-4AD2-B9AD-464D009B7B8E}"/>
+                <a16:creationId xmlns:a16="http://schemas.microsoft.com/office/drawing/2014/main" id="{F1D2E47B-7047-4090-8799-53E315BB857F}"/>
               </a:ext>
             </a:extLst>
           </p:cNvPr>
@@ -18287,7 +18287,7 @@
           <p:cNvPr id="132" name="line-198">
             <a:extLst xmlns:a="http://schemas.openxmlformats.org/drawingml/2006/main">
               <a:ext uri="{FF2B5EF4-FFF2-40B4-BE49-F238E27FC236}">
-                <a16:creationId xmlns:a16="http://schemas.microsoft.com/office/drawing/2014/main" id="{916CC0FF-9195-444A-AB81-6C8C06D54281}"/>
+                <a16:creationId xmlns:a16="http://schemas.microsoft.com/office/drawing/2014/main" id="{FDDDEA0A-C8E2-494F-8207-FE96917774DE}"/>
               </a:ext>
             </a:extLst>
           </p:cNvPr>
@@ -18327,7 +18327,7 @@
           <p:cNvPr id="133" name="line-199">
             <a:extLst xmlns:a="http://schemas.openxmlformats.org/drawingml/2006/main">
               <a:ext uri="{FF2B5EF4-FFF2-40B4-BE49-F238E27FC236}">
-                <a16:creationId xmlns:a16="http://schemas.microsoft.com/office/drawing/2014/main" id="{F5B2AA58-F685-4CAC-91D8-04212DCF7C77}"/>
+                <a16:creationId xmlns:a16="http://schemas.microsoft.com/office/drawing/2014/main" id="{7DB08D12-F5FD-4C28-BD2D-6790C290FA72}"/>
               </a:ext>
             </a:extLst>
           </p:cNvPr>
@@ -18367,7 +18367,7 @@
           <p:cNvPr id="134" name="line-200">
             <a:extLst xmlns:a="http://schemas.openxmlformats.org/drawingml/2006/main">
               <a:ext uri="{FF2B5EF4-FFF2-40B4-BE49-F238E27FC236}">
-                <a16:creationId xmlns:a16="http://schemas.microsoft.com/office/drawing/2014/main" id="{DC995FA2-AFAE-4012-ABFA-B81E32B1AB74}"/>
+                <a16:creationId xmlns:a16="http://schemas.microsoft.com/office/drawing/2014/main" id="{9E21614D-93C9-45F1-B14F-574AEAF4419B}"/>
               </a:ext>
             </a:extLst>
           </p:cNvPr>
@@ -18407,7 +18407,7 @@
           <p:cNvPr id="135" name="line-201">
             <a:extLst xmlns:a="http://schemas.openxmlformats.org/drawingml/2006/main">
               <a:ext uri="{FF2B5EF4-FFF2-40B4-BE49-F238E27FC236}">
-                <a16:creationId xmlns:a16="http://schemas.microsoft.com/office/drawing/2014/main" id="{28B10788-089A-4C6C-9590-E76447706681}"/>
+                <a16:creationId xmlns:a16="http://schemas.microsoft.com/office/drawing/2014/main" id="{049B0BC3-FB87-43BF-B93D-A20AD1C2751E}"/>
               </a:ext>
             </a:extLst>
           </p:cNvPr>
@@ -18447,7 +18447,7 @@
           <p:cNvPr id="136" name="line-202">
             <a:extLst xmlns:a="http://schemas.openxmlformats.org/drawingml/2006/main">
               <a:ext uri="{FF2B5EF4-FFF2-40B4-BE49-F238E27FC236}">
-                <a16:creationId xmlns:a16="http://schemas.microsoft.com/office/drawing/2014/main" id="{05304D3E-EA3B-4154-8AB8-D83EE724877C}"/>
+                <a16:creationId xmlns:a16="http://schemas.microsoft.com/office/drawing/2014/main" id="{B9A5C433-D047-4143-8DFF-45F007A08399}"/>
               </a:ext>
             </a:extLst>
           </p:cNvPr>
@@ -18487,7 +18487,7 @@
           <p:cNvPr id="137" name="line-203">
             <a:extLst xmlns:a="http://schemas.openxmlformats.org/drawingml/2006/main">
               <a:ext uri="{FF2B5EF4-FFF2-40B4-BE49-F238E27FC236}">
-                <a16:creationId xmlns:a16="http://schemas.microsoft.com/office/drawing/2014/main" id="{F5C101C7-6A83-4F35-B5DB-18CA2509F675}"/>
+                <a16:creationId xmlns:a16="http://schemas.microsoft.com/office/drawing/2014/main" id="{C9C5EEE6-41CC-48D7-86B8-1C5C0D99EBA9}"/>
               </a:ext>
             </a:extLst>
           </p:cNvPr>
@@ -18527,7 +18527,7 @@
           <p:cNvPr id="138" name="line-204">
             <a:extLst xmlns:a="http://schemas.openxmlformats.org/drawingml/2006/main">
               <a:ext uri="{FF2B5EF4-FFF2-40B4-BE49-F238E27FC236}">
-                <a16:creationId xmlns:a16="http://schemas.microsoft.com/office/drawing/2014/main" id="{EFAABFCB-5FEB-4CED-8DF9-F81EC18235D6}"/>
+                <a16:creationId xmlns:a16="http://schemas.microsoft.com/office/drawing/2014/main" id="{E05EC34F-0434-401F-89AC-8A15DC4777B8}"/>
               </a:ext>
             </a:extLst>
           </p:cNvPr>
@@ -18567,7 +18567,7 @@
           <p:cNvPr id="139" name="line-205">
             <a:extLst xmlns:a="http://schemas.openxmlformats.org/drawingml/2006/main">
               <a:ext uri="{FF2B5EF4-FFF2-40B4-BE49-F238E27FC236}">
-                <a16:creationId xmlns:a16="http://schemas.microsoft.com/office/drawing/2014/main" id="{AE81712C-3CD9-4CC0-945E-D0AC8DA2F54C}"/>
+                <a16:creationId xmlns:a16="http://schemas.microsoft.com/office/drawing/2014/main" id="{2300E986-FD24-4E82-AAE1-0388C57C70DF}"/>
               </a:ext>
             </a:extLst>
           </p:cNvPr>
@@ -18607,7 +18607,7 @@
           <p:cNvPr id="140" name="line-206">
             <a:extLst xmlns:a="http://schemas.openxmlformats.org/drawingml/2006/main">
               <a:ext uri="{FF2B5EF4-FFF2-40B4-BE49-F238E27FC236}">
-                <a16:creationId xmlns:a16="http://schemas.microsoft.com/office/drawing/2014/main" id="{13D72E98-C1F9-4DDF-B2E3-96003650CA8C}"/>
+                <a16:creationId xmlns:a16="http://schemas.microsoft.com/office/drawing/2014/main" id="{04CBD479-30A8-409C-862C-B24B7946B174}"/>
               </a:ext>
             </a:extLst>
           </p:cNvPr>
@@ -18647,7 +18647,7 @@
           <p:cNvPr id="141" name="line-207">
             <a:extLst xmlns:a="http://schemas.openxmlformats.org/drawingml/2006/main">
               <a:ext uri="{FF2B5EF4-FFF2-40B4-BE49-F238E27FC236}">
-                <a16:creationId xmlns:a16="http://schemas.microsoft.com/office/drawing/2014/main" id="{C09BA28E-A805-4904-AE77-F741F4E03E6D}"/>
+                <a16:creationId xmlns:a16="http://schemas.microsoft.com/office/drawing/2014/main" id="{4A6B7996-4E88-45A1-8F65-4CBAFED2B0D4}"/>
               </a:ext>
             </a:extLst>
           </p:cNvPr>
@@ -18687,7 +18687,7 @@
           <p:cNvPr id="142" name="line-208">
             <a:extLst xmlns:a="http://schemas.openxmlformats.org/drawingml/2006/main">
               <a:ext uri="{FF2B5EF4-FFF2-40B4-BE49-F238E27FC236}">
-                <a16:creationId xmlns:a16="http://schemas.microsoft.com/office/drawing/2014/main" id="{A89A91AC-4865-428B-82FE-ECB93810DAB6}"/>
+                <a16:creationId xmlns:a16="http://schemas.microsoft.com/office/drawing/2014/main" id="{D2A5959F-0AE0-452C-8A31-3153C7B4DFC8}"/>
               </a:ext>
             </a:extLst>
           </p:cNvPr>
@@ -18727,7 +18727,7 @@
           <p:cNvPr id="143" name="line-209">
             <a:extLst xmlns:a="http://schemas.openxmlformats.org/drawingml/2006/main">
               <a:ext uri="{FF2B5EF4-FFF2-40B4-BE49-F238E27FC236}">
-                <a16:creationId xmlns:a16="http://schemas.microsoft.com/office/drawing/2014/main" id="{972E5877-8B93-4050-BA79-50F09AF652A6}"/>
+                <a16:creationId xmlns:a16="http://schemas.microsoft.com/office/drawing/2014/main" id="{7D928470-1A28-4155-AE46-86D27959B91B}"/>
               </a:ext>
             </a:extLst>
           </p:cNvPr>
@@ -18767,7 +18767,7 @@
           <p:cNvPr id="144" name="line-210">
             <a:extLst xmlns:a="http://schemas.openxmlformats.org/drawingml/2006/main">
               <a:ext uri="{FF2B5EF4-FFF2-40B4-BE49-F238E27FC236}">
-                <a16:creationId xmlns:a16="http://schemas.microsoft.com/office/drawing/2014/main" id="{306EFF06-CA9B-43CE-B832-D66B1657D7E4}"/>
+                <a16:creationId xmlns:a16="http://schemas.microsoft.com/office/drawing/2014/main" id="{D0D72FF0-A3F4-4C9A-AAE0-340ED4788C2B}"/>
               </a:ext>
             </a:extLst>
           </p:cNvPr>
@@ -18807,7 +18807,7 @@
           <p:cNvPr id="145" name="line-211">
             <a:extLst xmlns:a="http://schemas.openxmlformats.org/drawingml/2006/main">
               <a:ext uri="{FF2B5EF4-FFF2-40B4-BE49-F238E27FC236}">
-                <a16:creationId xmlns:a16="http://schemas.microsoft.com/office/drawing/2014/main" id="{E644E164-122D-4A7C-9C0F-91C5C20F053C}"/>
+                <a16:creationId xmlns:a16="http://schemas.microsoft.com/office/drawing/2014/main" id="{EF6FAAFF-65F4-4EFC-9AB7-101C3E46D4C0}"/>
               </a:ext>
             </a:extLst>
           </p:cNvPr>
@@ -18847,7 +18847,7 @@
           <p:cNvPr id="146" name="line-212">
             <a:extLst xmlns:a="http://schemas.openxmlformats.org/drawingml/2006/main">
               <a:ext uri="{FF2B5EF4-FFF2-40B4-BE49-F238E27FC236}">
-                <a16:creationId xmlns:a16="http://schemas.microsoft.com/office/drawing/2014/main" id="{F0D433D1-04B2-41DC-AC00-796A73CF1D30}"/>
+                <a16:creationId xmlns:a16="http://schemas.microsoft.com/office/drawing/2014/main" id="{1573CB13-AA8A-4DB8-B95B-85D33B841B09}"/>
               </a:ext>
             </a:extLst>
           </p:cNvPr>
@@ -18887,7 +18887,7 @@
           <p:cNvPr id="147" name="line-213">
             <a:extLst xmlns:a="http://schemas.openxmlformats.org/drawingml/2006/main">
               <a:ext uri="{FF2B5EF4-FFF2-40B4-BE49-F238E27FC236}">
-                <a16:creationId xmlns:a16="http://schemas.microsoft.com/office/drawing/2014/main" id="{4CAE180B-9313-4F27-8D17-138489750AC3}"/>
+                <a16:creationId xmlns:a16="http://schemas.microsoft.com/office/drawing/2014/main" id="{2BC0DE26-9CF9-4EC7-A867-BA6AB9D467F4}"/>
               </a:ext>
             </a:extLst>
           </p:cNvPr>
@@ -18927,7 +18927,7 @@
           <p:cNvPr id="148" name="line-214">
             <a:extLst xmlns:a="http://schemas.openxmlformats.org/drawingml/2006/main">
               <a:ext uri="{FF2B5EF4-FFF2-40B4-BE49-F238E27FC236}">
-                <a16:creationId xmlns:a16="http://schemas.microsoft.com/office/drawing/2014/main" id="{DC374D6F-97FE-4135-833E-5D25DDF1BA19}"/>
+                <a16:creationId xmlns:a16="http://schemas.microsoft.com/office/drawing/2014/main" id="{89A77F6C-3098-4432-B288-4FC927C37A2F}"/>
               </a:ext>
             </a:extLst>
           </p:cNvPr>
@@ -18967,7 +18967,7 @@
           <p:cNvPr id="149" name="line-215">
             <a:extLst xmlns:a="http://schemas.openxmlformats.org/drawingml/2006/main">
               <a:ext uri="{FF2B5EF4-FFF2-40B4-BE49-F238E27FC236}">
-                <a16:creationId xmlns:a16="http://schemas.microsoft.com/office/drawing/2014/main" id="{55BFE928-EBFD-40D2-BB45-29AE41696C41}"/>
+                <a16:creationId xmlns:a16="http://schemas.microsoft.com/office/drawing/2014/main" id="{BB9E51EF-698F-408B-8175-BA01B6C30EDD}"/>
               </a:ext>
             </a:extLst>
           </p:cNvPr>
@@ -19007,7 +19007,7 @@
           <p:cNvPr id="150" name="line-216">
             <a:extLst xmlns:a="http://schemas.openxmlformats.org/drawingml/2006/main">
               <a:ext uri="{FF2B5EF4-FFF2-40B4-BE49-F238E27FC236}">
-                <a16:creationId xmlns:a16="http://schemas.microsoft.com/office/drawing/2014/main" id="{59244859-AF62-492E-95F5-93D1EEB24220}"/>
+                <a16:creationId xmlns:a16="http://schemas.microsoft.com/office/drawing/2014/main" id="{E1F71D3B-F903-458C-8E92-3060545129C8}"/>
               </a:ext>
             </a:extLst>
           </p:cNvPr>
@@ -19047,7 +19047,7 @@
           <p:cNvPr id="151" name="line-217">
             <a:extLst xmlns:a="http://schemas.openxmlformats.org/drawingml/2006/main">
               <a:ext uri="{FF2B5EF4-FFF2-40B4-BE49-F238E27FC236}">
-                <a16:creationId xmlns:a16="http://schemas.microsoft.com/office/drawing/2014/main" id="{0B6378CD-35FE-4111-B9E1-1D014B00CAB8}"/>
+                <a16:creationId xmlns:a16="http://schemas.microsoft.com/office/drawing/2014/main" id="{3E9F129F-E45A-4F4A-BE5B-33B1E2A76EAD}"/>
               </a:ext>
             </a:extLst>
           </p:cNvPr>
@@ -19087,7 +19087,7 @@
           <p:cNvPr id="152" name="line-218">
             <a:extLst xmlns:a="http://schemas.openxmlformats.org/drawingml/2006/main">
               <a:ext uri="{FF2B5EF4-FFF2-40B4-BE49-F238E27FC236}">
-                <a16:creationId xmlns:a16="http://schemas.microsoft.com/office/drawing/2014/main" id="{716F0648-08EA-4254-A2C5-17028B9D1BDF}"/>
+                <a16:creationId xmlns:a16="http://schemas.microsoft.com/office/drawing/2014/main" id="{BBAD9129-854A-4576-A193-B95010026319}"/>
               </a:ext>
             </a:extLst>
           </p:cNvPr>
@@ -19127,7 +19127,7 @@
           <p:cNvPr id="153" name="line-219">
             <a:extLst xmlns:a="http://schemas.openxmlformats.org/drawingml/2006/main">
               <a:ext uri="{FF2B5EF4-FFF2-40B4-BE49-F238E27FC236}">
-                <a16:creationId xmlns:a16="http://schemas.microsoft.com/office/drawing/2014/main" id="{94C92BB9-1EE6-406F-AEB3-42917A00E184}"/>
+                <a16:creationId xmlns:a16="http://schemas.microsoft.com/office/drawing/2014/main" id="{1C3E26AE-42EA-48EC-B780-B18F59983E27}"/>
               </a:ext>
             </a:extLst>
           </p:cNvPr>
@@ -19167,7 +19167,7 @@
           <p:cNvPr id="154" name="line-220">
             <a:extLst xmlns:a="http://schemas.openxmlformats.org/drawingml/2006/main">
               <a:ext uri="{FF2B5EF4-FFF2-40B4-BE49-F238E27FC236}">
-                <a16:creationId xmlns:a16="http://schemas.microsoft.com/office/drawing/2014/main" id="{241FE18B-9A1A-455A-BF35-8A57143E2B9D}"/>
+                <a16:creationId xmlns:a16="http://schemas.microsoft.com/office/drawing/2014/main" id="{053B3F1D-18A9-4944-9730-C1FEC268C7FD}"/>
               </a:ext>
             </a:extLst>
           </p:cNvPr>
@@ -19207,7 +19207,7 @@
           <p:cNvPr id="155" name="line-221">
             <a:extLst xmlns:a="http://schemas.openxmlformats.org/drawingml/2006/main">
               <a:ext uri="{FF2B5EF4-FFF2-40B4-BE49-F238E27FC236}">
-                <a16:creationId xmlns:a16="http://schemas.microsoft.com/office/drawing/2014/main" id="{DAF02C16-68E4-4AEF-B261-55EA25C47659}"/>
+                <a16:creationId xmlns:a16="http://schemas.microsoft.com/office/drawing/2014/main" id="{61CE9807-7670-444C-AEDD-4DDA655A58FE}"/>
               </a:ext>
             </a:extLst>
           </p:cNvPr>
@@ -19247,7 +19247,7 @@
           <p:cNvPr id="156" name="line-222">
             <a:extLst xmlns:a="http://schemas.openxmlformats.org/drawingml/2006/main">
               <a:ext uri="{FF2B5EF4-FFF2-40B4-BE49-F238E27FC236}">
-                <a16:creationId xmlns:a16="http://schemas.microsoft.com/office/drawing/2014/main" id="{350EB292-4961-4AA3-AC54-B11B79BA7461}"/>
+                <a16:creationId xmlns:a16="http://schemas.microsoft.com/office/drawing/2014/main" id="{D6567370-675D-418F-8BF7-B8C5A4DFD43B}"/>
               </a:ext>
             </a:extLst>
           </p:cNvPr>
@@ -19287,7 +19287,7 @@
           <p:cNvPr id="157" name="line-223">
             <a:extLst xmlns:a="http://schemas.openxmlformats.org/drawingml/2006/main">
               <a:ext uri="{FF2B5EF4-FFF2-40B4-BE49-F238E27FC236}">
-                <a16:creationId xmlns:a16="http://schemas.microsoft.com/office/drawing/2014/main" id="{F8B6AE43-FDDD-418C-8A9D-5B0EDA42C77B}"/>
+                <a16:creationId xmlns:a16="http://schemas.microsoft.com/office/drawing/2014/main" id="{37E037EE-3832-4503-AAA8-A54F70C5EC73}"/>
               </a:ext>
             </a:extLst>
           </p:cNvPr>
@@ -19327,7 +19327,7 @@
           <p:cNvPr id="158" name="line-224">
             <a:extLst xmlns:a="http://schemas.openxmlformats.org/drawingml/2006/main">
               <a:ext uri="{FF2B5EF4-FFF2-40B4-BE49-F238E27FC236}">
-                <a16:creationId xmlns:a16="http://schemas.microsoft.com/office/drawing/2014/main" id="{01A37275-A6C0-4FBF-A1D3-45A199E4169D}"/>
+                <a16:creationId xmlns:a16="http://schemas.microsoft.com/office/drawing/2014/main" id="{3D7F8875-23A0-4D2B-86D9-EBAE410A81B5}"/>
               </a:ext>
             </a:extLst>
           </p:cNvPr>
@@ -19367,7 +19367,7 @@
           <p:cNvPr id="159" name="line-225">
             <a:extLst xmlns:a="http://schemas.openxmlformats.org/drawingml/2006/main">
               <a:ext uri="{FF2B5EF4-FFF2-40B4-BE49-F238E27FC236}">
-                <a16:creationId xmlns:a16="http://schemas.microsoft.com/office/drawing/2014/main" id="{7D09B15C-2D7E-4A85-BB8B-BFDDB569C07D}"/>
+                <a16:creationId xmlns:a16="http://schemas.microsoft.com/office/drawing/2014/main" id="{AF498AA9-D025-481A-A5D3-3F9F9BA8B6E8}"/>
               </a:ext>
             </a:extLst>
           </p:cNvPr>
@@ -19407,7 +19407,7 @@
           <p:cNvPr id="160" name="line-226">
             <a:extLst xmlns:a="http://schemas.openxmlformats.org/drawingml/2006/main">
               <a:ext uri="{FF2B5EF4-FFF2-40B4-BE49-F238E27FC236}">
-                <a16:creationId xmlns:a16="http://schemas.microsoft.com/office/drawing/2014/main" id="{19E56639-2C58-425E-BCD9-317532BD97F0}"/>
+                <a16:creationId xmlns:a16="http://schemas.microsoft.com/office/drawing/2014/main" id="{27298165-F674-45F5-803A-09BC2E3EA633}"/>
               </a:ext>
             </a:extLst>
           </p:cNvPr>
@@ -19447,7 +19447,7 @@
           <p:cNvPr id="161" name="line-227">
             <a:extLst xmlns:a="http://schemas.openxmlformats.org/drawingml/2006/main">
               <a:ext uri="{FF2B5EF4-FFF2-40B4-BE49-F238E27FC236}">
-                <a16:creationId xmlns:a16="http://schemas.microsoft.com/office/drawing/2014/main" id="{9844A19D-6EC7-4CF0-BAE9-6AF570E4A8BB}"/>
+                <a16:creationId xmlns:a16="http://schemas.microsoft.com/office/drawing/2014/main" id="{7732B640-A6E1-4310-86F7-FE92A3D33FB6}"/>
               </a:ext>
             </a:extLst>
           </p:cNvPr>
@@ -19487,7 +19487,7 @@
           <p:cNvPr id="162" name="line-228">
             <a:extLst xmlns:a="http://schemas.openxmlformats.org/drawingml/2006/main">
               <a:ext uri="{FF2B5EF4-FFF2-40B4-BE49-F238E27FC236}">
-                <a16:creationId xmlns:a16="http://schemas.microsoft.com/office/drawing/2014/main" id="{30D2DAAA-1675-4624-A1DC-81AD6D882BE6}"/>
+                <a16:creationId xmlns:a16="http://schemas.microsoft.com/office/drawing/2014/main" id="{5B3FD66C-55A8-44CC-9ADF-96991DB3D42F}"/>
               </a:ext>
             </a:extLst>
           </p:cNvPr>
@@ -19527,7 +19527,7 @@
           <p:cNvPr id="163" name="line-229">
             <a:extLst xmlns:a="http://schemas.openxmlformats.org/drawingml/2006/main">
               <a:ext uri="{FF2B5EF4-FFF2-40B4-BE49-F238E27FC236}">
-                <a16:creationId xmlns:a16="http://schemas.microsoft.com/office/drawing/2014/main" id="{CE91B54D-1378-40BD-B63B-D0FB803751EA}"/>
+                <a16:creationId xmlns:a16="http://schemas.microsoft.com/office/drawing/2014/main" id="{6CDB4DEB-765A-42E2-91E1-AB6177CD123B}"/>
               </a:ext>
             </a:extLst>
           </p:cNvPr>
@@ -19567,7 +19567,7 @@
           <p:cNvPr id="164" name="line-230">
             <a:extLst xmlns:a="http://schemas.openxmlformats.org/drawingml/2006/main">
               <a:ext uri="{FF2B5EF4-FFF2-40B4-BE49-F238E27FC236}">
-                <a16:creationId xmlns:a16="http://schemas.microsoft.com/office/drawing/2014/main" id="{07B4FE80-E11B-4CEC-8C43-ED5491B45B27}"/>
+                <a16:creationId xmlns:a16="http://schemas.microsoft.com/office/drawing/2014/main" id="{4F4E3D1C-2995-4D2B-951D-5F5BF7389663}"/>
               </a:ext>
             </a:extLst>
           </p:cNvPr>
@@ -19607,7 +19607,7 @@
           <p:cNvPr id="165" name="line-231">
             <a:extLst xmlns:a="http://schemas.openxmlformats.org/drawingml/2006/main">
               <a:ext uri="{FF2B5EF4-FFF2-40B4-BE49-F238E27FC236}">
-                <a16:creationId xmlns:a16="http://schemas.microsoft.com/office/drawing/2014/main" id="{D48B4FC2-D996-4593-B079-DE295885D03B}"/>
+                <a16:creationId xmlns:a16="http://schemas.microsoft.com/office/drawing/2014/main" id="{2FA2C250-C476-4B70-B839-008CAD220481}"/>
               </a:ext>
             </a:extLst>
           </p:cNvPr>
@@ -19647,7 +19647,7 @@
           <p:cNvPr id="166" name="object-232">
             <a:extLst xmlns:a="http://schemas.openxmlformats.org/drawingml/2006/main">
               <a:ext uri="{FF2B5EF4-FFF2-40B4-BE49-F238E27FC236}">
-                <a16:creationId xmlns:a16="http://schemas.microsoft.com/office/drawing/2014/main" id="{DC47DBED-662A-4490-B6F6-E75490288670}"/>
+                <a16:creationId xmlns:a16="http://schemas.microsoft.com/office/drawing/2014/main" id="{29899058-A8F9-404C-8374-19EED4C674F7}"/>
               </a:ext>
             </a:extLst>
           </p:cNvPr>
@@ -19714,7 +19714,7 @@
           <p:cNvPr id="167" name="line-233">
             <a:extLst xmlns:a="http://schemas.openxmlformats.org/drawingml/2006/main">
               <a:ext uri="{FF2B5EF4-FFF2-40B4-BE49-F238E27FC236}">
-                <a16:creationId xmlns:a16="http://schemas.microsoft.com/office/drawing/2014/main" id="{BA8928D6-C368-4CC4-B5BB-A2B09C14B7CE}"/>
+                <a16:creationId xmlns:a16="http://schemas.microsoft.com/office/drawing/2014/main" id="{69C38CC8-1EEA-4150-851E-98A11B808E84}"/>
               </a:ext>
             </a:extLst>
           </p:cNvPr>
@@ -19754,7 +19754,7 @@
           <p:cNvPr id="168" name="object-234">
             <a:extLst xmlns:a="http://schemas.openxmlformats.org/drawingml/2006/main">
               <a:ext uri="{FF2B5EF4-FFF2-40B4-BE49-F238E27FC236}">
-                <a16:creationId xmlns:a16="http://schemas.microsoft.com/office/drawing/2014/main" id="{6BBAC818-4579-4D60-9C15-6144D97B765A}"/>
+                <a16:creationId xmlns:a16="http://schemas.microsoft.com/office/drawing/2014/main" id="{45D46253-518B-4128-89C8-81A79D062ABD}"/>
               </a:ext>
             </a:extLst>
           </p:cNvPr>
@@ -19821,7 +19821,7 @@
           <p:cNvPr id="169" name="line-235">
             <a:extLst xmlns:a="http://schemas.openxmlformats.org/drawingml/2006/main">
               <a:ext uri="{FF2B5EF4-FFF2-40B4-BE49-F238E27FC236}">
-                <a16:creationId xmlns:a16="http://schemas.microsoft.com/office/drawing/2014/main" id="{CCAC8A20-312D-439F-A241-57CB7084E700}"/>
+                <a16:creationId xmlns:a16="http://schemas.microsoft.com/office/drawing/2014/main" id="{2EDE9A67-A9D2-4435-B189-089E10322AB2}"/>
               </a:ext>
             </a:extLst>
           </p:cNvPr>
@@ -19861,7 +19861,7 @@
           <p:cNvPr id="170" name="object-236">
             <a:extLst xmlns:a="http://schemas.openxmlformats.org/drawingml/2006/main">
               <a:ext uri="{FF2B5EF4-FFF2-40B4-BE49-F238E27FC236}">
-                <a16:creationId xmlns:a16="http://schemas.microsoft.com/office/drawing/2014/main" id="{3FD4C0F9-6DE0-4024-8D34-A2FE12386F37}"/>
+                <a16:creationId xmlns:a16="http://schemas.microsoft.com/office/drawing/2014/main" id="{8461E15C-B374-444D-9625-58BF97CEF51B}"/>
               </a:ext>
             </a:extLst>
           </p:cNvPr>
@@ -19928,7 +19928,7 @@
           <p:cNvPr id="171" name="line-237">
             <a:extLst xmlns:a="http://schemas.openxmlformats.org/drawingml/2006/main">
               <a:ext uri="{FF2B5EF4-FFF2-40B4-BE49-F238E27FC236}">
-                <a16:creationId xmlns:a16="http://schemas.microsoft.com/office/drawing/2014/main" id="{D585CE08-83F8-45A2-AB12-76AFFEA5146D}"/>
+                <a16:creationId xmlns:a16="http://schemas.microsoft.com/office/drawing/2014/main" id="{99CFF30A-301F-4575-99B2-74C0E37EDD49}"/>
               </a:ext>
             </a:extLst>
           </p:cNvPr>
@@ -19968,7 +19968,7 @@
           <p:cNvPr id="172" name="object-238">
             <a:extLst xmlns:a="http://schemas.openxmlformats.org/drawingml/2006/main">
               <a:ext uri="{FF2B5EF4-FFF2-40B4-BE49-F238E27FC236}">
-                <a16:creationId xmlns:a16="http://schemas.microsoft.com/office/drawing/2014/main" id="{D48C4D33-B1CF-4765-9D3A-2ABF0419CE63}"/>
+                <a16:creationId xmlns:a16="http://schemas.microsoft.com/office/drawing/2014/main" id="{7DD45218-41C3-4BFE-A56D-C2D1C55FEEEF}"/>
               </a:ext>
             </a:extLst>
           </p:cNvPr>
@@ -20035,7 +20035,7 @@
           <p:cNvPr id="173" name="line-239">
             <a:extLst xmlns:a="http://schemas.openxmlformats.org/drawingml/2006/main">
               <a:ext uri="{FF2B5EF4-FFF2-40B4-BE49-F238E27FC236}">
-                <a16:creationId xmlns:a16="http://schemas.microsoft.com/office/drawing/2014/main" id="{47F78632-0B16-4072-A464-24234DFF98EA}"/>
+                <a16:creationId xmlns:a16="http://schemas.microsoft.com/office/drawing/2014/main" id="{819ED599-F3CA-49FD-90CA-E6D51AAFF2B9}"/>
               </a:ext>
             </a:extLst>
           </p:cNvPr>
@@ -20075,7 +20075,7 @@
           <p:cNvPr id="174" name="object-240">
             <a:extLst xmlns:a="http://schemas.openxmlformats.org/drawingml/2006/main">
               <a:ext uri="{FF2B5EF4-FFF2-40B4-BE49-F238E27FC236}">
-                <a16:creationId xmlns:a16="http://schemas.microsoft.com/office/drawing/2014/main" id="{9F6BC2E8-4024-4982-A55A-ED8AEE5EC243}"/>
+                <a16:creationId xmlns:a16="http://schemas.microsoft.com/office/drawing/2014/main" id="{89955126-2C4E-4EFE-93A2-43290DD01A2E}"/>
               </a:ext>
             </a:extLst>
           </p:cNvPr>
@@ -20142,7 +20142,7 @@
           <p:cNvPr id="175" name="line-241">
             <a:extLst xmlns:a="http://schemas.openxmlformats.org/drawingml/2006/main">
               <a:ext uri="{FF2B5EF4-FFF2-40B4-BE49-F238E27FC236}">
-                <a16:creationId xmlns:a16="http://schemas.microsoft.com/office/drawing/2014/main" id="{953D2AD1-B059-4DE3-BE64-C8117D2779A5}"/>
+                <a16:creationId xmlns:a16="http://schemas.microsoft.com/office/drawing/2014/main" id="{6C004631-56D6-4AC8-8C19-BB6AB2CBD7A9}"/>
               </a:ext>
             </a:extLst>
           </p:cNvPr>
@@ -20182,7 +20182,7 @@
           <p:cNvPr id="176" name="line-242">
             <a:extLst xmlns:a="http://schemas.openxmlformats.org/drawingml/2006/main">
               <a:ext uri="{FF2B5EF4-FFF2-40B4-BE49-F238E27FC236}">
-                <a16:creationId xmlns:a16="http://schemas.microsoft.com/office/drawing/2014/main" id="{89CF6D3A-60C4-4FF9-BF14-EFAC3D106D4A}"/>
+                <a16:creationId xmlns:a16="http://schemas.microsoft.com/office/drawing/2014/main" id="{3A35B25A-6280-4D8A-84A4-D79229AA64AF}"/>
               </a:ext>
             </a:extLst>
           </p:cNvPr>
@@ -20222,7 +20222,7 @@
           <p:cNvPr id="177" name="line-243">
             <a:extLst xmlns:a="http://schemas.openxmlformats.org/drawingml/2006/main">
               <a:ext uri="{FF2B5EF4-FFF2-40B4-BE49-F238E27FC236}">
-                <a16:creationId xmlns:a16="http://schemas.microsoft.com/office/drawing/2014/main" id="{0084ED3C-B5B4-417D-A42A-B3BA271ECC8F}"/>
+                <a16:creationId xmlns:a16="http://schemas.microsoft.com/office/drawing/2014/main" id="{25CA3AF8-D676-48D5-9817-0FAB1377F845}"/>
               </a:ext>
             </a:extLst>
           </p:cNvPr>
@@ -20262,7 +20262,7 @@
           <p:cNvPr id="178" name="line-244">
             <a:extLst xmlns:a="http://schemas.openxmlformats.org/drawingml/2006/main">
               <a:ext uri="{FF2B5EF4-FFF2-40B4-BE49-F238E27FC236}">
-                <a16:creationId xmlns:a16="http://schemas.microsoft.com/office/drawing/2014/main" id="{B9122458-2A24-4330-9E5D-AE1EABEFD498}"/>
+                <a16:creationId xmlns:a16="http://schemas.microsoft.com/office/drawing/2014/main" id="{10CC55E2-D5D9-4104-87BC-59E8DE8AB5D4}"/>
               </a:ext>
             </a:extLst>
           </p:cNvPr>
@@ -20302,7 +20302,7 @@
           <p:cNvPr id="179" name="line-245">
             <a:extLst xmlns:a="http://schemas.openxmlformats.org/drawingml/2006/main">
               <a:ext uri="{FF2B5EF4-FFF2-40B4-BE49-F238E27FC236}">
-                <a16:creationId xmlns:a16="http://schemas.microsoft.com/office/drawing/2014/main" id="{DC23FC6C-E2B2-4680-B476-A82DE7461BE1}"/>
+                <a16:creationId xmlns:a16="http://schemas.microsoft.com/office/drawing/2014/main" id="{062AA828-D715-4CDE-8001-DC5C62FE2F38}"/>
               </a:ext>
             </a:extLst>
           </p:cNvPr>
@@ -20342,7 +20342,7 @@
           <p:cNvPr id="180" name="line-246">
             <a:extLst xmlns:a="http://schemas.openxmlformats.org/drawingml/2006/main">
               <a:ext uri="{FF2B5EF4-FFF2-40B4-BE49-F238E27FC236}">
-                <a16:creationId xmlns:a16="http://schemas.microsoft.com/office/drawing/2014/main" id="{066061A7-3BEE-4C25-B3F7-928C705D3FB6}"/>
+                <a16:creationId xmlns:a16="http://schemas.microsoft.com/office/drawing/2014/main" id="{751F7A29-CABB-434C-95C2-9F7F5FB6A06C}"/>
               </a:ext>
             </a:extLst>
           </p:cNvPr>
@@ -20382,7 +20382,7 @@
           <p:cNvPr id="181" name="line-247">
             <a:extLst xmlns:a="http://schemas.openxmlformats.org/drawingml/2006/main">
               <a:ext uri="{FF2B5EF4-FFF2-40B4-BE49-F238E27FC236}">
-                <a16:creationId xmlns:a16="http://schemas.microsoft.com/office/drawing/2014/main" id="{CFAFB64F-2625-413E-BC24-E7D86B172088}"/>
+                <a16:creationId xmlns:a16="http://schemas.microsoft.com/office/drawing/2014/main" id="{DC849515-7606-43A0-8245-14A0F3EA7E37}"/>
               </a:ext>
             </a:extLst>
           </p:cNvPr>
@@ -20422,7 +20422,7 @@
           <p:cNvPr id="182" name="line-248">
             <a:extLst xmlns:a="http://schemas.openxmlformats.org/drawingml/2006/main">
               <a:ext uri="{FF2B5EF4-FFF2-40B4-BE49-F238E27FC236}">
-                <a16:creationId xmlns:a16="http://schemas.microsoft.com/office/drawing/2014/main" id="{62CEB10C-4DA2-4212-B674-3BCEE11B87ED}"/>
+                <a16:creationId xmlns:a16="http://schemas.microsoft.com/office/drawing/2014/main" id="{C832D06E-9C71-4B6E-BB56-B20274F93037}"/>
               </a:ext>
             </a:extLst>
           </p:cNvPr>
@@ -20462,7 +20462,7 @@
           <p:cNvPr id="183" name="object-249">
             <a:extLst xmlns:a="http://schemas.openxmlformats.org/drawingml/2006/main">
               <a:ext uri="{FF2B5EF4-FFF2-40B4-BE49-F238E27FC236}">
-                <a16:creationId xmlns:a16="http://schemas.microsoft.com/office/drawing/2014/main" id="{1D63F3B0-FFA2-4437-9420-F4414C281FF9}"/>
+                <a16:creationId xmlns:a16="http://schemas.microsoft.com/office/drawing/2014/main" id="{E0793A36-B188-47A8-A1D7-D2F14050C82A}"/>
               </a:ext>
             </a:extLst>
           </p:cNvPr>
@@ -20529,7 +20529,7 @@
           <p:cNvPr id="184" name="reveal1-line-250">
             <a:extLst xmlns:a="http://schemas.openxmlformats.org/drawingml/2006/main">
               <a:ext uri="{FF2B5EF4-FFF2-40B4-BE49-F238E27FC236}">
-                <a16:creationId xmlns:a16="http://schemas.microsoft.com/office/drawing/2014/main" id="{83B1200C-1173-4FAC-B975-173D9C0BC8AB}"/>
+                <a16:creationId xmlns:a16="http://schemas.microsoft.com/office/drawing/2014/main" id="{FE985F75-D230-4095-8528-1A2F4B260F0B}"/>
               </a:ext>
             </a:extLst>
           </p:cNvPr>
@@ -20569,7 +20569,7 @@
           <p:cNvPr id="185" name="reveal1-line-251">
             <a:extLst xmlns:a="http://schemas.openxmlformats.org/drawingml/2006/main">
               <a:ext uri="{FF2B5EF4-FFF2-40B4-BE49-F238E27FC236}">
-                <a16:creationId xmlns:a16="http://schemas.microsoft.com/office/drawing/2014/main" id="{31C4AC68-7B2A-4B6E-AA85-DC3B202D5CC5}"/>
+                <a16:creationId xmlns:a16="http://schemas.microsoft.com/office/drawing/2014/main" id="{8B83E989-6092-46EE-8260-78C3B67977B5}"/>
               </a:ext>
             </a:extLst>
           </p:cNvPr>
@@ -20609,7 +20609,7 @@
           <p:cNvPr id="186" name="reveal1-line-252">
             <a:extLst xmlns:a="http://schemas.openxmlformats.org/drawingml/2006/main">
               <a:ext uri="{FF2B5EF4-FFF2-40B4-BE49-F238E27FC236}">
-                <a16:creationId xmlns:a16="http://schemas.microsoft.com/office/drawing/2014/main" id="{4B157877-347C-47AE-BF0E-74A48DA7E74F}"/>
+                <a16:creationId xmlns:a16="http://schemas.microsoft.com/office/drawing/2014/main" id="{92167BA5-52DE-4CFE-B392-52D125CE3751}"/>
               </a:ext>
             </a:extLst>
           </p:cNvPr>
@@ -20649,7 +20649,7 @@
           <p:cNvPr id="187" name="reveal1-line-253">
             <a:extLst xmlns:a="http://schemas.openxmlformats.org/drawingml/2006/main">
               <a:ext uri="{FF2B5EF4-FFF2-40B4-BE49-F238E27FC236}">
-                <a16:creationId xmlns:a16="http://schemas.microsoft.com/office/drawing/2014/main" id="{71315924-E02B-4F5E-B24D-82CC7748EBEC}"/>
+                <a16:creationId xmlns:a16="http://schemas.microsoft.com/office/drawing/2014/main" id="{F58E2A66-BEB0-4695-BC72-F2FE73B448E6}"/>
               </a:ext>
             </a:extLst>
           </p:cNvPr>
@@ -20689,7 +20689,7 @@
           <p:cNvPr id="188" name="reveal1-line-254">
             <a:extLst xmlns:a="http://schemas.openxmlformats.org/drawingml/2006/main">
               <a:ext uri="{FF2B5EF4-FFF2-40B4-BE49-F238E27FC236}">
-                <a16:creationId xmlns:a16="http://schemas.microsoft.com/office/drawing/2014/main" id="{160C6EB3-DC44-4F48-ABFC-A7219980E25E}"/>
+                <a16:creationId xmlns:a16="http://schemas.microsoft.com/office/drawing/2014/main" id="{9B2CC44E-E374-4D73-A0AF-93F3FD34C5B5}"/>
               </a:ext>
             </a:extLst>
           </p:cNvPr>
@@ -20729,7 +20729,7 @@
           <p:cNvPr id="189" name="reveal1-line-255">
             <a:extLst xmlns:a="http://schemas.openxmlformats.org/drawingml/2006/main">
               <a:ext uri="{FF2B5EF4-FFF2-40B4-BE49-F238E27FC236}">
-                <a16:creationId xmlns:a16="http://schemas.microsoft.com/office/drawing/2014/main" id="{7E915B23-4815-4658-AA82-F8409A86452D}"/>
+                <a16:creationId xmlns:a16="http://schemas.microsoft.com/office/drawing/2014/main" id="{277FB8D5-2F6D-4938-BA77-422896528C45}"/>
               </a:ext>
             </a:extLst>
           </p:cNvPr>
@@ -20769,7 +20769,7 @@
           <p:cNvPr id="190" name="reveal1-line-256">
             <a:extLst xmlns:a="http://schemas.openxmlformats.org/drawingml/2006/main">
               <a:ext uri="{FF2B5EF4-FFF2-40B4-BE49-F238E27FC236}">
-                <a16:creationId xmlns:a16="http://schemas.microsoft.com/office/drawing/2014/main" id="{541BE2D1-1C9A-4D94-B4F7-C452F59A6147}"/>
+                <a16:creationId xmlns:a16="http://schemas.microsoft.com/office/drawing/2014/main" id="{72E6CF17-8BBD-487B-9845-8BA6FCA30234}"/>
               </a:ext>
             </a:extLst>
           </p:cNvPr>
@@ -20809,7 +20809,7 @@
           <p:cNvPr id="191" name="reveal1-line-257">
             <a:extLst xmlns:a="http://schemas.openxmlformats.org/drawingml/2006/main">
               <a:ext uri="{FF2B5EF4-FFF2-40B4-BE49-F238E27FC236}">
-                <a16:creationId xmlns:a16="http://schemas.microsoft.com/office/drawing/2014/main" id="{5C7D26F5-E511-46D2-AAD2-EF3065696772}"/>
+                <a16:creationId xmlns:a16="http://schemas.microsoft.com/office/drawing/2014/main" id="{34B3EDF2-DD46-414F-84C6-3E9221B58369}"/>
               </a:ext>
             </a:extLst>
           </p:cNvPr>
@@ -20849,7 +20849,7 @@
           <p:cNvPr id="192" name="reveal1-object-258">
             <a:extLst xmlns:a="http://schemas.openxmlformats.org/drawingml/2006/main">
               <a:ext uri="{FF2B5EF4-FFF2-40B4-BE49-F238E27FC236}">
-                <a16:creationId xmlns:a16="http://schemas.microsoft.com/office/drawing/2014/main" id="{D42A1B95-0B70-4365-94E2-E6268284B733}"/>
+                <a16:creationId xmlns:a16="http://schemas.microsoft.com/office/drawing/2014/main" id="{3F8FEE3B-3D37-4142-A042-A14141903EDD}"/>
               </a:ext>
             </a:extLst>
           </p:cNvPr>
@@ -20916,7 +20916,7 @@
           <p:cNvPr id="193" name="reveal1-object-259">
             <a:extLst xmlns:a="http://schemas.openxmlformats.org/drawingml/2006/main">
               <a:ext uri="{FF2B5EF4-FFF2-40B4-BE49-F238E27FC236}">
-                <a16:creationId xmlns:a16="http://schemas.microsoft.com/office/drawing/2014/main" id="{F31F6952-18AD-4503-BB42-D743F2BE84D7}"/>
+                <a16:creationId xmlns:a16="http://schemas.microsoft.com/office/drawing/2014/main" id="{75BB3B36-73BD-44F0-8F82-7DE75E597703}"/>
               </a:ext>
             </a:extLst>
           </p:cNvPr>
@@ -20983,7 +20983,7 @@
           <p:cNvPr id="194" name="reveal1-line-260">
             <a:extLst xmlns:a="http://schemas.openxmlformats.org/drawingml/2006/main">
               <a:ext uri="{FF2B5EF4-FFF2-40B4-BE49-F238E27FC236}">
-                <a16:creationId xmlns:a16="http://schemas.microsoft.com/office/drawing/2014/main" id="{CFE28F63-F254-49A8-AD57-4776BC509959}"/>
+                <a16:creationId xmlns:a16="http://schemas.microsoft.com/office/drawing/2014/main" id="{9B6803C0-6880-4E3B-99C6-3E155CF2F7A4}"/>
               </a:ext>
             </a:extLst>
           </p:cNvPr>
@@ -21023,7 +21023,7 @@
           <p:cNvPr id="195" name="reveal1-object-261">
             <a:extLst xmlns:a="http://schemas.openxmlformats.org/drawingml/2006/main">
               <a:ext uri="{FF2B5EF4-FFF2-40B4-BE49-F238E27FC236}">
-                <a16:creationId xmlns:a16="http://schemas.microsoft.com/office/drawing/2014/main" id="{68220A9E-808A-492B-B794-F30FD060B454}"/>
+                <a16:creationId xmlns:a16="http://schemas.microsoft.com/office/drawing/2014/main" id="{499ADAF3-66F8-4892-BA4D-FD42E3BD8EB7}"/>
               </a:ext>
             </a:extLst>
           </p:cNvPr>
@@ -21090,7 +21090,7 @@
           <p:cNvPr id="196" name="reveal1-line-262">
             <a:extLst xmlns:a="http://schemas.openxmlformats.org/drawingml/2006/main">
               <a:ext uri="{FF2B5EF4-FFF2-40B4-BE49-F238E27FC236}">
-                <a16:creationId xmlns:a16="http://schemas.microsoft.com/office/drawing/2014/main" id="{325A95ED-5700-4BBD-BB18-3FE008DF3970}"/>
+                <a16:creationId xmlns:a16="http://schemas.microsoft.com/office/drawing/2014/main" id="{E01F41A6-7F69-4EDA-B98F-E3FF2C22BF5F}"/>
               </a:ext>
             </a:extLst>
           </p:cNvPr>
@@ -21130,7 +21130,7 @@
           <p:cNvPr id="197" name="reveal1-line-263">
             <a:extLst xmlns:a="http://schemas.openxmlformats.org/drawingml/2006/main">
               <a:ext uri="{FF2B5EF4-FFF2-40B4-BE49-F238E27FC236}">
-                <a16:creationId xmlns:a16="http://schemas.microsoft.com/office/drawing/2014/main" id="{381FA41F-D5AC-40DE-9528-F05076D4C8AC}"/>
+                <a16:creationId xmlns:a16="http://schemas.microsoft.com/office/drawing/2014/main" id="{73ED6275-1C13-4752-9732-7902C9EE3C48}"/>
               </a:ext>
             </a:extLst>
           </p:cNvPr>
@@ -21170,7 +21170,7 @@
           <p:cNvPr id="198" name="reveal1-object-264">
             <a:extLst xmlns:a="http://schemas.openxmlformats.org/drawingml/2006/main">
               <a:ext uri="{FF2B5EF4-FFF2-40B4-BE49-F238E27FC236}">
-                <a16:creationId xmlns:a16="http://schemas.microsoft.com/office/drawing/2014/main" id="{862E443D-8C9D-450C-95A5-EE9A4F6780E3}"/>
+                <a16:creationId xmlns:a16="http://schemas.microsoft.com/office/drawing/2014/main" id="{024C148F-9D7C-43B1-AB20-306F668CF45E}"/>
               </a:ext>
             </a:extLst>
           </p:cNvPr>
@@ -21237,7 +21237,7 @@
           <p:cNvPr id="199" name="reveal1-object-265">
             <a:extLst xmlns:a="http://schemas.openxmlformats.org/drawingml/2006/main">
               <a:ext uri="{FF2B5EF4-FFF2-40B4-BE49-F238E27FC236}">
-                <a16:creationId xmlns:a16="http://schemas.microsoft.com/office/drawing/2014/main" id="{4D035E11-8CA8-47A0-A1E8-1D6B07BCAEFD}"/>
+                <a16:creationId xmlns:a16="http://schemas.microsoft.com/office/drawing/2014/main" id="{9EC01E3B-D078-4A45-B2CB-BE580D0E08D6}"/>
               </a:ext>
             </a:extLst>
           </p:cNvPr>
@@ -21304,7 +21304,7 @@
           <p:cNvPr id="200" name="reveal1-line-266">
             <a:extLst xmlns:a="http://schemas.openxmlformats.org/drawingml/2006/main">
               <a:ext uri="{FF2B5EF4-FFF2-40B4-BE49-F238E27FC236}">
-                <a16:creationId xmlns:a16="http://schemas.microsoft.com/office/drawing/2014/main" id="{D26D9B70-F4FF-4D06-9342-C57CDF622A0B}"/>
+                <a16:creationId xmlns:a16="http://schemas.microsoft.com/office/drawing/2014/main" id="{EA4F0F0E-0F38-4A12-863A-8D2521057468}"/>
               </a:ext>
             </a:extLst>
           </p:cNvPr>
@@ -21344,7 +21344,7 @@
           <p:cNvPr id="201" name="reveal1-line-267">
             <a:extLst xmlns:a="http://schemas.openxmlformats.org/drawingml/2006/main">
               <a:ext uri="{FF2B5EF4-FFF2-40B4-BE49-F238E27FC236}">
-                <a16:creationId xmlns:a16="http://schemas.microsoft.com/office/drawing/2014/main" id="{E4F180F4-A248-4D15-B211-D86E7BC0BFB6}"/>
+                <a16:creationId xmlns:a16="http://schemas.microsoft.com/office/drawing/2014/main" id="{C11BB0DB-69F5-40C7-9140-A87527389A7E}"/>
               </a:ext>
             </a:extLst>
           </p:cNvPr>
@@ -21384,7 +21384,7 @@
           <p:cNvPr id="202" name="reveal1-line-268">
             <a:extLst xmlns:a="http://schemas.openxmlformats.org/drawingml/2006/main">
               <a:ext uri="{FF2B5EF4-FFF2-40B4-BE49-F238E27FC236}">
-                <a16:creationId xmlns:a16="http://schemas.microsoft.com/office/drawing/2014/main" id="{A5720521-2A36-4DCD-96F0-F9872DC049BB}"/>
+                <a16:creationId xmlns:a16="http://schemas.microsoft.com/office/drawing/2014/main" id="{87832F4F-564B-4292-B021-0F5E7CCCBB1D}"/>
               </a:ext>
             </a:extLst>
           </p:cNvPr>
@@ -21424,7 +21424,7 @@
           <p:cNvPr id="203" name="reveal1-object-269">
             <a:extLst xmlns:a="http://schemas.openxmlformats.org/drawingml/2006/main">
               <a:ext uri="{FF2B5EF4-FFF2-40B4-BE49-F238E27FC236}">
-                <a16:creationId xmlns:a16="http://schemas.microsoft.com/office/drawing/2014/main" id="{4D74BE9D-D13A-4DBE-B107-F4035E007D60}"/>
+                <a16:creationId xmlns:a16="http://schemas.microsoft.com/office/drawing/2014/main" id="{97ECBE91-F315-42A6-98F0-D5CA46791931}"/>
               </a:ext>
             </a:extLst>
           </p:cNvPr>
@@ -21491,7 +21491,7 @@
           <p:cNvPr id="204" name="reveal1-object-270">
             <a:extLst xmlns:a="http://schemas.openxmlformats.org/drawingml/2006/main">
               <a:ext uri="{FF2B5EF4-FFF2-40B4-BE49-F238E27FC236}">
-                <a16:creationId xmlns:a16="http://schemas.microsoft.com/office/drawing/2014/main" id="{FAAA10A5-5D8F-41EC-A5E3-EB2FB1F6720B}"/>
+                <a16:creationId xmlns:a16="http://schemas.microsoft.com/office/drawing/2014/main" id="{3B9DAE7A-E9B2-42F7-8162-B18A5A55A15D}"/>
               </a:ext>
             </a:extLst>
           </p:cNvPr>
@@ -21558,7 +21558,7 @@
           <p:cNvPr id="205" name="reveal1-object-271">
             <a:extLst xmlns:a="http://schemas.openxmlformats.org/drawingml/2006/main">
               <a:ext uri="{FF2B5EF4-FFF2-40B4-BE49-F238E27FC236}">
-                <a16:creationId xmlns:a16="http://schemas.microsoft.com/office/drawing/2014/main" id="{5971B836-8279-495B-A7B3-DA8714C0E8B3}"/>
+                <a16:creationId xmlns:a16="http://schemas.microsoft.com/office/drawing/2014/main" id="{01D97B72-9AEA-40F6-9694-0A6B57380B7D}"/>
               </a:ext>
             </a:extLst>
           </p:cNvPr>
@@ -21625,7 +21625,7 @@
           <p:cNvPr id="206" name="reveal2-object-272">
             <a:extLst xmlns:a="http://schemas.openxmlformats.org/drawingml/2006/main">
               <a:ext uri="{FF2B5EF4-FFF2-40B4-BE49-F238E27FC236}">
-                <a16:creationId xmlns:a16="http://schemas.microsoft.com/office/drawing/2014/main" id="{F813436B-EA57-478E-BC12-4FABF6790EFE}"/>
+                <a16:creationId xmlns:a16="http://schemas.microsoft.com/office/drawing/2014/main" id="{7957E303-CA3E-4AD6-8BCC-DA4C9950056A}"/>
               </a:ext>
             </a:extLst>
           </p:cNvPr>
@@ -21692,7 +21692,7 @@
           <p:cNvPr id="207" name="object-273">
             <a:extLst xmlns:a="http://schemas.openxmlformats.org/drawingml/2006/main">
               <a:ext uri="{FF2B5EF4-FFF2-40B4-BE49-F238E27FC236}">
-                <a16:creationId xmlns:a16="http://schemas.microsoft.com/office/drawing/2014/main" id="{C0F6749B-1B08-4EA8-BA87-C3183798F9EB}"/>
+                <a16:creationId xmlns:a16="http://schemas.microsoft.com/office/drawing/2014/main" id="{3A5BB056-992A-4584-AC71-DFE26671D1EE}"/>
               </a:ext>
             </a:extLst>
           </p:cNvPr>
@@ -21759,7 +21759,7 @@
           <p:cNvPr id="208" name="object-274">
             <a:extLst xmlns:a="http://schemas.openxmlformats.org/drawingml/2006/main">
               <a:ext uri="{FF2B5EF4-FFF2-40B4-BE49-F238E27FC236}">
-                <a16:creationId xmlns:a16="http://schemas.microsoft.com/office/drawing/2014/main" id="{F5009B03-626F-4DED-9C64-D142A5999FF4}"/>
+                <a16:creationId xmlns:a16="http://schemas.microsoft.com/office/drawing/2014/main" id="{24FC8C8A-BCD2-43AB-9398-0EF309A48BCF}"/>
               </a:ext>
             </a:extLst>
           </p:cNvPr>
@@ -21824,7 +21824,7 @@
     </p:spTree>
     <p:extLst>
       <p:ext uri="{BB962C8B-B14F-4D97-AF65-F5344CB8AC3E}">
-        <p14:creationId xmlns:p14="http://schemas.microsoft.com/office/powerpoint/2010/main" val="20104505"/>
+        <p14:creationId xmlns:p14="http://schemas.microsoft.com/office/powerpoint/2010/main" val="1197278615"/>
       </p:ext>
     </p:extLst>
   </p:cSld>
@@ -22567,7 +22567,7 @@
           <p:cNvPr id="28" name="object-275">
             <a:extLst xmlns:a="http://schemas.openxmlformats.org/drawingml/2006/main">
               <a:ext uri="{FF2B5EF4-FFF2-40B4-BE49-F238E27FC236}">
-                <a16:creationId xmlns:a16="http://schemas.microsoft.com/office/drawing/2014/main" id="{D9C1A71E-2BD4-427D-992B-569882AD6ACB}"/>
+                <a16:creationId xmlns:a16="http://schemas.microsoft.com/office/drawing/2014/main" id="{D612FD05-5194-4E3B-8343-B30ADBCD7280}"/>
               </a:ext>
             </a:extLst>
           </p:cNvPr>
@@ -22634,7 +22634,7 @@
           <p:cNvPr id="2" name="object-276">
             <a:extLst xmlns:a="http://schemas.openxmlformats.org/drawingml/2006/main">
               <a:ext uri="{FF2B5EF4-FFF2-40B4-BE49-F238E27FC236}">
-                <a16:creationId xmlns:a16="http://schemas.microsoft.com/office/drawing/2014/main" id="{96B51E33-655A-4990-84C3-64922D5508BD}"/>
+                <a16:creationId xmlns:a16="http://schemas.microsoft.com/office/drawing/2014/main" id="{B9299B76-147C-4BAC-9554-506FADD54AFC}"/>
               </a:ext>
             </a:extLst>
           </p:cNvPr>
@@ -22701,7 +22701,7 @@
           <p:cNvPr id="3" name="object-277">
             <a:extLst xmlns:a="http://schemas.openxmlformats.org/drawingml/2006/main">
               <a:ext uri="{FF2B5EF4-FFF2-40B4-BE49-F238E27FC236}">
-                <a16:creationId xmlns:a16="http://schemas.microsoft.com/office/drawing/2014/main" id="{BB79B09C-0E57-49E2-9981-2495D11B7A40}"/>
+                <a16:creationId xmlns:a16="http://schemas.microsoft.com/office/drawing/2014/main" id="{09A6B96F-61DA-44C8-AA2E-4FC64F7BC691}"/>
               </a:ext>
             </a:extLst>
           </p:cNvPr>
@@ -22768,7 +22768,7 @@
           <p:cNvPr id="4" name="object-278">
             <a:extLst xmlns:a="http://schemas.openxmlformats.org/drawingml/2006/main">
               <a:ext uri="{FF2B5EF4-FFF2-40B4-BE49-F238E27FC236}">
-                <a16:creationId xmlns:a16="http://schemas.microsoft.com/office/drawing/2014/main" id="{65B42627-F6A6-4FCE-B2CC-98474DCB38C2}"/>
+                <a16:creationId xmlns:a16="http://schemas.microsoft.com/office/drawing/2014/main" id="{BBCEEC2F-7C47-4E74-A659-29FC1D0FA067}"/>
               </a:ext>
             </a:extLst>
           </p:cNvPr>
@@ -22835,7 +22835,7 @@
           <p:cNvPr id="5" name="object-279">
             <a:extLst xmlns:a="http://schemas.openxmlformats.org/drawingml/2006/main">
               <a:ext uri="{FF2B5EF4-FFF2-40B4-BE49-F238E27FC236}">
-                <a16:creationId xmlns:a16="http://schemas.microsoft.com/office/drawing/2014/main" id="{06D6D0C0-8077-4EF5-B229-B24340852EBE}"/>
+                <a16:creationId xmlns:a16="http://schemas.microsoft.com/office/drawing/2014/main" id="{1548BC33-55C0-4513-8A3B-F6D221BE68FC}"/>
               </a:ext>
             </a:extLst>
           </p:cNvPr>
@@ -22866,7 +22866,7 @@
           <p:cNvPr id="6" name="object-280">
             <a:extLst xmlns:a="http://schemas.openxmlformats.org/drawingml/2006/main">
               <a:ext uri="{FF2B5EF4-FFF2-40B4-BE49-F238E27FC236}">
-                <a16:creationId xmlns:a16="http://schemas.microsoft.com/office/drawing/2014/main" id="{9399307A-9543-480B-A7B2-CB17CFED06F6}"/>
+                <a16:creationId xmlns:a16="http://schemas.microsoft.com/office/drawing/2014/main" id="{5ABF444F-C7B2-4385-A919-10BC24256C19}"/>
               </a:ext>
             </a:extLst>
           </p:cNvPr>
@@ -22933,7 +22933,7 @@
           <p:cNvPr id="7" name="object-281">
             <a:extLst xmlns:a="http://schemas.openxmlformats.org/drawingml/2006/main">
               <a:ext uri="{FF2B5EF4-FFF2-40B4-BE49-F238E27FC236}">
-                <a16:creationId xmlns:a16="http://schemas.microsoft.com/office/drawing/2014/main" id="{366E12A7-FBA1-4E9F-885D-3AA35E88996D}"/>
+                <a16:creationId xmlns:a16="http://schemas.microsoft.com/office/drawing/2014/main" id="{14D04DCB-A058-4273-85AA-BD443196861A}"/>
               </a:ext>
             </a:extLst>
           </p:cNvPr>
@@ -22964,7 +22964,7 @@
           <p:cNvPr id="8" name="object-282">
             <a:extLst xmlns:a="http://schemas.openxmlformats.org/drawingml/2006/main">
               <a:ext uri="{FF2B5EF4-FFF2-40B4-BE49-F238E27FC236}">
-                <a16:creationId xmlns:a16="http://schemas.microsoft.com/office/drawing/2014/main" id="{AB059F6F-3FF9-481C-980E-B61E9B03E6FD}"/>
+                <a16:creationId xmlns:a16="http://schemas.microsoft.com/office/drawing/2014/main" id="{7BC8E225-D732-457F-9ED5-AB68DBE19CF1}"/>
               </a:ext>
             </a:extLst>
           </p:cNvPr>
@@ -23031,7 +23031,7 @@
           <p:cNvPr id="9" name="line-283">
             <a:extLst xmlns:a="http://schemas.openxmlformats.org/drawingml/2006/main">
               <a:ext uri="{FF2B5EF4-FFF2-40B4-BE49-F238E27FC236}">
-                <a16:creationId xmlns:a16="http://schemas.microsoft.com/office/drawing/2014/main" id="{9FEDFB24-B4B6-491F-B15E-6846AE731820}"/>
+                <a16:creationId xmlns:a16="http://schemas.microsoft.com/office/drawing/2014/main" id="{FCF72185-6D06-4EE4-831A-2EAEA23A2BF0}"/>
               </a:ext>
             </a:extLst>
           </p:cNvPr>
@@ -23071,7 +23071,7 @@
           <p:cNvPr id="10" name="line-284">
             <a:extLst xmlns:a="http://schemas.openxmlformats.org/drawingml/2006/main">
               <a:ext uri="{FF2B5EF4-FFF2-40B4-BE49-F238E27FC236}">
-                <a16:creationId xmlns:a16="http://schemas.microsoft.com/office/drawing/2014/main" id="{43B210B7-59A9-4AE6-B65E-131FBBF25CAD}"/>
+                <a16:creationId xmlns:a16="http://schemas.microsoft.com/office/drawing/2014/main" id="{D050E39B-B5B9-470F-B16A-6003336EE52D}"/>
               </a:ext>
             </a:extLst>
           </p:cNvPr>
@@ -23111,7 +23111,7 @@
           <p:cNvPr id="11" name="line-285">
             <a:extLst xmlns:a="http://schemas.openxmlformats.org/drawingml/2006/main">
               <a:ext uri="{FF2B5EF4-FFF2-40B4-BE49-F238E27FC236}">
-                <a16:creationId xmlns:a16="http://schemas.microsoft.com/office/drawing/2014/main" id="{797FC683-3946-4569-A3B5-9F9F81C63814}"/>
+                <a16:creationId xmlns:a16="http://schemas.microsoft.com/office/drawing/2014/main" id="{CB852875-71C2-480B-9D79-DBCF7E236947}"/>
               </a:ext>
             </a:extLst>
           </p:cNvPr>
@@ -23151,7 +23151,7 @@
           <p:cNvPr id="12" name="object-286">
             <a:extLst xmlns:a="http://schemas.openxmlformats.org/drawingml/2006/main">
               <a:ext uri="{FF2B5EF4-FFF2-40B4-BE49-F238E27FC236}">
-                <a16:creationId xmlns:a16="http://schemas.microsoft.com/office/drawing/2014/main" id="{15539A76-6C6F-4265-9656-C2B4E3654D6B}"/>
+                <a16:creationId xmlns:a16="http://schemas.microsoft.com/office/drawing/2014/main" id="{0BA3F9AA-E546-4342-9733-A94B732D3BE5}"/>
               </a:ext>
             </a:extLst>
           </p:cNvPr>
@@ -23241,7 +23241,7 @@
           <p:cNvPr id="13" name="line-287">
             <a:extLst xmlns:a="http://schemas.openxmlformats.org/drawingml/2006/main">
               <a:ext uri="{FF2B5EF4-FFF2-40B4-BE49-F238E27FC236}">
-                <a16:creationId xmlns:a16="http://schemas.microsoft.com/office/drawing/2014/main" id="{D3D216E7-6C40-4C54-B132-C343CB7B2454}"/>
+                <a16:creationId xmlns:a16="http://schemas.microsoft.com/office/drawing/2014/main" id="{D6E2E56F-F137-4EF7-B6DA-9CBF096B40CE}"/>
               </a:ext>
             </a:extLst>
           </p:cNvPr>
@@ -23281,7 +23281,7 @@
           <p:cNvPr id="14" name="object-288">
             <a:extLst xmlns:a="http://schemas.openxmlformats.org/drawingml/2006/main">
               <a:ext uri="{FF2B5EF4-FFF2-40B4-BE49-F238E27FC236}">
-                <a16:creationId xmlns:a16="http://schemas.microsoft.com/office/drawing/2014/main" id="{BC303218-04C0-4C3E-87DB-45728CC7AF09}"/>
+                <a16:creationId xmlns:a16="http://schemas.microsoft.com/office/drawing/2014/main" id="{80DC6E90-E11E-45F9-B054-8F25A15D89C5}"/>
               </a:ext>
             </a:extLst>
           </p:cNvPr>
@@ -23312,7 +23312,7 @@
           <p:cNvPr id="15" name="object-289">
             <a:extLst xmlns:a="http://schemas.openxmlformats.org/drawingml/2006/main">
               <a:ext uri="{FF2B5EF4-FFF2-40B4-BE49-F238E27FC236}">
-                <a16:creationId xmlns:a16="http://schemas.microsoft.com/office/drawing/2014/main" id="{B1D386CB-DFF1-4BFD-87CC-4A47D1255247}"/>
+                <a16:creationId xmlns:a16="http://schemas.microsoft.com/office/drawing/2014/main" id="{0B56BDCF-6E38-4902-AD6F-936306159428}"/>
               </a:ext>
             </a:extLst>
           </p:cNvPr>
@@ -23379,7 +23379,7 @@
           <p:cNvPr id="16" name="object-290">
             <a:extLst xmlns:a="http://schemas.openxmlformats.org/drawingml/2006/main">
               <a:ext uri="{FF2B5EF4-FFF2-40B4-BE49-F238E27FC236}">
-                <a16:creationId xmlns:a16="http://schemas.microsoft.com/office/drawing/2014/main" id="{A49D4F46-8BB1-4784-98CB-D2C94740549B}"/>
+                <a16:creationId xmlns:a16="http://schemas.microsoft.com/office/drawing/2014/main" id="{5885AD26-3CDE-4F83-90EC-8DA07BCC1D1F}"/>
               </a:ext>
             </a:extLst>
           </p:cNvPr>
@@ -23446,7 +23446,7 @@
           <p:cNvPr id="17" name="reveal1-object-291">
             <a:extLst xmlns:a="http://schemas.openxmlformats.org/drawingml/2006/main">
               <a:ext uri="{FF2B5EF4-FFF2-40B4-BE49-F238E27FC236}">
-                <a16:creationId xmlns:a16="http://schemas.microsoft.com/office/drawing/2014/main" id="{90ABB46D-1EF2-48F3-AD76-67CF89666CA1}"/>
+                <a16:creationId xmlns:a16="http://schemas.microsoft.com/office/drawing/2014/main" id="{C802C4E6-299C-48C0-ADDD-9647D1B6EE75}"/>
               </a:ext>
             </a:extLst>
           </p:cNvPr>
@@ -23513,7 +23513,7 @@
           <p:cNvPr id="18" name="reveal1-object-292">
             <a:extLst xmlns:a="http://schemas.openxmlformats.org/drawingml/2006/main">
               <a:ext uri="{FF2B5EF4-FFF2-40B4-BE49-F238E27FC236}">
-                <a16:creationId xmlns:a16="http://schemas.microsoft.com/office/drawing/2014/main" id="{0DA84932-2DF8-4EE7-A3F2-7832734CA610}"/>
+                <a16:creationId xmlns:a16="http://schemas.microsoft.com/office/drawing/2014/main" id="{FDE0B90C-4D20-49BE-895C-91054118C370}"/>
               </a:ext>
             </a:extLst>
           </p:cNvPr>
@@ -23544,7 +23544,7 @@
           <p:cNvPr id="19" name="reveal1-object-293">
             <a:extLst xmlns:a="http://schemas.openxmlformats.org/drawingml/2006/main">
               <a:ext uri="{FF2B5EF4-FFF2-40B4-BE49-F238E27FC236}">
-                <a16:creationId xmlns:a16="http://schemas.microsoft.com/office/drawing/2014/main" id="{8BB7612D-BFFC-4E97-A271-D34899282881}"/>
+                <a16:creationId xmlns:a16="http://schemas.microsoft.com/office/drawing/2014/main" id="{367170FD-0B5C-4DEA-A95D-8D28648279AF}"/>
               </a:ext>
             </a:extLst>
           </p:cNvPr>
@@ -23611,7 +23611,7 @@
           <p:cNvPr id="20" name="reveal1-object-294">
             <a:extLst xmlns:a="http://schemas.openxmlformats.org/drawingml/2006/main">
               <a:ext uri="{FF2B5EF4-FFF2-40B4-BE49-F238E27FC236}">
-                <a16:creationId xmlns:a16="http://schemas.microsoft.com/office/drawing/2014/main" id="{05DAD500-7CFC-41DA-AA68-7AE7B77F5CB8}"/>
+                <a16:creationId xmlns:a16="http://schemas.microsoft.com/office/drawing/2014/main" id="{FF336F6D-3A12-4956-B863-D46438D33CBC}"/>
               </a:ext>
             </a:extLst>
           </p:cNvPr>
@@ -23701,7 +23701,7 @@
           <p:cNvPr id="21" name="reveal2-object-295">
             <a:extLst xmlns:a="http://schemas.openxmlformats.org/drawingml/2006/main">
               <a:ext uri="{FF2B5EF4-FFF2-40B4-BE49-F238E27FC236}">
-                <a16:creationId xmlns:a16="http://schemas.microsoft.com/office/drawing/2014/main" id="{634DCBC0-D0C0-4D21-B347-F58ECC9363BE}"/>
+                <a16:creationId xmlns:a16="http://schemas.microsoft.com/office/drawing/2014/main" id="{D4EC01C1-3975-43C6-ABA5-BBB22C127D19}"/>
               </a:ext>
             </a:extLst>
           </p:cNvPr>
@@ -23768,7 +23768,7 @@
           <p:cNvPr id="22" name="reveal2-object-296">
             <a:extLst xmlns:a="http://schemas.openxmlformats.org/drawingml/2006/main">
               <a:ext uri="{FF2B5EF4-FFF2-40B4-BE49-F238E27FC236}">
-                <a16:creationId xmlns:a16="http://schemas.microsoft.com/office/drawing/2014/main" id="{A7347FD2-BC96-4102-9AAF-6B6430D0ACA2}"/>
+                <a16:creationId xmlns:a16="http://schemas.microsoft.com/office/drawing/2014/main" id="{6AE5742D-672C-4AAF-8A10-9392EA0382A9}"/>
               </a:ext>
             </a:extLst>
           </p:cNvPr>
@@ -23835,7 +23835,7 @@
           <p:cNvPr id="23" name="reveal2-line-297">
             <a:extLst xmlns:a="http://schemas.openxmlformats.org/drawingml/2006/main">
               <a:ext uri="{FF2B5EF4-FFF2-40B4-BE49-F238E27FC236}">
-                <a16:creationId xmlns:a16="http://schemas.microsoft.com/office/drawing/2014/main" id="{D5A52196-9D2A-46B6-8E73-EEA0FC337C4C}"/>
+                <a16:creationId xmlns:a16="http://schemas.microsoft.com/office/drawing/2014/main" id="{37E3871D-7AD0-4A0F-B388-0C9E3740E773}"/>
               </a:ext>
             </a:extLst>
           </p:cNvPr>
@@ -23875,7 +23875,7 @@
           <p:cNvPr id="24" name="reveal2-object-298">
             <a:extLst xmlns:a="http://schemas.openxmlformats.org/drawingml/2006/main">
               <a:ext uri="{FF2B5EF4-FFF2-40B4-BE49-F238E27FC236}">
-                <a16:creationId xmlns:a16="http://schemas.microsoft.com/office/drawing/2014/main" id="{AFD13A36-AFAD-4F7E-912D-671A8E0F4FC8}"/>
+                <a16:creationId xmlns:a16="http://schemas.microsoft.com/office/drawing/2014/main" id="{A8EC4D2C-C913-4002-B6F5-BC797B2AEB87}"/>
               </a:ext>
             </a:extLst>
           </p:cNvPr>
@@ -23965,7 +23965,7 @@
           <p:cNvPr id="25" name="reveal2-object-299">
             <a:extLst xmlns:a="http://schemas.openxmlformats.org/drawingml/2006/main">
               <a:ext uri="{FF2B5EF4-FFF2-40B4-BE49-F238E27FC236}">
-                <a16:creationId xmlns:a16="http://schemas.microsoft.com/office/drawing/2014/main" id="{AD36F3D3-FA67-456F-901F-9AAF4E8CC9BF}"/>
+                <a16:creationId xmlns:a16="http://schemas.microsoft.com/office/drawing/2014/main" id="{4EA3861D-BC74-409E-87FC-7DD426CC995F}"/>
               </a:ext>
             </a:extLst>
           </p:cNvPr>
@@ -24032,7 +24032,7 @@
           <p:cNvPr id="26" name="object-300">
             <a:extLst xmlns:a="http://schemas.openxmlformats.org/drawingml/2006/main">
               <a:ext uri="{FF2B5EF4-FFF2-40B4-BE49-F238E27FC236}">
-                <a16:creationId xmlns:a16="http://schemas.microsoft.com/office/drawing/2014/main" id="{3A7C8E88-9DE7-400F-BB0F-901653F87E62}"/>
+                <a16:creationId xmlns:a16="http://schemas.microsoft.com/office/drawing/2014/main" id="{B6F25968-7136-4C74-BEF7-EF2DBB90C36B}"/>
               </a:ext>
             </a:extLst>
           </p:cNvPr>
@@ -24099,7 +24099,7 @@
           <p:cNvPr id="27" name="object-301">
             <a:extLst xmlns:a="http://schemas.openxmlformats.org/drawingml/2006/main">
               <a:ext uri="{FF2B5EF4-FFF2-40B4-BE49-F238E27FC236}">
-                <a16:creationId xmlns:a16="http://schemas.microsoft.com/office/drawing/2014/main" id="{3DD8DEAA-0C98-4588-B637-CB17BBF78096}"/>
+                <a16:creationId xmlns:a16="http://schemas.microsoft.com/office/drawing/2014/main" id="{37AD15CE-0EC4-453B-8EED-E6656817D8F2}"/>
               </a:ext>
             </a:extLst>
           </p:cNvPr>
@@ -24164,7 +24164,7 @@
     </p:spTree>
     <p:extLst>
       <p:ext uri="{BB962C8B-B14F-4D97-AF65-F5344CB8AC3E}">
-        <p14:creationId xmlns:p14="http://schemas.microsoft.com/office/powerpoint/2010/main" val="1902936864"/>
+        <p14:creationId xmlns:p14="http://schemas.microsoft.com/office/powerpoint/2010/main" val="1157289790"/>
       </p:ext>
     </p:extLst>
   </p:cSld>
@@ -24515,7 +24515,7 @@
           <p:cNvPr id="32" name="object-302">
             <a:extLst xmlns:a="http://schemas.openxmlformats.org/drawingml/2006/main">
               <a:ext uri="{FF2B5EF4-FFF2-40B4-BE49-F238E27FC236}">
-                <a16:creationId xmlns:a16="http://schemas.microsoft.com/office/drawing/2014/main" id="{4359EE47-81AF-4889-9355-3F99E26DA4CC}"/>
+                <a16:creationId xmlns:a16="http://schemas.microsoft.com/office/drawing/2014/main" id="{B38B2B51-18DB-4F63-A132-DF50A428CBD0}"/>
               </a:ext>
             </a:extLst>
           </p:cNvPr>
@@ -24582,7 +24582,7 @@
           <p:cNvPr id="2" name="object-303">
             <a:extLst xmlns:a="http://schemas.openxmlformats.org/drawingml/2006/main">
               <a:ext uri="{FF2B5EF4-FFF2-40B4-BE49-F238E27FC236}">
-                <a16:creationId xmlns:a16="http://schemas.microsoft.com/office/drawing/2014/main" id="{ED845F55-0A98-4A73-9A98-69182525B2B1}"/>
+                <a16:creationId xmlns:a16="http://schemas.microsoft.com/office/drawing/2014/main" id="{7F1C3DB3-C086-41D3-BE94-64F9C24CF309}"/>
               </a:ext>
             </a:extLst>
           </p:cNvPr>
@@ -24649,7 +24649,7 @@
           <p:cNvPr id="3" name="object-304">
             <a:extLst xmlns:a="http://schemas.openxmlformats.org/drawingml/2006/main">
               <a:ext uri="{FF2B5EF4-FFF2-40B4-BE49-F238E27FC236}">
-                <a16:creationId xmlns:a16="http://schemas.microsoft.com/office/drawing/2014/main" id="{84D3DB3C-9268-47CA-9C9D-2784FD14E285}"/>
+                <a16:creationId xmlns:a16="http://schemas.microsoft.com/office/drawing/2014/main" id="{22C2FB2B-6621-41BF-A1D4-9D8C26D136C1}"/>
               </a:ext>
             </a:extLst>
           </p:cNvPr>
@@ -24716,7 +24716,7 @@
           <p:cNvPr id="4" name="line-305">
             <a:extLst xmlns:a="http://schemas.openxmlformats.org/drawingml/2006/main">
               <a:ext uri="{FF2B5EF4-FFF2-40B4-BE49-F238E27FC236}">
-                <a16:creationId xmlns:a16="http://schemas.microsoft.com/office/drawing/2014/main" id="{B1B9F9BC-34E2-4004-AAA3-37D7C7A80AE0}"/>
+                <a16:creationId xmlns:a16="http://schemas.microsoft.com/office/drawing/2014/main" id="{62115A35-6480-4F26-B731-1E1044D226FB}"/>
               </a:ext>
             </a:extLst>
           </p:cNvPr>
@@ -24756,7 +24756,7 @@
           <p:cNvPr id="5" name="object-306">
             <a:extLst xmlns:a="http://schemas.openxmlformats.org/drawingml/2006/main">
               <a:ext uri="{FF2B5EF4-FFF2-40B4-BE49-F238E27FC236}">
-                <a16:creationId xmlns:a16="http://schemas.microsoft.com/office/drawing/2014/main" id="{D50CB1B7-5F4F-44DF-A020-5F13BBEB1D03}"/>
+                <a16:creationId xmlns:a16="http://schemas.microsoft.com/office/drawing/2014/main" id="{01256FD7-F4B1-4900-A446-5AE4F61E034C}"/>
               </a:ext>
             </a:extLst>
           </p:cNvPr>
@@ -24823,7 +24823,7 @@
           <p:cNvPr id="6" name="line-307">
             <a:extLst xmlns:a="http://schemas.openxmlformats.org/drawingml/2006/main">
               <a:ext uri="{FF2B5EF4-FFF2-40B4-BE49-F238E27FC236}">
-                <a16:creationId xmlns:a16="http://schemas.microsoft.com/office/drawing/2014/main" id="{F4A43D34-5233-42AD-B666-CAF2339FFAFA}"/>
+                <a16:creationId xmlns:a16="http://schemas.microsoft.com/office/drawing/2014/main" id="{0247E093-2852-44A2-AC4C-C8048EF6E775}"/>
               </a:ext>
             </a:extLst>
           </p:cNvPr>
@@ -24863,7 +24863,7 @@
           <p:cNvPr id="7" name="object-308">
             <a:extLst xmlns:a="http://schemas.openxmlformats.org/drawingml/2006/main">
               <a:ext uri="{FF2B5EF4-FFF2-40B4-BE49-F238E27FC236}">
-                <a16:creationId xmlns:a16="http://schemas.microsoft.com/office/drawing/2014/main" id="{907EC8B7-3FA1-4D71-B0F4-E6501BAE75EB}"/>
+                <a16:creationId xmlns:a16="http://schemas.microsoft.com/office/drawing/2014/main" id="{DEE07073-1593-409B-A8AF-4155E39FEE85}"/>
               </a:ext>
             </a:extLst>
           </p:cNvPr>
@@ -24930,7 +24930,7 @@
           <p:cNvPr id="8" name="line-309">
             <a:extLst xmlns:a="http://schemas.openxmlformats.org/drawingml/2006/main">
               <a:ext uri="{FF2B5EF4-FFF2-40B4-BE49-F238E27FC236}">
-                <a16:creationId xmlns:a16="http://schemas.microsoft.com/office/drawing/2014/main" id="{8F2F3572-5465-4E8B-A827-7FEE6E8B5826}"/>
+                <a16:creationId xmlns:a16="http://schemas.microsoft.com/office/drawing/2014/main" id="{7E584721-30AF-4986-926B-E39A18A76032}"/>
               </a:ext>
             </a:extLst>
           </p:cNvPr>
@@ -24970,7 +24970,7 @@
           <p:cNvPr id="9" name="object-310">
             <a:extLst xmlns:a="http://schemas.openxmlformats.org/drawingml/2006/main">
               <a:ext uri="{FF2B5EF4-FFF2-40B4-BE49-F238E27FC236}">
-                <a16:creationId xmlns:a16="http://schemas.microsoft.com/office/drawing/2014/main" id="{65AF001C-06C2-410E-B5D8-674B24A3BCB4}"/>
+                <a16:creationId xmlns:a16="http://schemas.microsoft.com/office/drawing/2014/main" id="{9B6041A7-2953-41CB-8E15-858855F275D3}"/>
               </a:ext>
             </a:extLst>
           </p:cNvPr>
@@ -25037,7 +25037,7 @@
           <p:cNvPr id="10" name="object-311">
             <a:extLst xmlns:a="http://schemas.openxmlformats.org/drawingml/2006/main">
               <a:ext uri="{FF2B5EF4-FFF2-40B4-BE49-F238E27FC236}">
-                <a16:creationId xmlns:a16="http://schemas.microsoft.com/office/drawing/2014/main" id="{17E6E0B1-4713-4A79-940A-62584BE7DD97}"/>
+                <a16:creationId xmlns:a16="http://schemas.microsoft.com/office/drawing/2014/main" id="{A020436D-5D04-45FC-9D3A-985D784BF706}"/>
               </a:ext>
             </a:extLst>
           </p:cNvPr>
@@ -25068,7 +25068,7 @@
           <p:cNvPr id="11" name="object-312">
             <a:extLst xmlns:a="http://schemas.openxmlformats.org/drawingml/2006/main">
               <a:ext uri="{FF2B5EF4-FFF2-40B4-BE49-F238E27FC236}">
-                <a16:creationId xmlns:a16="http://schemas.microsoft.com/office/drawing/2014/main" id="{F9C08EDF-16D3-46F1-AE14-53035AD86E71}"/>
+                <a16:creationId xmlns:a16="http://schemas.microsoft.com/office/drawing/2014/main" id="{DF007780-097A-4EC8-BE9E-260BD7497AF2}"/>
               </a:ext>
             </a:extLst>
           </p:cNvPr>
@@ -25135,7 +25135,7 @@
           <p:cNvPr id="12" name="line-313">
             <a:extLst xmlns:a="http://schemas.openxmlformats.org/drawingml/2006/main">
               <a:ext uri="{FF2B5EF4-FFF2-40B4-BE49-F238E27FC236}">
-                <a16:creationId xmlns:a16="http://schemas.microsoft.com/office/drawing/2014/main" id="{FDA3D0A6-6FB2-4418-B310-790E1DDD4133}"/>
+                <a16:creationId xmlns:a16="http://schemas.microsoft.com/office/drawing/2014/main" id="{27B0BFAB-7768-4FE5-98CC-27E318E9D16F}"/>
               </a:ext>
             </a:extLst>
           </p:cNvPr>
@@ -25175,7 +25175,7 @@
           <p:cNvPr id="13" name="object-314">
             <a:extLst xmlns:a="http://schemas.openxmlformats.org/drawingml/2006/main">
               <a:ext uri="{FF2B5EF4-FFF2-40B4-BE49-F238E27FC236}">
-                <a16:creationId xmlns:a16="http://schemas.microsoft.com/office/drawing/2014/main" id="{967396C2-E407-426C-83BB-4FF5F8E9D87A}"/>
+                <a16:creationId xmlns:a16="http://schemas.microsoft.com/office/drawing/2014/main" id="{465BC3B0-684E-461F-9D37-E18606F9E631}"/>
               </a:ext>
             </a:extLst>
           </p:cNvPr>
@@ -25242,7 +25242,7 @@
           <p:cNvPr id="14" name="object-315">
             <a:extLst xmlns:a="http://schemas.openxmlformats.org/drawingml/2006/main">
               <a:ext uri="{FF2B5EF4-FFF2-40B4-BE49-F238E27FC236}">
-                <a16:creationId xmlns:a16="http://schemas.microsoft.com/office/drawing/2014/main" id="{97AB241D-EA00-44F6-A983-879B8934533E}"/>
+                <a16:creationId xmlns:a16="http://schemas.microsoft.com/office/drawing/2014/main" id="{31065D45-3D54-42E9-9B8F-A175288FA013}"/>
               </a:ext>
             </a:extLst>
           </p:cNvPr>
@@ -25332,7 +25332,7 @@
           <p:cNvPr id="15" name="reveal1-line-316">
             <a:extLst xmlns:a="http://schemas.openxmlformats.org/drawingml/2006/main">
               <a:ext uri="{FF2B5EF4-FFF2-40B4-BE49-F238E27FC236}">
-                <a16:creationId xmlns:a16="http://schemas.microsoft.com/office/drawing/2014/main" id="{CEC62959-4ABC-4895-ADEA-80D98678D6E9}"/>
+                <a16:creationId xmlns:a16="http://schemas.microsoft.com/office/drawing/2014/main" id="{AF7D146A-22E0-4E97-9F6E-D273238F82BF}"/>
               </a:ext>
             </a:extLst>
           </p:cNvPr>
@@ -25372,7 +25372,7 @@
           <p:cNvPr id="16" name="reveal1-object-317">
             <a:extLst xmlns:a="http://schemas.openxmlformats.org/drawingml/2006/main">
               <a:ext uri="{FF2B5EF4-FFF2-40B4-BE49-F238E27FC236}">
-                <a16:creationId xmlns:a16="http://schemas.microsoft.com/office/drawing/2014/main" id="{8EDB7308-DAB2-42A1-A334-3D21A0D45438}"/>
+                <a16:creationId xmlns:a16="http://schemas.microsoft.com/office/drawing/2014/main" id="{4E83AD7C-4327-4919-99B7-3247D1C59CD6}"/>
               </a:ext>
             </a:extLst>
           </p:cNvPr>
@@ -25439,7 +25439,7 @@
           <p:cNvPr id="17" name="reveal1-object-318">
             <a:extLst xmlns:a="http://schemas.openxmlformats.org/drawingml/2006/main">
               <a:ext uri="{FF2B5EF4-FFF2-40B4-BE49-F238E27FC236}">
-                <a16:creationId xmlns:a16="http://schemas.microsoft.com/office/drawing/2014/main" id="{F2A5EAA5-8181-4FE4-BB8B-16AEFA3C5AED}"/>
+                <a16:creationId xmlns:a16="http://schemas.microsoft.com/office/drawing/2014/main" id="{86837E16-4B31-45CD-99B5-5AE9626AA018}"/>
               </a:ext>
             </a:extLst>
           </p:cNvPr>
@@ -25470,7 +25470,7 @@
           <p:cNvPr id="18" name="reveal1-object-319">
             <a:extLst xmlns:a="http://schemas.openxmlformats.org/drawingml/2006/main">
               <a:ext uri="{FF2B5EF4-FFF2-40B4-BE49-F238E27FC236}">
-                <a16:creationId xmlns:a16="http://schemas.microsoft.com/office/drawing/2014/main" id="{9BE47949-2EED-413B-86F7-0C4CB4D9B787}"/>
+                <a16:creationId xmlns:a16="http://schemas.microsoft.com/office/drawing/2014/main" id="{72F1555B-F78C-4212-B11B-7DEB2442280F}"/>
               </a:ext>
             </a:extLst>
           </p:cNvPr>
@@ -25537,7 +25537,7 @@
           <p:cNvPr id="19" name="reveal1-line-320">
             <a:extLst xmlns:a="http://schemas.openxmlformats.org/drawingml/2006/main">
               <a:ext uri="{FF2B5EF4-FFF2-40B4-BE49-F238E27FC236}">
-                <a16:creationId xmlns:a16="http://schemas.microsoft.com/office/drawing/2014/main" id="{9EF219AB-12AE-4690-9F91-BC4FD937F88C}"/>
+                <a16:creationId xmlns:a16="http://schemas.microsoft.com/office/drawing/2014/main" id="{AD758B99-439D-4FEB-8DAD-1B3BB4C4E30F}"/>
               </a:ext>
             </a:extLst>
           </p:cNvPr>
@@ -25577,7 +25577,7 @@
           <p:cNvPr id="20" name="reveal1-line-321">
             <a:extLst xmlns:a="http://schemas.openxmlformats.org/drawingml/2006/main">
               <a:ext uri="{FF2B5EF4-FFF2-40B4-BE49-F238E27FC236}">
-                <a16:creationId xmlns:a16="http://schemas.microsoft.com/office/drawing/2014/main" id="{8641760E-C84A-4BE2-AA3F-65B214D99130}"/>
+                <a16:creationId xmlns:a16="http://schemas.microsoft.com/office/drawing/2014/main" id="{4F30E622-583C-4501-AC48-B936D5C24EAA}"/>
               </a:ext>
             </a:extLst>
           </p:cNvPr>
@@ -25617,7 +25617,7 @@
           <p:cNvPr id="21" name="reveal1-line-322">
             <a:extLst xmlns:a="http://schemas.openxmlformats.org/drawingml/2006/main">
               <a:ext uri="{FF2B5EF4-FFF2-40B4-BE49-F238E27FC236}">
-                <a16:creationId xmlns:a16="http://schemas.microsoft.com/office/drawing/2014/main" id="{91B1B52A-41F5-4ADF-843D-527CB38EF38B}"/>
+                <a16:creationId xmlns:a16="http://schemas.microsoft.com/office/drawing/2014/main" id="{63E461BE-D3E2-4B95-9E48-2C14EFF34AF3}"/>
               </a:ext>
             </a:extLst>
           </p:cNvPr>
@@ -25657,7 +25657,7 @@
           <p:cNvPr id="22" name="reveal1-line-323">
             <a:extLst xmlns:a="http://schemas.openxmlformats.org/drawingml/2006/main">
               <a:ext uri="{FF2B5EF4-FFF2-40B4-BE49-F238E27FC236}">
-                <a16:creationId xmlns:a16="http://schemas.microsoft.com/office/drawing/2014/main" id="{C8C445E7-4942-4E24-90C6-47D0BE4F40A4}"/>
+                <a16:creationId xmlns:a16="http://schemas.microsoft.com/office/drawing/2014/main" id="{AF695BDB-34CF-4D99-A014-F2A2BFD493C9}"/>
               </a:ext>
             </a:extLst>
           </p:cNvPr>
@@ -25697,7 +25697,7 @@
           <p:cNvPr id="23" name="reveal1-line-324">
             <a:extLst xmlns:a="http://schemas.openxmlformats.org/drawingml/2006/main">
               <a:ext uri="{FF2B5EF4-FFF2-40B4-BE49-F238E27FC236}">
-                <a16:creationId xmlns:a16="http://schemas.microsoft.com/office/drawing/2014/main" id="{F3307FE0-242D-40F4-964A-70C07CB8C0B3}"/>
+                <a16:creationId xmlns:a16="http://schemas.microsoft.com/office/drawing/2014/main" id="{81E02860-5D5C-4468-985B-95C2C2D2D0B8}"/>
               </a:ext>
             </a:extLst>
           </p:cNvPr>
@@ -25737,7 +25737,7 @@
           <p:cNvPr id="24" name="reveal1-line-325">
             <a:extLst xmlns:a="http://schemas.openxmlformats.org/drawingml/2006/main">
               <a:ext uri="{FF2B5EF4-FFF2-40B4-BE49-F238E27FC236}">
-                <a16:creationId xmlns:a16="http://schemas.microsoft.com/office/drawing/2014/main" id="{794BBB47-A08E-482E-AECB-ACBA6EA353D9}"/>
+                <a16:creationId xmlns:a16="http://schemas.microsoft.com/office/drawing/2014/main" id="{40DA7219-49C8-415E-876A-5B3F4A8489DB}"/>
               </a:ext>
             </a:extLst>
           </p:cNvPr>
@@ -25777,7 +25777,7 @@
           <p:cNvPr id="25" name="reveal1-line-326">
             <a:extLst xmlns:a="http://schemas.openxmlformats.org/drawingml/2006/main">
               <a:ext uri="{FF2B5EF4-FFF2-40B4-BE49-F238E27FC236}">
-                <a16:creationId xmlns:a16="http://schemas.microsoft.com/office/drawing/2014/main" id="{3802D16A-490F-40E7-B842-37275D7A4FDE}"/>
+                <a16:creationId xmlns:a16="http://schemas.microsoft.com/office/drawing/2014/main" id="{E61616DA-40D7-411A-82B4-4734629C324B}"/>
               </a:ext>
             </a:extLst>
           </p:cNvPr>
@@ -25817,7 +25817,7 @@
           <p:cNvPr id="26" name="reveal1-line-327">
             <a:extLst xmlns:a="http://schemas.openxmlformats.org/drawingml/2006/main">
               <a:ext uri="{FF2B5EF4-FFF2-40B4-BE49-F238E27FC236}">
-                <a16:creationId xmlns:a16="http://schemas.microsoft.com/office/drawing/2014/main" id="{36018AAC-F667-4A6B-A4D3-19B3582718A7}"/>
+                <a16:creationId xmlns:a16="http://schemas.microsoft.com/office/drawing/2014/main" id="{4F0765C7-06D4-4450-86D9-D6E8E2375862}"/>
               </a:ext>
             </a:extLst>
           </p:cNvPr>
@@ -25857,7 +25857,7 @@
           <p:cNvPr id="27" name="reveal1-object-328">
             <a:extLst xmlns:a="http://schemas.openxmlformats.org/drawingml/2006/main">
               <a:ext uri="{FF2B5EF4-FFF2-40B4-BE49-F238E27FC236}">
-                <a16:creationId xmlns:a16="http://schemas.microsoft.com/office/drawing/2014/main" id="{118A8D2A-27FD-48F5-85C2-4D26D2C07E4F}"/>
+                <a16:creationId xmlns:a16="http://schemas.microsoft.com/office/drawing/2014/main" id="{783026F8-DA70-4C4E-BE0A-FEB8A165B9B0}"/>
               </a:ext>
             </a:extLst>
           </p:cNvPr>
@@ -25924,7 +25924,7 @@
           <p:cNvPr id="28" name="reveal1-line-329">
             <a:extLst xmlns:a="http://schemas.openxmlformats.org/drawingml/2006/main">
               <a:ext uri="{FF2B5EF4-FFF2-40B4-BE49-F238E27FC236}">
-                <a16:creationId xmlns:a16="http://schemas.microsoft.com/office/drawing/2014/main" id="{B1635920-FDEC-4A4F-8482-5A70A42E4ABF}"/>
+                <a16:creationId xmlns:a16="http://schemas.microsoft.com/office/drawing/2014/main" id="{CC1AC02A-A0DE-46AC-8032-A4697BB864D4}"/>
               </a:ext>
             </a:extLst>
           </p:cNvPr>
@@ -25964,7 +25964,7 @@
           <p:cNvPr id="29" name="reveal1-object-330">
             <a:extLst xmlns:a="http://schemas.openxmlformats.org/drawingml/2006/main">
               <a:ext uri="{FF2B5EF4-FFF2-40B4-BE49-F238E27FC236}">
-                <a16:creationId xmlns:a16="http://schemas.microsoft.com/office/drawing/2014/main" id="{8D1E38BD-6079-45D1-8B82-F81A925D5AB2}"/>
+                <a16:creationId xmlns:a16="http://schemas.microsoft.com/office/drawing/2014/main" id="{DF48AD7A-FAEC-4AEC-B030-7B61E9E42F69}"/>
               </a:ext>
             </a:extLst>
           </p:cNvPr>
@@ -26031,7 +26031,7 @@
           <p:cNvPr id="30" name="object-331">
             <a:extLst xmlns:a="http://schemas.openxmlformats.org/drawingml/2006/main">
               <a:ext uri="{FF2B5EF4-FFF2-40B4-BE49-F238E27FC236}">
-                <a16:creationId xmlns:a16="http://schemas.microsoft.com/office/drawing/2014/main" id="{42EACACC-0361-4682-A5FF-E2F0E54ECB9B}"/>
+                <a16:creationId xmlns:a16="http://schemas.microsoft.com/office/drawing/2014/main" id="{C1260018-15E2-46E0-8D9F-B283D6FAB8AC}"/>
               </a:ext>
             </a:extLst>
           </p:cNvPr>
@@ -26098,7 +26098,7 @@
           <p:cNvPr id="31" name="object-332">
             <a:extLst xmlns:a="http://schemas.openxmlformats.org/drawingml/2006/main">
               <a:ext uri="{FF2B5EF4-FFF2-40B4-BE49-F238E27FC236}">
-                <a16:creationId xmlns:a16="http://schemas.microsoft.com/office/drawing/2014/main" id="{92939ADC-9048-4635-B622-DE08461AC4C6}"/>
+                <a16:creationId xmlns:a16="http://schemas.microsoft.com/office/drawing/2014/main" id="{DF0A5B96-70AA-4E08-87D0-356B479C3D1E}"/>
               </a:ext>
             </a:extLst>
           </p:cNvPr>
@@ -26163,7 +26163,7 @@
     </p:spTree>
     <p:extLst>
       <p:ext uri="{BB962C8B-B14F-4D97-AF65-F5344CB8AC3E}">
-        <p14:creationId xmlns:p14="http://schemas.microsoft.com/office/powerpoint/2010/main" val="307884995"/>
+        <p14:creationId xmlns:p14="http://schemas.microsoft.com/office/powerpoint/2010/main" val="221452573"/>
       </p:ext>
     </p:extLst>
   </p:cSld>
@@ -26664,7 +26664,7 @@
           <p:cNvPr id="42" name="object-333">
             <a:extLst xmlns:a="http://schemas.openxmlformats.org/drawingml/2006/main">
               <a:ext uri="{FF2B5EF4-FFF2-40B4-BE49-F238E27FC236}">
-                <a16:creationId xmlns:a16="http://schemas.microsoft.com/office/drawing/2014/main" id="{EE59EFEB-CCEC-415A-8912-A2D16ECA681D}"/>
+                <a16:creationId xmlns:a16="http://schemas.microsoft.com/office/drawing/2014/main" id="{C659F855-8FE3-4F04-9FF5-25C331004C7F}"/>
               </a:ext>
             </a:extLst>
           </p:cNvPr>
@@ -26731,7 +26731,7 @@
           <p:cNvPr id="2" name="object-334">
             <a:extLst xmlns:a="http://schemas.openxmlformats.org/drawingml/2006/main">
               <a:ext uri="{FF2B5EF4-FFF2-40B4-BE49-F238E27FC236}">
-                <a16:creationId xmlns:a16="http://schemas.microsoft.com/office/drawing/2014/main" id="{BF5BBDE5-1A6E-4ED0-89A4-1DD77AC5846C}"/>
+                <a16:creationId xmlns:a16="http://schemas.microsoft.com/office/drawing/2014/main" id="{45A79A65-DEA1-4D4A-87D2-147515B51397}"/>
               </a:ext>
             </a:extLst>
           </p:cNvPr>
@@ -26798,7 +26798,7 @@
           <p:cNvPr id="3" name="line-335">
             <a:extLst xmlns:a="http://schemas.openxmlformats.org/drawingml/2006/main">
               <a:ext uri="{FF2B5EF4-FFF2-40B4-BE49-F238E27FC236}">
-                <a16:creationId xmlns:a16="http://schemas.microsoft.com/office/drawing/2014/main" id="{CE004DFD-565B-4733-8BC5-89E853031C2D}"/>
+                <a16:creationId xmlns:a16="http://schemas.microsoft.com/office/drawing/2014/main" id="{93E7C6FC-1774-42D7-8371-A79D3FEFBDE0}"/>
               </a:ext>
             </a:extLst>
           </p:cNvPr>
@@ -26838,7 +26838,7 @@
           <p:cNvPr id="4" name="line-336">
             <a:extLst xmlns:a="http://schemas.openxmlformats.org/drawingml/2006/main">
               <a:ext uri="{FF2B5EF4-FFF2-40B4-BE49-F238E27FC236}">
-                <a16:creationId xmlns:a16="http://schemas.microsoft.com/office/drawing/2014/main" id="{5400D589-BAC5-40E9-88CC-4D6C5AE3DFF8}"/>
+                <a16:creationId xmlns:a16="http://schemas.microsoft.com/office/drawing/2014/main" id="{AF2371D8-51B4-4D06-8F7E-BE6D634E1424}"/>
               </a:ext>
             </a:extLst>
           </p:cNvPr>
@@ -26878,7 +26878,7 @@
           <p:cNvPr id="5" name="object-337">
             <a:extLst xmlns:a="http://schemas.openxmlformats.org/drawingml/2006/main">
               <a:ext uri="{FF2B5EF4-FFF2-40B4-BE49-F238E27FC236}">
-                <a16:creationId xmlns:a16="http://schemas.microsoft.com/office/drawing/2014/main" id="{B1B194D3-0F36-4987-AC81-868D06F4CAE5}"/>
+                <a16:creationId xmlns:a16="http://schemas.microsoft.com/office/drawing/2014/main" id="{C160AFC7-3354-4155-8B14-F4D34BFF339B}"/>
               </a:ext>
             </a:extLst>
           </p:cNvPr>
@@ -26945,7 +26945,7 @@
           <p:cNvPr id="6" name="object-338">
             <a:extLst xmlns:a="http://schemas.openxmlformats.org/drawingml/2006/main">
               <a:ext uri="{FF2B5EF4-FFF2-40B4-BE49-F238E27FC236}">
-                <a16:creationId xmlns:a16="http://schemas.microsoft.com/office/drawing/2014/main" id="{348B17FE-40C7-4EE8-9130-90264C04959D}"/>
+                <a16:creationId xmlns:a16="http://schemas.microsoft.com/office/drawing/2014/main" id="{DAF25415-9ECF-47B3-A52C-7C77DD9CBDBF}"/>
               </a:ext>
             </a:extLst>
           </p:cNvPr>
@@ -26976,7 +26976,7 @@
           <p:cNvPr id="7" name="object-339">
             <a:extLst xmlns:a="http://schemas.openxmlformats.org/drawingml/2006/main">
               <a:ext uri="{FF2B5EF4-FFF2-40B4-BE49-F238E27FC236}">
-                <a16:creationId xmlns:a16="http://schemas.microsoft.com/office/drawing/2014/main" id="{F157B76B-B766-4C3E-964F-B83F0398BA94}"/>
+                <a16:creationId xmlns:a16="http://schemas.microsoft.com/office/drawing/2014/main" id="{0DC48C55-FBEC-4550-AC32-D8A01E034935}"/>
               </a:ext>
             </a:extLst>
           </p:cNvPr>
@@ -27043,7 +27043,7 @@
           <p:cNvPr id="8" name="line-340">
             <a:extLst xmlns:a="http://schemas.openxmlformats.org/drawingml/2006/main">
               <a:ext uri="{FF2B5EF4-FFF2-40B4-BE49-F238E27FC236}">
-                <a16:creationId xmlns:a16="http://schemas.microsoft.com/office/drawing/2014/main" id="{43824F95-B9C2-4AFD-89A7-E4A14BFF50C6}"/>
+                <a16:creationId xmlns:a16="http://schemas.microsoft.com/office/drawing/2014/main" id="{32A11FE0-86D8-407D-AC93-7BCC8D7155C8}"/>
               </a:ext>
             </a:extLst>
           </p:cNvPr>
@@ -27083,7 +27083,7 @@
           <p:cNvPr id="9" name="line-341">
             <a:extLst xmlns:a="http://schemas.openxmlformats.org/drawingml/2006/main">
               <a:ext uri="{FF2B5EF4-FFF2-40B4-BE49-F238E27FC236}">
-                <a16:creationId xmlns:a16="http://schemas.microsoft.com/office/drawing/2014/main" id="{0A118253-F114-4B8A-9A4B-6585793E6E68}"/>
+                <a16:creationId xmlns:a16="http://schemas.microsoft.com/office/drawing/2014/main" id="{4D5C5931-E3D3-471E-BCE0-AFAF84DE1A49}"/>
               </a:ext>
             </a:extLst>
           </p:cNvPr>
@@ -27123,7 +27123,7 @@
           <p:cNvPr id="10" name="line-342">
             <a:extLst xmlns:a="http://schemas.openxmlformats.org/drawingml/2006/main">
               <a:ext uri="{FF2B5EF4-FFF2-40B4-BE49-F238E27FC236}">
-                <a16:creationId xmlns:a16="http://schemas.microsoft.com/office/drawing/2014/main" id="{CDE6D88C-D169-4CB5-8176-577C4365FEBD}"/>
+                <a16:creationId xmlns:a16="http://schemas.microsoft.com/office/drawing/2014/main" id="{6B926069-5ECC-4365-B233-1491615CEB24}"/>
               </a:ext>
             </a:extLst>
           </p:cNvPr>
@@ -27163,7 +27163,7 @@
           <p:cNvPr id="11" name="object-343">
             <a:extLst xmlns:a="http://schemas.openxmlformats.org/drawingml/2006/main">
               <a:ext uri="{FF2B5EF4-FFF2-40B4-BE49-F238E27FC236}">
-                <a16:creationId xmlns:a16="http://schemas.microsoft.com/office/drawing/2014/main" id="{DFCA94B7-5CBC-430B-98DC-C5468FF021A0}"/>
+                <a16:creationId xmlns:a16="http://schemas.microsoft.com/office/drawing/2014/main" id="{E1FA0B21-172F-4734-BDF1-34548516690A}"/>
               </a:ext>
             </a:extLst>
           </p:cNvPr>
@@ -27194,7 +27194,7 @@
           <p:cNvPr id="12" name="object-344">
             <a:extLst xmlns:a="http://schemas.openxmlformats.org/drawingml/2006/main">
               <a:ext uri="{FF2B5EF4-FFF2-40B4-BE49-F238E27FC236}">
-                <a16:creationId xmlns:a16="http://schemas.microsoft.com/office/drawing/2014/main" id="{425D634A-2BE5-42B1-8BA7-E8EEC57BA10A}"/>
+                <a16:creationId xmlns:a16="http://schemas.microsoft.com/office/drawing/2014/main" id="{82579D01-F6F1-4703-8DC7-FC629954F4E6}"/>
               </a:ext>
             </a:extLst>
           </p:cNvPr>
@@ -27261,7 +27261,7 @@
           <p:cNvPr id="13" name="line-345">
             <a:extLst xmlns:a="http://schemas.openxmlformats.org/drawingml/2006/main">
               <a:ext uri="{FF2B5EF4-FFF2-40B4-BE49-F238E27FC236}">
-                <a16:creationId xmlns:a16="http://schemas.microsoft.com/office/drawing/2014/main" id="{297D2493-B453-4598-96BF-1E635F92E7F8}"/>
+                <a16:creationId xmlns:a16="http://schemas.microsoft.com/office/drawing/2014/main" id="{525B509B-C45D-4729-952C-1D51C6D90294}"/>
               </a:ext>
             </a:extLst>
           </p:cNvPr>
@@ -27301,7 +27301,7 @@
           <p:cNvPr id="14" name="line-346">
             <a:extLst xmlns:a="http://schemas.openxmlformats.org/drawingml/2006/main">
               <a:ext uri="{FF2B5EF4-FFF2-40B4-BE49-F238E27FC236}">
-                <a16:creationId xmlns:a16="http://schemas.microsoft.com/office/drawing/2014/main" id="{1ECE9200-A0C5-4A63-B57F-2EC7236DB503}"/>
+                <a16:creationId xmlns:a16="http://schemas.microsoft.com/office/drawing/2014/main" id="{F20DCB7B-6788-479F-B7D4-26BA5F85C504}"/>
               </a:ext>
             </a:extLst>
           </p:cNvPr>
@@ -27341,7 +27341,7 @@
           <p:cNvPr id="15" name="line-347">
             <a:extLst xmlns:a="http://schemas.openxmlformats.org/drawingml/2006/main">
               <a:ext uri="{FF2B5EF4-FFF2-40B4-BE49-F238E27FC236}">
-                <a16:creationId xmlns:a16="http://schemas.microsoft.com/office/drawing/2014/main" id="{54DD802E-E17F-40BA-B328-7288105A6781}"/>
+                <a16:creationId xmlns:a16="http://schemas.microsoft.com/office/drawing/2014/main" id="{E509E2C6-3C45-417C-B361-B856C88FD4A9}"/>
               </a:ext>
             </a:extLst>
           </p:cNvPr>
@@ -27381,7 +27381,7 @@
           <p:cNvPr id="16" name="object-348">
             <a:extLst xmlns:a="http://schemas.openxmlformats.org/drawingml/2006/main">
               <a:ext uri="{FF2B5EF4-FFF2-40B4-BE49-F238E27FC236}">
-                <a16:creationId xmlns:a16="http://schemas.microsoft.com/office/drawing/2014/main" id="{84CED093-F962-4128-8DEC-F7E87EDC3AD3}"/>
+                <a16:creationId xmlns:a16="http://schemas.microsoft.com/office/drawing/2014/main" id="{034C519B-2C6D-44AC-BC03-F22ECC984E33}"/>
               </a:ext>
             </a:extLst>
           </p:cNvPr>
@@ -27448,7 +27448,7 @@
           <p:cNvPr id="17" name="object-349">
             <a:extLst xmlns:a="http://schemas.openxmlformats.org/drawingml/2006/main">
               <a:ext uri="{FF2B5EF4-FFF2-40B4-BE49-F238E27FC236}">
-                <a16:creationId xmlns:a16="http://schemas.microsoft.com/office/drawing/2014/main" id="{27843185-6B3C-471B-9125-808E5732DD51}"/>
+                <a16:creationId xmlns:a16="http://schemas.microsoft.com/office/drawing/2014/main" id="{8FD47F00-1207-4A3D-8363-2E7B451DD16A}"/>
               </a:ext>
             </a:extLst>
           </p:cNvPr>
@@ -27515,7 +27515,7 @@
           <p:cNvPr id="18" name="reveal1-object-350">
             <a:extLst xmlns:a="http://schemas.openxmlformats.org/drawingml/2006/main">
               <a:ext uri="{FF2B5EF4-FFF2-40B4-BE49-F238E27FC236}">
-                <a16:creationId xmlns:a16="http://schemas.microsoft.com/office/drawing/2014/main" id="{0B43CB35-BFE1-4CBF-8EC9-2DE0644A2B5A}"/>
+                <a16:creationId xmlns:a16="http://schemas.microsoft.com/office/drawing/2014/main" id="{3C0C07F9-5F4E-4468-958B-3EDE128EB0CC}"/>
               </a:ext>
             </a:extLst>
           </p:cNvPr>
@@ -27582,7 +27582,7 @@
           <p:cNvPr id="19" name="reveal1-object-351">
             <a:extLst xmlns:a="http://schemas.openxmlformats.org/drawingml/2006/main">
               <a:ext uri="{FF2B5EF4-FFF2-40B4-BE49-F238E27FC236}">
-                <a16:creationId xmlns:a16="http://schemas.microsoft.com/office/drawing/2014/main" id="{83C2C366-BA4D-4ECF-8476-EF693A393897}"/>
+                <a16:creationId xmlns:a16="http://schemas.microsoft.com/office/drawing/2014/main" id="{90821C7E-896C-4511-968B-0D163AC768A8}"/>
               </a:ext>
             </a:extLst>
           </p:cNvPr>
@@ -27613,7 +27613,7 @@
           <p:cNvPr id="20" name="reveal1-object-352">
             <a:extLst xmlns:a="http://schemas.openxmlformats.org/drawingml/2006/main">
               <a:ext uri="{FF2B5EF4-FFF2-40B4-BE49-F238E27FC236}">
-                <a16:creationId xmlns:a16="http://schemas.microsoft.com/office/drawing/2014/main" id="{B0609C4E-0E6D-4F04-B4AD-3A0D9D416BC5}"/>
+                <a16:creationId xmlns:a16="http://schemas.microsoft.com/office/drawing/2014/main" id="{52773A55-E568-433E-9220-5A925A74DED4}"/>
               </a:ext>
             </a:extLst>
           </p:cNvPr>
@@ -27680,7 +27680,7 @@
           <p:cNvPr id="21" name="reveal1-line-353">
             <a:extLst xmlns:a="http://schemas.openxmlformats.org/drawingml/2006/main">
               <a:ext uri="{FF2B5EF4-FFF2-40B4-BE49-F238E27FC236}">
-                <a16:creationId xmlns:a16="http://schemas.microsoft.com/office/drawing/2014/main" id="{AABCF720-43DD-43F5-A1E9-0C3E2A03EE6D}"/>
+                <a16:creationId xmlns:a16="http://schemas.microsoft.com/office/drawing/2014/main" id="{235C74E0-C210-4331-BCDD-6F5E680A501D}"/>
               </a:ext>
             </a:extLst>
           </p:cNvPr>
@@ -27720,7 +27720,7 @@
           <p:cNvPr id="22" name="reveal1-line-354">
             <a:extLst xmlns:a="http://schemas.openxmlformats.org/drawingml/2006/main">
               <a:ext uri="{FF2B5EF4-FFF2-40B4-BE49-F238E27FC236}">
-                <a16:creationId xmlns:a16="http://schemas.microsoft.com/office/drawing/2014/main" id="{6C2AD18E-1BCB-4964-9D21-19AE3C359820}"/>
+                <a16:creationId xmlns:a16="http://schemas.microsoft.com/office/drawing/2014/main" id="{305AEFD8-62C3-4053-863D-4B5142C28890}"/>
               </a:ext>
             </a:extLst>
           </p:cNvPr>
@@ -27760,7 +27760,7 @@
           <p:cNvPr id="23" name="reveal1-line-355">
             <a:extLst xmlns:a="http://schemas.openxmlformats.org/drawingml/2006/main">
               <a:ext uri="{FF2B5EF4-FFF2-40B4-BE49-F238E27FC236}">
-                <a16:creationId xmlns:a16="http://schemas.microsoft.com/office/drawing/2014/main" id="{894D03AD-9490-4A2E-ACF3-F7D6853A6CAD}"/>
+                <a16:creationId xmlns:a16="http://schemas.microsoft.com/office/drawing/2014/main" id="{A4BBC10B-D28A-4FC5-92ED-A96CE77197F4}"/>
               </a:ext>
             </a:extLst>
           </p:cNvPr>
@@ -27800,7 +27800,7 @@
           <p:cNvPr id="24" name="reveal1-object-356">
             <a:extLst xmlns:a="http://schemas.openxmlformats.org/drawingml/2006/main">
               <a:ext uri="{FF2B5EF4-FFF2-40B4-BE49-F238E27FC236}">
-                <a16:creationId xmlns:a16="http://schemas.microsoft.com/office/drawing/2014/main" id="{737951C1-D332-4127-BA87-8090B0002A80}"/>
+                <a16:creationId xmlns:a16="http://schemas.microsoft.com/office/drawing/2014/main" id="{AD12721D-FB77-437A-B612-6A3D985BC19A}"/>
               </a:ext>
             </a:extLst>
           </p:cNvPr>
@@ -27867,7 +27867,7 @@
           <p:cNvPr id="25" name="reveal1-object-357">
             <a:extLst xmlns:a="http://schemas.openxmlformats.org/drawingml/2006/main">
               <a:ext uri="{FF2B5EF4-FFF2-40B4-BE49-F238E27FC236}">
-                <a16:creationId xmlns:a16="http://schemas.microsoft.com/office/drawing/2014/main" id="{1E579342-CD97-4950-A1B7-12372F0D6732}"/>
+                <a16:creationId xmlns:a16="http://schemas.microsoft.com/office/drawing/2014/main" id="{7CC5D1DB-44C4-4BA6-950D-5C1A782B0A19}"/>
               </a:ext>
             </a:extLst>
           </p:cNvPr>
@@ -27934,7 +27934,7 @@
           <p:cNvPr id="26" name="reveal1-object-358">
             <a:extLst xmlns:a="http://schemas.openxmlformats.org/drawingml/2006/main">
               <a:ext uri="{FF2B5EF4-FFF2-40B4-BE49-F238E27FC236}">
-                <a16:creationId xmlns:a16="http://schemas.microsoft.com/office/drawing/2014/main" id="{70C19F3C-F733-48EE-B356-5337B6B2615D}"/>
+                <a16:creationId xmlns:a16="http://schemas.microsoft.com/office/drawing/2014/main" id="{2D9529CB-01AC-4108-BD83-F26EC89A0E7D}"/>
               </a:ext>
             </a:extLst>
           </p:cNvPr>
@@ -28001,7 +28001,7 @@
           <p:cNvPr id="27" name="reveal2-object-359">
             <a:extLst xmlns:a="http://schemas.openxmlformats.org/drawingml/2006/main">
               <a:ext uri="{FF2B5EF4-FFF2-40B4-BE49-F238E27FC236}">
-                <a16:creationId xmlns:a16="http://schemas.microsoft.com/office/drawing/2014/main" id="{EDDD6661-9864-4FC8-B313-9900C77BF457}"/>
+                <a16:creationId xmlns:a16="http://schemas.microsoft.com/office/drawing/2014/main" id="{7EEEDEC8-A6AE-46AA-84FA-4096AF6BD5BE}"/>
               </a:ext>
             </a:extLst>
           </p:cNvPr>
@@ -28068,7 +28068,7 @@
           <p:cNvPr id="28" name="reveal2-object-360">
             <a:extLst xmlns:a="http://schemas.openxmlformats.org/drawingml/2006/main">
               <a:ext uri="{FF2B5EF4-FFF2-40B4-BE49-F238E27FC236}">
-                <a16:creationId xmlns:a16="http://schemas.microsoft.com/office/drawing/2014/main" id="{5FE7C024-B7FE-468B-B75D-6093F20974D2}"/>
+                <a16:creationId xmlns:a16="http://schemas.microsoft.com/office/drawing/2014/main" id="{008E62A9-C500-4E34-A74C-47C03F57D6CA}"/>
               </a:ext>
             </a:extLst>
           </p:cNvPr>
@@ -28099,7 +28099,7 @@
           <p:cNvPr id="29" name="reveal2-object-361">
             <a:extLst xmlns:a="http://schemas.openxmlformats.org/drawingml/2006/main">
               <a:ext uri="{FF2B5EF4-FFF2-40B4-BE49-F238E27FC236}">
-                <a16:creationId xmlns:a16="http://schemas.microsoft.com/office/drawing/2014/main" id="{4663F841-DD63-4FDF-8A50-5C27F07FB28F}"/>
+                <a16:creationId xmlns:a16="http://schemas.microsoft.com/office/drawing/2014/main" id="{E5F939E8-0940-48DF-A8FF-6D0AF1D53008}"/>
               </a:ext>
             </a:extLst>
           </p:cNvPr>
@@ -28166,7 +28166,7 @@
           <p:cNvPr id="30" name="reveal2-line-362">
             <a:extLst xmlns:a="http://schemas.openxmlformats.org/drawingml/2006/main">
               <a:ext uri="{FF2B5EF4-FFF2-40B4-BE49-F238E27FC236}">
-                <a16:creationId xmlns:a16="http://schemas.microsoft.com/office/drawing/2014/main" id="{48ABADDB-8131-4D47-84F3-AF26497B85C5}"/>
+                <a16:creationId xmlns:a16="http://schemas.microsoft.com/office/drawing/2014/main" id="{F81328B4-BF1E-4EE6-A0AB-D8236272A339}"/>
               </a:ext>
             </a:extLst>
           </p:cNvPr>
@@ -28206,7 +28206,7 @@
           <p:cNvPr id="31" name="reveal2-line-363">
             <a:extLst xmlns:a="http://schemas.openxmlformats.org/drawingml/2006/main">
               <a:ext uri="{FF2B5EF4-FFF2-40B4-BE49-F238E27FC236}">
-                <a16:creationId xmlns:a16="http://schemas.microsoft.com/office/drawing/2014/main" id="{00C02AB1-A1D8-4E1F-A740-B42A5A06CC6B}"/>
+                <a16:creationId xmlns:a16="http://schemas.microsoft.com/office/drawing/2014/main" id="{8BC12FC0-4B09-4282-AF8A-EC703E31E6C0}"/>
               </a:ext>
             </a:extLst>
           </p:cNvPr>
@@ -28246,7 +28246,7 @@
           <p:cNvPr id="32" name="reveal2-line-364">
             <a:extLst xmlns:a="http://schemas.openxmlformats.org/drawingml/2006/main">
               <a:ext uri="{FF2B5EF4-FFF2-40B4-BE49-F238E27FC236}">
-                <a16:creationId xmlns:a16="http://schemas.microsoft.com/office/drawing/2014/main" id="{A07ED524-F67E-4A21-9163-35B1E10D2252}"/>
+                <a16:creationId xmlns:a16="http://schemas.microsoft.com/office/drawing/2014/main" id="{A9839F69-B39B-4988-AF02-C762A7E83A9E}"/>
               </a:ext>
             </a:extLst>
           </p:cNvPr>
@@ -28286,7 +28286,7 @@
           <p:cNvPr id="33" name="reveal2-object-365">
             <a:extLst xmlns:a="http://schemas.openxmlformats.org/drawingml/2006/main">
               <a:ext uri="{FF2B5EF4-FFF2-40B4-BE49-F238E27FC236}">
-                <a16:creationId xmlns:a16="http://schemas.microsoft.com/office/drawing/2014/main" id="{FE394FBE-8C58-4920-9A7B-43451B766457}"/>
+                <a16:creationId xmlns:a16="http://schemas.microsoft.com/office/drawing/2014/main" id="{5EE4B518-F093-4612-B528-A2162D72A1CD}"/>
               </a:ext>
             </a:extLst>
           </p:cNvPr>
@@ -28317,7 +28317,7 @@
           <p:cNvPr id="34" name="reveal2-object-366">
             <a:extLst xmlns:a="http://schemas.openxmlformats.org/drawingml/2006/main">
               <a:ext uri="{FF2B5EF4-FFF2-40B4-BE49-F238E27FC236}">
-                <a16:creationId xmlns:a16="http://schemas.microsoft.com/office/drawing/2014/main" id="{4203FCE2-0837-4983-8FB2-4D2D9508B4C2}"/>
+                <a16:creationId xmlns:a16="http://schemas.microsoft.com/office/drawing/2014/main" id="{581A91BB-EC26-4FD2-A788-EACE227D746C}"/>
               </a:ext>
             </a:extLst>
           </p:cNvPr>
@@ -28384,7 +28384,7 @@
           <p:cNvPr id="35" name="reveal2-line-367">
             <a:extLst xmlns:a="http://schemas.openxmlformats.org/drawingml/2006/main">
               <a:ext uri="{FF2B5EF4-FFF2-40B4-BE49-F238E27FC236}">
-                <a16:creationId xmlns:a16="http://schemas.microsoft.com/office/drawing/2014/main" id="{3A65000B-7FF5-40FA-A671-7934C057747F}"/>
+                <a16:creationId xmlns:a16="http://schemas.microsoft.com/office/drawing/2014/main" id="{2B3EF287-E570-46A6-92DF-ED2E60E8B094}"/>
               </a:ext>
             </a:extLst>
           </p:cNvPr>
@@ -28424,7 +28424,7 @@
           <p:cNvPr id="36" name="reveal2-line-368">
             <a:extLst xmlns:a="http://schemas.openxmlformats.org/drawingml/2006/main">
               <a:ext uri="{FF2B5EF4-FFF2-40B4-BE49-F238E27FC236}">
-                <a16:creationId xmlns:a16="http://schemas.microsoft.com/office/drawing/2014/main" id="{FE64B39C-A174-4D84-AA54-EA3A83091B47}"/>
+                <a16:creationId xmlns:a16="http://schemas.microsoft.com/office/drawing/2014/main" id="{CAAA602B-FB70-493C-8073-737DCC4D79E4}"/>
               </a:ext>
             </a:extLst>
           </p:cNvPr>
@@ -28464,7 +28464,7 @@
           <p:cNvPr id="37" name="reveal2-line-369">
             <a:extLst xmlns:a="http://schemas.openxmlformats.org/drawingml/2006/main">
               <a:ext uri="{FF2B5EF4-FFF2-40B4-BE49-F238E27FC236}">
-                <a16:creationId xmlns:a16="http://schemas.microsoft.com/office/drawing/2014/main" id="{DAD7C0E2-33BF-422D-BF87-3862EB62614A}"/>
+                <a16:creationId xmlns:a16="http://schemas.microsoft.com/office/drawing/2014/main" id="{F6DB6261-F9B9-46E1-9683-D88E1707DAB6}"/>
               </a:ext>
             </a:extLst>
           </p:cNvPr>
@@ -28504,7 +28504,7 @@
           <p:cNvPr id="38" name="reveal2-object-370">
             <a:extLst xmlns:a="http://schemas.openxmlformats.org/drawingml/2006/main">
               <a:ext uri="{FF2B5EF4-FFF2-40B4-BE49-F238E27FC236}">
-                <a16:creationId xmlns:a16="http://schemas.microsoft.com/office/drawing/2014/main" id="{D10729AF-267B-43D7-B20C-53CF53C03CEC}"/>
+                <a16:creationId xmlns:a16="http://schemas.microsoft.com/office/drawing/2014/main" id="{A1434C3B-7A37-46B8-BFE2-89EEA7F1F96F}"/>
               </a:ext>
             </a:extLst>
           </p:cNvPr>
@@ -28571,7 +28571,7 @@
           <p:cNvPr id="39" name="reveal2-object-371">
             <a:extLst xmlns:a="http://schemas.openxmlformats.org/drawingml/2006/main">
               <a:ext uri="{FF2B5EF4-FFF2-40B4-BE49-F238E27FC236}">
-                <a16:creationId xmlns:a16="http://schemas.microsoft.com/office/drawing/2014/main" id="{A3A107DE-B8F7-4902-8889-69D5B6DF901A}"/>
+                <a16:creationId xmlns:a16="http://schemas.microsoft.com/office/drawing/2014/main" id="{1FCA16B5-EEB0-4898-8C37-17A2CB7C4248}"/>
               </a:ext>
             </a:extLst>
           </p:cNvPr>
@@ -28638,7 +28638,7 @@
           <p:cNvPr id="40" name="object-372">
             <a:extLst xmlns:a="http://schemas.openxmlformats.org/drawingml/2006/main">
               <a:ext uri="{FF2B5EF4-FFF2-40B4-BE49-F238E27FC236}">
-                <a16:creationId xmlns:a16="http://schemas.microsoft.com/office/drawing/2014/main" id="{28F53639-876A-475F-99DC-8B1E785D0DD1}"/>
+                <a16:creationId xmlns:a16="http://schemas.microsoft.com/office/drawing/2014/main" id="{C62EF4EC-8374-40EC-B538-69D0ADEE111E}"/>
               </a:ext>
             </a:extLst>
           </p:cNvPr>
@@ -28705,7 +28705,7 @@
           <p:cNvPr id="41" name="object-373">
             <a:extLst xmlns:a="http://schemas.openxmlformats.org/drawingml/2006/main">
               <a:ext uri="{FF2B5EF4-FFF2-40B4-BE49-F238E27FC236}">
-                <a16:creationId xmlns:a16="http://schemas.microsoft.com/office/drawing/2014/main" id="{1A13353A-8C90-4B42-8552-A44017ECD9EB}"/>
+                <a16:creationId xmlns:a16="http://schemas.microsoft.com/office/drawing/2014/main" id="{2E317110-BD95-4A7E-90F6-C117B04F2F09}"/>
               </a:ext>
             </a:extLst>
           </p:cNvPr>
@@ -28770,7 +28770,7 @@
     </p:spTree>
     <p:extLst>
       <p:ext uri="{BB962C8B-B14F-4D97-AF65-F5344CB8AC3E}">
-        <p14:creationId xmlns:p14="http://schemas.microsoft.com/office/powerpoint/2010/main" val="1256718419"/>
+        <p14:creationId xmlns:p14="http://schemas.microsoft.com/office/powerpoint/2010/main" val="767008200"/>
       </p:ext>
     </p:extLst>
   </p:cSld>
@@ -29485,7 +29485,7 @@
           <p:cNvPr id="36" name="object-374">
             <a:extLst xmlns:a="http://schemas.openxmlformats.org/drawingml/2006/main">
               <a:ext uri="{FF2B5EF4-FFF2-40B4-BE49-F238E27FC236}">
-                <a16:creationId xmlns:a16="http://schemas.microsoft.com/office/drawing/2014/main" id="{FE8EAB19-CAE9-4C8B-9E1C-9A993BA568AD}"/>
+                <a16:creationId xmlns:a16="http://schemas.microsoft.com/office/drawing/2014/main" id="{5F6CF9CF-73F3-4FFB-B58A-6645F4D071E9}"/>
               </a:ext>
             </a:extLst>
           </p:cNvPr>
@@ -29552,7 +29552,7 @@
           <p:cNvPr id="2" name="object-375">
             <a:extLst xmlns:a="http://schemas.openxmlformats.org/drawingml/2006/main">
               <a:ext uri="{FF2B5EF4-FFF2-40B4-BE49-F238E27FC236}">
-                <a16:creationId xmlns:a16="http://schemas.microsoft.com/office/drawing/2014/main" id="{B74F8A94-7725-4BD2-871A-A104EC365E9F}"/>
+                <a16:creationId xmlns:a16="http://schemas.microsoft.com/office/drawing/2014/main" id="{D84E227F-8F8F-4150-93BD-E2C10F233247}"/>
               </a:ext>
             </a:extLst>
           </p:cNvPr>
@@ -29619,7 +29619,7 @@
           <p:cNvPr id="3" name="object-376">
             <a:extLst xmlns:a="http://schemas.openxmlformats.org/drawingml/2006/main">
               <a:ext uri="{FF2B5EF4-FFF2-40B4-BE49-F238E27FC236}">
-                <a16:creationId xmlns:a16="http://schemas.microsoft.com/office/drawing/2014/main" id="{830E30C2-3422-4700-8CEE-6E3A4859F01A}"/>
+                <a16:creationId xmlns:a16="http://schemas.microsoft.com/office/drawing/2014/main" id="{B7BDFACA-ADB1-479C-B393-E20C9651C4AB}"/>
               </a:ext>
             </a:extLst>
           </p:cNvPr>
@@ -29650,7 +29650,7 @@
           <p:cNvPr id="4" name="object-377">
             <a:extLst xmlns:a="http://schemas.openxmlformats.org/drawingml/2006/main">
               <a:ext uri="{FF2B5EF4-FFF2-40B4-BE49-F238E27FC236}">
-                <a16:creationId xmlns:a16="http://schemas.microsoft.com/office/drawing/2014/main" id="{F114537B-D428-429B-9D97-4043B33EC11D}"/>
+                <a16:creationId xmlns:a16="http://schemas.microsoft.com/office/drawing/2014/main" id="{263BD29A-8EA1-426D-8426-9A9855861DCA}"/>
               </a:ext>
             </a:extLst>
           </p:cNvPr>
@@ -29717,7 +29717,7 @@
           <p:cNvPr id="5" name="object-378">
             <a:extLst xmlns:a="http://schemas.openxmlformats.org/drawingml/2006/main">
               <a:ext uri="{FF2B5EF4-FFF2-40B4-BE49-F238E27FC236}">
-                <a16:creationId xmlns:a16="http://schemas.microsoft.com/office/drawing/2014/main" id="{537C3BD3-6E98-4AD1-937C-27EA2A5D7A07}"/>
+                <a16:creationId xmlns:a16="http://schemas.microsoft.com/office/drawing/2014/main" id="{F4DBFA04-9A4D-474F-96E4-61F40EF1B2B9}"/>
               </a:ext>
             </a:extLst>
           </p:cNvPr>
@@ -29748,7 +29748,7 @@
           <p:cNvPr id="6" name="object-379">
             <a:extLst xmlns:a="http://schemas.openxmlformats.org/drawingml/2006/main">
               <a:ext uri="{FF2B5EF4-FFF2-40B4-BE49-F238E27FC236}">
-                <a16:creationId xmlns:a16="http://schemas.microsoft.com/office/drawing/2014/main" id="{8F694A46-7D9F-4B06-92F3-77E8F5536ACE}"/>
+                <a16:creationId xmlns:a16="http://schemas.microsoft.com/office/drawing/2014/main" id="{D9AF28FB-B0C9-4B4C-9059-F7AF9DF3403F}"/>
               </a:ext>
             </a:extLst>
           </p:cNvPr>
@@ -29815,7 +29815,7 @@
           <p:cNvPr id="7" name="object-380">
             <a:extLst xmlns:a="http://schemas.openxmlformats.org/drawingml/2006/main">
               <a:ext uri="{FF2B5EF4-FFF2-40B4-BE49-F238E27FC236}">
-                <a16:creationId xmlns:a16="http://schemas.microsoft.com/office/drawing/2014/main" id="{46B08FFF-6A52-49C6-AF47-52F38A3B9FA0}"/>
+                <a16:creationId xmlns:a16="http://schemas.microsoft.com/office/drawing/2014/main" id="{60A1A201-9D20-41DC-B963-30A8F23F69C7}"/>
               </a:ext>
             </a:extLst>
           </p:cNvPr>
@@ -29846,7 +29846,7 @@
           <p:cNvPr id="8" name="object-381">
             <a:extLst xmlns:a="http://schemas.openxmlformats.org/drawingml/2006/main">
               <a:ext uri="{FF2B5EF4-FFF2-40B4-BE49-F238E27FC236}">
-                <a16:creationId xmlns:a16="http://schemas.microsoft.com/office/drawing/2014/main" id="{8887F47F-BC2C-4366-9D3E-47F33C788260}"/>
+                <a16:creationId xmlns:a16="http://schemas.microsoft.com/office/drawing/2014/main" id="{CAA62571-B641-4FB2-9AF5-05249051DD93}"/>
               </a:ext>
             </a:extLst>
           </p:cNvPr>
@@ -29913,7 +29913,7 @@
           <p:cNvPr id="9" name="line-382">
             <a:extLst xmlns:a="http://schemas.openxmlformats.org/drawingml/2006/main">
               <a:ext uri="{FF2B5EF4-FFF2-40B4-BE49-F238E27FC236}">
-                <a16:creationId xmlns:a16="http://schemas.microsoft.com/office/drawing/2014/main" id="{7CE73468-EAA0-465B-A68E-BA4C90DC3FFC}"/>
+                <a16:creationId xmlns:a16="http://schemas.microsoft.com/office/drawing/2014/main" id="{27FDF6A4-A7B3-4F7B-B5DA-6B80E7F32686}"/>
               </a:ext>
             </a:extLst>
           </p:cNvPr>
@@ -29953,7 +29953,7 @@
           <p:cNvPr id="10" name="line-383">
             <a:extLst xmlns:a="http://schemas.openxmlformats.org/drawingml/2006/main">
               <a:ext uri="{FF2B5EF4-FFF2-40B4-BE49-F238E27FC236}">
-                <a16:creationId xmlns:a16="http://schemas.microsoft.com/office/drawing/2014/main" id="{EF6063CA-FE7E-48B9-A7BD-008D37705A26}"/>
+                <a16:creationId xmlns:a16="http://schemas.microsoft.com/office/drawing/2014/main" id="{99038CEF-7033-47B2-AAA8-26C48D6C627C}"/>
               </a:ext>
             </a:extLst>
           </p:cNvPr>
@@ -29993,7 +29993,7 @@
           <p:cNvPr id="11" name="line-384">
             <a:extLst xmlns:a="http://schemas.openxmlformats.org/drawingml/2006/main">
               <a:ext uri="{FF2B5EF4-FFF2-40B4-BE49-F238E27FC236}">
-                <a16:creationId xmlns:a16="http://schemas.microsoft.com/office/drawing/2014/main" id="{4F0921AA-117A-4235-9A33-F494A72D1902}"/>
+                <a16:creationId xmlns:a16="http://schemas.microsoft.com/office/drawing/2014/main" id="{3FD9ECB7-1940-4F28-A488-2DCCF6AF4C15}"/>
               </a:ext>
             </a:extLst>
           </p:cNvPr>
@@ -30033,7 +30033,7 @@
           <p:cNvPr id="12" name="object-385">
             <a:extLst xmlns:a="http://schemas.openxmlformats.org/drawingml/2006/main">
               <a:ext uri="{FF2B5EF4-FFF2-40B4-BE49-F238E27FC236}">
-                <a16:creationId xmlns:a16="http://schemas.microsoft.com/office/drawing/2014/main" id="{BA841EDB-CF11-47A6-8F71-3E05C0F63696}"/>
+                <a16:creationId xmlns:a16="http://schemas.microsoft.com/office/drawing/2014/main" id="{D0875360-94A0-4AB4-8B66-8955616413BD}"/>
               </a:ext>
             </a:extLst>
           </p:cNvPr>
@@ -30100,7 +30100,7 @@
           <p:cNvPr id="13" name="reveal1-object-386">
             <a:extLst xmlns:a="http://schemas.openxmlformats.org/drawingml/2006/main">
               <a:ext uri="{FF2B5EF4-FFF2-40B4-BE49-F238E27FC236}">
-                <a16:creationId xmlns:a16="http://schemas.microsoft.com/office/drawing/2014/main" id="{0CC28197-A6EE-456C-9896-83072EE4D4F3}"/>
+                <a16:creationId xmlns:a16="http://schemas.microsoft.com/office/drawing/2014/main" id="{DF9BCE51-BA32-4166-B021-21CE24AE287B}"/>
               </a:ext>
             </a:extLst>
           </p:cNvPr>
@@ -30167,7 +30167,7 @@
           <p:cNvPr id="14" name="reveal1-object-387">
             <a:extLst xmlns:a="http://schemas.openxmlformats.org/drawingml/2006/main">
               <a:ext uri="{FF2B5EF4-FFF2-40B4-BE49-F238E27FC236}">
-                <a16:creationId xmlns:a16="http://schemas.microsoft.com/office/drawing/2014/main" id="{1E78B1F1-4FF7-4349-AD29-619A696619EE}"/>
+                <a16:creationId xmlns:a16="http://schemas.microsoft.com/office/drawing/2014/main" id="{D7149FA5-B796-4AC5-AE8D-3816B43B967C}"/>
               </a:ext>
             </a:extLst>
           </p:cNvPr>
@@ -30198,7 +30198,7 @@
           <p:cNvPr id="15" name="reveal1-object-388">
             <a:extLst xmlns:a="http://schemas.openxmlformats.org/drawingml/2006/main">
               <a:ext uri="{FF2B5EF4-FFF2-40B4-BE49-F238E27FC236}">
-                <a16:creationId xmlns:a16="http://schemas.microsoft.com/office/drawing/2014/main" id="{924339D0-2563-4740-A4AA-731917E7F39E}"/>
+                <a16:creationId xmlns:a16="http://schemas.microsoft.com/office/drawing/2014/main" id="{35BE10B5-CAB2-474E-A8B5-A460F79123EB}"/>
               </a:ext>
             </a:extLst>
           </p:cNvPr>
@@ -30265,7 +30265,7 @@
           <p:cNvPr id="16" name="reveal1-object-389">
             <a:extLst xmlns:a="http://schemas.openxmlformats.org/drawingml/2006/main">
               <a:ext uri="{FF2B5EF4-FFF2-40B4-BE49-F238E27FC236}">
-                <a16:creationId xmlns:a16="http://schemas.microsoft.com/office/drawing/2014/main" id="{44502348-9E98-463A-8165-4E3E8A76B97C}"/>
+                <a16:creationId xmlns:a16="http://schemas.microsoft.com/office/drawing/2014/main" id="{410DB019-C5B9-44DB-863C-6EDC1BD1984C}"/>
               </a:ext>
             </a:extLst>
           </p:cNvPr>
@@ -30296,7 +30296,7 @@
           <p:cNvPr id="17" name="reveal1-object-390">
             <a:extLst xmlns:a="http://schemas.openxmlformats.org/drawingml/2006/main">
               <a:ext uri="{FF2B5EF4-FFF2-40B4-BE49-F238E27FC236}">
-                <a16:creationId xmlns:a16="http://schemas.microsoft.com/office/drawing/2014/main" id="{8EA061A7-5578-4E40-ACE5-710673E9D613}"/>
+                <a16:creationId xmlns:a16="http://schemas.microsoft.com/office/drawing/2014/main" id="{FA4E69F0-2700-4A4C-8595-76ABFDA30DB8}"/>
               </a:ext>
             </a:extLst>
           </p:cNvPr>
@@ -30363,7 +30363,7 @@
           <p:cNvPr id="18" name="reveal1-object-391">
             <a:extLst xmlns:a="http://schemas.openxmlformats.org/drawingml/2006/main">
               <a:ext uri="{FF2B5EF4-FFF2-40B4-BE49-F238E27FC236}">
-                <a16:creationId xmlns:a16="http://schemas.microsoft.com/office/drawing/2014/main" id="{0F8DA327-2713-4C6F-B139-B7BD79F08C06}"/>
+                <a16:creationId xmlns:a16="http://schemas.microsoft.com/office/drawing/2014/main" id="{A459CF2A-CE1B-4BC7-BF89-C7B3CAEB277E}"/>
               </a:ext>
             </a:extLst>
           </p:cNvPr>
@@ -30394,7 +30394,7 @@
           <p:cNvPr id="19" name="reveal1-object-392">
             <a:extLst xmlns:a="http://schemas.openxmlformats.org/drawingml/2006/main">
               <a:ext uri="{FF2B5EF4-FFF2-40B4-BE49-F238E27FC236}">
-                <a16:creationId xmlns:a16="http://schemas.microsoft.com/office/drawing/2014/main" id="{113C8559-4A6A-4A01-8406-D7AF924111C8}"/>
+                <a16:creationId xmlns:a16="http://schemas.microsoft.com/office/drawing/2014/main" id="{73409AAC-080F-491A-A5E8-45701BEB5B63}"/>
               </a:ext>
             </a:extLst>
           </p:cNvPr>
@@ -30461,7 +30461,7 @@
           <p:cNvPr id="20" name="reveal1-object-393">
             <a:extLst xmlns:a="http://schemas.openxmlformats.org/drawingml/2006/main">
               <a:ext uri="{FF2B5EF4-FFF2-40B4-BE49-F238E27FC236}">
-                <a16:creationId xmlns:a16="http://schemas.microsoft.com/office/drawing/2014/main" id="{02585895-387B-4B1E-85DD-1D9A37BAE534}"/>
+                <a16:creationId xmlns:a16="http://schemas.microsoft.com/office/drawing/2014/main" id="{88D6C80F-24C7-45C6-A5C5-40920C1CEFB4}"/>
               </a:ext>
             </a:extLst>
           </p:cNvPr>
@@ -30492,7 +30492,7 @@
           <p:cNvPr id="21" name="reveal1-object-394">
             <a:extLst xmlns:a="http://schemas.openxmlformats.org/drawingml/2006/main">
               <a:ext uri="{FF2B5EF4-FFF2-40B4-BE49-F238E27FC236}">
-                <a16:creationId xmlns:a16="http://schemas.microsoft.com/office/drawing/2014/main" id="{CC251AB9-44A1-42F6-8D09-C041F4420177}"/>
+                <a16:creationId xmlns:a16="http://schemas.microsoft.com/office/drawing/2014/main" id="{0EE8FD89-BD04-4C31-835E-C93475173E81}"/>
               </a:ext>
             </a:extLst>
           </p:cNvPr>
@@ -30559,7 +30559,7 @@
           <p:cNvPr id="22" name="reveal1-object-395">
             <a:extLst xmlns:a="http://schemas.openxmlformats.org/drawingml/2006/main">
               <a:ext uri="{FF2B5EF4-FFF2-40B4-BE49-F238E27FC236}">
-                <a16:creationId xmlns:a16="http://schemas.microsoft.com/office/drawing/2014/main" id="{A2FB0683-75C4-4324-8D61-A8A06FBA161F}"/>
+                <a16:creationId xmlns:a16="http://schemas.microsoft.com/office/drawing/2014/main" id="{AD2B6EA0-713F-4DE0-BEC4-7A2216408FE8}"/>
               </a:ext>
             </a:extLst>
           </p:cNvPr>
@@ -30649,7 +30649,7 @@
           <p:cNvPr id="23" name="reveal1-line-396">
             <a:extLst xmlns:a="http://schemas.openxmlformats.org/drawingml/2006/main">
               <a:ext uri="{FF2B5EF4-FFF2-40B4-BE49-F238E27FC236}">
-                <a16:creationId xmlns:a16="http://schemas.microsoft.com/office/drawing/2014/main" id="{E0376593-93BC-448C-85A3-0D31326F0709}"/>
+                <a16:creationId xmlns:a16="http://schemas.microsoft.com/office/drawing/2014/main" id="{008F92D8-9F6E-4B3D-810B-451F601350CF}"/>
               </a:ext>
             </a:extLst>
           </p:cNvPr>
@@ -30689,7 +30689,7 @@
           <p:cNvPr id="24" name="reveal1-line-397">
             <a:extLst xmlns:a="http://schemas.openxmlformats.org/drawingml/2006/main">
               <a:ext uri="{FF2B5EF4-FFF2-40B4-BE49-F238E27FC236}">
-                <a16:creationId xmlns:a16="http://schemas.microsoft.com/office/drawing/2014/main" id="{839463F2-E904-4151-8AEE-CE5479ACD72B}"/>
+                <a16:creationId xmlns:a16="http://schemas.microsoft.com/office/drawing/2014/main" id="{A4902152-3D4B-41A0-8FF4-2A5D70627F67}"/>
               </a:ext>
             </a:extLst>
           </p:cNvPr>
@@ -30729,7 +30729,7 @@
           <p:cNvPr id="25" name="reveal1-line-398">
             <a:extLst xmlns:a="http://schemas.openxmlformats.org/drawingml/2006/main">
               <a:ext uri="{FF2B5EF4-FFF2-40B4-BE49-F238E27FC236}">
-                <a16:creationId xmlns:a16="http://schemas.microsoft.com/office/drawing/2014/main" id="{F2FFD95A-5446-4CDF-887C-0ABB63A707D7}"/>
+                <a16:creationId xmlns:a16="http://schemas.microsoft.com/office/drawing/2014/main" id="{9A5487DF-4BAA-4B5D-9434-A40150B15995}"/>
               </a:ext>
             </a:extLst>
           </p:cNvPr>
@@ -30769,7 +30769,7 @@
           <p:cNvPr id="26" name="reveal1-line-399">
             <a:extLst xmlns:a="http://schemas.openxmlformats.org/drawingml/2006/main">
               <a:ext uri="{FF2B5EF4-FFF2-40B4-BE49-F238E27FC236}">
-                <a16:creationId xmlns:a16="http://schemas.microsoft.com/office/drawing/2014/main" id="{F04CA4A2-D968-48F7-BBCC-4E49A25C9AAE}"/>
+                <a16:creationId xmlns:a16="http://schemas.microsoft.com/office/drawing/2014/main" id="{1C6E8668-5278-4441-843A-A733A4724A35}"/>
               </a:ext>
             </a:extLst>
           </p:cNvPr>
@@ -30809,7 +30809,7 @@
           <p:cNvPr id="27" name="reveal1-line-400">
             <a:extLst xmlns:a="http://schemas.openxmlformats.org/drawingml/2006/main">
               <a:ext uri="{FF2B5EF4-FFF2-40B4-BE49-F238E27FC236}">
-                <a16:creationId xmlns:a16="http://schemas.microsoft.com/office/drawing/2014/main" id="{2D0C9DC5-CF60-4F29-ACE0-1D69584C4753}"/>
+                <a16:creationId xmlns:a16="http://schemas.microsoft.com/office/drawing/2014/main" id="{927D83D0-43EE-44EC-9C25-7C8CAD714697}"/>
               </a:ext>
             </a:extLst>
           </p:cNvPr>
@@ -30849,7 +30849,7 @@
           <p:cNvPr id="28" name="reveal1-line-401">
             <a:extLst xmlns:a="http://schemas.openxmlformats.org/drawingml/2006/main">
               <a:ext uri="{FF2B5EF4-FFF2-40B4-BE49-F238E27FC236}">
-                <a16:creationId xmlns:a16="http://schemas.microsoft.com/office/drawing/2014/main" id="{4C13A0A2-375B-46CB-99E6-49F7C84409FF}"/>
+                <a16:creationId xmlns:a16="http://schemas.microsoft.com/office/drawing/2014/main" id="{2FC32402-E5F6-4E00-8A44-62E3E072C1DB}"/>
               </a:ext>
             </a:extLst>
           </p:cNvPr>
@@ -30889,7 +30889,7 @@
           <p:cNvPr id="29" name="reveal1-line-402">
             <a:extLst xmlns:a="http://schemas.openxmlformats.org/drawingml/2006/main">
               <a:ext uri="{FF2B5EF4-FFF2-40B4-BE49-F238E27FC236}">
-                <a16:creationId xmlns:a16="http://schemas.microsoft.com/office/drawing/2014/main" id="{B121CF28-4823-4B4D-934C-C0B2C7CA28DC}"/>
+                <a16:creationId xmlns:a16="http://schemas.microsoft.com/office/drawing/2014/main" id="{0019F494-D1AD-4CF9-9E9C-617577ED8F64}"/>
               </a:ext>
             </a:extLst>
           </p:cNvPr>
@@ -30929,7 +30929,7 @@
           <p:cNvPr id="30" name="reveal1-line-403">
             <a:extLst xmlns:a="http://schemas.openxmlformats.org/drawingml/2006/main">
               <a:ext uri="{FF2B5EF4-FFF2-40B4-BE49-F238E27FC236}">
-                <a16:creationId xmlns:a16="http://schemas.microsoft.com/office/drawing/2014/main" id="{6A3BB46E-6CAB-413A-8C17-552242256B7C}"/>
+                <a16:creationId xmlns:a16="http://schemas.microsoft.com/office/drawing/2014/main" id="{8BFE061F-AD53-4797-B800-0E0577DB0D62}"/>
               </a:ext>
             </a:extLst>
           </p:cNvPr>
@@ -30969,7 +30969,7 @@
           <p:cNvPr id="31" name="reveal2-object-404">
             <a:extLst xmlns:a="http://schemas.openxmlformats.org/drawingml/2006/main">
               <a:ext uri="{FF2B5EF4-FFF2-40B4-BE49-F238E27FC236}">
-                <a16:creationId xmlns:a16="http://schemas.microsoft.com/office/drawing/2014/main" id="{FBE68AA4-C9E8-4164-8958-7AFB502A386F}"/>
+                <a16:creationId xmlns:a16="http://schemas.microsoft.com/office/drawing/2014/main" id="{D3FF640D-2CFF-4E42-89F6-6E24F1D7890A}"/>
               </a:ext>
             </a:extLst>
           </p:cNvPr>
@@ -31082,7 +31082,7 @@
           <p:cNvPr id="32" name="reveal2-object-405">
             <a:extLst xmlns:a="http://schemas.openxmlformats.org/drawingml/2006/main">
               <a:ext uri="{FF2B5EF4-FFF2-40B4-BE49-F238E27FC236}">
-                <a16:creationId xmlns:a16="http://schemas.microsoft.com/office/drawing/2014/main" id="{B8FC0BEB-FCEA-4038-8FDC-67443B971880}"/>
+                <a16:creationId xmlns:a16="http://schemas.microsoft.com/office/drawing/2014/main" id="{64583AFA-5997-45EE-8B1B-A6837B2FD7AE}"/>
               </a:ext>
             </a:extLst>
           </p:cNvPr>
@@ -31149,7 +31149,7 @@
           <p:cNvPr id="33" name="reveal2-object-406">
             <a:extLst xmlns:a="http://schemas.openxmlformats.org/drawingml/2006/main">
               <a:ext uri="{FF2B5EF4-FFF2-40B4-BE49-F238E27FC236}">
-                <a16:creationId xmlns:a16="http://schemas.microsoft.com/office/drawing/2014/main" id="{963EA754-ED02-411E-AF32-BE52B78AAD8D}"/>
+                <a16:creationId xmlns:a16="http://schemas.microsoft.com/office/drawing/2014/main" id="{EF422322-F8D8-44D9-9B36-8D7100FEF0E7}"/>
               </a:ext>
             </a:extLst>
           </p:cNvPr>
@@ -31216,7 +31216,7 @@
           <p:cNvPr id="34" name="object-407">
             <a:extLst xmlns:a="http://schemas.openxmlformats.org/drawingml/2006/main">
               <a:ext uri="{FF2B5EF4-FFF2-40B4-BE49-F238E27FC236}">
-                <a16:creationId xmlns:a16="http://schemas.microsoft.com/office/drawing/2014/main" id="{FD4B6F16-664F-467B-8752-686F47E4AAE5}"/>
+                <a16:creationId xmlns:a16="http://schemas.microsoft.com/office/drawing/2014/main" id="{677B9DAF-38E2-4135-BBF8-2B3E2C0EB6DA}"/>
               </a:ext>
             </a:extLst>
           </p:cNvPr>
@@ -31283,7 +31283,7 @@
           <p:cNvPr id="35" name="object-408">
             <a:extLst xmlns:a="http://schemas.openxmlformats.org/drawingml/2006/main">
               <a:ext uri="{FF2B5EF4-FFF2-40B4-BE49-F238E27FC236}">
-                <a16:creationId xmlns:a16="http://schemas.microsoft.com/office/drawing/2014/main" id="{9DF3C2C1-5A36-4F16-B6D6-2960F83A4E33}"/>
+                <a16:creationId xmlns:a16="http://schemas.microsoft.com/office/drawing/2014/main" id="{9997171A-B695-4600-A025-7F4A22D985C7}"/>
               </a:ext>
             </a:extLst>
           </p:cNvPr>
@@ -31348,7 +31348,7 @@
     </p:spTree>
     <p:extLst>
       <p:ext uri="{BB962C8B-B14F-4D97-AF65-F5344CB8AC3E}">
-        <p14:creationId xmlns:p14="http://schemas.microsoft.com/office/powerpoint/2010/main" val="1827734631"/>
+        <p14:creationId xmlns:p14="http://schemas.microsoft.com/office/powerpoint/2010/main" val="382115180"/>
       </p:ext>
     </p:extLst>
   </p:cSld>
@@ -32035,7 +32035,7 @@
           <p:cNvPr id="44" name="object-409">
             <a:extLst xmlns:a="http://schemas.openxmlformats.org/drawingml/2006/main">
               <a:ext uri="{FF2B5EF4-FFF2-40B4-BE49-F238E27FC236}">
-                <a16:creationId xmlns:a16="http://schemas.microsoft.com/office/drawing/2014/main" id="{BDAAEED4-9787-4227-984B-52C06CE1E0B5}"/>
+                <a16:creationId xmlns:a16="http://schemas.microsoft.com/office/drawing/2014/main" id="{A8507F53-AE62-4140-9825-EB67BF51499E}"/>
               </a:ext>
             </a:extLst>
           </p:cNvPr>
@@ -32102,7 +32102,7 @@
           <p:cNvPr id="2" name="object-410">
             <a:extLst xmlns:a="http://schemas.openxmlformats.org/drawingml/2006/main">
               <a:ext uri="{FF2B5EF4-FFF2-40B4-BE49-F238E27FC236}">
-                <a16:creationId xmlns:a16="http://schemas.microsoft.com/office/drawing/2014/main" id="{D40509DE-8572-471F-9157-5C893E6C290A}"/>
+                <a16:creationId xmlns:a16="http://schemas.microsoft.com/office/drawing/2014/main" id="{66AA2E12-F3F9-4AE9-8D8D-E5ADF584E82C}"/>
               </a:ext>
             </a:extLst>
           </p:cNvPr>
@@ -32169,7 +32169,7 @@
           <p:cNvPr id="3" name="object-411">
             <a:extLst xmlns:a="http://schemas.openxmlformats.org/drawingml/2006/main">
               <a:ext uri="{FF2B5EF4-FFF2-40B4-BE49-F238E27FC236}">
-                <a16:creationId xmlns:a16="http://schemas.microsoft.com/office/drawing/2014/main" id="{1E3F0061-CE13-4ADD-95B6-51704927FCAF}"/>
+                <a16:creationId xmlns:a16="http://schemas.microsoft.com/office/drawing/2014/main" id="{48A97770-1D52-4A97-9527-73511813D59F}"/>
               </a:ext>
             </a:extLst>
           </p:cNvPr>
@@ -32200,7 +32200,7 @@
           <p:cNvPr id="4" name="object-412">
             <a:extLst xmlns:a="http://schemas.openxmlformats.org/drawingml/2006/main">
               <a:ext uri="{FF2B5EF4-FFF2-40B4-BE49-F238E27FC236}">
-                <a16:creationId xmlns:a16="http://schemas.microsoft.com/office/drawing/2014/main" id="{188ED928-02D1-41D5-80BA-C6873F8BCF5C}"/>
+                <a16:creationId xmlns:a16="http://schemas.microsoft.com/office/drawing/2014/main" id="{1CD728A4-9933-45EB-B66D-73330D624523}"/>
               </a:ext>
             </a:extLst>
           </p:cNvPr>
@@ -32267,7 +32267,7 @@
           <p:cNvPr id="5" name="line-413">
             <a:extLst xmlns:a="http://schemas.openxmlformats.org/drawingml/2006/main">
               <a:ext uri="{FF2B5EF4-FFF2-40B4-BE49-F238E27FC236}">
-                <a16:creationId xmlns:a16="http://schemas.microsoft.com/office/drawing/2014/main" id="{67F233BB-468D-4E20-B720-ADF6E7C4C00F}"/>
+                <a16:creationId xmlns:a16="http://schemas.microsoft.com/office/drawing/2014/main" id="{E28EBE69-C4E0-4A20-A903-2EE9601F3048}"/>
               </a:ext>
             </a:extLst>
           </p:cNvPr>
@@ -32307,7 +32307,7 @@
           <p:cNvPr id="6" name="object-414">
             <a:extLst xmlns:a="http://schemas.openxmlformats.org/drawingml/2006/main">
               <a:ext uri="{FF2B5EF4-FFF2-40B4-BE49-F238E27FC236}">
-                <a16:creationId xmlns:a16="http://schemas.microsoft.com/office/drawing/2014/main" id="{88B67F1C-6DC3-4122-B2D2-E933782B5341}"/>
+                <a16:creationId xmlns:a16="http://schemas.microsoft.com/office/drawing/2014/main" id="{B00B3487-0E26-4D95-AD51-19B3995443C4}"/>
               </a:ext>
             </a:extLst>
           </p:cNvPr>
@@ -32338,7 +32338,7 @@
           <p:cNvPr id="7" name="object-415">
             <a:extLst xmlns:a="http://schemas.openxmlformats.org/drawingml/2006/main">
               <a:ext uri="{FF2B5EF4-FFF2-40B4-BE49-F238E27FC236}">
-                <a16:creationId xmlns:a16="http://schemas.microsoft.com/office/drawing/2014/main" id="{F3CF381E-2347-4A40-9A76-245D0C8F2D4C}"/>
+                <a16:creationId xmlns:a16="http://schemas.microsoft.com/office/drawing/2014/main" id="{E62E5A8B-14A5-425A-817C-83857B0AD239}"/>
               </a:ext>
             </a:extLst>
           </p:cNvPr>
@@ -32405,7 +32405,7 @@
           <p:cNvPr id="8" name="line-416">
             <a:extLst xmlns:a="http://schemas.openxmlformats.org/drawingml/2006/main">
               <a:ext uri="{FF2B5EF4-FFF2-40B4-BE49-F238E27FC236}">
-                <a16:creationId xmlns:a16="http://schemas.microsoft.com/office/drawing/2014/main" id="{3E709AE0-9CE2-4A87-801B-75EF37D6CAE1}"/>
+                <a16:creationId xmlns:a16="http://schemas.microsoft.com/office/drawing/2014/main" id="{A9F5C758-DBD0-4BD2-9E67-0DDE4B101A12}"/>
               </a:ext>
             </a:extLst>
           </p:cNvPr>
@@ -32445,7 +32445,7 @@
           <p:cNvPr id="9" name="object-417">
             <a:extLst xmlns:a="http://schemas.openxmlformats.org/drawingml/2006/main">
               <a:ext uri="{FF2B5EF4-FFF2-40B4-BE49-F238E27FC236}">
-                <a16:creationId xmlns:a16="http://schemas.microsoft.com/office/drawing/2014/main" id="{0F910B74-B373-4CDB-9A64-CFE80F63463F}"/>
+                <a16:creationId xmlns:a16="http://schemas.microsoft.com/office/drawing/2014/main" id="{76020A23-1E39-452D-A005-A1077CF6AFC3}"/>
               </a:ext>
             </a:extLst>
           </p:cNvPr>
@@ -32476,7 +32476,7 @@
           <p:cNvPr id="10" name="object-418">
             <a:extLst xmlns:a="http://schemas.openxmlformats.org/drawingml/2006/main">
               <a:ext uri="{FF2B5EF4-FFF2-40B4-BE49-F238E27FC236}">
-                <a16:creationId xmlns:a16="http://schemas.microsoft.com/office/drawing/2014/main" id="{1FBC6E34-77A1-443D-B179-982DD87FB17E}"/>
+                <a16:creationId xmlns:a16="http://schemas.microsoft.com/office/drawing/2014/main" id="{D67F370B-F8F3-4400-AF2A-08929C999FF1}"/>
               </a:ext>
             </a:extLst>
           </p:cNvPr>
@@ -32543,7 +32543,7 @@
           <p:cNvPr id="11" name="line-419">
             <a:extLst xmlns:a="http://schemas.openxmlformats.org/drawingml/2006/main">
               <a:ext uri="{FF2B5EF4-FFF2-40B4-BE49-F238E27FC236}">
-                <a16:creationId xmlns:a16="http://schemas.microsoft.com/office/drawing/2014/main" id="{43F78FD6-000D-40E8-A3C4-74205334A649}"/>
+                <a16:creationId xmlns:a16="http://schemas.microsoft.com/office/drawing/2014/main" id="{5D0C20D1-B739-4BFA-AE7F-7B358485AAA1}"/>
               </a:ext>
             </a:extLst>
           </p:cNvPr>
@@ -32583,7 +32583,7 @@
           <p:cNvPr id="12" name="object-420">
             <a:extLst xmlns:a="http://schemas.openxmlformats.org/drawingml/2006/main">
               <a:ext uri="{FF2B5EF4-FFF2-40B4-BE49-F238E27FC236}">
-                <a16:creationId xmlns:a16="http://schemas.microsoft.com/office/drawing/2014/main" id="{DA7779C2-6BA6-45A3-8331-0AD7416F8650}"/>
+                <a16:creationId xmlns:a16="http://schemas.microsoft.com/office/drawing/2014/main" id="{A440BFFE-29D7-4AC2-ABF5-6B07990585E6}"/>
               </a:ext>
             </a:extLst>
           </p:cNvPr>
@@ -32614,7 +32614,7 @@
           <p:cNvPr id="13" name="object-421">
             <a:extLst xmlns:a="http://schemas.openxmlformats.org/drawingml/2006/main">
               <a:ext uri="{FF2B5EF4-FFF2-40B4-BE49-F238E27FC236}">
-                <a16:creationId xmlns:a16="http://schemas.microsoft.com/office/drawing/2014/main" id="{4EAF98BA-B003-4C4F-98E6-AD60B6497921}"/>
+                <a16:creationId xmlns:a16="http://schemas.microsoft.com/office/drawing/2014/main" id="{5342D694-9079-4D74-A36B-64B175172342}"/>
               </a:ext>
             </a:extLst>
           </p:cNvPr>
@@ -32681,7 +32681,7 @@
           <p:cNvPr id="14" name="line-422">
             <a:extLst xmlns:a="http://schemas.openxmlformats.org/drawingml/2006/main">
               <a:ext uri="{FF2B5EF4-FFF2-40B4-BE49-F238E27FC236}">
-                <a16:creationId xmlns:a16="http://schemas.microsoft.com/office/drawing/2014/main" id="{85492450-CDDD-46EE-ACF6-CCD8D32C225B}"/>
+                <a16:creationId xmlns:a16="http://schemas.microsoft.com/office/drawing/2014/main" id="{134EDE6E-9D32-40A5-9AC6-C8621FB3EE44}"/>
               </a:ext>
             </a:extLst>
           </p:cNvPr>
@@ -32721,7 +32721,7 @@
           <p:cNvPr id="15" name="reveal1-object-423">
             <a:extLst xmlns:a="http://schemas.openxmlformats.org/drawingml/2006/main">
               <a:ext uri="{FF2B5EF4-FFF2-40B4-BE49-F238E27FC236}">
-                <a16:creationId xmlns:a16="http://schemas.microsoft.com/office/drawing/2014/main" id="{B7ED9DDB-F0F6-4E2A-9F25-643CFB2060D5}"/>
+                <a16:creationId xmlns:a16="http://schemas.microsoft.com/office/drawing/2014/main" id="{B65CD911-76B3-4C9E-B54B-2AB5C27A861A}"/>
               </a:ext>
             </a:extLst>
           </p:cNvPr>
@@ -32788,7 +32788,7 @@
           <p:cNvPr id="16" name="reveal1-line-424">
             <a:extLst xmlns:a="http://schemas.openxmlformats.org/drawingml/2006/main">
               <a:ext uri="{FF2B5EF4-FFF2-40B4-BE49-F238E27FC236}">
-                <a16:creationId xmlns:a16="http://schemas.microsoft.com/office/drawing/2014/main" id="{4A77C4B8-73E6-43B0-9871-15F9AEB07B59}"/>
+                <a16:creationId xmlns:a16="http://schemas.microsoft.com/office/drawing/2014/main" id="{96C2A8FB-62F4-4E34-9C5A-44DB8DE6C191}"/>
               </a:ext>
             </a:extLst>
           </p:cNvPr>
@@ -32828,7 +32828,7 @@
           <p:cNvPr id="17" name="reveal1-line-425">
             <a:extLst xmlns:a="http://schemas.openxmlformats.org/drawingml/2006/main">
               <a:ext uri="{FF2B5EF4-FFF2-40B4-BE49-F238E27FC236}">
-                <a16:creationId xmlns:a16="http://schemas.microsoft.com/office/drawing/2014/main" id="{B5B94F63-EE2C-48E1-97C6-8A11DA439C4E}"/>
+                <a16:creationId xmlns:a16="http://schemas.microsoft.com/office/drawing/2014/main" id="{38965EEF-58B2-4F2B-99C8-09A4FC0519A6}"/>
               </a:ext>
             </a:extLst>
           </p:cNvPr>
@@ -32868,7 +32868,7 @@
           <p:cNvPr id="18" name="reveal1-line-426">
             <a:extLst xmlns:a="http://schemas.openxmlformats.org/drawingml/2006/main">
               <a:ext uri="{FF2B5EF4-FFF2-40B4-BE49-F238E27FC236}">
-                <a16:creationId xmlns:a16="http://schemas.microsoft.com/office/drawing/2014/main" id="{F07D754C-EC7E-4A69-A14A-47E5FBFFDC10}"/>
+                <a16:creationId xmlns:a16="http://schemas.microsoft.com/office/drawing/2014/main" id="{6BF8403B-8663-4F94-89C6-AB94D0C15135}"/>
               </a:ext>
             </a:extLst>
           </p:cNvPr>
@@ -32908,7 +32908,7 @@
           <p:cNvPr id="19" name="reveal1-object-427">
             <a:extLst xmlns:a="http://schemas.openxmlformats.org/drawingml/2006/main">
               <a:ext uri="{FF2B5EF4-FFF2-40B4-BE49-F238E27FC236}">
-                <a16:creationId xmlns:a16="http://schemas.microsoft.com/office/drawing/2014/main" id="{CBFB4279-E4B0-4A13-A41A-87AF9EBA0C1B}"/>
+                <a16:creationId xmlns:a16="http://schemas.microsoft.com/office/drawing/2014/main" id="{C69FF129-AF8B-4911-8555-DCC68B40BFB4}"/>
               </a:ext>
             </a:extLst>
           </p:cNvPr>
@@ -32975,7 +32975,7 @@
           <p:cNvPr id="20" name="reveal1-line-428">
             <a:extLst xmlns:a="http://schemas.openxmlformats.org/drawingml/2006/main">
               <a:ext uri="{FF2B5EF4-FFF2-40B4-BE49-F238E27FC236}">
-                <a16:creationId xmlns:a16="http://schemas.microsoft.com/office/drawing/2014/main" id="{F02D160F-8FEF-4926-AE46-5D5B91EE716A}"/>
+                <a16:creationId xmlns:a16="http://schemas.microsoft.com/office/drawing/2014/main" id="{5B073AF7-362C-41FA-836A-74B50DC1917B}"/>
               </a:ext>
             </a:extLst>
           </p:cNvPr>
@@ -33015,7 +33015,7 @@
           <p:cNvPr id="21" name="reveal1-line-429">
             <a:extLst xmlns:a="http://schemas.openxmlformats.org/drawingml/2006/main">
               <a:ext uri="{FF2B5EF4-FFF2-40B4-BE49-F238E27FC236}">
-                <a16:creationId xmlns:a16="http://schemas.microsoft.com/office/drawing/2014/main" id="{134D7EC8-0AD0-46EB-B4FE-1328EB684128}"/>
+                <a16:creationId xmlns:a16="http://schemas.microsoft.com/office/drawing/2014/main" id="{5AB7BA26-31B8-45D0-A89C-F24DDC934766}"/>
               </a:ext>
             </a:extLst>
           </p:cNvPr>
@@ -33055,7 +33055,7 @@
           <p:cNvPr id="22" name="reveal1-line-430">
             <a:extLst xmlns:a="http://schemas.openxmlformats.org/drawingml/2006/main">
               <a:ext uri="{FF2B5EF4-FFF2-40B4-BE49-F238E27FC236}">
-                <a16:creationId xmlns:a16="http://schemas.microsoft.com/office/drawing/2014/main" id="{52BD9EF7-596A-4E42-8498-A26778287EEE}"/>
+                <a16:creationId xmlns:a16="http://schemas.microsoft.com/office/drawing/2014/main" id="{0D048550-773B-4C45-950D-0922F01AB6E9}"/>
               </a:ext>
             </a:extLst>
           </p:cNvPr>
@@ -33095,7 +33095,7 @@
           <p:cNvPr id="23" name="reveal1-object-431">
             <a:extLst xmlns:a="http://schemas.openxmlformats.org/drawingml/2006/main">
               <a:ext uri="{FF2B5EF4-FFF2-40B4-BE49-F238E27FC236}">
-                <a16:creationId xmlns:a16="http://schemas.microsoft.com/office/drawing/2014/main" id="{224025F3-A4CC-4A8E-B592-95A0B5949979}"/>
+                <a16:creationId xmlns:a16="http://schemas.microsoft.com/office/drawing/2014/main" id="{60E9486C-C59B-499E-9568-45C43933C995}"/>
               </a:ext>
             </a:extLst>
           </p:cNvPr>
@@ -33162,7 +33162,7 @@
           <p:cNvPr id="24" name="reveal1-object-432">
             <a:extLst xmlns:a="http://schemas.openxmlformats.org/drawingml/2006/main">
               <a:ext uri="{FF2B5EF4-FFF2-40B4-BE49-F238E27FC236}">
-                <a16:creationId xmlns:a16="http://schemas.microsoft.com/office/drawing/2014/main" id="{FFDDD3BB-E454-4E15-927D-A0197B18B7FA}"/>
+                <a16:creationId xmlns:a16="http://schemas.microsoft.com/office/drawing/2014/main" id="{A57F8EB6-7A8A-45CE-9FB2-010AE044E762}"/>
               </a:ext>
             </a:extLst>
           </p:cNvPr>
@@ -33229,7 +33229,7 @@
           <p:cNvPr id="25" name="reveal1-line-433">
             <a:extLst xmlns:a="http://schemas.openxmlformats.org/drawingml/2006/main">
               <a:ext uri="{FF2B5EF4-FFF2-40B4-BE49-F238E27FC236}">
-                <a16:creationId xmlns:a16="http://schemas.microsoft.com/office/drawing/2014/main" id="{990D2055-29ED-4EEF-8ABA-E3B18F9A7D93}"/>
+                <a16:creationId xmlns:a16="http://schemas.microsoft.com/office/drawing/2014/main" id="{58406197-012D-4EB3-8A62-C4D4C1465F48}"/>
               </a:ext>
             </a:extLst>
           </p:cNvPr>
@@ -33269,7 +33269,7 @@
           <p:cNvPr id="26" name="reveal1-line-434">
             <a:extLst xmlns:a="http://schemas.openxmlformats.org/drawingml/2006/main">
               <a:ext uri="{FF2B5EF4-FFF2-40B4-BE49-F238E27FC236}">
-                <a16:creationId xmlns:a16="http://schemas.microsoft.com/office/drawing/2014/main" id="{202128C8-9A59-4B18-A58F-D8D0F3DA81BE}"/>
+                <a16:creationId xmlns:a16="http://schemas.microsoft.com/office/drawing/2014/main" id="{33D2BBFB-EA7D-402E-B077-572DB62E71C0}"/>
               </a:ext>
             </a:extLst>
           </p:cNvPr>
@@ -33309,7 +33309,7 @@
           <p:cNvPr id="27" name="reveal1-line-435">
             <a:extLst xmlns:a="http://schemas.openxmlformats.org/drawingml/2006/main">
               <a:ext uri="{FF2B5EF4-FFF2-40B4-BE49-F238E27FC236}">
-                <a16:creationId xmlns:a16="http://schemas.microsoft.com/office/drawing/2014/main" id="{F0CD62F1-DD80-4A10-AE40-B92A5CA98F85}"/>
+                <a16:creationId xmlns:a16="http://schemas.microsoft.com/office/drawing/2014/main" id="{C32CFD6C-34BC-4F37-BAB3-2C806CFA6770}"/>
               </a:ext>
             </a:extLst>
           </p:cNvPr>
@@ -33349,7 +33349,7 @@
           <p:cNvPr id="28" name="reveal1-object-436">
             <a:extLst xmlns:a="http://schemas.openxmlformats.org/drawingml/2006/main">
               <a:ext uri="{FF2B5EF4-FFF2-40B4-BE49-F238E27FC236}">
-                <a16:creationId xmlns:a16="http://schemas.microsoft.com/office/drawing/2014/main" id="{9D14F64E-6154-4D42-A779-C0DBCF512402}"/>
+                <a16:creationId xmlns:a16="http://schemas.microsoft.com/office/drawing/2014/main" id="{659BFF20-A7DA-4019-AB94-5992311301A7}"/>
               </a:ext>
             </a:extLst>
           </p:cNvPr>
@@ -33416,7 +33416,7 @@
           <p:cNvPr id="29" name="reveal2-object-437">
             <a:extLst xmlns:a="http://schemas.openxmlformats.org/drawingml/2006/main">
               <a:ext uri="{FF2B5EF4-FFF2-40B4-BE49-F238E27FC236}">
-                <a16:creationId xmlns:a16="http://schemas.microsoft.com/office/drawing/2014/main" id="{16F6CD42-6EA3-46C8-9593-96F1416EEAD3}"/>
+                <a16:creationId xmlns:a16="http://schemas.microsoft.com/office/drawing/2014/main" id="{C798CBFA-F29D-47C3-AD93-4E1B548C8D6A}"/>
               </a:ext>
             </a:extLst>
           </p:cNvPr>
@@ -33483,7 +33483,7 @@
           <p:cNvPr id="30" name="reveal2-line-438">
             <a:extLst xmlns:a="http://schemas.openxmlformats.org/drawingml/2006/main">
               <a:ext uri="{FF2B5EF4-FFF2-40B4-BE49-F238E27FC236}">
-                <a16:creationId xmlns:a16="http://schemas.microsoft.com/office/drawing/2014/main" id="{676810BD-D469-4F90-8CBD-6C8E0A0CF966}"/>
+                <a16:creationId xmlns:a16="http://schemas.microsoft.com/office/drawing/2014/main" id="{FA9370F9-C66D-4826-AE03-F3B32B394063}"/>
               </a:ext>
             </a:extLst>
           </p:cNvPr>
@@ -33523,7 +33523,7 @@
           <p:cNvPr id="31" name="reveal2-line-439">
             <a:extLst xmlns:a="http://schemas.openxmlformats.org/drawingml/2006/main">
               <a:ext uri="{FF2B5EF4-FFF2-40B4-BE49-F238E27FC236}">
-                <a16:creationId xmlns:a16="http://schemas.microsoft.com/office/drawing/2014/main" id="{3078BA5F-32B8-428B-8FAC-4ED954A2FE45}"/>
+                <a16:creationId xmlns:a16="http://schemas.microsoft.com/office/drawing/2014/main" id="{AA1654BA-2F26-4BB5-B8A3-C1AC68C45564}"/>
               </a:ext>
             </a:extLst>
           </p:cNvPr>
@@ -33563,7 +33563,7 @@
           <p:cNvPr id="32" name="reveal2-line-440">
             <a:extLst xmlns:a="http://schemas.openxmlformats.org/drawingml/2006/main">
               <a:ext uri="{FF2B5EF4-FFF2-40B4-BE49-F238E27FC236}">
-                <a16:creationId xmlns:a16="http://schemas.microsoft.com/office/drawing/2014/main" id="{C78349ED-1D5A-4885-AF8A-6937E63E8B06}"/>
+                <a16:creationId xmlns:a16="http://schemas.microsoft.com/office/drawing/2014/main" id="{A4E0CC74-4376-4D05-B734-604EE132E0FE}"/>
               </a:ext>
             </a:extLst>
           </p:cNvPr>
@@ -33603,7 +33603,7 @@
           <p:cNvPr id="33" name="reveal2-object-441">
             <a:extLst xmlns:a="http://schemas.openxmlformats.org/drawingml/2006/main">
               <a:ext uri="{FF2B5EF4-FFF2-40B4-BE49-F238E27FC236}">
-                <a16:creationId xmlns:a16="http://schemas.microsoft.com/office/drawing/2014/main" id="{C5520DD2-6C82-48C2-8A0E-C1655A496018}"/>
+                <a16:creationId xmlns:a16="http://schemas.microsoft.com/office/drawing/2014/main" id="{72CB8731-DDE8-4601-B325-7165C8F3A702}"/>
               </a:ext>
             </a:extLst>
           </p:cNvPr>
@@ -33670,7 +33670,7 @@
           <p:cNvPr id="34" name="reveal2-line-442">
             <a:extLst xmlns:a="http://schemas.openxmlformats.org/drawingml/2006/main">
               <a:ext uri="{FF2B5EF4-FFF2-40B4-BE49-F238E27FC236}">
-                <a16:creationId xmlns:a16="http://schemas.microsoft.com/office/drawing/2014/main" id="{2EE145FB-864E-46FB-868E-27E9CD7AA53A}"/>
+                <a16:creationId xmlns:a16="http://schemas.microsoft.com/office/drawing/2014/main" id="{6C6346F9-7AE2-435D-A911-F18D3F8EFB72}"/>
               </a:ext>
             </a:extLst>
           </p:cNvPr>
@@ -33710,7 +33710,7 @@
           <p:cNvPr id="35" name="reveal2-line-443">
             <a:extLst xmlns:a="http://schemas.openxmlformats.org/drawingml/2006/main">
               <a:ext uri="{FF2B5EF4-FFF2-40B4-BE49-F238E27FC236}">
-                <a16:creationId xmlns:a16="http://schemas.microsoft.com/office/drawing/2014/main" id="{EEAD63FE-64F0-41EE-BC03-E84D940DE5B0}"/>
+                <a16:creationId xmlns:a16="http://schemas.microsoft.com/office/drawing/2014/main" id="{8484DD5E-D536-4A26-A216-1B961ABA075E}"/>
               </a:ext>
             </a:extLst>
           </p:cNvPr>
@@ -33750,7 +33750,7 @@
           <p:cNvPr id="36" name="reveal2-line-444">
             <a:extLst xmlns:a="http://schemas.openxmlformats.org/drawingml/2006/main">
               <a:ext uri="{FF2B5EF4-FFF2-40B4-BE49-F238E27FC236}">
-                <a16:creationId xmlns:a16="http://schemas.microsoft.com/office/drawing/2014/main" id="{F741A910-8E9D-4AA7-9906-4ACD0B3A5B52}"/>
+                <a16:creationId xmlns:a16="http://schemas.microsoft.com/office/drawing/2014/main" id="{E04FD2A7-135A-47A4-93E1-4306D24FE5F7}"/>
               </a:ext>
             </a:extLst>
           </p:cNvPr>
@@ -33790,7 +33790,7 @@
           <p:cNvPr id="37" name="reveal2-object-445">
             <a:extLst xmlns:a="http://schemas.openxmlformats.org/drawingml/2006/main">
               <a:ext uri="{FF2B5EF4-FFF2-40B4-BE49-F238E27FC236}">
-                <a16:creationId xmlns:a16="http://schemas.microsoft.com/office/drawing/2014/main" id="{D54AA163-B01E-4AEE-855F-7559FE38E1FA}"/>
+                <a16:creationId xmlns:a16="http://schemas.microsoft.com/office/drawing/2014/main" id="{654C594D-360A-4B23-963E-7144F93ABCBF}"/>
               </a:ext>
             </a:extLst>
           </p:cNvPr>
@@ -33857,7 +33857,7 @@
           <p:cNvPr id="38" name="reveal2-object-446">
             <a:extLst xmlns:a="http://schemas.openxmlformats.org/drawingml/2006/main">
               <a:ext uri="{FF2B5EF4-FFF2-40B4-BE49-F238E27FC236}">
-                <a16:creationId xmlns:a16="http://schemas.microsoft.com/office/drawing/2014/main" id="{7038F045-085F-4722-8597-96B115A6200A}"/>
+                <a16:creationId xmlns:a16="http://schemas.microsoft.com/office/drawing/2014/main" id="{AF10C835-D356-4311-8660-2802E16A9534}"/>
               </a:ext>
             </a:extLst>
           </p:cNvPr>
@@ -33924,7 +33924,7 @@
           <p:cNvPr id="39" name="reveal2-line-447">
             <a:extLst xmlns:a="http://schemas.openxmlformats.org/drawingml/2006/main">
               <a:ext uri="{FF2B5EF4-FFF2-40B4-BE49-F238E27FC236}">
-                <a16:creationId xmlns:a16="http://schemas.microsoft.com/office/drawing/2014/main" id="{470280E7-312A-4E54-B3C1-E0C8CC81633C}"/>
+                <a16:creationId xmlns:a16="http://schemas.microsoft.com/office/drawing/2014/main" id="{2F8EE267-3EC0-4A6B-B9D8-44FE8C1B5737}"/>
               </a:ext>
             </a:extLst>
           </p:cNvPr>
@@ -33964,7 +33964,7 @@
           <p:cNvPr id="40" name="reveal2-line-448">
             <a:extLst xmlns:a="http://schemas.openxmlformats.org/drawingml/2006/main">
               <a:ext uri="{FF2B5EF4-FFF2-40B4-BE49-F238E27FC236}">
-                <a16:creationId xmlns:a16="http://schemas.microsoft.com/office/drawing/2014/main" id="{16C960D3-9E73-4985-B03D-C4770A861CE8}"/>
+                <a16:creationId xmlns:a16="http://schemas.microsoft.com/office/drawing/2014/main" id="{9F93A213-6AC1-4B46-93D2-056C94D6B271}"/>
               </a:ext>
             </a:extLst>
           </p:cNvPr>
@@ -34004,7 +34004,7 @@
           <p:cNvPr id="41" name="reveal2-line-449">
             <a:extLst xmlns:a="http://schemas.openxmlformats.org/drawingml/2006/main">
               <a:ext uri="{FF2B5EF4-FFF2-40B4-BE49-F238E27FC236}">
-                <a16:creationId xmlns:a16="http://schemas.microsoft.com/office/drawing/2014/main" id="{118E0E9F-42AE-458D-9AC1-4D549C62A305}"/>
+                <a16:creationId xmlns:a16="http://schemas.microsoft.com/office/drawing/2014/main" id="{1057CEA3-DF35-437B-BE7D-CABF659CDBF6}"/>
               </a:ext>
             </a:extLst>
           </p:cNvPr>
@@ -34044,7 +34044,7 @@
           <p:cNvPr id="42" name="object-450">
             <a:extLst xmlns:a="http://schemas.openxmlformats.org/drawingml/2006/main">
               <a:ext uri="{FF2B5EF4-FFF2-40B4-BE49-F238E27FC236}">
-                <a16:creationId xmlns:a16="http://schemas.microsoft.com/office/drawing/2014/main" id="{989D9EB6-C138-46BD-8FB3-563117BEAD4C}"/>
+                <a16:creationId xmlns:a16="http://schemas.microsoft.com/office/drawing/2014/main" id="{65766A52-AFA5-489F-88C3-E5E9A1E7848F}"/>
               </a:ext>
             </a:extLst>
           </p:cNvPr>
@@ -34111,7 +34111,7 @@
           <p:cNvPr id="43" name="object-451">
             <a:extLst xmlns:a="http://schemas.openxmlformats.org/drawingml/2006/main">
               <a:ext uri="{FF2B5EF4-FFF2-40B4-BE49-F238E27FC236}">
-                <a16:creationId xmlns:a16="http://schemas.microsoft.com/office/drawing/2014/main" id="{5D4808A4-88A7-4772-813B-418F4FE42D51}"/>
+                <a16:creationId xmlns:a16="http://schemas.microsoft.com/office/drawing/2014/main" id="{471DF63A-014E-4FE7-A95B-B9D2D04E985F}"/>
               </a:ext>
             </a:extLst>
           </p:cNvPr>
@@ -34176,7 +34176,7 @@
     </p:spTree>
     <p:extLst>
       <p:ext uri="{BB962C8B-B14F-4D97-AF65-F5344CB8AC3E}">
-        <p14:creationId xmlns:p14="http://schemas.microsoft.com/office/powerpoint/2010/main" val="698738207"/>
+        <p14:creationId xmlns:p14="http://schemas.microsoft.com/office/powerpoint/2010/main" val="928478743"/>
       </p:ext>
     </p:extLst>
   </p:cSld>
@@ -35031,7 +35031,7 @@
           <p:cNvPr id="38" name="object-452">
             <a:extLst xmlns:a="http://schemas.openxmlformats.org/drawingml/2006/main">
               <a:ext uri="{FF2B5EF4-FFF2-40B4-BE49-F238E27FC236}">
-                <a16:creationId xmlns:a16="http://schemas.microsoft.com/office/drawing/2014/main" id="{C13A7777-AFF6-493E-B8EC-0F52987BA474}"/>
+                <a16:creationId xmlns:a16="http://schemas.microsoft.com/office/drawing/2014/main" id="{EF659ED4-762E-446C-8602-996E5FEE1831}"/>
               </a:ext>
             </a:extLst>
           </p:cNvPr>
@@ -35098,7 +35098,7 @@
           <p:cNvPr id="2" name="object-453">
             <a:extLst xmlns:a="http://schemas.openxmlformats.org/drawingml/2006/main">
               <a:ext uri="{FF2B5EF4-FFF2-40B4-BE49-F238E27FC236}">
-                <a16:creationId xmlns:a16="http://schemas.microsoft.com/office/drawing/2014/main" id="{94E397E1-A54D-4737-A60E-AC78B377C2D7}"/>
+                <a16:creationId xmlns:a16="http://schemas.microsoft.com/office/drawing/2014/main" id="{8C48F00F-4A01-496E-B144-2276DDA8F155}"/>
               </a:ext>
             </a:extLst>
           </p:cNvPr>
@@ -35165,7 +35165,7 @@
           <p:cNvPr id="3" name="object-454">
             <a:extLst xmlns:a="http://schemas.openxmlformats.org/drawingml/2006/main">
               <a:ext uri="{FF2B5EF4-FFF2-40B4-BE49-F238E27FC236}">
-                <a16:creationId xmlns:a16="http://schemas.microsoft.com/office/drawing/2014/main" id="{01E21A34-CC33-47DE-AD8F-AAA73BE87E56}"/>
+                <a16:creationId xmlns:a16="http://schemas.microsoft.com/office/drawing/2014/main" id="{FFD43D36-1FDB-49AC-AAD1-80D71B1EF646}"/>
               </a:ext>
             </a:extLst>
           </p:cNvPr>
@@ -35196,7 +35196,7 @@
           <p:cNvPr id="4" name="object-455">
             <a:extLst xmlns:a="http://schemas.openxmlformats.org/drawingml/2006/main">
               <a:ext uri="{FF2B5EF4-FFF2-40B4-BE49-F238E27FC236}">
-                <a16:creationId xmlns:a16="http://schemas.microsoft.com/office/drawing/2014/main" id="{437763A5-81D2-463F-A2A9-8D6A4570D822}"/>
+                <a16:creationId xmlns:a16="http://schemas.microsoft.com/office/drawing/2014/main" id="{9F4FBE61-DB44-4EC4-85C6-4D31A2F49524}"/>
               </a:ext>
             </a:extLst>
           </p:cNvPr>
@@ -35263,7 +35263,7 @@
           <p:cNvPr id="5" name="line-456">
             <a:extLst xmlns:a="http://schemas.openxmlformats.org/drawingml/2006/main">
               <a:ext uri="{FF2B5EF4-FFF2-40B4-BE49-F238E27FC236}">
-                <a16:creationId xmlns:a16="http://schemas.microsoft.com/office/drawing/2014/main" id="{00486E58-FD9C-4757-9926-A58A76F3336B}"/>
+                <a16:creationId xmlns:a16="http://schemas.microsoft.com/office/drawing/2014/main" id="{E0D0E985-18D3-40CB-ABFE-DC34666A216C}"/>
               </a:ext>
             </a:extLst>
           </p:cNvPr>
@@ -35303,7 +35303,7 @@
           <p:cNvPr id="6" name="object-457">
             <a:extLst xmlns:a="http://schemas.openxmlformats.org/drawingml/2006/main">
               <a:ext uri="{FF2B5EF4-FFF2-40B4-BE49-F238E27FC236}">
-                <a16:creationId xmlns:a16="http://schemas.microsoft.com/office/drawing/2014/main" id="{0634E500-5B5A-44A6-9E51-D48E36869CCA}"/>
+                <a16:creationId xmlns:a16="http://schemas.microsoft.com/office/drawing/2014/main" id="{AFDB6507-DCF5-4B7B-BFE0-E7275782A71A}"/>
               </a:ext>
             </a:extLst>
           </p:cNvPr>
@@ -35334,7 +35334,7 @@
           <p:cNvPr id="7" name="object-458">
             <a:extLst xmlns:a="http://schemas.openxmlformats.org/drawingml/2006/main">
               <a:ext uri="{FF2B5EF4-FFF2-40B4-BE49-F238E27FC236}">
-                <a16:creationId xmlns:a16="http://schemas.microsoft.com/office/drawing/2014/main" id="{9B612928-98CA-4569-9B5A-77CFDC87406E}"/>
+                <a16:creationId xmlns:a16="http://schemas.microsoft.com/office/drawing/2014/main" id="{7123A104-C6E9-43BA-A2DC-37B5931C5F3E}"/>
               </a:ext>
             </a:extLst>
           </p:cNvPr>
@@ -35401,7 +35401,7 @@
           <p:cNvPr id="8" name="line-459">
             <a:extLst xmlns:a="http://schemas.openxmlformats.org/drawingml/2006/main">
               <a:ext uri="{FF2B5EF4-FFF2-40B4-BE49-F238E27FC236}">
-                <a16:creationId xmlns:a16="http://schemas.microsoft.com/office/drawing/2014/main" id="{1F536B31-29EF-48F3-97D7-CBAA1D7CCE04}"/>
+                <a16:creationId xmlns:a16="http://schemas.microsoft.com/office/drawing/2014/main" id="{2A7E7E38-8BEA-40D7-BA96-0EFA5C01630D}"/>
               </a:ext>
             </a:extLst>
           </p:cNvPr>
@@ -35441,7 +35441,7 @@
           <p:cNvPr id="9" name="object-460">
             <a:extLst xmlns:a="http://schemas.openxmlformats.org/drawingml/2006/main">
               <a:ext uri="{FF2B5EF4-FFF2-40B4-BE49-F238E27FC236}">
-                <a16:creationId xmlns:a16="http://schemas.microsoft.com/office/drawing/2014/main" id="{E32BC64A-873D-464F-8BC0-065C3E9932E4}"/>
+                <a16:creationId xmlns:a16="http://schemas.microsoft.com/office/drawing/2014/main" id="{3A5330BB-7C3A-42BE-83F1-EE64EFDC680A}"/>
               </a:ext>
             </a:extLst>
           </p:cNvPr>
@@ -35472,7 +35472,7 @@
           <p:cNvPr id="10" name="object-461">
             <a:extLst xmlns:a="http://schemas.openxmlformats.org/drawingml/2006/main">
               <a:ext uri="{FF2B5EF4-FFF2-40B4-BE49-F238E27FC236}">
-                <a16:creationId xmlns:a16="http://schemas.microsoft.com/office/drawing/2014/main" id="{642BC6A3-0AC8-429D-AEFC-F1BE45DF1BC9}"/>
+                <a16:creationId xmlns:a16="http://schemas.microsoft.com/office/drawing/2014/main" id="{48B443DA-BFFF-4127-80A9-7567C041CA32}"/>
               </a:ext>
             </a:extLst>
           </p:cNvPr>
@@ -35539,7 +35539,7 @@
           <p:cNvPr id="11" name="line-462">
             <a:extLst xmlns:a="http://schemas.openxmlformats.org/drawingml/2006/main">
               <a:ext uri="{FF2B5EF4-FFF2-40B4-BE49-F238E27FC236}">
-                <a16:creationId xmlns:a16="http://schemas.microsoft.com/office/drawing/2014/main" id="{D4774A9D-7FC4-47C6-9F1A-1ACCE4C74816}"/>
+                <a16:creationId xmlns:a16="http://schemas.microsoft.com/office/drawing/2014/main" id="{DD94C2A2-2096-4C4B-848C-365F7E91BDFB}"/>
               </a:ext>
             </a:extLst>
           </p:cNvPr>
@@ -35579,7 +35579,7 @@
           <p:cNvPr id="12" name="object-463">
             <a:extLst xmlns:a="http://schemas.openxmlformats.org/drawingml/2006/main">
               <a:ext uri="{FF2B5EF4-FFF2-40B4-BE49-F238E27FC236}">
-                <a16:creationId xmlns:a16="http://schemas.microsoft.com/office/drawing/2014/main" id="{DD71C0C6-86DA-41B9-AA08-211B95C383D3}"/>
+                <a16:creationId xmlns:a16="http://schemas.microsoft.com/office/drawing/2014/main" id="{9E74B36A-3E47-4988-AE94-4AD9BE12EAE1}"/>
               </a:ext>
             </a:extLst>
           </p:cNvPr>
@@ -35610,7 +35610,7 @@
           <p:cNvPr id="13" name="object-464">
             <a:extLst xmlns:a="http://schemas.openxmlformats.org/drawingml/2006/main">
               <a:ext uri="{FF2B5EF4-FFF2-40B4-BE49-F238E27FC236}">
-                <a16:creationId xmlns:a16="http://schemas.microsoft.com/office/drawing/2014/main" id="{15120C61-50DD-4158-B4FA-49D4217EBEAB}"/>
+                <a16:creationId xmlns:a16="http://schemas.microsoft.com/office/drawing/2014/main" id="{4B829DA3-D59A-4EB3-B120-25AE9DA4E09B}"/>
               </a:ext>
             </a:extLst>
           </p:cNvPr>
@@ -35677,7 +35677,7 @@
           <p:cNvPr id="14" name="line-465">
             <a:extLst xmlns:a="http://schemas.openxmlformats.org/drawingml/2006/main">
               <a:ext uri="{FF2B5EF4-FFF2-40B4-BE49-F238E27FC236}">
-                <a16:creationId xmlns:a16="http://schemas.microsoft.com/office/drawing/2014/main" id="{15237448-F33D-4315-A40D-810A63D92CFA}"/>
+                <a16:creationId xmlns:a16="http://schemas.microsoft.com/office/drawing/2014/main" id="{2B77BB9E-FD4A-4F16-BC88-2DB5598190F7}"/>
               </a:ext>
             </a:extLst>
           </p:cNvPr>
@@ -35717,7 +35717,7 @@
           <p:cNvPr id="15" name="object-466">
             <a:extLst xmlns:a="http://schemas.openxmlformats.org/drawingml/2006/main">
               <a:ext uri="{FF2B5EF4-FFF2-40B4-BE49-F238E27FC236}">
-                <a16:creationId xmlns:a16="http://schemas.microsoft.com/office/drawing/2014/main" id="{22323708-28CE-4206-9195-5165356A8E83}"/>
+                <a16:creationId xmlns:a16="http://schemas.microsoft.com/office/drawing/2014/main" id="{C7951C30-329C-4E14-962D-DDD4FB08F3CF}"/>
               </a:ext>
             </a:extLst>
           </p:cNvPr>
@@ -35748,7 +35748,7 @@
           <p:cNvPr id="16" name="object-467">
             <a:extLst xmlns:a="http://schemas.openxmlformats.org/drawingml/2006/main">
               <a:ext uri="{FF2B5EF4-FFF2-40B4-BE49-F238E27FC236}">
-                <a16:creationId xmlns:a16="http://schemas.microsoft.com/office/drawing/2014/main" id="{1DF4D753-4910-4D28-A14E-2F7002C13A8B}"/>
+                <a16:creationId xmlns:a16="http://schemas.microsoft.com/office/drawing/2014/main" id="{82E9AA9C-6A36-4E7C-8D66-2F7E4B24A541}"/>
               </a:ext>
             </a:extLst>
           </p:cNvPr>
@@ -35815,7 +35815,7 @@
           <p:cNvPr id="17" name="reveal1-object-468">
             <a:extLst xmlns:a="http://schemas.openxmlformats.org/drawingml/2006/main">
               <a:ext uri="{FF2B5EF4-FFF2-40B4-BE49-F238E27FC236}">
-                <a16:creationId xmlns:a16="http://schemas.microsoft.com/office/drawing/2014/main" id="{E38C20F8-88DF-44BD-B916-A68CC3D08A3C}"/>
+                <a16:creationId xmlns:a16="http://schemas.microsoft.com/office/drawing/2014/main" id="{19F4B544-79D8-4093-85EB-B3CC6B1AB5CD}"/>
               </a:ext>
             </a:extLst>
           </p:cNvPr>
@@ -35882,7 +35882,7 @@
           <p:cNvPr id="18" name="reveal1-line-469">
             <a:extLst xmlns:a="http://schemas.openxmlformats.org/drawingml/2006/main">
               <a:ext uri="{FF2B5EF4-FFF2-40B4-BE49-F238E27FC236}">
-                <a16:creationId xmlns:a16="http://schemas.microsoft.com/office/drawing/2014/main" id="{28E9A414-6817-4EFD-B692-B770B562D6B0}"/>
+                <a16:creationId xmlns:a16="http://schemas.microsoft.com/office/drawing/2014/main" id="{CAD8B614-A4CA-4556-AA58-875C10C4F543}"/>
               </a:ext>
             </a:extLst>
           </p:cNvPr>
@@ -35922,7 +35922,7 @@
           <p:cNvPr id="19" name="reveal1-line-470">
             <a:extLst xmlns:a="http://schemas.openxmlformats.org/drawingml/2006/main">
               <a:ext uri="{FF2B5EF4-FFF2-40B4-BE49-F238E27FC236}">
-                <a16:creationId xmlns:a16="http://schemas.microsoft.com/office/drawing/2014/main" id="{7571D0D2-12A4-4195-A830-5026F6148611}"/>
+                <a16:creationId xmlns:a16="http://schemas.microsoft.com/office/drawing/2014/main" id="{BF86541F-F927-46D5-A783-71204CD8DF4C}"/>
               </a:ext>
             </a:extLst>
           </p:cNvPr>
@@ -35962,7 +35962,7 @@
           <p:cNvPr id="20" name="reveal1-line-471">
             <a:extLst xmlns:a="http://schemas.openxmlformats.org/drawingml/2006/main">
               <a:ext uri="{FF2B5EF4-FFF2-40B4-BE49-F238E27FC236}">
-                <a16:creationId xmlns:a16="http://schemas.microsoft.com/office/drawing/2014/main" id="{DA12538C-F892-458D-8F61-DE3B8C2150C7}"/>
+                <a16:creationId xmlns:a16="http://schemas.microsoft.com/office/drawing/2014/main" id="{5C40066C-F4A8-4F04-B31D-8CF349EE902F}"/>
               </a:ext>
             </a:extLst>
           </p:cNvPr>
@@ -36002,7 +36002,7 @@
           <p:cNvPr id="21" name="reveal1-object-472">
             <a:extLst xmlns:a="http://schemas.openxmlformats.org/drawingml/2006/main">
               <a:ext uri="{FF2B5EF4-FFF2-40B4-BE49-F238E27FC236}">
-                <a16:creationId xmlns:a16="http://schemas.microsoft.com/office/drawing/2014/main" id="{33F76545-BFD2-4E34-8AB3-52632A1A52FC}"/>
+                <a16:creationId xmlns:a16="http://schemas.microsoft.com/office/drawing/2014/main" id="{A7E058EB-11CA-4FE6-A79C-F9F873C9512E}"/>
               </a:ext>
             </a:extLst>
           </p:cNvPr>
@@ -36069,7 +36069,7 @@
           <p:cNvPr id="22" name="reveal1-line-473">
             <a:extLst xmlns:a="http://schemas.openxmlformats.org/drawingml/2006/main">
               <a:ext uri="{FF2B5EF4-FFF2-40B4-BE49-F238E27FC236}">
-                <a16:creationId xmlns:a16="http://schemas.microsoft.com/office/drawing/2014/main" id="{66D9DF7D-4EA4-452B-ADEC-21E4311F50B8}"/>
+                <a16:creationId xmlns:a16="http://schemas.microsoft.com/office/drawing/2014/main" id="{026F8B22-F35C-4F29-A15E-54C1230E1720}"/>
               </a:ext>
             </a:extLst>
           </p:cNvPr>
@@ -36109,7 +36109,7 @@
           <p:cNvPr id="23" name="reveal1-line-474">
             <a:extLst xmlns:a="http://schemas.openxmlformats.org/drawingml/2006/main">
               <a:ext uri="{FF2B5EF4-FFF2-40B4-BE49-F238E27FC236}">
-                <a16:creationId xmlns:a16="http://schemas.microsoft.com/office/drawing/2014/main" id="{EB8F0BAF-A483-4938-8F3B-3B51C35AFB34}"/>
+                <a16:creationId xmlns:a16="http://schemas.microsoft.com/office/drawing/2014/main" id="{950BEC2D-29F8-46F3-890F-B73D2F069094}"/>
               </a:ext>
             </a:extLst>
           </p:cNvPr>
@@ -36149,7 +36149,7 @@
           <p:cNvPr id="24" name="reveal1-line-475">
             <a:extLst xmlns:a="http://schemas.openxmlformats.org/drawingml/2006/main">
               <a:ext uri="{FF2B5EF4-FFF2-40B4-BE49-F238E27FC236}">
-                <a16:creationId xmlns:a16="http://schemas.microsoft.com/office/drawing/2014/main" id="{551AF568-502B-4FD0-89B5-3E111CBA9009}"/>
+                <a16:creationId xmlns:a16="http://schemas.microsoft.com/office/drawing/2014/main" id="{E3C6250C-5D85-44A1-A668-891BA8DD5C2F}"/>
               </a:ext>
             </a:extLst>
           </p:cNvPr>
@@ -36189,7 +36189,7 @@
           <p:cNvPr id="25" name="reveal1-object-476">
             <a:extLst xmlns:a="http://schemas.openxmlformats.org/drawingml/2006/main">
               <a:ext uri="{FF2B5EF4-FFF2-40B4-BE49-F238E27FC236}">
-                <a16:creationId xmlns:a16="http://schemas.microsoft.com/office/drawing/2014/main" id="{73CAD538-90F4-4B56-A87D-7926BBA0A3DA}"/>
+                <a16:creationId xmlns:a16="http://schemas.microsoft.com/office/drawing/2014/main" id="{F1BC543E-C3E2-4B40-B070-8A85EE85F05C}"/>
               </a:ext>
             </a:extLst>
           </p:cNvPr>
@@ -36256,7 +36256,7 @@
           <p:cNvPr id="26" name="reveal1-object-477">
             <a:extLst xmlns:a="http://schemas.openxmlformats.org/drawingml/2006/main">
               <a:ext uri="{FF2B5EF4-FFF2-40B4-BE49-F238E27FC236}">
-                <a16:creationId xmlns:a16="http://schemas.microsoft.com/office/drawing/2014/main" id="{D75934F7-40BF-4CD3-B260-B8F094F89C45}"/>
+                <a16:creationId xmlns:a16="http://schemas.microsoft.com/office/drawing/2014/main" id="{9B292AF4-C26C-4521-8748-6D7696475650}"/>
               </a:ext>
             </a:extLst>
           </p:cNvPr>
@@ -36323,7 +36323,7 @@
           <p:cNvPr id="27" name="reveal1-line-478">
             <a:extLst xmlns:a="http://schemas.openxmlformats.org/drawingml/2006/main">
               <a:ext uri="{FF2B5EF4-FFF2-40B4-BE49-F238E27FC236}">
-                <a16:creationId xmlns:a16="http://schemas.microsoft.com/office/drawing/2014/main" id="{A49B319B-E074-46F2-83CD-97F7C0187A47}"/>
+                <a16:creationId xmlns:a16="http://schemas.microsoft.com/office/drawing/2014/main" id="{56A3D8AE-1270-4855-B0F1-BBA133693AE6}"/>
               </a:ext>
             </a:extLst>
           </p:cNvPr>
@@ -36363,7 +36363,7 @@
           <p:cNvPr id="28" name="reveal1-line-479">
             <a:extLst xmlns:a="http://schemas.openxmlformats.org/drawingml/2006/main">
               <a:ext uri="{FF2B5EF4-FFF2-40B4-BE49-F238E27FC236}">
-                <a16:creationId xmlns:a16="http://schemas.microsoft.com/office/drawing/2014/main" id="{52D0BCAD-2EE7-4B2A-A588-5AA2762F0EEB}"/>
+                <a16:creationId xmlns:a16="http://schemas.microsoft.com/office/drawing/2014/main" id="{F365A7C0-6BAF-4E47-98B7-BEB2D25536F3}"/>
               </a:ext>
             </a:extLst>
           </p:cNvPr>
@@ -36403,7 +36403,7 @@
           <p:cNvPr id="29" name="reveal1-line-480">
             <a:extLst xmlns:a="http://schemas.openxmlformats.org/drawingml/2006/main">
               <a:ext uri="{FF2B5EF4-FFF2-40B4-BE49-F238E27FC236}">
-                <a16:creationId xmlns:a16="http://schemas.microsoft.com/office/drawing/2014/main" id="{8E888F3F-489C-487D-BE3C-F858CFD9E8E0}"/>
+                <a16:creationId xmlns:a16="http://schemas.microsoft.com/office/drawing/2014/main" id="{D0BC0AA1-F008-4930-8522-FF87C6B20ED7}"/>
               </a:ext>
             </a:extLst>
           </p:cNvPr>
@@ -36443,7 +36443,7 @@
           <p:cNvPr id="30" name="reveal2-object-481">
             <a:extLst xmlns:a="http://schemas.openxmlformats.org/drawingml/2006/main">
               <a:ext uri="{FF2B5EF4-FFF2-40B4-BE49-F238E27FC236}">
-                <a16:creationId xmlns:a16="http://schemas.microsoft.com/office/drawing/2014/main" id="{4DDDEA77-16CE-4F71-A4B5-E7EE5A6D09F9}"/>
+                <a16:creationId xmlns:a16="http://schemas.microsoft.com/office/drawing/2014/main" id="{0835E1AD-2DCC-48A0-BDBD-80EE4153E84D}"/>
               </a:ext>
             </a:extLst>
           </p:cNvPr>
@@ -36510,7 +36510,7 @@
           <p:cNvPr id="31" name="reveal2-object-482">
             <a:extLst xmlns:a="http://schemas.openxmlformats.org/drawingml/2006/main">
               <a:ext uri="{FF2B5EF4-FFF2-40B4-BE49-F238E27FC236}">
-                <a16:creationId xmlns:a16="http://schemas.microsoft.com/office/drawing/2014/main" id="{7C180EAF-C327-4F5A-89D5-45B9B18AE0D8}"/>
+                <a16:creationId xmlns:a16="http://schemas.microsoft.com/office/drawing/2014/main" id="{5818F4CE-33C4-48F8-A96C-EA1E478D2411}"/>
               </a:ext>
             </a:extLst>
           </p:cNvPr>
@@ -36577,7 +36577,7 @@
           <p:cNvPr id="32" name="reveal2-line-483">
             <a:extLst xmlns:a="http://schemas.openxmlformats.org/drawingml/2006/main">
               <a:ext uri="{FF2B5EF4-FFF2-40B4-BE49-F238E27FC236}">
-                <a16:creationId xmlns:a16="http://schemas.microsoft.com/office/drawing/2014/main" id="{5BCDAA1F-80A9-40F2-A6BE-10A854104B62}"/>
+                <a16:creationId xmlns:a16="http://schemas.microsoft.com/office/drawing/2014/main" id="{C25C9091-4B96-4C52-A263-E2A652B0A9AA}"/>
               </a:ext>
             </a:extLst>
           </p:cNvPr>
@@ -36617,7 +36617,7 @@
           <p:cNvPr id="33" name="reveal2-line-484">
             <a:extLst xmlns:a="http://schemas.openxmlformats.org/drawingml/2006/main">
               <a:ext uri="{FF2B5EF4-FFF2-40B4-BE49-F238E27FC236}">
-                <a16:creationId xmlns:a16="http://schemas.microsoft.com/office/drawing/2014/main" id="{C963AAB1-F4D3-46F6-8D2E-A72E927C3262}"/>
+                <a16:creationId xmlns:a16="http://schemas.microsoft.com/office/drawing/2014/main" id="{D76AA688-6D44-4CCE-9F46-26BDB4A7005E}"/>
               </a:ext>
             </a:extLst>
           </p:cNvPr>
@@ -36657,7 +36657,7 @@
           <p:cNvPr id="34" name="reveal2-line-485">
             <a:extLst xmlns:a="http://schemas.openxmlformats.org/drawingml/2006/main">
               <a:ext uri="{FF2B5EF4-FFF2-40B4-BE49-F238E27FC236}">
-                <a16:creationId xmlns:a16="http://schemas.microsoft.com/office/drawing/2014/main" id="{C0441698-C34B-4886-BAE7-F4B3CE6D2DD8}"/>
+                <a16:creationId xmlns:a16="http://schemas.microsoft.com/office/drawing/2014/main" id="{6D0AA566-502B-405F-9FBB-6E6C926D7114}"/>
               </a:ext>
             </a:extLst>
           </p:cNvPr>
@@ -36697,7 +36697,7 @@
           <p:cNvPr id="35" name="reveal2-object-486">
             <a:extLst xmlns:a="http://schemas.openxmlformats.org/drawingml/2006/main">
               <a:ext uri="{FF2B5EF4-FFF2-40B4-BE49-F238E27FC236}">
-                <a16:creationId xmlns:a16="http://schemas.microsoft.com/office/drawing/2014/main" id="{FAB24803-36CB-4A0C-8290-775EE40CBF84}"/>
+                <a16:creationId xmlns:a16="http://schemas.microsoft.com/office/drawing/2014/main" id="{55300513-A4EF-4D1B-9B3A-4229CFC428D0}"/>
               </a:ext>
             </a:extLst>
           </p:cNvPr>
@@ -36764,7 +36764,7 @@
           <p:cNvPr id="36" name="object-487">
             <a:extLst xmlns:a="http://schemas.openxmlformats.org/drawingml/2006/main">
               <a:ext uri="{FF2B5EF4-FFF2-40B4-BE49-F238E27FC236}">
-                <a16:creationId xmlns:a16="http://schemas.microsoft.com/office/drawing/2014/main" id="{FFB12E5E-E4A7-4F68-B44A-A26CD2680106}"/>
+                <a16:creationId xmlns:a16="http://schemas.microsoft.com/office/drawing/2014/main" id="{C81B0D72-A17D-403C-A885-CB82930CE124}"/>
               </a:ext>
             </a:extLst>
           </p:cNvPr>
@@ -36831,7 +36831,7 @@
           <p:cNvPr id="37" name="object-488">
             <a:extLst xmlns:a="http://schemas.openxmlformats.org/drawingml/2006/main">
               <a:ext uri="{FF2B5EF4-FFF2-40B4-BE49-F238E27FC236}">
-                <a16:creationId xmlns:a16="http://schemas.microsoft.com/office/drawing/2014/main" id="{9509E16F-2378-4BE1-9644-FB32E9FC9B94}"/>
+                <a16:creationId xmlns:a16="http://schemas.microsoft.com/office/drawing/2014/main" id="{ABD0D6B7-E58E-4EC2-9464-02404858961D}"/>
               </a:ext>
             </a:extLst>
           </p:cNvPr>
@@ -36896,7 +36896,7 @@
     </p:spTree>
     <p:extLst>
       <p:ext uri="{BB962C8B-B14F-4D97-AF65-F5344CB8AC3E}">
-        <p14:creationId xmlns:p14="http://schemas.microsoft.com/office/powerpoint/2010/main" val="1916363629"/>
+        <p14:creationId xmlns:p14="http://schemas.microsoft.com/office/powerpoint/2010/main" val="1547942906"/>
       </p:ext>
     </p:extLst>
   </p:cSld>
@@ -37527,7 +37527,7 @@
           <p:cNvPr id="42" name="object-489">
             <a:extLst xmlns:a="http://schemas.openxmlformats.org/drawingml/2006/main">
               <a:ext uri="{FF2B5EF4-FFF2-40B4-BE49-F238E27FC236}">
-                <a16:creationId xmlns:a16="http://schemas.microsoft.com/office/drawing/2014/main" id="{938ED91A-455C-4F56-876E-24A445C44BE8}"/>
+                <a16:creationId xmlns:a16="http://schemas.microsoft.com/office/drawing/2014/main" id="{E06EF0D9-3772-4FF3-92C3-410E56FE8BCA}"/>
               </a:ext>
             </a:extLst>
           </p:cNvPr>
@@ -37594,7 +37594,7 @@
           <p:cNvPr id="2" name="object-490">
             <a:extLst xmlns:a="http://schemas.openxmlformats.org/drawingml/2006/main">
               <a:ext uri="{FF2B5EF4-FFF2-40B4-BE49-F238E27FC236}">
-                <a16:creationId xmlns:a16="http://schemas.microsoft.com/office/drawing/2014/main" id="{1F338824-31BD-47A8-8009-0DDB1FBA0904}"/>
+                <a16:creationId xmlns:a16="http://schemas.microsoft.com/office/drawing/2014/main" id="{33FF4299-3005-4D6C-889E-A39E18BE7E34}"/>
               </a:ext>
             </a:extLst>
           </p:cNvPr>
@@ -37661,7 +37661,7 @@
           <p:cNvPr id="3" name="object-491">
             <a:extLst xmlns:a="http://schemas.openxmlformats.org/drawingml/2006/main">
               <a:ext uri="{FF2B5EF4-FFF2-40B4-BE49-F238E27FC236}">
-                <a16:creationId xmlns:a16="http://schemas.microsoft.com/office/drawing/2014/main" id="{2914E8A4-1E82-420D-BC05-E59221D702BB}"/>
+                <a16:creationId xmlns:a16="http://schemas.microsoft.com/office/drawing/2014/main" id="{21A7CD23-412A-4BE8-9A09-9DD15ACC566E}"/>
               </a:ext>
             </a:extLst>
           </p:cNvPr>
@@ -37692,7 +37692,7 @@
           <p:cNvPr id="4" name="object-492">
             <a:extLst xmlns:a="http://schemas.openxmlformats.org/drawingml/2006/main">
               <a:ext uri="{FF2B5EF4-FFF2-40B4-BE49-F238E27FC236}">
-                <a16:creationId xmlns:a16="http://schemas.microsoft.com/office/drawing/2014/main" id="{8AE82C1A-A035-462B-AD72-6E07EF42A140}"/>
+                <a16:creationId xmlns:a16="http://schemas.microsoft.com/office/drawing/2014/main" id="{1DE9ACBA-0C29-49EF-98F7-E299FAFB46AF}"/>
               </a:ext>
             </a:extLst>
           </p:cNvPr>
@@ -37759,7 +37759,7 @@
           <p:cNvPr id="5" name="line-493">
             <a:extLst xmlns:a="http://schemas.openxmlformats.org/drawingml/2006/main">
               <a:ext uri="{FF2B5EF4-FFF2-40B4-BE49-F238E27FC236}">
-                <a16:creationId xmlns:a16="http://schemas.microsoft.com/office/drawing/2014/main" id="{DCBAC37E-B051-47FE-B432-331F343F578B}"/>
+                <a16:creationId xmlns:a16="http://schemas.microsoft.com/office/drawing/2014/main" id="{FB4AE0DD-723E-434E-A8D4-2B49A0DE928E}"/>
               </a:ext>
             </a:extLst>
           </p:cNvPr>
@@ -37799,7 +37799,7 @@
           <p:cNvPr id="6" name="object-494">
             <a:extLst xmlns:a="http://schemas.openxmlformats.org/drawingml/2006/main">
               <a:ext uri="{FF2B5EF4-FFF2-40B4-BE49-F238E27FC236}">
-                <a16:creationId xmlns:a16="http://schemas.microsoft.com/office/drawing/2014/main" id="{40D00762-4ED0-40D2-8547-B62BDE4FA9F7}"/>
+                <a16:creationId xmlns:a16="http://schemas.microsoft.com/office/drawing/2014/main" id="{FCF3742A-E6C3-43B9-9B1B-8036D38F60EC}"/>
               </a:ext>
             </a:extLst>
           </p:cNvPr>
@@ -37830,7 +37830,7 @@
           <p:cNvPr id="7" name="object-495">
             <a:extLst xmlns:a="http://schemas.openxmlformats.org/drawingml/2006/main">
               <a:ext uri="{FF2B5EF4-FFF2-40B4-BE49-F238E27FC236}">
-                <a16:creationId xmlns:a16="http://schemas.microsoft.com/office/drawing/2014/main" id="{68987A31-A4DF-4100-83CA-09C654D0526B}"/>
+                <a16:creationId xmlns:a16="http://schemas.microsoft.com/office/drawing/2014/main" id="{B048169D-DAF9-4C0B-A8DE-FD72893E32B0}"/>
               </a:ext>
             </a:extLst>
           </p:cNvPr>
@@ -37897,7 +37897,7 @@
           <p:cNvPr id="8" name="line-496">
             <a:extLst xmlns:a="http://schemas.openxmlformats.org/drawingml/2006/main">
               <a:ext uri="{FF2B5EF4-FFF2-40B4-BE49-F238E27FC236}">
-                <a16:creationId xmlns:a16="http://schemas.microsoft.com/office/drawing/2014/main" id="{9FC4B0FD-70E2-481C-9CF7-055C2D22DBE8}"/>
+                <a16:creationId xmlns:a16="http://schemas.microsoft.com/office/drawing/2014/main" id="{22C9DE93-EF4B-492C-938C-B1060DADE529}"/>
               </a:ext>
             </a:extLst>
           </p:cNvPr>
@@ -37937,7 +37937,7 @@
           <p:cNvPr id="9" name="object-497">
             <a:extLst xmlns:a="http://schemas.openxmlformats.org/drawingml/2006/main">
               <a:ext uri="{FF2B5EF4-FFF2-40B4-BE49-F238E27FC236}">
-                <a16:creationId xmlns:a16="http://schemas.microsoft.com/office/drawing/2014/main" id="{007183CC-274F-40F5-9071-F6D6651F679C}"/>
+                <a16:creationId xmlns:a16="http://schemas.microsoft.com/office/drawing/2014/main" id="{D8421252-ED1C-4337-A4F5-B4DC4068B0E6}"/>
               </a:ext>
             </a:extLst>
           </p:cNvPr>
@@ -37968,7 +37968,7 @@
           <p:cNvPr id="10" name="object-498">
             <a:extLst xmlns:a="http://schemas.openxmlformats.org/drawingml/2006/main">
               <a:ext uri="{FF2B5EF4-FFF2-40B4-BE49-F238E27FC236}">
-                <a16:creationId xmlns:a16="http://schemas.microsoft.com/office/drawing/2014/main" id="{585F87FF-15ED-4302-B566-085485282488}"/>
+                <a16:creationId xmlns:a16="http://schemas.microsoft.com/office/drawing/2014/main" id="{0692192C-BF69-4968-8A19-304FA1E0AE5B}"/>
               </a:ext>
             </a:extLst>
           </p:cNvPr>
@@ -38035,7 +38035,7 @@
           <p:cNvPr id="11" name="line-499">
             <a:extLst xmlns:a="http://schemas.openxmlformats.org/drawingml/2006/main">
               <a:ext uri="{FF2B5EF4-FFF2-40B4-BE49-F238E27FC236}">
-                <a16:creationId xmlns:a16="http://schemas.microsoft.com/office/drawing/2014/main" id="{22F2ACF9-2C3E-4B5A-86B7-B8B856471F68}"/>
+                <a16:creationId xmlns:a16="http://schemas.microsoft.com/office/drawing/2014/main" id="{4FAD1182-4611-4E3A-9B41-94FF91434139}"/>
               </a:ext>
             </a:extLst>
           </p:cNvPr>
@@ -38075,7 +38075,7 @@
           <p:cNvPr id="12" name="object-500">
             <a:extLst xmlns:a="http://schemas.openxmlformats.org/drawingml/2006/main">
               <a:ext uri="{FF2B5EF4-FFF2-40B4-BE49-F238E27FC236}">
-                <a16:creationId xmlns:a16="http://schemas.microsoft.com/office/drawing/2014/main" id="{0B1B8B66-21EB-4257-B3B0-03A196BBC4AE}"/>
+                <a16:creationId xmlns:a16="http://schemas.microsoft.com/office/drawing/2014/main" id="{B826D60B-3DEF-4E58-B4F6-90650111645B}"/>
               </a:ext>
             </a:extLst>
           </p:cNvPr>
@@ -38106,7 +38106,7 @@
           <p:cNvPr id="13" name="object-501">
             <a:extLst xmlns:a="http://schemas.openxmlformats.org/drawingml/2006/main">
               <a:ext uri="{FF2B5EF4-FFF2-40B4-BE49-F238E27FC236}">
-                <a16:creationId xmlns:a16="http://schemas.microsoft.com/office/drawing/2014/main" id="{D9DF1115-9C21-44C9-B700-811D7CD03C4A}"/>
+                <a16:creationId xmlns:a16="http://schemas.microsoft.com/office/drawing/2014/main" id="{2BA8AB70-BBFA-472A-A7FD-731361A52D8A}"/>
               </a:ext>
             </a:extLst>
           </p:cNvPr>
@@ -38173,7 +38173,7 @@
           <p:cNvPr id="14" name="line-502">
             <a:extLst xmlns:a="http://schemas.openxmlformats.org/drawingml/2006/main">
               <a:ext uri="{FF2B5EF4-FFF2-40B4-BE49-F238E27FC236}">
-                <a16:creationId xmlns:a16="http://schemas.microsoft.com/office/drawing/2014/main" id="{65B24539-6326-41DA-90EC-973BE28521E1}"/>
+                <a16:creationId xmlns:a16="http://schemas.microsoft.com/office/drawing/2014/main" id="{2EDD6DEE-9015-414C-8CF4-AD8420FB5F74}"/>
               </a:ext>
             </a:extLst>
           </p:cNvPr>
@@ -38213,7 +38213,7 @@
           <p:cNvPr id="15" name="reveal1-object-503">
             <a:extLst xmlns:a="http://schemas.openxmlformats.org/drawingml/2006/main">
               <a:ext uri="{FF2B5EF4-FFF2-40B4-BE49-F238E27FC236}">
-                <a16:creationId xmlns:a16="http://schemas.microsoft.com/office/drawing/2014/main" id="{1AE295A4-3F2E-4BD8-8DDE-D8DFA784CED5}"/>
+                <a16:creationId xmlns:a16="http://schemas.microsoft.com/office/drawing/2014/main" id="{A3723647-48CB-402A-B88A-8FB4AB084B50}"/>
               </a:ext>
             </a:extLst>
           </p:cNvPr>
@@ -38280,7 +38280,7 @@
           <p:cNvPr id="16" name="reveal1-line-504">
             <a:extLst xmlns:a="http://schemas.openxmlformats.org/drawingml/2006/main">
               <a:ext uri="{FF2B5EF4-FFF2-40B4-BE49-F238E27FC236}">
-                <a16:creationId xmlns:a16="http://schemas.microsoft.com/office/drawing/2014/main" id="{72C2CAC8-A7E1-4255-AC77-5F4D3611B3DB}"/>
+                <a16:creationId xmlns:a16="http://schemas.microsoft.com/office/drawing/2014/main" id="{B952BB75-792E-4773-A76A-D0DA74576028}"/>
               </a:ext>
             </a:extLst>
           </p:cNvPr>
@@ -38320,7 +38320,7 @@
           <p:cNvPr id="17" name="reveal1-line-505">
             <a:extLst xmlns:a="http://schemas.openxmlformats.org/drawingml/2006/main">
               <a:ext uri="{FF2B5EF4-FFF2-40B4-BE49-F238E27FC236}">
-                <a16:creationId xmlns:a16="http://schemas.microsoft.com/office/drawing/2014/main" id="{4BDC68FF-3D99-4472-BFAD-806C658FD9CF}"/>
+                <a16:creationId xmlns:a16="http://schemas.microsoft.com/office/drawing/2014/main" id="{6E5C0ACC-EE2A-4E00-B182-EEFB27EE55B0}"/>
               </a:ext>
             </a:extLst>
           </p:cNvPr>
@@ -38360,7 +38360,7 @@
           <p:cNvPr id="18" name="reveal1-line-506">
             <a:extLst xmlns:a="http://schemas.openxmlformats.org/drawingml/2006/main">
               <a:ext uri="{FF2B5EF4-FFF2-40B4-BE49-F238E27FC236}">
-                <a16:creationId xmlns:a16="http://schemas.microsoft.com/office/drawing/2014/main" id="{8EF93D75-9F06-42C4-96EC-2E046B585D61}"/>
+                <a16:creationId xmlns:a16="http://schemas.microsoft.com/office/drawing/2014/main" id="{F898EDF8-C686-4654-AA29-A3926FC02716}"/>
               </a:ext>
             </a:extLst>
           </p:cNvPr>
@@ -38400,7 +38400,7 @@
           <p:cNvPr id="19" name="reveal1-object-507">
             <a:extLst xmlns:a="http://schemas.openxmlformats.org/drawingml/2006/main">
               <a:ext uri="{FF2B5EF4-FFF2-40B4-BE49-F238E27FC236}">
-                <a16:creationId xmlns:a16="http://schemas.microsoft.com/office/drawing/2014/main" id="{D32E32AA-E80D-456F-A384-CF1942E7AE56}"/>
+                <a16:creationId xmlns:a16="http://schemas.microsoft.com/office/drawing/2014/main" id="{F231E983-5655-4FA2-B56A-4DAAC3C3250F}"/>
               </a:ext>
             </a:extLst>
           </p:cNvPr>
@@ -38467,7 +38467,7 @@
           <p:cNvPr id="20" name="reveal1-line-508">
             <a:extLst xmlns:a="http://schemas.openxmlformats.org/drawingml/2006/main">
               <a:ext uri="{FF2B5EF4-FFF2-40B4-BE49-F238E27FC236}">
-                <a16:creationId xmlns:a16="http://schemas.microsoft.com/office/drawing/2014/main" id="{7C6AEB93-B465-428C-A6A0-DC99C94E84B6}"/>
+                <a16:creationId xmlns:a16="http://schemas.microsoft.com/office/drawing/2014/main" id="{17073561-1CF8-4FA2-B328-5BAE8390F6D7}"/>
               </a:ext>
             </a:extLst>
           </p:cNvPr>
@@ -38507,7 +38507,7 @@
           <p:cNvPr id="21" name="reveal1-line-509">
             <a:extLst xmlns:a="http://schemas.openxmlformats.org/drawingml/2006/main">
               <a:ext uri="{FF2B5EF4-FFF2-40B4-BE49-F238E27FC236}">
-                <a16:creationId xmlns:a16="http://schemas.microsoft.com/office/drawing/2014/main" id="{0B4EA229-7D68-498D-8FCB-F8B939966B41}"/>
+                <a16:creationId xmlns:a16="http://schemas.microsoft.com/office/drawing/2014/main" id="{A82A29BE-5D44-4496-B14D-40724469AA66}"/>
               </a:ext>
             </a:extLst>
           </p:cNvPr>
@@ -38547,7 +38547,7 @@
           <p:cNvPr id="22" name="reveal1-line-510">
             <a:extLst xmlns:a="http://schemas.openxmlformats.org/drawingml/2006/main">
               <a:ext uri="{FF2B5EF4-FFF2-40B4-BE49-F238E27FC236}">
-                <a16:creationId xmlns:a16="http://schemas.microsoft.com/office/drawing/2014/main" id="{D122DEC9-D73A-457B-B2BA-2E55CCAFEBB5}"/>
+                <a16:creationId xmlns:a16="http://schemas.microsoft.com/office/drawing/2014/main" id="{D119578A-BF87-4FD2-A28E-DDD1FE4A12E6}"/>
               </a:ext>
             </a:extLst>
           </p:cNvPr>
@@ -38587,7 +38587,7 @@
           <p:cNvPr id="23" name="reveal1-object-511">
             <a:extLst xmlns:a="http://schemas.openxmlformats.org/drawingml/2006/main">
               <a:ext uri="{FF2B5EF4-FFF2-40B4-BE49-F238E27FC236}">
-                <a16:creationId xmlns:a16="http://schemas.microsoft.com/office/drawing/2014/main" id="{D1EE76FC-6483-431C-9C71-2D22F564A814}"/>
+                <a16:creationId xmlns:a16="http://schemas.microsoft.com/office/drawing/2014/main" id="{503FACAD-E58B-46A9-8411-39B9730FF182}"/>
               </a:ext>
             </a:extLst>
           </p:cNvPr>
@@ -38654,7 +38654,7 @@
           <p:cNvPr id="24" name="reveal1-object-512">
             <a:extLst xmlns:a="http://schemas.openxmlformats.org/drawingml/2006/main">
               <a:ext uri="{FF2B5EF4-FFF2-40B4-BE49-F238E27FC236}">
-                <a16:creationId xmlns:a16="http://schemas.microsoft.com/office/drawing/2014/main" id="{492379AE-697D-4C09-A3F3-377407A6A3EE}"/>
+                <a16:creationId xmlns:a16="http://schemas.microsoft.com/office/drawing/2014/main" id="{70ADA674-28EE-4A44-97A0-4991C8607198}"/>
               </a:ext>
             </a:extLst>
           </p:cNvPr>
@@ -38685,7 +38685,7 @@
           <p:cNvPr id="25" name="reveal1-object-513">
             <a:extLst xmlns:a="http://schemas.openxmlformats.org/drawingml/2006/main">
               <a:ext uri="{FF2B5EF4-FFF2-40B4-BE49-F238E27FC236}">
-                <a16:creationId xmlns:a16="http://schemas.microsoft.com/office/drawing/2014/main" id="{9A4E8499-58DC-4F29-B1EC-A3C7B9D44A69}"/>
+                <a16:creationId xmlns:a16="http://schemas.microsoft.com/office/drawing/2014/main" id="{51644D21-08BB-4253-B531-CA51A62DB504}"/>
               </a:ext>
             </a:extLst>
           </p:cNvPr>
@@ -38752,7 +38752,7 @@
           <p:cNvPr id="26" name="reveal1-object-514">
             <a:extLst xmlns:a="http://schemas.openxmlformats.org/drawingml/2006/main">
               <a:ext uri="{FF2B5EF4-FFF2-40B4-BE49-F238E27FC236}">
-                <a16:creationId xmlns:a16="http://schemas.microsoft.com/office/drawing/2014/main" id="{5092F083-550F-494D-87FA-9FEBB2ABBF4D}"/>
+                <a16:creationId xmlns:a16="http://schemas.microsoft.com/office/drawing/2014/main" id="{E3B4E923-FDC4-472B-99D3-80FE057686C8}"/>
               </a:ext>
             </a:extLst>
           </p:cNvPr>
@@ -38819,7 +38819,7 @@
           <p:cNvPr id="27" name="reveal1-line-515">
             <a:extLst xmlns:a="http://schemas.openxmlformats.org/drawingml/2006/main">
               <a:ext uri="{FF2B5EF4-FFF2-40B4-BE49-F238E27FC236}">
-                <a16:creationId xmlns:a16="http://schemas.microsoft.com/office/drawing/2014/main" id="{37988314-AE70-421A-A234-278E2202F8A6}"/>
+                <a16:creationId xmlns:a16="http://schemas.microsoft.com/office/drawing/2014/main" id="{9A2A57BC-9546-4C1F-8827-3A91EC839780}"/>
               </a:ext>
             </a:extLst>
           </p:cNvPr>
@@ -38859,7 +38859,7 @@
           <p:cNvPr id="28" name="reveal1-line-516">
             <a:extLst xmlns:a="http://schemas.openxmlformats.org/drawingml/2006/main">
               <a:ext uri="{FF2B5EF4-FFF2-40B4-BE49-F238E27FC236}">
-                <a16:creationId xmlns:a16="http://schemas.microsoft.com/office/drawing/2014/main" id="{88BD9B59-9268-4741-811A-63E26A460D7B}"/>
+                <a16:creationId xmlns:a16="http://schemas.microsoft.com/office/drawing/2014/main" id="{61912237-E7AE-4187-A6DA-A1F7BCB04833}"/>
               </a:ext>
             </a:extLst>
           </p:cNvPr>
@@ -38899,7 +38899,7 @@
           <p:cNvPr id="29" name="reveal1-line-517">
             <a:extLst xmlns:a="http://schemas.openxmlformats.org/drawingml/2006/main">
               <a:ext uri="{FF2B5EF4-FFF2-40B4-BE49-F238E27FC236}">
-                <a16:creationId xmlns:a16="http://schemas.microsoft.com/office/drawing/2014/main" id="{09B8EFEB-C659-445B-A317-C59E576FF2AB}"/>
+                <a16:creationId xmlns:a16="http://schemas.microsoft.com/office/drawing/2014/main" id="{62A78DC0-10EB-4964-8FEC-A5E2C4F5FBA1}"/>
               </a:ext>
             </a:extLst>
           </p:cNvPr>
@@ -38939,7 +38939,7 @@
           <p:cNvPr id="30" name="reveal2-object-518">
             <a:extLst xmlns:a="http://schemas.openxmlformats.org/drawingml/2006/main">
               <a:ext uri="{FF2B5EF4-FFF2-40B4-BE49-F238E27FC236}">
-                <a16:creationId xmlns:a16="http://schemas.microsoft.com/office/drawing/2014/main" id="{EEA68B26-F055-4E81-A99A-4F21F6ED4A50}"/>
+                <a16:creationId xmlns:a16="http://schemas.microsoft.com/office/drawing/2014/main" id="{7D6FFA71-4EEF-4800-9422-5A24DD3BE0CB}"/>
               </a:ext>
             </a:extLst>
           </p:cNvPr>
@@ -39006,7 +39006,7 @@
           <p:cNvPr id="31" name="reveal2-line-519">
             <a:extLst xmlns:a="http://schemas.openxmlformats.org/drawingml/2006/main">
               <a:ext uri="{FF2B5EF4-FFF2-40B4-BE49-F238E27FC236}">
-                <a16:creationId xmlns:a16="http://schemas.microsoft.com/office/drawing/2014/main" id="{BA01E495-0582-4D6F-B132-BD053AEE72BB}"/>
+                <a16:creationId xmlns:a16="http://schemas.microsoft.com/office/drawing/2014/main" id="{03E4A140-23CC-469D-9CA9-893A8E21E4B9}"/>
               </a:ext>
             </a:extLst>
           </p:cNvPr>
@@ -39046,7 +39046,7 @@
           <p:cNvPr id="32" name="reveal2-line-520">
             <a:extLst xmlns:a="http://schemas.openxmlformats.org/drawingml/2006/main">
               <a:ext uri="{FF2B5EF4-FFF2-40B4-BE49-F238E27FC236}">
-                <a16:creationId xmlns:a16="http://schemas.microsoft.com/office/drawing/2014/main" id="{90DAD254-65C2-4CFD-AA77-473295237027}"/>
+                <a16:creationId xmlns:a16="http://schemas.microsoft.com/office/drawing/2014/main" id="{2308498B-E30B-4DB9-B762-EF28DB0D40BD}"/>
               </a:ext>
             </a:extLst>
           </p:cNvPr>
@@ -39086,7 +39086,7 @@
           <p:cNvPr id="33" name="reveal2-line-521">
             <a:extLst xmlns:a="http://schemas.openxmlformats.org/drawingml/2006/main">
               <a:ext uri="{FF2B5EF4-FFF2-40B4-BE49-F238E27FC236}">
-                <a16:creationId xmlns:a16="http://schemas.microsoft.com/office/drawing/2014/main" id="{D62022B3-BD7F-4E5A-BC96-99AF84542663}"/>
+                <a16:creationId xmlns:a16="http://schemas.microsoft.com/office/drawing/2014/main" id="{D09BAC04-F064-40D2-A6A7-FC8C6489F879}"/>
               </a:ext>
             </a:extLst>
           </p:cNvPr>
@@ -39126,7 +39126,7 @@
           <p:cNvPr id="34" name="reveal2-object-522">
             <a:extLst xmlns:a="http://schemas.openxmlformats.org/drawingml/2006/main">
               <a:ext uri="{FF2B5EF4-FFF2-40B4-BE49-F238E27FC236}">
-                <a16:creationId xmlns:a16="http://schemas.microsoft.com/office/drawing/2014/main" id="{EA933904-0C5B-4FE8-BEF6-460B04DF7D1D}"/>
+                <a16:creationId xmlns:a16="http://schemas.microsoft.com/office/drawing/2014/main" id="{7244D78B-17F6-476C-BEA4-FEA2927D6C68}"/>
               </a:ext>
             </a:extLst>
           </p:cNvPr>
@@ -39193,7 +39193,7 @@
           <p:cNvPr id="35" name="reveal2-object-523">
             <a:extLst xmlns:a="http://schemas.openxmlformats.org/drawingml/2006/main">
               <a:ext uri="{FF2B5EF4-FFF2-40B4-BE49-F238E27FC236}">
-                <a16:creationId xmlns:a16="http://schemas.microsoft.com/office/drawing/2014/main" id="{A380FFC3-5EBC-431E-BA60-567C7FB719CB}"/>
+                <a16:creationId xmlns:a16="http://schemas.microsoft.com/office/drawing/2014/main" id="{0C18CA5E-6ABF-47A3-96EE-2795129DA8C0}"/>
               </a:ext>
             </a:extLst>
           </p:cNvPr>
@@ -39260,7 +39260,7 @@
           <p:cNvPr id="36" name="reveal2-line-524">
             <a:extLst xmlns:a="http://schemas.openxmlformats.org/drawingml/2006/main">
               <a:ext uri="{FF2B5EF4-FFF2-40B4-BE49-F238E27FC236}">
-                <a16:creationId xmlns:a16="http://schemas.microsoft.com/office/drawing/2014/main" id="{F0A50A1E-9F04-4BF9-AFB9-78B7583B5136}"/>
+                <a16:creationId xmlns:a16="http://schemas.microsoft.com/office/drawing/2014/main" id="{3E49FC88-CA66-405D-A76B-F2ADE88A35CD}"/>
               </a:ext>
             </a:extLst>
           </p:cNvPr>
@@ -39300,7 +39300,7 @@
           <p:cNvPr id="37" name="reveal2-line-525">
             <a:extLst xmlns:a="http://schemas.openxmlformats.org/drawingml/2006/main">
               <a:ext uri="{FF2B5EF4-FFF2-40B4-BE49-F238E27FC236}">
-                <a16:creationId xmlns:a16="http://schemas.microsoft.com/office/drawing/2014/main" id="{FDA1C609-03BD-43D3-961C-D61AA1D2EE06}"/>
+                <a16:creationId xmlns:a16="http://schemas.microsoft.com/office/drawing/2014/main" id="{9EAD9B34-6B96-4654-BB85-5E9457363D39}"/>
               </a:ext>
             </a:extLst>
           </p:cNvPr>
@@ -39340,7 +39340,7 @@
           <p:cNvPr id="38" name="reveal2-line-526">
             <a:extLst xmlns:a="http://schemas.openxmlformats.org/drawingml/2006/main">
               <a:ext uri="{FF2B5EF4-FFF2-40B4-BE49-F238E27FC236}">
-                <a16:creationId xmlns:a16="http://schemas.microsoft.com/office/drawing/2014/main" id="{D11CD0AF-E50B-46A4-B900-E14ACFCC6C8E}"/>
+                <a16:creationId xmlns:a16="http://schemas.microsoft.com/office/drawing/2014/main" id="{A5B62288-5C4F-4E63-A68F-FD6FA74C1108}"/>
               </a:ext>
             </a:extLst>
           </p:cNvPr>
@@ -39380,7 +39380,7 @@
           <p:cNvPr id="39" name="reveal2-object-527">
             <a:extLst xmlns:a="http://schemas.openxmlformats.org/drawingml/2006/main">
               <a:ext uri="{FF2B5EF4-FFF2-40B4-BE49-F238E27FC236}">
-                <a16:creationId xmlns:a16="http://schemas.microsoft.com/office/drawing/2014/main" id="{F24FDA19-4436-48B6-AE3C-A7298C0DD05F}"/>
+                <a16:creationId xmlns:a16="http://schemas.microsoft.com/office/drawing/2014/main" id="{EF4B67EE-FDEB-461A-A1AB-213B6B86CB00}"/>
               </a:ext>
             </a:extLst>
           </p:cNvPr>
@@ -39447,7 +39447,7 @@
           <p:cNvPr id="40" name="object-528">
             <a:extLst xmlns:a="http://schemas.openxmlformats.org/drawingml/2006/main">
               <a:ext uri="{FF2B5EF4-FFF2-40B4-BE49-F238E27FC236}">
-                <a16:creationId xmlns:a16="http://schemas.microsoft.com/office/drawing/2014/main" id="{484F2495-FB72-4942-BB65-43758250BB55}"/>
+                <a16:creationId xmlns:a16="http://schemas.microsoft.com/office/drawing/2014/main" id="{9F2088BA-11D0-4C23-B2F5-7B17026745E3}"/>
               </a:ext>
             </a:extLst>
           </p:cNvPr>
@@ -39514,7 +39514,7 @@
           <p:cNvPr id="41" name="object-529">
             <a:extLst xmlns:a="http://schemas.openxmlformats.org/drawingml/2006/main">
               <a:ext uri="{FF2B5EF4-FFF2-40B4-BE49-F238E27FC236}">
-                <a16:creationId xmlns:a16="http://schemas.microsoft.com/office/drawing/2014/main" id="{66CF02CF-9C37-44C5-A738-6685B70C8247}"/>
+                <a16:creationId xmlns:a16="http://schemas.microsoft.com/office/drawing/2014/main" id="{9A107D89-D87B-4251-85EB-7DBE0A8F3710}"/>
               </a:ext>
             </a:extLst>
           </p:cNvPr>
@@ -39579,7 +39579,7 @@
     </p:spTree>
     <p:extLst>
       <p:ext uri="{BB962C8B-B14F-4D97-AF65-F5344CB8AC3E}">
-        <p14:creationId xmlns:p14="http://schemas.microsoft.com/office/powerpoint/2010/main" val="381116058"/>
+        <p14:creationId xmlns:p14="http://schemas.microsoft.com/office/powerpoint/2010/main" val="517716971"/>
       </p:ext>
     </p:extLst>
   </p:cSld>
